--- a/slides/CSC336-Lecture-05-CSS-Fundamentals.pptx
+++ b/slides/CSC336-Lecture-05-CSS-Fundamentals.pptx
@@ -4110,13 +4110,14 @@
         </p:nvPicPr>
         <p:blipFill>
           <a:blip r:embed="rId1"/>
-          <a:srcRect l="0" r="0" t="0" b="0"/>
-          <a:stretch/>
+          <a:stretch>
+            <a:fillRect/>
+          </a:stretch>
         </p:blipFill>
         <p:spPr>
           <a:xfrm>
-            <a:off x="640080" y="2331720"/>
-            <a:ext cx="10911535" cy="3840480"/>
+            <a:off x="2544928" y="3078480"/>
+            <a:ext cx="7101840" cy="2346960"/>
           </a:xfrm>
           <a:prstGeom prst="rect">
             <a:avLst/>
@@ -4394,13 +4395,14 @@
         </p:nvPicPr>
         <p:blipFill>
           <a:blip r:embed="rId1"/>
-          <a:srcRect l="0" r="0" t="0" b="0"/>
-          <a:stretch/>
+          <a:stretch>
+            <a:fillRect/>
+          </a:stretch>
         </p:blipFill>
         <p:spPr>
           <a:xfrm>
-            <a:off x="640080" y="2331720"/>
-            <a:ext cx="10911535" cy="3840480"/>
+            <a:off x="2924141" y="2331720"/>
+            <a:ext cx="6343414" cy="3840480"/>
           </a:xfrm>
           <a:prstGeom prst="rect">
             <a:avLst/>
@@ -4678,13 +4680,14 @@
         </p:nvPicPr>
         <p:blipFill>
           <a:blip r:embed="rId1"/>
-          <a:srcRect l="0" r="0" t="0" b="0"/>
-          <a:stretch/>
+          <a:stretch>
+            <a:fillRect/>
+          </a:stretch>
         </p:blipFill>
         <p:spPr>
           <a:xfrm>
-            <a:off x="640080" y="2331720"/>
-            <a:ext cx="10911535" cy="3840480"/>
+            <a:off x="640080" y="3182776"/>
+            <a:ext cx="10911535" cy="2138368"/>
           </a:xfrm>
           <a:prstGeom prst="rect">
             <a:avLst/>
@@ -6008,13 +6011,14 @@
         </p:nvPicPr>
         <p:blipFill>
           <a:blip r:embed="rId1"/>
-          <a:srcRect l="0" r="0" t="0" b="0"/>
-          <a:stretch/>
+          <a:stretch>
+            <a:fillRect/>
+          </a:stretch>
         </p:blipFill>
         <p:spPr>
           <a:xfrm>
-            <a:off x="640080" y="2331720"/>
-            <a:ext cx="10911535" cy="3840480"/>
+            <a:off x="3771748" y="2514600"/>
+            <a:ext cx="4648200" cy="3474720"/>
           </a:xfrm>
           <a:prstGeom prst="rect">
             <a:avLst/>
@@ -6593,13 +6597,14 @@
         </p:nvPicPr>
         <p:blipFill>
           <a:blip r:embed="rId1"/>
-          <a:srcRect l="0" r="0" t="0" b="0"/>
-          <a:stretch/>
+          <a:stretch>
+            <a:fillRect/>
+          </a:stretch>
         </p:blipFill>
         <p:spPr>
           <a:xfrm>
-            <a:off x="640080" y="2057400"/>
-            <a:ext cx="10911535" cy="4114800"/>
+            <a:off x="640080" y="2519655"/>
+            <a:ext cx="10911535" cy="3190290"/>
           </a:xfrm>
           <a:prstGeom prst="rect">
             <a:avLst/>
@@ -7923,13 +7928,14 @@
         </p:nvPicPr>
         <p:blipFill>
           <a:blip r:embed="rId1"/>
-          <a:srcRect l="0" r="0" t="0" b="0"/>
-          <a:stretch/>
+          <a:stretch>
+            <a:fillRect/>
+          </a:stretch>
         </p:blipFill>
         <p:spPr>
           <a:xfrm>
-            <a:off x="640080" y="2331720"/>
-            <a:ext cx="10911535" cy="3840480"/>
+            <a:off x="3756508" y="3710940"/>
+            <a:ext cx="4678680" cy="1082040"/>
           </a:xfrm>
           <a:prstGeom prst="rect">
             <a:avLst/>
@@ -12822,13 +12828,14 @@
         </p:nvPicPr>
         <p:blipFill>
           <a:blip r:embed="rId1"/>
-          <a:srcRect l="0" r="0" t="0" b="0"/>
-          <a:stretch/>
+          <a:stretch>
+            <a:fillRect/>
+          </a:stretch>
         </p:blipFill>
         <p:spPr>
           <a:xfrm>
-            <a:off x="640080" y="2331720"/>
-            <a:ext cx="10911535" cy="3840480"/>
+            <a:off x="2124813" y="2331720"/>
+            <a:ext cx="7942069" cy="3840480"/>
           </a:xfrm>
           <a:prstGeom prst="rect">
             <a:avLst/>
@@ -13106,13 +13113,14 @@
         </p:nvPicPr>
         <p:blipFill>
           <a:blip r:embed="rId1"/>
-          <a:srcRect l="0" r="0" t="0" b="0"/>
-          <a:stretch/>
+          <a:stretch>
+            <a:fillRect/>
+          </a:stretch>
         </p:blipFill>
         <p:spPr>
           <a:xfrm>
-            <a:off x="640080" y="2331720"/>
-            <a:ext cx="10911535" cy="3840480"/>
+            <a:off x="640080" y="3946659"/>
+            <a:ext cx="10911535" cy="610602"/>
           </a:xfrm>
           <a:prstGeom prst="rect">
             <a:avLst/>
@@ -13390,13 +13398,14 @@
         </p:nvPicPr>
         <p:blipFill>
           <a:blip r:embed="rId1"/>
-          <a:srcRect l="0" r="0" t="0" b="0"/>
-          <a:stretch/>
+          <a:stretch>
+            <a:fillRect/>
+          </a:stretch>
         </p:blipFill>
         <p:spPr>
           <a:xfrm>
-            <a:off x="640080" y="2331720"/>
-            <a:ext cx="10911535" cy="3840480"/>
+            <a:off x="640080" y="3158349"/>
+            <a:ext cx="10911535" cy="2187222"/>
           </a:xfrm>
           <a:prstGeom prst="rect">
             <a:avLst/>
@@ -15792,13 +15801,14 @@
         </p:nvPicPr>
         <p:blipFill>
           <a:blip r:embed="rId1"/>
-          <a:srcRect l="0" r="0" t="0" b="0"/>
-          <a:stretch/>
+          <a:stretch>
+            <a:fillRect/>
+          </a:stretch>
         </p:blipFill>
         <p:spPr>
           <a:xfrm>
-            <a:off x="640080" y="2331720"/>
-            <a:ext cx="10911535" cy="3840480"/>
+            <a:off x="2171548" y="3665220"/>
+            <a:ext cx="7848600" cy="1173480"/>
           </a:xfrm>
           <a:prstGeom prst="rect">
             <a:avLst/>
@@ -16076,13 +16086,14 @@
         </p:nvPicPr>
         <p:blipFill>
           <a:blip r:embed="rId1"/>
-          <a:srcRect l="0" r="0" t="0" b="0"/>
-          <a:stretch/>
+          <a:stretch>
+            <a:fillRect/>
+          </a:stretch>
         </p:blipFill>
         <p:spPr>
           <a:xfrm>
-            <a:off x="640080" y="2331720"/>
-            <a:ext cx="10911535" cy="3840480"/>
+            <a:off x="3611728" y="3528060"/>
+            <a:ext cx="4968240" cy="1447800"/>
           </a:xfrm>
           <a:prstGeom prst="rect">
             <a:avLst/>
@@ -16653,13 +16664,14 @@
         </p:nvPicPr>
         <p:blipFill>
           <a:blip r:embed="rId1"/>
-          <a:srcRect l="0" r="0" t="0" b="0"/>
-          <a:stretch/>
+          <a:stretch>
+            <a:fillRect/>
+          </a:stretch>
         </p:blipFill>
         <p:spPr>
           <a:xfrm>
-            <a:off x="640080" y="2331720"/>
-            <a:ext cx="10911535" cy="3840480"/>
+            <a:off x="640080" y="3943622"/>
+            <a:ext cx="10911535" cy="616676"/>
           </a:xfrm>
           <a:prstGeom prst="rect">
             <a:avLst/>
@@ -16937,13 +16949,14 @@
         </p:nvPicPr>
         <p:blipFill>
           <a:blip r:embed="rId1"/>
-          <a:srcRect l="0" r="0" t="0" b="0"/>
-          <a:stretch/>
+          <a:stretch>
+            <a:fillRect/>
+          </a:stretch>
         </p:blipFill>
         <p:spPr>
           <a:xfrm>
-            <a:off x="640080" y="2331720"/>
-            <a:ext cx="10911535" cy="3840480"/>
+            <a:off x="3886048" y="3528060"/>
+            <a:ext cx="4419600" cy="1447800"/>
           </a:xfrm>
           <a:prstGeom prst="rect">
             <a:avLst/>

--- a/slides/CSC336-Lecture-05-CSS-Fundamentals.pptx
+++ b/slides/CSC336-Lecture-05-CSS-Fundamentals.pptx
@@ -34,9 +34,11 @@
     <p:sldId id="282" r:id="rId28"/>
     <p:sldId id="283" r:id="rId29"/>
     <p:sldId id="284" r:id="rId30"/>
+    <p:sldId id="285" r:id="rId31"/>
+    <p:sldId id="286" r:id="rId32"/>
   </p:sldIdLst>
   <p:notesMasterIdLst>
-    <p:notesMasterId r:id="rId31"/>
+    <p:notesMasterId r:id="rId33"/>
   </p:notesMasterIdLst>
   <p:sldSz cx="12192000" cy="6858000"/>
   <p:notesSz cx="6858000" cy="12192000"/>
@@ -2490,6 +2492,182 @@
             <a:fld id="{F7021451-1387-4CA6-816F-3879F97B5CBC}" type="slidenum">
               <a:rPr lang="en-US"/>
               <a:t>3</a:t>
+            </a:fld>
+            <a:endParaRPr lang="en-US"/>
+          </a:p>
+        </p:txBody>
+      </p:sp>
+    </p:spTree>
+    <p:extLst>
+      <p:ext uri="{BB962C8B-B14F-4D97-AF65-F5344CB8AC3E}">
+        <p14:creationId xmlns:p14="http://schemas.microsoft.com/office/powerpoint/2010/main" val="1024086991"/>
+      </p:ext>
+    </p:extLst>
+  </p:cSld>
+  <p:clrMapOvr>
+    <a:masterClrMapping/>
+  </p:clrMapOvr>
+</p:notes>
+</file>
+
+<file path=ppt/notesSlides/notesSlide30.xml><?xml version="1.0" encoding="utf-8"?>
+<p:notes xmlns:a="http://schemas.openxmlformats.org/drawingml/2006/main" xmlns:r="http://schemas.openxmlformats.org/officeDocument/2006/relationships" xmlns:p="http://schemas.openxmlformats.org/presentationml/2006/main">
+  <p:cSld>
+    <p:spTree>
+      <p:nvGrpSpPr>
+        <p:cNvPr id="1" name=""/>
+        <p:cNvGrpSpPr/>
+        <p:nvPr/>
+      </p:nvGrpSpPr>
+      <p:grpSpPr>
+        <a:xfrm>
+          <a:off x="0" y="0"/>
+          <a:ext cx="0" cy="0"/>
+          <a:chOff x="0" y="0"/>
+          <a:chExt cx="0" cy="0"/>
+        </a:xfrm>
+      </p:grpSpPr>
+      <p:sp>
+        <p:nvSpPr>
+          <p:cNvPr id="2" name="Slide Image Placeholder 1"/>
+          <p:cNvSpPr>
+            <a:spLocks noGrp="1" noRot="1" noChangeAspect="1"/>
+          </p:cNvSpPr>
+          <p:nvPr>
+            <p:ph type="sldImg"/>
+          </p:nvPr>
+        </p:nvSpPr>
+        <p:spPr/>
+      </p:sp>
+      <p:sp>
+        <p:nvSpPr>
+          <p:cNvPr id="3" name="Notes Placeholder 2"/>
+          <p:cNvSpPr>
+            <a:spLocks noGrp="1"/>
+          </p:cNvSpPr>
+          <p:nvPr>
+            <p:ph type="body" idx="1"/>
+          </p:nvPr>
+        </p:nvSpPr>
+        <p:spPr/>
+        <p:txBody>
+          <a:bodyPr/>
+          <a:lstStyle/>
+          <a:p>
+            <a:r>
+              <a:rPr lang="en-US" dirty="0"/>
+              <a:t/>
+            </a:r>
+            <a:endParaRPr lang="en-US" dirty="0"/>
+          </a:p>
+        </p:txBody>
+      </p:sp>
+      <p:sp>
+        <p:nvSpPr>
+          <p:cNvPr id="4" name="Slide Number Placeholder 3"/>
+          <p:cNvSpPr>
+            <a:spLocks noGrp="1"/>
+          </p:cNvSpPr>
+          <p:nvPr>
+            <p:ph type="sldNum" sz="quarter" idx="10"/>
+          </p:nvPr>
+        </p:nvSpPr>
+        <p:spPr/>
+        <p:txBody>
+          <a:bodyPr/>
+          <a:lstStyle/>
+          <a:p>
+            <a:fld id="{F7021451-1387-4CA6-816F-3879F97B5CBC}" type="slidenum">
+              <a:rPr lang="en-US"/>
+              <a:t>30</a:t>
+            </a:fld>
+            <a:endParaRPr lang="en-US"/>
+          </a:p>
+        </p:txBody>
+      </p:sp>
+    </p:spTree>
+    <p:extLst>
+      <p:ext uri="{BB962C8B-B14F-4D97-AF65-F5344CB8AC3E}">
+        <p14:creationId xmlns:p14="http://schemas.microsoft.com/office/powerpoint/2010/main" val="1024086991"/>
+      </p:ext>
+    </p:extLst>
+  </p:cSld>
+  <p:clrMapOvr>
+    <a:masterClrMapping/>
+  </p:clrMapOvr>
+</p:notes>
+</file>
+
+<file path=ppt/notesSlides/notesSlide31.xml><?xml version="1.0" encoding="utf-8"?>
+<p:notes xmlns:a="http://schemas.openxmlformats.org/drawingml/2006/main" xmlns:r="http://schemas.openxmlformats.org/officeDocument/2006/relationships" xmlns:p="http://schemas.openxmlformats.org/presentationml/2006/main">
+  <p:cSld>
+    <p:spTree>
+      <p:nvGrpSpPr>
+        <p:cNvPr id="1" name=""/>
+        <p:cNvGrpSpPr/>
+        <p:nvPr/>
+      </p:nvGrpSpPr>
+      <p:grpSpPr>
+        <a:xfrm>
+          <a:off x="0" y="0"/>
+          <a:ext cx="0" cy="0"/>
+          <a:chOff x="0" y="0"/>
+          <a:chExt cx="0" cy="0"/>
+        </a:xfrm>
+      </p:grpSpPr>
+      <p:sp>
+        <p:nvSpPr>
+          <p:cNvPr id="2" name="Slide Image Placeholder 1"/>
+          <p:cNvSpPr>
+            <a:spLocks noGrp="1" noRot="1" noChangeAspect="1"/>
+          </p:cNvSpPr>
+          <p:nvPr>
+            <p:ph type="sldImg"/>
+          </p:nvPr>
+        </p:nvSpPr>
+        <p:spPr/>
+      </p:sp>
+      <p:sp>
+        <p:nvSpPr>
+          <p:cNvPr id="3" name="Notes Placeholder 2"/>
+          <p:cNvSpPr>
+            <a:spLocks noGrp="1"/>
+          </p:cNvSpPr>
+          <p:nvPr>
+            <p:ph type="body" idx="1"/>
+          </p:nvPr>
+        </p:nvSpPr>
+        <p:spPr/>
+        <p:txBody>
+          <a:bodyPr/>
+          <a:lstStyle/>
+          <a:p>
+            <a:r>
+              <a:rPr lang="en-US" dirty="0"/>
+              <a:t/>
+            </a:r>
+            <a:endParaRPr lang="en-US" dirty="0"/>
+          </a:p>
+        </p:txBody>
+      </p:sp>
+      <p:sp>
+        <p:nvSpPr>
+          <p:cNvPr id="4" name="Slide Number Placeholder 3"/>
+          <p:cNvSpPr>
+            <a:spLocks noGrp="1"/>
+          </p:cNvSpPr>
+          <p:nvPr>
+            <p:ph type="sldNum" sz="quarter" idx="10"/>
+          </p:nvPr>
+        </p:nvSpPr>
+        <p:spPr/>
+        <p:txBody>
+          <a:bodyPr/>
+          <a:lstStyle/>
+          <a:p>
+            <a:fld id="{F7021451-1387-4CA6-816F-3879F97B5CBC}" type="slidenum">
+              <a:rPr lang="en-US"/>
+              <a:t>31</a:t>
             </a:fld>
             <a:endParaRPr lang="en-US"/>
           </a:p>
@@ -4837,7 +5015,7 @@
                 <a:ea typeface="Calibri" pitchFamily="34" charset="-122"/>
                 <a:cs typeface="Calibri" pitchFamily="34" charset="-120"/>
               </a:rPr>
-              <a:t>STATES</a:t>
+              <a:t>SELECTORS</a:t>
             </a:r>
             <a:endParaRPr lang="en-US" sz="1300" dirty="0"/>
           </a:p>
@@ -4876,6 +5054,708 @@
                 <a:ea typeface="Cambria" pitchFamily="34" charset="-122"/>
                 <a:cs typeface="Cambria" pitchFamily="34" charset="-120"/>
               </a:rPr>
+              <a:t>The Universal Selector</a:t>
+            </a:r>
+            <a:endParaRPr lang="en-US" sz="3400" dirty="0"/>
+          </a:p>
+        </p:txBody>
+      </p:sp>
+      <p:sp>
+        <p:nvSpPr>
+          <p:cNvPr id="4" name="Shape 2"/>
+          <p:cNvSpPr/>
+          <p:nvPr/>
+        </p:nvSpPr>
+        <p:spPr>
+          <a:xfrm>
+            <a:off x="640080" y="1965960"/>
+            <a:ext cx="10911535" cy="2606040"/>
+          </a:xfrm>
+          <a:prstGeom prst="roundRect">
+            <a:avLst>
+              <a:gd name="adj" fmla="val 2807"/>
+            </a:avLst>
+          </a:prstGeom>
+          <a:solidFill>
+            <a:srgbClr val="1E1E4C"/>
+          </a:solidFill>
+          <a:ln/>
+        </p:spPr>
+      </p:sp>
+      <p:sp>
+        <p:nvSpPr>
+          <p:cNvPr id="5" name="Text 3"/>
+          <p:cNvSpPr txBox="1"/>
+          <p:nvPr/>
+        </p:nvSpPr>
+        <p:spPr>
+          <a:xfrm>
+            <a:off x="960120" y="2194560"/>
+            <a:ext cx="10271455" cy="2148840"/>
+          </a:xfrm>
+          <a:prstGeom prst="rect">
+            <a:avLst/>
+          </a:prstGeom>
+          <a:noFill/>
+          <a:ln/>
+        </p:spPr>
+        <p:txBody>
+          <a:bodyPr wrap="square" lIns="0" tIns="0" rIns="0" bIns="0" rtlCol="0" anchor="t"/>
+          <a:lstStyle/>
+          <a:p>
+            <a:pPr indent="0" marL="0">
+              <a:lnSpc>
+                <a:spcPct val="125000"/>
+              </a:lnSpc>
+              <a:buNone/>
+            </a:pPr>
+            <a:r>
+              <a:rPr lang="en-US" sz="1400" dirty="0">
+                <a:solidFill>
+                  <a:srgbClr val="C9D3F5"/>
+                </a:solidFill>
+                <a:latin typeface="Courier New" pitchFamily="34" charset="0"/>
+                <a:ea typeface="Courier New" pitchFamily="34" charset="-122"/>
+                <a:cs typeface="Courier New" pitchFamily="34" charset="-120"/>
+              </a:rPr>
+              <a:t>* {</a:t>
+            </a:r>
+            <a:endParaRPr lang="en-US" sz="1400" dirty="0"/>
+          </a:p>
+          <a:p>
+            <a:pPr indent="0" marL="0">
+              <a:lnSpc>
+                <a:spcPct val="125000"/>
+              </a:lnSpc>
+              <a:buNone/>
+            </a:pPr>
+            <a:r>
+              <a:rPr lang="en-US" sz="1400" dirty="0">
+                <a:solidFill>
+                  <a:srgbClr val="C9D3F5"/>
+                </a:solidFill>
+                <a:latin typeface="Courier New" pitchFamily="34" charset="0"/>
+                <a:ea typeface="Courier New" pitchFamily="34" charset="-122"/>
+                <a:cs typeface="Courier New" pitchFamily="34" charset="-120"/>
+              </a:rPr>
+              <a:t>  margin: 0;</a:t>
+            </a:r>
+            <a:endParaRPr lang="en-US" sz="1400" dirty="0"/>
+          </a:p>
+          <a:p>
+            <a:pPr indent="0" marL="0">
+              <a:lnSpc>
+                <a:spcPct val="125000"/>
+              </a:lnSpc>
+              <a:buNone/>
+            </a:pPr>
+            <a:r>
+              <a:rPr lang="en-US" sz="1400" dirty="0">
+                <a:solidFill>
+                  <a:srgbClr val="C9D3F5"/>
+                </a:solidFill>
+                <a:latin typeface="Courier New" pitchFamily="34" charset="0"/>
+                <a:ea typeface="Courier New" pitchFamily="34" charset="-122"/>
+                <a:cs typeface="Courier New" pitchFamily="34" charset="-120"/>
+              </a:rPr>
+              <a:t>  padding: 0;</a:t>
+            </a:r>
+            <a:endParaRPr lang="en-US" sz="1400" dirty="0"/>
+          </a:p>
+          <a:p>
+            <a:pPr indent="0" marL="0">
+              <a:lnSpc>
+                <a:spcPct val="125000"/>
+              </a:lnSpc>
+              <a:buNone/>
+            </a:pPr>
+            <a:r>
+              <a:rPr lang="en-US" sz="1400" dirty="0">
+                <a:solidFill>
+                  <a:srgbClr val="C9D3F5"/>
+                </a:solidFill>
+                <a:latin typeface="Courier New" pitchFamily="34" charset="0"/>
+                <a:ea typeface="Courier New" pitchFamily="34" charset="-122"/>
+                <a:cs typeface="Courier New" pitchFamily="34" charset="-120"/>
+              </a:rPr>
+              <a:t>  box-sizing: border-box;</a:t>
+            </a:r>
+            <a:endParaRPr lang="en-US" sz="1400" dirty="0"/>
+          </a:p>
+          <a:p>
+            <a:pPr indent="0" marL="0">
+              <a:lnSpc>
+                <a:spcPct val="125000"/>
+              </a:lnSpc>
+              <a:buNone/>
+            </a:pPr>
+            <a:r>
+              <a:rPr lang="en-US" sz="1400" dirty="0">
+                <a:solidFill>
+                  <a:srgbClr val="C9D3F5"/>
+                </a:solidFill>
+                <a:latin typeface="Courier New" pitchFamily="34" charset="0"/>
+                <a:ea typeface="Courier New" pitchFamily="34" charset="-122"/>
+                <a:cs typeface="Courier New" pitchFamily="34" charset="-120"/>
+              </a:rPr>
+              <a:t>}</a:t>
+            </a:r>
+            <a:endParaRPr lang="en-US" sz="1400" dirty="0"/>
+          </a:p>
+        </p:txBody>
+      </p:sp>
+      <p:sp>
+        <p:nvSpPr>
+          <p:cNvPr id="6" name="Text 4"/>
+          <p:cNvSpPr txBox="1"/>
+          <p:nvPr/>
+        </p:nvSpPr>
+        <p:spPr>
+          <a:xfrm>
+            <a:off x="640080" y="4800600"/>
+            <a:ext cx="10911535" cy="1463040"/>
+          </a:xfrm>
+          <a:prstGeom prst="rect">
+            <a:avLst/>
+          </a:prstGeom>
+          <a:noFill/>
+          <a:ln/>
+        </p:spPr>
+        <p:txBody>
+          <a:bodyPr wrap="square" lIns="0" tIns="0" rIns="0" bIns="0" rtlCol="0" anchor="t"/>
+          <a:lstStyle/>
+          <a:p>
+            <a:pPr indent="0" marL="0">
+              <a:buNone/>
+            </a:pPr>
+            <a:r>
+              <a:rPr lang="en-US" sz="1300" dirty="0">
+                <a:solidFill>
+                  <a:srgbClr val="26262F"/>
+                </a:solidFill>
+                <a:latin typeface="Calibri" pitchFamily="34" charset="0"/>
+                <a:ea typeface="Calibri" pitchFamily="34" charset="-122"/>
+                <a:cs typeface="Calibri" pitchFamily="34" charset="-120"/>
+              </a:rPr>
+              <a:t>* matches every single element on the page — most commonly seen in a "CSS reset" at the very top of a stylesheet.</a:t>
+            </a:r>
+            <a:endParaRPr lang="en-US" sz="1300" dirty="0"/>
+          </a:p>
+        </p:txBody>
+      </p:sp>
+      <p:sp>
+        <p:nvSpPr>
+          <p:cNvPr id="7" name="Text 5"/>
+          <p:cNvSpPr txBox="1"/>
+          <p:nvPr/>
+        </p:nvSpPr>
+        <p:spPr>
+          <a:xfrm>
+            <a:off x="640080" y="6446520"/>
+            <a:ext cx="8686800" cy="292608"/>
+          </a:xfrm>
+          <a:prstGeom prst="rect">
+            <a:avLst/>
+          </a:prstGeom>
+          <a:noFill/>
+          <a:ln/>
+        </p:spPr>
+        <p:txBody>
+          <a:bodyPr wrap="square" lIns="0" tIns="0" rIns="0" bIns="0" rtlCol="0" anchor="ctr"/>
+          <a:lstStyle/>
+          <a:p>
+            <a:pPr algn="l" indent="0" marL="0">
+              <a:buNone/>
+            </a:pPr>
+            <a:r>
+              <a:rPr lang="en-US" sz="900" dirty="0">
+                <a:solidFill>
+                  <a:srgbClr val="5D5D72"/>
+                </a:solidFill>
+                <a:latin typeface="Calibri" pitchFamily="34" charset="0"/>
+                <a:ea typeface="Calibri" pitchFamily="34" charset="-122"/>
+                <a:cs typeface="Calibri" pitchFamily="34" charset="-120"/>
+              </a:rPr>
+              <a:t>Usman Akram  •  COMSATS University Islamabad</a:t>
+            </a:r>
+            <a:endParaRPr lang="en-US" sz="900" dirty="0"/>
+          </a:p>
+        </p:txBody>
+      </p:sp>
+      <p:sp>
+        <p:nvSpPr>
+          <p:cNvPr id="8" name="Text 6"/>
+          <p:cNvSpPr txBox="1"/>
+          <p:nvPr/>
+        </p:nvSpPr>
+        <p:spPr>
+          <a:xfrm>
+            <a:off x="11155680" y="6446520"/>
+            <a:ext cx="457200" cy="292608"/>
+          </a:xfrm>
+          <a:prstGeom prst="rect">
+            <a:avLst/>
+          </a:prstGeom>
+          <a:noFill/>
+          <a:ln/>
+        </p:spPr>
+        <p:txBody>
+          <a:bodyPr wrap="square" lIns="0" tIns="0" rIns="0" bIns="0" rtlCol="0" anchor="ctr"/>
+          <a:lstStyle/>
+          <a:p>
+            <a:pPr algn="r" indent="0" marL="0">
+              <a:buNone/>
+            </a:pPr>
+            <a:r>
+              <a:rPr lang="en-US" sz="900" dirty="0">
+                <a:solidFill>
+                  <a:srgbClr val="5D5D72"/>
+                </a:solidFill>
+                <a:latin typeface="Calibri" pitchFamily="34" charset="0"/>
+                <a:ea typeface="Calibri" pitchFamily="34" charset="-122"/>
+                <a:cs typeface="Calibri" pitchFamily="34" charset="-120"/>
+              </a:rPr>
+              <a:t>14</a:t>
+            </a:r>
+            <a:endParaRPr lang="en-US" sz="900" dirty="0"/>
+          </a:p>
+        </p:txBody>
+      </p:sp>
+    </p:spTree>
+  </p:cSld>
+  <p:clrMapOvr>
+    <a:masterClrMapping/>
+  </p:clrMapOvr>
+</p:sld>
+</file>
+
+<file path=ppt/slides/slide15.xml><?xml version="1.0" encoding="utf-8"?>
+<p:sld xmlns:a="http://schemas.openxmlformats.org/drawingml/2006/main" xmlns:r="http://schemas.openxmlformats.org/officeDocument/2006/relationships" xmlns:p="http://schemas.openxmlformats.org/presentationml/2006/main">
+  <p:cSld name="Slide 15">
+    <p:bg>
+      <p:bgPr>
+        <a:solidFill>
+          <a:srgbClr val="FFFFFF"/>
+        </a:solidFill>
+      </p:bgPr>
+    </p:bg>
+    <p:spTree>
+      <p:nvGrpSpPr>
+        <p:cNvPr id="1" name=""/>
+        <p:cNvGrpSpPr/>
+        <p:nvPr/>
+      </p:nvGrpSpPr>
+      <p:grpSpPr>
+        <a:xfrm>
+          <a:off x="0" y="0"/>
+          <a:ext cx="0" cy="0"/>
+          <a:chOff x="0" y="0"/>
+          <a:chExt cx="0" cy="0"/>
+        </a:xfrm>
+      </p:grpSpPr>
+      <p:sp>
+        <p:nvSpPr>
+          <p:cNvPr id="2" name="Text 0"/>
+          <p:cNvSpPr txBox="1"/>
+          <p:nvPr/>
+        </p:nvSpPr>
+        <p:spPr>
+          <a:xfrm>
+            <a:off x="640080" y="457200"/>
+            <a:ext cx="10058400" cy="365760"/>
+          </a:xfrm>
+          <a:prstGeom prst="rect">
+            <a:avLst/>
+          </a:prstGeom>
+          <a:noFill/>
+          <a:ln/>
+        </p:spPr>
+        <p:txBody>
+          <a:bodyPr wrap="square" lIns="0" tIns="0" rIns="0" bIns="0" rtlCol="0" anchor="ctr"/>
+          <a:lstStyle/>
+          <a:p>
+            <a:pPr algn="l" indent="0" marL="0">
+              <a:buNone/>
+            </a:pPr>
+            <a:r>
+              <a:rPr lang="en-US" sz="1300" b="1" spc="300" kern="0" dirty="0">
+                <a:solidFill>
+                  <a:srgbClr val="FF8A3D"/>
+                </a:solidFill>
+                <a:latin typeface="Calibri" pitchFamily="34" charset="0"/>
+                <a:ea typeface="Calibri" pitchFamily="34" charset="-122"/>
+                <a:cs typeface="Calibri" pitchFamily="34" charset="-120"/>
+              </a:rPr>
+              <a:t>SELECTORS</a:t>
+            </a:r>
+            <a:endParaRPr lang="en-US" sz="1300" dirty="0"/>
+          </a:p>
+        </p:txBody>
+      </p:sp>
+      <p:sp>
+        <p:nvSpPr>
+          <p:cNvPr id="3" name="Text 1"/>
+          <p:cNvSpPr txBox="1"/>
+          <p:nvPr/>
+        </p:nvSpPr>
+        <p:spPr>
+          <a:xfrm>
+            <a:off x="640080" y="841248"/>
+            <a:ext cx="10881360" cy="914400"/>
+          </a:xfrm>
+          <a:prstGeom prst="rect">
+            <a:avLst/>
+          </a:prstGeom>
+          <a:noFill/>
+          <a:ln/>
+        </p:spPr>
+        <p:txBody>
+          <a:bodyPr wrap="square" lIns="0" tIns="0" rIns="0" bIns="0" rtlCol="0" anchor="ctr"/>
+          <a:lstStyle/>
+          <a:p>
+            <a:pPr algn="l" indent="0" marL="0">
+              <a:buNone/>
+            </a:pPr>
+            <a:r>
+              <a:rPr lang="en-US" sz="3400" b="1" dirty="0">
+                <a:solidFill>
+                  <a:srgbClr val="2B2B7A"/>
+                </a:solidFill>
+                <a:latin typeface="Cambria" pitchFamily="34" charset="0"/>
+                <a:ea typeface="Cambria" pitchFamily="34" charset="-122"/>
+                <a:cs typeface="Cambria" pitchFamily="34" charset="-120"/>
+              </a:rPr>
+              <a:t>Combinators: Child and Sibling</a:t>
+            </a:r>
+            <a:endParaRPr lang="en-US" sz="3400" dirty="0"/>
+          </a:p>
+        </p:txBody>
+      </p:sp>
+      <p:sp>
+        <p:nvSpPr>
+          <p:cNvPr id="4" name="Shape 2"/>
+          <p:cNvSpPr/>
+          <p:nvPr/>
+        </p:nvSpPr>
+        <p:spPr>
+          <a:xfrm>
+            <a:off x="640080" y="1965960"/>
+            <a:ext cx="10911535" cy="1837944"/>
+          </a:xfrm>
+          <a:prstGeom prst="roundRect">
+            <a:avLst>
+              <a:gd name="adj" fmla="val 3980"/>
+            </a:avLst>
+          </a:prstGeom>
+          <a:solidFill>
+            <a:srgbClr val="1E1E4C"/>
+          </a:solidFill>
+          <a:ln/>
+        </p:spPr>
+      </p:sp>
+      <p:sp>
+        <p:nvSpPr>
+          <p:cNvPr id="5" name="Text 3"/>
+          <p:cNvSpPr txBox="1"/>
+          <p:nvPr/>
+        </p:nvSpPr>
+        <p:spPr>
+          <a:xfrm>
+            <a:off x="960120" y="2194560"/>
+            <a:ext cx="10271455" cy="1380744"/>
+          </a:xfrm>
+          <a:prstGeom prst="rect">
+            <a:avLst/>
+          </a:prstGeom>
+          <a:noFill/>
+          <a:ln/>
+        </p:spPr>
+        <p:txBody>
+          <a:bodyPr wrap="square" lIns="0" tIns="0" rIns="0" bIns="0" rtlCol="0" anchor="t"/>
+          <a:lstStyle/>
+          <a:p>
+            <a:pPr indent="0" marL="0">
+              <a:lnSpc>
+                <a:spcPct val="125000"/>
+              </a:lnSpc>
+              <a:buNone/>
+            </a:pPr>
+            <a:r>
+              <a:rPr lang="en-US" sz="1400" dirty="0">
+                <a:solidFill>
+                  <a:srgbClr val="C9D3F5"/>
+                </a:solidFill>
+                <a:latin typeface="Courier New" pitchFamily="34" charset="0"/>
+                <a:ea typeface="Courier New" pitchFamily="34" charset="-122"/>
+                <a:cs typeface="Courier New" pitchFamily="34" charset="-120"/>
+              </a:rPr>
+              <a:t>nav &gt; a   { color: navy; }    /* only DIRECT children, not grandchildren   */</a:t>
+            </a:r>
+            <a:endParaRPr lang="en-US" sz="1400" dirty="0"/>
+          </a:p>
+          <a:p>
+            <a:pPr indent="0" marL="0">
+              <a:lnSpc>
+                <a:spcPct val="125000"/>
+              </a:lnSpc>
+              <a:buNone/>
+            </a:pPr>
+            <a:r>
+              <a:rPr lang="en-US" sz="1400" dirty="0">
+                <a:solidFill>
+                  <a:srgbClr val="C9D3F5"/>
+                </a:solidFill>
+                <a:latin typeface="Courier New" pitchFamily="34" charset="0"/>
+                <a:ea typeface="Courier New" pitchFamily="34" charset="-122"/>
+                <a:cs typeface="Courier New" pitchFamily="34" charset="-120"/>
+              </a:rPr>
+              <a:t>h2 + p    { font-weight: bold; } /* the paragraph immediately after an h2  */</a:t>
+            </a:r>
+            <a:endParaRPr lang="en-US" sz="1400" dirty="0"/>
+          </a:p>
+          <a:p>
+            <a:pPr indent="0" marL="0">
+              <a:lnSpc>
+                <a:spcPct val="125000"/>
+              </a:lnSpc>
+              <a:buNone/>
+            </a:pPr>
+            <a:r>
+              <a:rPr lang="en-US" sz="1400" dirty="0">
+                <a:solidFill>
+                  <a:srgbClr val="C9D3F5"/>
+                </a:solidFill>
+                <a:latin typeface="Courier New" pitchFamily="34" charset="0"/>
+                <a:ea typeface="Courier New" pitchFamily="34" charset="-122"/>
+                <a:cs typeface="Courier New" pitchFamily="34" charset="-120"/>
+              </a:rPr>
+              <a:t>h2 ~ p    { color: gray; }       /* every p that follows an h2, not just one */</a:t>
+            </a:r>
+            <a:endParaRPr lang="en-US" sz="1400" dirty="0"/>
+          </a:p>
+        </p:txBody>
+      </p:sp>
+      <p:sp>
+        <p:nvSpPr>
+          <p:cNvPr id="6" name="Text 4"/>
+          <p:cNvSpPr txBox="1"/>
+          <p:nvPr/>
+        </p:nvSpPr>
+        <p:spPr>
+          <a:xfrm>
+            <a:off x="640080" y="4032504"/>
+            <a:ext cx="10911535" cy="2231136"/>
+          </a:xfrm>
+          <a:prstGeom prst="rect">
+            <a:avLst/>
+          </a:prstGeom>
+          <a:noFill/>
+          <a:ln/>
+        </p:spPr>
+        <p:txBody>
+          <a:bodyPr wrap="square" lIns="0" tIns="0" rIns="0" bIns="0" rtlCol="0" anchor="t"/>
+          <a:lstStyle/>
+          <a:p>
+            <a:pPr indent="0" marL="0">
+              <a:buNone/>
+            </a:pPr>
+            <a:r>
+              <a:rPr lang="en-US" sz="1300" dirty="0">
+                <a:solidFill>
+                  <a:srgbClr val="26262F"/>
+                </a:solidFill>
+                <a:latin typeface="Calibri" pitchFamily="34" charset="0"/>
+                <a:ea typeface="Calibri" pitchFamily="34" charset="-122"/>
+                <a:cs typeface="Calibri" pitchFamily="34" charset="-120"/>
+              </a:rPr>
+              <a:t>&gt; is stricter than a plain descendant selector (space) — it skips anything nested more than one level deep.</a:t>
+            </a:r>
+            <a:endParaRPr lang="en-US" sz="1300" dirty="0"/>
+          </a:p>
+        </p:txBody>
+      </p:sp>
+      <p:sp>
+        <p:nvSpPr>
+          <p:cNvPr id="7" name="Text 5"/>
+          <p:cNvSpPr txBox="1"/>
+          <p:nvPr/>
+        </p:nvSpPr>
+        <p:spPr>
+          <a:xfrm>
+            <a:off x="640080" y="6446520"/>
+            <a:ext cx="8686800" cy="292608"/>
+          </a:xfrm>
+          <a:prstGeom prst="rect">
+            <a:avLst/>
+          </a:prstGeom>
+          <a:noFill/>
+          <a:ln/>
+        </p:spPr>
+        <p:txBody>
+          <a:bodyPr wrap="square" lIns="0" tIns="0" rIns="0" bIns="0" rtlCol="0" anchor="ctr"/>
+          <a:lstStyle/>
+          <a:p>
+            <a:pPr algn="l" indent="0" marL="0">
+              <a:buNone/>
+            </a:pPr>
+            <a:r>
+              <a:rPr lang="en-US" sz="900" dirty="0">
+                <a:solidFill>
+                  <a:srgbClr val="5D5D72"/>
+                </a:solidFill>
+                <a:latin typeface="Calibri" pitchFamily="34" charset="0"/>
+                <a:ea typeface="Calibri" pitchFamily="34" charset="-122"/>
+                <a:cs typeface="Calibri" pitchFamily="34" charset="-120"/>
+              </a:rPr>
+              <a:t>Usman Akram  •  COMSATS University Islamabad</a:t>
+            </a:r>
+            <a:endParaRPr lang="en-US" sz="900" dirty="0"/>
+          </a:p>
+        </p:txBody>
+      </p:sp>
+      <p:sp>
+        <p:nvSpPr>
+          <p:cNvPr id="8" name="Text 6"/>
+          <p:cNvSpPr txBox="1"/>
+          <p:nvPr/>
+        </p:nvSpPr>
+        <p:spPr>
+          <a:xfrm>
+            <a:off x="11155680" y="6446520"/>
+            <a:ext cx="457200" cy="292608"/>
+          </a:xfrm>
+          <a:prstGeom prst="rect">
+            <a:avLst/>
+          </a:prstGeom>
+          <a:noFill/>
+          <a:ln/>
+        </p:spPr>
+        <p:txBody>
+          <a:bodyPr wrap="square" lIns="0" tIns="0" rIns="0" bIns="0" rtlCol="0" anchor="ctr"/>
+          <a:lstStyle/>
+          <a:p>
+            <a:pPr algn="r" indent="0" marL="0">
+              <a:buNone/>
+            </a:pPr>
+            <a:r>
+              <a:rPr lang="en-US" sz="900" dirty="0">
+                <a:solidFill>
+                  <a:srgbClr val="5D5D72"/>
+                </a:solidFill>
+                <a:latin typeface="Calibri" pitchFamily="34" charset="0"/>
+                <a:ea typeface="Calibri" pitchFamily="34" charset="-122"/>
+                <a:cs typeface="Calibri" pitchFamily="34" charset="-120"/>
+              </a:rPr>
+              <a:t>15</a:t>
+            </a:r>
+            <a:endParaRPr lang="en-US" sz="900" dirty="0"/>
+          </a:p>
+        </p:txBody>
+      </p:sp>
+    </p:spTree>
+  </p:cSld>
+  <p:clrMapOvr>
+    <a:masterClrMapping/>
+  </p:clrMapOvr>
+</p:sld>
+</file>
+
+<file path=ppt/slides/slide16.xml><?xml version="1.0" encoding="utf-8"?>
+<p:sld xmlns:a="http://schemas.openxmlformats.org/drawingml/2006/main" xmlns:r="http://schemas.openxmlformats.org/officeDocument/2006/relationships" xmlns:p="http://schemas.openxmlformats.org/presentationml/2006/main">
+  <p:cSld name="Slide 16">
+    <p:bg>
+      <p:bgPr>
+        <a:solidFill>
+          <a:srgbClr val="FFFFFF"/>
+        </a:solidFill>
+      </p:bgPr>
+    </p:bg>
+    <p:spTree>
+      <p:nvGrpSpPr>
+        <p:cNvPr id="1" name=""/>
+        <p:cNvGrpSpPr/>
+        <p:nvPr/>
+      </p:nvGrpSpPr>
+      <p:grpSpPr>
+        <a:xfrm>
+          <a:off x="0" y="0"/>
+          <a:ext cx="0" cy="0"/>
+          <a:chOff x="0" y="0"/>
+          <a:chExt cx="0" cy="0"/>
+        </a:xfrm>
+      </p:grpSpPr>
+      <p:sp>
+        <p:nvSpPr>
+          <p:cNvPr id="2" name="Text 0"/>
+          <p:cNvSpPr txBox="1"/>
+          <p:nvPr/>
+        </p:nvSpPr>
+        <p:spPr>
+          <a:xfrm>
+            <a:off x="640080" y="457200"/>
+            <a:ext cx="10058400" cy="365760"/>
+          </a:xfrm>
+          <a:prstGeom prst="rect">
+            <a:avLst/>
+          </a:prstGeom>
+          <a:noFill/>
+          <a:ln/>
+        </p:spPr>
+        <p:txBody>
+          <a:bodyPr wrap="square" lIns="0" tIns="0" rIns="0" bIns="0" rtlCol="0" anchor="ctr"/>
+          <a:lstStyle/>
+          <a:p>
+            <a:pPr algn="l" indent="0" marL="0">
+              <a:buNone/>
+            </a:pPr>
+            <a:r>
+              <a:rPr lang="en-US" sz="1300" b="1" spc="300" kern="0" dirty="0">
+                <a:solidFill>
+                  <a:srgbClr val="FF8A3D"/>
+                </a:solidFill>
+                <a:latin typeface="Calibri" pitchFamily="34" charset="0"/>
+                <a:ea typeface="Calibri" pitchFamily="34" charset="-122"/>
+                <a:cs typeface="Calibri" pitchFamily="34" charset="-120"/>
+              </a:rPr>
+              <a:t>STATES</a:t>
+            </a:r>
+            <a:endParaRPr lang="en-US" sz="1300" dirty="0"/>
+          </a:p>
+        </p:txBody>
+      </p:sp>
+      <p:sp>
+        <p:nvSpPr>
+          <p:cNvPr id="3" name="Text 1"/>
+          <p:cNvSpPr txBox="1"/>
+          <p:nvPr/>
+        </p:nvSpPr>
+        <p:spPr>
+          <a:xfrm>
+            <a:off x="640080" y="841248"/>
+            <a:ext cx="10881360" cy="914400"/>
+          </a:xfrm>
+          <a:prstGeom prst="rect">
+            <a:avLst/>
+          </a:prstGeom>
+          <a:noFill/>
+          <a:ln/>
+        </p:spPr>
+        <p:txBody>
+          <a:bodyPr wrap="square" lIns="0" tIns="0" rIns="0" bIns="0" rtlCol="0" anchor="ctr"/>
+          <a:lstStyle/>
+          <a:p>
+            <a:pPr algn="l" indent="0" marL="0">
+              <a:buNone/>
+            </a:pPr>
+            <a:r>
+              <a:rPr lang="en-US" sz="3400" b="1" dirty="0">
+                <a:solidFill>
+                  <a:srgbClr val="2B2B7A"/>
+                </a:solidFill>
+                <a:latin typeface="Cambria" pitchFamily="34" charset="0"/>
+                <a:ea typeface="Cambria" pitchFamily="34" charset="-122"/>
+                <a:cs typeface="Cambria" pitchFamily="34" charset="-120"/>
+              </a:rPr>
               <a:t>Common Pseudo-Classes</a:t>
             </a:r>
             <a:endParaRPr lang="en-US" sz="3400" dirty="0"/>
@@ -4884,7 +5764,7 @@
       </p:sp>
       <p:graphicFrame>
         <p:nvGraphicFramePr>
-          <p:cNvPr id="15" name="Table 0"/>
+          <p:cNvPr id="17" name="Table 0"/>
           <p:cNvGraphicFramePr>
             <a:graphicFrameLocks noGrp="1"/>
           </p:cNvGraphicFramePr>
@@ -5812,631 +6692,6 @@
                 <a:ea typeface="Calibri" pitchFamily="34" charset="-122"/>
                 <a:cs typeface="Calibri" pitchFamily="34" charset="-120"/>
               </a:rPr>
-              <a:t>14</a:t>
-            </a:r>
-            <a:endParaRPr lang="en-US" sz="900" dirty="0"/>
-          </a:p>
-        </p:txBody>
-      </p:sp>
-    </p:spTree>
-  </p:cSld>
-  <p:clrMapOvr>
-    <a:masterClrMapping/>
-  </p:clrMapOvr>
-</p:sld>
-</file>
-
-<file path=ppt/slides/slide15.xml><?xml version="1.0" encoding="utf-8"?>
-<p:sld xmlns:a="http://schemas.openxmlformats.org/drawingml/2006/main" xmlns:r="http://schemas.openxmlformats.org/officeDocument/2006/relationships" xmlns:p="http://schemas.openxmlformats.org/presentationml/2006/main">
-  <p:cSld name="Slide 15">
-    <p:bg>
-      <p:bgPr>
-        <a:solidFill>
-          <a:srgbClr val="FFFFFF"/>
-        </a:solidFill>
-      </p:bgPr>
-    </p:bg>
-    <p:spTree>
-      <p:nvGrpSpPr>
-        <p:cNvPr id="1" name=""/>
-        <p:cNvGrpSpPr/>
-        <p:nvPr/>
-      </p:nvGrpSpPr>
-      <p:grpSpPr>
-        <a:xfrm>
-          <a:off x="0" y="0"/>
-          <a:ext cx="0" cy="0"/>
-          <a:chOff x="0" y="0"/>
-          <a:chExt cx="0" cy="0"/>
-        </a:xfrm>
-      </p:grpSpPr>
-      <p:sp>
-        <p:nvSpPr>
-          <p:cNvPr id="2" name="Text 0"/>
-          <p:cNvSpPr txBox="1"/>
-          <p:nvPr/>
-        </p:nvSpPr>
-        <p:spPr>
-          <a:xfrm>
-            <a:off x="640080" y="457200"/>
-            <a:ext cx="10058400" cy="365760"/>
-          </a:xfrm>
-          <a:prstGeom prst="rect">
-            <a:avLst/>
-          </a:prstGeom>
-          <a:noFill/>
-          <a:ln/>
-        </p:spPr>
-        <p:txBody>
-          <a:bodyPr wrap="square" lIns="0" tIns="0" rIns="0" bIns="0" rtlCol="0" anchor="ctr"/>
-          <a:lstStyle/>
-          <a:p>
-            <a:pPr algn="l" indent="0" marL="0">
-              <a:buNone/>
-            </a:pPr>
-            <a:r>
-              <a:rPr lang="en-US" sz="1300" b="1" spc="300" kern="0" dirty="0">
-                <a:solidFill>
-                  <a:srgbClr val="FF8A3D"/>
-                </a:solidFill>
-                <a:latin typeface="Calibri" pitchFamily="34" charset="0"/>
-                <a:ea typeface="Calibri" pitchFamily="34" charset="-122"/>
-                <a:cs typeface="Calibri" pitchFamily="34" charset="-120"/>
-              </a:rPr>
-              <a:t>STATES</a:t>
-            </a:r>
-            <a:endParaRPr lang="en-US" sz="1300" dirty="0"/>
-          </a:p>
-        </p:txBody>
-      </p:sp>
-      <p:sp>
-        <p:nvSpPr>
-          <p:cNvPr id="3" name="Text 1"/>
-          <p:cNvSpPr txBox="1"/>
-          <p:nvPr/>
-        </p:nvSpPr>
-        <p:spPr>
-          <a:xfrm>
-            <a:off x="640080" y="841248"/>
-            <a:ext cx="10881360" cy="914400"/>
-          </a:xfrm>
-          <a:prstGeom prst="rect">
-            <a:avLst/>
-          </a:prstGeom>
-          <a:noFill/>
-          <a:ln/>
-        </p:spPr>
-        <p:txBody>
-          <a:bodyPr wrap="square" lIns="0" tIns="0" rIns="0" bIns="0" rtlCol="0" anchor="ctr"/>
-          <a:lstStyle/>
-          <a:p>
-            <a:pPr algn="l" indent="0" marL="0">
-              <a:buNone/>
-            </a:pPr>
-            <a:r>
-              <a:rPr lang="en-US" sz="3400" b="1" dirty="0">
-                <a:solidFill>
-                  <a:srgbClr val="2B2B7A"/>
-                </a:solidFill>
-                <a:latin typeface="Cambria" pitchFamily="34" charset="0"/>
-                <a:ea typeface="Cambria" pitchFamily="34" charset="-122"/>
-                <a:cs typeface="Cambria" pitchFamily="34" charset="-120"/>
-              </a:rPr>
-              <a:t>Pseudo-Classes, Rendered</a:t>
-            </a:r>
-            <a:endParaRPr lang="en-US" sz="3400" dirty="0"/>
-          </a:p>
-        </p:txBody>
-      </p:sp>
-      <p:sp>
-        <p:nvSpPr>
-          <p:cNvPr id="4" name="Text 2"/>
-          <p:cNvSpPr txBox="1"/>
-          <p:nvPr/>
-        </p:nvSpPr>
-        <p:spPr>
-          <a:xfrm>
-            <a:off x="640080" y="1691640"/>
-            <a:ext cx="10911535" cy="411480"/>
-          </a:xfrm>
-          <a:prstGeom prst="rect">
-            <a:avLst/>
-          </a:prstGeom>
-          <a:noFill/>
-          <a:ln/>
-        </p:spPr>
-        <p:txBody>
-          <a:bodyPr wrap="square" lIns="0" tIns="0" rIns="0" bIns="0" rtlCol="0" anchor="ctr"/>
-          <a:lstStyle/>
-          <a:p>
-            <a:pPr indent="0" marL="0">
-              <a:buNone/>
-            </a:pPr>
-            <a:r>
-              <a:rPr lang="en-US" sz="1350" i="1" dirty="0">
-                <a:solidFill>
-                  <a:srgbClr val="5D5D72"/>
-                </a:solidFill>
-                <a:latin typeface="Calibri" pitchFamily="34" charset="0"/>
-                <a:ea typeface="Calibri" pitchFamily="34" charset="-122"/>
-                <a:cs typeface="Calibri" pitchFamily="34" charset="-120"/>
-              </a:rPr>
-              <a:t>li:first-child and button:disabled are states the browser can render up front.</a:t>
-            </a:r>
-            <a:endParaRPr lang="en-US" sz="1350" dirty="0"/>
-          </a:p>
-        </p:txBody>
-      </p:sp>
-      <p:sp>
-        <p:nvSpPr>
-          <p:cNvPr id="5" name="Shape 3"/>
-          <p:cNvSpPr/>
-          <p:nvPr/>
-        </p:nvSpPr>
-        <p:spPr>
-          <a:xfrm>
-            <a:off x="530352" y="2221992"/>
-            <a:ext cx="11130991" cy="4059936"/>
-          </a:xfrm>
-          <a:prstGeom prst="roundRect">
-            <a:avLst>
-              <a:gd name="adj" fmla="val 1351"/>
-            </a:avLst>
-          </a:prstGeom>
-          <a:solidFill>
-            <a:srgbClr val="FFFFFF"/>
-          </a:solidFill>
-          <a:ln w="12700">
-            <a:solidFill>
-              <a:srgbClr val="E2E2EE"/>
-            </a:solidFill>
-            <a:prstDash val="solid"/>
-          </a:ln>
-          <a:effectLst>
-            <a:outerShdw sx="100000" sy="100000" kx="0" ky="0" algn="bl" rotWithShape="0" blurRad="101600" dist="38100" dir="5400000">
-              <a:srgbClr val="000000">
-                <a:alpha val="12000"/>
-              </a:srgbClr>
-            </a:outerShdw>
-          </a:effectLst>
-        </p:spPr>
-      </p:sp>
-      <p:pic>
-        <p:nvPicPr>
-          <p:cNvPr id="6" name="Image 0" descr="D:/GitHub/mern-web-book/docs/assets/img/lecture-05/pseudo-class-demo.png">    </p:cNvPr>
-          <p:cNvPicPr>
-            <a:picLocks noChangeAspect="1"/>
-          </p:cNvPicPr>
-          <p:nvPr/>
-        </p:nvPicPr>
-        <p:blipFill>
-          <a:blip r:embed="rId1"/>
-          <a:stretch>
-            <a:fillRect/>
-          </a:stretch>
-        </p:blipFill>
-        <p:spPr>
-          <a:xfrm>
-            <a:off x="3771748" y="2514600"/>
-            <a:ext cx="4648200" cy="3474720"/>
-          </a:xfrm>
-          <a:prstGeom prst="rect">
-            <a:avLst/>
-          </a:prstGeom>
-        </p:spPr>
-      </p:pic>
-      <p:sp>
-        <p:nvSpPr>
-          <p:cNvPr id="7" name="Text 4"/>
-          <p:cNvSpPr txBox="1"/>
-          <p:nvPr/>
-        </p:nvSpPr>
-        <p:spPr>
-          <a:xfrm>
-            <a:off x="640080" y="6446520"/>
-            <a:ext cx="8686800" cy="292608"/>
-          </a:xfrm>
-          <a:prstGeom prst="rect">
-            <a:avLst/>
-          </a:prstGeom>
-          <a:noFill/>
-          <a:ln/>
-        </p:spPr>
-        <p:txBody>
-          <a:bodyPr wrap="square" lIns="0" tIns="0" rIns="0" bIns="0" rtlCol="0" anchor="ctr"/>
-          <a:lstStyle/>
-          <a:p>
-            <a:pPr algn="l" indent="0" marL="0">
-              <a:buNone/>
-            </a:pPr>
-            <a:r>
-              <a:rPr lang="en-US" sz="900" dirty="0">
-                <a:solidFill>
-                  <a:srgbClr val="5D5D72"/>
-                </a:solidFill>
-                <a:latin typeface="Calibri" pitchFamily="34" charset="0"/>
-                <a:ea typeface="Calibri" pitchFamily="34" charset="-122"/>
-                <a:cs typeface="Calibri" pitchFamily="34" charset="-120"/>
-              </a:rPr>
-              <a:t>Usman Akram  •  COMSATS University Islamabad</a:t>
-            </a:r>
-            <a:endParaRPr lang="en-US" sz="900" dirty="0"/>
-          </a:p>
-        </p:txBody>
-      </p:sp>
-      <p:sp>
-        <p:nvSpPr>
-          <p:cNvPr id="8" name="Text 5"/>
-          <p:cNvSpPr txBox="1"/>
-          <p:nvPr/>
-        </p:nvSpPr>
-        <p:spPr>
-          <a:xfrm>
-            <a:off x="11155680" y="6446520"/>
-            <a:ext cx="457200" cy="292608"/>
-          </a:xfrm>
-          <a:prstGeom prst="rect">
-            <a:avLst/>
-          </a:prstGeom>
-          <a:noFill/>
-          <a:ln/>
-        </p:spPr>
-        <p:txBody>
-          <a:bodyPr wrap="square" lIns="0" tIns="0" rIns="0" bIns="0" rtlCol="0" anchor="ctr"/>
-          <a:lstStyle/>
-          <a:p>
-            <a:pPr algn="r" indent="0" marL="0">
-              <a:buNone/>
-            </a:pPr>
-            <a:r>
-              <a:rPr lang="en-US" sz="900" dirty="0">
-                <a:solidFill>
-                  <a:srgbClr val="5D5D72"/>
-                </a:solidFill>
-                <a:latin typeface="Calibri" pitchFamily="34" charset="0"/>
-                <a:ea typeface="Calibri" pitchFamily="34" charset="-122"/>
-                <a:cs typeface="Calibri" pitchFamily="34" charset="-120"/>
-              </a:rPr>
-              <a:t>15</a:t>
-            </a:r>
-            <a:endParaRPr lang="en-US" sz="900" dirty="0"/>
-          </a:p>
-        </p:txBody>
-      </p:sp>
-    </p:spTree>
-  </p:cSld>
-  <p:clrMapOvr>
-    <a:masterClrMapping/>
-  </p:clrMapOvr>
-</p:sld>
-</file>
-
-<file path=ppt/slides/slide16.xml><?xml version="1.0" encoding="utf-8"?>
-<p:sld xmlns:a="http://schemas.openxmlformats.org/drawingml/2006/main" xmlns:r="http://schemas.openxmlformats.org/officeDocument/2006/relationships" xmlns:p="http://schemas.openxmlformats.org/presentationml/2006/main">
-  <p:cSld name="Slide 16">
-    <p:bg>
-      <p:bgPr>
-        <a:solidFill>
-          <a:srgbClr val="FFFFFF"/>
-        </a:solidFill>
-      </p:bgPr>
-    </p:bg>
-    <p:spTree>
-      <p:nvGrpSpPr>
-        <p:cNvPr id="1" name=""/>
-        <p:cNvGrpSpPr/>
-        <p:nvPr/>
-      </p:nvGrpSpPr>
-      <p:grpSpPr>
-        <a:xfrm>
-          <a:off x="0" y="0"/>
-          <a:ext cx="0" cy="0"/>
-          <a:chOff x="0" y="0"/>
-          <a:chExt cx="0" cy="0"/>
-        </a:xfrm>
-      </p:grpSpPr>
-      <p:sp>
-        <p:nvSpPr>
-          <p:cNvPr id="2" name="Text 0"/>
-          <p:cNvSpPr txBox="1"/>
-          <p:nvPr/>
-        </p:nvSpPr>
-        <p:spPr>
-          <a:xfrm>
-            <a:off x="640080" y="457200"/>
-            <a:ext cx="10058400" cy="365760"/>
-          </a:xfrm>
-          <a:prstGeom prst="rect">
-            <a:avLst/>
-          </a:prstGeom>
-          <a:noFill/>
-          <a:ln/>
-        </p:spPr>
-        <p:txBody>
-          <a:bodyPr wrap="square" lIns="0" tIns="0" rIns="0" bIns="0" rtlCol="0" anchor="ctr"/>
-          <a:lstStyle/>
-          <a:p>
-            <a:pPr algn="l" indent="0" marL="0">
-              <a:buNone/>
-            </a:pPr>
-            <a:r>
-              <a:rPr lang="en-US" sz="1300" b="1" spc="300" kern="0" dirty="0">
-                <a:solidFill>
-                  <a:srgbClr val="FF8A3D"/>
-                </a:solidFill>
-                <a:latin typeface="Calibri" pitchFamily="34" charset="0"/>
-                <a:ea typeface="Calibri" pitchFamily="34" charset="-122"/>
-                <a:cs typeface="Calibri" pitchFamily="34" charset="-120"/>
-              </a:rPr>
-              <a:t>PARTS</a:t>
-            </a:r>
-            <a:endParaRPr lang="en-US" sz="1300" dirty="0"/>
-          </a:p>
-        </p:txBody>
-      </p:sp>
-      <p:sp>
-        <p:nvSpPr>
-          <p:cNvPr id="3" name="Text 1"/>
-          <p:cNvSpPr txBox="1"/>
-          <p:nvPr/>
-        </p:nvSpPr>
-        <p:spPr>
-          <a:xfrm>
-            <a:off x="640080" y="841248"/>
-            <a:ext cx="10881360" cy="914400"/>
-          </a:xfrm>
-          <a:prstGeom prst="rect">
-            <a:avLst/>
-          </a:prstGeom>
-          <a:noFill/>
-          <a:ln/>
-        </p:spPr>
-        <p:txBody>
-          <a:bodyPr wrap="square" lIns="0" tIns="0" rIns="0" bIns="0" rtlCol="0" anchor="ctr"/>
-          <a:lstStyle/>
-          <a:p>
-            <a:pPr algn="l" indent="0" marL="0">
-              <a:buNone/>
-            </a:pPr>
-            <a:r>
-              <a:rPr lang="en-US" sz="3400" b="1" dirty="0">
-                <a:solidFill>
-                  <a:srgbClr val="2B2B7A"/>
-                </a:solidFill>
-                <a:latin typeface="Cambria" pitchFamily="34" charset="0"/>
-                <a:ea typeface="Cambria" pitchFamily="34" charset="-122"/>
-                <a:cs typeface="Cambria" pitchFamily="34" charset="-120"/>
-              </a:rPr>
-              <a:t>Pseudo-Elements</a:t>
-            </a:r>
-            <a:endParaRPr lang="en-US" sz="3400" dirty="0"/>
-          </a:p>
-        </p:txBody>
-      </p:sp>
-      <p:sp>
-        <p:nvSpPr>
-          <p:cNvPr id="4" name="Shape 2"/>
-          <p:cNvSpPr/>
-          <p:nvPr/>
-        </p:nvSpPr>
-        <p:spPr>
-          <a:xfrm>
-            <a:off x="640080" y="1965960"/>
-            <a:ext cx="10911535" cy="2221992"/>
-          </a:xfrm>
-          <a:prstGeom prst="roundRect">
-            <a:avLst>
-              <a:gd name="adj" fmla="val 3292"/>
-            </a:avLst>
-          </a:prstGeom>
-          <a:solidFill>
-            <a:srgbClr val="1E1E4C"/>
-          </a:solidFill>
-          <a:ln/>
-        </p:spPr>
-      </p:sp>
-      <p:sp>
-        <p:nvSpPr>
-          <p:cNvPr id="5" name="Text 3"/>
-          <p:cNvSpPr txBox="1"/>
-          <p:nvPr/>
-        </p:nvSpPr>
-        <p:spPr>
-          <a:xfrm>
-            <a:off x="960120" y="2194560"/>
-            <a:ext cx="10271455" cy="1764792"/>
-          </a:xfrm>
-          <a:prstGeom prst="rect">
-            <a:avLst/>
-          </a:prstGeom>
-          <a:noFill/>
-          <a:ln/>
-        </p:spPr>
-        <p:txBody>
-          <a:bodyPr wrap="square" lIns="0" tIns="0" rIns="0" bIns="0" rtlCol="0" anchor="t"/>
-          <a:lstStyle/>
-          <a:p>
-            <a:pPr indent="0" marL="0">
-              <a:lnSpc>
-                <a:spcPct val="125000"/>
-              </a:lnSpc>
-              <a:buNone/>
-            </a:pPr>
-            <a:r>
-              <a:rPr lang="en-US" sz="1400" dirty="0">
-                <a:solidFill>
-                  <a:srgbClr val="C9D3F5"/>
-                </a:solidFill>
-                <a:latin typeface="Courier New" pitchFamily="34" charset="0"/>
-                <a:ea typeface="Courier New" pitchFamily="34" charset="-122"/>
-                <a:cs typeface="Courier New" pitchFamily="34" charset="-120"/>
-              </a:rPr>
-              <a:t>p::first-line { font-weight: bold; }</a:t>
-            </a:r>
-            <a:endParaRPr lang="en-US" sz="1400" dirty="0"/>
-          </a:p>
-          <a:p>
-            <a:pPr indent="0" marL="0">
-              <a:lnSpc>
-                <a:spcPct val="125000"/>
-              </a:lnSpc>
-              <a:buNone/>
-            </a:pPr>
-            <a:endParaRPr lang="en-US" sz="1400" dirty="0"/>
-          </a:p>
-          <a:p>
-            <a:pPr indent="0" marL="0">
-              <a:lnSpc>
-                <a:spcPct val="125000"/>
-              </a:lnSpc>
-              <a:buNone/>
-            </a:pPr>
-            <a:r>
-              <a:rPr lang="en-US" sz="1400" dirty="0">
-                <a:solidFill>
-                  <a:srgbClr val="C9D3F5"/>
-                </a:solidFill>
-                <a:latin typeface="Courier New" pitchFamily="34" charset="0"/>
-                <a:ea typeface="Courier New" pitchFamily="34" charset="-122"/>
-                <a:cs typeface="Courier New" pitchFamily="34" charset="-120"/>
-              </a:rPr>
-              <a:t>.quote::before { content: "\201C"; }</a:t>
-            </a:r>
-            <a:endParaRPr lang="en-US" sz="1400" dirty="0"/>
-          </a:p>
-          <a:p>
-            <a:pPr indent="0" marL="0">
-              <a:lnSpc>
-                <a:spcPct val="125000"/>
-              </a:lnSpc>
-              <a:buNone/>
-            </a:pPr>
-            <a:r>
-              <a:rPr lang="en-US" sz="1400" dirty="0">
-                <a:solidFill>
-                  <a:srgbClr val="C9D3F5"/>
-                </a:solidFill>
-                <a:latin typeface="Courier New" pitchFamily="34" charset="0"/>
-                <a:ea typeface="Courier New" pitchFamily="34" charset="-122"/>
-                <a:cs typeface="Courier New" pitchFamily="34" charset="-120"/>
-              </a:rPr>
-              <a:t>.quote::after  { content: "\201D"; }</a:t>
-            </a:r>
-            <a:endParaRPr lang="en-US" sz="1400" dirty="0"/>
-          </a:p>
-        </p:txBody>
-      </p:sp>
-      <p:sp>
-        <p:nvSpPr>
-          <p:cNvPr id="6" name="Text 4"/>
-          <p:cNvSpPr txBox="1"/>
-          <p:nvPr/>
-        </p:nvSpPr>
-        <p:spPr>
-          <a:xfrm>
-            <a:off x="640080" y="4416552"/>
-            <a:ext cx="10911535" cy="1847088"/>
-          </a:xfrm>
-          <a:prstGeom prst="rect">
-            <a:avLst/>
-          </a:prstGeom>
-          <a:noFill/>
-          <a:ln/>
-        </p:spPr>
-        <p:txBody>
-          <a:bodyPr wrap="square" lIns="0" tIns="0" rIns="0" bIns="0" rtlCol="0" anchor="t"/>
-          <a:lstStyle/>
-          <a:p>
-            <a:pPr indent="0" marL="0">
-              <a:buNone/>
-            </a:pPr>
-            <a:r>
-              <a:rPr lang="en-US" sz="1300" dirty="0">
-                <a:solidFill>
-                  <a:srgbClr val="26262F"/>
-                </a:solidFill>
-                <a:latin typeface="Calibri" pitchFamily="34" charset="0"/>
-                <a:ea typeface="Calibri" pitchFamily="34" charset="-122"/>
-                <a:cs typeface="Calibri" pitchFamily="34" charset="-120"/>
-              </a:rPr>
-              <a:t>::before and ::after insert content that is not in the HTML at all — purely for decoration.</a:t>
-            </a:r>
-            <a:endParaRPr lang="en-US" sz="1300" dirty="0"/>
-          </a:p>
-        </p:txBody>
-      </p:sp>
-      <p:sp>
-        <p:nvSpPr>
-          <p:cNvPr id="7" name="Text 5"/>
-          <p:cNvSpPr txBox="1"/>
-          <p:nvPr/>
-        </p:nvSpPr>
-        <p:spPr>
-          <a:xfrm>
-            <a:off x="640080" y="6446520"/>
-            <a:ext cx="8686800" cy="292608"/>
-          </a:xfrm>
-          <a:prstGeom prst="rect">
-            <a:avLst/>
-          </a:prstGeom>
-          <a:noFill/>
-          <a:ln/>
-        </p:spPr>
-        <p:txBody>
-          <a:bodyPr wrap="square" lIns="0" tIns="0" rIns="0" bIns="0" rtlCol="0" anchor="ctr"/>
-          <a:lstStyle/>
-          <a:p>
-            <a:pPr algn="l" indent="0" marL="0">
-              <a:buNone/>
-            </a:pPr>
-            <a:r>
-              <a:rPr lang="en-US" sz="900" dirty="0">
-                <a:solidFill>
-                  <a:srgbClr val="5D5D72"/>
-                </a:solidFill>
-                <a:latin typeface="Calibri" pitchFamily="34" charset="0"/>
-                <a:ea typeface="Calibri" pitchFamily="34" charset="-122"/>
-                <a:cs typeface="Calibri" pitchFamily="34" charset="-120"/>
-              </a:rPr>
-              <a:t>Usman Akram  •  COMSATS University Islamabad</a:t>
-            </a:r>
-            <a:endParaRPr lang="en-US" sz="900" dirty="0"/>
-          </a:p>
-        </p:txBody>
-      </p:sp>
-      <p:sp>
-        <p:nvSpPr>
-          <p:cNvPr id="8" name="Text 6"/>
-          <p:cNvSpPr txBox="1"/>
-          <p:nvPr/>
-        </p:nvSpPr>
-        <p:spPr>
-          <a:xfrm>
-            <a:off x="11155680" y="6446520"/>
-            <a:ext cx="457200" cy="292608"/>
-          </a:xfrm>
-          <a:prstGeom prst="rect">
-            <a:avLst/>
-          </a:prstGeom>
-          <a:noFill/>
-          <a:ln/>
-        </p:spPr>
-        <p:txBody>
-          <a:bodyPr wrap="square" lIns="0" tIns="0" rIns="0" bIns="0" rtlCol="0" anchor="ctr"/>
-          <a:lstStyle/>
-          <a:p>
-            <a:pPr algn="r" indent="0" marL="0">
-              <a:buNone/>
-            </a:pPr>
-            <a:r>
-              <a:rPr lang="en-US" sz="900" dirty="0">
-                <a:solidFill>
-                  <a:srgbClr val="5D5D72"/>
-                </a:solidFill>
-                <a:latin typeface="Calibri" pitchFamily="34" charset="0"/>
-                <a:ea typeface="Calibri" pitchFamily="34" charset="-122"/>
-                <a:cs typeface="Calibri" pitchFamily="34" charset="-120"/>
-              </a:rPr>
               <a:t>16</a:t>
             </a:r>
             <a:endParaRPr lang="en-US" sz="900" dirty="0"/>
@@ -6508,7 +6763,7 @@
                 <a:ea typeface="Calibri" pitchFamily="34" charset="-122"/>
                 <a:cs typeface="Calibri" pitchFamily="34" charset="-120"/>
               </a:rPr>
-              <a:t>PARTS</a:t>
+              <a:t>STATES</a:t>
             </a:r>
             <a:endParaRPr lang="en-US" sz="1300" dirty="0"/>
           </a:p>
@@ -6547,7 +6802,7 @@
                 <a:ea typeface="Cambria" pitchFamily="34" charset="-122"/>
                 <a:cs typeface="Cambria" pitchFamily="34" charset="-120"/>
               </a:rPr>
-              <a:t>Pseudo-Elements, Rendered</a:t>
+              <a:t>Pseudo-Classes, Rendered</a:t>
             </a:r>
             <a:endParaRPr lang="en-US" sz="3400" dirty="0"/>
           </a:p>
@@ -6555,18 +6810,57 @@
       </p:sp>
       <p:sp>
         <p:nvSpPr>
-          <p:cNvPr id="4" name="Shape 2"/>
+          <p:cNvPr id="4" name="Text 2"/>
+          <p:cNvSpPr txBox="1"/>
+          <p:nvPr/>
+        </p:nvSpPr>
+        <p:spPr>
+          <a:xfrm>
+            <a:off x="640080" y="1691640"/>
+            <a:ext cx="10911535" cy="411480"/>
+          </a:xfrm>
+          <a:prstGeom prst="rect">
+            <a:avLst/>
+          </a:prstGeom>
+          <a:noFill/>
+          <a:ln/>
+        </p:spPr>
+        <p:txBody>
+          <a:bodyPr wrap="square" lIns="0" tIns="0" rIns="0" bIns="0" rtlCol="0" anchor="ctr"/>
+          <a:lstStyle/>
+          <a:p>
+            <a:pPr indent="0" marL="0">
+              <a:buNone/>
+            </a:pPr>
+            <a:r>
+              <a:rPr lang="en-US" sz="1350" i="1" dirty="0">
+                <a:solidFill>
+                  <a:srgbClr val="5D5D72"/>
+                </a:solidFill>
+                <a:latin typeface="Calibri" pitchFamily="34" charset="0"/>
+                <a:ea typeface="Calibri" pitchFamily="34" charset="-122"/>
+                <a:cs typeface="Calibri" pitchFamily="34" charset="-120"/>
+              </a:rPr>
+              <a:t>li:first-child and button:disabled are states the browser can render up front.</a:t>
+            </a:r>
+            <a:endParaRPr lang="en-US" sz="1350" dirty="0"/>
+          </a:p>
+        </p:txBody>
+      </p:sp>
+      <p:sp>
+        <p:nvSpPr>
+          <p:cNvPr id="5" name="Shape 3"/>
           <p:cNvSpPr/>
           <p:nvPr/>
         </p:nvSpPr>
         <p:spPr>
           <a:xfrm>
-            <a:off x="530352" y="1947672"/>
-            <a:ext cx="11130991" cy="4334256"/>
+            <a:off x="530352" y="2221992"/>
+            <a:ext cx="11130991" cy="4059936"/>
           </a:xfrm>
           <a:prstGeom prst="roundRect">
             <a:avLst>
-              <a:gd name="adj" fmla="val 1266"/>
+              <a:gd name="adj" fmla="val 1351"/>
             </a:avLst>
           </a:prstGeom>
           <a:solidFill>
@@ -6589,7 +6883,7 @@
       </p:sp>
       <p:pic>
         <p:nvPicPr>
-          <p:cNvPr id="5" name="Image 0" descr="D:/GitHub/mern-web-book/docs/assets/img/lecture-05/pseudo-element-demo.png">    </p:cNvPr>
+          <p:cNvPr id="6" name="Image 0" descr="D:/GitHub/mern-web-book/docs/assets/img/lecture-05/pseudo-class-demo.png">    </p:cNvPr>
           <p:cNvPicPr>
             <a:picLocks noChangeAspect="1"/>
           </p:cNvPicPr>
@@ -6603,8 +6897,8 @@
         </p:blipFill>
         <p:spPr>
           <a:xfrm>
-            <a:off x="640080" y="2519655"/>
-            <a:ext cx="10911535" cy="3190290"/>
+            <a:off x="3771748" y="2514600"/>
+            <a:ext cx="4648200" cy="3474720"/>
           </a:xfrm>
           <a:prstGeom prst="rect">
             <a:avLst/>
@@ -6613,7 +6907,7 @@
       </p:pic>
       <p:sp>
         <p:nvSpPr>
-          <p:cNvPr id="6" name="Text 3"/>
+          <p:cNvPr id="7" name="Text 4"/>
           <p:cNvSpPr txBox="1"/>
           <p:nvPr/>
         </p:nvSpPr>
@@ -6652,7 +6946,7 @@
       </p:sp>
       <p:sp>
         <p:nvSpPr>
-          <p:cNvPr id="7" name="Text 4"/>
+          <p:cNvPr id="8" name="Text 5"/>
           <p:cNvSpPr txBox="1"/>
           <p:nvPr/>
         </p:nvSpPr>
@@ -6754,7 +7048,7 @@
                 <a:ea typeface="Calibri" pitchFamily="34" charset="-122"/>
                 <a:cs typeface="Calibri" pitchFamily="34" charset="-120"/>
               </a:rPr>
-              <a:t>THE CASCADE</a:t>
+              <a:t>PARTS</a:t>
             </a:r>
             <a:endParaRPr lang="en-US" sz="1300" dirty="0"/>
           </a:p>
@@ -6793,6 +7087,1368 @@
                 <a:ea typeface="Cambria" pitchFamily="34" charset="-122"/>
                 <a:cs typeface="Cambria" pitchFamily="34" charset="-120"/>
               </a:rPr>
+              <a:t>Pseudo-Elements</a:t>
+            </a:r>
+            <a:endParaRPr lang="en-US" sz="3400" dirty="0"/>
+          </a:p>
+        </p:txBody>
+      </p:sp>
+      <p:sp>
+        <p:nvSpPr>
+          <p:cNvPr id="4" name="Shape 2"/>
+          <p:cNvSpPr/>
+          <p:nvPr/>
+        </p:nvSpPr>
+        <p:spPr>
+          <a:xfrm>
+            <a:off x="640080" y="1965960"/>
+            <a:ext cx="10911535" cy="2221992"/>
+          </a:xfrm>
+          <a:prstGeom prst="roundRect">
+            <a:avLst>
+              <a:gd name="adj" fmla="val 3292"/>
+            </a:avLst>
+          </a:prstGeom>
+          <a:solidFill>
+            <a:srgbClr val="1E1E4C"/>
+          </a:solidFill>
+          <a:ln/>
+        </p:spPr>
+      </p:sp>
+      <p:sp>
+        <p:nvSpPr>
+          <p:cNvPr id="5" name="Text 3"/>
+          <p:cNvSpPr txBox="1"/>
+          <p:nvPr/>
+        </p:nvSpPr>
+        <p:spPr>
+          <a:xfrm>
+            <a:off x="960120" y="2194560"/>
+            <a:ext cx="10271455" cy="1764792"/>
+          </a:xfrm>
+          <a:prstGeom prst="rect">
+            <a:avLst/>
+          </a:prstGeom>
+          <a:noFill/>
+          <a:ln/>
+        </p:spPr>
+        <p:txBody>
+          <a:bodyPr wrap="square" lIns="0" tIns="0" rIns="0" bIns="0" rtlCol="0" anchor="t"/>
+          <a:lstStyle/>
+          <a:p>
+            <a:pPr indent="0" marL="0">
+              <a:lnSpc>
+                <a:spcPct val="125000"/>
+              </a:lnSpc>
+              <a:buNone/>
+            </a:pPr>
+            <a:r>
+              <a:rPr lang="en-US" sz="1400" dirty="0">
+                <a:solidFill>
+                  <a:srgbClr val="C9D3F5"/>
+                </a:solidFill>
+                <a:latin typeface="Courier New" pitchFamily="34" charset="0"/>
+                <a:ea typeface="Courier New" pitchFamily="34" charset="-122"/>
+                <a:cs typeface="Courier New" pitchFamily="34" charset="-120"/>
+              </a:rPr>
+              <a:t>p::first-line { font-weight: bold; }</a:t>
+            </a:r>
+            <a:endParaRPr lang="en-US" sz="1400" dirty="0"/>
+          </a:p>
+          <a:p>
+            <a:pPr indent="0" marL="0">
+              <a:lnSpc>
+                <a:spcPct val="125000"/>
+              </a:lnSpc>
+              <a:buNone/>
+            </a:pPr>
+            <a:endParaRPr lang="en-US" sz="1400" dirty="0"/>
+          </a:p>
+          <a:p>
+            <a:pPr indent="0" marL="0">
+              <a:lnSpc>
+                <a:spcPct val="125000"/>
+              </a:lnSpc>
+              <a:buNone/>
+            </a:pPr>
+            <a:r>
+              <a:rPr lang="en-US" sz="1400" dirty="0">
+                <a:solidFill>
+                  <a:srgbClr val="C9D3F5"/>
+                </a:solidFill>
+                <a:latin typeface="Courier New" pitchFamily="34" charset="0"/>
+                <a:ea typeface="Courier New" pitchFamily="34" charset="-122"/>
+                <a:cs typeface="Courier New" pitchFamily="34" charset="-120"/>
+              </a:rPr>
+              <a:t>.quote::before { content: "\201C"; }</a:t>
+            </a:r>
+            <a:endParaRPr lang="en-US" sz="1400" dirty="0"/>
+          </a:p>
+          <a:p>
+            <a:pPr indent="0" marL="0">
+              <a:lnSpc>
+                <a:spcPct val="125000"/>
+              </a:lnSpc>
+              <a:buNone/>
+            </a:pPr>
+            <a:r>
+              <a:rPr lang="en-US" sz="1400" dirty="0">
+                <a:solidFill>
+                  <a:srgbClr val="C9D3F5"/>
+                </a:solidFill>
+                <a:latin typeface="Courier New" pitchFamily="34" charset="0"/>
+                <a:ea typeface="Courier New" pitchFamily="34" charset="-122"/>
+                <a:cs typeface="Courier New" pitchFamily="34" charset="-120"/>
+              </a:rPr>
+              <a:t>.quote::after  { content: "\201D"; }</a:t>
+            </a:r>
+            <a:endParaRPr lang="en-US" sz="1400" dirty="0"/>
+          </a:p>
+        </p:txBody>
+      </p:sp>
+      <p:sp>
+        <p:nvSpPr>
+          <p:cNvPr id="6" name="Text 4"/>
+          <p:cNvSpPr txBox="1"/>
+          <p:nvPr/>
+        </p:nvSpPr>
+        <p:spPr>
+          <a:xfrm>
+            <a:off x="640080" y="4416552"/>
+            <a:ext cx="10911535" cy="1847088"/>
+          </a:xfrm>
+          <a:prstGeom prst="rect">
+            <a:avLst/>
+          </a:prstGeom>
+          <a:noFill/>
+          <a:ln/>
+        </p:spPr>
+        <p:txBody>
+          <a:bodyPr wrap="square" lIns="0" tIns="0" rIns="0" bIns="0" rtlCol="0" anchor="t"/>
+          <a:lstStyle/>
+          <a:p>
+            <a:pPr indent="0" marL="0">
+              <a:buNone/>
+            </a:pPr>
+            <a:r>
+              <a:rPr lang="en-US" sz="1300" dirty="0">
+                <a:solidFill>
+                  <a:srgbClr val="26262F"/>
+                </a:solidFill>
+                <a:latin typeface="Calibri" pitchFamily="34" charset="0"/>
+                <a:ea typeface="Calibri" pitchFamily="34" charset="-122"/>
+                <a:cs typeface="Calibri" pitchFamily="34" charset="-120"/>
+              </a:rPr>
+              <a:t>::before and ::after insert content that is not in the HTML at all — purely for decoration.</a:t>
+            </a:r>
+            <a:endParaRPr lang="en-US" sz="1300" dirty="0"/>
+          </a:p>
+        </p:txBody>
+      </p:sp>
+      <p:sp>
+        <p:nvSpPr>
+          <p:cNvPr id="7" name="Text 5"/>
+          <p:cNvSpPr txBox="1"/>
+          <p:nvPr/>
+        </p:nvSpPr>
+        <p:spPr>
+          <a:xfrm>
+            <a:off x="640080" y="6446520"/>
+            <a:ext cx="8686800" cy="292608"/>
+          </a:xfrm>
+          <a:prstGeom prst="rect">
+            <a:avLst/>
+          </a:prstGeom>
+          <a:noFill/>
+          <a:ln/>
+        </p:spPr>
+        <p:txBody>
+          <a:bodyPr wrap="square" lIns="0" tIns="0" rIns="0" bIns="0" rtlCol="0" anchor="ctr"/>
+          <a:lstStyle/>
+          <a:p>
+            <a:pPr algn="l" indent="0" marL="0">
+              <a:buNone/>
+            </a:pPr>
+            <a:r>
+              <a:rPr lang="en-US" sz="900" dirty="0">
+                <a:solidFill>
+                  <a:srgbClr val="5D5D72"/>
+                </a:solidFill>
+                <a:latin typeface="Calibri" pitchFamily="34" charset="0"/>
+                <a:ea typeface="Calibri" pitchFamily="34" charset="-122"/>
+                <a:cs typeface="Calibri" pitchFamily="34" charset="-120"/>
+              </a:rPr>
+              <a:t>Usman Akram  •  COMSATS University Islamabad</a:t>
+            </a:r>
+            <a:endParaRPr lang="en-US" sz="900" dirty="0"/>
+          </a:p>
+        </p:txBody>
+      </p:sp>
+      <p:sp>
+        <p:nvSpPr>
+          <p:cNvPr id="8" name="Text 6"/>
+          <p:cNvSpPr txBox="1"/>
+          <p:nvPr/>
+        </p:nvSpPr>
+        <p:spPr>
+          <a:xfrm>
+            <a:off x="11155680" y="6446520"/>
+            <a:ext cx="457200" cy="292608"/>
+          </a:xfrm>
+          <a:prstGeom prst="rect">
+            <a:avLst/>
+          </a:prstGeom>
+          <a:noFill/>
+          <a:ln/>
+        </p:spPr>
+        <p:txBody>
+          <a:bodyPr wrap="square" lIns="0" tIns="0" rIns="0" bIns="0" rtlCol="0" anchor="ctr"/>
+          <a:lstStyle/>
+          <a:p>
+            <a:pPr algn="r" indent="0" marL="0">
+              <a:buNone/>
+            </a:pPr>
+            <a:r>
+              <a:rPr lang="en-US" sz="900" dirty="0">
+                <a:solidFill>
+                  <a:srgbClr val="5D5D72"/>
+                </a:solidFill>
+                <a:latin typeface="Calibri" pitchFamily="34" charset="0"/>
+                <a:ea typeface="Calibri" pitchFamily="34" charset="-122"/>
+                <a:cs typeface="Calibri" pitchFamily="34" charset="-120"/>
+              </a:rPr>
+              <a:t>18</a:t>
+            </a:r>
+            <a:endParaRPr lang="en-US" sz="900" dirty="0"/>
+          </a:p>
+        </p:txBody>
+      </p:sp>
+    </p:spTree>
+  </p:cSld>
+  <p:clrMapOvr>
+    <a:masterClrMapping/>
+  </p:clrMapOvr>
+</p:sld>
+</file>
+
+<file path=ppt/slides/slide19.xml><?xml version="1.0" encoding="utf-8"?>
+<p:sld xmlns:a="http://schemas.openxmlformats.org/drawingml/2006/main" xmlns:r="http://schemas.openxmlformats.org/officeDocument/2006/relationships" xmlns:p="http://schemas.openxmlformats.org/presentationml/2006/main">
+  <p:cSld name="Slide 19">
+    <p:bg>
+      <p:bgPr>
+        <a:solidFill>
+          <a:srgbClr val="FFFFFF"/>
+        </a:solidFill>
+      </p:bgPr>
+    </p:bg>
+    <p:spTree>
+      <p:nvGrpSpPr>
+        <p:cNvPr id="1" name=""/>
+        <p:cNvGrpSpPr/>
+        <p:nvPr/>
+      </p:nvGrpSpPr>
+      <p:grpSpPr>
+        <a:xfrm>
+          <a:off x="0" y="0"/>
+          <a:ext cx="0" cy="0"/>
+          <a:chOff x="0" y="0"/>
+          <a:chExt cx="0" cy="0"/>
+        </a:xfrm>
+      </p:grpSpPr>
+      <p:sp>
+        <p:nvSpPr>
+          <p:cNvPr id="2" name="Text 0"/>
+          <p:cNvSpPr txBox="1"/>
+          <p:nvPr/>
+        </p:nvSpPr>
+        <p:spPr>
+          <a:xfrm>
+            <a:off x="640080" y="457200"/>
+            <a:ext cx="10058400" cy="365760"/>
+          </a:xfrm>
+          <a:prstGeom prst="rect">
+            <a:avLst/>
+          </a:prstGeom>
+          <a:noFill/>
+          <a:ln/>
+        </p:spPr>
+        <p:txBody>
+          <a:bodyPr wrap="square" lIns="0" tIns="0" rIns="0" bIns="0" rtlCol="0" anchor="ctr"/>
+          <a:lstStyle/>
+          <a:p>
+            <a:pPr algn="l" indent="0" marL="0">
+              <a:buNone/>
+            </a:pPr>
+            <a:r>
+              <a:rPr lang="en-US" sz="1300" b="1" spc="300" kern="0" dirty="0">
+                <a:solidFill>
+                  <a:srgbClr val="FF8A3D"/>
+                </a:solidFill>
+                <a:latin typeface="Calibri" pitchFamily="34" charset="0"/>
+                <a:ea typeface="Calibri" pitchFamily="34" charset="-122"/>
+                <a:cs typeface="Calibri" pitchFamily="34" charset="-120"/>
+              </a:rPr>
+              <a:t>PARTS</a:t>
+            </a:r>
+            <a:endParaRPr lang="en-US" sz="1300" dirty="0"/>
+          </a:p>
+        </p:txBody>
+      </p:sp>
+      <p:sp>
+        <p:nvSpPr>
+          <p:cNvPr id="3" name="Text 1"/>
+          <p:cNvSpPr txBox="1"/>
+          <p:nvPr/>
+        </p:nvSpPr>
+        <p:spPr>
+          <a:xfrm>
+            <a:off x="640080" y="841248"/>
+            <a:ext cx="10881360" cy="914400"/>
+          </a:xfrm>
+          <a:prstGeom prst="rect">
+            <a:avLst/>
+          </a:prstGeom>
+          <a:noFill/>
+          <a:ln/>
+        </p:spPr>
+        <p:txBody>
+          <a:bodyPr wrap="square" lIns="0" tIns="0" rIns="0" bIns="0" rtlCol="0" anchor="ctr"/>
+          <a:lstStyle/>
+          <a:p>
+            <a:pPr algn="l" indent="0" marL="0">
+              <a:buNone/>
+            </a:pPr>
+            <a:r>
+              <a:rPr lang="en-US" sz="3400" b="1" dirty="0">
+                <a:solidFill>
+                  <a:srgbClr val="2B2B7A"/>
+                </a:solidFill>
+                <a:latin typeface="Cambria" pitchFamily="34" charset="0"/>
+                <a:ea typeface="Cambria" pitchFamily="34" charset="-122"/>
+                <a:cs typeface="Cambria" pitchFamily="34" charset="-120"/>
+              </a:rPr>
+              <a:t>Pseudo-Elements, Rendered</a:t>
+            </a:r>
+            <a:endParaRPr lang="en-US" sz="3400" dirty="0"/>
+          </a:p>
+        </p:txBody>
+      </p:sp>
+      <p:sp>
+        <p:nvSpPr>
+          <p:cNvPr id="4" name="Shape 2"/>
+          <p:cNvSpPr/>
+          <p:nvPr/>
+        </p:nvSpPr>
+        <p:spPr>
+          <a:xfrm>
+            <a:off x="530352" y="1947672"/>
+            <a:ext cx="11130991" cy="4334256"/>
+          </a:xfrm>
+          <a:prstGeom prst="roundRect">
+            <a:avLst>
+              <a:gd name="adj" fmla="val 1266"/>
+            </a:avLst>
+          </a:prstGeom>
+          <a:solidFill>
+            <a:srgbClr val="FFFFFF"/>
+          </a:solidFill>
+          <a:ln w="12700">
+            <a:solidFill>
+              <a:srgbClr val="E2E2EE"/>
+            </a:solidFill>
+            <a:prstDash val="solid"/>
+          </a:ln>
+          <a:effectLst>
+            <a:outerShdw sx="100000" sy="100000" kx="0" ky="0" algn="bl" rotWithShape="0" blurRad="101600" dist="38100" dir="5400000">
+              <a:srgbClr val="000000">
+                <a:alpha val="12000"/>
+              </a:srgbClr>
+            </a:outerShdw>
+          </a:effectLst>
+        </p:spPr>
+      </p:sp>
+      <p:pic>
+        <p:nvPicPr>
+          <p:cNvPr id="5" name="Image 0" descr="D:/GitHub/mern-web-book/docs/assets/img/lecture-05/pseudo-element-demo.png">    </p:cNvPr>
+          <p:cNvPicPr>
+            <a:picLocks noChangeAspect="1"/>
+          </p:cNvPicPr>
+          <p:nvPr/>
+        </p:nvPicPr>
+        <p:blipFill>
+          <a:blip r:embed="rId1"/>
+          <a:stretch>
+            <a:fillRect/>
+          </a:stretch>
+        </p:blipFill>
+        <p:spPr>
+          <a:xfrm>
+            <a:off x="640080" y="2519655"/>
+            <a:ext cx="10911535" cy="3190290"/>
+          </a:xfrm>
+          <a:prstGeom prst="rect">
+            <a:avLst/>
+          </a:prstGeom>
+        </p:spPr>
+      </p:pic>
+      <p:sp>
+        <p:nvSpPr>
+          <p:cNvPr id="6" name="Text 3"/>
+          <p:cNvSpPr txBox="1"/>
+          <p:nvPr/>
+        </p:nvSpPr>
+        <p:spPr>
+          <a:xfrm>
+            <a:off x="640080" y="6446520"/>
+            <a:ext cx="8686800" cy="292608"/>
+          </a:xfrm>
+          <a:prstGeom prst="rect">
+            <a:avLst/>
+          </a:prstGeom>
+          <a:noFill/>
+          <a:ln/>
+        </p:spPr>
+        <p:txBody>
+          <a:bodyPr wrap="square" lIns="0" tIns="0" rIns="0" bIns="0" rtlCol="0" anchor="ctr"/>
+          <a:lstStyle/>
+          <a:p>
+            <a:pPr algn="l" indent="0" marL="0">
+              <a:buNone/>
+            </a:pPr>
+            <a:r>
+              <a:rPr lang="en-US" sz="900" dirty="0">
+                <a:solidFill>
+                  <a:srgbClr val="5D5D72"/>
+                </a:solidFill>
+                <a:latin typeface="Calibri" pitchFamily="34" charset="0"/>
+                <a:ea typeface="Calibri" pitchFamily="34" charset="-122"/>
+                <a:cs typeface="Calibri" pitchFamily="34" charset="-120"/>
+              </a:rPr>
+              <a:t>Usman Akram  •  COMSATS University Islamabad</a:t>
+            </a:r>
+            <a:endParaRPr lang="en-US" sz="900" dirty="0"/>
+          </a:p>
+        </p:txBody>
+      </p:sp>
+      <p:sp>
+        <p:nvSpPr>
+          <p:cNvPr id="7" name="Text 4"/>
+          <p:cNvSpPr txBox="1"/>
+          <p:nvPr/>
+        </p:nvSpPr>
+        <p:spPr>
+          <a:xfrm>
+            <a:off x="11155680" y="6446520"/>
+            <a:ext cx="457200" cy="292608"/>
+          </a:xfrm>
+          <a:prstGeom prst="rect">
+            <a:avLst/>
+          </a:prstGeom>
+          <a:noFill/>
+          <a:ln/>
+        </p:spPr>
+        <p:txBody>
+          <a:bodyPr wrap="square" lIns="0" tIns="0" rIns="0" bIns="0" rtlCol="0" anchor="ctr"/>
+          <a:lstStyle/>
+          <a:p>
+            <a:pPr algn="r" indent="0" marL="0">
+              <a:buNone/>
+            </a:pPr>
+            <a:r>
+              <a:rPr lang="en-US" sz="900" dirty="0">
+                <a:solidFill>
+                  <a:srgbClr val="5D5D72"/>
+                </a:solidFill>
+                <a:latin typeface="Calibri" pitchFamily="34" charset="0"/>
+                <a:ea typeface="Calibri" pitchFamily="34" charset="-122"/>
+                <a:cs typeface="Calibri" pitchFamily="34" charset="-120"/>
+              </a:rPr>
+              <a:t>19</a:t>
+            </a:r>
+            <a:endParaRPr lang="en-US" sz="900" dirty="0"/>
+          </a:p>
+        </p:txBody>
+      </p:sp>
+    </p:spTree>
+  </p:cSld>
+  <p:clrMapOvr>
+    <a:masterClrMapping/>
+  </p:clrMapOvr>
+</p:sld>
+</file>
+
+<file path=ppt/slides/slide2.xml><?xml version="1.0" encoding="utf-8"?>
+<p:sld xmlns:a="http://schemas.openxmlformats.org/drawingml/2006/main" xmlns:r="http://schemas.openxmlformats.org/officeDocument/2006/relationships" xmlns:p="http://schemas.openxmlformats.org/presentationml/2006/main">
+  <p:cSld name="Slide 2">
+    <p:bg>
+      <p:bgPr>
+        <a:solidFill>
+          <a:srgbClr val="FFFFFF"/>
+        </a:solidFill>
+      </p:bgPr>
+    </p:bg>
+    <p:spTree>
+      <p:nvGrpSpPr>
+        <p:cNvPr id="1" name=""/>
+        <p:cNvGrpSpPr/>
+        <p:nvPr/>
+      </p:nvGrpSpPr>
+      <p:grpSpPr>
+        <a:xfrm>
+          <a:off x="0" y="0"/>
+          <a:ext cx="0" cy="0"/>
+          <a:chOff x="0" y="0"/>
+          <a:chExt cx="0" cy="0"/>
+        </a:xfrm>
+      </p:grpSpPr>
+      <p:sp>
+        <p:nvSpPr>
+          <p:cNvPr id="2" name="Text 0"/>
+          <p:cNvSpPr txBox="1"/>
+          <p:nvPr/>
+        </p:nvSpPr>
+        <p:spPr>
+          <a:xfrm>
+            <a:off x="640080" y="457200"/>
+            <a:ext cx="10058400" cy="365760"/>
+          </a:xfrm>
+          <a:prstGeom prst="rect">
+            <a:avLst/>
+          </a:prstGeom>
+          <a:noFill/>
+          <a:ln/>
+        </p:spPr>
+        <p:txBody>
+          <a:bodyPr wrap="square" lIns="0" tIns="0" rIns="0" bIns="0" rtlCol="0" anchor="ctr"/>
+          <a:lstStyle/>
+          <a:p>
+            <a:pPr algn="l" indent="0" marL="0">
+              <a:buNone/>
+            </a:pPr>
+            <a:r>
+              <a:rPr lang="en-US" sz="1300" b="1" spc="300" kern="0" dirty="0">
+                <a:solidFill>
+                  <a:srgbClr val="FF8A3D"/>
+                </a:solidFill>
+                <a:latin typeface="Calibri" pitchFamily="34" charset="0"/>
+                <a:ea typeface="Calibri" pitchFamily="34" charset="-122"/>
+                <a:cs typeface="Calibri" pitchFamily="34" charset="-120"/>
+              </a:rPr>
+              <a:t>OVERVIEW</a:t>
+            </a:r>
+            <a:endParaRPr lang="en-US" sz="1300" dirty="0"/>
+          </a:p>
+        </p:txBody>
+      </p:sp>
+      <p:sp>
+        <p:nvSpPr>
+          <p:cNvPr id="3" name="Text 1"/>
+          <p:cNvSpPr txBox="1"/>
+          <p:nvPr/>
+        </p:nvSpPr>
+        <p:spPr>
+          <a:xfrm>
+            <a:off x="640080" y="841248"/>
+            <a:ext cx="10881360" cy="914400"/>
+          </a:xfrm>
+          <a:prstGeom prst="rect">
+            <a:avLst/>
+          </a:prstGeom>
+          <a:noFill/>
+          <a:ln/>
+        </p:spPr>
+        <p:txBody>
+          <a:bodyPr wrap="square" lIns="0" tIns="0" rIns="0" bIns="0" rtlCol="0" anchor="ctr"/>
+          <a:lstStyle/>
+          <a:p>
+            <a:pPr algn="l" indent="0" marL="0">
+              <a:buNone/>
+            </a:pPr>
+            <a:r>
+              <a:rPr lang="en-US" sz="3400" b="1" dirty="0">
+                <a:solidFill>
+                  <a:srgbClr val="2B2B7A"/>
+                </a:solidFill>
+                <a:latin typeface="Cambria" pitchFamily="34" charset="0"/>
+                <a:ea typeface="Cambria" pitchFamily="34" charset="-122"/>
+                <a:cs typeface="Cambria" pitchFamily="34" charset="-120"/>
+              </a:rPr>
+              <a:t>In This Lecture</a:t>
+            </a:r>
+            <a:endParaRPr lang="en-US" sz="3400" dirty="0"/>
+          </a:p>
+        </p:txBody>
+      </p:sp>
+      <p:sp>
+        <p:nvSpPr>
+          <p:cNvPr id="4" name="Shape 2"/>
+          <p:cNvSpPr/>
+          <p:nvPr/>
+        </p:nvSpPr>
+        <p:spPr>
+          <a:xfrm>
+            <a:off x="685800" y="1965960"/>
+            <a:ext cx="457200" cy="457200"/>
+          </a:xfrm>
+          <a:prstGeom prst="ellipse">
+            <a:avLst/>
+          </a:prstGeom>
+          <a:solidFill>
+            <a:srgbClr val="FF8A3D"/>
+          </a:solidFill>
+          <a:ln/>
+        </p:spPr>
+      </p:sp>
+      <p:sp>
+        <p:nvSpPr>
+          <p:cNvPr id="5" name="Text 3"/>
+          <p:cNvSpPr txBox="1"/>
+          <p:nvPr/>
+        </p:nvSpPr>
+        <p:spPr>
+          <a:xfrm>
+            <a:off x="685800" y="1965960"/>
+            <a:ext cx="457200" cy="457200"/>
+          </a:xfrm>
+          <a:prstGeom prst="rect">
+            <a:avLst/>
+          </a:prstGeom>
+          <a:noFill/>
+          <a:ln/>
+        </p:spPr>
+        <p:txBody>
+          <a:bodyPr wrap="square" lIns="0" tIns="0" rIns="0" bIns="0" rtlCol="0" anchor="ctr"/>
+          <a:lstStyle/>
+          <a:p>
+            <a:pPr algn="ctr" indent="0" marL="0">
+              <a:buNone/>
+            </a:pPr>
+            <a:r>
+              <a:rPr lang="en-US" sz="1500" b="1" dirty="0">
+                <a:solidFill>
+                  <a:srgbClr val="FFFFFF"/>
+                </a:solidFill>
+                <a:latin typeface="Calibri" pitchFamily="34" charset="0"/>
+                <a:ea typeface="Calibri" pitchFamily="34" charset="-122"/>
+                <a:cs typeface="Calibri" pitchFamily="34" charset="-120"/>
+              </a:rPr>
+              <a:t>1</a:t>
+            </a:r>
+            <a:endParaRPr lang="en-US" sz="1500" dirty="0"/>
+          </a:p>
+        </p:txBody>
+      </p:sp>
+      <p:sp>
+        <p:nvSpPr>
+          <p:cNvPr id="6" name="Text 4"/>
+          <p:cNvSpPr txBox="1"/>
+          <p:nvPr/>
+        </p:nvSpPr>
+        <p:spPr>
+          <a:xfrm>
+            <a:off x="1371600" y="1892808"/>
+            <a:ext cx="10180015" cy="640080"/>
+          </a:xfrm>
+          <a:prstGeom prst="rect">
+            <a:avLst/>
+          </a:prstGeom>
+          <a:noFill/>
+          <a:ln/>
+        </p:spPr>
+        <p:txBody>
+          <a:bodyPr wrap="square" lIns="0" tIns="0" rIns="0" bIns="0" rtlCol="0" anchor="ctr"/>
+          <a:lstStyle/>
+          <a:p>
+            <a:pPr indent="0" marL="0">
+              <a:buNone/>
+            </a:pPr>
+            <a:r>
+              <a:rPr lang="en-US" sz="1500" dirty="0">
+                <a:solidFill>
+                  <a:srgbClr val="26262F"/>
+                </a:solidFill>
+                <a:latin typeface="Calibri" pitchFamily="34" charset="0"/>
+                <a:ea typeface="Calibri" pitchFamily="34" charset="-122"/>
+                <a:cs typeface="Calibri" pitchFamily="34" charset="-120"/>
+              </a:rPr>
+              <a:t>CSS syntax, and the three ways to attach CSS to HTML</a:t>
+            </a:r>
+            <a:endParaRPr lang="en-US" sz="1500" dirty="0"/>
+          </a:p>
+        </p:txBody>
+      </p:sp>
+      <p:sp>
+        <p:nvSpPr>
+          <p:cNvPr id="7" name="Shape 5"/>
+          <p:cNvSpPr/>
+          <p:nvPr/>
+        </p:nvSpPr>
+        <p:spPr>
+          <a:xfrm>
+            <a:off x="685800" y="2679192"/>
+            <a:ext cx="457200" cy="457200"/>
+          </a:xfrm>
+          <a:prstGeom prst="ellipse">
+            <a:avLst/>
+          </a:prstGeom>
+          <a:solidFill>
+            <a:srgbClr val="FF8A3D"/>
+          </a:solidFill>
+          <a:ln/>
+        </p:spPr>
+      </p:sp>
+      <p:sp>
+        <p:nvSpPr>
+          <p:cNvPr id="8" name="Text 6"/>
+          <p:cNvSpPr txBox="1"/>
+          <p:nvPr/>
+        </p:nvSpPr>
+        <p:spPr>
+          <a:xfrm>
+            <a:off x="685800" y="2679192"/>
+            <a:ext cx="457200" cy="457200"/>
+          </a:xfrm>
+          <a:prstGeom prst="rect">
+            <a:avLst/>
+          </a:prstGeom>
+          <a:noFill/>
+          <a:ln/>
+        </p:spPr>
+        <p:txBody>
+          <a:bodyPr wrap="square" lIns="0" tIns="0" rIns="0" bIns="0" rtlCol="0" anchor="ctr"/>
+          <a:lstStyle/>
+          <a:p>
+            <a:pPr algn="ctr" indent="0" marL="0">
+              <a:buNone/>
+            </a:pPr>
+            <a:r>
+              <a:rPr lang="en-US" sz="1500" b="1" dirty="0">
+                <a:solidFill>
+                  <a:srgbClr val="FFFFFF"/>
+                </a:solidFill>
+                <a:latin typeface="Calibri" pitchFamily="34" charset="0"/>
+                <a:ea typeface="Calibri" pitchFamily="34" charset="-122"/>
+                <a:cs typeface="Calibri" pitchFamily="34" charset="-120"/>
+              </a:rPr>
+              <a:t>2</a:t>
+            </a:r>
+            <a:endParaRPr lang="en-US" sz="1500" dirty="0"/>
+          </a:p>
+        </p:txBody>
+      </p:sp>
+      <p:sp>
+        <p:nvSpPr>
+          <p:cNvPr id="9" name="Text 7"/>
+          <p:cNvSpPr txBox="1"/>
+          <p:nvPr/>
+        </p:nvSpPr>
+        <p:spPr>
+          <a:xfrm>
+            <a:off x="1371600" y="2606040"/>
+            <a:ext cx="10180015" cy="640080"/>
+          </a:xfrm>
+          <a:prstGeom prst="rect">
+            <a:avLst/>
+          </a:prstGeom>
+          <a:noFill/>
+          <a:ln/>
+        </p:spPr>
+        <p:txBody>
+          <a:bodyPr wrap="square" lIns="0" tIns="0" rIns="0" bIns="0" rtlCol="0" anchor="ctr"/>
+          <a:lstStyle/>
+          <a:p>
+            <a:pPr indent="0" marL="0">
+              <a:buNone/>
+            </a:pPr>
+            <a:r>
+              <a:rPr lang="en-US" sz="1500" dirty="0">
+                <a:solidFill>
+                  <a:srgbClr val="26262F"/>
+                </a:solidFill>
+                <a:latin typeface="Calibri" pitchFamily="34" charset="0"/>
+                <a:ea typeface="Calibri" pitchFamily="34" charset="-122"/>
+                <a:cs typeface="Calibri" pitchFamily="34" charset="-120"/>
+              </a:rPr>
+              <a:t>Selectors: element, class, id, attribute, grouping, descendant</a:t>
+            </a:r>
+            <a:endParaRPr lang="en-US" sz="1500" dirty="0"/>
+          </a:p>
+        </p:txBody>
+      </p:sp>
+      <p:sp>
+        <p:nvSpPr>
+          <p:cNvPr id="10" name="Shape 8"/>
+          <p:cNvSpPr/>
+          <p:nvPr/>
+        </p:nvSpPr>
+        <p:spPr>
+          <a:xfrm>
+            <a:off x="685800" y="3392424"/>
+            <a:ext cx="457200" cy="457200"/>
+          </a:xfrm>
+          <a:prstGeom prst="ellipse">
+            <a:avLst/>
+          </a:prstGeom>
+          <a:solidFill>
+            <a:srgbClr val="FF8A3D"/>
+          </a:solidFill>
+          <a:ln/>
+        </p:spPr>
+      </p:sp>
+      <p:sp>
+        <p:nvSpPr>
+          <p:cNvPr id="11" name="Text 9"/>
+          <p:cNvSpPr txBox="1"/>
+          <p:nvPr/>
+        </p:nvSpPr>
+        <p:spPr>
+          <a:xfrm>
+            <a:off x="685800" y="3392424"/>
+            <a:ext cx="457200" cy="457200"/>
+          </a:xfrm>
+          <a:prstGeom prst="rect">
+            <a:avLst/>
+          </a:prstGeom>
+          <a:noFill/>
+          <a:ln/>
+        </p:spPr>
+        <p:txBody>
+          <a:bodyPr wrap="square" lIns="0" tIns="0" rIns="0" bIns="0" rtlCol="0" anchor="ctr"/>
+          <a:lstStyle/>
+          <a:p>
+            <a:pPr algn="ctr" indent="0" marL="0">
+              <a:buNone/>
+            </a:pPr>
+            <a:r>
+              <a:rPr lang="en-US" sz="1500" b="1" dirty="0">
+                <a:solidFill>
+                  <a:srgbClr val="FFFFFF"/>
+                </a:solidFill>
+                <a:latin typeface="Calibri" pitchFamily="34" charset="0"/>
+                <a:ea typeface="Calibri" pitchFamily="34" charset="-122"/>
+                <a:cs typeface="Calibri" pitchFamily="34" charset="-120"/>
+              </a:rPr>
+              <a:t>3</a:t>
+            </a:r>
+            <a:endParaRPr lang="en-US" sz="1500" dirty="0"/>
+          </a:p>
+        </p:txBody>
+      </p:sp>
+      <p:sp>
+        <p:nvSpPr>
+          <p:cNvPr id="12" name="Text 10"/>
+          <p:cNvSpPr txBox="1"/>
+          <p:nvPr/>
+        </p:nvSpPr>
+        <p:spPr>
+          <a:xfrm>
+            <a:off x="1371600" y="3319272"/>
+            <a:ext cx="10180015" cy="640080"/>
+          </a:xfrm>
+          <a:prstGeom prst="rect">
+            <a:avLst/>
+          </a:prstGeom>
+          <a:noFill/>
+          <a:ln/>
+        </p:spPr>
+        <p:txBody>
+          <a:bodyPr wrap="square" lIns="0" tIns="0" rIns="0" bIns="0" rtlCol="0" anchor="ctr"/>
+          <a:lstStyle/>
+          <a:p>
+            <a:pPr indent="0" marL="0">
+              <a:buNone/>
+            </a:pPr>
+            <a:r>
+              <a:rPr lang="en-US" sz="1500" dirty="0">
+                <a:solidFill>
+                  <a:srgbClr val="26262F"/>
+                </a:solidFill>
+                <a:latin typeface="Calibri" pitchFamily="34" charset="0"/>
+                <a:ea typeface="Calibri" pitchFamily="34" charset="-122"/>
+                <a:cs typeface="Calibri" pitchFamily="34" charset="-120"/>
+              </a:rPr>
+              <a:t>Pseudo-classes and pseudo-elements</a:t>
+            </a:r>
+            <a:endParaRPr lang="en-US" sz="1500" dirty="0"/>
+          </a:p>
+        </p:txBody>
+      </p:sp>
+      <p:sp>
+        <p:nvSpPr>
+          <p:cNvPr id="13" name="Shape 11"/>
+          <p:cNvSpPr/>
+          <p:nvPr/>
+        </p:nvSpPr>
+        <p:spPr>
+          <a:xfrm>
+            <a:off x="685800" y="4105656"/>
+            <a:ext cx="457200" cy="457200"/>
+          </a:xfrm>
+          <a:prstGeom prst="ellipse">
+            <a:avLst/>
+          </a:prstGeom>
+          <a:solidFill>
+            <a:srgbClr val="FF8A3D"/>
+          </a:solidFill>
+          <a:ln/>
+        </p:spPr>
+      </p:sp>
+      <p:sp>
+        <p:nvSpPr>
+          <p:cNvPr id="14" name="Text 12"/>
+          <p:cNvSpPr txBox="1"/>
+          <p:nvPr/>
+        </p:nvSpPr>
+        <p:spPr>
+          <a:xfrm>
+            <a:off x="685800" y="4105656"/>
+            <a:ext cx="457200" cy="457200"/>
+          </a:xfrm>
+          <a:prstGeom prst="rect">
+            <a:avLst/>
+          </a:prstGeom>
+          <a:noFill/>
+          <a:ln/>
+        </p:spPr>
+        <p:txBody>
+          <a:bodyPr wrap="square" lIns="0" tIns="0" rIns="0" bIns="0" rtlCol="0" anchor="ctr"/>
+          <a:lstStyle/>
+          <a:p>
+            <a:pPr algn="ctr" indent="0" marL="0">
+              <a:buNone/>
+            </a:pPr>
+            <a:r>
+              <a:rPr lang="en-US" sz="1500" b="1" dirty="0">
+                <a:solidFill>
+                  <a:srgbClr val="FFFFFF"/>
+                </a:solidFill>
+                <a:latin typeface="Calibri" pitchFamily="34" charset="0"/>
+                <a:ea typeface="Calibri" pitchFamily="34" charset="-122"/>
+                <a:cs typeface="Calibri" pitchFamily="34" charset="-120"/>
+              </a:rPr>
+              <a:t>4</a:t>
+            </a:r>
+            <a:endParaRPr lang="en-US" sz="1500" dirty="0"/>
+          </a:p>
+        </p:txBody>
+      </p:sp>
+      <p:sp>
+        <p:nvSpPr>
+          <p:cNvPr id="15" name="Text 13"/>
+          <p:cNvSpPr txBox="1"/>
+          <p:nvPr/>
+        </p:nvSpPr>
+        <p:spPr>
+          <a:xfrm>
+            <a:off x="1371600" y="4032504"/>
+            <a:ext cx="10180015" cy="640080"/>
+          </a:xfrm>
+          <a:prstGeom prst="rect">
+            <a:avLst/>
+          </a:prstGeom>
+          <a:noFill/>
+          <a:ln/>
+        </p:spPr>
+        <p:txBody>
+          <a:bodyPr wrap="square" lIns="0" tIns="0" rIns="0" bIns="0" rtlCol="0" anchor="ctr"/>
+          <a:lstStyle/>
+          <a:p>
+            <a:pPr indent="0" marL="0">
+              <a:buNone/>
+            </a:pPr>
+            <a:r>
+              <a:rPr lang="en-US" sz="1500" dirty="0">
+                <a:solidFill>
+                  <a:srgbClr val="26262F"/>
+                </a:solidFill>
+                <a:latin typeface="Calibri" pitchFamily="34" charset="0"/>
+                <a:ea typeface="Calibri" pitchFamily="34" charset="-122"/>
+                <a:cs typeface="Calibri" pitchFamily="34" charset="-120"/>
+              </a:rPr>
+              <a:t>The cascade and specificity — every conflict case, and the real scoring method</a:t>
+            </a:r>
+            <a:endParaRPr lang="en-US" sz="1500" dirty="0"/>
+          </a:p>
+        </p:txBody>
+      </p:sp>
+      <p:sp>
+        <p:nvSpPr>
+          <p:cNvPr id="16" name="Shape 14"/>
+          <p:cNvSpPr/>
+          <p:nvPr/>
+        </p:nvSpPr>
+        <p:spPr>
+          <a:xfrm>
+            <a:off x="685800" y="4818888"/>
+            <a:ext cx="457200" cy="457200"/>
+          </a:xfrm>
+          <a:prstGeom prst="ellipse">
+            <a:avLst/>
+          </a:prstGeom>
+          <a:solidFill>
+            <a:srgbClr val="FF8A3D"/>
+          </a:solidFill>
+          <a:ln/>
+        </p:spPr>
+      </p:sp>
+      <p:sp>
+        <p:nvSpPr>
+          <p:cNvPr id="17" name="Text 15"/>
+          <p:cNvSpPr txBox="1"/>
+          <p:nvPr/>
+        </p:nvSpPr>
+        <p:spPr>
+          <a:xfrm>
+            <a:off x="685800" y="4818888"/>
+            <a:ext cx="457200" cy="457200"/>
+          </a:xfrm>
+          <a:prstGeom prst="rect">
+            <a:avLst/>
+          </a:prstGeom>
+          <a:noFill/>
+          <a:ln/>
+        </p:spPr>
+        <p:txBody>
+          <a:bodyPr wrap="square" lIns="0" tIns="0" rIns="0" bIns="0" rtlCol="0" anchor="ctr"/>
+          <a:lstStyle/>
+          <a:p>
+            <a:pPr algn="ctr" indent="0" marL="0">
+              <a:buNone/>
+            </a:pPr>
+            <a:r>
+              <a:rPr lang="en-US" sz="1500" b="1" dirty="0">
+                <a:solidFill>
+                  <a:srgbClr val="FFFFFF"/>
+                </a:solidFill>
+                <a:latin typeface="Calibri" pitchFamily="34" charset="0"/>
+                <a:ea typeface="Calibri" pitchFamily="34" charset="-122"/>
+                <a:cs typeface="Calibri" pitchFamily="34" charset="-120"/>
+              </a:rPr>
+              <a:t>5</a:t>
+            </a:r>
+            <a:endParaRPr lang="en-US" sz="1500" dirty="0"/>
+          </a:p>
+        </p:txBody>
+      </p:sp>
+      <p:sp>
+        <p:nvSpPr>
+          <p:cNvPr id="18" name="Text 16"/>
+          <p:cNvSpPr txBox="1"/>
+          <p:nvPr/>
+        </p:nvSpPr>
+        <p:spPr>
+          <a:xfrm>
+            <a:off x="1371600" y="4745736"/>
+            <a:ext cx="10180015" cy="640080"/>
+          </a:xfrm>
+          <a:prstGeom prst="rect">
+            <a:avLst/>
+          </a:prstGeom>
+          <a:noFill/>
+          <a:ln/>
+        </p:spPr>
+        <p:txBody>
+          <a:bodyPr wrap="square" lIns="0" tIns="0" rIns="0" bIns="0" rtlCol="0" anchor="ctr"/>
+          <a:lstStyle/>
+          <a:p>
+            <a:pPr indent="0" marL="0">
+              <a:buNone/>
+            </a:pPr>
+            <a:r>
+              <a:rPr lang="en-US" sz="1500" dirty="0">
+                <a:solidFill>
+                  <a:srgbClr val="26262F"/>
+                </a:solidFill>
+                <a:latin typeface="Calibri" pitchFamily="34" charset="0"/>
+                <a:ea typeface="Calibri" pitchFamily="34" charset="-122"/>
+                <a:cs typeface="Calibri" pitchFamily="34" charset="-120"/>
+              </a:rPr>
+              <a:t>Which properties inherit from parent to child, and which do not</a:t>
+            </a:r>
+            <a:endParaRPr lang="en-US" sz="1500" dirty="0"/>
+          </a:p>
+        </p:txBody>
+      </p:sp>
+      <p:sp>
+        <p:nvSpPr>
+          <p:cNvPr id="19" name="Shape 17"/>
+          <p:cNvSpPr/>
+          <p:nvPr/>
+        </p:nvSpPr>
+        <p:spPr>
+          <a:xfrm>
+            <a:off x="685800" y="5532120"/>
+            <a:ext cx="457200" cy="457200"/>
+          </a:xfrm>
+          <a:prstGeom prst="ellipse">
+            <a:avLst/>
+          </a:prstGeom>
+          <a:solidFill>
+            <a:srgbClr val="FF8A3D"/>
+          </a:solidFill>
+          <a:ln/>
+        </p:spPr>
+      </p:sp>
+      <p:sp>
+        <p:nvSpPr>
+          <p:cNvPr id="20" name="Text 18"/>
+          <p:cNvSpPr txBox="1"/>
+          <p:nvPr/>
+        </p:nvSpPr>
+        <p:spPr>
+          <a:xfrm>
+            <a:off x="685800" y="5532120"/>
+            <a:ext cx="457200" cy="457200"/>
+          </a:xfrm>
+          <a:prstGeom prst="rect">
+            <a:avLst/>
+          </a:prstGeom>
+          <a:noFill/>
+          <a:ln/>
+        </p:spPr>
+        <p:txBody>
+          <a:bodyPr wrap="square" lIns="0" tIns="0" rIns="0" bIns="0" rtlCol="0" anchor="ctr"/>
+          <a:lstStyle/>
+          <a:p>
+            <a:pPr algn="ctr" indent="0" marL="0">
+              <a:buNone/>
+            </a:pPr>
+            <a:r>
+              <a:rPr lang="en-US" sz="1500" b="1" dirty="0">
+                <a:solidFill>
+                  <a:srgbClr val="FFFFFF"/>
+                </a:solidFill>
+                <a:latin typeface="Calibri" pitchFamily="34" charset="0"/>
+                <a:ea typeface="Calibri" pitchFamily="34" charset="-122"/>
+                <a:cs typeface="Calibri" pitchFamily="34" charset="-120"/>
+              </a:rPr>
+              <a:t>6</a:t>
+            </a:r>
+            <a:endParaRPr lang="en-US" sz="1500" dirty="0"/>
+          </a:p>
+        </p:txBody>
+      </p:sp>
+      <p:sp>
+        <p:nvSpPr>
+          <p:cNvPr id="21" name="Text 19"/>
+          <p:cNvSpPr txBox="1"/>
+          <p:nvPr/>
+        </p:nvSpPr>
+        <p:spPr>
+          <a:xfrm>
+            <a:off x="1371600" y="5458968"/>
+            <a:ext cx="10180015" cy="640080"/>
+          </a:xfrm>
+          <a:prstGeom prst="rect">
+            <a:avLst/>
+          </a:prstGeom>
+          <a:noFill/>
+          <a:ln/>
+        </p:spPr>
+        <p:txBody>
+          <a:bodyPr wrap="square" lIns="0" tIns="0" rIns="0" bIns="0" rtlCol="0" anchor="ctr"/>
+          <a:lstStyle/>
+          <a:p>
+            <a:pPr indent="0" marL="0">
+              <a:buNone/>
+            </a:pPr>
+            <a:r>
+              <a:rPr lang="en-US" sz="1500" dirty="0">
+                <a:solidFill>
+                  <a:srgbClr val="26262F"/>
+                </a:solidFill>
+                <a:latin typeface="Calibri" pitchFamily="34" charset="0"/>
+                <a:ea typeface="Calibri" pitchFamily="34" charset="-122"/>
+                <a:cs typeface="Calibri" pitchFamily="34" charset="-120"/>
+              </a:rPr>
+              <a:t>The most common colour, font, text, and background properties</a:t>
+            </a:r>
+            <a:endParaRPr lang="en-US" sz="1500" dirty="0"/>
+          </a:p>
+        </p:txBody>
+      </p:sp>
+      <p:sp>
+        <p:nvSpPr>
+          <p:cNvPr id="22" name="Text 20"/>
+          <p:cNvSpPr txBox="1"/>
+          <p:nvPr/>
+        </p:nvSpPr>
+        <p:spPr>
+          <a:xfrm>
+            <a:off x="640080" y="6446520"/>
+            <a:ext cx="8686800" cy="292608"/>
+          </a:xfrm>
+          <a:prstGeom prst="rect">
+            <a:avLst/>
+          </a:prstGeom>
+          <a:noFill/>
+          <a:ln/>
+        </p:spPr>
+        <p:txBody>
+          <a:bodyPr wrap="square" lIns="0" tIns="0" rIns="0" bIns="0" rtlCol="0" anchor="ctr"/>
+          <a:lstStyle/>
+          <a:p>
+            <a:pPr algn="l" indent="0" marL="0">
+              <a:buNone/>
+            </a:pPr>
+            <a:r>
+              <a:rPr lang="en-US" sz="900" dirty="0">
+                <a:solidFill>
+                  <a:srgbClr val="5D5D72"/>
+                </a:solidFill>
+                <a:latin typeface="Calibri" pitchFamily="34" charset="0"/>
+                <a:ea typeface="Calibri" pitchFamily="34" charset="-122"/>
+                <a:cs typeface="Calibri" pitchFamily="34" charset="-120"/>
+              </a:rPr>
+              <a:t>Usman Akram  •  COMSATS University Islamabad</a:t>
+            </a:r>
+            <a:endParaRPr lang="en-US" sz="900" dirty="0"/>
+          </a:p>
+        </p:txBody>
+      </p:sp>
+      <p:sp>
+        <p:nvSpPr>
+          <p:cNvPr id="23" name="Text 21"/>
+          <p:cNvSpPr txBox="1"/>
+          <p:nvPr/>
+        </p:nvSpPr>
+        <p:spPr>
+          <a:xfrm>
+            <a:off x="11155680" y="6446520"/>
+            <a:ext cx="457200" cy="292608"/>
+          </a:xfrm>
+          <a:prstGeom prst="rect">
+            <a:avLst/>
+          </a:prstGeom>
+          <a:noFill/>
+          <a:ln/>
+        </p:spPr>
+        <p:txBody>
+          <a:bodyPr wrap="square" lIns="0" tIns="0" rIns="0" bIns="0" rtlCol="0" anchor="ctr"/>
+          <a:lstStyle/>
+          <a:p>
+            <a:pPr algn="r" indent="0" marL="0">
+              <a:buNone/>
+            </a:pPr>
+            <a:r>
+              <a:rPr lang="en-US" sz="900" dirty="0">
+                <a:solidFill>
+                  <a:srgbClr val="5D5D72"/>
+                </a:solidFill>
+                <a:latin typeface="Calibri" pitchFamily="34" charset="0"/>
+                <a:ea typeface="Calibri" pitchFamily="34" charset="-122"/>
+                <a:cs typeface="Calibri" pitchFamily="34" charset="-120"/>
+              </a:rPr>
+              <a:t>2</a:t>
+            </a:r>
+            <a:endParaRPr lang="en-US" sz="900" dirty="0"/>
+          </a:p>
+        </p:txBody>
+      </p:sp>
+    </p:spTree>
+  </p:cSld>
+  <p:clrMapOvr>
+    <a:masterClrMapping/>
+  </p:clrMapOvr>
+</p:sld>
+</file>
+
+<file path=ppt/slides/slide20.xml><?xml version="1.0" encoding="utf-8"?>
+<p:sld xmlns:a="http://schemas.openxmlformats.org/drawingml/2006/main" xmlns:r="http://schemas.openxmlformats.org/officeDocument/2006/relationships" xmlns:p="http://schemas.openxmlformats.org/presentationml/2006/main">
+  <p:cSld name="Slide 20">
+    <p:bg>
+      <p:bgPr>
+        <a:solidFill>
+          <a:srgbClr val="FFFFFF"/>
+        </a:solidFill>
+      </p:bgPr>
+    </p:bg>
+    <p:spTree>
+      <p:nvGrpSpPr>
+        <p:cNvPr id="1" name=""/>
+        <p:cNvGrpSpPr/>
+        <p:nvPr/>
+      </p:nvGrpSpPr>
+      <p:grpSpPr>
+        <a:xfrm>
+          <a:off x="0" y="0"/>
+          <a:ext cx="0" cy="0"/>
+          <a:chOff x="0" y="0"/>
+          <a:chExt cx="0" cy="0"/>
+        </a:xfrm>
+      </p:grpSpPr>
+      <p:sp>
+        <p:nvSpPr>
+          <p:cNvPr id="2" name="Text 0"/>
+          <p:cNvSpPr txBox="1"/>
+          <p:nvPr/>
+        </p:nvSpPr>
+        <p:spPr>
+          <a:xfrm>
+            <a:off x="640080" y="457200"/>
+            <a:ext cx="10058400" cy="365760"/>
+          </a:xfrm>
+          <a:prstGeom prst="rect">
+            <a:avLst/>
+          </a:prstGeom>
+          <a:noFill/>
+          <a:ln/>
+        </p:spPr>
+        <p:txBody>
+          <a:bodyPr wrap="square" lIns="0" tIns="0" rIns="0" bIns="0" rtlCol="0" anchor="ctr"/>
+          <a:lstStyle/>
+          <a:p>
+            <a:pPr algn="l" indent="0" marL="0">
+              <a:buNone/>
+            </a:pPr>
+            <a:r>
+              <a:rPr lang="en-US" sz="1300" b="1" spc="300" kern="0" dirty="0">
+                <a:solidFill>
+                  <a:srgbClr val="FF8A3D"/>
+                </a:solidFill>
+                <a:latin typeface="Calibri" pitchFamily="34" charset="0"/>
+                <a:ea typeface="Calibri" pitchFamily="34" charset="-122"/>
+                <a:cs typeface="Calibri" pitchFamily="34" charset="-120"/>
+              </a:rPr>
+              <a:t>THE CASCADE</a:t>
+            </a:r>
+            <a:endParaRPr lang="en-US" sz="1300" dirty="0"/>
+          </a:p>
+        </p:txBody>
+      </p:sp>
+      <p:sp>
+        <p:nvSpPr>
+          <p:cNvPr id="3" name="Text 1"/>
+          <p:cNvSpPr txBox="1"/>
+          <p:nvPr/>
+        </p:nvSpPr>
+        <p:spPr>
+          <a:xfrm>
+            <a:off x="640080" y="841248"/>
+            <a:ext cx="10881360" cy="914400"/>
+          </a:xfrm>
+          <a:prstGeom prst="rect">
+            <a:avLst/>
+          </a:prstGeom>
+          <a:noFill/>
+          <a:ln/>
+        </p:spPr>
+        <p:txBody>
+          <a:bodyPr wrap="square" lIns="0" tIns="0" rIns="0" bIns="0" rtlCol="0" anchor="ctr"/>
+          <a:lstStyle/>
+          <a:p>
+            <a:pPr algn="l" indent="0" marL="0">
+              <a:buNone/>
+            </a:pPr>
+            <a:r>
+              <a:rPr lang="en-US" sz="3400" b="1" dirty="0">
+                <a:solidFill>
+                  <a:srgbClr val="2B2B7A"/>
+                </a:solidFill>
+                <a:latin typeface="Cambria" pitchFamily="34" charset="0"/>
+                <a:ea typeface="Cambria" pitchFamily="34" charset="-122"/>
+                <a:cs typeface="Cambria" pitchFamily="34" charset="-120"/>
+              </a:rPr>
               <a:t>Specificity, From Lowest to Highest</a:t>
             </a:r>
             <a:endParaRPr lang="en-US" sz="3400" dirty="0"/>
@@ -6801,7 +8457,7 @@
       </p:sp>
       <p:graphicFrame>
         <p:nvGraphicFramePr>
-          <p:cNvPr id="19" name="Table 0"/>
+          <p:cNvPr id="21" name="Table 0"/>
           <p:cNvGraphicFramePr>
             <a:graphicFrameLocks noGrp="1"/>
           </p:cNvGraphicFramePr>
@@ -7729,7 +9385,7 @@
                 <a:ea typeface="Calibri" pitchFamily="34" charset="-122"/>
                 <a:cs typeface="Calibri" pitchFamily="34" charset="-120"/>
               </a:rPr>
-              <a:t>18</a:t>
+              <a:t>20</a:t>
             </a:r>
             <a:endParaRPr lang="en-US" sz="900" dirty="0"/>
           </a:p>
@@ -7743,9 +9399,9 @@
 </p:sld>
 </file>
 
-<file path=ppt/slides/slide19.xml><?xml version="1.0" encoding="utf-8"?>
+<file path=ppt/slides/slide21.xml><?xml version="1.0" encoding="utf-8"?>
 <p:sld xmlns:a="http://schemas.openxmlformats.org/drawingml/2006/main" xmlns:r="http://schemas.openxmlformats.org/officeDocument/2006/relationships" xmlns:p="http://schemas.openxmlformats.org/presentationml/2006/main">
-  <p:cSld name="Slide 19">
+  <p:cSld name="Slide 21">
     <p:bg>
       <p:bgPr>
         <a:solidFill>
@@ -8014,7 +9670,7 @@
                 <a:ea typeface="Calibri" pitchFamily="34" charset="-122"/>
                 <a:cs typeface="Calibri" pitchFamily="34" charset="-120"/>
               </a:rPr>
-              <a:t>19</a:t>
+              <a:t>21</a:t>
             </a:r>
             <a:endParaRPr lang="en-US" sz="900" dirty="0"/>
           </a:p>
@@ -8028,9 +9684,9 @@
 </p:sld>
 </file>
 
-<file path=ppt/slides/slide2.xml><?xml version="1.0" encoding="utf-8"?>
+<file path=ppt/slides/slide22.xml><?xml version="1.0" encoding="utf-8"?>
 <p:sld xmlns:a="http://schemas.openxmlformats.org/drawingml/2006/main" xmlns:r="http://schemas.openxmlformats.org/officeDocument/2006/relationships" xmlns:p="http://schemas.openxmlformats.org/presentationml/2006/main">
-  <p:cSld name="Slide 2">
+  <p:cSld name="Slide 22">
     <p:bg>
       <p:bgPr>
         <a:solidFill>
@@ -8085,7 +9741,7 @@
                 <a:ea typeface="Calibri" pitchFamily="34" charset="-122"/>
                 <a:cs typeface="Calibri" pitchFamily="34" charset="-120"/>
               </a:rPr>
-              <a:t>OVERVIEW</a:t>
+              <a:t>EVERY CONFLICT CASE</a:t>
             </a:r>
             <a:endParaRPr lang="en-US" sz="1300" dirty="0"/>
           </a:p>
@@ -8124,782 +9780,6 @@
                 <a:ea typeface="Cambria" pitchFamily="34" charset="-122"/>
                 <a:cs typeface="Cambria" pitchFamily="34" charset="-120"/>
               </a:rPr>
-              <a:t>In This Lecture</a:t>
-            </a:r>
-            <a:endParaRPr lang="en-US" sz="3400" dirty="0"/>
-          </a:p>
-        </p:txBody>
-      </p:sp>
-      <p:sp>
-        <p:nvSpPr>
-          <p:cNvPr id="4" name="Shape 2"/>
-          <p:cNvSpPr/>
-          <p:nvPr/>
-        </p:nvSpPr>
-        <p:spPr>
-          <a:xfrm>
-            <a:off x="685800" y="1965960"/>
-            <a:ext cx="457200" cy="457200"/>
-          </a:xfrm>
-          <a:prstGeom prst="ellipse">
-            <a:avLst/>
-          </a:prstGeom>
-          <a:solidFill>
-            <a:srgbClr val="FF8A3D"/>
-          </a:solidFill>
-          <a:ln/>
-        </p:spPr>
-      </p:sp>
-      <p:sp>
-        <p:nvSpPr>
-          <p:cNvPr id="5" name="Text 3"/>
-          <p:cNvSpPr txBox="1"/>
-          <p:nvPr/>
-        </p:nvSpPr>
-        <p:spPr>
-          <a:xfrm>
-            <a:off x="685800" y="1965960"/>
-            <a:ext cx="457200" cy="457200"/>
-          </a:xfrm>
-          <a:prstGeom prst="rect">
-            <a:avLst/>
-          </a:prstGeom>
-          <a:noFill/>
-          <a:ln/>
-        </p:spPr>
-        <p:txBody>
-          <a:bodyPr wrap="square" lIns="0" tIns="0" rIns="0" bIns="0" rtlCol="0" anchor="ctr"/>
-          <a:lstStyle/>
-          <a:p>
-            <a:pPr algn="ctr" indent="0" marL="0">
-              <a:buNone/>
-            </a:pPr>
-            <a:r>
-              <a:rPr lang="en-US" sz="1500" b="1" dirty="0">
-                <a:solidFill>
-                  <a:srgbClr val="FFFFFF"/>
-                </a:solidFill>
-                <a:latin typeface="Calibri" pitchFamily="34" charset="0"/>
-                <a:ea typeface="Calibri" pitchFamily="34" charset="-122"/>
-                <a:cs typeface="Calibri" pitchFamily="34" charset="-120"/>
-              </a:rPr>
-              <a:t>1</a:t>
-            </a:r>
-            <a:endParaRPr lang="en-US" sz="1500" dirty="0"/>
-          </a:p>
-        </p:txBody>
-      </p:sp>
-      <p:sp>
-        <p:nvSpPr>
-          <p:cNvPr id="6" name="Text 4"/>
-          <p:cNvSpPr txBox="1"/>
-          <p:nvPr/>
-        </p:nvSpPr>
-        <p:spPr>
-          <a:xfrm>
-            <a:off x="1371600" y="1892808"/>
-            <a:ext cx="10180015" cy="640080"/>
-          </a:xfrm>
-          <a:prstGeom prst="rect">
-            <a:avLst/>
-          </a:prstGeom>
-          <a:noFill/>
-          <a:ln/>
-        </p:spPr>
-        <p:txBody>
-          <a:bodyPr wrap="square" lIns="0" tIns="0" rIns="0" bIns="0" rtlCol="0" anchor="ctr"/>
-          <a:lstStyle/>
-          <a:p>
-            <a:pPr indent="0" marL="0">
-              <a:buNone/>
-            </a:pPr>
-            <a:r>
-              <a:rPr lang="en-US" sz="1500" dirty="0">
-                <a:solidFill>
-                  <a:srgbClr val="26262F"/>
-                </a:solidFill>
-                <a:latin typeface="Calibri" pitchFamily="34" charset="0"/>
-                <a:ea typeface="Calibri" pitchFamily="34" charset="-122"/>
-                <a:cs typeface="Calibri" pitchFamily="34" charset="-120"/>
-              </a:rPr>
-              <a:t>CSS syntax, and the three ways to attach CSS to HTML</a:t>
-            </a:r>
-            <a:endParaRPr lang="en-US" sz="1500" dirty="0"/>
-          </a:p>
-        </p:txBody>
-      </p:sp>
-      <p:sp>
-        <p:nvSpPr>
-          <p:cNvPr id="7" name="Shape 5"/>
-          <p:cNvSpPr/>
-          <p:nvPr/>
-        </p:nvSpPr>
-        <p:spPr>
-          <a:xfrm>
-            <a:off x="685800" y="2679192"/>
-            <a:ext cx="457200" cy="457200"/>
-          </a:xfrm>
-          <a:prstGeom prst="ellipse">
-            <a:avLst/>
-          </a:prstGeom>
-          <a:solidFill>
-            <a:srgbClr val="FF8A3D"/>
-          </a:solidFill>
-          <a:ln/>
-        </p:spPr>
-      </p:sp>
-      <p:sp>
-        <p:nvSpPr>
-          <p:cNvPr id="8" name="Text 6"/>
-          <p:cNvSpPr txBox="1"/>
-          <p:nvPr/>
-        </p:nvSpPr>
-        <p:spPr>
-          <a:xfrm>
-            <a:off x="685800" y="2679192"/>
-            <a:ext cx="457200" cy="457200"/>
-          </a:xfrm>
-          <a:prstGeom prst="rect">
-            <a:avLst/>
-          </a:prstGeom>
-          <a:noFill/>
-          <a:ln/>
-        </p:spPr>
-        <p:txBody>
-          <a:bodyPr wrap="square" lIns="0" tIns="0" rIns="0" bIns="0" rtlCol="0" anchor="ctr"/>
-          <a:lstStyle/>
-          <a:p>
-            <a:pPr algn="ctr" indent="0" marL="0">
-              <a:buNone/>
-            </a:pPr>
-            <a:r>
-              <a:rPr lang="en-US" sz="1500" b="1" dirty="0">
-                <a:solidFill>
-                  <a:srgbClr val="FFFFFF"/>
-                </a:solidFill>
-                <a:latin typeface="Calibri" pitchFamily="34" charset="0"/>
-                <a:ea typeface="Calibri" pitchFamily="34" charset="-122"/>
-                <a:cs typeface="Calibri" pitchFamily="34" charset="-120"/>
-              </a:rPr>
-              <a:t>2</a:t>
-            </a:r>
-            <a:endParaRPr lang="en-US" sz="1500" dirty="0"/>
-          </a:p>
-        </p:txBody>
-      </p:sp>
-      <p:sp>
-        <p:nvSpPr>
-          <p:cNvPr id="9" name="Text 7"/>
-          <p:cNvSpPr txBox="1"/>
-          <p:nvPr/>
-        </p:nvSpPr>
-        <p:spPr>
-          <a:xfrm>
-            <a:off x="1371600" y="2606040"/>
-            <a:ext cx="10180015" cy="640080"/>
-          </a:xfrm>
-          <a:prstGeom prst="rect">
-            <a:avLst/>
-          </a:prstGeom>
-          <a:noFill/>
-          <a:ln/>
-        </p:spPr>
-        <p:txBody>
-          <a:bodyPr wrap="square" lIns="0" tIns="0" rIns="0" bIns="0" rtlCol="0" anchor="ctr"/>
-          <a:lstStyle/>
-          <a:p>
-            <a:pPr indent="0" marL="0">
-              <a:buNone/>
-            </a:pPr>
-            <a:r>
-              <a:rPr lang="en-US" sz="1500" dirty="0">
-                <a:solidFill>
-                  <a:srgbClr val="26262F"/>
-                </a:solidFill>
-                <a:latin typeface="Calibri" pitchFamily="34" charset="0"/>
-                <a:ea typeface="Calibri" pitchFamily="34" charset="-122"/>
-                <a:cs typeface="Calibri" pitchFamily="34" charset="-120"/>
-              </a:rPr>
-              <a:t>Selectors: element, class, id, attribute, grouping, descendant</a:t>
-            </a:r>
-            <a:endParaRPr lang="en-US" sz="1500" dirty="0"/>
-          </a:p>
-        </p:txBody>
-      </p:sp>
-      <p:sp>
-        <p:nvSpPr>
-          <p:cNvPr id="10" name="Shape 8"/>
-          <p:cNvSpPr/>
-          <p:nvPr/>
-        </p:nvSpPr>
-        <p:spPr>
-          <a:xfrm>
-            <a:off x="685800" y="3392424"/>
-            <a:ext cx="457200" cy="457200"/>
-          </a:xfrm>
-          <a:prstGeom prst="ellipse">
-            <a:avLst/>
-          </a:prstGeom>
-          <a:solidFill>
-            <a:srgbClr val="FF8A3D"/>
-          </a:solidFill>
-          <a:ln/>
-        </p:spPr>
-      </p:sp>
-      <p:sp>
-        <p:nvSpPr>
-          <p:cNvPr id="11" name="Text 9"/>
-          <p:cNvSpPr txBox="1"/>
-          <p:nvPr/>
-        </p:nvSpPr>
-        <p:spPr>
-          <a:xfrm>
-            <a:off x="685800" y="3392424"/>
-            <a:ext cx="457200" cy="457200"/>
-          </a:xfrm>
-          <a:prstGeom prst="rect">
-            <a:avLst/>
-          </a:prstGeom>
-          <a:noFill/>
-          <a:ln/>
-        </p:spPr>
-        <p:txBody>
-          <a:bodyPr wrap="square" lIns="0" tIns="0" rIns="0" bIns="0" rtlCol="0" anchor="ctr"/>
-          <a:lstStyle/>
-          <a:p>
-            <a:pPr algn="ctr" indent="0" marL="0">
-              <a:buNone/>
-            </a:pPr>
-            <a:r>
-              <a:rPr lang="en-US" sz="1500" b="1" dirty="0">
-                <a:solidFill>
-                  <a:srgbClr val="FFFFFF"/>
-                </a:solidFill>
-                <a:latin typeface="Calibri" pitchFamily="34" charset="0"/>
-                <a:ea typeface="Calibri" pitchFamily="34" charset="-122"/>
-                <a:cs typeface="Calibri" pitchFamily="34" charset="-120"/>
-              </a:rPr>
-              <a:t>3</a:t>
-            </a:r>
-            <a:endParaRPr lang="en-US" sz="1500" dirty="0"/>
-          </a:p>
-        </p:txBody>
-      </p:sp>
-      <p:sp>
-        <p:nvSpPr>
-          <p:cNvPr id="12" name="Text 10"/>
-          <p:cNvSpPr txBox="1"/>
-          <p:nvPr/>
-        </p:nvSpPr>
-        <p:spPr>
-          <a:xfrm>
-            <a:off x="1371600" y="3319272"/>
-            <a:ext cx="10180015" cy="640080"/>
-          </a:xfrm>
-          <a:prstGeom prst="rect">
-            <a:avLst/>
-          </a:prstGeom>
-          <a:noFill/>
-          <a:ln/>
-        </p:spPr>
-        <p:txBody>
-          <a:bodyPr wrap="square" lIns="0" tIns="0" rIns="0" bIns="0" rtlCol="0" anchor="ctr"/>
-          <a:lstStyle/>
-          <a:p>
-            <a:pPr indent="0" marL="0">
-              <a:buNone/>
-            </a:pPr>
-            <a:r>
-              <a:rPr lang="en-US" sz="1500" dirty="0">
-                <a:solidFill>
-                  <a:srgbClr val="26262F"/>
-                </a:solidFill>
-                <a:latin typeface="Calibri" pitchFamily="34" charset="0"/>
-                <a:ea typeface="Calibri" pitchFamily="34" charset="-122"/>
-                <a:cs typeface="Calibri" pitchFamily="34" charset="-120"/>
-              </a:rPr>
-              <a:t>Pseudo-classes and pseudo-elements</a:t>
-            </a:r>
-            <a:endParaRPr lang="en-US" sz="1500" dirty="0"/>
-          </a:p>
-        </p:txBody>
-      </p:sp>
-      <p:sp>
-        <p:nvSpPr>
-          <p:cNvPr id="13" name="Shape 11"/>
-          <p:cNvSpPr/>
-          <p:nvPr/>
-        </p:nvSpPr>
-        <p:spPr>
-          <a:xfrm>
-            <a:off x="685800" y="4105656"/>
-            <a:ext cx="457200" cy="457200"/>
-          </a:xfrm>
-          <a:prstGeom prst="ellipse">
-            <a:avLst/>
-          </a:prstGeom>
-          <a:solidFill>
-            <a:srgbClr val="FF8A3D"/>
-          </a:solidFill>
-          <a:ln/>
-        </p:spPr>
-      </p:sp>
-      <p:sp>
-        <p:nvSpPr>
-          <p:cNvPr id="14" name="Text 12"/>
-          <p:cNvSpPr txBox="1"/>
-          <p:nvPr/>
-        </p:nvSpPr>
-        <p:spPr>
-          <a:xfrm>
-            <a:off x="685800" y="4105656"/>
-            <a:ext cx="457200" cy="457200"/>
-          </a:xfrm>
-          <a:prstGeom prst="rect">
-            <a:avLst/>
-          </a:prstGeom>
-          <a:noFill/>
-          <a:ln/>
-        </p:spPr>
-        <p:txBody>
-          <a:bodyPr wrap="square" lIns="0" tIns="0" rIns="0" bIns="0" rtlCol="0" anchor="ctr"/>
-          <a:lstStyle/>
-          <a:p>
-            <a:pPr algn="ctr" indent="0" marL="0">
-              <a:buNone/>
-            </a:pPr>
-            <a:r>
-              <a:rPr lang="en-US" sz="1500" b="1" dirty="0">
-                <a:solidFill>
-                  <a:srgbClr val="FFFFFF"/>
-                </a:solidFill>
-                <a:latin typeface="Calibri" pitchFamily="34" charset="0"/>
-                <a:ea typeface="Calibri" pitchFamily="34" charset="-122"/>
-                <a:cs typeface="Calibri" pitchFamily="34" charset="-120"/>
-              </a:rPr>
-              <a:t>4</a:t>
-            </a:r>
-            <a:endParaRPr lang="en-US" sz="1500" dirty="0"/>
-          </a:p>
-        </p:txBody>
-      </p:sp>
-      <p:sp>
-        <p:nvSpPr>
-          <p:cNvPr id="15" name="Text 13"/>
-          <p:cNvSpPr txBox="1"/>
-          <p:nvPr/>
-        </p:nvSpPr>
-        <p:spPr>
-          <a:xfrm>
-            <a:off x="1371600" y="4032504"/>
-            <a:ext cx="10180015" cy="640080"/>
-          </a:xfrm>
-          <a:prstGeom prst="rect">
-            <a:avLst/>
-          </a:prstGeom>
-          <a:noFill/>
-          <a:ln/>
-        </p:spPr>
-        <p:txBody>
-          <a:bodyPr wrap="square" lIns="0" tIns="0" rIns="0" bIns="0" rtlCol="0" anchor="ctr"/>
-          <a:lstStyle/>
-          <a:p>
-            <a:pPr indent="0" marL="0">
-              <a:buNone/>
-            </a:pPr>
-            <a:r>
-              <a:rPr lang="en-US" sz="1500" dirty="0">
-                <a:solidFill>
-                  <a:srgbClr val="26262F"/>
-                </a:solidFill>
-                <a:latin typeface="Calibri" pitchFamily="34" charset="0"/>
-                <a:ea typeface="Calibri" pitchFamily="34" charset="-122"/>
-                <a:cs typeface="Calibri" pitchFamily="34" charset="-120"/>
-              </a:rPr>
-              <a:t>The cascade and specificity — every conflict case, and the real scoring method</a:t>
-            </a:r>
-            <a:endParaRPr lang="en-US" sz="1500" dirty="0"/>
-          </a:p>
-        </p:txBody>
-      </p:sp>
-      <p:sp>
-        <p:nvSpPr>
-          <p:cNvPr id="16" name="Shape 14"/>
-          <p:cNvSpPr/>
-          <p:nvPr/>
-        </p:nvSpPr>
-        <p:spPr>
-          <a:xfrm>
-            <a:off x="685800" y="4818888"/>
-            <a:ext cx="457200" cy="457200"/>
-          </a:xfrm>
-          <a:prstGeom prst="ellipse">
-            <a:avLst/>
-          </a:prstGeom>
-          <a:solidFill>
-            <a:srgbClr val="FF8A3D"/>
-          </a:solidFill>
-          <a:ln/>
-        </p:spPr>
-      </p:sp>
-      <p:sp>
-        <p:nvSpPr>
-          <p:cNvPr id="17" name="Text 15"/>
-          <p:cNvSpPr txBox="1"/>
-          <p:nvPr/>
-        </p:nvSpPr>
-        <p:spPr>
-          <a:xfrm>
-            <a:off x="685800" y="4818888"/>
-            <a:ext cx="457200" cy="457200"/>
-          </a:xfrm>
-          <a:prstGeom prst="rect">
-            <a:avLst/>
-          </a:prstGeom>
-          <a:noFill/>
-          <a:ln/>
-        </p:spPr>
-        <p:txBody>
-          <a:bodyPr wrap="square" lIns="0" tIns="0" rIns="0" bIns="0" rtlCol="0" anchor="ctr"/>
-          <a:lstStyle/>
-          <a:p>
-            <a:pPr algn="ctr" indent="0" marL="0">
-              <a:buNone/>
-            </a:pPr>
-            <a:r>
-              <a:rPr lang="en-US" sz="1500" b="1" dirty="0">
-                <a:solidFill>
-                  <a:srgbClr val="FFFFFF"/>
-                </a:solidFill>
-                <a:latin typeface="Calibri" pitchFamily="34" charset="0"/>
-                <a:ea typeface="Calibri" pitchFamily="34" charset="-122"/>
-                <a:cs typeface="Calibri" pitchFamily="34" charset="-120"/>
-              </a:rPr>
-              <a:t>5</a:t>
-            </a:r>
-            <a:endParaRPr lang="en-US" sz="1500" dirty="0"/>
-          </a:p>
-        </p:txBody>
-      </p:sp>
-      <p:sp>
-        <p:nvSpPr>
-          <p:cNvPr id="18" name="Text 16"/>
-          <p:cNvSpPr txBox="1"/>
-          <p:nvPr/>
-        </p:nvSpPr>
-        <p:spPr>
-          <a:xfrm>
-            <a:off x="1371600" y="4745736"/>
-            <a:ext cx="10180015" cy="640080"/>
-          </a:xfrm>
-          <a:prstGeom prst="rect">
-            <a:avLst/>
-          </a:prstGeom>
-          <a:noFill/>
-          <a:ln/>
-        </p:spPr>
-        <p:txBody>
-          <a:bodyPr wrap="square" lIns="0" tIns="0" rIns="0" bIns="0" rtlCol="0" anchor="ctr"/>
-          <a:lstStyle/>
-          <a:p>
-            <a:pPr indent="0" marL="0">
-              <a:buNone/>
-            </a:pPr>
-            <a:r>
-              <a:rPr lang="en-US" sz="1500" dirty="0">
-                <a:solidFill>
-                  <a:srgbClr val="26262F"/>
-                </a:solidFill>
-                <a:latin typeface="Calibri" pitchFamily="34" charset="0"/>
-                <a:ea typeface="Calibri" pitchFamily="34" charset="-122"/>
-                <a:cs typeface="Calibri" pitchFamily="34" charset="-120"/>
-              </a:rPr>
-              <a:t>Which properties inherit from parent to child, and which do not</a:t>
-            </a:r>
-            <a:endParaRPr lang="en-US" sz="1500" dirty="0"/>
-          </a:p>
-        </p:txBody>
-      </p:sp>
-      <p:sp>
-        <p:nvSpPr>
-          <p:cNvPr id="19" name="Shape 17"/>
-          <p:cNvSpPr/>
-          <p:nvPr/>
-        </p:nvSpPr>
-        <p:spPr>
-          <a:xfrm>
-            <a:off x="685800" y="5532120"/>
-            <a:ext cx="457200" cy="457200"/>
-          </a:xfrm>
-          <a:prstGeom prst="ellipse">
-            <a:avLst/>
-          </a:prstGeom>
-          <a:solidFill>
-            <a:srgbClr val="FF8A3D"/>
-          </a:solidFill>
-          <a:ln/>
-        </p:spPr>
-      </p:sp>
-      <p:sp>
-        <p:nvSpPr>
-          <p:cNvPr id="20" name="Text 18"/>
-          <p:cNvSpPr txBox="1"/>
-          <p:nvPr/>
-        </p:nvSpPr>
-        <p:spPr>
-          <a:xfrm>
-            <a:off x="685800" y="5532120"/>
-            <a:ext cx="457200" cy="457200"/>
-          </a:xfrm>
-          <a:prstGeom prst="rect">
-            <a:avLst/>
-          </a:prstGeom>
-          <a:noFill/>
-          <a:ln/>
-        </p:spPr>
-        <p:txBody>
-          <a:bodyPr wrap="square" lIns="0" tIns="0" rIns="0" bIns="0" rtlCol="0" anchor="ctr"/>
-          <a:lstStyle/>
-          <a:p>
-            <a:pPr algn="ctr" indent="0" marL="0">
-              <a:buNone/>
-            </a:pPr>
-            <a:r>
-              <a:rPr lang="en-US" sz="1500" b="1" dirty="0">
-                <a:solidFill>
-                  <a:srgbClr val="FFFFFF"/>
-                </a:solidFill>
-                <a:latin typeface="Calibri" pitchFamily="34" charset="0"/>
-                <a:ea typeface="Calibri" pitchFamily="34" charset="-122"/>
-                <a:cs typeface="Calibri" pitchFamily="34" charset="-120"/>
-              </a:rPr>
-              <a:t>6</a:t>
-            </a:r>
-            <a:endParaRPr lang="en-US" sz="1500" dirty="0"/>
-          </a:p>
-        </p:txBody>
-      </p:sp>
-      <p:sp>
-        <p:nvSpPr>
-          <p:cNvPr id="21" name="Text 19"/>
-          <p:cNvSpPr txBox="1"/>
-          <p:nvPr/>
-        </p:nvSpPr>
-        <p:spPr>
-          <a:xfrm>
-            <a:off x="1371600" y="5458968"/>
-            <a:ext cx="10180015" cy="640080"/>
-          </a:xfrm>
-          <a:prstGeom prst="rect">
-            <a:avLst/>
-          </a:prstGeom>
-          <a:noFill/>
-          <a:ln/>
-        </p:spPr>
-        <p:txBody>
-          <a:bodyPr wrap="square" lIns="0" tIns="0" rIns="0" bIns="0" rtlCol="0" anchor="ctr"/>
-          <a:lstStyle/>
-          <a:p>
-            <a:pPr indent="0" marL="0">
-              <a:buNone/>
-            </a:pPr>
-            <a:r>
-              <a:rPr lang="en-US" sz="1500" dirty="0">
-                <a:solidFill>
-                  <a:srgbClr val="26262F"/>
-                </a:solidFill>
-                <a:latin typeface="Calibri" pitchFamily="34" charset="0"/>
-                <a:ea typeface="Calibri" pitchFamily="34" charset="-122"/>
-                <a:cs typeface="Calibri" pitchFamily="34" charset="-120"/>
-              </a:rPr>
-              <a:t>The most common colour, font, text, and background properties</a:t>
-            </a:r>
-            <a:endParaRPr lang="en-US" sz="1500" dirty="0"/>
-          </a:p>
-        </p:txBody>
-      </p:sp>
-      <p:sp>
-        <p:nvSpPr>
-          <p:cNvPr id="22" name="Text 20"/>
-          <p:cNvSpPr txBox="1"/>
-          <p:nvPr/>
-        </p:nvSpPr>
-        <p:spPr>
-          <a:xfrm>
-            <a:off x="640080" y="6446520"/>
-            <a:ext cx="8686800" cy="292608"/>
-          </a:xfrm>
-          <a:prstGeom prst="rect">
-            <a:avLst/>
-          </a:prstGeom>
-          <a:noFill/>
-          <a:ln/>
-        </p:spPr>
-        <p:txBody>
-          <a:bodyPr wrap="square" lIns="0" tIns="0" rIns="0" bIns="0" rtlCol="0" anchor="ctr"/>
-          <a:lstStyle/>
-          <a:p>
-            <a:pPr algn="l" indent="0" marL="0">
-              <a:buNone/>
-            </a:pPr>
-            <a:r>
-              <a:rPr lang="en-US" sz="900" dirty="0">
-                <a:solidFill>
-                  <a:srgbClr val="5D5D72"/>
-                </a:solidFill>
-                <a:latin typeface="Calibri" pitchFamily="34" charset="0"/>
-                <a:ea typeface="Calibri" pitchFamily="34" charset="-122"/>
-                <a:cs typeface="Calibri" pitchFamily="34" charset="-120"/>
-              </a:rPr>
-              <a:t>Usman Akram  •  COMSATS University Islamabad</a:t>
-            </a:r>
-            <a:endParaRPr lang="en-US" sz="900" dirty="0"/>
-          </a:p>
-        </p:txBody>
-      </p:sp>
-      <p:sp>
-        <p:nvSpPr>
-          <p:cNvPr id="23" name="Text 21"/>
-          <p:cNvSpPr txBox="1"/>
-          <p:nvPr/>
-        </p:nvSpPr>
-        <p:spPr>
-          <a:xfrm>
-            <a:off x="11155680" y="6446520"/>
-            <a:ext cx="457200" cy="292608"/>
-          </a:xfrm>
-          <a:prstGeom prst="rect">
-            <a:avLst/>
-          </a:prstGeom>
-          <a:noFill/>
-          <a:ln/>
-        </p:spPr>
-        <p:txBody>
-          <a:bodyPr wrap="square" lIns="0" tIns="0" rIns="0" bIns="0" rtlCol="0" anchor="ctr"/>
-          <a:lstStyle/>
-          <a:p>
-            <a:pPr algn="r" indent="0" marL="0">
-              <a:buNone/>
-            </a:pPr>
-            <a:r>
-              <a:rPr lang="en-US" sz="900" dirty="0">
-                <a:solidFill>
-                  <a:srgbClr val="5D5D72"/>
-                </a:solidFill>
-                <a:latin typeface="Calibri" pitchFamily="34" charset="0"/>
-                <a:ea typeface="Calibri" pitchFamily="34" charset="-122"/>
-                <a:cs typeface="Calibri" pitchFamily="34" charset="-120"/>
-              </a:rPr>
-              <a:t>2</a:t>
-            </a:r>
-            <a:endParaRPr lang="en-US" sz="900" dirty="0"/>
-          </a:p>
-        </p:txBody>
-      </p:sp>
-    </p:spTree>
-  </p:cSld>
-  <p:clrMapOvr>
-    <a:masterClrMapping/>
-  </p:clrMapOvr>
-</p:sld>
-</file>
-
-<file path=ppt/slides/slide20.xml><?xml version="1.0" encoding="utf-8"?>
-<p:sld xmlns:a="http://schemas.openxmlformats.org/drawingml/2006/main" xmlns:r="http://schemas.openxmlformats.org/officeDocument/2006/relationships" xmlns:p="http://schemas.openxmlformats.org/presentationml/2006/main">
-  <p:cSld name="Slide 20">
-    <p:bg>
-      <p:bgPr>
-        <a:solidFill>
-          <a:srgbClr val="FFFFFF"/>
-        </a:solidFill>
-      </p:bgPr>
-    </p:bg>
-    <p:spTree>
-      <p:nvGrpSpPr>
-        <p:cNvPr id="1" name=""/>
-        <p:cNvGrpSpPr/>
-        <p:nvPr/>
-      </p:nvGrpSpPr>
-      <p:grpSpPr>
-        <a:xfrm>
-          <a:off x="0" y="0"/>
-          <a:ext cx="0" cy="0"/>
-          <a:chOff x="0" y="0"/>
-          <a:chExt cx="0" cy="0"/>
-        </a:xfrm>
-      </p:grpSpPr>
-      <p:sp>
-        <p:nvSpPr>
-          <p:cNvPr id="2" name="Text 0"/>
-          <p:cNvSpPr txBox="1"/>
-          <p:nvPr/>
-        </p:nvSpPr>
-        <p:spPr>
-          <a:xfrm>
-            <a:off x="640080" y="457200"/>
-            <a:ext cx="10058400" cy="365760"/>
-          </a:xfrm>
-          <a:prstGeom prst="rect">
-            <a:avLst/>
-          </a:prstGeom>
-          <a:noFill/>
-          <a:ln/>
-        </p:spPr>
-        <p:txBody>
-          <a:bodyPr wrap="square" lIns="0" tIns="0" rIns="0" bIns="0" rtlCol="0" anchor="ctr"/>
-          <a:lstStyle/>
-          <a:p>
-            <a:pPr algn="l" indent="0" marL="0">
-              <a:buNone/>
-            </a:pPr>
-            <a:r>
-              <a:rPr lang="en-US" sz="1300" b="1" spc="300" kern="0" dirty="0">
-                <a:solidFill>
-                  <a:srgbClr val="FF8A3D"/>
-                </a:solidFill>
-                <a:latin typeface="Calibri" pitchFamily="34" charset="0"/>
-                <a:ea typeface="Calibri" pitchFamily="34" charset="-122"/>
-                <a:cs typeface="Calibri" pitchFamily="34" charset="-120"/>
-              </a:rPr>
-              <a:t>EVERY CONFLICT CASE</a:t>
-            </a:r>
-            <a:endParaRPr lang="en-US" sz="1300" dirty="0"/>
-          </a:p>
-        </p:txBody>
-      </p:sp>
-      <p:sp>
-        <p:nvSpPr>
-          <p:cNvPr id="3" name="Text 1"/>
-          <p:cNvSpPr txBox="1"/>
-          <p:nvPr/>
-        </p:nvSpPr>
-        <p:spPr>
-          <a:xfrm>
-            <a:off x="640080" y="841248"/>
-            <a:ext cx="10881360" cy="914400"/>
-          </a:xfrm>
-          <a:prstGeom prst="rect">
-            <a:avLst/>
-          </a:prstGeom>
-          <a:noFill/>
-          <a:ln/>
-        </p:spPr>
-        <p:txBody>
-          <a:bodyPr wrap="square" lIns="0" tIns="0" rIns="0" bIns="0" rtlCol="0" anchor="ctr"/>
-          <a:lstStyle/>
-          <a:p>
-            <a:pPr algn="l" indent="0" marL="0">
-              <a:buNone/>
-            </a:pPr>
-            <a:r>
-              <a:rPr lang="en-US" sz="3400" b="1" dirty="0">
-                <a:solidFill>
-                  <a:srgbClr val="2B2B7A"/>
-                </a:solidFill>
-                <a:latin typeface="Cambria" pitchFamily="34" charset="0"/>
-                <a:ea typeface="Cambria" pitchFamily="34" charset="-122"/>
-                <a:cs typeface="Cambria" pitchFamily="34" charset="-120"/>
-              </a:rPr>
               <a:t>How the Browser Resolves Conflicts</a:t>
             </a:r>
             <a:endParaRPr lang="en-US" sz="3400" dirty="0"/>
@@ -8908,7 +9788,7 @@
       </p:sp>
       <p:graphicFrame>
         <p:nvGraphicFramePr>
-          <p:cNvPr id="21" name="Table 0"/>
+          <p:cNvPr id="23" name="Table 0"/>
           <p:cNvGraphicFramePr>
             <a:graphicFrameLocks noGrp="1"/>
           </p:cNvGraphicFramePr>
@@ -9836,7 +10716,7 @@
                 <a:ea typeface="Calibri" pitchFamily="34" charset="-122"/>
                 <a:cs typeface="Calibri" pitchFamily="34" charset="-120"/>
               </a:rPr>
-              <a:t>20</a:t>
+              <a:t>22</a:t>
             </a:r>
             <a:endParaRPr lang="en-US" sz="900" dirty="0"/>
           </a:p>
@@ -9850,9 +10730,9 @@
 </p:sld>
 </file>
 
-<file path=ppt/slides/slide21.xml><?xml version="1.0" encoding="utf-8"?>
+<file path=ppt/slides/slide23.xml><?xml version="1.0" encoding="utf-8"?>
 <p:sld xmlns:a="http://schemas.openxmlformats.org/drawingml/2006/main" xmlns:r="http://schemas.openxmlformats.org/officeDocument/2006/relationships" xmlns:p="http://schemas.openxmlformats.org/presentationml/2006/main">
-  <p:cSld name="Slide 21">
+  <p:cSld name="Slide 23">
     <p:bg>
       <p:bgPr>
         <a:solidFill>
@@ -10176,7 +11056,7 @@
                 <a:ea typeface="Calibri" pitchFamily="34" charset="-122"/>
                 <a:cs typeface="Calibri" pitchFamily="34" charset="-120"/>
               </a:rPr>
-              <a:t>21</a:t>
+              <a:t>23</a:t>
             </a:r>
             <a:endParaRPr lang="en-US" sz="900" dirty="0"/>
           </a:p>
@@ -10190,9 +11070,9 @@
 </p:sld>
 </file>
 
-<file path=ppt/slides/slide22.xml><?xml version="1.0" encoding="utf-8"?>
+<file path=ppt/slides/slide24.xml><?xml version="1.0" encoding="utf-8"?>
 <p:sld xmlns:a="http://schemas.openxmlformats.org/drawingml/2006/main" xmlns:r="http://schemas.openxmlformats.org/officeDocument/2006/relationships" xmlns:p="http://schemas.openxmlformats.org/presentationml/2006/main">
-  <p:cSld name="Slide 22">
+  <p:cSld name="Slide 24">
     <p:bg>
       <p:bgPr>
         <a:solidFill>
@@ -10294,7 +11174,7 @@
       </p:sp>
       <p:graphicFrame>
         <p:nvGraphicFramePr>
-          <p:cNvPr id="23" name="Table 0"/>
+          <p:cNvPr id="25" name="Table 0"/>
           <p:cNvGraphicFramePr>
             <a:graphicFrameLocks noGrp="1"/>
           </p:cNvGraphicFramePr>
@@ -11123,7 +12003,7 @@
                 <a:ea typeface="Calibri" pitchFamily="34" charset="-122"/>
                 <a:cs typeface="Calibri" pitchFamily="34" charset="-120"/>
               </a:rPr>
-              <a:t>22</a:t>
+              <a:t>24</a:t>
             </a:r>
             <a:endParaRPr lang="en-US" sz="900" dirty="0"/>
           </a:p>
@@ -11137,9 +12017,9 @@
 </p:sld>
 </file>
 
-<file path=ppt/slides/slide23.xml><?xml version="1.0" encoding="utf-8"?>
+<file path=ppt/slides/slide25.xml><?xml version="1.0" encoding="utf-8"?>
 <p:sld xmlns:a="http://schemas.openxmlformats.org/drawingml/2006/main" xmlns:r="http://schemas.openxmlformats.org/officeDocument/2006/relationships" xmlns:p="http://schemas.openxmlformats.org/presentationml/2006/main">
-  <p:cSld name="Slide 23">
+  <p:cSld name="Slide 25">
     <p:bg>
       <p:bgPr>
         <a:solidFill>
@@ -11583,7 +12463,7 @@
                 <a:ea typeface="Calibri" pitchFamily="34" charset="-122"/>
                 <a:cs typeface="Calibri" pitchFamily="34" charset="-120"/>
               </a:rPr>
-              <a:t>23</a:t>
+              <a:t>25</a:t>
             </a:r>
             <a:endParaRPr lang="en-US" sz="900" dirty="0"/>
           </a:p>
@@ -11597,9 +12477,9 @@
 </p:sld>
 </file>
 
-<file path=ppt/slides/slide24.xml><?xml version="1.0" encoding="utf-8"?>
+<file path=ppt/slides/slide26.xml><?xml version="1.0" encoding="utf-8"?>
 <p:sld xmlns:a="http://schemas.openxmlformats.org/drawingml/2006/main" xmlns:r="http://schemas.openxmlformats.org/officeDocument/2006/relationships" xmlns:p="http://schemas.openxmlformats.org/presentationml/2006/main">
-  <p:cSld name="Slide 24">
+  <p:cSld name="Slide 26">
     <p:bg>
       <p:bgPr>
         <a:solidFill>
@@ -11701,7 +12581,7 @@
       </p:sp>
       <p:graphicFrame>
         <p:nvGraphicFramePr>
-          <p:cNvPr id="25" name="Table 0"/>
+          <p:cNvPr id="27" name="Table 0"/>
           <p:cNvGraphicFramePr>
             <a:graphicFrameLocks noGrp="1"/>
           </p:cNvGraphicFramePr>
@@ -12629,576 +13509,6 @@
                 <a:ea typeface="Calibri" pitchFamily="34" charset="-122"/>
                 <a:cs typeface="Calibri" pitchFamily="34" charset="-120"/>
               </a:rPr>
-              <a:t>24</a:t>
-            </a:r>
-            <a:endParaRPr lang="en-US" sz="900" dirty="0"/>
-          </a:p>
-        </p:txBody>
-      </p:sp>
-    </p:spTree>
-  </p:cSld>
-  <p:clrMapOvr>
-    <a:masterClrMapping/>
-  </p:clrMapOvr>
-</p:sld>
-</file>
-
-<file path=ppt/slides/slide25.xml><?xml version="1.0" encoding="utf-8"?>
-<p:sld xmlns:a="http://schemas.openxmlformats.org/drawingml/2006/main" xmlns:r="http://schemas.openxmlformats.org/officeDocument/2006/relationships" xmlns:p="http://schemas.openxmlformats.org/presentationml/2006/main">
-  <p:cSld name="Slide 25">
-    <p:bg>
-      <p:bgPr>
-        <a:solidFill>
-          <a:srgbClr val="FFFFFF"/>
-        </a:solidFill>
-      </p:bgPr>
-    </p:bg>
-    <p:spTree>
-      <p:nvGrpSpPr>
-        <p:cNvPr id="1" name=""/>
-        <p:cNvGrpSpPr/>
-        <p:nvPr/>
-      </p:nvGrpSpPr>
-      <p:grpSpPr>
-        <a:xfrm>
-          <a:off x="0" y="0"/>
-          <a:ext cx="0" cy="0"/>
-          <a:chOff x="0" y="0"/>
-          <a:chExt cx="0" cy="0"/>
-        </a:xfrm>
-      </p:grpSpPr>
-      <p:sp>
-        <p:nvSpPr>
-          <p:cNvPr id="2" name="Text 0"/>
-          <p:cNvSpPr txBox="1"/>
-          <p:nvPr/>
-        </p:nvSpPr>
-        <p:spPr>
-          <a:xfrm>
-            <a:off x="640080" y="457200"/>
-            <a:ext cx="10058400" cy="365760"/>
-          </a:xfrm>
-          <a:prstGeom prst="rect">
-            <a:avLst/>
-          </a:prstGeom>
-          <a:noFill/>
-          <a:ln/>
-        </p:spPr>
-        <p:txBody>
-          <a:bodyPr wrap="square" lIns="0" tIns="0" rIns="0" bIns="0" rtlCol="0" anchor="ctr"/>
-          <a:lstStyle/>
-          <a:p>
-            <a:pPr algn="l" indent="0" marL="0">
-              <a:buNone/>
-            </a:pPr>
-            <a:r>
-              <a:rPr lang="en-US" sz="1300" b="1" spc="300" kern="0" dirty="0">
-                <a:solidFill>
-                  <a:srgbClr val="FF8A3D"/>
-                </a:solidFill>
-                <a:latin typeface="Calibri" pitchFamily="34" charset="0"/>
-                <a:ea typeface="Calibri" pitchFamily="34" charset="-122"/>
-                <a:cs typeface="Calibri" pitchFamily="34" charset="-120"/>
-              </a:rPr>
-              <a:t>COLOUR</a:t>
-            </a:r>
-            <a:endParaRPr lang="en-US" sz="1300" dirty="0"/>
-          </a:p>
-        </p:txBody>
-      </p:sp>
-      <p:sp>
-        <p:nvSpPr>
-          <p:cNvPr id="3" name="Text 1"/>
-          <p:cNvSpPr txBox="1"/>
-          <p:nvPr/>
-        </p:nvSpPr>
-        <p:spPr>
-          <a:xfrm>
-            <a:off x="640080" y="841248"/>
-            <a:ext cx="10881360" cy="914400"/>
-          </a:xfrm>
-          <a:prstGeom prst="rect">
-            <a:avLst/>
-          </a:prstGeom>
-          <a:noFill/>
-          <a:ln/>
-        </p:spPr>
-        <p:txBody>
-          <a:bodyPr wrap="square" lIns="0" tIns="0" rIns="0" bIns="0" rtlCol="0" anchor="ctr"/>
-          <a:lstStyle/>
-          <a:p>
-            <a:pPr algn="l" indent="0" marL="0">
-              <a:buNone/>
-            </a:pPr>
-            <a:r>
-              <a:rPr lang="en-US" sz="3400" b="1" dirty="0">
-                <a:solidFill>
-                  <a:srgbClr val="2B2B7A"/>
-                </a:solidFill>
-                <a:latin typeface="Cambria" pitchFamily="34" charset="0"/>
-                <a:ea typeface="Cambria" pitchFamily="34" charset="-122"/>
-                <a:cs typeface="Cambria" pitchFamily="34" charset="-120"/>
-              </a:rPr>
-              <a:t>Five Ways to Write a Colour</a:t>
-            </a:r>
-            <a:endParaRPr lang="en-US" sz="3400" dirty="0"/>
-          </a:p>
-        </p:txBody>
-      </p:sp>
-      <p:sp>
-        <p:nvSpPr>
-          <p:cNvPr id="4" name="Text 2"/>
-          <p:cNvSpPr txBox="1"/>
-          <p:nvPr/>
-        </p:nvSpPr>
-        <p:spPr>
-          <a:xfrm>
-            <a:off x="640080" y="1691640"/>
-            <a:ext cx="10911535" cy="411480"/>
-          </a:xfrm>
-          <a:prstGeom prst="rect">
-            <a:avLst/>
-          </a:prstGeom>
-          <a:noFill/>
-          <a:ln/>
-        </p:spPr>
-        <p:txBody>
-          <a:bodyPr wrap="square" lIns="0" tIns="0" rIns="0" bIns="0" rtlCol="0" anchor="ctr"/>
-          <a:lstStyle/>
-          <a:p>
-            <a:pPr indent="0" marL="0">
-              <a:buNone/>
-            </a:pPr>
-            <a:r>
-              <a:rPr lang="en-US" sz="1350" i="1" dirty="0">
-                <a:solidFill>
-                  <a:srgbClr val="5D5D72"/>
-                </a:solidFill>
-                <a:latin typeface="Calibri" pitchFamily="34" charset="0"/>
-                <a:ea typeface="Calibri" pitchFamily="34" charset="-122"/>
-                <a:cs typeface="Calibri" pitchFamily="34" charset="-120"/>
-              </a:rPr>
-              <a:t>Named, hex, rgb() all give the same red; rgba() adds transparency; hsl() gives hue/saturation/lightness.</a:t>
-            </a:r>
-            <a:endParaRPr lang="en-US" sz="1350" dirty="0"/>
-          </a:p>
-        </p:txBody>
-      </p:sp>
-      <p:sp>
-        <p:nvSpPr>
-          <p:cNvPr id="5" name="Shape 3"/>
-          <p:cNvSpPr/>
-          <p:nvPr/>
-        </p:nvSpPr>
-        <p:spPr>
-          <a:xfrm>
-            <a:off x="530352" y="2221992"/>
-            <a:ext cx="11130991" cy="4059936"/>
-          </a:xfrm>
-          <a:prstGeom prst="roundRect">
-            <a:avLst>
-              <a:gd name="adj" fmla="val 1351"/>
-            </a:avLst>
-          </a:prstGeom>
-          <a:solidFill>
-            <a:srgbClr val="FFFFFF"/>
-          </a:solidFill>
-          <a:ln w="12700">
-            <a:solidFill>
-              <a:srgbClr val="E2E2EE"/>
-            </a:solidFill>
-            <a:prstDash val="solid"/>
-          </a:ln>
-          <a:effectLst>
-            <a:outerShdw sx="100000" sy="100000" kx="0" ky="0" algn="bl" rotWithShape="0" blurRad="101600" dist="38100" dir="5400000">
-              <a:srgbClr val="000000">
-                <a:alpha val="12000"/>
-              </a:srgbClr>
-            </a:outerShdw>
-          </a:effectLst>
-        </p:spPr>
-      </p:sp>
-      <p:pic>
-        <p:nvPicPr>
-          <p:cNvPr id="6" name="Image 0" descr="D:/GitHub/mern-web-book/docs/assets/img/lecture-05/color-values.png">    </p:cNvPr>
-          <p:cNvPicPr>
-            <a:picLocks noChangeAspect="1"/>
-          </p:cNvPicPr>
-          <p:nvPr/>
-        </p:nvPicPr>
-        <p:blipFill>
-          <a:blip r:embed="rId1"/>
-          <a:stretch>
-            <a:fillRect/>
-          </a:stretch>
-        </p:blipFill>
-        <p:spPr>
-          <a:xfrm>
-            <a:off x="2124813" y="2331720"/>
-            <a:ext cx="7942069" cy="3840480"/>
-          </a:xfrm>
-          <a:prstGeom prst="rect">
-            <a:avLst/>
-          </a:prstGeom>
-        </p:spPr>
-      </p:pic>
-      <p:sp>
-        <p:nvSpPr>
-          <p:cNvPr id="7" name="Text 4"/>
-          <p:cNvSpPr txBox="1"/>
-          <p:nvPr/>
-        </p:nvSpPr>
-        <p:spPr>
-          <a:xfrm>
-            <a:off x="640080" y="6446520"/>
-            <a:ext cx="8686800" cy="292608"/>
-          </a:xfrm>
-          <a:prstGeom prst="rect">
-            <a:avLst/>
-          </a:prstGeom>
-          <a:noFill/>
-          <a:ln/>
-        </p:spPr>
-        <p:txBody>
-          <a:bodyPr wrap="square" lIns="0" tIns="0" rIns="0" bIns="0" rtlCol="0" anchor="ctr"/>
-          <a:lstStyle/>
-          <a:p>
-            <a:pPr algn="l" indent="0" marL="0">
-              <a:buNone/>
-            </a:pPr>
-            <a:r>
-              <a:rPr lang="en-US" sz="900" dirty="0">
-                <a:solidFill>
-                  <a:srgbClr val="5D5D72"/>
-                </a:solidFill>
-                <a:latin typeface="Calibri" pitchFamily="34" charset="0"/>
-                <a:ea typeface="Calibri" pitchFamily="34" charset="-122"/>
-                <a:cs typeface="Calibri" pitchFamily="34" charset="-120"/>
-              </a:rPr>
-              <a:t>Usman Akram  •  COMSATS University Islamabad</a:t>
-            </a:r>
-            <a:endParaRPr lang="en-US" sz="900" dirty="0"/>
-          </a:p>
-        </p:txBody>
-      </p:sp>
-      <p:sp>
-        <p:nvSpPr>
-          <p:cNvPr id="8" name="Text 5"/>
-          <p:cNvSpPr txBox="1"/>
-          <p:nvPr/>
-        </p:nvSpPr>
-        <p:spPr>
-          <a:xfrm>
-            <a:off x="11155680" y="6446520"/>
-            <a:ext cx="457200" cy="292608"/>
-          </a:xfrm>
-          <a:prstGeom prst="rect">
-            <a:avLst/>
-          </a:prstGeom>
-          <a:noFill/>
-          <a:ln/>
-        </p:spPr>
-        <p:txBody>
-          <a:bodyPr wrap="square" lIns="0" tIns="0" rIns="0" bIns="0" rtlCol="0" anchor="ctr"/>
-          <a:lstStyle/>
-          <a:p>
-            <a:pPr algn="r" indent="0" marL="0">
-              <a:buNone/>
-            </a:pPr>
-            <a:r>
-              <a:rPr lang="en-US" sz="900" dirty="0">
-                <a:solidFill>
-                  <a:srgbClr val="5D5D72"/>
-                </a:solidFill>
-                <a:latin typeface="Calibri" pitchFamily="34" charset="0"/>
-                <a:ea typeface="Calibri" pitchFamily="34" charset="-122"/>
-                <a:cs typeface="Calibri" pitchFamily="34" charset="-120"/>
-              </a:rPr>
-              <a:t>25</a:t>
-            </a:r>
-            <a:endParaRPr lang="en-US" sz="900" dirty="0"/>
-          </a:p>
-        </p:txBody>
-      </p:sp>
-    </p:spTree>
-  </p:cSld>
-  <p:clrMapOvr>
-    <a:masterClrMapping/>
-  </p:clrMapOvr>
-</p:sld>
-</file>
-
-<file path=ppt/slides/slide26.xml><?xml version="1.0" encoding="utf-8"?>
-<p:sld xmlns:a="http://schemas.openxmlformats.org/drawingml/2006/main" xmlns:r="http://schemas.openxmlformats.org/officeDocument/2006/relationships" xmlns:p="http://schemas.openxmlformats.org/presentationml/2006/main">
-  <p:cSld name="Slide 26">
-    <p:bg>
-      <p:bgPr>
-        <a:solidFill>
-          <a:srgbClr val="FFFFFF"/>
-        </a:solidFill>
-      </p:bgPr>
-    </p:bg>
-    <p:spTree>
-      <p:nvGrpSpPr>
-        <p:cNvPr id="1" name=""/>
-        <p:cNvGrpSpPr/>
-        <p:nvPr/>
-      </p:nvGrpSpPr>
-      <p:grpSpPr>
-        <a:xfrm>
-          <a:off x="0" y="0"/>
-          <a:ext cx="0" cy="0"/>
-          <a:chOff x="0" y="0"/>
-          <a:chExt cx="0" cy="0"/>
-        </a:xfrm>
-      </p:grpSpPr>
-      <p:sp>
-        <p:nvSpPr>
-          <p:cNvPr id="2" name="Text 0"/>
-          <p:cNvSpPr txBox="1"/>
-          <p:nvPr/>
-        </p:nvSpPr>
-        <p:spPr>
-          <a:xfrm>
-            <a:off x="640080" y="457200"/>
-            <a:ext cx="10058400" cy="365760"/>
-          </a:xfrm>
-          <a:prstGeom prst="rect">
-            <a:avLst/>
-          </a:prstGeom>
-          <a:noFill/>
-          <a:ln/>
-        </p:spPr>
-        <p:txBody>
-          <a:bodyPr wrap="square" lIns="0" tIns="0" rIns="0" bIns="0" rtlCol="0" anchor="ctr"/>
-          <a:lstStyle/>
-          <a:p>
-            <a:pPr algn="l" indent="0" marL="0">
-              <a:buNone/>
-            </a:pPr>
-            <a:r>
-              <a:rPr lang="en-US" sz="1300" b="1" spc="300" kern="0" dirty="0">
-                <a:solidFill>
-                  <a:srgbClr val="FF8A3D"/>
-                </a:solidFill>
-                <a:latin typeface="Calibri" pitchFamily="34" charset="0"/>
-                <a:ea typeface="Calibri" pitchFamily="34" charset="-122"/>
-                <a:cs typeface="Calibri" pitchFamily="34" charset="-120"/>
-              </a:rPr>
-              <a:t>FONTS</a:t>
-            </a:r>
-            <a:endParaRPr lang="en-US" sz="1300" dirty="0"/>
-          </a:p>
-        </p:txBody>
-      </p:sp>
-      <p:sp>
-        <p:nvSpPr>
-          <p:cNvPr id="3" name="Text 1"/>
-          <p:cNvSpPr txBox="1"/>
-          <p:nvPr/>
-        </p:nvSpPr>
-        <p:spPr>
-          <a:xfrm>
-            <a:off x="640080" y="841248"/>
-            <a:ext cx="10881360" cy="914400"/>
-          </a:xfrm>
-          <a:prstGeom prst="rect">
-            <a:avLst/>
-          </a:prstGeom>
-          <a:noFill/>
-          <a:ln/>
-        </p:spPr>
-        <p:txBody>
-          <a:bodyPr wrap="square" lIns="0" tIns="0" rIns="0" bIns="0" rtlCol="0" anchor="ctr"/>
-          <a:lstStyle/>
-          <a:p>
-            <a:pPr algn="l" indent="0" marL="0">
-              <a:buNone/>
-            </a:pPr>
-            <a:r>
-              <a:rPr lang="en-US" sz="3400" b="1" dirty="0">
-                <a:solidFill>
-                  <a:srgbClr val="2B2B7A"/>
-                </a:solidFill>
-                <a:latin typeface="Cambria" pitchFamily="34" charset="0"/>
-                <a:ea typeface="Cambria" pitchFamily="34" charset="-122"/>
-                <a:cs typeface="Cambria" pitchFamily="34" charset="-120"/>
-              </a:rPr>
-              <a:t>Font Properties</a:t>
-            </a:r>
-            <a:endParaRPr lang="en-US" sz="3400" dirty="0"/>
-          </a:p>
-        </p:txBody>
-      </p:sp>
-      <p:sp>
-        <p:nvSpPr>
-          <p:cNvPr id="4" name="Text 2"/>
-          <p:cNvSpPr txBox="1"/>
-          <p:nvPr/>
-        </p:nvSpPr>
-        <p:spPr>
-          <a:xfrm>
-            <a:off x="640080" y="1691640"/>
-            <a:ext cx="10911535" cy="411480"/>
-          </a:xfrm>
-          <a:prstGeom prst="rect">
-            <a:avLst/>
-          </a:prstGeom>
-          <a:noFill/>
-          <a:ln/>
-        </p:spPr>
-        <p:txBody>
-          <a:bodyPr wrap="square" lIns="0" tIns="0" rIns="0" bIns="0" rtlCol="0" anchor="ctr"/>
-          <a:lstStyle/>
-          <a:p>
-            <a:pPr indent="0" marL="0">
-              <a:buNone/>
-            </a:pPr>
-            <a:r>
-              <a:rPr lang="en-US" sz="1350" i="1" dirty="0">
-                <a:solidFill>
-                  <a:srgbClr val="5D5D72"/>
-                </a:solidFill>
-                <a:latin typeface="Calibri" pitchFamily="34" charset="0"/>
-                <a:ea typeface="Calibri" pitchFamily="34" charset="-122"/>
-                <a:cs typeface="Calibri" pitchFamily="34" charset="-120"/>
-              </a:rPr>
-              <a:t>font-family (a fallback list), font-size, font-weight, font-style — combined via the font shorthand too.</a:t>
-            </a:r>
-            <a:endParaRPr lang="en-US" sz="1350" dirty="0"/>
-          </a:p>
-        </p:txBody>
-      </p:sp>
-      <p:sp>
-        <p:nvSpPr>
-          <p:cNvPr id="5" name="Shape 3"/>
-          <p:cNvSpPr/>
-          <p:nvPr/>
-        </p:nvSpPr>
-        <p:spPr>
-          <a:xfrm>
-            <a:off x="530352" y="2221992"/>
-            <a:ext cx="11130991" cy="4059936"/>
-          </a:xfrm>
-          <a:prstGeom prst="roundRect">
-            <a:avLst>
-              <a:gd name="adj" fmla="val 1351"/>
-            </a:avLst>
-          </a:prstGeom>
-          <a:solidFill>
-            <a:srgbClr val="FFFFFF"/>
-          </a:solidFill>
-          <a:ln w="12700">
-            <a:solidFill>
-              <a:srgbClr val="E2E2EE"/>
-            </a:solidFill>
-            <a:prstDash val="solid"/>
-          </a:ln>
-          <a:effectLst>
-            <a:outerShdw sx="100000" sy="100000" kx="0" ky="0" algn="bl" rotWithShape="0" blurRad="101600" dist="38100" dir="5400000">
-              <a:srgbClr val="000000">
-                <a:alpha val="12000"/>
-              </a:srgbClr>
-            </a:outerShdw>
-          </a:effectLst>
-        </p:spPr>
-      </p:sp>
-      <p:pic>
-        <p:nvPicPr>
-          <p:cNvPr id="6" name="Image 0" descr="D:/GitHub/mern-web-book/docs/assets/img/lecture-05/font-properties.png">    </p:cNvPr>
-          <p:cNvPicPr>
-            <a:picLocks noChangeAspect="1"/>
-          </p:cNvPicPr>
-          <p:nvPr/>
-        </p:nvPicPr>
-        <p:blipFill>
-          <a:blip r:embed="rId1"/>
-          <a:stretch>
-            <a:fillRect/>
-          </a:stretch>
-        </p:blipFill>
-        <p:spPr>
-          <a:xfrm>
-            <a:off x="640080" y="3946659"/>
-            <a:ext cx="10911535" cy="610602"/>
-          </a:xfrm>
-          <a:prstGeom prst="rect">
-            <a:avLst/>
-          </a:prstGeom>
-        </p:spPr>
-      </p:pic>
-      <p:sp>
-        <p:nvSpPr>
-          <p:cNvPr id="7" name="Text 4"/>
-          <p:cNvSpPr txBox="1"/>
-          <p:nvPr/>
-        </p:nvSpPr>
-        <p:spPr>
-          <a:xfrm>
-            <a:off x="640080" y="6446520"/>
-            <a:ext cx="8686800" cy="292608"/>
-          </a:xfrm>
-          <a:prstGeom prst="rect">
-            <a:avLst/>
-          </a:prstGeom>
-          <a:noFill/>
-          <a:ln/>
-        </p:spPr>
-        <p:txBody>
-          <a:bodyPr wrap="square" lIns="0" tIns="0" rIns="0" bIns="0" rtlCol="0" anchor="ctr"/>
-          <a:lstStyle/>
-          <a:p>
-            <a:pPr algn="l" indent="0" marL="0">
-              <a:buNone/>
-            </a:pPr>
-            <a:r>
-              <a:rPr lang="en-US" sz="900" dirty="0">
-                <a:solidFill>
-                  <a:srgbClr val="5D5D72"/>
-                </a:solidFill>
-                <a:latin typeface="Calibri" pitchFamily="34" charset="0"/>
-                <a:ea typeface="Calibri" pitchFamily="34" charset="-122"/>
-                <a:cs typeface="Calibri" pitchFamily="34" charset="-120"/>
-              </a:rPr>
-              <a:t>Usman Akram  •  COMSATS University Islamabad</a:t>
-            </a:r>
-            <a:endParaRPr lang="en-US" sz="900" dirty="0"/>
-          </a:p>
-        </p:txBody>
-      </p:sp>
-      <p:sp>
-        <p:nvSpPr>
-          <p:cNvPr id="8" name="Text 5"/>
-          <p:cNvSpPr txBox="1"/>
-          <p:nvPr/>
-        </p:nvSpPr>
-        <p:spPr>
-          <a:xfrm>
-            <a:off x="11155680" y="6446520"/>
-            <a:ext cx="457200" cy="292608"/>
-          </a:xfrm>
-          <a:prstGeom prst="rect">
-            <a:avLst/>
-          </a:prstGeom>
-          <a:noFill/>
-          <a:ln/>
-        </p:spPr>
-        <p:txBody>
-          <a:bodyPr wrap="square" lIns="0" tIns="0" rIns="0" bIns="0" rtlCol="0" anchor="ctr"/>
-          <a:lstStyle/>
-          <a:p>
-            <a:pPr algn="r" indent="0" marL="0">
-              <a:buNone/>
-            </a:pPr>
-            <a:r>
-              <a:rPr lang="en-US" sz="900" dirty="0">
-                <a:solidFill>
-                  <a:srgbClr val="5D5D72"/>
-                </a:solidFill>
-                <a:latin typeface="Calibri" pitchFamily="34" charset="0"/>
-                <a:ea typeface="Calibri" pitchFamily="34" charset="-122"/>
-                <a:cs typeface="Calibri" pitchFamily="34" charset="-120"/>
-              </a:rPr>
               <a:t>26</a:t>
             </a:r>
             <a:endParaRPr lang="en-US" sz="900" dirty="0"/>
@@ -13270,7 +13580,7 @@
                 <a:ea typeface="Calibri" pitchFamily="34" charset="-122"/>
                 <a:cs typeface="Calibri" pitchFamily="34" charset="-120"/>
               </a:rPr>
-              <a:t>TEXT</a:t>
+              <a:t>COLOUR</a:t>
             </a:r>
             <a:endParaRPr lang="en-US" sz="1300" dirty="0"/>
           </a:p>
@@ -13309,7 +13619,7 @@
                 <a:ea typeface="Cambria" pitchFamily="34" charset="-122"/>
                 <a:cs typeface="Cambria" pitchFamily="34" charset="-120"/>
               </a:rPr>
-              <a:t>Text Properties</a:t>
+              <a:t>Five Ways to Write a Colour</a:t>
             </a:r>
             <a:endParaRPr lang="en-US" sz="3400" dirty="0"/>
           </a:p>
@@ -13348,7 +13658,7 @@
                 <a:ea typeface="Calibri" pitchFamily="34" charset="-122"/>
                 <a:cs typeface="Calibri" pitchFamily="34" charset="-120"/>
               </a:rPr>
-              <a:t>text-align, text-decoration, text-transform, line-height, letter-spacing.</a:t>
+              <a:t>Named, hex, rgb() all give the same red; rgba() adds transparency; hsl() gives hue/saturation/lightness.</a:t>
             </a:r>
             <a:endParaRPr lang="en-US" sz="1350" dirty="0"/>
           </a:p>
@@ -13390,7 +13700,7 @@
       </p:sp>
       <p:pic>
         <p:nvPicPr>
-          <p:cNvPr id="6" name="Image 0" descr="D:/GitHub/mern-web-book/docs/assets/img/lecture-05/text-properties.png">    </p:cNvPr>
+          <p:cNvPr id="6" name="Image 0" descr="D:/GitHub/mern-web-book/docs/assets/img/lecture-05/color-values.png">    </p:cNvPr>
           <p:cNvPicPr>
             <a:picLocks noChangeAspect="1"/>
           </p:cNvPicPr>
@@ -13404,8 +13714,8 @@
         </p:blipFill>
         <p:spPr>
           <a:xfrm>
-            <a:off x="640080" y="3158349"/>
-            <a:ext cx="10911535" cy="2187222"/>
+            <a:off x="2124813" y="2331720"/>
+            <a:ext cx="7942069" cy="3840480"/>
           </a:xfrm>
           <a:prstGeom prst="rect">
             <a:avLst/>
@@ -13555,7 +13865,7 @@
                 <a:ea typeface="Calibri" pitchFamily="34" charset="-122"/>
                 <a:cs typeface="Calibri" pitchFamily="34" charset="-120"/>
               </a:rPr>
-              <a:t>BACKGROUNDS</a:t>
+              <a:t>FONTS</a:t>
             </a:r>
             <a:endParaRPr lang="en-US" sz="1300" dirty="0"/>
           </a:p>
@@ -13594,7 +13904,7 @@
                 <a:ea typeface="Cambria" pitchFamily="34" charset="-122"/>
                 <a:cs typeface="Cambria" pitchFamily="34" charset="-120"/>
               </a:rPr>
-              <a:t>Background Properties</a:t>
+              <a:t>Font Properties</a:t>
             </a:r>
             <a:endParaRPr lang="en-US" sz="3400" dirty="0"/>
           </a:p>
@@ -13602,230 +13912,104 @@
       </p:sp>
       <p:sp>
         <p:nvSpPr>
-          <p:cNvPr id="4" name="Shape 2"/>
-          <p:cNvSpPr/>
-          <p:nvPr/>
-        </p:nvSpPr>
-        <p:spPr>
-          <a:xfrm>
-            <a:off x="640080" y="1965960"/>
-            <a:ext cx="10911535" cy="3291840"/>
-          </a:xfrm>
-          <a:prstGeom prst="roundRect">
-            <a:avLst>
-              <a:gd name="adj" fmla="val 2222"/>
-            </a:avLst>
-          </a:prstGeom>
-          <a:solidFill>
-            <a:srgbClr val="1E1E4C"/>
-          </a:solidFill>
-          <a:ln/>
-        </p:spPr>
-      </p:sp>
-      <p:sp>
-        <p:nvSpPr>
-          <p:cNvPr id="5" name="Text 3"/>
-          <p:cNvSpPr txBox="1"/>
-          <p:nvPr/>
-        </p:nvSpPr>
-        <p:spPr>
-          <a:xfrm>
-            <a:off x="960120" y="2194560"/>
-            <a:ext cx="10271455" cy="2834640"/>
-          </a:xfrm>
-          <a:prstGeom prst="rect">
-            <a:avLst/>
-          </a:prstGeom>
-          <a:noFill/>
-          <a:ln/>
-        </p:spPr>
-        <p:txBody>
-          <a:bodyPr wrap="square" lIns="0" tIns="0" rIns="0" bIns="0" rtlCol="0" anchor="t"/>
+          <p:cNvPr id="4" name="Text 2"/>
+          <p:cNvSpPr txBox="1"/>
+          <p:nvPr/>
+        </p:nvSpPr>
+        <p:spPr>
+          <a:xfrm>
+            <a:off x="640080" y="1691640"/>
+            <a:ext cx="10911535" cy="411480"/>
+          </a:xfrm>
+          <a:prstGeom prst="rect">
+            <a:avLst/>
+          </a:prstGeom>
+          <a:noFill/>
+          <a:ln/>
+        </p:spPr>
+        <p:txBody>
+          <a:bodyPr wrap="square" lIns="0" tIns="0" rIns="0" bIns="0" rtlCol="0" anchor="ctr"/>
           <a:lstStyle/>
           <a:p>
             <a:pPr indent="0" marL="0">
-              <a:lnSpc>
-                <a:spcPct val="125000"/>
-              </a:lnSpc>
-              <a:buNone/>
-            </a:pPr>
-            <a:r>
-              <a:rPr lang="en-US" sz="1400" dirty="0">
-                <a:solidFill>
-                  <a:srgbClr val="C9D3F5"/>
-                </a:solidFill>
-                <a:latin typeface="Courier New" pitchFamily="34" charset="0"/>
-                <a:ea typeface="Courier New" pitchFamily="34" charset="-122"/>
-                <a:cs typeface="Courier New" pitchFamily="34" charset="-120"/>
-              </a:rPr>
-              <a:t>.card {</a:t>
-            </a:r>
-            <a:endParaRPr lang="en-US" sz="1400" dirty="0"/>
-          </a:p>
-          <a:p>
-            <a:pPr indent="0" marL="0">
-              <a:lnSpc>
-                <a:spcPct val="125000"/>
-              </a:lnSpc>
-              <a:buNone/>
-            </a:pPr>
-            <a:r>
-              <a:rPr lang="en-US" sz="1400" dirty="0">
-                <a:solidFill>
-                  <a:srgbClr val="C9D3F5"/>
-                </a:solidFill>
-                <a:latin typeface="Courier New" pitchFamily="34" charset="0"/>
-                <a:ea typeface="Courier New" pitchFamily="34" charset="-122"/>
-                <a:cs typeface="Courier New" pitchFamily="34" charset="-120"/>
-              </a:rPr>
-              <a:t>  background-color: #f5f5f5;</a:t>
-            </a:r>
-            <a:endParaRPr lang="en-US" sz="1400" dirty="0"/>
-          </a:p>
-          <a:p>
-            <a:pPr indent="0" marL="0">
-              <a:lnSpc>
-                <a:spcPct val="125000"/>
-              </a:lnSpc>
-              <a:buNone/>
-            </a:pPr>
-            <a:r>
-              <a:rPr lang="en-US" sz="1400" dirty="0">
-                <a:solidFill>
-                  <a:srgbClr val="C9D3F5"/>
-                </a:solidFill>
-                <a:latin typeface="Courier New" pitchFamily="34" charset="0"/>
-                <a:ea typeface="Courier New" pitchFamily="34" charset="-122"/>
-                <a:cs typeface="Courier New" pitchFamily="34" charset="-120"/>
-              </a:rPr>
-              <a:t>  background-image: url("pattern.png");</a:t>
-            </a:r>
-            <a:endParaRPr lang="en-US" sz="1400" dirty="0"/>
-          </a:p>
-          <a:p>
-            <a:pPr indent="0" marL="0">
-              <a:lnSpc>
-                <a:spcPct val="125000"/>
-              </a:lnSpc>
-              <a:buNone/>
-            </a:pPr>
-            <a:r>
-              <a:rPr lang="en-US" sz="1400" dirty="0">
-                <a:solidFill>
-                  <a:srgbClr val="C9D3F5"/>
-                </a:solidFill>
-                <a:latin typeface="Courier New" pitchFamily="34" charset="0"/>
-                <a:ea typeface="Courier New" pitchFamily="34" charset="-122"/>
-                <a:cs typeface="Courier New" pitchFamily="34" charset="-120"/>
-              </a:rPr>
-              <a:t>  background-repeat: no-repeat;</a:t>
-            </a:r>
-            <a:endParaRPr lang="en-US" sz="1400" dirty="0"/>
-          </a:p>
-          <a:p>
-            <a:pPr indent="0" marL="0">
-              <a:lnSpc>
-                <a:spcPct val="125000"/>
-              </a:lnSpc>
-              <a:buNone/>
-            </a:pPr>
-            <a:r>
-              <a:rPr lang="en-US" sz="1400" dirty="0">
-                <a:solidFill>
-                  <a:srgbClr val="C9D3F5"/>
-                </a:solidFill>
-                <a:latin typeface="Courier New" pitchFamily="34" charset="0"/>
-                <a:ea typeface="Courier New" pitchFamily="34" charset="-122"/>
-                <a:cs typeface="Courier New" pitchFamily="34" charset="-120"/>
-              </a:rPr>
-              <a:t>  background-position: center;</a:t>
-            </a:r>
-            <a:endParaRPr lang="en-US" sz="1400" dirty="0"/>
-          </a:p>
-          <a:p>
-            <a:pPr indent="0" marL="0">
-              <a:lnSpc>
-                <a:spcPct val="125000"/>
-              </a:lnSpc>
-              <a:buNone/>
-            </a:pPr>
-            <a:r>
-              <a:rPr lang="en-US" sz="1400" dirty="0">
-                <a:solidFill>
-                  <a:srgbClr val="C9D3F5"/>
-                </a:solidFill>
-                <a:latin typeface="Courier New" pitchFamily="34" charset="0"/>
-                <a:ea typeface="Courier New" pitchFamily="34" charset="-122"/>
-                <a:cs typeface="Courier New" pitchFamily="34" charset="-120"/>
-              </a:rPr>
-              <a:t>  background-size: cover;</a:t>
-            </a:r>
-            <a:endParaRPr lang="en-US" sz="1400" dirty="0"/>
-          </a:p>
-          <a:p>
-            <a:pPr indent="0" marL="0">
-              <a:lnSpc>
-                <a:spcPct val="125000"/>
-              </a:lnSpc>
-              <a:buNone/>
-            </a:pPr>
-            <a:r>
-              <a:rPr lang="en-US" sz="1400" dirty="0">
-                <a:solidFill>
-                  <a:srgbClr val="C9D3F5"/>
-                </a:solidFill>
-                <a:latin typeface="Courier New" pitchFamily="34" charset="0"/>
-                <a:ea typeface="Courier New" pitchFamily="34" charset="-122"/>
-                <a:cs typeface="Courier New" pitchFamily="34" charset="-120"/>
-              </a:rPr>
-              <a:t>}</a:t>
-            </a:r>
-            <a:endParaRPr lang="en-US" sz="1400" dirty="0"/>
-          </a:p>
-        </p:txBody>
-      </p:sp>
-      <p:sp>
-        <p:nvSpPr>
-          <p:cNvPr id="6" name="Text 4"/>
-          <p:cNvSpPr txBox="1"/>
-          <p:nvPr/>
-        </p:nvSpPr>
-        <p:spPr>
-          <a:xfrm>
-            <a:off x="640080" y="5486400"/>
-            <a:ext cx="10911535" cy="777240"/>
-          </a:xfrm>
-          <a:prstGeom prst="rect">
-            <a:avLst/>
-          </a:prstGeom>
-          <a:noFill/>
-          <a:ln/>
-        </p:spPr>
-        <p:txBody>
-          <a:bodyPr wrap="square" lIns="0" tIns="0" rIns="0" bIns="0" rtlCol="0" anchor="t"/>
-          <a:lstStyle/>
-          <a:p>
-            <a:pPr indent="0" marL="0">
-              <a:buNone/>
-            </a:pPr>
-            <a:r>
-              <a:rPr lang="en-US" sz="1300" dirty="0">
-                <a:solidFill>
-                  <a:srgbClr val="26262F"/>
+              <a:buNone/>
+            </a:pPr>
+            <a:r>
+              <a:rPr lang="en-US" sz="1350" i="1" dirty="0">
+                <a:solidFill>
+                  <a:srgbClr val="5D5D72"/>
                 </a:solidFill>
                 <a:latin typeface="Calibri" pitchFamily="34" charset="0"/>
                 <a:ea typeface="Calibri" pitchFamily="34" charset="-122"/>
                 <a:cs typeface="Calibri" pitchFamily="34" charset="-120"/>
               </a:rPr>
-              <a:t>A background shorthand combines several of these into one declaration, just like font does.</a:t>
-            </a:r>
-            <a:endParaRPr lang="en-US" sz="1300" dirty="0"/>
-          </a:p>
-        </p:txBody>
-      </p:sp>
-      <p:sp>
-        <p:nvSpPr>
-          <p:cNvPr id="7" name="Text 5"/>
+              <a:t>font-family (a fallback list), font-size, font-weight, font-style — combined via the font shorthand too.</a:t>
+            </a:r>
+            <a:endParaRPr lang="en-US" sz="1350" dirty="0"/>
+          </a:p>
+        </p:txBody>
+      </p:sp>
+      <p:sp>
+        <p:nvSpPr>
+          <p:cNvPr id="5" name="Shape 3"/>
+          <p:cNvSpPr/>
+          <p:nvPr/>
+        </p:nvSpPr>
+        <p:spPr>
+          <a:xfrm>
+            <a:off x="530352" y="2221992"/>
+            <a:ext cx="11130991" cy="4059936"/>
+          </a:xfrm>
+          <a:prstGeom prst="roundRect">
+            <a:avLst>
+              <a:gd name="adj" fmla="val 1351"/>
+            </a:avLst>
+          </a:prstGeom>
+          <a:solidFill>
+            <a:srgbClr val="FFFFFF"/>
+          </a:solidFill>
+          <a:ln w="12700">
+            <a:solidFill>
+              <a:srgbClr val="E2E2EE"/>
+            </a:solidFill>
+            <a:prstDash val="solid"/>
+          </a:ln>
+          <a:effectLst>
+            <a:outerShdw sx="100000" sy="100000" kx="0" ky="0" algn="bl" rotWithShape="0" blurRad="101600" dist="38100" dir="5400000">
+              <a:srgbClr val="000000">
+                <a:alpha val="12000"/>
+              </a:srgbClr>
+            </a:outerShdw>
+          </a:effectLst>
+        </p:spPr>
+      </p:sp>
+      <p:pic>
+        <p:nvPicPr>
+          <p:cNvPr id="6" name="Image 0" descr="D:/GitHub/mern-web-book/docs/assets/img/lecture-05/font-properties.png">    </p:cNvPr>
+          <p:cNvPicPr>
+            <a:picLocks noChangeAspect="1"/>
+          </p:cNvPicPr>
+          <p:nvPr/>
+        </p:nvPicPr>
+        <p:blipFill>
+          <a:blip r:embed="rId1"/>
+          <a:stretch>
+            <a:fillRect/>
+          </a:stretch>
+        </p:blipFill>
+        <p:spPr>
+          <a:xfrm>
+            <a:off x="640080" y="3946659"/>
+            <a:ext cx="10911535" cy="610602"/>
+          </a:xfrm>
+          <a:prstGeom prst="rect">
+            <a:avLst/>
+          </a:prstGeom>
+        </p:spPr>
+      </p:pic>
+      <p:sp>
+        <p:nvSpPr>
+          <p:cNvPr id="7" name="Text 4"/>
           <p:cNvSpPr txBox="1"/>
           <p:nvPr/>
         </p:nvSpPr>
@@ -13864,7 +14048,7 @@
       </p:sp>
       <p:sp>
         <p:nvSpPr>
-          <p:cNvPr id="8" name="Text 6"/>
+          <p:cNvPr id="8" name="Text 5"/>
           <p:cNvSpPr txBox="1"/>
           <p:nvPr/>
         </p:nvSpPr>
@@ -13915,7 +14099,7 @@
     <p:bg>
       <p:bgPr>
         <a:solidFill>
-          <a:srgbClr val="2B2B7A"/>
+          <a:srgbClr val="FFFFFF"/>
         </a:solidFill>
       </p:bgPr>
     </p:bg>
@@ -13941,8 +14125,8 @@
         </p:nvSpPr>
         <p:spPr>
           <a:xfrm>
-            <a:off x="822960" y="731520"/>
-            <a:ext cx="9144000" cy="457200"/>
+            <a:off x="640080" y="457200"/>
+            <a:ext cx="10058400" cy="365760"/>
           </a:xfrm>
           <a:prstGeom prst="rect">
             <a:avLst/>
@@ -13954,11 +14138,11 @@
           <a:bodyPr wrap="square" lIns="0" tIns="0" rIns="0" bIns="0" rtlCol="0" anchor="ctr"/>
           <a:lstStyle/>
           <a:p>
-            <a:pPr indent="0" marL="0">
-              <a:buNone/>
-            </a:pPr>
-            <a:r>
-              <a:rPr lang="en-US" sz="1500" b="1" spc="400" kern="0" dirty="0">
+            <a:pPr algn="l" indent="0" marL="0">
+              <a:buNone/>
+            </a:pPr>
+            <a:r>
+              <a:rPr lang="en-US" sz="1300" b="1" spc="300" kern="0" dirty="0">
                 <a:solidFill>
                   <a:srgbClr val="FF8A3D"/>
                 </a:solidFill>
@@ -13966,9 +14150,9 @@
                 <a:ea typeface="Calibri" pitchFamily="34" charset="-122"/>
                 <a:cs typeface="Calibri" pitchFamily="34" charset="-120"/>
               </a:rPr>
-              <a:t>KEY TAKEAWAYS</a:t>
-            </a:r>
-            <a:endParaRPr lang="en-US" sz="1500" dirty="0"/>
+              <a:t>TEXT</a:t>
+            </a:r>
+            <a:endParaRPr lang="en-US" sz="1300" dirty="0"/>
           </a:p>
         </p:txBody>
       </p:sp>
@@ -13980,8 +14164,8 @@
         </p:nvSpPr>
         <p:spPr>
           <a:xfrm>
-            <a:off x="777240" y="1188720"/>
-            <a:ext cx="10515600" cy="822960"/>
+            <a:off x="640080" y="841248"/>
+            <a:ext cx="10881360" cy="914400"/>
           </a:xfrm>
           <a:prstGeom prst="rect">
             <a:avLst/>
@@ -13993,19 +14177,19 @@
           <a:bodyPr wrap="square" lIns="0" tIns="0" rIns="0" bIns="0" rtlCol="0" anchor="ctr"/>
           <a:lstStyle/>
           <a:p>
-            <a:pPr indent="0" marL="0">
+            <a:pPr algn="l" indent="0" marL="0">
               <a:buNone/>
             </a:pPr>
             <a:r>
               <a:rPr lang="en-US" sz="3400" b="1" dirty="0">
                 <a:solidFill>
-                  <a:srgbClr val="FFFFFF"/>
+                  <a:srgbClr val="2B2B7A"/>
                 </a:solidFill>
                 <a:latin typeface="Cambria" pitchFamily="34" charset="0"/>
                 <a:ea typeface="Cambria" pitchFamily="34" charset="-122"/>
                 <a:cs typeface="Cambria" pitchFamily="34" charset="-120"/>
               </a:rPr>
-              <a:t>Lecture 5 in Six Points</a:t>
+              <a:t>Text Properties</a:t>
             </a:r>
             <a:endParaRPr lang="en-US" sz="3400" dirty="0"/>
           </a:p>
@@ -14013,34 +14197,14 @@
       </p:sp>
       <p:sp>
         <p:nvSpPr>
-          <p:cNvPr id="4" name="Shape 2"/>
-          <p:cNvSpPr/>
-          <p:nvPr/>
-        </p:nvSpPr>
-        <p:spPr>
-          <a:xfrm>
-            <a:off x="822960" y="2286000"/>
-            <a:ext cx="438912" cy="438912"/>
-          </a:xfrm>
-          <a:prstGeom prst="ellipse">
-            <a:avLst/>
-          </a:prstGeom>
-          <a:solidFill>
-            <a:srgbClr val="FF8A3D"/>
-          </a:solidFill>
-          <a:ln/>
-        </p:spPr>
-      </p:sp>
-      <p:sp>
-        <p:nvSpPr>
-          <p:cNvPr id="5" name="Text 3"/>
-          <p:cNvSpPr txBox="1"/>
-          <p:nvPr/>
-        </p:nvSpPr>
-        <p:spPr>
-          <a:xfrm>
-            <a:off x="822960" y="2286000"/>
-            <a:ext cx="438912" cy="438912"/>
+          <p:cNvPr id="4" name="Text 2"/>
+          <p:cNvSpPr txBox="1"/>
+          <p:nvPr/>
+        </p:nvSpPr>
+        <p:spPr>
+          <a:xfrm>
+            <a:off x="640080" y="1691640"/>
+            <a:ext cx="10911535" cy="411480"/>
           </a:xfrm>
           <a:prstGeom prst="rect">
             <a:avLst/>
@@ -14052,34 +14216,92 @@
           <a:bodyPr wrap="square" lIns="0" tIns="0" rIns="0" bIns="0" rtlCol="0" anchor="ctr"/>
           <a:lstStyle/>
           <a:p>
-            <a:pPr algn="ctr" indent="0" marL="0">
-              <a:buNone/>
-            </a:pPr>
-            <a:r>
-              <a:rPr lang="en-US" sz="1500" b="1" dirty="0">
-                <a:solidFill>
-                  <a:srgbClr val="FFFFFF"/>
+            <a:pPr indent="0" marL="0">
+              <a:buNone/>
+            </a:pPr>
+            <a:r>
+              <a:rPr lang="en-US" sz="1350" i="1" dirty="0">
+                <a:solidFill>
+                  <a:srgbClr val="5D5D72"/>
                 </a:solidFill>
                 <a:latin typeface="Calibri" pitchFamily="34" charset="0"/>
                 <a:ea typeface="Calibri" pitchFamily="34" charset="-122"/>
                 <a:cs typeface="Calibri" pitchFamily="34" charset="-120"/>
               </a:rPr>
-              <a:t>1</a:t>
-            </a:r>
-            <a:endParaRPr lang="en-US" sz="1500" dirty="0"/>
-          </a:p>
-        </p:txBody>
-      </p:sp>
-      <p:sp>
-        <p:nvSpPr>
-          <p:cNvPr id="6" name="Text 4"/>
-          <p:cNvSpPr txBox="1"/>
-          <p:nvPr/>
-        </p:nvSpPr>
-        <p:spPr>
-          <a:xfrm>
-            <a:off x="1463040" y="2194560"/>
-            <a:ext cx="10058400" cy="640080"/>
+              <a:t>text-align, text-decoration, text-transform, line-height, letter-spacing.</a:t>
+            </a:r>
+            <a:endParaRPr lang="en-US" sz="1350" dirty="0"/>
+          </a:p>
+        </p:txBody>
+      </p:sp>
+      <p:sp>
+        <p:nvSpPr>
+          <p:cNvPr id="5" name="Shape 3"/>
+          <p:cNvSpPr/>
+          <p:nvPr/>
+        </p:nvSpPr>
+        <p:spPr>
+          <a:xfrm>
+            <a:off x="530352" y="2221992"/>
+            <a:ext cx="11130991" cy="4059936"/>
+          </a:xfrm>
+          <a:prstGeom prst="roundRect">
+            <a:avLst>
+              <a:gd name="adj" fmla="val 1351"/>
+            </a:avLst>
+          </a:prstGeom>
+          <a:solidFill>
+            <a:srgbClr val="FFFFFF"/>
+          </a:solidFill>
+          <a:ln w="12700">
+            <a:solidFill>
+              <a:srgbClr val="E2E2EE"/>
+            </a:solidFill>
+            <a:prstDash val="solid"/>
+          </a:ln>
+          <a:effectLst>
+            <a:outerShdw sx="100000" sy="100000" kx="0" ky="0" algn="bl" rotWithShape="0" blurRad="101600" dist="38100" dir="5400000">
+              <a:srgbClr val="000000">
+                <a:alpha val="12000"/>
+              </a:srgbClr>
+            </a:outerShdw>
+          </a:effectLst>
+        </p:spPr>
+      </p:sp>
+      <p:pic>
+        <p:nvPicPr>
+          <p:cNvPr id="6" name="Image 0" descr="D:/GitHub/mern-web-book/docs/assets/img/lecture-05/text-properties.png">    </p:cNvPr>
+          <p:cNvPicPr>
+            <a:picLocks noChangeAspect="1"/>
+          </p:cNvPicPr>
+          <p:nvPr/>
+        </p:nvPicPr>
+        <p:blipFill>
+          <a:blip r:embed="rId1"/>
+          <a:stretch>
+            <a:fillRect/>
+          </a:stretch>
+        </p:blipFill>
+        <p:spPr>
+          <a:xfrm>
+            <a:off x="640080" y="3158349"/>
+            <a:ext cx="10911535" cy="2187222"/>
+          </a:xfrm>
+          <a:prstGeom prst="rect">
+            <a:avLst/>
+          </a:prstGeom>
+        </p:spPr>
+      </p:pic>
+      <p:sp>
+        <p:nvSpPr>
+          <p:cNvPr id="7" name="Text 4"/>
+          <p:cNvSpPr txBox="1"/>
+          <p:nvPr/>
+        </p:nvSpPr>
+        <p:spPr>
+          <a:xfrm>
+            <a:off x="640080" y="6446520"/>
+            <a:ext cx="8686800" cy="292608"/>
           </a:xfrm>
           <a:prstGeom prst="rect">
             <a:avLst/>
@@ -14091,547 +14313,18 @@
           <a:bodyPr wrap="square" lIns="0" tIns="0" rIns="0" bIns="0" rtlCol="0" anchor="ctr"/>
           <a:lstStyle/>
           <a:p>
-            <a:pPr indent="0" marL="0">
-              <a:buNone/>
-            </a:pPr>
-            <a:r>
-              <a:rPr lang="en-US" sz="1250" dirty="0">
-                <a:solidFill>
-                  <a:srgbClr val="C9D3F5"/>
+            <a:pPr algn="l" indent="0" marL="0">
+              <a:buNone/>
+            </a:pPr>
+            <a:r>
+              <a:rPr lang="en-US" sz="900" dirty="0">
+                <a:solidFill>
+                  <a:srgbClr val="5D5D72"/>
                 </a:solidFill>
                 <a:latin typeface="Calibri" pitchFamily="34" charset="0"/>
                 <a:ea typeface="Calibri" pitchFamily="34" charset="-122"/>
                 <a:cs typeface="Calibri" pitchFamily="34" charset="-120"/>
               </a:rPr>
-              <a:t>CSS separates presentation from content; external style sheets are preferred for real projects.</a:t>
-            </a:r>
-            <a:endParaRPr lang="en-US" sz="1250" dirty="0"/>
-          </a:p>
-        </p:txBody>
-      </p:sp>
-      <p:sp>
-        <p:nvSpPr>
-          <p:cNvPr id="7" name="Shape 5"/>
-          <p:cNvSpPr/>
-          <p:nvPr/>
-        </p:nvSpPr>
-        <p:spPr>
-          <a:xfrm>
-            <a:off x="822960" y="2971800"/>
-            <a:ext cx="438912" cy="438912"/>
-          </a:xfrm>
-          <a:prstGeom prst="ellipse">
-            <a:avLst/>
-          </a:prstGeom>
-          <a:solidFill>
-            <a:srgbClr val="FF8A3D"/>
-          </a:solidFill>
-          <a:ln/>
-        </p:spPr>
-      </p:sp>
-      <p:sp>
-        <p:nvSpPr>
-          <p:cNvPr id="8" name="Text 6"/>
-          <p:cNvSpPr txBox="1"/>
-          <p:nvPr/>
-        </p:nvSpPr>
-        <p:spPr>
-          <a:xfrm>
-            <a:off x="822960" y="2971800"/>
-            <a:ext cx="438912" cy="438912"/>
-          </a:xfrm>
-          <a:prstGeom prst="rect">
-            <a:avLst/>
-          </a:prstGeom>
-          <a:noFill/>
-          <a:ln/>
-        </p:spPr>
-        <p:txBody>
-          <a:bodyPr wrap="square" lIns="0" tIns="0" rIns="0" bIns="0" rtlCol="0" anchor="ctr"/>
-          <a:lstStyle/>
-          <a:p>
-            <a:pPr algn="ctr" indent="0" marL="0">
-              <a:buNone/>
-            </a:pPr>
-            <a:r>
-              <a:rPr lang="en-US" sz="1500" b="1" dirty="0">
-                <a:solidFill>
-                  <a:srgbClr val="FFFFFF"/>
-                </a:solidFill>
-                <a:latin typeface="Calibri" pitchFamily="34" charset="0"/>
-                <a:ea typeface="Calibri" pitchFamily="34" charset="-122"/>
-                <a:cs typeface="Calibri" pitchFamily="34" charset="-120"/>
-              </a:rPr>
-              <a:t>2</a:t>
-            </a:r>
-            <a:endParaRPr lang="en-US" sz="1500" dirty="0"/>
-          </a:p>
-        </p:txBody>
-      </p:sp>
-      <p:sp>
-        <p:nvSpPr>
-          <p:cNvPr id="9" name="Text 7"/>
-          <p:cNvSpPr txBox="1"/>
-          <p:nvPr/>
-        </p:nvSpPr>
-        <p:spPr>
-          <a:xfrm>
-            <a:off x="1463040" y="2880360"/>
-            <a:ext cx="10058400" cy="640080"/>
-          </a:xfrm>
-          <a:prstGeom prst="rect">
-            <a:avLst/>
-          </a:prstGeom>
-          <a:noFill/>
-          <a:ln/>
-        </p:spPr>
-        <p:txBody>
-          <a:bodyPr wrap="square" lIns="0" tIns="0" rIns="0" bIns="0" rtlCol="0" anchor="ctr"/>
-          <a:lstStyle/>
-          <a:p>
-            <a:pPr indent="0" marL="0">
-              <a:buNone/>
-            </a:pPr>
-            <a:r>
-              <a:rPr lang="en-US" sz="1250" dirty="0">
-                <a:solidFill>
-                  <a:srgbClr val="C9D3F5"/>
-                </a:solidFill>
-                <a:latin typeface="Calibri" pitchFamily="34" charset="0"/>
-                <a:ea typeface="Calibri" pitchFamily="34" charset="-122"/>
-                <a:cs typeface="Calibri" pitchFamily="34" charset="-120"/>
-              </a:rPr>
-              <a:t>Selectors decide what gets styled: element, class, id, attribute, grouping, descendant.</a:t>
-            </a:r>
-            <a:endParaRPr lang="en-US" sz="1250" dirty="0"/>
-          </a:p>
-        </p:txBody>
-      </p:sp>
-      <p:sp>
-        <p:nvSpPr>
-          <p:cNvPr id="10" name="Shape 8"/>
-          <p:cNvSpPr/>
-          <p:nvPr/>
-        </p:nvSpPr>
-        <p:spPr>
-          <a:xfrm>
-            <a:off x="822960" y="3657600"/>
-            <a:ext cx="438912" cy="438912"/>
-          </a:xfrm>
-          <a:prstGeom prst="ellipse">
-            <a:avLst/>
-          </a:prstGeom>
-          <a:solidFill>
-            <a:srgbClr val="FF8A3D"/>
-          </a:solidFill>
-          <a:ln/>
-        </p:spPr>
-      </p:sp>
-      <p:sp>
-        <p:nvSpPr>
-          <p:cNvPr id="11" name="Text 9"/>
-          <p:cNvSpPr txBox="1"/>
-          <p:nvPr/>
-        </p:nvSpPr>
-        <p:spPr>
-          <a:xfrm>
-            <a:off x="822960" y="3657600"/>
-            <a:ext cx="438912" cy="438912"/>
-          </a:xfrm>
-          <a:prstGeom prst="rect">
-            <a:avLst/>
-          </a:prstGeom>
-          <a:noFill/>
-          <a:ln/>
-        </p:spPr>
-        <p:txBody>
-          <a:bodyPr wrap="square" lIns="0" tIns="0" rIns="0" bIns="0" rtlCol="0" anchor="ctr"/>
-          <a:lstStyle/>
-          <a:p>
-            <a:pPr algn="ctr" indent="0" marL="0">
-              <a:buNone/>
-            </a:pPr>
-            <a:r>
-              <a:rPr lang="en-US" sz="1500" b="1" dirty="0">
-                <a:solidFill>
-                  <a:srgbClr val="FFFFFF"/>
-                </a:solidFill>
-                <a:latin typeface="Calibri" pitchFamily="34" charset="0"/>
-                <a:ea typeface="Calibri" pitchFamily="34" charset="-122"/>
-                <a:cs typeface="Calibri" pitchFamily="34" charset="-120"/>
-              </a:rPr>
-              <a:t>3</a:t>
-            </a:r>
-            <a:endParaRPr lang="en-US" sz="1500" dirty="0"/>
-          </a:p>
-        </p:txBody>
-      </p:sp>
-      <p:sp>
-        <p:nvSpPr>
-          <p:cNvPr id="12" name="Text 10"/>
-          <p:cNvSpPr txBox="1"/>
-          <p:nvPr/>
-        </p:nvSpPr>
-        <p:spPr>
-          <a:xfrm>
-            <a:off x="1463040" y="3566160"/>
-            <a:ext cx="10058400" cy="640080"/>
-          </a:xfrm>
-          <a:prstGeom prst="rect">
-            <a:avLst/>
-          </a:prstGeom>
-          <a:noFill/>
-          <a:ln/>
-        </p:spPr>
-        <p:txBody>
-          <a:bodyPr wrap="square" lIns="0" tIns="0" rIns="0" bIns="0" rtlCol="0" anchor="ctr"/>
-          <a:lstStyle/>
-          <a:p>
-            <a:pPr indent="0" marL="0">
-              <a:buNone/>
-            </a:pPr>
-            <a:r>
-              <a:rPr lang="en-US" sz="1250" dirty="0">
-                <a:solidFill>
-                  <a:srgbClr val="C9D3F5"/>
-                </a:solidFill>
-                <a:latin typeface="Calibri" pitchFamily="34" charset="0"/>
-                <a:ea typeface="Calibri" pitchFamily="34" charset="-122"/>
-                <a:cs typeface="Calibri" pitchFamily="34" charset="-120"/>
-              </a:rPr>
-              <a:t>The cascade resolves conflicts in order: importance, then specificity, then source order — every time.</a:t>
-            </a:r>
-            <a:endParaRPr lang="en-US" sz="1250" dirty="0"/>
-          </a:p>
-        </p:txBody>
-      </p:sp>
-      <p:sp>
-        <p:nvSpPr>
-          <p:cNvPr id="13" name="Shape 11"/>
-          <p:cNvSpPr/>
-          <p:nvPr/>
-        </p:nvSpPr>
-        <p:spPr>
-          <a:xfrm>
-            <a:off x="822960" y="4343400"/>
-            <a:ext cx="438912" cy="438912"/>
-          </a:xfrm>
-          <a:prstGeom prst="ellipse">
-            <a:avLst/>
-          </a:prstGeom>
-          <a:solidFill>
-            <a:srgbClr val="FF8A3D"/>
-          </a:solidFill>
-          <a:ln/>
-        </p:spPr>
-      </p:sp>
-      <p:sp>
-        <p:nvSpPr>
-          <p:cNvPr id="14" name="Text 12"/>
-          <p:cNvSpPr txBox="1"/>
-          <p:nvPr/>
-        </p:nvSpPr>
-        <p:spPr>
-          <a:xfrm>
-            <a:off x="822960" y="4343400"/>
-            <a:ext cx="438912" cy="438912"/>
-          </a:xfrm>
-          <a:prstGeom prst="rect">
-            <a:avLst/>
-          </a:prstGeom>
-          <a:noFill/>
-          <a:ln/>
-        </p:spPr>
-        <p:txBody>
-          <a:bodyPr wrap="square" lIns="0" tIns="0" rIns="0" bIns="0" rtlCol="0" anchor="ctr"/>
-          <a:lstStyle/>
-          <a:p>
-            <a:pPr algn="ctr" indent="0" marL="0">
-              <a:buNone/>
-            </a:pPr>
-            <a:r>
-              <a:rPr lang="en-US" sz="1500" b="1" dirty="0">
-                <a:solidFill>
-                  <a:srgbClr val="FFFFFF"/>
-                </a:solidFill>
-                <a:latin typeface="Calibri" pitchFamily="34" charset="0"/>
-                <a:ea typeface="Calibri" pitchFamily="34" charset="-122"/>
-                <a:cs typeface="Calibri" pitchFamily="34" charset="-120"/>
-              </a:rPr>
-              <a:t>4</a:t>
-            </a:r>
-            <a:endParaRPr lang="en-US" sz="1500" dirty="0"/>
-          </a:p>
-        </p:txBody>
-      </p:sp>
-      <p:sp>
-        <p:nvSpPr>
-          <p:cNvPr id="15" name="Text 13"/>
-          <p:cNvSpPr txBox="1"/>
-          <p:nvPr/>
-        </p:nvSpPr>
-        <p:spPr>
-          <a:xfrm>
-            <a:off x="1463040" y="4251960"/>
-            <a:ext cx="10058400" cy="640080"/>
-          </a:xfrm>
-          <a:prstGeom prst="rect">
-            <a:avLst/>
-          </a:prstGeom>
-          <a:noFill/>
-          <a:ln/>
-        </p:spPr>
-        <p:txBody>
-          <a:bodyPr wrap="square" lIns="0" tIns="0" rIns="0" bIns="0" rtlCol="0" anchor="ctr"/>
-          <a:lstStyle/>
-          <a:p>
-            <a:pPr indent="0" marL="0">
-              <a:buNone/>
-            </a:pPr>
-            <a:r>
-              <a:rPr lang="en-US" sz="1250" dirty="0">
-                <a:solidFill>
-                  <a:srgbClr val="C9D3F5"/>
-                </a:solidFill>
-                <a:latin typeface="Calibri" pitchFamily="34" charset="0"/>
-                <a:ea typeface="Calibri" pitchFamily="34" charset="-122"/>
-                <a:cs typeface="Calibri" pitchFamily="34" charset="-120"/>
-              </a:rPr>
-              <a:t>Specificity is a 4-part score compared column by column; one ID beats any number of classes or elements.</a:t>
-            </a:r>
-            <a:endParaRPr lang="en-US" sz="1250" dirty="0"/>
-          </a:p>
-        </p:txBody>
-      </p:sp>
-      <p:sp>
-        <p:nvSpPr>
-          <p:cNvPr id="16" name="Shape 14"/>
-          <p:cNvSpPr/>
-          <p:nvPr/>
-        </p:nvSpPr>
-        <p:spPr>
-          <a:xfrm>
-            <a:off x="822960" y="5029200"/>
-            <a:ext cx="438912" cy="438912"/>
-          </a:xfrm>
-          <a:prstGeom prst="ellipse">
-            <a:avLst/>
-          </a:prstGeom>
-          <a:solidFill>
-            <a:srgbClr val="FF8A3D"/>
-          </a:solidFill>
-          <a:ln/>
-        </p:spPr>
-      </p:sp>
-      <p:sp>
-        <p:nvSpPr>
-          <p:cNvPr id="17" name="Text 15"/>
-          <p:cNvSpPr txBox="1"/>
-          <p:nvPr/>
-        </p:nvSpPr>
-        <p:spPr>
-          <a:xfrm>
-            <a:off x="822960" y="5029200"/>
-            <a:ext cx="438912" cy="438912"/>
-          </a:xfrm>
-          <a:prstGeom prst="rect">
-            <a:avLst/>
-          </a:prstGeom>
-          <a:noFill/>
-          <a:ln/>
-        </p:spPr>
-        <p:txBody>
-          <a:bodyPr wrap="square" lIns="0" tIns="0" rIns="0" bIns="0" rtlCol="0" anchor="ctr"/>
-          <a:lstStyle/>
-          <a:p>
-            <a:pPr algn="ctr" indent="0" marL="0">
-              <a:buNone/>
-            </a:pPr>
-            <a:r>
-              <a:rPr lang="en-US" sz="1500" b="1" dirty="0">
-                <a:solidFill>
-                  <a:srgbClr val="FFFFFF"/>
-                </a:solidFill>
-                <a:latin typeface="Calibri" pitchFamily="34" charset="0"/>
-                <a:ea typeface="Calibri" pitchFamily="34" charset="-122"/>
-                <a:cs typeface="Calibri" pitchFamily="34" charset="-120"/>
-              </a:rPr>
-              <a:t>5</a:t>
-            </a:r>
-            <a:endParaRPr lang="en-US" sz="1500" dirty="0"/>
-          </a:p>
-        </p:txBody>
-      </p:sp>
-      <p:sp>
-        <p:nvSpPr>
-          <p:cNvPr id="18" name="Text 16"/>
-          <p:cNvSpPr txBox="1"/>
-          <p:nvPr/>
-        </p:nvSpPr>
-        <p:spPr>
-          <a:xfrm>
-            <a:off x="1463040" y="4937760"/>
-            <a:ext cx="10058400" cy="640080"/>
-          </a:xfrm>
-          <a:prstGeom prst="rect">
-            <a:avLst/>
-          </a:prstGeom>
-          <a:noFill/>
-          <a:ln/>
-        </p:spPr>
-        <p:txBody>
-          <a:bodyPr wrap="square" lIns="0" tIns="0" rIns="0" bIns="0" rtlCol="0" anchor="ctr"/>
-          <a:lstStyle/>
-          <a:p>
-            <a:pPr indent="0" marL="0">
-              <a:buNone/>
-            </a:pPr>
-            <a:r>
-              <a:rPr lang="en-US" sz="1250" dirty="0">
-                <a:solidFill>
-                  <a:srgbClr val="C9D3F5"/>
-                </a:solidFill>
-                <a:latin typeface="Calibri" pitchFamily="34" charset="0"/>
-                <a:ea typeface="Calibri" pitchFamily="34" charset="-122"/>
-                <a:cs typeface="Calibri" pitchFamily="34" charset="-120"/>
-              </a:rPr>
-              <a:t>!important should be a last resort — it breaks normal specificity reasoning.</a:t>
-            </a:r>
-            <a:endParaRPr lang="en-US" sz="1250" dirty="0"/>
-          </a:p>
-        </p:txBody>
-      </p:sp>
-      <p:sp>
-        <p:nvSpPr>
-          <p:cNvPr id="19" name="Shape 17"/>
-          <p:cNvSpPr/>
-          <p:nvPr/>
-        </p:nvSpPr>
-        <p:spPr>
-          <a:xfrm>
-            <a:off x="822960" y="5715000"/>
-            <a:ext cx="438912" cy="438912"/>
-          </a:xfrm>
-          <a:prstGeom prst="ellipse">
-            <a:avLst/>
-          </a:prstGeom>
-          <a:solidFill>
-            <a:srgbClr val="FF8A3D"/>
-          </a:solidFill>
-          <a:ln/>
-        </p:spPr>
-      </p:sp>
-      <p:sp>
-        <p:nvSpPr>
-          <p:cNvPr id="20" name="Text 18"/>
-          <p:cNvSpPr txBox="1"/>
-          <p:nvPr/>
-        </p:nvSpPr>
-        <p:spPr>
-          <a:xfrm>
-            <a:off x="822960" y="5715000"/>
-            <a:ext cx="438912" cy="438912"/>
-          </a:xfrm>
-          <a:prstGeom prst="rect">
-            <a:avLst/>
-          </a:prstGeom>
-          <a:noFill/>
-          <a:ln/>
-        </p:spPr>
-        <p:txBody>
-          <a:bodyPr wrap="square" lIns="0" tIns="0" rIns="0" bIns="0" rtlCol="0" anchor="ctr"/>
-          <a:lstStyle/>
-          <a:p>
-            <a:pPr algn="ctr" indent="0" marL="0">
-              <a:buNone/>
-            </a:pPr>
-            <a:r>
-              <a:rPr lang="en-US" sz="1500" b="1" dirty="0">
-                <a:solidFill>
-                  <a:srgbClr val="FFFFFF"/>
-                </a:solidFill>
-                <a:latin typeface="Calibri" pitchFamily="34" charset="0"/>
-                <a:ea typeface="Calibri" pitchFamily="34" charset="-122"/>
-                <a:cs typeface="Calibri" pitchFamily="34" charset="-120"/>
-              </a:rPr>
-              <a:t>6</a:t>
-            </a:r>
-            <a:endParaRPr lang="en-US" sz="1500" dirty="0"/>
-          </a:p>
-        </p:txBody>
-      </p:sp>
-      <p:sp>
-        <p:nvSpPr>
-          <p:cNvPr id="21" name="Text 19"/>
-          <p:cNvSpPr txBox="1"/>
-          <p:nvPr/>
-        </p:nvSpPr>
-        <p:spPr>
-          <a:xfrm>
-            <a:off x="1463040" y="5623560"/>
-            <a:ext cx="10058400" cy="640080"/>
-          </a:xfrm>
-          <a:prstGeom prst="rect">
-            <a:avLst/>
-          </a:prstGeom>
-          <a:noFill/>
-          <a:ln/>
-        </p:spPr>
-        <p:txBody>
-          <a:bodyPr wrap="square" lIns="0" tIns="0" rIns="0" bIns="0" rtlCol="0" anchor="ctr"/>
-          <a:lstStyle/>
-          <a:p>
-            <a:pPr indent="0" marL="0">
-              <a:buNone/>
-            </a:pPr>
-            <a:r>
-              <a:rPr lang="en-US" sz="1250" dirty="0">
-                <a:solidFill>
-                  <a:srgbClr val="C9D3F5"/>
-                </a:solidFill>
-                <a:latin typeface="Calibri" pitchFamily="34" charset="0"/>
-                <a:ea typeface="Calibri" pitchFamily="34" charset="-122"/>
-                <a:cs typeface="Calibri" pitchFamily="34" charset="-120"/>
-              </a:rPr>
-              <a:t>Text properties like color inherit from parent to child; box properties like border and margin do not.</a:t>
-            </a:r>
-            <a:endParaRPr lang="en-US" sz="1250" dirty="0"/>
-          </a:p>
-        </p:txBody>
-      </p:sp>
-      <p:sp>
-        <p:nvSpPr>
-          <p:cNvPr id="22" name="Text 20"/>
-          <p:cNvSpPr txBox="1"/>
-          <p:nvPr/>
-        </p:nvSpPr>
-        <p:spPr>
-          <a:xfrm>
-            <a:off x="640080" y="6446520"/>
-            <a:ext cx="8686800" cy="292608"/>
-          </a:xfrm>
-          <a:prstGeom prst="rect">
-            <a:avLst/>
-          </a:prstGeom>
-          <a:noFill/>
-          <a:ln/>
-        </p:spPr>
-        <p:txBody>
-          <a:bodyPr wrap="square" lIns="0" tIns="0" rIns="0" bIns="0" rtlCol="0" anchor="ctr"/>
-          <a:lstStyle/>
-          <a:p>
-            <a:pPr algn="l" indent="0" marL="0">
-              <a:buNone/>
-            </a:pPr>
-            <a:r>
-              <a:rPr lang="en-US" sz="900" dirty="0">
-                <a:solidFill>
-                  <a:srgbClr val="9AA3D8"/>
-                </a:solidFill>
-                <a:latin typeface="Calibri" pitchFamily="34" charset="0"/>
-                <a:ea typeface="Calibri" pitchFamily="34" charset="-122"/>
-                <a:cs typeface="Calibri" pitchFamily="34" charset="-120"/>
-              </a:rPr>
               <a:t>Usman Akram  •  COMSATS University Islamabad</a:t>
             </a:r>
             <a:endParaRPr lang="en-US" sz="900" dirty="0"/>
@@ -14640,7 +14333,7 @@
       </p:sp>
       <p:sp>
         <p:nvSpPr>
-          <p:cNvPr id="23" name="Text 21"/>
+          <p:cNvPr id="8" name="Text 5"/>
           <p:cNvSpPr txBox="1"/>
           <p:nvPr/>
         </p:nvSpPr>
@@ -14665,7 +14358,7 @@
             <a:r>
               <a:rPr lang="en-US" sz="900" dirty="0">
                 <a:solidFill>
-                  <a:srgbClr val="9AA3D8"/>
+                  <a:srgbClr val="5D5D72"/>
                 </a:solidFill>
                 <a:latin typeface="Calibri" pitchFamily="34" charset="0"/>
                 <a:ea typeface="Calibri" pitchFamily="34" charset="-122"/>
@@ -15252,6 +14945,1193 @@
                 <a:cs typeface="Calibri" pitchFamily="34" charset="-120"/>
               </a:rPr>
               <a:t>3</a:t>
+            </a:r>
+            <a:endParaRPr lang="en-US" sz="900" dirty="0"/>
+          </a:p>
+        </p:txBody>
+      </p:sp>
+    </p:spTree>
+  </p:cSld>
+  <p:clrMapOvr>
+    <a:masterClrMapping/>
+  </p:clrMapOvr>
+</p:sld>
+</file>
+
+<file path=ppt/slides/slide30.xml><?xml version="1.0" encoding="utf-8"?>
+<p:sld xmlns:a="http://schemas.openxmlformats.org/drawingml/2006/main" xmlns:r="http://schemas.openxmlformats.org/officeDocument/2006/relationships" xmlns:p="http://schemas.openxmlformats.org/presentationml/2006/main">
+  <p:cSld name="Slide 30">
+    <p:bg>
+      <p:bgPr>
+        <a:solidFill>
+          <a:srgbClr val="FFFFFF"/>
+        </a:solidFill>
+      </p:bgPr>
+    </p:bg>
+    <p:spTree>
+      <p:nvGrpSpPr>
+        <p:cNvPr id="1" name=""/>
+        <p:cNvGrpSpPr/>
+        <p:nvPr/>
+      </p:nvGrpSpPr>
+      <p:grpSpPr>
+        <a:xfrm>
+          <a:off x="0" y="0"/>
+          <a:ext cx="0" cy="0"/>
+          <a:chOff x="0" y="0"/>
+          <a:chExt cx="0" cy="0"/>
+        </a:xfrm>
+      </p:grpSpPr>
+      <p:sp>
+        <p:nvSpPr>
+          <p:cNvPr id="2" name="Text 0"/>
+          <p:cNvSpPr txBox="1"/>
+          <p:nvPr/>
+        </p:nvSpPr>
+        <p:spPr>
+          <a:xfrm>
+            <a:off x="640080" y="457200"/>
+            <a:ext cx="10058400" cy="365760"/>
+          </a:xfrm>
+          <a:prstGeom prst="rect">
+            <a:avLst/>
+          </a:prstGeom>
+          <a:noFill/>
+          <a:ln/>
+        </p:spPr>
+        <p:txBody>
+          <a:bodyPr wrap="square" lIns="0" tIns="0" rIns="0" bIns="0" rtlCol="0" anchor="ctr"/>
+          <a:lstStyle/>
+          <a:p>
+            <a:pPr algn="l" indent="0" marL="0">
+              <a:buNone/>
+            </a:pPr>
+            <a:r>
+              <a:rPr lang="en-US" sz="1300" b="1" spc="300" kern="0" dirty="0">
+                <a:solidFill>
+                  <a:srgbClr val="FF8A3D"/>
+                </a:solidFill>
+                <a:latin typeface="Calibri" pitchFamily="34" charset="0"/>
+                <a:ea typeface="Calibri" pitchFamily="34" charset="-122"/>
+                <a:cs typeface="Calibri" pitchFamily="34" charset="-120"/>
+              </a:rPr>
+              <a:t>BACKGROUNDS</a:t>
+            </a:r>
+            <a:endParaRPr lang="en-US" sz="1300" dirty="0"/>
+          </a:p>
+        </p:txBody>
+      </p:sp>
+      <p:sp>
+        <p:nvSpPr>
+          <p:cNvPr id="3" name="Text 1"/>
+          <p:cNvSpPr txBox="1"/>
+          <p:nvPr/>
+        </p:nvSpPr>
+        <p:spPr>
+          <a:xfrm>
+            <a:off x="640080" y="841248"/>
+            <a:ext cx="10881360" cy="914400"/>
+          </a:xfrm>
+          <a:prstGeom prst="rect">
+            <a:avLst/>
+          </a:prstGeom>
+          <a:noFill/>
+          <a:ln/>
+        </p:spPr>
+        <p:txBody>
+          <a:bodyPr wrap="square" lIns="0" tIns="0" rIns="0" bIns="0" rtlCol="0" anchor="ctr"/>
+          <a:lstStyle/>
+          <a:p>
+            <a:pPr algn="l" indent="0" marL="0">
+              <a:buNone/>
+            </a:pPr>
+            <a:r>
+              <a:rPr lang="en-US" sz="3400" b="1" dirty="0">
+                <a:solidFill>
+                  <a:srgbClr val="2B2B7A"/>
+                </a:solidFill>
+                <a:latin typeface="Cambria" pitchFamily="34" charset="0"/>
+                <a:ea typeface="Cambria" pitchFamily="34" charset="-122"/>
+                <a:cs typeface="Cambria" pitchFamily="34" charset="-120"/>
+              </a:rPr>
+              <a:t>Background Properties</a:t>
+            </a:r>
+            <a:endParaRPr lang="en-US" sz="3400" dirty="0"/>
+          </a:p>
+        </p:txBody>
+      </p:sp>
+      <p:sp>
+        <p:nvSpPr>
+          <p:cNvPr id="4" name="Shape 2"/>
+          <p:cNvSpPr/>
+          <p:nvPr/>
+        </p:nvSpPr>
+        <p:spPr>
+          <a:xfrm>
+            <a:off x="640080" y="1965960"/>
+            <a:ext cx="10911535" cy="3291840"/>
+          </a:xfrm>
+          <a:prstGeom prst="roundRect">
+            <a:avLst>
+              <a:gd name="adj" fmla="val 2222"/>
+            </a:avLst>
+          </a:prstGeom>
+          <a:solidFill>
+            <a:srgbClr val="1E1E4C"/>
+          </a:solidFill>
+          <a:ln/>
+        </p:spPr>
+      </p:sp>
+      <p:sp>
+        <p:nvSpPr>
+          <p:cNvPr id="5" name="Text 3"/>
+          <p:cNvSpPr txBox="1"/>
+          <p:nvPr/>
+        </p:nvSpPr>
+        <p:spPr>
+          <a:xfrm>
+            <a:off x="960120" y="2194560"/>
+            <a:ext cx="10271455" cy="2834640"/>
+          </a:xfrm>
+          <a:prstGeom prst="rect">
+            <a:avLst/>
+          </a:prstGeom>
+          <a:noFill/>
+          <a:ln/>
+        </p:spPr>
+        <p:txBody>
+          <a:bodyPr wrap="square" lIns="0" tIns="0" rIns="0" bIns="0" rtlCol="0" anchor="t"/>
+          <a:lstStyle/>
+          <a:p>
+            <a:pPr indent="0" marL="0">
+              <a:lnSpc>
+                <a:spcPct val="125000"/>
+              </a:lnSpc>
+              <a:buNone/>
+            </a:pPr>
+            <a:r>
+              <a:rPr lang="en-US" sz="1400" dirty="0">
+                <a:solidFill>
+                  <a:srgbClr val="C9D3F5"/>
+                </a:solidFill>
+                <a:latin typeface="Courier New" pitchFamily="34" charset="0"/>
+                <a:ea typeface="Courier New" pitchFamily="34" charset="-122"/>
+                <a:cs typeface="Courier New" pitchFamily="34" charset="-120"/>
+              </a:rPr>
+              <a:t>.card {</a:t>
+            </a:r>
+            <a:endParaRPr lang="en-US" sz="1400" dirty="0"/>
+          </a:p>
+          <a:p>
+            <a:pPr indent="0" marL="0">
+              <a:lnSpc>
+                <a:spcPct val="125000"/>
+              </a:lnSpc>
+              <a:buNone/>
+            </a:pPr>
+            <a:r>
+              <a:rPr lang="en-US" sz="1400" dirty="0">
+                <a:solidFill>
+                  <a:srgbClr val="C9D3F5"/>
+                </a:solidFill>
+                <a:latin typeface="Courier New" pitchFamily="34" charset="0"/>
+                <a:ea typeface="Courier New" pitchFamily="34" charset="-122"/>
+                <a:cs typeface="Courier New" pitchFamily="34" charset="-120"/>
+              </a:rPr>
+              <a:t>  background-color: #f5f5f5;</a:t>
+            </a:r>
+            <a:endParaRPr lang="en-US" sz="1400" dirty="0"/>
+          </a:p>
+          <a:p>
+            <a:pPr indent="0" marL="0">
+              <a:lnSpc>
+                <a:spcPct val="125000"/>
+              </a:lnSpc>
+              <a:buNone/>
+            </a:pPr>
+            <a:r>
+              <a:rPr lang="en-US" sz="1400" dirty="0">
+                <a:solidFill>
+                  <a:srgbClr val="C9D3F5"/>
+                </a:solidFill>
+                <a:latin typeface="Courier New" pitchFamily="34" charset="0"/>
+                <a:ea typeface="Courier New" pitchFamily="34" charset="-122"/>
+                <a:cs typeface="Courier New" pitchFamily="34" charset="-120"/>
+              </a:rPr>
+              <a:t>  background-image: url("pattern.png");</a:t>
+            </a:r>
+            <a:endParaRPr lang="en-US" sz="1400" dirty="0"/>
+          </a:p>
+          <a:p>
+            <a:pPr indent="0" marL="0">
+              <a:lnSpc>
+                <a:spcPct val="125000"/>
+              </a:lnSpc>
+              <a:buNone/>
+            </a:pPr>
+            <a:r>
+              <a:rPr lang="en-US" sz="1400" dirty="0">
+                <a:solidFill>
+                  <a:srgbClr val="C9D3F5"/>
+                </a:solidFill>
+                <a:latin typeface="Courier New" pitchFamily="34" charset="0"/>
+                <a:ea typeface="Courier New" pitchFamily="34" charset="-122"/>
+                <a:cs typeface="Courier New" pitchFamily="34" charset="-120"/>
+              </a:rPr>
+              <a:t>  background-repeat: no-repeat;</a:t>
+            </a:r>
+            <a:endParaRPr lang="en-US" sz="1400" dirty="0"/>
+          </a:p>
+          <a:p>
+            <a:pPr indent="0" marL="0">
+              <a:lnSpc>
+                <a:spcPct val="125000"/>
+              </a:lnSpc>
+              <a:buNone/>
+            </a:pPr>
+            <a:r>
+              <a:rPr lang="en-US" sz="1400" dirty="0">
+                <a:solidFill>
+                  <a:srgbClr val="C9D3F5"/>
+                </a:solidFill>
+                <a:latin typeface="Courier New" pitchFamily="34" charset="0"/>
+                <a:ea typeface="Courier New" pitchFamily="34" charset="-122"/>
+                <a:cs typeface="Courier New" pitchFamily="34" charset="-120"/>
+              </a:rPr>
+              <a:t>  background-position: center;</a:t>
+            </a:r>
+            <a:endParaRPr lang="en-US" sz="1400" dirty="0"/>
+          </a:p>
+          <a:p>
+            <a:pPr indent="0" marL="0">
+              <a:lnSpc>
+                <a:spcPct val="125000"/>
+              </a:lnSpc>
+              <a:buNone/>
+            </a:pPr>
+            <a:r>
+              <a:rPr lang="en-US" sz="1400" dirty="0">
+                <a:solidFill>
+                  <a:srgbClr val="C9D3F5"/>
+                </a:solidFill>
+                <a:latin typeface="Courier New" pitchFamily="34" charset="0"/>
+                <a:ea typeface="Courier New" pitchFamily="34" charset="-122"/>
+                <a:cs typeface="Courier New" pitchFamily="34" charset="-120"/>
+              </a:rPr>
+              <a:t>  background-size: cover;</a:t>
+            </a:r>
+            <a:endParaRPr lang="en-US" sz="1400" dirty="0"/>
+          </a:p>
+          <a:p>
+            <a:pPr indent="0" marL="0">
+              <a:lnSpc>
+                <a:spcPct val="125000"/>
+              </a:lnSpc>
+              <a:buNone/>
+            </a:pPr>
+            <a:r>
+              <a:rPr lang="en-US" sz="1400" dirty="0">
+                <a:solidFill>
+                  <a:srgbClr val="C9D3F5"/>
+                </a:solidFill>
+                <a:latin typeface="Courier New" pitchFamily="34" charset="0"/>
+                <a:ea typeface="Courier New" pitchFamily="34" charset="-122"/>
+                <a:cs typeface="Courier New" pitchFamily="34" charset="-120"/>
+              </a:rPr>
+              <a:t>}</a:t>
+            </a:r>
+            <a:endParaRPr lang="en-US" sz="1400" dirty="0"/>
+          </a:p>
+        </p:txBody>
+      </p:sp>
+      <p:sp>
+        <p:nvSpPr>
+          <p:cNvPr id="6" name="Text 4"/>
+          <p:cNvSpPr txBox="1"/>
+          <p:nvPr/>
+        </p:nvSpPr>
+        <p:spPr>
+          <a:xfrm>
+            <a:off x="640080" y="5486400"/>
+            <a:ext cx="10911535" cy="777240"/>
+          </a:xfrm>
+          <a:prstGeom prst="rect">
+            <a:avLst/>
+          </a:prstGeom>
+          <a:noFill/>
+          <a:ln/>
+        </p:spPr>
+        <p:txBody>
+          <a:bodyPr wrap="square" lIns="0" tIns="0" rIns="0" bIns="0" rtlCol="0" anchor="t"/>
+          <a:lstStyle/>
+          <a:p>
+            <a:pPr indent="0" marL="0">
+              <a:buNone/>
+            </a:pPr>
+            <a:r>
+              <a:rPr lang="en-US" sz="1300" dirty="0">
+                <a:solidFill>
+                  <a:srgbClr val="26262F"/>
+                </a:solidFill>
+                <a:latin typeface="Calibri" pitchFamily="34" charset="0"/>
+                <a:ea typeface="Calibri" pitchFamily="34" charset="-122"/>
+                <a:cs typeface="Calibri" pitchFamily="34" charset="-120"/>
+              </a:rPr>
+              <a:t>A background shorthand combines several of these into one declaration, just like font does.</a:t>
+            </a:r>
+            <a:endParaRPr lang="en-US" sz="1300" dirty="0"/>
+          </a:p>
+        </p:txBody>
+      </p:sp>
+      <p:sp>
+        <p:nvSpPr>
+          <p:cNvPr id="7" name="Text 5"/>
+          <p:cNvSpPr txBox="1"/>
+          <p:nvPr/>
+        </p:nvSpPr>
+        <p:spPr>
+          <a:xfrm>
+            <a:off x="640080" y="6446520"/>
+            <a:ext cx="8686800" cy="292608"/>
+          </a:xfrm>
+          <a:prstGeom prst="rect">
+            <a:avLst/>
+          </a:prstGeom>
+          <a:noFill/>
+          <a:ln/>
+        </p:spPr>
+        <p:txBody>
+          <a:bodyPr wrap="square" lIns="0" tIns="0" rIns="0" bIns="0" rtlCol="0" anchor="ctr"/>
+          <a:lstStyle/>
+          <a:p>
+            <a:pPr algn="l" indent="0" marL="0">
+              <a:buNone/>
+            </a:pPr>
+            <a:r>
+              <a:rPr lang="en-US" sz="900" dirty="0">
+                <a:solidFill>
+                  <a:srgbClr val="5D5D72"/>
+                </a:solidFill>
+                <a:latin typeface="Calibri" pitchFamily="34" charset="0"/>
+                <a:ea typeface="Calibri" pitchFamily="34" charset="-122"/>
+                <a:cs typeface="Calibri" pitchFamily="34" charset="-120"/>
+              </a:rPr>
+              <a:t>Usman Akram  •  COMSATS University Islamabad</a:t>
+            </a:r>
+            <a:endParaRPr lang="en-US" sz="900" dirty="0"/>
+          </a:p>
+        </p:txBody>
+      </p:sp>
+      <p:sp>
+        <p:nvSpPr>
+          <p:cNvPr id="8" name="Text 6"/>
+          <p:cNvSpPr txBox="1"/>
+          <p:nvPr/>
+        </p:nvSpPr>
+        <p:spPr>
+          <a:xfrm>
+            <a:off x="11155680" y="6446520"/>
+            <a:ext cx="457200" cy="292608"/>
+          </a:xfrm>
+          <a:prstGeom prst="rect">
+            <a:avLst/>
+          </a:prstGeom>
+          <a:noFill/>
+          <a:ln/>
+        </p:spPr>
+        <p:txBody>
+          <a:bodyPr wrap="square" lIns="0" tIns="0" rIns="0" bIns="0" rtlCol="0" anchor="ctr"/>
+          <a:lstStyle/>
+          <a:p>
+            <a:pPr algn="r" indent="0" marL="0">
+              <a:buNone/>
+            </a:pPr>
+            <a:r>
+              <a:rPr lang="en-US" sz="900" dirty="0">
+                <a:solidFill>
+                  <a:srgbClr val="5D5D72"/>
+                </a:solidFill>
+                <a:latin typeface="Calibri" pitchFamily="34" charset="0"/>
+                <a:ea typeface="Calibri" pitchFamily="34" charset="-122"/>
+                <a:cs typeface="Calibri" pitchFamily="34" charset="-120"/>
+              </a:rPr>
+              <a:t>30</a:t>
+            </a:r>
+            <a:endParaRPr lang="en-US" sz="900" dirty="0"/>
+          </a:p>
+        </p:txBody>
+      </p:sp>
+    </p:spTree>
+  </p:cSld>
+  <p:clrMapOvr>
+    <a:masterClrMapping/>
+  </p:clrMapOvr>
+</p:sld>
+</file>
+
+<file path=ppt/slides/slide31.xml><?xml version="1.0" encoding="utf-8"?>
+<p:sld xmlns:a="http://schemas.openxmlformats.org/drawingml/2006/main" xmlns:r="http://schemas.openxmlformats.org/officeDocument/2006/relationships" xmlns:p="http://schemas.openxmlformats.org/presentationml/2006/main">
+  <p:cSld name="Slide 31">
+    <p:bg>
+      <p:bgPr>
+        <a:solidFill>
+          <a:srgbClr val="2B2B7A"/>
+        </a:solidFill>
+      </p:bgPr>
+    </p:bg>
+    <p:spTree>
+      <p:nvGrpSpPr>
+        <p:cNvPr id="1" name=""/>
+        <p:cNvGrpSpPr/>
+        <p:nvPr/>
+      </p:nvGrpSpPr>
+      <p:grpSpPr>
+        <a:xfrm>
+          <a:off x="0" y="0"/>
+          <a:ext cx="0" cy="0"/>
+          <a:chOff x="0" y="0"/>
+          <a:chExt cx="0" cy="0"/>
+        </a:xfrm>
+      </p:grpSpPr>
+      <p:sp>
+        <p:nvSpPr>
+          <p:cNvPr id="2" name="Text 0"/>
+          <p:cNvSpPr txBox="1"/>
+          <p:nvPr/>
+        </p:nvSpPr>
+        <p:spPr>
+          <a:xfrm>
+            <a:off x="822960" y="731520"/>
+            <a:ext cx="9144000" cy="457200"/>
+          </a:xfrm>
+          <a:prstGeom prst="rect">
+            <a:avLst/>
+          </a:prstGeom>
+          <a:noFill/>
+          <a:ln/>
+        </p:spPr>
+        <p:txBody>
+          <a:bodyPr wrap="square" lIns="0" tIns="0" rIns="0" bIns="0" rtlCol="0" anchor="ctr"/>
+          <a:lstStyle/>
+          <a:p>
+            <a:pPr indent="0" marL="0">
+              <a:buNone/>
+            </a:pPr>
+            <a:r>
+              <a:rPr lang="en-US" sz="1500" b="1" spc="400" kern="0" dirty="0">
+                <a:solidFill>
+                  <a:srgbClr val="FF8A3D"/>
+                </a:solidFill>
+                <a:latin typeface="Calibri" pitchFamily="34" charset="0"/>
+                <a:ea typeface="Calibri" pitchFamily="34" charset="-122"/>
+                <a:cs typeface="Calibri" pitchFamily="34" charset="-120"/>
+              </a:rPr>
+              <a:t>KEY TAKEAWAYS</a:t>
+            </a:r>
+            <a:endParaRPr lang="en-US" sz="1500" dirty="0"/>
+          </a:p>
+        </p:txBody>
+      </p:sp>
+      <p:sp>
+        <p:nvSpPr>
+          <p:cNvPr id="3" name="Text 1"/>
+          <p:cNvSpPr txBox="1"/>
+          <p:nvPr/>
+        </p:nvSpPr>
+        <p:spPr>
+          <a:xfrm>
+            <a:off x="777240" y="1188720"/>
+            <a:ext cx="10515600" cy="822960"/>
+          </a:xfrm>
+          <a:prstGeom prst="rect">
+            <a:avLst/>
+          </a:prstGeom>
+          <a:noFill/>
+          <a:ln/>
+        </p:spPr>
+        <p:txBody>
+          <a:bodyPr wrap="square" lIns="0" tIns="0" rIns="0" bIns="0" rtlCol="0" anchor="ctr"/>
+          <a:lstStyle/>
+          <a:p>
+            <a:pPr indent="0" marL="0">
+              <a:buNone/>
+            </a:pPr>
+            <a:r>
+              <a:rPr lang="en-US" sz="3400" b="1" dirty="0">
+                <a:solidFill>
+                  <a:srgbClr val="FFFFFF"/>
+                </a:solidFill>
+                <a:latin typeface="Cambria" pitchFamily="34" charset="0"/>
+                <a:ea typeface="Cambria" pitchFamily="34" charset="-122"/>
+                <a:cs typeface="Cambria" pitchFamily="34" charset="-120"/>
+              </a:rPr>
+              <a:t>Lecture 5 in Six Points</a:t>
+            </a:r>
+            <a:endParaRPr lang="en-US" sz="3400" dirty="0"/>
+          </a:p>
+        </p:txBody>
+      </p:sp>
+      <p:sp>
+        <p:nvSpPr>
+          <p:cNvPr id="4" name="Shape 2"/>
+          <p:cNvSpPr/>
+          <p:nvPr/>
+        </p:nvSpPr>
+        <p:spPr>
+          <a:xfrm>
+            <a:off x="822960" y="2286000"/>
+            <a:ext cx="438912" cy="438912"/>
+          </a:xfrm>
+          <a:prstGeom prst="ellipse">
+            <a:avLst/>
+          </a:prstGeom>
+          <a:solidFill>
+            <a:srgbClr val="FF8A3D"/>
+          </a:solidFill>
+          <a:ln/>
+        </p:spPr>
+      </p:sp>
+      <p:sp>
+        <p:nvSpPr>
+          <p:cNvPr id="5" name="Text 3"/>
+          <p:cNvSpPr txBox="1"/>
+          <p:nvPr/>
+        </p:nvSpPr>
+        <p:spPr>
+          <a:xfrm>
+            <a:off x="822960" y="2286000"/>
+            <a:ext cx="438912" cy="438912"/>
+          </a:xfrm>
+          <a:prstGeom prst="rect">
+            <a:avLst/>
+          </a:prstGeom>
+          <a:noFill/>
+          <a:ln/>
+        </p:spPr>
+        <p:txBody>
+          <a:bodyPr wrap="square" lIns="0" tIns="0" rIns="0" bIns="0" rtlCol="0" anchor="ctr"/>
+          <a:lstStyle/>
+          <a:p>
+            <a:pPr algn="ctr" indent="0" marL="0">
+              <a:buNone/>
+            </a:pPr>
+            <a:r>
+              <a:rPr lang="en-US" sz="1500" b="1" dirty="0">
+                <a:solidFill>
+                  <a:srgbClr val="FFFFFF"/>
+                </a:solidFill>
+                <a:latin typeface="Calibri" pitchFamily="34" charset="0"/>
+                <a:ea typeface="Calibri" pitchFamily="34" charset="-122"/>
+                <a:cs typeface="Calibri" pitchFamily="34" charset="-120"/>
+              </a:rPr>
+              <a:t>1</a:t>
+            </a:r>
+            <a:endParaRPr lang="en-US" sz="1500" dirty="0"/>
+          </a:p>
+        </p:txBody>
+      </p:sp>
+      <p:sp>
+        <p:nvSpPr>
+          <p:cNvPr id="6" name="Text 4"/>
+          <p:cNvSpPr txBox="1"/>
+          <p:nvPr/>
+        </p:nvSpPr>
+        <p:spPr>
+          <a:xfrm>
+            <a:off x="1463040" y="2194560"/>
+            <a:ext cx="10058400" cy="640080"/>
+          </a:xfrm>
+          <a:prstGeom prst="rect">
+            <a:avLst/>
+          </a:prstGeom>
+          <a:noFill/>
+          <a:ln/>
+        </p:spPr>
+        <p:txBody>
+          <a:bodyPr wrap="square" lIns="0" tIns="0" rIns="0" bIns="0" rtlCol="0" anchor="ctr"/>
+          <a:lstStyle/>
+          <a:p>
+            <a:pPr indent="0" marL="0">
+              <a:buNone/>
+            </a:pPr>
+            <a:r>
+              <a:rPr lang="en-US" sz="1250" dirty="0">
+                <a:solidFill>
+                  <a:srgbClr val="C9D3F5"/>
+                </a:solidFill>
+                <a:latin typeface="Calibri" pitchFamily="34" charset="0"/>
+                <a:ea typeface="Calibri" pitchFamily="34" charset="-122"/>
+                <a:cs typeface="Calibri" pitchFamily="34" charset="-120"/>
+              </a:rPr>
+              <a:t>CSS separates presentation from content; external style sheets are preferred for real projects.</a:t>
+            </a:r>
+            <a:endParaRPr lang="en-US" sz="1250" dirty="0"/>
+          </a:p>
+        </p:txBody>
+      </p:sp>
+      <p:sp>
+        <p:nvSpPr>
+          <p:cNvPr id="7" name="Shape 5"/>
+          <p:cNvSpPr/>
+          <p:nvPr/>
+        </p:nvSpPr>
+        <p:spPr>
+          <a:xfrm>
+            <a:off x="822960" y="2971800"/>
+            <a:ext cx="438912" cy="438912"/>
+          </a:xfrm>
+          <a:prstGeom prst="ellipse">
+            <a:avLst/>
+          </a:prstGeom>
+          <a:solidFill>
+            <a:srgbClr val="FF8A3D"/>
+          </a:solidFill>
+          <a:ln/>
+        </p:spPr>
+      </p:sp>
+      <p:sp>
+        <p:nvSpPr>
+          <p:cNvPr id="8" name="Text 6"/>
+          <p:cNvSpPr txBox="1"/>
+          <p:nvPr/>
+        </p:nvSpPr>
+        <p:spPr>
+          <a:xfrm>
+            <a:off x="822960" y="2971800"/>
+            <a:ext cx="438912" cy="438912"/>
+          </a:xfrm>
+          <a:prstGeom prst="rect">
+            <a:avLst/>
+          </a:prstGeom>
+          <a:noFill/>
+          <a:ln/>
+        </p:spPr>
+        <p:txBody>
+          <a:bodyPr wrap="square" lIns="0" tIns="0" rIns="0" bIns="0" rtlCol="0" anchor="ctr"/>
+          <a:lstStyle/>
+          <a:p>
+            <a:pPr algn="ctr" indent="0" marL="0">
+              <a:buNone/>
+            </a:pPr>
+            <a:r>
+              <a:rPr lang="en-US" sz="1500" b="1" dirty="0">
+                <a:solidFill>
+                  <a:srgbClr val="FFFFFF"/>
+                </a:solidFill>
+                <a:latin typeface="Calibri" pitchFamily="34" charset="0"/>
+                <a:ea typeface="Calibri" pitchFamily="34" charset="-122"/>
+                <a:cs typeface="Calibri" pitchFamily="34" charset="-120"/>
+              </a:rPr>
+              <a:t>2</a:t>
+            </a:r>
+            <a:endParaRPr lang="en-US" sz="1500" dirty="0"/>
+          </a:p>
+        </p:txBody>
+      </p:sp>
+      <p:sp>
+        <p:nvSpPr>
+          <p:cNvPr id="9" name="Text 7"/>
+          <p:cNvSpPr txBox="1"/>
+          <p:nvPr/>
+        </p:nvSpPr>
+        <p:spPr>
+          <a:xfrm>
+            <a:off x="1463040" y="2880360"/>
+            <a:ext cx="10058400" cy="640080"/>
+          </a:xfrm>
+          <a:prstGeom prst="rect">
+            <a:avLst/>
+          </a:prstGeom>
+          <a:noFill/>
+          <a:ln/>
+        </p:spPr>
+        <p:txBody>
+          <a:bodyPr wrap="square" lIns="0" tIns="0" rIns="0" bIns="0" rtlCol="0" anchor="ctr"/>
+          <a:lstStyle/>
+          <a:p>
+            <a:pPr indent="0" marL="0">
+              <a:buNone/>
+            </a:pPr>
+            <a:r>
+              <a:rPr lang="en-US" sz="1250" dirty="0">
+                <a:solidFill>
+                  <a:srgbClr val="C9D3F5"/>
+                </a:solidFill>
+                <a:latin typeface="Calibri" pitchFamily="34" charset="0"/>
+                <a:ea typeface="Calibri" pitchFamily="34" charset="-122"/>
+                <a:cs typeface="Calibri" pitchFamily="34" charset="-120"/>
+              </a:rPr>
+              <a:t>Selectors decide what gets styled: element, class, id, attribute, grouping, descendant.</a:t>
+            </a:r>
+            <a:endParaRPr lang="en-US" sz="1250" dirty="0"/>
+          </a:p>
+        </p:txBody>
+      </p:sp>
+      <p:sp>
+        <p:nvSpPr>
+          <p:cNvPr id="10" name="Shape 8"/>
+          <p:cNvSpPr/>
+          <p:nvPr/>
+        </p:nvSpPr>
+        <p:spPr>
+          <a:xfrm>
+            <a:off x="822960" y="3657600"/>
+            <a:ext cx="438912" cy="438912"/>
+          </a:xfrm>
+          <a:prstGeom prst="ellipse">
+            <a:avLst/>
+          </a:prstGeom>
+          <a:solidFill>
+            <a:srgbClr val="FF8A3D"/>
+          </a:solidFill>
+          <a:ln/>
+        </p:spPr>
+      </p:sp>
+      <p:sp>
+        <p:nvSpPr>
+          <p:cNvPr id="11" name="Text 9"/>
+          <p:cNvSpPr txBox="1"/>
+          <p:nvPr/>
+        </p:nvSpPr>
+        <p:spPr>
+          <a:xfrm>
+            <a:off x="822960" y="3657600"/>
+            <a:ext cx="438912" cy="438912"/>
+          </a:xfrm>
+          <a:prstGeom prst="rect">
+            <a:avLst/>
+          </a:prstGeom>
+          <a:noFill/>
+          <a:ln/>
+        </p:spPr>
+        <p:txBody>
+          <a:bodyPr wrap="square" lIns="0" tIns="0" rIns="0" bIns="0" rtlCol="0" anchor="ctr"/>
+          <a:lstStyle/>
+          <a:p>
+            <a:pPr algn="ctr" indent="0" marL="0">
+              <a:buNone/>
+            </a:pPr>
+            <a:r>
+              <a:rPr lang="en-US" sz="1500" b="1" dirty="0">
+                <a:solidFill>
+                  <a:srgbClr val="FFFFFF"/>
+                </a:solidFill>
+                <a:latin typeface="Calibri" pitchFamily="34" charset="0"/>
+                <a:ea typeface="Calibri" pitchFamily="34" charset="-122"/>
+                <a:cs typeface="Calibri" pitchFamily="34" charset="-120"/>
+              </a:rPr>
+              <a:t>3</a:t>
+            </a:r>
+            <a:endParaRPr lang="en-US" sz="1500" dirty="0"/>
+          </a:p>
+        </p:txBody>
+      </p:sp>
+      <p:sp>
+        <p:nvSpPr>
+          <p:cNvPr id="12" name="Text 10"/>
+          <p:cNvSpPr txBox="1"/>
+          <p:nvPr/>
+        </p:nvSpPr>
+        <p:spPr>
+          <a:xfrm>
+            <a:off x="1463040" y="3566160"/>
+            <a:ext cx="10058400" cy="640080"/>
+          </a:xfrm>
+          <a:prstGeom prst="rect">
+            <a:avLst/>
+          </a:prstGeom>
+          <a:noFill/>
+          <a:ln/>
+        </p:spPr>
+        <p:txBody>
+          <a:bodyPr wrap="square" lIns="0" tIns="0" rIns="0" bIns="0" rtlCol="0" anchor="ctr"/>
+          <a:lstStyle/>
+          <a:p>
+            <a:pPr indent="0" marL="0">
+              <a:buNone/>
+            </a:pPr>
+            <a:r>
+              <a:rPr lang="en-US" sz="1250" dirty="0">
+                <a:solidFill>
+                  <a:srgbClr val="C9D3F5"/>
+                </a:solidFill>
+                <a:latin typeface="Calibri" pitchFamily="34" charset="0"/>
+                <a:ea typeface="Calibri" pitchFamily="34" charset="-122"/>
+                <a:cs typeface="Calibri" pitchFamily="34" charset="-120"/>
+              </a:rPr>
+              <a:t>The cascade resolves conflicts in order: importance, then specificity, then source order — every time.</a:t>
+            </a:r>
+            <a:endParaRPr lang="en-US" sz="1250" dirty="0"/>
+          </a:p>
+        </p:txBody>
+      </p:sp>
+      <p:sp>
+        <p:nvSpPr>
+          <p:cNvPr id="13" name="Shape 11"/>
+          <p:cNvSpPr/>
+          <p:nvPr/>
+        </p:nvSpPr>
+        <p:spPr>
+          <a:xfrm>
+            <a:off x="822960" y="4343400"/>
+            <a:ext cx="438912" cy="438912"/>
+          </a:xfrm>
+          <a:prstGeom prst="ellipse">
+            <a:avLst/>
+          </a:prstGeom>
+          <a:solidFill>
+            <a:srgbClr val="FF8A3D"/>
+          </a:solidFill>
+          <a:ln/>
+        </p:spPr>
+      </p:sp>
+      <p:sp>
+        <p:nvSpPr>
+          <p:cNvPr id="14" name="Text 12"/>
+          <p:cNvSpPr txBox="1"/>
+          <p:nvPr/>
+        </p:nvSpPr>
+        <p:spPr>
+          <a:xfrm>
+            <a:off x="822960" y="4343400"/>
+            <a:ext cx="438912" cy="438912"/>
+          </a:xfrm>
+          <a:prstGeom prst="rect">
+            <a:avLst/>
+          </a:prstGeom>
+          <a:noFill/>
+          <a:ln/>
+        </p:spPr>
+        <p:txBody>
+          <a:bodyPr wrap="square" lIns="0" tIns="0" rIns="0" bIns="0" rtlCol="0" anchor="ctr"/>
+          <a:lstStyle/>
+          <a:p>
+            <a:pPr algn="ctr" indent="0" marL="0">
+              <a:buNone/>
+            </a:pPr>
+            <a:r>
+              <a:rPr lang="en-US" sz="1500" b="1" dirty="0">
+                <a:solidFill>
+                  <a:srgbClr val="FFFFFF"/>
+                </a:solidFill>
+                <a:latin typeface="Calibri" pitchFamily="34" charset="0"/>
+                <a:ea typeface="Calibri" pitchFamily="34" charset="-122"/>
+                <a:cs typeface="Calibri" pitchFamily="34" charset="-120"/>
+              </a:rPr>
+              <a:t>4</a:t>
+            </a:r>
+            <a:endParaRPr lang="en-US" sz="1500" dirty="0"/>
+          </a:p>
+        </p:txBody>
+      </p:sp>
+      <p:sp>
+        <p:nvSpPr>
+          <p:cNvPr id="15" name="Text 13"/>
+          <p:cNvSpPr txBox="1"/>
+          <p:nvPr/>
+        </p:nvSpPr>
+        <p:spPr>
+          <a:xfrm>
+            <a:off x="1463040" y="4251960"/>
+            <a:ext cx="10058400" cy="640080"/>
+          </a:xfrm>
+          <a:prstGeom prst="rect">
+            <a:avLst/>
+          </a:prstGeom>
+          <a:noFill/>
+          <a:ln/>
+        </p:spPr>
+        <p:txBody>
+          <a:bodyPr wrap="square" lIns="0" tIns="0" rIns="0" bIns="0" rtlCol="0" anchor="ctr"/>
+          <a:lstStyle/>
+          <a:p>
+            <a:pPr indent="0" marL="0">
+              <a:buNone/>
+            </a:pPr>
+            <a:r>
+              <a:rPr lang="en-US" sz="1250" dirty="0">
+                <a:solidFill>
+                  <a:srgbClr val="C9D3F5"/>
+                </a:solidFill>
+                <a:latin typeface="Calibri" pitchFamily="34" charset="0"/>
+                <a:ea typeface="Calibri" pitchFamily="34" charset="-122"/>
+                <a:cs typeface="Calibri" pitchFamily="34" charset="-120"/>
+              </a:rPr>
+              <a:t>Specificity is a 4-part score compared column by column; one ID beats any number of classes or elements.</a:t>
+            </a:r>
+            <a:endParaRPr lang="en-US" sz="1250" dirty="0"/>
+          </a:p>
+        </p:txBody>
+      </p:sp>
+      <p:sp>
+        <p:nvSpPr>
+          <p:cNvPr id="16" name="Shape 14"/>
+          <p:cNvSpPr/>
+          <p:nvPr/>
+        </p:nvSpPr>
+        <p:spPr>
+          <a:xfrm>
+            <a:off x="822960" y="5029200"/>
+            <a:ext cx="438912" cy="438912"/>
+          </a:xfrm>
+          <a:prstGeom prst="ellipse">
+            <a:avLst/>
+          </a:prstGeom>
+          <a:solidFill>
+            <a:srgbClr val="FF8A3D"/>
+          </a:solidFill>
+          <a:ln/>
+        </p:spPr>
+      </p:sp>
+      <p:sp>
+        <p:nvSpPr>
+          <p:cNvPr id="17" name="Text 15"/>
+          <p:cNvSpPr txBox="1"/>
+          <p:nvPr/>
+        </p:nvSpPr>
+        <p:spPr>
+          <a:xfrm>
+            <a:off x="822960" y="5029200"/>
+            <a:ext cx="438912" cy="438912"/>
+          </a:xfrm>
+          <a:prstGeom prst="rect">
+            <a:avLst/>
+          </a:prstGeom>
+          <a:noFill/>
+          <a:ln/>
+        </p:spPr>
+        <p:txBody>
+          <a:bodyPr wrap="square" lIns="0" tIns="0" rIns="0" bIns="0" rtlCol="0" anchor="ctr"/>
+          <a:lstStyle/>
+          <a:p>
+            <a:pPr algn="ctr" indent="0" marL="0">
+              <a:buNone/>
+            </a:pPr>
+            <a:r>
+              <a:rPr lang="en-US" sz="1500" b="1" dirty="0">
+                <a:solidFill>
+                  <a:srgbClr val="FFFFFF"/>
+                </a:solidFill>
+                <a:latin typeface="Calibri" pitchFamily="34" charset="0"/>
+                <a:ea typeface="Calibri" pitchFamily="34" charset="-122"/>
+                <a:cs typeface="Calibri" pitchFamily="34" charset="-120"/>
+              </a:rPr>
+              <a:t>5</a:t>
+            </a:r>
+            <a:endParaRPr lang="en-US" sz="1500" dirty="0"/>
+          </a:p>
+        </p:txBody>
+      </p:sp>
+      <p:sp>
+        <p:nvSpPr>
+          <p:cNvPr id="18" name="Text 16"/>
+          <p:cNvSpPr txBox="1"/>
+          <p:nvPr/>
+        </p:nvSpPr>
+        <p:spPr>
+          <a:xfrm>
+            <a:off x="1463040" y="4937760"/>
+            <a:ext cx="10058400" cy="640080"/>
+          </a:xfrm>
+          <a:prstGeom prst="rect">
+            <a:avLst/>
+          </a:prstGeom>
+          <a:noFill/>
+          <a:ln/>
+        </p:spPr>
+        <p:txBody>
+          <a:bodyPr wrap="square" lIns="0" tIns="0" rIns="0" bIns="0" rtlCol="0" anchor="ctr"/>
+          <a:lstStyle/>
+          <a:p>
+            <a:pPr indent="0" marL="0">
+              <a:buNone/>
+            </a:pPr>
+            <a:r>
+              <a:rPr lang="en-US" sz="1250" dirty="0">
+                <a:solidFill>
+                  <a:srgbClr val="C9D3F5"/>
+                </a:solidFill>
+                <a:latin typeface="Calibri" pitchFamily="34" charset="0"/>
+                <a:ea typeface="Calibri" pitchFamily="34" charset="-122"/>
+                <a:cs typeface="Calibri" pitchFamily="34" charset="-120"/>
+              </a:rPr>
+              <a:t>!important should be a last resort — it breaks normal specificity reasoning.</a:t>
+            </a:r>
+            <a:endParaRPr lang="en-US" sz="1250" dirty="0"/>
+          </a:p>
+        </p:txBody>
+      </p:sp>
+      <p:sp>
+        <p:nvSpPr>
+          <p:cNvPr id="19" name="Shape 17"/>
+          <p:cNvSpPr/>
+          <p:nvPr/>
+        </p:nvSpPr>
+        <p:spPr>
+          <a:xfrm>
+            <a:off x="822960" y="5715000"/>
+            <a:ext cx="438912" cy="438912"/>
+          </a:xfrm>
+          <a:prstGeom prst="ellipse">
+            <a:avLst/>
+          </a:prstGeom>
+          <a:solidFill>
+            <a:srgbClr val="FF8A3D"/>
+          </a:solidFill>
+          <a:ln/>
+        </p:spPr>
+      </p:sp>
+      <p:sp>
+        <p:nvSpPr>
+          <p:cNvPr id="20" name="Text 18"/>
+          <p:cNvSpPr txBox="1"/>
+          <p:nvPr/>
+        </p:nvSpPr>
+        <p:spPr>
+          <a:xfrm>
+            <a:off x="822960" y="5715000"/>
+            <a:ext cx="438912" cy="438912"/>
+          </a:xfrm>
+          <a:prstGeom prst="rect">
+            <a:avLst/>
+          </a:prstGeom>
+          <a:noFill/>
+          <a:ln/>
+        </p:spPr>
+        <p:txBody>
+          <a:bodyPr wrap="square" lIns="0" tIns="0" rIns="0" bIns="0" rtlCol="0" anchor="ctr"/>
+          <a:lstStyle/>
+          <a:p>
+            <a:pPr algn="ctr" indent="0" marL="0">
+              <a:buNone/>
+            </a:pPr>
+            <a:r>
+              <a:rPr lang="en-US" sz="1500" b="1" dirty="0">
+                <a:solidFill>
+                  <a:srgbClr val="FFFFFF"/>
+                </a:solidFill>
+                <a:latin typeface="Calibri" pitchFamily="34" charset="0"/>
+                <a:ea typeface="Calibri" pitchFamily="34" charset="-122"/>
+                <a:cs typeface="Calibri" pitchFamily="34" charset="-120"/>
+              </a:rPr>
+              <a:t>6</a:t>
+            </a:r>
+            <a:endParaRPr lang="en-US" sz="1500" dirty="0"/>
+          </a:p>
+        </p:txBody>
+      </p:sp>
+      <p:sp>
+        <p:nvSpPr>
+          <p:cNvPr id="21" name="Text 19"/>
+          <p:cNvSpPr txBox="1"/>
+          <p:nvPr/>
+        </p:nvSpPr>
+        <p:spPr>
+          <a:xfrm>
+            <a:off x="1463040" y="5623560"/>
+            <a:ext cx="10058400" cy="640080"/>
+          </a:xfrm>
+          <a:prstGeom prst="rect">
+            <a:avLst/>
+          </a:prstGeom>
+          <a:noFill/>
+          <a:ln/>
+        </p:spPr>
+        <p:txBody>
+          <a:bodyPr wrap="square" lIns="0" tIns="0" rIns="0" bIns="0" rtlCol="0" anchor="ctr"/>
+          <a:lstStyle/>
+          <a:p>
+            <a:pPr indent="0" marL="0">
+              <a:buNone/>
+            </a:pPr>
+            <a:r>
+              <a:rPr lang="en-US" sz="1250" dirty="0">
+                <a:solidFill>
+                  <a:srgbClr val="C9D3F5"/>
+                </a:solidFill>
+                <a:latin typeface="Calibri" pitchFamily="34" charset="0"/>
+                <a:ea typeface="Calibri" pitchFamily="34" charset="-122"/>
+                <a:cs typeface="Calibri" pitchFamily="34" charset="-120"/>
+              </a:rPr>
+              <a:t>Text properties like color inherit from parent to child; box properties like border and margin do not.</a:t>
+            </a:r>
+            <a:endParaRPr lang="en-US" sz="1250" dirty="0"/>
+          </a:p>
+        </p:txBody>
+      </p:sp>
+      <p:sp>
+        <p:nvSpPr>
+          <p:cNvPr id="22" name="Text 20"/>
+          <p:cNvSpPr txBox="1"/>
+          <p:nvPr/>
+        </p:nvSpPr>
+        <p:spPr>
+          <a:xfrm>
+            <a:off x="640080" y="6446520"/>
+            <a:ext cx="8686800" cy="292608"/>
+          </a:xfrm>
+          <a:prstGeom prst="rect">
+            <a:avLst/>
+          </a:prstGeom>
+          <a:noFill/>
+          <a:ln/>
+        </p:spPr>
+        <p:txBody>
+          <a:bodyPr wrap="square" lIns="0" tIns="0" rIns="0" bIns="0" rtlCol="0" anchor="ctr"/>
+          <a:lstStyle/>
+          <a:p>
+            <a:pPr algn="l" indent="0" marL="0">
+              <a:buNone/>
+            </a:pPr>
+            <a:r>
+              <a:rPr lang="en-US" sz="900" dirty="0">
+                <a:solidFill>
+                  <a:srgbClr val="9AA3D8"/>
+                </a:solidFill>
+                <a:latin typeface="Calibri" pitchFamily="34" charset="0"/>
+                <a:ea typeface="Calibri" pitchFamily="34" charset="-122"/>
+                <a:cs typeface="Calibri" pitchFamily="34" charset="-120"/>
+              </a:rPr>
+              <a:t>Usman Akram  •  COMSATS University Islamabad</a:t>
+            </a:r>
+            <a:endParaRPr lang="en-US" sz="900" dirty="0"/>
+          </a:p>
+        </p:txBody>
+      </p:sp>
+      <p:sp>
+        <p:nvSpPr>
+          <p:cNvPr id="23" name="Text 21"/>
+          <p:cNvSpPr txBox="1"/>
+          <p:nvPr/>
+        </p:nvSpPr>
+        <p:spPr>
+          <a:xfrm>
+            <a:off x="11155680" y="6446520"/>
+            <a:ext cx="457200" cy="292608"/>
+          </a:xfrm>
+          <a:prstGeom prst="rect">
+            <a:avLst/>
+          </a:prstGeom>
+          <a:noFill/>
+          <a:ln/>
+        </p:spPr>
+        <p:txBody>
+          <a:bodyPr wrap="square" lIns="0" tIns="0" rIns="0" bIns="0" rtlCol="0" anchor="ctr"/>
+          <a:lstStyle/>
+          <a:p>
+            <a:pPr algn="r" indent="0" marL="0">
+              <a:buNone/>
+            </a:pPr>
+            <a:r>
+              <a:rPr lang="en-US" sz="900" dirty="0">
+                <a:solidFill>
+                  <a:srgbClr val="9AA3D8"/>
+                </a:solidFill>
+                <a:latin typeface="Calibri" pitchFamily="34" charset="0"/>
+                <a:ea typeface="Calibri" pitchFamily="34" charset="-122"/>
+                <a:cs typeface="Calibri" pitchFamily="34" charset="-120"/>
+              </a:rPr>
+              <a:t>31</a:t>
             </a:r>
             <a:endParaRPr lang="en-US" sz="900" dirty="0"/>
           </a:p>

--- a/slides/CSC336-Lecture-05-CSS-Fundamentals.pptx
+++ b/slides/CSC336-Lecture-05-CSS-Fundamentals.pptx
@@ -36,9 +36,10 @@
     <p:sldId id="284" r:id="rId30"/>
     <p:sldId id="285" r:id="rId31"/>
     <p:sldId id="286" r:id="rId32"/>
+    <p:sldId id="287" r:id="rId33"/>
   </p:sldIdLst>
   <p:notesMasterIdLst>
-    <p:notesMasterId r:id="rId33"/>
+    <p:notesMasterId r:id="rId34"/>
   </p:notesMasterIdLst>
   <p:sldSz cx="12192000" cy="6858000"/>
   <p:notesSz cx="6858000" cy="12192000"/>
@@ -2668,6 +2669,94 @@
             <a:fld id="{F7021451-1387-4CA6-816F-3879F97B5CBC}" type="slidenum">
               <a:rPr lang="en-US"/>
               <a:t>31</a:t>
+            </a:fld>
+            <a:endParaRPr lang="en-US"/>
+          </a:p>
+        </p:txBody>
+      </p:sp>
+    </p:spTree>
+    <p:extLst>
+      <p:ext uri="{BB962C8B-B14F-4D97-AF65-F5344CB8AC3E}">
+        <p14:creationId xmlns:p14="http://schemas.microsoft.com/office/powerpoint/2010/main" val="1024086991"/>
+      </p:ext>
+    </p:extLst>
+  </p:cSld>
+  <p:clrMapOvr>
+    <a:masterClrMapping/>
+  </p:clrMapOvr>
+</p:notes>
+</file>
+
+<file path=ppt/notesSlides/notesSlide32.xml><?xml version="1.0" encoding="utf-8"?>
+<p:notes xmlns:a="http://schemas.openxmlformats.org/drawingml/2006/main" xmlns:r="http://schemas.openxmlformats.org/officeDocument/2006/relationships" xmlns:p="http://schemas.openxmlformats.org/presentationml/2006/main">
+  <p:cSld>
+    <p:spTree>
+      <p:nvGrpSpPr>
+        <p:cNvPr id="1" name=""/>
+        <p:cNvGrpSpPr/>
+        <p:nvPr/>
+      </p:nvGrpSpPr>
+      <p:grpSpPr>
+        <a:xfrm>
+          <a:off x="0" y="0"/>
+          <a:ext cx="0" cy="0"/>
+          <a:chOff x="0" y="0"/>
+          <a:chExt cx="0" cy="0"/>
+        </a:xfrm>
+      </p:grpSpPr>
+      <p:sp>
+        <p:nvSpPr>
+          <p:cNvPr id="2" name="Slide Image Placeholder 1"/>
+          <p:cNvSpPr>
+            <a:spLocks noGrp="1" noRot="1" noChangeAspect="1"/>
+          </p:cNvSpPr>
+          <p:nvPr>
+            <p:ph type="sldImg"/>
+          </p:nvPr>
+        </p:nvSpPr>
+        <p:spPr/>
+      </p:sp>
+      <p:sp>
+        <p:nvSpPr>
+          <p:cNvPr id="3" name="Notes Placeholder 2"/>
+          <p:cNvSpPr>
+            <a:spLocks noGrp="1"/>
+          </p:cNvSpPr>
+          <p:nvPr>
+            <p:ph type="body" idx="1"/>
+          </p:nvPr>
+        </p:nvSpPr>
+        <p:spPr/>
+        <p:txBody>
+          <a:bodyPr/>
+          <a:lstStyle/>
+          <a:p>
+            <a:r>
+              <a:rPr lang="en-US" dirty="0"/>
+              <a:t/>
+            </a:r>
+            <a:endParaRPr lang="en-US" dirty="0"/>
+          </a:p>
+        </p:txBody>
+      </p:sp>
+      <p:sp>
+        <p:nvSpPr>
+          <p:cNvPr id="4" name="Slide Number Placeholder 3"/>
+          <p:cNvSpPr>
+            <a:spLocks noGrp="1"/>
+          </p:cNvSpPr>
+          <p:nvPr>
+            <p:ph type="sldNum" sz="quarter" idx="10"/>
+          </p:nvPr>
+        </p:nvSpPr>
+        <p:spPr/>
+        <p:txBody>
+          <a:bodyPr/>
+          <a:lstStyle/>
+          <a:p>
+            <a:fld id="{F7021451-1387-4CA6-816F-3879F97B5CBC}" type="slidenum">
+              <a:rPr lang="en-US"/>
+              <a:t>32</a:t>
             </a:fld>
             <a:endParaRPr lang="en-US"/>
           </a:p>
@@ -3906,7 +3995,7 @@
                 <a:ea typeface="Cambria" pitchFamily="34" charset="-122"/>
                 <a:cs typeface="Cambria" pitchFamily="34" charset="-120"/>
               </a:rPr>
-              <a:t>Class vs. ID</a:t>
+              <a:t>ID Selector: #main-header</a:t>
             </a:r>
             <a:endParaRPr lang="en-US" sz="3400" dirty="0"/>
           </a:p>
@@ -3921,34 +4010,218 @@
         <p:spPr>
           <a:xfrm>
             <a:off x="640080" y="1965960"/>
-            <a:ext cx="10911535" cy="1554480"/>
+            <a:ext cx="10911535" cy="1977390"/>
           </a:xfrm>
           <a:prstGeom prst="roundRect">
             <a:avLst>
-              <a:gd name="adj" fmla="val 3529"/>
+              <a:gd name="adj" fmla="val 3699"/>
             </a:avLst>
           </a:prstGeom>
           <a:solidFill>
-            <a:srgbClr val="FDECE0"/>
+            <a:srgbClr val="1E1E4C"/>
+          </a:solidFill>
+          <a:ln/>
+        </p:spPr>
+      </p:sp>
+      <p:sp>
+        <p:nvSpPr>
+          <p:cNvPr id="5" name="Text 3"/>
+          <p:cNvSpPr txBox="1"/>
+          <p:nvPr/>
+        </p:nvSpPr>
+        <p:spPr>
+          <a:xfrm>
+            <a:off x="960120" y="2194560"/>
+            <a:ext cx="10271455" cy="1520190"/>
+          </a:xfrm>
+          <a:prstGeom prst="rect">
+            <a:avLst/>
+          </a:prstGeom>
+          <a:noFill/>
+          <a:ln/>
+        </p:spPr>
+        <p:txBody>
+          <a:bodyPr wrap="square" lIns="0" tIns="0" rIns="0" bIns="0" rtlCol="0" anchor="t"/>
+          <a:lstStyle/>
+          <a:p>
+            <a:pPr indent="0" marL="0">
+              <a:lnSpc>
+                <a:spcPct val="125000"/>
+              </a:lnSpc>
+              <a:buNone/>
+            </a:pPr>
+            <a:r>
+              <a:rPr lang="en-US" sz="1250" dirty="0">
+                <a:solidFill>
+                  <a:srgbClr val="C9D3F5"/>
+                </a:solidFill>
+                <a:latin typeface="Courier New" pitchFamily="34" charset="0"/>
+                <a:ea typeface="Courier New" pitchFamily="34" charset="-122"/>
+                <a:cs typeface="Courier New" pitchFamily="34" charset="-120"/>
+              </a:rPr>
+              <a:t>&lt;div id="main-header"&gt;Site Title&lt;/div&gt;</a:t>
+            </a:r>
+            <a:endParaRPr lang="en-US" sz="1250" dirty="0"/>
+          </a:p>
+          <a:p>
+            <a:pPr indent="0" marL="0">
+              <a:lnSpc>
+                <a:spcPct val="125000"/>
+              </a:lnSpc>
+              <a:buNone/>
+            </a:pPr>
+            <a:endParaRPr lang="en-US" sz="1250" dirty="0"/>
+          </a:p>
+          <a:p>
+            <a:pPr indent="0" marL="0">
+              <a:lnSpc>
+                <a:spcPct val="125000"/>
+              </a:lnSpc>
+              <a:buNone/>
+            </a:pPr>
+            <a:r>
+              <a:rPr lang="en-US" sz="1250" dirty="0">
+                <a:solidFill>
+                  <a:srgbClr val="C9D3F5"/>
+                </a:solidFill>
+                <a:latin typeface="Courier New" pitchFamily="34" charset="0"/>
+                <a:ea typeface="Courier New" pitchFamily="34" charset="-122"/>
+                <a:cs typeface="Courier New" pitchFamily="34" charset="-120"/>
+              </a:rPr>
+              <a:t>#main-header {</a:t>
+            </a:r>
+            <a:endParaRPr lang="en-US" sz="1250" dirty="0"/>
+          </a:p>
+          <a:p>
+            <a:pPr indent="0" marL="0">
+              <a:lnSpc>
+                <a:spcPct val="125000"/>
+              </a:lnSpc>
+              <a:buNone/>
+            </a:pPr>
+            <a:r>
+              <a:rPr lang="en-US" sz="1250" dirty="0">
+                <a:solidFill>
+                  <a:srgbClr val="C9D3F5"/>
+                </a:solidFill>
+                <a:latin typeface="Courier New" pitchFamily="34" charset="0"/>
+                <a:ea typeface="Courier New" pitchFamily="34" charset="-122"/>
+                <a:cs typeface="Courier New" pitchFamily="34" charset="-120"/>
+              </a:rPr>
+              <a:t>  font-size: 2rem;</a:t>
+            </a:r>
+            <a:endParaRPr lang="en-US" sz="1250" dirty="0"/>
+          </a:p>
+          <a:p>
+            <a:pPr indent="0" marL="0">
+              <a:lnSpc>
+                <a:spcPct val="125000"/>
+              </a:lnSpc>
+              <a:buNone/>
+            </a:pPr>
+            <a:r>
+              <a:rPr lang="en-US" sz="1250" dirty="0">
+                <a:solidFill>
+                  <a:srgbClr val="C9D3F5"/>
+                </a:solidFill>
+                <a:latin typeface="Courier New" pitchFamily="34" charset="0"/>
+                <a:ea typeface="Courier New" pitchFamily="34" charset="-122"/>
+                <a:cs typeface="Courier New" pitchFamily="34" charset="-120"/>
+              </a:rPr>
+              <a:t>  text-align: center;</a:t>
+            </a:r>
+            <a:endParaRPr lang="en-US" sz="1250" dirty="0"/>
+          </a:p>
+          <a:p>
+            <a:pPr indent="0" marL="0">
+              <a:lnSpc>
+                <a:spcPct val="125000"/>
+              </a:lnSpc>
+              <a:buNone/>
+            </a:pPr>
+            <a:r>
+              <a:rPr lang="en-US" sz="1250" dirty="0">
+                <a:solidFill>
+                  <a:srgbClr val="C9D3F5"/>
+                </a:solidFill>
+                <a:latin typeface="Courier New" pitchFamily="34" charset="0"/>
+                <a:ea typeface="Courier New" pitchFamily="34" charset="-122"/>
+                <a:cs typeface="Courier New" pitchFamily="34" charset="-120"/>
+              </a:rPr>
+              <a:t>}</a:t>
+            </a:r>
+            <a:endParaRPr lang="en-US" sz="1250" dirty="0"/>
+          </a:p>
+        </p:txBody>
+      </p:sp>
+      <p:sp>
+        <p:nvSpPr>
+          <p:cNvPr id="6" name="Shape 4"/>
+          <p:cNvSpPr/>
+          <p:nvPr/>
+        </p:nvSpPr>
+        <p:spPr>
+          <a:xfrm>
+            <a:off x="530352" y="4107942"/>
+            <a:ext cx="11130991" cy="2219706"/>
+          </a:xfrm>
+          <a:prstGeom prst="roundRect">
+            <a:avLst>
+              <a:gd name="adj" fmla="val 2472"/>
+            </a:avLst>
+          </a:prstGeom>
+          <a:solidFill>
+            <a:srgbClr val="FFFFFF"/>
           </a:solidFill>
           <a:ln w="12700">
             <a:solidFill>
-              <a:srgbClr val="FF8A3D"/>
+              <a:srgbClr val="E2E2EE"/>
             </a:solidFill>
             <a:prstDash val="solid"/>
           </a:ln>
-        </p:spPr>
-      </p:sp>
-      <p:sp>
-        <p:nvSpPr>
-          <p:cNvPr id="5" name="Text 3"/>
+          <a:effectLst>
+            <a:outerShdw sx="100000" sy="100000" kx="0" ky="0" algn="bl" rotWithShape="0" blurRad="101600" dist="38100" dir="5400000">
+              <a:srgbClr val="000000">
+                <a:alpha val="12000"/>
+              </a:srgbClr>
+            </a:outerShdw>
+          </a:effectLst>
+        </p:spPr>
+      </p:sp>
+      <p:pic>
+        <p:nvPicPr>
+          <p:cNvPr id="7" name="Image 0" descr="D:/GitHub/mern-web-book/docs/assets/img/lecture-05/id-selector.png">    </p:cNvPr>
+          <p:cNvPicPr>
+            <a:picLocks noChangeAspect="1"/>
+          </p:cNvPicPr>
+          <p:nvPr/>
+        </p:nvPicPr>
+        <p:blipFill>
+          <a:blip r:embed="rId1"/>
+          <a:stretch>
+            <a:fillRect/>
+          </a:stretch>
+        </p:blipFill>
+        <p:spPr>
+          <a:xfrm>
+            <a:off x="3886048" y="4493895"/>
+            <a:ext cx="4419600" cy="1447800"/>
+          </a:xfrm>
+          <a:prstGeom prst="rect">
+            <a:avLst/>
+          </a:prstGeom>
+        </p:spPr>
+      </p:pic>
+      <p:sp>
+        <p:nvSpPr>
+          <p:cNvPr id="8" name="Text 5"/>
           <p:cNvSpPr txBox="1"/>
           <p:nvPr/>
         </p:nvSpPr>
         <p:spPr>
           <a:xfrm>
-            <a:off x="868680" y="2103120"/>
-            <a:ext cx="10454335" cy="274320"/>
+            <a:off x="640080" y="6446520"/>
+            <a:ext cx="8686800" cy="292608"/>
           </a:xfrm>
           <a:prstGeom prst="rect">
             <a:avLst/>
@@ -3960,96 +4233,18 @@
           <a:bodyPr wrap="square" lIns="0" tIns="0" rIns="0" bIns="0" rtlCol="0" anchor="ctr"/>
           <a:lstStyle/>
           <a:p>
-            <a:pPr indent="0" marL="0">
-              <a:buNone/>
-            </a:pPr>
-            <a:r>
-              <a:rPr lang="en-US" sz="1000" b="1" spc="200" kern="0" dirty="0">
-                <a:solidFill>
-                  <a:srgbClr val="8A3A12"/>
+            <a:pPr algn="l" indent="0" marL="0">
+              <a:buNone/>
+            </a:pPr>
+            <a:r>
+              <a:rPr lang="en-US" sz="900" dirty="0">
+                <a:solidFill>
+                  <a:srgbClr val="5D5D72"/>
                 </a:solidFill>
                 <a:latin typeface="Calibri" pitchFamily="34" charset="0"/>
                 <a:ea typeface="Calibri" pitchFamily="34" charset="-122"/>
                 <a:cs typeface="Calibri" pitchFamily="34" charset="-120"/>
               </a:rPr>
-              <a:t>WARNING</a:t>
-            </a:r>
-            <a:endParaRPr lang="en-US" sz="1000" dirty="0"/>
-          </a:p>
-        </p:txBody>
-      </p:sp>
-      <p:sp>
-        <p:nvSpPr>
-          <p:cNvPr id="6" name="Text 4"/>
-          <p:cNvSpPr txBox="1"/>
-          <p:nvPr/>
-        </p:nvSpPr>
-        <p:spPr>
-          <a:xfrm>
-            <a:off x="868680" y="2404872"/>
-            <a:ext cx="10454335" cy="960120"/>
-          </a:xfrm>
-          <a:prstGeom prst="rect">
-            <a:avLst/>
-          </a:prstGeom>
-          <a:noFill/>
-          <a:ln/>
-        </p:spPr>
-        <p:txBody>
-          <a:bodyPr wrap="square" lIns="0" tIns="0" rIns="0" bIns="0" rtlCol="0" anchor="t"/>
-          <a:lstStyle/>
-          <a:p>
-            <a:pPr indent="0" marL="0">
-              <a:buNone/>
-            </a:pPr>
-            <a:r>
-              <a:rPr lang="en-US" sz="1250" dirty="0">
-                <a:solidFill>
-                  <a:srgbClr val="26262F"/>
-                </a:solidFill>
-                <a:latin typeface="Calibri" pitchFamily="34" charset="0"/>
-                <a:ea typeface="Calibri" pitchFamily="34" charset="-122"/>
-                <a:cs typeface="Calibri" pitchFamily="34" charset="-120"/>
-              </a:rPr>
-              <a:t>Use a class when a style might apply to more than one element (most of the time). Use an id only for something that truly appears once on the page. Overusing ids makes CSS harder to reuse.</a:t>
-            </a:r>
-            <a:endParaRPr lang="en-US" sz="1250" dirty="0"/>
-          </a:p>
-        </p:txBody>
-      </p:sp>
-      <p:sp>
-        <p:nvSpPr>
-          <p:cNvPr id="7" name="Text 5"/>
-          <p:cNvSpPr txBox="1"/>
-          <p:nvPr/>
-        </p:nvSpPr>
-        <p:spPr>
-          <a:xfrm>
-            <a:off x="640080" y="6446520"/>
-            <a:ext cx="8686800" cy="292608"/>
-          </a:xfrm>
-          <a:prstGeom prst="rect">
-            <a:avLst/>
-          </a:prstGeom>
-          <a:noFill/>
-          <a:ln/>
-        </p:spPr>
-        <p:txBody>
-          <a:bodyPr wrap="square" lIns="0" tIns="0" rIns="0" bIns="0" rtlCol="0" anchor="ctr"/>
-          <a:lstStyle/>
-          <a:p>
-            <a:pPr algn="l" indent="0" marL="0">
-              <a:buNone/>
-            </a:pPr>
-            <a:r>
-              <a:rPr lang="en-US" sz="900" dirty="0">
-                <a:solidFill>
-                  <a:srgbClr val="5D5D72"/>
-                </a:solidFill>
-                <a:latin typeface="Calibri" pitchFamily="34" charset="0"/>
-                <a:ea typeface="Calibri" pitchFamily="34" charset="-122"/>
-                <a:cs typeface="Calibri" pitchFamily="34" charset="-120"/>
-              </a:rPr>
               <a:t>Usman Akram  •  COMSATS University Islamabad</a:t>
             </a:r>
             <a:endParaRPr lang="en-US" sz="900" dirty="0"/>
@@ -4058,7 +4253,7 @@
       </p:sp>
       <p:sp>
         <p:nvSpPr>
-          <p:cNvPr id="8" name="Text 6"/>
+          <p:cNvPr id="9" name="Text 6"/>
           <p:cNvSpPr txBox="1"/>
           <p:nvPr/>
         </p:nvSpPr>
@@ -4199,7 +4394,7 @@
                 <a:ea typeface="Cambria" pitchFamily="34" charset="-122"/>
                 <a:cs typeface="Cambria" pitchFamily="34" charset="-120"/>
               </a:rPr>
-              <a:t>Attribute Selector</a:t>
+              <a:t>Class vs. ID</a:t>
             </a:r>
             <a:endParaRPr lang="en-US" sz="3400" dirty="0"/>
           </a:p>
@@ -4207,14 +4402,41 @@
       </p:sp>
       <p:sp>
         <p:nvSpPr>
-          <p:cNvPr id="4" name="Text 2"/>
+          <p:cNvPr id="4" name="Shape 2"/>
+          <p:cNvSpPr/>
+          <p:nvPr/>
+        </p:nvSpPr>
+        <p:spPr>
+          <a:xfrm>
+            <a:off x="640080" y="1965960"/>
+            <a:ext cx="10911535" cy="1554480"/>
+          </a:xfrm>
+          <a:prstGeom prst="roundRect">
+            <a:avLst>
+              <a:gd name="adj" fmla="val 3529"/>
+            </a:avLst>
+          </a:prstGeom>
+          <a:solidFill>
+            <a:srgbClr val="FDECE0"/>
+          </a:solidFill>
+          <a:ln w="12700">
+            <a:solidFill>
+              <a:srgbClr val="FF8A3D"/>
+            </a:solidFill>
+            <a:prstDash val="solid"/>
+          </a:ln>
+        </p:spPr>
+      </p:sp>
+      <p:sp>
+        <p:nvSpPr>
+          <p:cNvPr id="5" name="Text 3"/>
           <p:cNvSpPr txBox="1"/>
           <p:nvPr/>
         </p:nvSpPr>
         <p:spPr>
           <a:xfrm>
-            <a:off x="640080" y="1691640"/>
-            <a:ext cx="10911535" cy="411480"/>
+            <a:off x="868680" y="2103120"/>
+            <a:ext cx="10454335" cy="274320"/>
           </a:xfrm>
           <a:prstGeom prst="rect">
             <a:avLst/>
@@ -4230,88 +4452,30 @@
               <a:buNone/>
             </a:pPr>
             <a:r>
-              <a:rPr lang="en-US" sz="1350" i="1" dirty="0">
-                <a:solidFill>
-                  <a:srgbClr val="5D5D72"/>
+              <a:rPr lang="en-US" sz="1000" b="1" spc="200" kern="0" dirty="0">
+                <a:solidFill>
+                  <a:srgbClr val="8A3A12"/>
                 </a:solidFill>
                 <a:latin typeface="Calibri" pitchFamily="34" charset="0"/>
                 <a:ea typeface="Calibri" pitchFamily="34" charset="-122"/>
                 <a:cs typeface="Calibri" pitchFamily="34" charset="-120"/>
               </a:rPr>
-              <a:t>input[type="email"] { border: 1px solid gray; }  and  a[target] { color: purple; }</a:t>
-            </a:r>
-            <a:endParaRPr lang="en-US" sz="1350" dirty="0"/>
-          </a:p>
-        </p:txBody>
-      </p:sp>
-      <p:sp>
-        <p:nvSpPr>
-          <p:cNvPr id="5" name="Shape 3"/>
-          <p:cNvSpPr/>
-          <p:nvPr/>
-        </p:nvSpPr>
-        <p:spPr>
-          <a:xfrm>
-            <a:off x="530352" y="2221992"/>
-            <a:ext cx="11130991" cy="4059936"/>
-          </a:xfrm>
-          <a:prstGeom prst="roundRect">
-            <a:avLst>
-              <a:gd name="adj" fmla="val 1351"/>
-            </a:avLst>
-          </a:prstGeom>
-          <a:solidFill>
-            <a:srgbClr val="FFFFFF"/>
-          </a:solidFill>
-          <a:ln w="12700">
-            <a:solidFill>
-              <a:srgbClr val="E2E2EE"/>
-            </a:solidFill>
-            <a:prstDash val="solid"/>
-          </a:ln>
-          <a:effectLst>
-            <a:outerShdw sx="100000" sy="100000" kx="0" ky="0" algn="bl" rotWithShape="0" blurRad="101600" dist="38100" dir="5400000">
-              <a:srgbClr val="000000">
-                <a:alpha val="12000"/>
-              </a:srgbClr>
-            </a:outerShdw>
-          </a:effectLst>
-        </p:spPr>
-      </p:sp>
-      <p:pic>
-        <p:nvPicPr>
-          <p:cNvPr id="6" name="Image 0" descr="D:/GitHub/mern-web-book/docs/assets/img/lecture-05/attribute-selector.png">    </p:cNvPr>
-          <p:cNvPicPr>
-            <a:picLocks noChangeAspect="1"/>
-          </p:cNvPicPr>
-          <p:nvPr/>
-        </p:nvPicPr>
-        <p:blipFill>
-          <a:blip r:embed="rId1"/>
-          <a:stretch>
-            <a:fillRect/>
-          </a:stretch>
-        </p:blipFill>
-        <p:spPr>
-          <a:xfrm>
-            <a:off x="2544928" y="3078480"/>
-            <a:ext cx="7101840" cy="2346960"/>
-          </a:xfrm>
-          <a:prstGeom prst="rect">
-            <a:avLst/>
-          </a:prstGeom>
-        </p:spPr>
-      </p:pic>
-      <p:sp>
-        <p:nvSpPr>
-          <p:cNvPr id="7" name="Text 4"/>
+              <a:t>WARNING</a:t>
+            </a:r>
+            <a:endParaRPr lang="en-US" sz="1000" dirty="0"/>
+          </a:p>
+        </p:txBody>
+      </p:sp>
+      <p:sp>
+        <p:nvSpPr>
+          <p:cNvPr id="6" name="Text 4"/>
           <p:cNvSpPr txBox="1"/>
           <p:nvPr/>
         </p:nvSpPr>
         <p:spPr>
           <a:xfrm>
-            <a:off x="640080" y="6446520"/>
-            <a:ext cx="8686800" cy="292608"/>
+            <a:off x="868680" y="2404872"/>
+            <a:ext cx="10454335" cy="960120"/>
           </a:xfrm>
           <a:prstGeom prst="rect">
             <a:avLst/>
@@ -4320,21 +4484,60 @@
           <a:ln/>
         </p:spPr>
         <p:txBody>
-          <a:bodyPr wrap="square" lIns="0" tIns="0" rIns="0" bIns="0" rtlCol="0" anchor="ctr"/>
-          <a:lstStyle/>
-          <a:p>
-            <a:pPr algn="l" indent="0" marL="0">
-              <a:buNone/>
-            </a:pPr>
-            <a:r>
-              <a:rPr lang="en-US" sz="900" dirty="0">
-                <a:solidFill>
-                  <a:srgbClr val="5D5D72"/>
+          <a:bodyPr wrap="square" lIns="0" tIns="0" rIns="0" bIns="0" rtlCol="0" anchor="t"/>
+          <a:lstStyle/>
+          <a:p>
+            <a:pPr indent="0" marL="0">
+              <a:buNone/>
+            </a:pPr>
+            <a:r>
+              <a:rPr lang="en-US" sz="1250" dirty="0">
+                <a:solidFill>
+                  <a:srgbClr val="26262F"/>
                 </a:solidFill>
                 <a:latin typeface="Calibri" pitchFamily="34" charset="0"/>
                 <a:ea typeface="Calibri" pitchFamily="34" charset="-122"/>
                 <a:cs typeface="Calibri" pitchFamily="34" charset="-120"/>
               </a:rPr>
+              <a:t>Use a class when a style might apply to more than one element (most of the time). Use an id only for something that truly appears once on the page. Overusing ids makes CSS harder to reuse.</a:t>
+            </a:r>
+            <a:endParaRPr lang="en-US" sz="1250" dirty="0"/>
+          </a:p>
+        </p:txBody>
+      </p:sp>
+      <p:sp>
+        <p:nvSpPr>
+          <p:cNvPr id="7" name="Text 5"/>
+          <p:cNvSpPr txBox="1"/>
+          <p:nvPr/>
+        </p:nvSpPr>
+        <p:spPr>
+          <a:xfrm>
+            <a:off x="640080" y="6446520"/>
+            <a:ext cx="8686800" cy="292608"/>
+          </a:xfrm>
+          <a:prstGeom prst="rect">
+            <a:avLst/>
+          </a:prstGeom>
+          <a:noFill/>
+          <a:ln/>
+        </p:spPr>
+        <p:txBody>
+          <a:bodyPr wrap="square" lIns="0" tIns="0" rIns="0" bIns="0" rtlCol="0" anchor="ctr"/>
+          <a:lstStyle/>
+          <a:p>
+            <a:pPr algn="l" indent="0" marL="0">
+              <a:buNone/>
+            </a:pPr>
+            <a:r>
+              <a:rPr lang="en-US" sz="900" dirty="0">
+                <a:solidFill>
+                  <a:srgbClr val="5D5D72"/>
+                </a:solidFill>
+                <a:latin typeface="Calibri" pitchFamily="34" charset="0"/>
+                <a:ea typeface="Calibri" pitchFamily="34" charset="-122"/>
+                <a:cs typeface="Calibri" pitchFamily="34" charset="-120"/>
+              </a:rPr>
               <a:t>Usman Akram  •  COMSATS University Islamabad</a:t>
             </a:r>
             <a:endParaRPr lang="en-US" sz="900" dirty="0"/>
@@ -4343,7 +4546,7 @@
       </p:sp>
       <p:sp>
         <p:nvSpPr>
-          <p:cNvPr id="8" name="Text 5"/>
+          <p:cNvPr id="8" name="Text 6"/>
           <p:cNvSpPr txBox="1"/>
           <p:nvPr/>
         </p:nvSpPr>
@@ -4484,7 +4687,7 @@
                 <a:ea typeface="Cambria" pitchFamily="34" charset="-122"/>
                 <a:cs typeface="Cambria" pitchFamily="34" charset="-120"/>
               </a:rPr>
-              <a:t>Grouping Selector</a:t>
+              <a:t>Attribute Selector</a:t>
             </a:r>
             <a:endParaRPr lang="en-US" sz="3400" dirty="0"/>
           </a:p>
@@ -4492,57 +4695,191 @@
       </p:sp>
       <p:sp>
         <p:nvSpPr>
-          <p:cNvPr id="4" name="Text 2"/>
-          <p:cNvSpPr txBox="1"/>
-          <p:nvPr/>
-        </p:nvSpPr>
-        <p:spPr>
-          <a:xfrm>
-            <a:off x="640080" y="1691640"/>
-            <a:ext cx="10911535" cy="411480"/>
-          </a:xfrm>
-          <a:prstGeom prst="rect">
-            <a:avLst/>
-          </a:prstGeom>
-          <a:noFill/>
-          <a:ln/>
-        </p:spPr>
-        <p:txBody>
-          <a:bodyPr wrap="square" lIns="0" tIns="0" rIns="0" bIns="0" rtlCol="0" anchor="ctr"/>
-          <a:lstStyle/>
-          <a:p>
-            <a:pPr indent="0" marL="0">
-              <a:buNone/>
-            </a:pPr>
-            <a:r>
-              <a:rPr lang="en-US" sz="1350" i="1" dirty="0">
-                <a:solidFill>
-                  <a:srgbClr val="5D5D72"/>
-                </a:solidFill>
-                <a:latin typeface="Calibri" pitchFamily="34" charset="0"/>
-                <a:ea typeface="Calibri" pitchFamily="34" charset="-122"/>
-                <a:cs typeface="Calibri" pitchFamily="34" charset="-120"/>
-              </a:rPr>
-              <a:t>h1, h2, h3 { font-family: Georgia, serif; color: darkred; } — one declaration block, three selectors.</a:t>
-            </a:r>
-            <a:endParaRPr lang="en-US" sz="1350" dirty="0"/>
-          </a:p>
-        </p:txBody>
-      </p:sp>
-      <p:sp>
-        <p:nvSpPr>
-          <p:cNvPr id="5" name="Shape 3"/>
+          <p:cNvPr id="4" name="Shape 2"/>
           <p:cNvSpPr/>
           <p:nvPr/>
         </p:nvSpPr>
         <p:spPr>
           <a:xfrm>
-            <a:off x="530352" y="2221992"/>
-            <a:ext cx="11130991" cy="4059936"/>
+            <a:off x="640080" y="1965960"/>
+            <a:ext cx="10911535" cy="2215515"/>
           </a:xfrm>
           <a:prstGeom prst="roundRect">
             <a:avLst>
-              <a:gd name="adj" fmla="val 1351"/>
+              <a:gd name="adj" fmla="val 3302"/>
+            </a:avLst>
+          </a:prstGeom>
+          <a:solidFill>
+            <a:srgbClr val="1E1E4C"/>
+          </a:solidFill>
+          <a:ln/>
+        </p:spPr>
+      </p:sp>
+      <p:sp>
+        <p:nvSpPr>
+          <p:cNvPr id="5" name="Text 3"/>
+          <p:cNvSpPr txBox="1"/>
+          <p:nvPr/>
+        </p:nvSpPr>
+        <p:spPr>
+          <a:xfrm>
+            <a:off x="960120" y="2194560"/>
+            <a:ext cx="10271455" cy="1758315"/>
+          </a:xfrm>
+          <a:prstGeom prst="rect">
+            <a:avLst/>
+          </a:prstGeom>
+          <a:noFill/>
+          <a:ln/>
+        </p:spPr>
+        <p:txBody>
+          <a:bodyPr wrap="square" lIns="0" tIns="0" rIns="0" bIns="0" rtlCol="0" anchor="t"/>
+          <a:lstStyle/>
+          <a:p>
+            <a:pPr indent="0" marL="0">
+              <a:lnSpc>
+                <a:spcPct val="125000"/>
+              </a:lnSpc>
+              <a:buNone/>
+            </a:pPr>
+            <a:r>
+              <a:rPr lang="en-US" sz="1250" dirty="0">
+                <a:solidFill>
+                  <a:srgbClr val="C9D3F5"/>
+                </a:solidFill>
+                <a:latin typeface="Courier New" pitchFamily="34" charset="0"/>
+                <a:ea typeface="Courier New" pitchFamily="34" charset="-122"/>
+                <a:cs typeface="Courier New" pitchFamily="34" charset="-120"/>
+              </a:rPr>
+              <a:t>input[type="email"] {</a:t>
+            </a:r>
+            <a:endParaRPr lang="en-US" sz="1250" dirty="0"/>
+          </a:p>
+          <a:p>
+            <a:pPr indent="0" marL="0">
+              <a:lnSpc>
+                <a:spcPct val="125000"/>
+              </a:lnSpc>
+              <a:buNone/>
+            </a:pPr>
+            <a:r>
+              <a:rPr lang="en-US" sz="1250" dirty="0">
+                <a:solidFill>
+                  <a:srgbClr val="C9D3F5"/>
+                </a:solidFill>
+                <a:latin typeface="Courier New" pitchFamily="34" charset="0"/>
+                <a:ea typeface="Courier New" pitchFamily="34" charset="-122"/>
+                <a:cs typeface="Courier New" pitchFamily="34" charset="-120"/>
+              </a:rPr>
+              <a:t>  border: 1px solid gray;</a:t>
+            </a:r>
+            <a:endParaRPr lang="en-US" sz="1250" dirty="0"/>
+          </a:p>
+          <a:p>
+            <a:pPr indent="0" marL="0">
+              <a:lnSpc>
+                <a:spcPct val="125000"/>
+              </a:lnSpc>
+              <a:buNone/>
+            </a:pPr>
+            <a:r>
+              <a:rPr lang="en-US" sz="1250" dirty="0">
+                <a:solidFill>
+                  <a:srgbClr val="C9D3F5"/>
+                </a:solidFill>
+                <a:latin typeface="Courier New" pitchFamily="34" charset="0"/>
+                <a:ea typeface="Courier New" pitchFamily="34" charset="-122"/>
+                <a:cs typeface="Courier New" pitchFamily="34" charset="-120"/>
+              </a:rPr>
+              <a:t>}</a:t>
+            </a:r>
+            <a:endParaRPr lang="en-US" sz="1250" dirty="0"/>
+          </a:p>
+          <a:p>
+            <a:pPr indent="0" marL="0">
+              <a:lnSpc>
+                <a:spcPct val="125000"/>
+              </a:lnSpc>
+              <a:buNone/>
+            </a:pPr>
+            <a:endParaRPr lang="en-US" sz="1250" dirty="0"/>
+          </a:p>
+          <a:p>
+            <a:pPr indent="0" marL="0">
+              <a:lnSpc>
+                <a:spcPct val="125000"/>
+              </a:lnSpc>
+              <a:buNone/>
+            </a:pPr>
+            <a:r>
+              <a:rPr lang="en-US" sz="1250" dirty="0">
+                <a:solidFill>
+                  <a:srgbClr val="C9D3F5"/>
+                </a:solidFill>
+                <a:latin typeface="Courier New" pitchFamily="34" charset="0"/>
+                <a:ea typeface="Courier New" pitchFamily="34" charset="-122"/>
+                <a:cs typeface="Courier New" pitchFamily="34" charset="-120"/>
+              </a:rPr>
+              <a:t>a[target] {</a:t>
+            </a:r>
+            <a:endParaRPr lang="en-US" sz="1250" dirty="0"/>
+          </a:p>
+          <a:p>
+            <a:pPr indent="0" marL="0">
+              <a:lnSpc>
+                <a:spcPct val="125000"/>
+              </a:lnSpc>
+              <a:buNone/>
+            </a:pPr>
+            <a:r>
+              <a:rPr lang="en-US" sz="1250" dirty="0">
+                <a:solidFill>
+                  <a:srgbClr val="C9D3F5"/>
+                </a:solidFill>
+                <a:latin typeface="Courier New" pitchFamily="34" charset="0"/>
+                <a:ea typeface="Courier New" pitchFamily="34" charset="-122"/>
+                <a:cs typeface="Courier New" pitchFamily="34" charset="-120"/>
+              </a:rPr>
+              <a:t>  color: purple;</a:t>
+            </a:r>
+            <a:endParaRPr lang="en-US" sz="1250" dirty="0"/>
+          </a:p>
+          <a:p>
+            <a:pPr indent="0" marL="0">
+              <a:lnSpc>
+                <a:spcPct val="125000"/>
+              </a:lnSpc>
+              <a:buNone/>
+            </a:pPr>
+            <a:r>
+              <a:rPr lang="en-US" sz="1250" dirty="0">
+                <a:solidFill>
+                  <a:srgbClr val="C9D3F5"/>
+                </a:solidFill>
+                <a:latin typeface="Courier New" pitchFamily="34" charset="0"/>
+                <a:ea typeface="Courier New" pitchFamily="34" charset="-122"/>
+                <a:cs typeface="Courier New" pitchFamily="34" charset="-120"/>
+              </a:rPr>
+              <a:t>}</a:t>
+            </a:r>
+            <a:endParaRPr lang="en-US" sz="1250" dirty="0"/>
+          </a:p>
+        </p:txBody>
+      </p:sp>
+      <p:sp>
+        <p:nvSpPr>
+          <p:cNvPr id="6" name="Shape 4"/>
+          <p:cNvSpPr/>
+          <p:nvPr/>
+        </p:nvSpPr>
+        <p:spPr>
+          <a:xfrm>
+            <a:off x="530352" y="4346067"/>
+            <a:ext cx="11130991" cy="1981581"/>
+          </a:xfrm>
+          <a:prstGeom prst="roundRect">
+            <a:avLst>
+              <a:gd name="adj" fmla="val 2769"/>
             </a:avLst>
           </a:prstGeom>
           <a:solidFill>
@@ -4565,7 +4902,7 @@
       </p:sp>
       <p:pic>
         <p:nvPicPr>
-          <p:cNvPr id="6" name="Image 0" descr="D:/GitHub/mern-web-book/docs/assets/img/lecture-05/grouping-selector.png">    </p:cNvPr>
+          <p:cNvPr id="7" name="Image 0" descr="D:/GitHub/mern-web-book/docs/assets/img/lecture-05/attribute-selector.png">    </p:cNvPr>
           <p:cNvPicPr>
             <a:picLocks noChangeAspect="1"/>
           </p:cNvPicPr>
@@ -4579,8 +4916,8 @@
         </p:blipFill>
         <p:spPr>
           <a:xfrm>
-            <a:off x="2924141" y="2331720"/>
-            <a:ext cx="6343414" cy="3840480"/>
+            <a:off x="3429775" y="4455795"/>
+            <a:ext cx="5332144" cy="1762125"/>
           </a:xfrm>
           <a:prstGeom prst="rect">
             <a:avLst/>
@@ -4589,7 +4926,7 @@
       </p:pic>
       <p:sp>
         <p:nvSpPr>
-          <p:cNvPr id="7" name="Text 4"/>
+          <p:cNvPr id="8" name="Text 5"/>
           <p:cNvSpPr txBox="1"/>
           <p:nvPr/>
         </p:nvSpPr>
@@ -4628,7 +4965,7 @@
       </p:sp>
       <p:sp>
         <p:nvSpPr>
-          <p:cNvPr id="8" name="Text 5"/>
+          <p:cNvPr id="9" name="Text 6"/>
           <p:cNvSpPr txBox="1"/>
           <p:nvPr/>
         </p:nvSpPr>
@@ -4769,7 +5106,7 @@
                 <a:ea typeface="Cambria" pitchFamily="34" charset="-122"/>
                 <a:cs typeface="Cambria" pitchFamily="34" charset="-120"/>
               </a:rPr>
-              <a:t>Descendant Selector</a:t>
+              <a:t>Grouping Selector</a:t>
             </a:r>
             <a:endParaRPr lang="en-US" sz="3400" dirty="0"/>
           </a:p>
@@ -4777,57 +5114,142 @@
       </p:sp>
       <p:sp>
         <p:nvSpPr>
-          <p:cNvPr id="4" name="Text 2"/>
-          <p:cNvSpPr txBox="1"/>
-          <p:nvPr/>
-        </p:nvSpPr>
-        <p:spPr>
-          <a:xfrm>
-            <a:off x="640080" y="1691640"/>
-            <a:ext cx="10911535" cy="411480"/>
-          </a:xfrm>
-          <a:prstGeom prst="rect">
-            <a:avLst/>
-          </a:prstGeom>
-          <a:noFill/>
-          <a:ln/>
-        </p:spPr>
-        <p:txBody>
-          <a:bodyPr wrap="square" lIns="0" tIns="0" rIns="0" bIns="0" rtlCol="0" anchor="ctr"/>
-          <a:lstStyle/>
-          <a:p>
-            <a:pPr indent="0" marL="0">
-              <a:buNone/>
-            </a:pPr>
-            <a:r>
-              <a:rPr lang="en-US" sz="1350" i="1" dirty="0">
-                <a:solidFill>
-                  <a:srgbClr val="5D5D72"/>
-                </a:solidFill>
-                <a:latin typeface="Calibri" pitchFamily="34" charset="0"/>
-                <a:ea typeface="Calibri" pitchFamily="34" charset="-122"/>
-                <a:cs typeface="Calibri" pitchFamily="34" charset="-120"/>
-              </a:rPr>
-              <a:t>article p { color: #333; } — selects a &lt;p&gt; anywhere inside an &lt;article&gt;, however deeply nested.</a:t>
-            </a:r>
-            <a:endParaRPr lang="en-US" sz="1350" dirty="0"/>
-          </a:p>
-        </p:txBody>
-      </p:sp>
-      <p:sp>
-        <p:nvSpPr>
-          <p:cNvPr id="5" name="Shape 3"/>
+          <p:cNvPr id="4" name="Shape 2"/>
           <p:cNvSpPr/>
           <p:nvPr/>
         </p:nvSpPr>
         <p:spPr>
           <a:xfrm>
-            <a:off x="530352" y="2221992"/>
-            <a:ext cx="11130991" cy="4059936"/>
+            <a:off x="640080" y="1965960"/>
+            <a:ext cx="10911535" cy="1501140"/>
           </a:xfrm>
           <a:prstGeom prst="roundRect">
             <a:avLst>
-              <a:gd name="adj" fmla="val 1351"/>
+              <a:gd name="adj" fmla="val 4873"/>
+            </a:avLst>
+          </a:prstGeom>
+          <a:solidFill>
+            <a:srgbClr val="1E1E4C"/>
+          </a:solidFill>
+          <a:ln/>
+        </p:spPr>
+      </p:sp>
+      <p:sp>
+        <p:nvSpPr>
+          <p:cNvPr id="5" name="Text 3"/>
+          <p:cNvSpPr txBox="1"/>
+          <p:nvPr/>
+        </p:nvSpPr>
+        <p:spPr>
+          <a:xfrm>
+            <a:off x="960120" y="2194560"/>
+            <a:ext cx="10271455" cy="1043940"/>
+          </a:xfrm>
+          <a:prstGeom prst="rect">
+            <a:avLst/>
+          </a:prstGeom>
+          <a:noFill/>
+          <a:ln/>
+        </p:spPr>
+        <p:txBody>
+          <a:bodyPr wrap="square" lIns="0" tIns="0" rIns="0" bIns="0" rtlCol="0" anchor="t"/>
+          <a:lstStyle/>
+          <a:p>
+            <a:pPr indent="0" marL="0">
+              <a:lnSpc>
+                <a:spcPct val="125000"/>
+              </a:lnSpc>
+              <a:buNone/>
+            </a:pPr>
+            <a:r>
+              <a:rPr lang="en-US" sz="1250" dirty="0">
+                <a:solidFill>
+                  <a:srgbClr val="C9D3F5"/>
+                </a:solidFill>
+                <a:latin typeface="Courier New" pitchFamily="34" charset="0"/>
+                <a:ea typeface="Courier New" pitchFamily="34" charset="-122"/>
+                <a:cs typeface="Courier New" pitchFamily="34" charset="-120"/>
+              </a:rPr>
+              <a:t>h1, h2, h3 {</a:t>
+            </a:r>
+            <a:endParaRPr lang="en-US" sz="1250" dirty="0"/>
+          </a:p>
+          <a:p>
+            <a:pPr indent="0" marL="0">
+              <a:lnSpc>
+                <a:spcPct val="125000"/>
+              </a:lnSpc>
+              <a:buNone/>
+            </a:pPr>
+            <a:r>
+              <a:rPr lang="en-US" sz="1250" dirty="0">
+                <a:solidFill>
+                  <a:srgbClr val="C9D3F5"/>
+                </a:solidFill>
+                <a:latin typeface="Courier New" pitchFamily="34" charset="0"/>
+                <a:ea typeface="Courier New" pitchFamily="34" charset="-122"/>
+                <a:cs typeface="Courier New" pitchFamily="34" charset="-120"/>
+              </a:rPr>
+              <a:t>  font-family: Georgia, serif;</a:t>
+            </a:r>
+            <a:endParaRPr lang="en-US" sz="1250" dirty="0"/>
+          </a:p>
+          <a:p>
+            <a:pPr indent="0" marL="0">
+              <a:lnSpc>
+                <a:spcPct val="125000"/>
+              </a:lnSpc>
+              <a:buNone/>
+            </a:pPr>
+            <a:r>
+              <a:rPr lang="en-US" sz="1250" dirty="0">
+                <a:solidFill>
+                  <a:srgbClr val="C9D3F5"/>
+                </a:solidFill>
+                <a:latin typeface="Courier New" pitchFamily="34" charset="0"/>
+                <a:ea typeface="Courier New" pitchFamily="34" charset="-122"/>
+                <a:cs typeface="Courier New" pitchFamily="34" charset="-120"/>
+              </a:rPr>
+              <a:t>  color: darkred;</a:t>
+            </a:r>
+            <a:endParaRPr lang="en-US" sz="1250" dirty="0"/>
+          </a:p>
+          <a:p>
+            <a:pPr indent="0" marL="0">
+              <a:lnSpc>
+                <a:spcPct val="125000"/>
+              </a:lnSpc>
+              <a:buNone/>
+            </a:pPr>
+            <a:r>
+              <a:rPr lang="en-US" sz="1250" dirty="0">
+                <a:solidFill>
+                  <a:srgbClr val="C9D3F5"/>
+                </a:solidFill>
+                <a:latin typeface="Courier New" pitchFamily="34" charset="0"/>
+                <a:ea typeface="Courier New" pitchFamily="34" charset="-122"/>
+                <a:cs typeface="Courier New" pitchFamily="34" charset="-120"/>
+              </a:rPr>
+              <a:t>}</a:t>
+            </a:r>
+            <a:endParaRPr lang="en-US" sz="1250" dirty="0"/>
+          </a:p>
+        </p:txBody>
+      </p:sp>
+      <p:sp>
+        <p:nvSpPr>
+          <p:cNvPr id="6" name="Shape 4"/>
+          <p:cNvSpPr/>
+          <p:nvPr/>
+        </p:nvSpPr>
+        <p:spPr>
+          <a:xfrm>
+            <a:off x="530352" y="3631692"/>
+            <a:ext cx="11130991" cy="2695956"/>
+          </a:xfrm>
+          <a:prstGeom prst="roundRect">
+            <a:avLst>
+              <a:gd name="adj" fmla="val 2035"/>
             </a:avLst>
           </a:prstGeom>
           <a:solidFill>
@@ -4850,7 +5272,7 @@
       </p:sp>
       <p:pic>
         <p:nvPicPr>
-          <p:cNvPr id="6" name="Image 0" descr="D:/GitHub/mern-web-book/docs/assets/img/lecture-05/descendant-selector.png">    </p:cNvPr>
+          <p:cNvPr id="7" name="Image 0" descr="D:/GitHub/mern-web-book/docs/assets/img/lecture-05/grouping-selector.png">    </p:cNvPr>
           <p:cNvPicPr>
             <a:picLocks noChangeAspect="1"/>
           </p:cNvPicPr>
@@ -4864,8 +5286,8 @@
         </p:blipFill>
         <p:spPr>
           <a:xfrm>
-            <a:off x="640080" y="3182776"/>
-            <a:ext cx="10911535" cy="2138368"/>
+            <a:off x="4050600" y="3741420"/>
+            <a:ext cx="4090495" cy="2476500"/>
           </a:xfrm>
           <a:prstGeom prst="rect">
             <a:avLst/>
@@ -4874,7 +5296,7 @@
       </p:pic>
       <p:sp>
         <p:nvSpPr>
-          <p:cNvPr id="7" name="Text 4"/>
+          <p:cNvPr id="8" name="Text 5"/>
           <p:cNvSpPr txBox="1"/>
           <p:nvPr/>
         </p:nvSpPr>
@@ -4913,7 +5335,7 @@
       </p:sp>
       <p:sp>
         <p:nvSpPr>
-          <p:cNvPr id="8" name="Text 5"/>
+          <p:cNvPr id="9" name="Text 6"/>
           <p:cNvSpPr txBox="1"/>
           <p:nvPr/>
         </p:nvSpPr>
@@ -5054,7 +5476,7 @@
                 <a:ea typeface="Cambria" pitchFamily="34" charset="-122"/>
                 <a:cs typeface="Cambria" pitchFamily="34" charset="-120"/>
               </a:rPr>
-              <a:t>The Universal Selector</a:t>
+              <a:t>Descendant Selector</a:t>
             </a:r>
             <a:endParaRPr lang="en-US" sz="3400" dirty="0"/>
           </a:p>
@@ -5069,11 +5491,11 @@
         <p:spPr>
           <a:xfrm>
             <a:off x="640080" y="1965960"/>
-            <a:ext cx="10911535" cy="2606040"/>
+            <a:ext cx="10911535" cy="2453640"/>
           </a:xfrm>
           <a:prstGeom prst="roundRect">
             <a:avLst>
-              <a:gd name="adj" fmla="val 2807"/>
+              <a:gd name="adj" fmla="val 2981"/>
             </a:avLst>
           </a:prstGeom>
           <a:solidFill>
@@ -5091,7 +5513,7 @@
         <p:spPr>
           <a:xfrm>
             <a:off x="960120" y="2194560"/>
-            <a:ext cx="10271455" cy="2148840"/>
+            <a:ext cx="10271455" cy="1996440"/>
           </a:xfrm>
           <a:prstGeom prst="rect">
             <a:avLst/>
@@ -5110,7 +5532,7 @@
               <a:buNone/>
             </a:pPr>
             <a:r>
-              <a:rPr lang="en-US" sz="1400" dirty="0">
+              <a:rPr lang="en-US" sz="1250" dirty="0">
                 <a:solidFill>
                   <a:srgbClr val="C9D3F5"/>
                 </a:solidFill>
@@ -5118,9 +5540,9 @@
                 <a:ea typeface="Courier New" pitchFamily="34" charset="-122"/>
                 <a:cs typeface="Courier New" pitchFamily="34" charset="-120"/>
               </a:rPr>
-              <a:t>* {</a:t>
-            </a:r>
-            <a:endParaRPr lang="en-US" sz="1400" dirty="0"/>
+              <a:t>article p {</a:t>
+            </a:r>
+            <a:endParaRPr lang="en-US" sz="1250" dirty="0"/>
           </a:p>
           <a:p>
             <a:pPr indent="0" marL="0">
@@ -5130,7 +5552,7 @@
               <a:buNone/>
             </a:pPr>
             <a:r>
-              <a:rPr lang="en-US" sz="1400" dirty="0">
+              <a:rPr lang="en-US" sz="1250" dirty="0">
                 <a:solidFill>
                   <a:srgbClr val="C9D3F5"/>
                 </a:solidFill>
@@ -5138,9 +5560,9 @@
                 <a:ea typeface="Courier New" pitchFamily="34" charset="-122"/>
                 <a:cs typeface="Courier New" pitchFamily="34" charset="-120"/>
               </a:rPr>
-              <a:t>  margin: 0;</a:t>
-            </a:r>
-            <a:endParaRPr lang="en-US" sz="1400" dirty="0"/>
+              <a:t>  color: #333;</a:t>
+            </a:r>
+            <a:endParaRPr lang="en-US" sz="1250" dirty="0"/>
           </a:p>
           <a:p>
             <a:pPr indent="0" marL="0">
@@ -5150,7 +5572,7 @@
               <a:buNone/>
             </a:pPr>
             <a:r>
-              <a:rPr lang="en-US" sz="1400" dirty="0">
+              <a:rPr lang="en-US" sz="1250" dirty="0">
                 <a:solidFill>
                   <a:srgbClr val="C9D3F5"/>
                 </a:solidFill>
@@ -5158,9 +5580,9 @@
                 <a:ea typeface="Courier New" pitchFamily="34" charset="-122"/>
                 <a:cs typeface="Courier New" pitchFamily="34" charset="-120"/>
               </a:rPr>
-              <a:t>  padding: 0;</a:t>
-            </a:r>
-            <a:endParaRPr lang="en-US" sz="1400" dirty="0"/>
+              <a:t>}</a:t>
+            </a:r>
+            <a:endParaRPr lang="en-US" sz="1250" dirty="0"/>
           </a:p>
           <a:p>
             <a:pPr indent="0" marL="0">
@@ -5169,18 +5591,7 @@
               </a:lnSpc>
               <a:buNone/>
             </a:pPr>
-            <a:r>
-              <a:rPr lang="en-US" sz="1400" dirty="0">
-                <a:solidFill>
-                  <a:srgbClr val="C9D3F5"/>
-                </a:solidFill>
-                <a:latin typeface="Courier New" pitchFamily="34" charset="0"/>
-                <a:ea typeface="Courier New" pitchFamily="34" charset="-122"/>
-                <a:cs typeface="Courier New" pitchFamily="34" charset="-120"/>
-              </a:rPr>
-              <a:t>  box-sizing: border-box;</a:t>
-            </a:r>
-            <a:endParaRPr lang="en-US" sz="1400" dirty="0"/>
+            <a:endParaRPr lang="en-US" sz="1250" dirty="0"/>
           </a:p>
           <a:p>
             <a:pPr indent="0" marL="0">
@@ -5190,7 +5601,7 @@
               <a:buNone/>
             </a:pPr>
             <a:r>
-              <a:rPr lang="en-US" sz="1400" dirty="0">
+              <a:rPr lang="en-US" sz="1250" dirty="0">
                 <a:solidFill>
                   <a:srgbClr val="C9D3F5"/>
                 </a:solidFill>
@@ -5198,22 +5609,140 @@
                 <a:ea typeface="Courier New" pitchFamily="34" charset="-122"/>
                 <a:cs typeface="Courier New" pitchFamily="34" charset="-120"/>
               </a:rPr>
-              <a:t>}</a:t>
-            </a:r>
-            <a:endParaRPr lang="en-US" sz="1400" dirty="0"/>
-          </a:p>
-        </p:txBody>
-      </p:sp>
-      <p:sp>
-        <p:nvSpPr>
-          <p:cNvPr id="6" name="Text 4"/>
+              <a:t>&lt;article&gt;</a:t>
+            </a:r>
+            <a:endParaRPr lang="en-US" sz="1250" dirty="0"/>
+          </a:p>
+          <a:p>
+            <a:pPr indent="0" marL="0">
+              <a:lnSpc>
+                <a:spcPct val="125000"/>
+              </a:lnSpc>
+              <a:buNone/>
+            </a:pPr>
+            <a:r>
+              <a:rPr lang="en-US" sz="1250" dirty="0">
+                <a:solidFill>
+                  <a:srgbClr val="C9D3F5"/>
+                </a:solidFill>
+                <a:latin typeface="Courier New" pitchFamily="34" charset="0"/>
+                <a:ea typeface="Courier New" pitchFamily="34" charset="-122"/>
+                <a:cs typeface="Courier New" pitchFamily="34" charset="-120"/>
+              </a:rPr>
+              <a:t>  &lt;p&gt;This paragraph IS styled (inside article).&lt;/p&gt;</a:t>
+            </a:r>
+            <a:endParaRPr lang="en-US" sz="1250" dirty="0"/>
+          </a:p>
+          <a:p>
+            <a:pPr indent="0" marL="0">
+              <a:lnSpc>
+                <a:spcPct val="125000"/>
+              </a:lnSpc>
+              <a:buNone/>
+            </a:pPr>
+            <a:r>
+              <a:rPr lang="en-US" sz="1250" dirty="0">
+                <a:solidFill>
+                  <a:srgbClr val="C9D3F5"/>
+                </a:solidFill>
+                <a:latin typeface="Courier New" pitchFamily="34" charset="0"/>
+                <a:ea typeface="Courier New" pitchFamily="34" charset="-122"/>
+                <a:cs typeface="Courier New" pitchFamily="34" charset="-120"/>
+              </a:rPr>
+              <a:t>&lt;/article&gt;</a:t>
+            </a:r>
+            <a:endParaRPr lang="en-US" sz="1250" dirty="0"/>
+          </a:p>
+          <a:p>
+            <a:pPr indent="0" marL="0">
+              <a:lnSpc>
+                <a:spcPct val="125000"/>
+              </a:lnSpc>
+              <a:buNone/>
+            </a:pPr>
+            <a:r>
+              <a:rPr lang="en-US" sz="1250" dirty="0">
+                <a:solidFill>
+                  <a:srgbClr val="C9D3F5"/>
+                </a:solidFill>
+                <a:latin typeface="Courier New" pitchFamily="34" charset="0"/>
+                <a:ea typeface="Courier New" pitchFamily="34" charset="-122"/>
+                <a:cs typeface="Courier New" pitchFamily="34" charset="-120"/>
+              </a:rPr>
+              <a:t>&lt;p&gt;This paragraph is NOT styled (outside article).&lt;/p&gt;</a:t>
+            </a:r>
+            <a:endParaRPr lang="en-US" sz="1250" dirty="0"/>
+          </a:p>
+        </p:txBody>
+      </p:sp>
+      <p:sp>
+        <p:nvSpPr>
+          <p:cNvPr id="6" name="Shape 4"/>
+          <p:cNvSpPr/>
+          <p:nvPr/>
+        </p:nvSpPr>
+        <p:spPr>
+          <a:xfrm>
+            <a:off x="530352" y="4584192"/>
+            <a:ext cx="11130991" cy="1743456"/>
+          </a:xfrm>
+          <a:prstGeom prst="roundRect">
+            <a:avLst>
+              <a:gd name="adj" fmla="val 3147"/>
+            </a:avLst>
+          </a:prstGeom>
+          <a:solidFill>
+            <a:srgbClr val="FFFFFF"/>
+          </a:solidFill>
+          <a:ln w="12700">
+            <a:solidFill>
+              <a:srgbClr val="E2E2EE"/>
+            </a:solidFill>
+            <a:prstDash val="solid"/>
+          </a:ln>
+          <a:effectLst>
+            <a:outerShdw sx="100000" sy="100000" kx="0" ky="0" algn="bl" rotWithShape="0" blurRad="101600" dist="38100" dir="5400000">
+              <a:srgbClr val="000000">
+                <a:alpha val="12000"/>
+              </a:srgbClr>
+            </a:outerShdw>
+          </a:effectLst>
+        </p:spPr>
+      </p:sp>
+      <p:pic>
+        <p:nvPicPr>
+          <p:cNvPr id="7" name="Image 0" descr="D:/GitHub/mern-web-book/docs/assets/img/lecture-05/descendant-selector.png">    </p:cNvPr>
+          <p:cNvPicPr>
+            <a:picLocks noChangeAspect="1"/>
+          </p:cNvPicPr>
+          <p:nvPr/>
+        </p:nvPicPr>
+        <p:blipFill>
+          <a:blip r:embed="rId1"/>
+          <a:stretch>
+            <a:fillRect/>
+          </a:stretch>
+        </p:blipFill>
+        <p:spPr>
+          <a:xfrm>
+            <a:off x="2207560" y="4693920"/>
+            <a:ext cx="7776575" cy="1524000"/>
+          </a:xfrm>
+          <a:prstGeom prst="rect">
+            <a:avLst/>
+          </a:prstGeom>
+        </p:spPr>
+      </p:pic>
+      <p:sp>
+        <p:nvSpPr>
+          <p:cNvPr id="8" name="Text 5"/>
           <p:cNvSpPr txBox="1"/>
           <p:nvPr/>
         </p:nvSpPr>
         <p:spPr>
           <a:xfrm>
-            <a:off x="640080" y="4800600"/>
-            <a:ext cx="10911535" cy="1463040"/>
+            <a:off x="640080" y="6446520"/>
+            <a:ext cx="8686800" cy="292608"/>
           </a:xfrm>
           <a:prstGeom prst="rect">
             <a:avLst/>
@@ -5222,60 +5751,21 @@
           <a:ln/>
         </p:spPr>
         <p:txBody>
-          <a:bodyPr wrap="square" lIns="0" tIns="0" rIns="0" bIns="0" rtlCol="0" anchor="t"/>
-          <a:lstStyle/>
-          <a:p>
-            <a:pPr indent="0" marL="0">
-              <a:buNone/>
-            </a:pPr>
-            <a:r>
-              <a:rPr lang="en-US" sz="1300" dirty="0">
-                <a:solidFill>
-                  <a:srgbClr val="26262F"/>
+          <a:bodyPr wrap="square" lIns="0" tIns="0" rIns="0" bIns="0" rtlCol="0" anchor="ctr"/>
+          <a:lstStyle/>
+          <a:p>
+            <a:pPr algn="l" indent="0" marL="0">
+              <a:buNone/>
+            </a:pPr>
+            <a:r>
+              <a:rPr lang="en-US" sz="900" dirty="0">
+                <a:solidFill>
+                  <a:srgbClr val="5D5D72"/>
                 </a:solidFill>
                 <a:latin typeface="Calibri" pitchFamily="34" charset="0"/>
                 <a:ea typeface="Calibri" pitchFamily="34" charset="-122"/>
                 <a:cs typeface="Calibri" pitchFamily="34" charset="-120"/>
               </a:rPr>
-              <a:t>* matches every single element on the page — most commonly seen in a "CSS reset" at the very top of a stylesheet.</a:t>
-            </a:r>
-            <a:endParaRPr lang="en-US" sz="1300" dirty="0"/>
-          </a:p>
-        </p:txBody>
-      </p:sp>
-      <p:sp>
-        <p:nvSpPr>
-          <p:cNvPr id="7" name="Text 5"/>
-          <p:cNvSpPr txBox="1"/>
-          <p:nvPr/>
-        </p:nvSpPr>
-        <p:spPr>
-          <a:xfrm>
-            <a:off x="640080" y="6446520"/>
-            <a:ext cx="8686800" cy="292608"/>
-          </a:xfrm>
-          <a:prstGeom prst="rect">
-            <a:avLst/>
-          </a:prstGeom>
-          <a:noFill/>
-          <a:ln/>
-        </p:spPr>
-        <p:txBody>
-          <a:bodyPr wrap="square" lIns="0" tIns="0" rIns="0" bIns="0" rtlCol="0" anchor="ctr"/>
-          <a:lstStyle/>
-          <a:p>
-            <a:pPr algn="l" indent="0" marL="0">
-              <a:buNone/>
-            </a:pPr>
-            <a:r>
-              <a:rPr lang="en-US" sz="900" dirty="0">
-                <a:solidFill>
-                  <a:srgbClr val="5D5D72"/>
-                </a:solidFill>
-                <a:latin typeface="Calibri" pitchFamily="34" charset="0"/>
-                <a:ea typeface="Calibri" pitchFamily="34" charset="-122"/>
-                <a:cs typeface="Calibri" pitchFamily="34" charset="-120"/>
-              </a:rPr>
               <a:t>Usman Akram  •  COMSATS University Islamabad</a:t>
             </a:r>
             <a:endParaRPr lang="en-US" sz="900" dirty="0"/>
@@ -5284,7 +5774,7 @@
       </p:sp>
       <p:sp>
         <p:nvSpPr>
-          <p:cNvPr id="8" name="Text 6"/>
+          <p:cNvPr id="9" name="Text 6"/>
           <p:cNvSpPr txBox="1"/>
           <p:nvPr/>
         </p:nvSpPr>
@@ -5425,7 +5915,7 @@
                 <a:ea typeface="Cambria" pitchFamily="34" charset="-122"/>
                 <a:cs typeface="Cambria" pitchFamily="34" charset="-120"/>
               </a:rPr>
-              <a:t>Combinators: Child and Sibling</a:t>
+              <a:t>The Universal Selector</a:t>
             </a:r>
             <a:endParaRPr lang="en-US" sz="3400" dirty="0"/>
           </a:p>
@@ -5440,11 +5930,11 @@
         <p:spPr>
           <a:xfrm>
             <a:off x="640080" y="1965960"/>
-            <a:ext cx="10911535" cy="1837944"/>
+            <a:ext cx="10911535" cy="1882140"/>
           </a:xfrm>
           <a:prstGeom prst="roundRect">
             <a:avLst>
-              <a:gd name="adj" fmla="val 3980"/>
+              <a:gd name="adj" fmla="val 3887"/>
             </a:avLst>
           </a:prstGeom>
           <a:solidFill>
@@ -5462,7 +5952,7 @@
         <p:spPr>
           <a:xfrm>
             <a:off x="960120" y="2194560"/>
-            <a:ext cx="10271455" cy="1380744"/>
+            <a:ext cx="10271455" cy="1424940"/>
           </a:xfrm>
           <a:prstGeom prst="rect">
             <a:avLst/>
@@ -5489,7 +5979,7 @@
                 <a:ea typeface="Courier New" pitchFamily="34" charset="-122"/>
                 <a:cs typeface="Courier New" pitchFamily="34" charset="-120"/>
               </a:rPr>
-              <a:t>nav &gt; a   { color: navy; }    /* only DIRECT children, not grandchildren   */</a:t>
+              <a:t>* {</a:t>
             </a:r>
             <a:endParaRPr lang="en-US" sz="1400" dirty="0"/>
           </a:p>
@@ -5509,7 +5999,7 @@
                 <a:ea typeface="Courier New" pitchFamily="34" charset="-122"/>
                 <a:cs typeface="Courier New" pitchFamily="34" charset="-120"/>
               </a:rPr>
-              <a:t>h2 + p    { font-weight: bold; } /* the paragraph immediately after an h2  */</a:t>
+              <a:t>  margin: 0;</a:t>
             </a:r>
             <a:endParaRPr lang="en-US" sz="1400" dirty="0"/>
           </a:p>
@@ -5529,7 +6019,47 @@
                 <a:ea typeface="Courier New" pitchFamily="34" charset="-122"/>
                 <a:cs typeface="Courier New" pitchFamily="34" charset="-120"/>
               </a:rPr>
-              <a:t>h2 ~ p    { color: gray; }       /* every p that follows an h2, not just one */</a:t>
+              <a:t>  padding: 0;</a:t>
+            </a:r>
+            <a:endParaRPr lang="en-US" sz="1400" dirty="0"/>
+          </a:p>
+          <a:p>
+            <a:pPr indent="0" marL="0">
+              <a:lnSpc>
+                <a:spcPct val="125000"/>
+              </a:lnSpc>
+              <a:buNone/>
+            </a:pPr>
+            <a:r>
+              <a:rPr lang="en-US" sz="1400" dirty="0">
+                <a:solidFill>
+                  <a:srgbClr val="C9D3F5"/>
+                </a:solidFill>
+                <a:latin typeface="Courier New" pitchFamily="34" charset="0"/>
+                <a:ea typeface="Courier New" pitchFamily="34" charset="-122"/>
+                <a:cs typeface="Courier New" pitchFamily="34" charset="-120"/>
+              </a:rPr>
+              <a:t>  box-sizing: border-box;</a:t>
+            </a:r>
+            <a:endParaRPr lang="en-US" sz="1400" dirty="0"/>
+          </a:p>
+          <a:p>
+            <a:pPr indent="0" marL="0">
+              <a:lnSpc>
+                <a:spcPct val="125000"/>
+              </a:lnSpc>
+              <a:buNone/>
+            </a:pPr>
+            <a:r>
+              <a:rPr lang="en-US" sz="1400" dirty="0">
+                <a:solidFill>
+                  <a:srgbClr val="C9D3F5"/>
+                </a:solidFill>
+                <a:latin typeface="Courier New" pitchFamily="34" charset="0"/>
+                <a:ea typeface="Courier New" pitchFamily="34" charset="-122"/>
+                <a:cs typeface="Courier New" pitchFamily="34" charset="-120"/>
+              </a:rPr>
+              <a:t>}</a:t>
             </a:r>
             <a:endParaRPr lang="en-US" sz="1400" dirty="0"/>
           </a:p>
@@ -5543,8 +6073,8 @@
         </p:nvSpPr>
         <p:spPr>
           <a:xfrm>
-            <a:off x="640080" y="4032504"/>
-            <a:ext cx="10911535" cy="2231136"/>
+            <a:off x="640080" y="4076700"/>
+            <a:ext cx="10911535" cy="2186940"/>
           </a:xfrm>
           <a:prstGeom prst="rect">
             <a:avLst/>
@@ -5568,7 +6098,7 @@
                 <a:ea typeface="Calibri" pitchFamily="34" charset="-122"/>
                 <a:cs typeface="Calibri" pitchFamily="34" charset="-120"/>
               </a:rPr>
-              <a:t>&gt; is stricter than a plain descendant selector (space) — it skips anything nested more than one level deep.</a:t>
+              <a:t>* matches every single element on the page — most commonly seen in a "CSS reset" at the very top of a stylesheet.</a:t>
             </a:r>
             <a:endParaRPr lang="en-US" sz="1300" dirty="0"/>
           </a:p>
@@ -5717,7 +6247,7 @@
                 <a:ea typeface="Calibri" pitchFamily="34" charset="-122"/>
                 <a:cs typeface="Calibri" pitchFamily="34" charset="-120"/>
               </a:rPr>
-              <a:t>STATES</a:t>
+              <a:t>SELECTORS</a:t>
             </a:r>
             <a:endParaRPr lang="en-US" sz="1300" dirty="0"/>
           </a:p>
@@ -5756,6 +6286,337 @@
                 <a:ea typeface="Cambria" pitchFamily="34" charset="-122"/>
                 <a:cs typeface="Cambria" pitchFamily="34" charset="-120"/>
               </a:rPr>
+              <a:t>Combinators: Child and Sibling</a:t>
+            </a:r>
+            <a:endParaRPr lang="en-US" sz="3400" dirty="0"/>
+          </a:p>
+        </p:txBody>
+      </p:sp>
+      <p:sp>
+        <p:nvSpPr>
+          <p:cNvPr id="4" name="Shape 2"/>
+          <p:cNvSpPr/>
+          <p:nvPr/>
+        </p:nvSpPr>
+        <p:spPr>
+          <a:xfrm>
+            <a:off x="640080" y="1965960"/>
+            <a:ext cx="10911535" cy="1348740"/>
+          </a:xfrm>
+          <a:prstGeom prst="roundRect">
+            <a:avLst>
+              <a:gd name="adj" fmla="val 5424"/>
+            </a:avLst>
+          </a:prstGeom>
+          <a:solidFill>
+            <a:srgbClr val="1E1E4C"/>
+          </a:solidFill>
+          <a:ln/>
+        </p:spPr>
+      </p:sp>
+      <p:sp>
+        <p:nvSpPr>
+          <p:cNvPr id="5" name="Text 3"/>
+          <p:cNvSpPr txBox="1"/>
+          <p:nvPr/>
+        </p:nvSpPr>
+        <p:spPr>
+          <a:xfrm>
+            <a:off x="960120" y="2194560"/>
+            <a:ext cx="10271455" cy="891540"/>
+          </a:xfrm>
+          <a:prstGeom prst="rect">
+            <a:avLst/>
+          </a:prstGeom>
+          <a:noFill/>
+          <a:ln/>
+        </p:spPr>
+        <p:txBody>
+          <a:bodyPr wrap="square" lIns="0" tIns="0" rIns="0" bIns="0" rtlCol="0" anchor="t"/>
+          <a:lstStyle/>
+          <a:p>
+            <a:pPr indent="0" marL="0">
+              <a:lnSpc>
+                <a:spcPct val="125000"/>
+              </a:lnSpc>
+              <a:buNone/>
+            </a:pPr>
+            <a:r>
+              <a:rPr lang="en-US" sz="1400" dirty="0">
+                <a:solidFill>
+                  <a:srgbClr val="C9D3F5"/>
+                </a:solidFill>
+                <a:latin typeface="Courier New" pitchFamily="34" charset="0"/>
+                <a:ea typeface="Courier New" pitchFamily="34" charset="-122"/>
+                <a:cs typeface="Courier New" pitchFamily="34" charset="-120"/>
+              </a:rPr>
+              <a:t>nav &gt; a   { color: navy; }    /* only DIRECT children, not grandchildren   */</a:t>
+            </a:r>
+            <a:endParaRPr lang="en-US" sz="1400" dirty="0"/>
+          </a:p>
+          <a:p>
+            <a:pPr indent="0" marL="0">
+              <a:lnSpc>
+                <a:spcPct val="125000"/>
+              </a:lnSpc>
+              <a:buNone/>
+            </a:pPr>
+            <a:r>
+              <a:rPr lang="en-US" sz="1400" dirty="0">
+                <a:solidFill>
+                  <a:srgbClr val="C9D3F5"/>
+                </a:solidFill>
+                <a:latin typeface="Courier New" pitchFamily="34" charset="0"/>
+                <a:ea typeface="Courier New" pitchFamily="34" charset="-122"/>
+                <a:cs typeface="Courier New" pitchFamily="34" charset="-120"/>
+              </a:rPr>
+              <a:t>h2 + p    { font-weight: bold; } /* the paragraph immediately after an h2  */</a:t>
+            </a:r>
+            <a:endParaRPr lang="en-US" sz="1400" dirty="0"/>
+          </a:p>
+          <a:p>
+            <a:pPr indent="0" marL="0">
+              <a:lnSpc>
+                <a:spcPct val="125000"/>
+              </a:lnSpc>
+              <a:buNone/>
+            </a:pPr>
+            <a:r>
+              <a:rPr lang="en-US" sz="1400" dirty="0">
+                <a:solidFill>
+                  <a:srgbClr val="C9D3F5"/>
+                </a:solidFill>
+                <a:latin typeface="Courier New" pitchFamily="34" charset="0"/>
+                <a:ea typeface="Courier New" pitchFamily="34" charset="-122"/>
+                <a:cs typeface="Courier New" pitchFamily="34" charset="-120"/>
+              </a:rPr>
+              <a:t>h2 ~ p    { color: gray; }       /* every p that follows an h2, not just one */</a:t>
+            </a:r>
+            <a:endParaRPr lang="en-US" sz="1400" dirty="0"/>
+          </a:p>
+        </p:txBody>
+      </p:sp>
+      <p:sp>
+        <p:nvSpPr>
+          <p:cNvPr id="6" name="Text 4"/>
+          <p:cNvSpPr txBox="1"/>
+          <p:nvPr/>
+        </p:nvSpPr>
+        <p:spPr>
+          <a:xfrm>
+            <a:off x="640080" y="3543300"/>
+            <a:ext cx="10911535" cy="2720340"/>
+          </a:xfrm>
+          <a:prstGeom prst="rect">
+            <a:avLst/>
+          </a:prstGeom>
+          <a:noFill/>
+          <a:ln/>
+        </p:spPr>
+        <p:txBody>
+          <a:bodyPr wrap="square" lIns="0" tIns="0" rIns="0" bIns="0" rtlCol="0" anchor="t"/>
+          <a:lstStyle/>
+          <a:p>
+            <a:pPr indent="0" marL="0">
+              <a:buNone/>
+            </a:pPr>
+            <a:r>
+              <a:rPr lang="en-US" sz="1300" dirty="0">
+                <a:solidFill>
+                  <a:srgbClr val="26262F"/>
+                </a:solidFill>
+                <a:latin typeface="Calibri" pitchFamily="34" charset="0"/>
+                <a:ea typeface="Calibri" pitchFamily="34" charset="-122"/>
+                <a:cs typeface="Calibri" pitchFamily="34" charset="-120"/>
+              </a:rPr>
+              <a:t>&gt; is stricter than a plain descendant selector (space) — it skips anything nested more than one level deep.</a:t>
+            </a:r>
+            <a:endParaRPr lang="en-US" sz="1300" dirty="0"/>
+          </a:p>
+        </p:txBody>
+      </p:sp>
+      <p:sp>
+        <p:nvSpPr>
+          <p:cNvPr id="7" name="Text 5"/>
+          <p:cNvSpPr txBox="1"/>
+          <p:nvPr/>
+        </p:nvSpPr>
+        <p:spPr>
+          <a:xfrm>
+            <a:off x="640080" y="6446520"/>
+            <a:ext cx="8686800" cy="292608"/>
+          </a:xfrm>
+          <a:prstGeom prst="rect">
+            <a:avLst/>
+          </a:prstGeom>
+          <a:noFill/>
+          <a:ln/>
+        </p:spPr>
+        <p:txBody>
+          <a:bodyPr wrap="square" lIns="0" tIns="0" rIns="0" bIns="0" rtlCol="0" anchor="ctr"/>
+          <a:lstStyle/>
+          <a:p>
+            <a:pPr algn="l" indent="0" marL="0">
+              <a:buNone/>
+            </a:pPr>
+            <a:r>
+              <a:rPr lang="en-US" sz="900" dirty="0">
+                <a:solidFill>
+                  <a:srgbClr val="5D5D72"/>
+                </a:solidFill>
+                <a:latin typeface="Calibri" pitchFamily="34" charset="0"/>
+                <a:ea typeface="Calibri" pitchFamily="34" charset="-122"/>
+                <a:cs typeface="Calibri" pitchFamily="34" charset="-120"/>
+              </a:rPr>
+              <a:t>Usman Akram  •  COMSATS University Islamabad</a:t>
+            </a:r>
+            <a:endParaRPr lang="en-US" sz="900" dirty="0"/>
+          </a:p>
+        </p:txBody>
+      </p:sp>
+      <p:sp>
+        <p:nvSpPr>
+          <p:cNvPr id="8" name="Text 6"/>
+          <p:cNvSpPr txBox="1"/>
+          <p:nvPr/>
+        </p:nvSpPr>
+        <p:spPr>
+          <a:xfrm>
+            <a:off x="11155680" y="6446520"/>
+            <a:ext cx="457200" cy="292608"/>
+          </a:xfrm>
+          <a:prstGeom prst="rect">
+            <a:avLst/>
+          </a:prstGeom>
+          <a:noFill/>
+          <a:ln/>
+        </p:spPr>
+        <p:txBody>
+          <a:bodyPr wrap="square" lIns="0" tIns="0" rIns="0" bIns="0" rtlCol="0" anchor="ctr"/>
+          <a:lstStyle/>
+          <a:p>
+            <a:pPr algn="r" indent="0" marL="0">
+              <a:buNone/>
+            </a:pPr>
+            <a:r>
+              <a:rPr lang="en-US" sz="900" dirty="0">
+                <a:solidFill>
+                  <a:srgbClr val="5D5D72"/>
+                </a:solidFill>
+                <a:latin typeface="Calibri" pitchFamily="34" charset="0"/>
+                <a:ea typeface="Calibri" pitchFamily="34" charset="-122"/>
+                <a:cs typeface="Calibri" pitchFamily="34" charset="-120"/>
+              </a:rPr>
+              <a:t>16</a:t>
+            </a:r>
+            <a:endParaRPr lang="en-US" sz="900" dirty="0"/>
+          </a:p>
+        </p:txBody>
+      </p:sp>
+    </p:spTree>
+  </p:cSld>
+  <p:clrMapOvr>
+    <a:masterClrMapping/>
+  </p:clrMapOvr>
+</p:sld>
+</file>
+
+<file path=ppt/slides/slide17.xml><?xml version="1.0" encoding="utf-8"?>
+<p:sld xmlns:a="http://schemas.openxmlformats.org/drawingml/2006/main" xmlns:r="http://schemas.openxmlformats.org/officeDocument/2006/relationships" xmlns:p="http://schemas.openxmlformats.org/presentationml/2006/main">
+  <p:cSld name="Slide 17">
+    <p:bg>
+      <p:bgPr>
+        <a:solidFill>
+          <a:srgbClr val="FFFFFF"/>
+        </a:solidFill>
+      </p:bgPr>
+    </p:bg>
+    <p:spTree>
+      <p:nvGrpSpPr>
+        <p:cNvPr id="1" name=""/>
+        <p:cNvGrpSpPr/>
+        <p:nvPr/>
+      </p:nvGrpSpPr>
+      <p:grpSpPr>
+        <a:xfrm>
+          <a:off x="0" y="0"/>
+          <a:ext cx="0" cy="0"/>
+          <a:chOff x="0" y="0"/>
+          <a:chExt cx="0" cy="0"/>
+        </a:xfrm>
+      </p:grpSpPr>
+      <p:sp>
+        <p:nvSpPr>
+          <p:cNvPr id="2" name="Text 0"/>
+          <p:cNvSpPr txBox="1"/>
+          <p:nvPr/>
+        </p:nvSpPr>
+        <p:spPr>
+          <a:xfrm>
+            <a:off x="640080" y="457200"/>
+            <a:ext cx="10058400" cy="365760"/>
+          </a:xfrm>
+          <a:prstGeom prst="rect">
+            <a:avLst/>
+          </a:prstGeom>
+          <a:noFill/>
+          <a:ln/>
+        </p:spPr>
+        <p:txBody>
+          <a:bodyPr wrap="square" lIns="0" tIns="0" rIns="0" bIns="0" rtlCol="0" anchor="ctr"/>
+          <a:lstStyle/>
+          <a:p>
+            <a:pPr algn="l" indent="0" marL="0">
+              <a:buNone/>
+            </a:pPr>
+            <a:r>
+              <a:rPr lang="en-US" sz="1300" b="1" spc="300" kern="0" dirty="0">
+                <a:solidFill>
+                  <a:srgbClr val="FF8A3D"/>
+                </a:solidFill>
+                <a:latin typeface="Calibri" pitchFamily="34" charset="0"/>
+                <a:ea typeface="Calibri" pitchFamily="34" charset="-122"/>
+                <a:cs typeface="Calibri" pitchFamily="34" charset="-120"/>
+              </a:rPr>
+              <a:t>STATES</a:t>
+            </a:r>
+            <a:endParaRPr lang="en-US" sz="1300" dirty="0"/>
+          </a:p>
+        </p:txBody>
+      </p:sp>
+      <p:sp>
+        <p:nvSpPr>
+          <p:cNvPr id="3" name="Text 1"/>
+          <p:cNvSpPr txBox="1"/>
+          <p:nvPr/>
+        </p:nvSpPr>
+        <p:spPr>
+          <a:xfrm>
+            <a:off x="640080" y="841248"/>
+            <a:ext cx="10881360" cy="914400"/>
+          </a:xfrm>
+          <a:prstGeom prst="rect">
+            <a:avLst/>
+          </a:prstGeom>
+          <a:noFill/>
+          <a:ln/>
+        </p:spPr>
+        <p:txBody>
+          <a:bodyPr wrap="square" lIns="0" tIns="0" rIns="0" bIns="0" rtlCol="0" anchor="ctr"/>
+          <a:lstStyle/>
+          <a:p>
+            <a:pPr algn="l" indent="0" marL="0">
+              <a:buNone/>
+            </a:pPr>
+            <a:r>
+              <a:rPr lang="en-US" sz="3400" b="1" dirty="0">
+                <a:solidFill>
+                  <a:srgbClr val="2B2B7A"/>
+                </a:solidFill>
+                <a:latin typeface="Cambria" pitchFamily="34" charset="0"/>
+                <a:ea typeface="Cambria" pitchFamily="34" charset="-122"/>
+                <a:cs typeface="Cambria" pitchFamily="34" charset="-120"/>
+              </a:rPr>
               <a:t>Common Pseudo-Classes</a:t>
             </a:r>
             <a:endParaRPr lang="en-US" sz="3400" dirty="0"/>
@@ -5764,7 +6625,7 @@
       </p:sp>
       <p:graphicFrame>
         <p:nvGraphicFramePr>
-          <p:cNvPr id="17" name="Table 0"/>
+          <p:cNvPr id="18" name="Table 0"/>
           <p:cNvGraphicFramePr>
             <a:graphicFrameLocks noGrp="1"/>
           </p:cNvGraphicFramePr>
@@ -6692,291 +7553,6 @@
                 <a:ea typeface="Calibri" pitchFamily="34" charset="-122"/>
                 <a:cs typeface="Calibri" pitchFamily="34" charset="-120"/>
               </a:rPr>
-              <a:t>16</a:t>
-            </a:r>
-            <a:endParaRPr lang="en-US" sz="900" dirty="0"/>
-          </a:p>
-        </p:txBody>
-      </p:sp>
-    </p:spTree>
-  </p:cSld>
-  <p:clrMapOvr>
-    <a:masterClrMapping/>
-  </p:clrMapOvr>
-</p:sld>
-</file>
-
-<file path=ppt/slides/slide17.xml><?xml version="1.0" encoding="utf-8"?>
-<p:sld xmlns:a="http://schemas.openxmlformats.org/drawingml/2006/main" xmlns:r="http://schemas.openxmlformats.org/officeDocument/2006/relationships" xmlns:p="http://schemas.openxmlformats.org/presentationml/2006/main">
-  <p:cSld name="Slide 17">
-    <p:bg>
-      <p:bgPr>
-        <a:solidFill>
-          <a:srgbClr val="FFFFFF"/>
-        </a:solidFill>
-      </p:bgPr>
-    </p:bg>
-    <p:spTree>
-      <p:nvGrpSpPr>
-        <p:cNvPr id="1" name=""/>
-        <p:cNvGrpSpPr/>
-        <p:nvPr/>
-      </p:nvGrpSpPr>
-      <p:grpSpPr>
-        <a:xfrm>
-          <a:off x="0" y="0"/>
-          <a:ext cx="0" cy="0"/>
-          <a:chOff x="0" y="0"/>
-          <a:chExt cx="0" cy="0"/>
-        </a:xfrm>
-      </p:grpSpPr>
-      <p:sp>
-        <p:nvSpPr>
-          <p:cNvPr id="2" name="Text 0"/>
-          <p:cNvSpPr txBox="1"/>
-          <p:nvPr/>
-        </p:nvSpPr>
-        <p:spPr>
-          <a:xfrm>
-            <a:off x="640080" y="457200"/>
-            <a:ext cx="10058400" cy="365760"/>
-          </a:xfrm>
-          <a:prstGeom prst="rect">
-            <a:avLst/>
-          </a:prstGeom>
-          <a:noFill/>
-          <a:ln/>
-        </p:spPr>
-        <p:txBody>
-          <a:bodyPr wrap="square" lIns="0" tIns="0" rIns="0" bIns="0" rtlCol="0" anchor="ctr"/>
-          <a:lstStyle/>
-          <a:p>
-            <a:pPr algn="l" indent="0" marL="0">
-              <a:buNone/>
-            </a:pPr>
-            <a:r>
-              <a:rPr lang="en-US" sz="1300" b="1" spc="300" kern="0" dirty="0">
-                <a:solidFill>
-                  <a:srgbClr val="FF8A3D"/>
-                </a:solidFill>
-                <a:latin typeface="Calibri" pitchFamily="34" charset="0"/>
-                <a:ea typeface="Calibri" pitchFamily="34" charset="-122"/>
-                <a:cs typeface="Calibri" pitchFamily="34" charset="-120"/>
-              </a:rPr>
-              <a:t>STATES</a:t>
-            </a:r>
-            <a:endParaRPr lang="en-US" sz="1300" dirty="0"/>
-          </a:p>
-        </p:txBody>
-      </p:sp>
-      <p:sp>
-        <p:nvSpPr>
-          <p:cNvPr id="3" name="Text 1"/>
-          <p:cNvSpPr txBox="1"/>
-          <p:nvPr/>
-        </p:nvSpPr>
-        <p:spPr>
-          <a:xfrm>
-            <a:off x="640080" y="841248"/>
-            <a:ext cx="10881360" cy="914400"/>
-          </a:xfrm>
-          <a:prstGeom prst="rect">
-            <a:avLst/>
-          </a:prstGeom>
-          <a:noFill/>
-          <a:ln/>
-        </p:spPr>
-        <p:txBody>
-          <a:bodyPr wrap="square" lIns="0" tIns="0" rIns="0" bIns="0" rtlCol="0" anchor="ctr"/>
-          <a:lstStyle/>
-          <a:p>
-            <a:pPr algn="l" indent="0" marL="0">
-              <a:buNone/>
-            </a:pPr>
-            <a:r>
-              <a:rPr lang="en-US" sz="3400" b="1" dirty="0">
-                <a:solidFill>
-                  <a:srgbClr val="2B2B7A"/>
-                </a:solidFill>
-                <a:latin typeface="Cambria" pitchFamily="34" charset="0"/>
-                <a:ea typeface="Cambria" pitchFamily="34" charset="-122"/>
-                <a:cs typeface="Cambria" pitchFamily="34" charset="-120"/>
-              </a:rPr>
-              <a:t>Pseudo-Classes, Rendered</a:t>
-            </a:r>
-            <a:endParaRPr lang="en-US" sz="3400" dirty="0"/>
-          </a:p>
-        </p:txBody>
-      </p:sp>
-      <p:sp>
-        <p:nvSpPr>
-          <p:cNvPr id="4" name="Text 2"/>
-          <p:cNvSpPr txBox="1"/>
-          <p:nvPr/>
-        </p:nvSpPr>
-        <p:spPr>
-          <a:xfrm>
-            <a:off x="640080" y="1691640"/>
-            <a:ext cx="10911535" cy="411480"/>
-          </a:xfrm>
-          <a:prstGeom prst="rect">
-            <a:avLst/>
-          </a:prstGeom>
-          <a:noFill/>
-          <a:ln/>
-        </p:spPr>
-        <p:txBody>
-          <a:bodyPr wrap="square" lIns="0" tIns="0" rIns="0" bIns="0" rtlCol="0" anchor="ctr"/>
-          <a:lstStyle/>
-          <a:p>
-            <a:pPr indent="0" marL="0">
-              <a:buNone/>
-            </a:pPr>
-            <a:r>
-              <a:rPr lang="en-US" sz="1350" i="1" dirty="0">
-                <a:solidFill>
-                  <a:srgbClr val="5D5D72"/>
-                </a:solidFill>
-                <a:latin typeface="Calibri" pitchFamily="34" charset="0"/>
-                <a:ea typeface="Calibri" pitchFamily="34" charset="-122"/>
-                <a:cs typeface="Calibri" pitchFamily="34" charset="-120"/>
-              </a:rPr>
-              <a:t>li:first-child and button:disabled are states the browser can render up front.</a:t>
-            </a:r>
-            <a:endParaRPr lang="en-US" sz="1350" dirty="0"/>
-          </a:p>
-        </p:txBody>
-      </p:sp>
-      <p:sp>
-        <p:nvSpPr>
-          <p:cNvPr id="5" name="Shape 3"/>
-          <p:cNvSpPr/>
-          <p:nvPr/>
-        </p:nvSpPr>
-        <p:spPr>
-          <a:xfrm>
-            <a:off x="530352" y="2221992"/>
-            <a:ext cx="11130991" cy="4059936"/>
-          </a:xfrm>
-          <a:prstGeom prst="roundRect">
-            <a:avLst>
-              <a:gd name="adj" fmla="val 1351"/>
-            </a:avLst>
-          </a:prstGeom>
-          <a:solidFill>
-            <a:srgbClr val="FFFFFF"/>
-          </a:solidFill>
-          <a:ln w="12700">
-            <a:solidFill>
-              <a:srgbClr val="E2E2EE"/>
-            </a:solidFill>
-            <a:prstDash val="solid"/>
-          </a:ln>
-          <a:effectLst>
-            <a:outerShdw sx="100000" sy="100000" kx="0" ky="0" algn="bl" rotWithShape="0" blurRad="101600" dist="38100" dir="5400000">
-              <a:srgbClr val="000000">
-                <a:alpha val="12000"/>
-              </a:srgbClr>
-            </a:outerShdw>
-          </a:effectLst>
-        </p:spPr>
-      </p:sp>
-      <p:pic>
-        <p:nvPicPr>
-          <p:cNvPr id="6" name="Image 0" descr="D:/GitHub/mern-web-book/docs/assets/img/lecture-05/pseudo-class-demo.png">    </p:cNvPr>
-          <p:cNvPicPr>
-            <a:picLocks noChangeAspect="1"/>
-          </p:cNvPicPr>
-          <p:nvPr/>
-        </p:nvPicPr>
-        <p:blipFill>
-          <a:blip r:embed="rId1"/>
-          <a:stretch>
-            <a:fillRect/>
-          </a:stretch>
-        </p:blipFill>
-        <p:spPr>
-          <a:xfrm>
-            <a:off x="3771748" y="2514600"/>
-            <a:ext cx="4648200" cy="3474720"/>
-          </a:xfrm>
-          <a:prstGeom prst="rect">
-            <a:avLst/>
-          </a:prstGeom>
-        </p:spPr>
-      </p:pic>
-      <p:sp>
-        <p:nvSpPr>
-          <p:cNvPr id="7" name="Text 4"/>
-          <p:cNvSpPr txBox="1"/>
-          <p:nvPr/>
-        </p:nvSpPr>
-        <p:spPr>
-          <a:xfrm>
-            <a:off x="640080" y="6446520"/>
-            <a:ext cx="8686800" cy="292608"/>
-          </a:xfrm>
-          <a:prstGeom prst="rect">
-            <a:avLst/>
-          </a:prstGeom>
-          <a:noFill/>
-          <a:ln/>
-        </p:spPr>
-        <p:txBody>
-          <a:bodyPr wrap="square" lIns="0" tIns="0" rIns="0" bIns="0" rtlCol="0" anchor="ctr"/>
-          <a:lstStyle/>
-          <a:p>
-            <a:pPr algn="l" indent="0" marL="0">
-              <a:buNone/>
-            </a:pPr>
-            <a:r>
-              <a:rPr lang="en-US" sz="900" dirty="0">
-                <a:solidFill>
-                  <a:srgbClr val="5D5D72"/>
-                </a:solidFill>
-                <a:latin typeface="Calibri" pitchFamily="34" charset="0"/>
-                <a:ea typeface="Calibri" pitchFamily="34" charset="-122"/>
-                <a:cs typeface="Calibri" pitchFamily="34" charset="-120"/>
-              </a:rPr>
-              <a:t>Usman Akram  •  COMSATS University Islamabad</a:t>
-            </a:r>
-            <a:endParaRPr lang="en-US" sz="900" dirty="0"/>
-          </a:p>
-        </p:txBody>
-      </p:sp>
-      <p:sp>
-        <p:nvSpPr>
-          <p:cNvPr id="8" name="Text 5"/>
-          <p:cNvSpPr txBox="1"/>
-          <p:nvPr/>
-        </p:nvSpPr>
-        <p:spPr>
-          <a:xfrm>
-            <a:off x="11155680" y="6446520"/>
-            <a:ext cx="457200" cy="292608"/>
-          </a:xfrm>
-          <a:prstGeom prst="rect">
-            <a:avLst/>
-          </a:prstGeom>
-          <a:noFill/>
-          <a:ln/>
-        </p:spPr>
-        <p:txBody>
-          <a:bodyPr wrap="square" lIns="0" tIns="0" rIns="0" bIns="0" rtlCol="0" anchor="ctr"/>
-          <a:lstStyle/>
-          <a:p>
-            <a:pPr algn="r" indent="0" marL="0">
-              <a:buNone/>
-            </a:pPr>
-            <a:r>
-              <a:rPr lang="en-US" sz="900" dirty="0">
-                <a:solidFill>
-                  <a:srgbClr val="5D5D72"/>
-                </a:solidFill>
-                <a:latin typeface="Calibri" pitchFamily="34" charset="0"/>
-                <a:ea typeface="Calibri" pitchFamily="34" charset="-122"/>
-                <a:cs typeface="Calibri" pitchFamily="34" charset="-120"/>
-              </a:rPr>
               <a:t>17</a:t>
             </a:r>
             <a:endParaRPr lang="en-US" sz="900" dirty="0"/>
@@ -7048,7 +7624,7 @@
                 <a:ea typeface="Calibri" pitchFamily="34" charset="-122"/>
                 <a:cs typeface="Calibri" pitchFamily="34" charset="-120"/>
               </a:rPr>
-              <a:t>PARTS</a:t>
+              <a:t>STATES</a:t>
             </a:r>
             <a:endParaRPr lang="en-US" sz="1300" dirty="0"/>
           </a:p>
@@ -7087,7 +7663,7 @@
                 <a:ea typeface="Cambria" pitchFamily="34" charset="-122"/>
                 <a:cs typeface="Cambria" pitchFamily="34" charset="-120"/>
               </a:rPr>
-              <a:t>Pseudo-Elements</a:t>
+              <a:t>Pseudo-Classes, Rendered</a:t>
             </a:r>
             <a:endParaRPr lang="en-US" sz="3400" dirty="0"/>
           </a:p>
@@ -7095,18 +7671,57 @@
       </p:sp>
       <p:sp>
         <p:nvSpPr>
-          <p:cNvPr id="4" name="Shape 2"/>
+          <p:cNvPr id="4" name="Text 2"/>
+          <p:cNvSpPr txBox="1"/>
+          <p:nvPr/>
+        </p:nvSpPr>
+        <p:spPr>
+          <a:xfrm>
+            <a:off x="640080" y="1691640"/>
+            <a:ext cx="10911535" cy="411480"/>
+          </a:xfrm>
+          <a:prstGeom prst="rect">
+            <a:avLst/>
+          </a:prstGeom>
+          <a:noFill/>
+          <a:ln/>
+        </p:spPr>
+        <p:txBody>
+          <a:bodyPr wrap="square" lIns="0" tIns="0" rIns="0" bIns="0" rtlCol="0" anchor="ctr"/>
+          <a:lstStyle/>
+          <a:p>
+            <a:pPr indent="0" marL="0">
+              <a:buNone/>
+            </a:pPr>
+            <a:r>
+              <a:rPr lang="en-US" sz="1350" i="1" dirty="0">
+                <a:solidFill>
+                  <a:srgbClr val="5D5D72"/>
+                </a:solidFill>
+                <a:latin typeface="Calibri" pitchFamily="34" charset="0"/>
+                <a:ea typeface="Calibri" pitchFamily="34" charset="-122"/>
+                <a:cs typeface="Calibri" pitchFamily="34" charset="-120"/>
+              </a:rPr>
+              <a:t>li:first-child and button:disabled are states the browser can render up front.</a:t>
+            </a:r>
+            <a:endParaRPr lang="en-US" sz="1350" dirty="0"/>
+          </a:p>
+        </p:txBody>
+      </p:sp>
+      <p:sp>
+        <p:nvSpPr>
+          <p:cNvPr id="5" name="Shape 3"/>
           <p:cNvSpPr/>
           <p:nvPr/>
         </p:nvSpPr>
         <p:spPr>
           <a:xfrm>
-            <a:off x="640080" y="1965960"/>
-            <a:ext cx="10911535" cy="2221992"/>
+            <a:off x="640080" y="2240280"/>
+            <a:ext cx="10911535" cy="2215515"/>
           </a:xfrm>
           <a:prstGeom prst="roundRect">
             <a:avLst>
-              <a:gd name="adj" fmla="val 3292"/>
+              <a:gd name="adj" fmla="val 3302"/>
             </a:avLst>
           </a:prstGeom>
           <a:solidFill>
@@ -7117,14 +7732,14 @@
       </p:sp>
       <p:sp>
         <p:nvSpPr>
-          <p:cNvPr id="5" name="Text 3"/>
+          <p:cNvPr id="6" name="Text 4"/>
           <p:cNvSpPr txBox="1"/>
           <p:nvPr/>
         </p:nvSpPr>
         <p:spPr>
           <a:xfrm>
-            <a:off x="960120" y="2194560"/>
-            <a:ext cx="10271455" cy="1764792"/>
+            <a:off x="960120" y="2468880"/>
+            <a:ext cx="10271455" cy="1758315"/>
           </a:xfrm>
           <a:prstGeom prst="rect">
             <a:avLst/>
@@ -7143,7 +7758,7 @@
               <a:buNone/>
             </a:pPr>
             <a:r>
-              <a:rPr lang="en-US" sz="1400" dirty="0">
+              <a:rPr lang="en-US" sz="1250" dirty="0">
                 <a:solidFill>
                   <a:srgbClr val="C9D3F5"/>
                 </a:solidFill>
@@ -7151,9 +7766,9 @@
                 <a:ea typeface="Courier New" pitchFamily="34" charset="-122"/>
                 <a:cs typeface="Courier New" pitchFamily="34" charset="-120"/>
               </a:rPr>
-              <a:t>p::first-line { font-weight: bold; }</a:t>
-            </a:r>
-            <a:endParaRPr lang="en-US" sz="1400" dirty="0"/>
+              <a:t>li:first-child {</a:t>
+            </a:r>
+            <a:endParaRPr lang="en-US" sz="1250" dirty="0"/>
           </a:p>
           <a:p>
             <a:pPr indent="0" marL="0">
@@ -7162,7 +7777,18 @@
               </a:lnSpc>
               <a:buNone/>
             </a:pPr>
-            <a:endParaRPr lang="en-US" sz="1400" dirty="0"/>
+            <a:r>
+              <a:rPr lang="en-US" sz="1250" dirty="0">
+                <a:solidFill>
+                  <a:srgbClr val="C9D3F5"/>
+                </a:solidFill>
+                <a:latin typeface="Courier New" pitchFamily="34" charset="0"/>
+                <a:ea typeface="Courier New" pitchFamily="34" charset="-122"/>
+                <a:cs typeface="Courier New" pitchFamily="34" charset="-120"/>
+              </a:rPr>
+              <a:t>  font-weight: bold;</a:t>
+            </a:r>
+            <a:endParaRPr lang="en-US" sz="1250" dirty="0"/>
           </a:p>
           <a:p>
             <a:pPr indent="0" marL="0">
@@ -7172,7 +7798,7 @@
               <a:buNone/>
             </a:pPr>
             <a:r>
-              <a:rPr lang="en-US" sz="1400" dirty="0">
+              <a:rPr lang="en-US" sz="1250" dirty="0">
                 <a:solidFill>
                   <a:srgbClr val="C9D3F5"/>
                 </a:solidFill>
@@ -7180,9 +7806,9 @@
                 <a:ea typeface="Courier New" pitchFamily="34" charset="-122"/>
                 <a:cs typeface="Courier New" pitchFamily="34" charset="-120"/>
               </a:rPr>
-              <a:t>.quote::before { content: "\201C"; }</a:t>
-            </a:r>
-            <a:endParaRPr lang="en-US" sz="1400" dirty="0"/>
+              <a:t>}</a:t>
+            </a:r>
+            <a:endParaRPr lang="en-US" sz="1250" dirty="0"/>
           </a:p>
           <a:p>
             <a:pPr indent="0" marL="0">
@@ -7191,8 +7817,17 @@
               </a:lnSpc>
               <a:buNone/>
             </a:pPr>
-            <a:r>
-              <a:rPr lang="en-US" sz="1400" dirty="0">
+            <a:endParaRPr lang="en-US" sz="1250" dirty="0"/>
+          </a:p>
+          <a:p>
+            <a:pPr indent="0" marL="0">
+              <a:lnSpc>
+                <a:spcPct val="125000"/>
+              </a:lnSpc>
+              <a:buNone/>
+            </a:pPr>
+            <a:r>
+              <a:rPr lang="en-US" sz="1250" dirty="0">
                 <a:solidFill>
                   <a:srgbClr val="C9D3F5"/>
                 </a:solidFill>
@@ -7200,22 +7835,120 @@
                 <a:ea typeface="Courier New" pitchFamily="34" charset="-122"/>
                 <a:cs typeface="Courier New" pitchFamily="34" charset="-120"/>
               </a:rPr>
-              <a:t>.quote::after  { content: "\201D"; }</a:t>
-            </a:r>
-            <a:endParaRPr lang="en-US" sz="1400" dirty="0"/>
-          </a:p>
-        </p:txBody>
-      </p:sp>
-      <p:sp>
-        <p:nvSpPr>
-          <p:cNvPr id="6" name="Text 4"/>
+              <a:t>button:disabled {</a:t>
+            </a:r>
+            <a:endParaRPr lang="en-US" sz="1250" dirty="0"/>
+          </a:p>
+          <a:p>
+            <a:pPr indent="0" marL="0">
+              <a:lnSpc>
+                <a:spcPct val="125000"/>
+              </a:lnSpc>
+              <a:buNone/>
+            </a:pPr>
+            <a:r>
+              <a:rPr lang="en-US" sz="1250" dirty="0">
+                <a:solidFill>
+                  <a:srgbClr val="C9D3F5"/>
+                </a:solidFill>
+                <a:latin typeface="Courier New" pitchFamily="34" charset="0"/>
+                <a:ea typeface="Courier New" pitchFamily="34" charset="-122"/>
+                <a:cs typeface="Courier New" pitchFamily="34" charset="-120"/>
+              </a:rPr>
+              <a:t>  opacity: 0.5;</a:t>
+            </a:r>
+            <a:endParaRPr lang="en-US" sz="1250" dirty="0"/>
+          </a:p>
+          <a:p>
+            <a:pPr indent="0" marL="0">
+              <a:lnSpc>
+                <a:spcPct val="125000"/>
+              </a:lnSpc>
+              <a:buNone/>
+            </a:pPr>
+            <a:r>
+              <a:rPr lang="en-US" sz="1250" dirty="0">
+                <a:solidFill>
+                  <a:srgbClr val="C9D3F5"/>
+                </a:solidFill>
+                <a:latin typeface="Courier New" pitchFamily="34" charset="0"/>
+                <a:ea typeface="Courier New" pitchFamily="34" charset="-122"/>
+                <a:cs typeface="Courier New" pitchFamily="34" charset="-120"/>
+              </a:rPr>
+              <a:t>}</a:t>
+            </a:r>
+            <a:endParaRPr lang="en-US" sz="1250" dirty="0"/>
+          </a:p>
+        </p:txBody>
+      </p:sp>
+      <p:sp>
+        <p:nvSpPr>
+          <p:cNvPr id="7" name="Shape 5"/>
+          <p:cNvSpPr/>
+          <p:nvPr/>
+        </p:nvSpPr>
+        <p:spPr>
+          <a:xfrm>
+            <a:off x="530352" y="4620387"/>
+            <a:ext cx="11130991" cy="1707261"/>
+          </a:xfrm>
+          <a:prstGeom prst="roundRect">
+            <a:avLst>
+              <a:gd name="adj" fmla="val 3214"/>
+            </a:avLst>
+          </a:prstGeom>
+          <a:solidFill>
+            <a:srgbClr val="FFFFFF"/>
+          </a:solidFill>
+          <a:ln w="12700">
+            <a:solidFill>
+              <a:srgbClr val="E2E2EE"/>
+            </a:solidFill>
+            <a:prstDash val="solid"/>
+          </a:ln>
+          <a:effectLst>
+            <a:outerShdw sx="100000" sy="100000" kx="0" ky="0" algn="bl" rotWithShape="0" blurRad="101600" dist="38100" dir="5400000">
+              <a:srgbClr val="000000">
+                <a:alpha val="12000"/>
+              </a:srgbClr>
+            </a:outerShdw>
+          </a:effectLst>
+        </p:spPr>
+      </p:sp>
+      <p:pic>
+        <p:nvPicPr>
+          <p:cNvPr id="8" name="Image 0" descr="D:/GitHub/mern-web-book/docs/assets/img/lecture-05/pseudo-class-demo.png">    </p:cNvPr>
+          <p:cNvPicPr>
+            <a:picLocks noChangeAspect="1"/>
+          </p:cNvPicPr>
+          <p:nvPr/>
+        </p:nvPicPr>
+        <p:blipFill>
+          <a:blip r:embed="rId1"/>
+          <a:stretch>
+            <a:fillRect/>
+          </a:stretch>
+        </p:blipFill>
+        <p:spPr>
+          <a:xfrm>
+            <a:off x="5100715" y="4730115"/>
+            <a:ext cx="1990265" cy="1487805"/>
+          </a:xfrm>
+          <a:prstGeom prst="rect">
+            <a:avLst/>
+          </a:prstGeom>
+        </p:spPr>
+      </p:pic>
+      <p:sp>
+        <p:nvSpPr>
+          <p:cNvPr id="9" name="Text 6"/>
           <p:cNvSpPr txBox="1"/>
           <p:nvPr/>
         </p:nvSpPr>
         <p:spPr>
           <a:xfrm>
-            <a:off x="640080" y="4416552"/>
-            <a:ext cx="10911535" cy="1847088"/>
+            <a:off x="640080" y="6446520"/>
+            <a:ext cx="8686800" cy="292608"/>
           </a:xfrm>
           <a:prstGeom prst="rect">
             <a:avLst/>
@@ -7224,60 +7957,21 @@
           <a:ln/>
         </p:spPr>
         <p:txBody>
-          <a:bodyPr wrap="square" lIns="0" tIns="0" rIns="0" bIns="0" rtlCol="0" anchor="t"/>
-          <a:lstStyle/>
-          <a:p>
-            <a:pPr indent="0" marL="0">
-              <a:buNone/>
-            </a:pPr>
-            <a:r>
-              <a:rPr lang="en-US" sz="1300" dirty="0">
-                <a:solidFill>
-                  <a:srgbClr val="26262F"/>
+          <a:bodyPr wrap="square" lIns="0" tIns="0" rIns="0" bIns="0" rtlCol="0" anchor="ctr"/>
+          <a:lstStyle/>
+          <a:p>
+            <a:pPr algn="l" indent="0" marL="0">
+              <a:buNone/>
+            </a:pPr>
+            <a:r>
+              <a:rPr lang="en-US" sz="900" dirty="0">
+                <a:solidFill>
+                  <a:srgbClr val="5D5D72"/>
                 </a:solidFill>
                 <a:latin typeface="Calibri" pitchFamily="34" charset="0"/>
                 <a:ea typeface="Calibri" pitchFamily="34" charset="-122"/>
                 <a:cs typeface="Calibri" pitchFamily="34" charset="-120"/>
               </a:rPr>
-              <a:t>::before and ::after insert content that is not in the HTML at all — purely for decoration.</a:t>
-            </a:r>
-            <a:endParaRPr lang="en-US" sz="1300" dirty="0"/>
-          </a:p>
-        </p:txBody>
-      </p:sp>
-      <p:sp>
-        <p:nvSpPr>
-          <p:cNvPr id="7" name="Text 5"/>
-          <p:cNvSpPr txBox="1"/>
-          <p:nvPr/>
-        </p:nvSpPr>
-        <p:spPr>
-          <a:xfrm>
-            <a:off x="640080" y="6446520"/>
-            <a:ext cx="8686800" cy="292608"/>
-          </a:xfrm>
-          <a:prstGeom prst="rect">
-            <a:avLst/>
-          </a:prstGeom>
-          <a:noFill/>
-          <a:ln/>
-        </p:spPr>
-        <p:txBody>
-          <a:bodyPr wrap="square" lIns="0" tIns="0" rIns="0" bIns="0" rtlCol="0" anchor="ctr"/>
-          <a:lstStyle/>
-          <a:p>
-            <a:pPr algn="l" indent="0" marL="0">
-              <a:buNone/>
-            </a:pPr>
-            <a:r>
-              <a:rPr lang="en-US" sz="900" dirty="0">
-                <a:solidFill>
-                  <a:srgbClr val="5D5D72"/>
-                </a:solidFill>
-                <a:latin typeface="Calibri" pitchFamily="34" charset="0"/>
-                <a:ea typeface="Calibri" pitchFamily="34" charset="-122"/>
-                <a:cs typeface="Calibri" pitchFamily="34" charset="-120"/>
-              </a:rPr>
               <a:t>Usman Akram  •  COMSATS University Islamabad</a:t>
             </a:r>
             <a:endParaRPr lang="en-US" sz="900" dirty="0"/>
@@ -7286,7 +7980,7 @@
       </p:sp>
       <p:sp>
         <p:nvSpPr>
-          <p:cNvPr id="8" name="Text 6"/>
+          <p:cNvPr id="10" name="Text 7"/>
           <p:cNvSpPr txBox="1"/>
           <p:nvPr/>
         </p:nvSpPr>
@@ -7427,7 +8121,7 @@
                 <a:ea typeface="Cambria" pitchFamily="34" charset="-122"/>
                 <a:cs typeface="Cambria" pitchFamily="34" charset="-120"/>
               </a:rPr>
-              <a:t>Pseudo-Elements, Rendered</a:t>
+              <a:t>Pseudo-Elements</a:t>
             </a:r>
             <a:endParaRPr lang="en-US" sz="3400" dirty="0"/>
           </a:p>
@@ -7441,66 +8135,30 @@
         </p:nvSpPr>
         <p:spPr>
           <a:xfrm>
-            <a:off x="530352" y="1947672"/>
-            <a:ext cx="11130991" cy="4334256"/>
+            <a:off x="640080" y="1965960"/>
+            <a:ext cx="10911535" cy="1615440"/>
           </a:xfrm>
           <a:prstGeom prst="roundRect">
             <a:avLst>
-              <a:gd name="adj" fmla="val 1266"/>
+              <a:gd name="adj" fmla="val 4528"/>
             </a:avLst>
           </a:prstGeom>
           <a:solidFill>
-            <a:srgbClr val="FFFFFF"/>
+            <a:srgbClr val="1E1E4C"/>
           </a:solidFill>
-          <a:ln w="12700">
-            <a:solidFill>
-              <a:srgbClr val="E2E2EE"/>
-            </a:solidFill>
-            <a:prstDash val="solid"/>
-          </a:ln>
-          <a:effectLst>
-            <a:outerShdw sx="100000" sy="100000" kx="0" ky="0" algn="bl" rotWithShape="0" blurRad="101600" dist="38100" dir="5400000">
-              <a:srgbClr val="000000">
-                <a:alpha val="12000"/>
-              </a:srgbClr>
-            </a:outerShdw>
-          </a:effectLst>
-        </p:spPr>
-      </p:sp>
-      <p:pic>
-        <p:nvPicPr>
-          <p:cNvPr id="5" name="Image 0" descr="D:/GitHub/mern-web-book/docs/assets/img/lecture-05/pseudo-element-demo.png">    </p:cNvPr>
-          <p:cNvPicPr>
-            <a:picLocks noChangeAspect="1"/>
-          </p:cNvPicPr>
-          <p:nvPr/>
-        </p:nvPicPr>
-        <p:blipFill>
-          <a:blip r:embed="rId1"/>
-          <a:stretch>
-            <a:fillRect/>
-          </a:stretch>
-        </p:blipFill>
-        <p:spPr>
-          <a:xfrm>
-            <a:off x="640080" y="2519655"/>
-            <a:ext cx="10911535" cy="3190290"/>
-          </a:xfrm>
-          <a:prstGeom prst="rect">
-            <a:avLst/>
-          </a:prstGeom>
-        </p:spPr>
-      </p:pic>
-      <p:sp>
-        <p:nvSpPr>
-          <p:cNvPr id="6" name="Text 3"/>
+          <a:ln/>
+        </p:spPr>
+      </p:sp>
+      <p:sp>
+        <p:nvSpPr>
+          <p:cNvPr id="5" name="Text 3"/>
           <p:cNvSpPr txBox="1"/>
           <p:nvPr/>
         </p:nvSpPr>
         <p:spPr>
           <a:xfrm>
-            <a:off x="640080" y="6446520"/>
-            <a:ext cx="8686800" cy="292608"/>
+            <a:off x="960120" y="2194560"/>
+            <a:ext cx="10271455" cy="1158240"/>
           </a:xfrm>
           <a:prstGeom prst="rect">
             <a:avLst/>
@@ -7509,21 +8167,151 @@
           <a:ln/>
         </p:spPr>
         <p:txBody>
-          <a:bodyPr wrap="square" lIns="0" tIns="0" rIns="0" bIns="0" rtlCol="0" anchor="ctr"/>
-          <a:lstStyle/>
-          <a:p>
-            <a:pPr algn="l" indent="0" marL="0">
-              <a:buNone/>
-            </a:pPr>
-            <a:r>
-              <a:rPr lang="en-US" sz="900" dirty="0">
-                <a:solidFill>
-                  <a:srgbClr val="5D5D72"/>
+          <a:bodyPr wrap="square" lIns="0" tIns="0" rIns="0" bIns="0" rtlCol="0" anchor="t"/>
+          <a:lstStyle/>
+          <a:p>
+            <a:pPr indent="0" marL="0">
+              <a:lnSpc>
+                <a:spcPct val="125000"/>
+              </a:lnSpc>
+              <a:buNone/>
+            </a:pPr>
+            <a:r>
+              <a:rPr lang="en-US" sz="1400" dirty="0">
+                <a:solidFill>
+                  <a:srgbClr val="C9D3F5"/>
+                </a:solidFill>
+                <a:latin typeface="Courier New" pitchFamily="34" charset="0"/>
+                <a:ea typeface="Courier New" pitchFamily="34" charset="-122"/>
+                <a:cs typeface="Courier New" pitchFamily="34" charset="-120"/>
+              </a:rPr>
+              <a:t>p::first-line { font-weight: bold; }</a:t>
+            </a:r>
+            <a:endParaRPr lang="en-US" sz="1400" dirty="0"/>
+          </a:p>
+          <a:p>
+            <a:pPr indent="0" marL="0">
+              <a:lnSpc>
+                <a:spcPct val="125000"/>
+              </a:lnSpc>
+              <a:buNone/>
+            </a:pPr>
+            <a:endParaRPr lang="en-US" sz="1400" dirty="0"/>
+          </a:p>
+          <a:p>
+            <a:pPr indent="0" marL="0">
+              <a:lnSpc>
+                <a:spcPct val="125000"/>
+              </a:lnSpc>
+              <a:buNone/>
+            </a:pPr>
+            <a:r>
+              <a:rPr lang="en-US" sz="1400" dirty="0">
+                <a:solidFill>
+                  <a:srgbClr val="C9D3F5"/>
+                </a:solidFill>
+                <a:latin typeface="Courier New" pitchFamily="34" charset="0"/>
+                <a:ea typeface="Courier New" pitchFamily="34" charset="-122"/>
+                <a:cs typeface="Courier New" pitchFamily="34" charset="-120"/>
+              </a:rPr>
+              <a:t>.quote::before { content: "\201C"; }</a:t>
+            </a:r>
+            <a:endParaRPr lang="en-US" sz="1400" dirty="0"/>
+          </a:p>
+          <a:p>
+            <a:pPr indent="0" marL="0">
+              <a:lnSpc>
+                <a:spcPct val="125000"/>
+              </a:lnSpc>
+              <a:buNone/>
+            </a:pPr>
+            <a:r>
+              <a:rPr lang="en-US" sz="1400" dirty="0">
+                <a:solidFill>
+                  <a:srgbClr val="C9D3F5"/>
+                </a:solidFill>
+                <a:latin typeface="Courier New" pitchFamily="34" charset="0"/>
+                <a:ea typeface="Courier New" pitchFamily="34" charset="-122"/>
+                <a:cs typeface="Courier New" pitchFamily="34" charset="-120"/>
+              </a:rPr>
+              <a:t>.quote::after  { content: "\201D"; }</a:t>
+            </a:r>
+            <a:endParaRPr lang="en-US" sz="1400" dirty="0"/>
+          </a:p>
+        </p:txBody>
+      </p:sp>
+      <p:sp>
+        <p:nvSpPr>
+          <p:cNvPr id="6" name="Text 4"/>
+          <p:cNvSpPr txBox="1"/>
+          <p:nvPr/>
+        </p:nvSpPr>
+        <p:spPr>
+          <a:xfrm>
+            <a:off x="640080" y="3810000"/>
+            <a:ext cx="10911535" cy="2453640"/>
+          </a:xfrm>
+          <a:prstGeom prst="rect">
+            <a:avLst/>
+          </a:prstGeom>
+          <a:noFill/>
+          <a:ln/>
+        </p:spPr>
+        <p:txBody>
+          <a:bodyPr wrap="square" lIns="0" tIns="0" rIns="0" bIns="0" rtlCol="0" anchor="t"/>
+          <a:lstStyle/>
+          <a:p>
+            <a:pPr indent="0" marL="0">
+              <a:buNone/>
+            </a:pPr>
+            <a:r>
+              <a:rPr lang="en-US" sz="1300" dirty="0">
+                <a:solidFill>
+                  <a:srgbClr val="26262F"/>
                 </a:solidFill>
                 <a:latin typeface="Calibri" pitchFamily="34" charset="0"/>
                 <a:ea typeface="Calibri" pitchFamily="34" charset="-122"/>
                 <a:cs typeface="Calibri" pitchFamily="34" charset="-120"/>
               </a:rPr>
+              <a:t>::before and ::after insert content that is not in the HTML at all — purely for decoration.</a:t>
+            </a:r>
+            <a:endParaRPr lang="en-US" sz="1300" dirty="0"/>
+          </a:p>
+        </p:txBody>
+      </p:sp>
+      <p:sp>
+        <p:nvSpPr>
+          <p:cNvPr id="7" name="Text 5"/>
+          <p:cNvSpPr txBox="1"/>
+          <p:nvPr/>
+        </p:nvSpPr>
+        <p:spPr>
+          <a:xfrm>
+            <a:off x="640080" y="6446520"/>
+            <a:ext cx="8686800" cy="292608"/>
+          </a:xfrm>
+          <a:prstGeom prst="rect">
+            <a:avLst/>
+          </a:prstGeom>
+          <a:noFill/>
+          <a:ln/>
+        </p:spPr>
+        <p:txBody>
+          <a:bodyPr wrap="square" lIns="0" tIns="0" rIns="0" bIns="0" rtlCol="0" anchor="ctr"/>
+          <a:lstStyle/>
+          <a:p>
+            <a:pPr algn="l" indent="0" marL="0">
+              <a:buNone/>
+            </a:pPr>
+            <a:r>
+              <a:rPr lang="en-US" sz="900" dirty="0">
+                <a:solidFill>
+                  <a:srgbClr val="5D5D72"/>
+                </a:solidFill>
+                <a:latin typeface="Calibri" pitchFamily="34" charset="0"/>
+                <a:ea typeface="Calibri" pitchFamily="34" charset="-122"/>
+                <a:cs typeface="Calibri" pitchFamily="34" charset="-120"/>
+              </a:rPr>
               <a:t>Usman Akram  •  COMSATS University Islamabad</a:t>
             </a:r>
             <a:endParaRPr lang="en-US" sz="900" dirty="0"/>
@@ -7532,7 +8320,7 @@
       </p:sp>
       <p:sp>
         <p:nvSpPr>
-          <p:cNvPr id="7" name="Text 4"/>
+          <p:cNvPr id="8" name="Text 6"/>
           <p:cNvSpPr txBox="1"/>
           <p:nvPr/>
         </p:nvSpPr>
@@ -8410,7 +9198,7 @@
                 <a:ea typeface="Calibri" pitchFamily="34" charset="-122"/>
                 <a:cs typeface="Calibri" pitchFamily="34" charset="-120"/>
               </a:rPr>
-              <a:t>THE CASCADE</a:t>
+              <a:t>PARTS</a:t>
             </a:r>
             <a:endParaRPr lang="en-US" sz="1300" dirty="0"/>
           </a:p>
@@ -8449,6 +9237,252 @@
                 <a:ea typeface="Cambria" pitchFamily="34" charset="-122"/>
                 <a:cs typeface="Cambria" pitchFamily="34" charset="-120"/>
               </a:rPr>
+              <a:t>Pseudo-Elements, Rendered</a:t>
+            </a:r>
+            <a:endParaRPr lang="en-US" sz="3400" dirty="0"/>
+          </a:p>
+        </p:txBody>
+      </p:sp>
+      <p:sp>
+        <p:nvSpPr>
+          <p:cNvPr id="4" name="Shape 2"/>
+          <p:cNvSpPr/>
+          <p:nvPr/>
+        </p:nvSpPr>
+        <p:spPr>
+          <a:xfrm>
+            <a:off x="530352" y="1947672"/>
+            <a:ext cx="11130991" cy="4334256"/>
+          </a:xfrm>
+          <a:prstGeom prst="roundRect">
+            <a:avLst>
+              <a:gd name="adj" fmla="val 1266"/>
+            </a:avLst>
+          </a:prstGeom>
+          <a:solidFill>
+            <a:srgbClr val="FFFFFF"/>
+          </a:solidFill>
+          <a:ln w="12700">
+            <a:solidFill>
+              <a:srgbClr val="E2E2EE"/>
+            </a:solidFill>
+            <a:prstDash val="solid"/>
+          </a:ln>
+          <a:effectLst>
+            <a:outerShdw sx="100000" sy="100000" kx="0" ky="0" algn="bl" rotWithShape="0" blurRad="101600" dist="38100" dir="5400000">
+              <a:srgbClr val="000000">
+                <a:alpha val="12000"/>
+              </a:srgbClr>
+            </a:outerShdw>
+          </a:effectLst>
+        </p:spPr>
+      </p:sp>
+      <p:pic>
+        <p:nvPicPr>
+          <p:cNvPr id="5" name="Image 0" descr="D:/GitHub/mern-web-book/docs/assets/img/lecture-05/pseudo-element-demo.png">    </p:cNvPr>
+          <p:cNvPicPr>
+            <a:picLocks noChangeAspect="1"/>
+          </p:cNvPicPr>
+          <p:nvPr/>
+        </p:nvPicPr>
+        <p:blipFill>
+          <a:blip r:embed="rId1"/>
+          <a:stretch>
+            <a:fillRect/>
+          </a:stretch>
+        </p:blipFill>
+        <p:spPr>
+          <a:xfrm>
+            <a:off x="640080" y="2519655"/>
+            <a:ext cx="10911535" cy="3190290"/>
+          </a:xfrm>
+          <a:prstGeom prst="rect">
+            <a:avLst/>
+          </a:prstGeom>
+        </p:spPr>
+      </p:pic>
+      <p:sp>
+        <p:nvSpPr>
+          <p:cNvPr id="6" name="Text 3"/>
+          <p:cNvSpPr txBox="1"/>
+          <p:nvPr/>
+        </p:nvSpPr>
+        <p:spPr>
+          <a:xfrm>
+            <a:off x="640080" y="6446520"/>
+            <a:ext cx="8686800" cy="292608"/>
+          </a:xfrm>
+          <a:prstGeom prst="rect">
+            <a:avLst/>
+          </a:prstGeom>
+          <a:noFill/>
+          <a:ln/>
+        </p:spPr>
+        <p:txBody>
+          <a:bodyPr wrap="square" lIns="0" tIns="0" rIns="0" bIns="0" rtlCol="0" anchor="ctr"/>
+          <a:lstStyle/>
+          <a:p>
+            <a:pPr algn="l" indent="0" marL="0">
+              <a:buNone/>
+            </a:pPr>
+            <a:r>
+              <a:rPr lang="en-US" sz="900" dirty="0">
+                <a:solidFill>
+                  <a:srgbClr val="5D5D72"/>
+                </a:solidFill>
+                <a:latin typeface="Calibri" pitchFamily="34" charset="0"/>
+                <a:ea typeface="Calibri" pitchFamily="34" charset="-122"/>
+                <a:cs typeface="Calibri" pitchFamily="34" charset="-120"/>
+              </a:rPr>
+              <a:t>Usman Akram  •  COMSATS University Islamabad</a:t>
+            </a:r>
+            <a:endParaRPr lang="en-US" sz="900" dirty="0"/>
+          </a:p>
+        </p:txBody>
+      </p:sp>
+      <p:sp>
+        <p:nvSpPr>
+          <p:cNvPr id="7" name="Text 4"/>
+          <p:cNvSpPr txBox="1"/>
+          <p:nvPr/>
+        </p:nvSpPr>
+        <p:spPr>
+          <a:xfrm>
+            <a:off x="11155680" y="6446520"/>
+            <a:ext cx="457200" cy="292608"/>
+          </a:xfrm>
+          <a:prstGeom prst="rect">
+            <a:avLst/>
+          </a:prstGeom>
+          <a:noFill/>
+          <a:ln/>
+        </p:spPr>
+        <p:txBody>
+          <a:bodyPr wrap="square" lIns="0" tIns="0" rIns="0" bIns="0" rtlCol="0" anchor="ctr"/>
+          <a:lstStyle/>
+          <a:p>
+            <a:pPr algn="r" indent="0" marL="0">
+              <a:buNone/>
+            </a:pPr>
+            <a:r>
+              <a:rPr lang="en-US" sz="900" dirty="0">
+                <a:solidFill>
+                  <a:srgbClr val="5D5D72"/>
+                </a:solidFill>
+                <a:latin typeface="Calibri" pitchFamily="34" charset="0"/>
+                <a:ea typeface="Calibri" pitchFamily="34" charset="-122"/>
+                <a:cs typeface="Calibri" pitchFamily="34" charset="-120"/>
+              </a:rPr>
+              <a:t>20</a:t>
+            </a:r>
+            <a:endParaRPr lang="en-US" sz="900" dirty="0"/>
+          </a:p>
+        </p:txBody>
+      </p:sp>
+    </p:spTree>
+  </p:cSld>
+  <p:clrMapOvr>
+    <a:masterClrMapping/>
+  </p:clrMapOvr>
+</p:sld>
+</file>
+
+<file path=ppt/slides/slide21.xml><?xml version="1.0" encoding="utf-8"?>
+<p:sld xmlns:a="http://schemas.openxmlformats.org/drawingml/2006/main" xmlns:r="http://schemas.openxmlformats.org/officeDocument/2006/relationships" xmlns:p="http://schemas.openxmlformats.org/presentationml/2006/main">
+  <p:cSld name="Slide 21">
+    <p:bg>
+      <p:bgPr>
+        <a:solidFill>
+          <a:srgbClr val="FFFFFF"/>
+        </a:solidFill>
+      </p:bgPr>
+    </p:bg>
+    <p:spTree>
+      <p:nvGrpSpPr>
+        <p:cNvPr id="1" name=""/>
+        <p:cNvGrpSpPr/>
+        <p:nvPr/>
+      </p:nvGrpSpPr>
+      <p:grpSpPr>
+        <a:xfrm>
+          <a:off x="0" y="0"/>
+          <a:ext cx="0" cy="0"/>
+          <a:chOff x="0" y="0"/>
+          <a:chExt cx="0" cy="0"/>
+        </a:xfrm>
+      </p:grpSpPr>
+      <p:sp>
+        <p:nvSpPr>
+          <p:cNvPr id="2" name="Text 0"/>
+          <p:cNvSpPr txBox="1"/>
+          <p:nvPr/>
+        </p:nvSpPr>
+        <p:spPr>
+          <a:xfrm>
+            <a:off x="640080" y="457200"/>
+            <a:ext cx="10058400" cy="365760"/>
+          </a:xfrm>
+          <a:prstGeom prst="rect">
+            <a:avLst/>
+          </a:prstGeom>
+          <a:noFill/>
+          <a:ln/>
+        </p:spPr>
+        <p:txBody>
+          <a:bodyPr wrap="square" lIns="0" tIns="0" rIns="0" bIns="0" rtlCol="0" anchor="ctr"/>
+          <a:lstStyle/>
+          <a:p>
+            <a:pPr algn="l" indent="0" marL="0">
+              <a:buNone/>
+            </a:pPr>
+            <a:r>
+              <a:rPr lang="en-US" sz="1300" b="1" spc="300" kern="0" dirty="0">
+                <a:solidFill>
+                  <a:srgbClr val="FF8A3D"/>
+                </a:solidFill>
+                <a:latin typeface="Calibri" pitchFamily="34" charset="0"/>
+                <a:ea typeface="Calibri" pitchFamily="34" charset="-122"/>
+                <a:cs typeface="Calibri" pitchFamily="34" charset="-120"/>
+              </a:rPr>
+              <a:t>THE CASCADE</a:t>
+            </a:r>
+            <a:endParaRPr lang="en-US" sz="1300" dirty="0"/>
+          </a:p>
+        </p:txBody>
+      </p:sp>
+      <p:sp>
+        <p:nvSpPr>
+          <p:cNvPr id="3" name="Text 1"/>
+          <p:cNvSpPr txBox="1"/>
+          <p:nvPr/>
+        </p:nvSpPr>
+        <p:spPr>
+          <a:xfrm>
+            <a:off x="640080" y="841248"/>
+            <a:ext cx="10881360" cy="914400"/>
+          </a:xfrm>
+          <a:prstGeom prst="rect">
+            <a:avLst/>
+          </a:prstGeom>
+          <a:noFill/>
+          <a:ln/>
+        </p:spPr>
+        <p:txBody>
+          <a:bodyPr wrap="square" lIns="0" tIns="0" rIns="0" bIns="0" rtlCol="0" anchor="ctr"/>
+          <a:lstStyle/>
+          <a:p>
+            <a:pPr algn="l" indent="0" marL="0">
+              <a:buNone/>
+            </a:pPr>
+            <a:r>
+              <a:rPr lang="en-US" sz="3400" b="1" dirty="0">
+                <a:solidFill>
+                  <a:srgbClr val="2B2B7A"/>
+                </a:solidFill>
+                <a:latin typeface="Cambria" pitchFamily="34" charset="0"/>
+                <a:ea typeface="Cambria" pitchFamily="34" charset="-122"/>
+                <a:cs typeface="Cambria" pitchFamily="34" charset="-120"/>
+              </a:rPr>
               <a:t>Specificity, From Lowest to Highest</a:t>
             </a:r>
             <a:endParaRPr lang="en-US" sz="3400" dirty="0"/>
@@ -8457,7 +9491,7 @@
       </p:sp>
       <p:graphicFrame>
         <p:nvGraphicFramePr>
-          <p:cNvPr id="21" name="Table 0"/>
+          <p:cNvPr id="22" name="Table 0"/>
           <p:cNvGraphicFramePr>
             <a:graphicFrameLocks noGrp="1"/>
           </p:cNvGraphicFramePr>
@@ -9385,291 +10419,6 @@
                 <a:ea typeface="Calibri" pitchFamily="34" charset="-122"/>
                 <a:cs typeface="Calibri" pitchFamily="34" charset="-120"/>
               </a:rPr>
-              <a:t>20</a:t>
-            </a:r>
-            <a:endParaRPr lang="en-US" sz="900" dirty="0"/>
-          </a:p>
-        </p:txBody>
-      </p:sp>
-    </p:spTree>
-  </p:cSld>
-  <p:clrMapOvr>
-    <a:masterClrMapping/>
-  </p:clrMapOvr>
-</p:sld>
-</file>
-
-<file path=ppt/slides/slide21.xml><?xml version="1.0" encoding="utf-8"?>
-<p:sld xmlns:a="http://schemas.openxmlformats.org/drawingml/2006/main" xmlns:r="http://schemas.openxmlformats.org/officeDocument/2006/relationships" xmlns:p="http://schemas.openxmlformats.org/presentationml/2006/main">
-  <p:cSld name="Slide 21">
-    <p:bg>
-      <p:bgPr>
-        <a:solidFill>
-          <a:srgbClr val="FFFFFF"/>
-        </a:solidFill>
-      </p:bgPr>
-    </p:bg>
-    <p:spTree>
-      <p:nvGrpSpPr>
-        <p:cNvPr id="1" name=""/>
-        <p:cNvGrpSpPr/>
-        <p:nvPr/>
-      </p:nvGrpSpPr>
-      <p:grpSpPr>
-        <a:xfrm>
-          <a:off x="0" y="0"/>
-          <a:ext cx="0" cy="0"/>
-          <a:chOff x="0" y="0"/>
-          <a:chExt cx="0" cy="0"/>
-        </a:xfrm>
-      </p:grpSpPr>
-      <p:sp>
-        <p:nvSpPr>
-          <p:cNvPr id="2" name="Text 0"/>
-          <p:cNvSpPr txBox="1"/>
-          <p:nvPr/>
-        </p:nvSpPr>
-        <p:spPr>
-          <a:xfrm>
-            <a:off x="640080" y="457200"/>
-            <a:ext cx="10058400" cy="365760"/>
-          </a:xfrm>
-          <a:prstGeom prst="rect">
-            <a:avLst/>
-          </a:prstGeom>
-          <a:noFill/>
-          <a:ln/>
-        </p:spPr>
-        <p:txBody>
-          <a:bodyPr wrap="square" lIns="0" tIns="0" rIns="0" bIns="0" rtlCol="0" anchor="ctr"/>
-          <a:lstStyle/>
-          <a:p>
-            <a:pPr algn="l" indent="0" marL="0">
-              <a:buNone/>
-            </a:pPr>
-            <a:r>
-              <a:rPr lang="en-US" sz="1300" b="1" spc="300" kern="0" dirty="0">
-                <a:solidFill>
-                  <a:srgbClr val="FF8A3D"/>
-                </a:solidFill>
-                <a:latin typeface="Calibri" pitchFamily="34" charset="0"/>
-                <a:ea typeface="Calibri" pitchFamily="34" charset="-122"/>
-                <a:cs typeface="Calibri" pitchFamily="34" charset="-120"/>
-              </a:rPr>
-              <a:t>THE CASCADE</a:t>
-            </a:r>
-            <a:endParaRPr lang="en-US" sz="1300" dirty="0"/>
-          </a:p>
-        </p:txBody>
-      </p:sp>
-      <p:sp>
-        <p:nvSpPr>
-          <p:cNvPr id="3" name="Text 1"/>
-          <p:cNvSpPr txBox="1"/>
-          <p:nvPr/>
-        </p:nvSpPr>
-        <p:spPr>
-          <a:xfrm>
-            <a:off x="640080" y="841248"/>
-            <a:ext cx="10881360" cy="914400"/>
-          </a:xfrm>
-          <a:prstGeom prst="rect">
-            <a:avLst/>
-          </a:prstGeom>
-          <a:noFill/>
-          <a:ln/>
-        </p:spPr>
-        <p:txBody>
-          <a:bodyPr wrap="square" lIns="0" tIns="0" rIns="0" bIns="0" rtlCol="0" anchor="ctr"/>
-          <a:lstStyle/>
-          <a:p>
-            <a:pPr algn="l" indent="0" marL="0">
-              <a:buNone/>
-            </a:pPr>
-            <a:r>
-              <a:rPr lang="en-US" sz="3400" b="1" dirty="0">
-                <a:solidFill>
-                  <a:srgbClr val="2B2B7A"/>
-                </a:solidFill>
-                <a:latin typeface="Cambria" pitchFamily="34" charset="0"/>
-                <a:ea typeface="Cambria" pitchFamily="34" charset="-122"/>
-                <a:cs typeface="Cambria" pitchFamily="34" charset="-120"/>
-              </a:rPr>
-              <a:t>Specificity Decides the Winner</a:t>
-            </a:r>
-            <a:endParaRPr lang="en-US" sz="3400" dirty="0"/>
-          </a:p>
-        </p:txBody>
-      </p:sp>
-      <p:sp>
-        <p:nvSpPr>
-          <p:cNvPr id="4" name="Text 2"/>
-          <p:cNvSpPr txBox="1"/>
-          <p:nvPr/>
-        </p:nvSpPr>
-        <p:spPr>
-          <a:xfrm>
-            <a:off x="640080" y="1691640"/>
-            <a:ext cx="10911535" cy="411480"/>
-          </a:xfrm>
-          <a:prstGeom prst="rect">
-            <a:avLst/>
-          </a:prstGeom>
-          <a:noFill/>
-          <a:ln/>
-        </p:spPr>
-        <p:txBody>
-          <a:bodyPr wrap="square" lIns="0" tIns="0" rIns="0" bIns="0" rtlCol="0" anchor="ctr"/>
-          <a:lstStyle/>
-          <a:p>
-            <a:pPr indent="0" marL="0">
-              <a:buNone/>
-            </a:pPr>
-            <a:r>
-              <a:rPr lang="en-US" sz="1350" i="1" dirty="0">
-                <a:solidFill>
-                  <a:srgbClr val="5D5D72"/>
-                </a:solidFill>
-                <a:latin typeface="Calibri" pitchFamily="34" charset="0"/>
-                <a:ea typeface="Calibri" pitchFamily="34" charset="-122"/>
-                <a:cs typeface="Calibri" pitchFamily="34" charset="-120"/>
-              </a:rPr>
-              <a:t>&lt;p id="lead-paragraph" class="intro"&gt; — the id selector wins, regardless of source order.</a:t>
-            </a:r>
-            <a:endParaRPr lang="en-US" sz="1350" dirty="0"/>
-          </a:p>
-        </p:txBody>
-      </p:sp>
-      <p:sp>
-        <p:nvSpPr>
-          <p:cNvPr id="5" name="Shape 3"/>
-          <p:cNvSpPr/>
-          <p:nvPr/>
-        </p:nvSpPr>
-        <p:spPr>
-          <a:xfrm>
-            <a:off x="530352" y="2221992"/>
-            <a:ext cx="11130991" cy="4059936"/>
-          </a:xfrm>
-          <a:prstGeom prst="roundRect">
-            <a:avLst>
-              <a:gd name="adj" fmla="val 1351"/>
-            </a:avLst>
-          </a:prstGeom>
-          <a:solidFill>
-            <a:srgbClr val="FFFFFF"/>
-          </a:solidFill>
-          <a:ln w="12700">
-            <a:solidFill>
-              <a:srgbClr val="E2E2EE"/>
-            </a:solidFill>
-            <a:prstDash val="solid"/>
-          </a:ln>
-          <a:effectLst>
-            <a:outerShdw sx="100000" sy="100000" kx="0" ky="0" algn="bl" rotWithShape="0" blurRad="101600" dist="38100" dir="5400000">
-              <a:srgbClr val="000000">
-                <a:alpha val="12000"/>
-              </a:srgbClr>
-            </a:outerShdw>
-          </a:effectLst>
-        </p:spPr>
-      </p:sp>
-      <p:pic>
-        <p:nvPicPr>
-          <p:cNvPr id="6" name="Image 0" descr="D:/GitHub/mern-web-book/docs/assets/img/lecture-05/specificity-demo.png">    </p:cNvPr>
-          <p:cNvPicPr>
-            <a:picLocks noChangeAspect="1"/>
-          </p:cNvPicPr>
-          <p:nvPr/>
-        </p:nvPicPr>
-        <p:blipFill>
-          <a:blip r:embed="rId1"/>
-          <a:stretch>
-            <a:fillRect/>
-          </a:stretch>
-        </p:blipFill>
-        <p:spPr>
-          <a:xfrm>
-            <a:off x="3756508" y="3710940"/>
-            <a:ext cx="4678680" cy="1082040"/>
-          </a:xfrm>
-          <a:prstGeom prst="rect">
-            <a:avLst/>
-          </a:prstGeom>
-        </p:spPr>
-      </p:pic>
-      <p:sp>
-        <p:nvSpPr>
-          <p:cNvPr id="7" name="Text 4"/>
-          <p:cNvSpPr txBox="1"/>
-          <p:nvPr/>
-        </p:nvSpPr>
-        <p:spPr>
-          <a:xfrm>
-            <a:off x="640080" y="6446520"/>
-            <a:ext cx="8686800" cy="292608"/>
-          </a:xfrm>
-          <a:prstGeom prst="rect">
-            <a:avLst/>
-          </a:prstGeom>
-          <a:noFill/>
-          <a:ln/>
-        </p:spPr>
-        <p:txBody>
-          <a:bodyPr wrap="square" lIns="0" tIns="0" rIns="0" bIns="0" rtlCol="0" anchor="ctr"/>
-          <a:lstStyle/>
-          <a:p>
-            <a:pPr algn="l" indent="0" marL="0">
-              <a:buNone/>
-            </a:pPr>
-            <a:r>
-              <a:rPr lang="en-US" sz="900" dirty="0">
-                <a:solidFill>
-                  <a:srgbClr val="5D5D72"/>
-                </a:solidFill>
-                <a:latin typeface="Calibri" pitchFamily="34" charset="0"/>
-                <a:ea typeface="Calibri" pitchFamily="34" charset="-122"/>
-                <a:cs typeface="Calibri" pitchFamily="34" charset="-120"/>
-              </a:rPr>
-              <a:t>Usman Akram  •  COMSATS University Islamabad</a:t>
-            </a:r>
-            <a:endParaRPr lang="en-US" sz="900" dirty="0"/>
-          </a:p>
-        </p:txBody>
-      </p:sp>
-      <p:sp>
-        <p:nvSpPr>
-          <p:cNvPr id="8" name="Text 5"/>
-          <p:cNvSpPr txBox="1"/>
-          <p:nvPr/>
-        </p:nvSpPr>
-        <p:spPr>
-          <a:xfrm>
-            <a:off x="11155680" y="6446520"/>
-            <a:ext cx="457200" cy="292608"/>
-          </a:xfrm>
-          <a:prstGeom prst="rect">
-            <a:avLst/>
-          </a:prstGeom>
-          <a:noFill/>
-          <a:ln/>
-        </p:spPr>
-        <p:txBody>
-          <a:bodyPr wrap="square" lIns="0" tIns="0" rIns="0" bIns="0" rtlCol="0" anchor="ctr"/>
-          <a:lstStyle/>
-          <a:p>
-            <a:pPr algn="r" indent="0" marL="0">
-              <a:buNone/>
-            </a:pPr>
-            <a:r>
-              <a:rPr lang="en-US" sz="900" dirty="0">
-                <a:solidFill>
-                  <a:srgbClr val="5D5D72"/>
-                </a:solidFill>
-                <a:latin typeface="Calibri" pitchFamily="34" charset="0"/>
-                <a:ea typeface="Calibri" pitchFamily="34" charset="-122"/>
-                <a:cs typeface="Calibri" pitchFamily="34" charset="-120"/>
-              </a:rPr>
               <a:t>21</a:t>
             </a:r>
             <a:endParaRPr lang="en-US" sz="900" dirty="0"/>
@@ -9741,7 +10490,7 @@
                 <a:ea typeface="Calibri" pitchFamily="34" charset="-122"/>
                 <a:cs typeface="Calibri" pitchFamily="34" charset="-120"/>
               </a:rPr>
-              <a:t>EVERY CONFLICT CASE</a:t>
+              <a:t>THE CASCADE</a:t>
             </a:r>
             <a:endParaRPr lang="en-US" sz="1300" dirty="0"/>
           </a:p>
@@ -9780,6 +10529,385 @@
                 <a:ea typeface="Cambria" pitchFamily="34" charset="-122"/>
                 <a:cs typeface="Cambria" pitchFamily="34" charset="-120"/>
               </a:rPr>
+              <a:t>Specificity Decides the Winner</a:t>
+            </a:r>
+            <a:endParaRPr lang="en-US" sz="3400" dirty="0"/>
+          </a:p>
+        </p:txBody>
+      </p:sp>
+      <p:sp>
+        <p:nvSpPr>
+          <p:cNvPr id="4" name="Shape 2"/>
+          <p:cNvSpPr/>
+          <p:nvPr/>
+        </p:nvSpPr>
+        <p:spPr>
+          <a:xfrm>
+            <a:off x="640080" y="1965960"/>
+            <a:ext cx="10911535" cy="1739265"/>
+          </a:xfrm>
+          <a:prstGeom prst="roundRect">
+            <a:avLst>
+              <a:gd name="adj" fmla="val 4206"/>
+            </a:avLst>
+          </a:prstGeom>
+          <a:solidFill>
+            <a:srgbClr val="1E1E4C"/>
+          </a:solidFill>
+          <a:ln/>
+        </p:spPr>
+      </p:sp>
+      <p:sp>
+        <p:nvSpPr>
+          <p:cNvPr id="5" name="Text 3"/>
+          <p:cNvSpPr txBox="1"/>
+          <p:nvPr/>
+        </p:nvSpPr>
+        <p:spPr>
+          <a:xfrm>
+            <a:off x="960120" y="2194560"/>
+            <a:ext cx="10271455" cy="1282065"/>
+          </a:xfrm>
+          <a:prstGeom prst="rect">
+            <a:avLst/>
+          </a:prstGeom>
+          <a:noFill/>
+          <a:ln/>
+        </p:spPr>
+        <p:txBody>
+          <a:bodyPr wrap="square" lIns="0" tIns="0" rIns="0" bIns="0" rtlCol="0" anchor="t"/>
+          <a:lstStyle/>
+          <a:p>
+            <a:pPr indent="0" marL="0">
+              <a:lnSpc>
+                <a:spcPct val="125000"/>
+              </a:lnSpc>
+              <a:buNone/>
+            </a:pPr>
+            <a:r>
+              <a:rPr lang="en-US" sz="1250" dirty="0">
+                <a:solidFill>
+                  <a:srgbClr val="C9D3F5"/>
+                </a:solidFill>
+                <a:latin typeface="Courier New" pitchFamily="34" charset="0"/>
+                <a:ea typeface="Courier New" pitchFamily="34" charset="-122"/>
+                <a:cs typeface="Courier New" pitchFamily="34" charset="-120"/>
+              </a:rPr>
+              <a:t>p { color: black; }              /* low specificity */</a:t>
+            </a:r>
+            <a:endParaRPr lang="en-US" sz="1250" dirty="0"/>
+          </a:p>
+          <a:p>
+            <a:pPr indent="0" marL="0">
+              <a:lnSpc>
+                <a:spcPct val="125000"/>
+              </a:lnSpc>
+              <a:buNone/>
+            </a:pPr>
+            <a:r>
+              <a:rPr lang="en-US" sz="1250" dirty="0">
+                <a:solidFill>
+                  <a:srgbClr val="C9D3F5"/>
+                </a:solidFill>
+                <a:latin typeface="Courier New" pitchFamily="34" charset="0"/>
+                <a:ea typeface="Courier New" pitchFamily="34" charset="-122"/>
+                <a:cs typeface="Courier New" pitchFamily="34" charset="-120"/>
+              </a:rPr>
+              <a:t>.intro { color: green; }         /* medium          */</a:t>
+            </a:r>
+            <a:endParaRPr lang="en-US" sz="1250" dirty="0"/>
+          </a:p>
+          <a:p>
+            <a:pPr indent="0" marL="0">
+              <a:lnSpc>
+                <a:spcPct val="125000"/>
+              </a:lnSpc>
+              <a:buNone/>
+            </a:pPr>
+            <a:r>
+              <a:rPr lang="en-US" sz="1250" dirty="0">
+                <a:solidFill>
+                  <a:srgbClr val="C9D3F5"/>
+                </a:solidFill>
+                <a:latin typeface="Courier New" pitchFamily="34" charset="0"/>
+                <a:ea typeface="Courier New" pitchFamily="34" charset="-122"/>
+                <a:cs typeface="Courier New" pitchFamily="34" charset="-120"/>
+              </a:rPr>
+              <a:t>#lead-paragraph { color: blue; } /* high            */</a:t>
+            </a:r>
+            <a:endParaRPr lang="en-US" sz="1250" dirty="0"/>
+          </a:p>
+          <a:p>
+            <a:pPr indent="0" marL="0">
+              <a:lnSpc>
+                <a:spcPct val="125000"/>
+              </a:lnSpc>
+              <a:buNone/>
+            </a:pPr>
+            <a:endParaRPr lang="en-US" sz="1250" dirty="0"/>
+          </a:p>
+          <a:p>
+            <a:pPr indent="0" marL="0">
+              <a:lnSpc>
+                <a:spcPct val="125000"/>
+              </a:lnSpc>
+              <a:buNone/>
+            </a:pPr>
+            <a:r>
+              <a:rPr lang="en-US" sz="1250" dirty="0">
+                <a:solidFill>
+                  <a:srgbClr val="C9D3F5"/>
+                </a:solidFill>
+                <a:latin typeface="Courier New" pitchFamily="34" charset="0"/>
+                <a:ea typeface="Courier New" pitchFamily="34" charset="-122"/>
+                <a:cs typeface="Courier New" pitchFamily="34" charset="-120"/>
+              </a:rPr>
+              <a:t>&lt;p id="lead-paragraph" class="intro"&gt;What colour am I?&lt;/p&gt;</a:t>
+            </a:r>
+            <a:endParaRPr lang="en-US" sz="1250" dirty="0"/>
+          </a:p>
+        </p:txBody>
+      </p:sp>
+      <p:sp>
+        <p:nvSpPr>
+          <p:cNvPr id="6" name="Shape 4"/>
+          <p:cNvSpPr/>
+          <p:nvPr/>
+        </p:nvSpPr>
+        <p:spPr>
+          <a:xfrm>
+            <a:off x="530352" y="3869817"/>
+            <a:ext cx="11130991" cy="2457831"/>
+          </a:xfrm>
+          <a:prstGeom prst="roundRect">
+            <a:avLst>
+              <a:gd name="adj" fmla="val 2232"/>
+            </a:avLst>
+          </a:prstGeom>
+          <a:solidFill>
+            <a:srgbClr val="FFFFFF"/>
+          </a:solidFill>
+          <a:ln w="12700">
+            <a:solidFill>
+              <a:srgbClr val="E2E2EE"/>
+            </a:solidFill>
+            <a:prstDash val="solid"/>
+          </a:ln>
+          <a:effectLst>
+            <a:outerShdw sx="100000" sy="100000" kx="0" ky="0" algn="bl" rotWithShape="0" blurRad="101600" dist="38100" dir="5400000">
+              <a:srgbClr val="000000">
+                <a:alpha val="12000"/>
+              </a:srgbClr>
+            </a:outerShdw>
+          </a:effectLst>
+        </p:spPr>
+      </p:sp>
+      <p:pic>
+        <p:nvPicPr>
+          <p:cNvPr id="7" name="Image 0" descr="D:/GitHub/mern-web-book/docs/assets/img/lecture-05/specificity-demo.png">    </p:cNvPr>
+          <p:cNvPicPr>
+            <a:picLocks noChangeAspect="1"/>
+          </p:cNvPicPr>
+          <p:nvPr/>
+        </p:nvPicPr>
+        <p:blipFill>
+          <a:blip r:embed="rId1"/>
+          <a:stretch>
+            <a:fillRect/>
+          </a:stretch>
+        </p:blipFill>
+        <p:spPr>
+          <a:xfrm>
+            <a:off x="3756508" y="4557713"/>
+            <a:ext cx="4678680" cy="1082040"/>
+          </a:xfrm>
+          <a:prstGeom prst="rect">
+            <a:avLst/>
+          </a:prstGeom>
+        </p:spPr>
+      </p:pic>
+      <p:sp>
+        <p:nvSpPr>
+          <p:cNvPr id="8" name="Text 5"/>
+          <p:cNvSpPr txBox="1"/>
+          <p:nvPr/>
+        </p:nvSpPr>
+        <p:spPr>
+          <a:xfrm>
+            <a:off x="640080" y="6446520"/>
+            <a:ext cx="8686800" cy="292608"/>
+          </a:xfrm>
+          <a:prstGeom prst="rect">
+            <a:avLst/>
+          </a:prstGeom>
+          <a:noFill/>
+          <a:ln/>
+        </p:spPr>
+        <p:txBody>
+          <a:bodyPr wrap="square" lIns="0" tIns="0" rIns="0" bIns="0" rtlCol="0" anchor="ctr"/>
+          <a:lstStyle/>
+          <a:p>
+            <a:pPr algn="l" indent="0" marL="0">
+              <a:buNone/>
+            </a:pPr>
+            <a:r>
+              <a:rPr lang="en-US" sz="900" dirty="0">
+                <a:solidFill>
+                  <a:srgbClr val="5D5D72"/>
+                </a:solidFill>
+                <a:latin typeface="Calibri" pitchFamily="34" charset="0"/>
+                <a:ea typeface="Calibri" pitchFamily="34" charset="-122"/>
+                <a:cs typeface="Calibri" pitchFamily="34" charset="-120"/>
+              </a:rPr>
+              <a:t>Usman Akram  •  COMSATS University Islamabad</a:t>
+            </a:r>
+            <a:endParaRPr lang="en-US" sz="900" dirty="0"/>
+          </a:p>
+        </p:txBody>
+      </p:sp>
+      <p:sp>
+        <p:nvSpPr>
+          <p:cNvPr id="9" name="Text 6"/>
+          <p:cNvSpPr txBox="1"/>
+          <p:nvPr/>
+        </p:nvSpPr>
+        <p:spPr>
+          <a:xfrm>
+            <a:off x="11155680" y="6446520"/>
+            <a:ext cx="457200" cy="292608"/>
+          </a:xfrm>
+          <a:prstGeom prst="rect">
+            <a:avLst/>
+          </a:prstGeom>
+          <a:noFill/>
+          <a:ln/>
+        </p:spPr>
+        <p:txBody>
+          <a:bodyPr wrap="square" lIns="0" tIns="0" rIns="0" bIns="0" rtlCol="0" anchor="ctr"/>
+          <a:lstStyle/>
+          <a:p>
+            <a:pPr algn="r" indent="0" marL="0">
+              <a:buNone/>
+            </a:pPr>
+            <a:r>
+              <a:rPr lang="en-US" sz="900" dirty="0">
+                <a:solidFill>
+                  <a:srgbClr val="5D5D72"/>
+                </a:solidFill>
+                <a:latin typeface="Calibri" pitchFamily="34" charset="0"/>
+                <a:ea typeface="Calibri" pitchFamily="34" charset="-122"/>
+                <a:cs typeface="Calibri" pitchFamily="34" charset="-120"/>
+              </a:rPr>
+              <a:t>22</a:t>
+            </a:r>
+            <a:endParaRPr lang="en-US" sz="900" dirty="0"/>
+          </a:p>
+        </p:txBody>
+      </p:sp>
+    </p:spTree>
+  </p:cSld>
+  <p:clrMapOvr>
+    <a:masterClrMapping/>
+  </p:clrMapOvr>
+</p:sld>
+</file>
+
+<file path=ppt/slides/slide23.xml><?xml version="1.0" encoding="utf-8"?>
+<p:sld xmlns:a="http://schemas.openxmlformats.org/drawingml/2006/main" xmlns:r="http://schemas.openxmlformats.org/officeDocument/2006/relationships" xmlns:p="http://schemas.openxmlformats.org/presentationml/2006/main">
+  <p:cSld name="Slide 23">
+    <p:bg>
+      <p:bgPr>
+        <a:solidFill>
+          <a:srgbClr val="FFFFFF"/>
+        </a:solidFill>
+      </p:bgPr>
+    </p:bg>
+    <p:spTree>
+      <p:nvGrpSpPr>
+        <p:cNvPr id="1" name=""/>
+        <p:cNvGrpSpPr/>
+        <p:nvPr/>
+      </p:nvGrpSpPr>
+      <p:grpSpPr>
+        <a:xfrm>
+          <a:off x="0" y="0"/>
+          <a:ext cx="0" cy="0"/>
+          <a:chOff x="0" y="0"/>
+          <a:chExt cx="0" cy="0"/>
+        </a:xfrm>
+      </p:grpSpPr>
+      <p:sp>
+        <p:nvSpPr>
+          <p:cNvPr id="2" name="Text 0"/>
+          <p:cNvSpPr txBox="1"/>
+          <p:nvPr/>
+        </p:nvSpPr>
+        <p:spPr>
+          <a:xfrm>
+            <a:off x="640080" y="457200"/>
+            <a:ext cx="10058400" cy="365760"/>
+          </a:xfrm>
+          <a:prstGeom prst="rect">
+            <a:avLst/>
+          </a:prstGeom>
+          <a:noFill/>
+          <a:ln/>
+        </p:spPr>
+        <p:txBody>
+          <a:bodyPr wrap="square" lIns="0" tIns="0" rIns="0" bIns="0" rtlCol="0" anchor="ctr"/>
+          <a:lstStyle/>
+          <a:p>
+            <a:pPr algn="l" indent="0" marL="0">
+              <a:buNone/>
+            </a:pPr>
+            <a:r>
+              <a:rPr lang="en-US" sz="1300" b="1" spc="300" kern="0" dirty="0">
+                <a:solidFill>
+                  <a:srgbClr val="FF8A3D"/>
+                </a:solidFill>
+                <a:latin typeface="Calibri" pitchFamily="34" charset="0"/>
+                <a:ea typeface="Calibri" pitchFamily="34" charset="-122"/>
+                <a:cs typeface="Calibri" pitchFamily="34" charset="-120"/>
+              </a:rPr>
+              <a:t>EVERY CONFLICT CASE</a:t>
+            </a:r>
+            <a:endParaRPr lang="en-US" sz="1300" dirty="0"/>
+          </a:p>
+        </p:txBody>
+      </p:sp>
+      <p:sp>
+        <p:nvSpPr>
+          <p:cNvPr id="3" name="Text 1"/>
+          <p:cNvSpPr txBox="1"/>
+          <p:nvPr/>
+        </p:nvSpPr>
+        <p:spPr>
+          <a:xfrm>
+            <a:off x="640080" y="841248"/>
+            <a:ext cx="10881360" cy="914400"/>
+          </a:xfrm>
+          <a:prstGeom prst="rect">
+            <a:avLst/>
+          </a:prstGeom>
+          <a:noFill/>
+          <a:ln/>
+        </p:spPr>
+        <p:txBody>
+          <a:bodyPr wrap="square" lIns="0" tIns="0" rIns="0" bIns="0" rtlCol="0" anchor="ctr"/>
+          <a:lstStyle/>
+          <a:p>
+            <a:pPr algn="l" indent="0" marL="0">
+              <a:buNone/>
+            </a:pPr>
+            <a:r>
+              <a:rPr lang="en-US" sz="3400" b="1" dirty="0">
+                <a:solidFill>
+                  <a:srgbClr val="2B2B7A"/>
+                </a:solidFill>
+                <a:latin typeface="Cambria" pitchFamily="34" charset="0"/>
+                <a:ea typeface="Cambria" pitchFamily="34" charset="-122"/>
+                <a:cs typeface="Cambria" pitchFamily="34" charset="-120"/>
+              </a:rPr>
               <a:t>How the Browser Resolves Conflicts</a:t>
             </a:r>
             <a:endParaRPr lang="en-US" sz="3400" dirty="0"/>
@@ -9788,7 +10916,7 @@
       </p:sp>
       <p:graphicFrame>
         <p:nvGraphicFramePr>
-          <p:cNvPr id="23" name="Table 0"/>
+          <p:cNvPr id="24" name="Table 0"/>
           <p:cNvGraphicFramePr>
             <a:graphicFrameLocks noGrp="1"/>
           </p:cNvGraphicFramePr>
@@ -10716,346 +11844,6 @@
                 <a:ea typeface="Calibri" pitchFamily="34" charset="-122"/>
                 <a:cs typeface="Calibri" pitchFamily="34" charset="-120"/>
               </a:rPr>
-              <a:t>22</a:t>
-            </a:r>
-            <a:endParaRPr lang="en-US" sz="900" dirty="0"/>
-          </a:p>
-        </p:txBody>
-      </p:sp>
-    </p:spTree>
-  </p:cSld>
-  <p:clrMapOvr>
-    <a:masterClrMapping/>
-  </p:clrMapOvr>
-</p:sld>
-</file>
-
-<file path=ppt/slides/slide23.xml><?xml version="1.0" encoding="utf-8"?>
-<p:sld xmlns:a="http://schemas.openxmlformats.org/drawingml/2006/main" xmlns:r="http://schemas.openxmlformats.org/officeDocument/2006/relationships" xmlns:p="http://schemas.openxmlformats.org/presentationml/2006/main">
-  <p:cSld name="Slide 23">
-    <p:bg>
-      <p:bgPr>
-        <a:solidFill>
-          <a:srgbClr val="FFFFFF"/>
-        </a:solidFill>
-      </p:bgPr>
-    </p:bg>
-    <p:spTree>
-      <p:nvGrpSpPr>
-        <p:cNvPr id="1" name=""/>
-        <p:cNvGrpSpPr/>
-        <p:nvPr/>
-      </p:nvGrpSpPr>
-      <p:grpSpPr>
-        <a:xfrm>
-          <a:off x="0" y="0"/>
-          <a:ext cx="0" cy="0"/>
-          <a:chOff x="0" y="0"/>
-          <a:chExt cx="0" cy="0"/>
-        </a:xfrm>
-      </p:grpSpPr>
-      <p:sp>
-        <p:nvSpPr>
-          <p:cNvPr id="2" name="Text 0"/>
-          <p:cNvSpPr txBox="1"/>
-          <p:nvPr/>
-        </p:nvSpPr>
-        <p:spPr>
-          <a:xfrm>
-            <a:off x="640080" y="457200"/>
-            <a:ext cx="10058400" cy="365760"/>
-          </a:xfrm>
-          <a:prstGeom prst="rect">
-            <a:avLst/>
-          </a:prstGeom>
-          <a:noFill/>
-          <a:ln/>
-        </p:spPr>
-        <p:txBody>
-          <a:bodyPr wrap="square" lIns="0" tIns="0" rIns="0" bIns="0" rtlCol="0" anchor="ctr"/>
-          <a:lstStyle/>
-          <a:p>
-            <a:pPr algn="l" indent="0" marL="0">
-              <a:buNone/>
-            </a:pPr>
-            <a:r>
-              <a:rPr lang="en-US" sz="1300" b="1" spc="300" kern="0" dirty="0">
-                <a:solidFill>
-                  <a:srgbClr val="FF8A3D"/>
-                </a:solidFill>
-                <a:latin typeface="Calibri" pitchFamily="34" charset="0"/>
-                <a:ea typeface="Calibri" pitchFamily="34" charset="-122"/>
-                <a:cs typeface="Calibri" pitchFamily="34" charset="-120"/>
-              </a:rPr>
-              <a:t>EVERY CONFLICT CASE</a:t>
-            </a:r>
-            <a:endParaRPr lang="en-US" sz="1300" dirty="0"/>
-          </a:p>
-        </p:txBody>
-      </p:sp>
-      <p:sp>
-        <p:nvSpPr>
-          <p:cNvPr id="3" name="Text 1"/>
-          <p:cNvSpPr txBox="1"/>
-          <p:nvPr/>
-        </p:nvSpPr>
-        <p:spPr>
-          <a:xfrm>
-            <a:off x="640080" y="841248"/>
-            <a:ext cx="10881360" cy="914400"/>
-          </a:xfrm>
-          <a:prstGeom prst="rect">
-            <a:avLst/>
-          </a:prstGeom>
-          <a:noFill/>
-          <a:ln/>
-        </p:spPr>
-        <p:txBody>
-          <a:bodyPr wrap="square" lIns="0" tIns="0" rIns="0" bIns="0" rtlCol="0" anchor="ctr"/>
-          <a:lstStyle/>
-          <a:p>
-            <a:pPr algn="l" indent="0" marL="0">
-              <a:buNone/>
-            </a:pPr>
-            <a:r>
-              <a:rPr lang="en-US" sz="3400" b="1" dirty="0">
-                <a:solidFill>
-                  <a:srgbClr val="2B2B7A"/>
-                </a:solidFill>
-                <a:latin typeface="Cambria" pitchFamily="34" charset="0"/>
-                <a:ea typeface="Cambria" pitchFamily="34" charset="-122"/>
-                <a:cs typeface="Cambria" pitchFamily="34" charset="-120"/>
-              </a:rPr>
-              <a:t>Case 5 in Code</a:t>
-            </a:r>
-            <a:endParaRPr lang="en-US" sz="3400" dirty="0"/>
-          </a:p>
-        </p:txBody>
-      </p:sp>
-      <p:sp>
-        <p:nvSpPr>
-          <p:cNvPr id="4" name="Shape 2"/>
-          <p:cNvSpPr/>
-          <p:nvPr/>
-        </p:nvSpPr>
-        <p:spPr>
-          <a:xfrm>
-            <a:off x="640080" y="1965960"/>
-            <a:ext cx="10911535" cy="2221992"/>
-          </a:xfrm>
-          <a:prstGeom prst="roundRect">
-            <a:avLst>
-              <a:gd name="adj" fmla="val 3292"/>
-            </a:avLst>
-          </a:prstGeom>
-          <a:solidFill>
-            <a:srgbClr val="1E1E4C"/>
-          </a:solidFill>
-          <a:ln/>
-        </p:spPr>
-      </p:sp>
-      <p:sp>
-        <p:nvSpPr>
-          <p:cNvPr id="5" name="Text 3"/>
-          <p:cNvSpPr txBox="1"/>
-          <p:nvPr/>
-        </p:nvSpPr>
-        <p:spPr>
-          <a:xfrm>
-            <a:off x="960120" y="2194560"/>
-            <a:ext cx="10271455" cy="1764792"/>
-          </a:xfrm>
-          <a:prstGeom prst="rect">
-            <a:avLst/>
-          </a:prstGeom>
-          <a:noFill/>
-          <a:ln/>
-        </p:spPr>
-        <p:txBody>
-          <a:bodyPr wrap="square" lIns="0" tIns="0" rIns="0" bIns="0" rtlCol="0" anchor="t"/>
-          <a:lstStyle/>
-          <a:p>
-            <a:pPr indent="0" marL="0">
-              <a:lnSpc>
-                <a:spcPct val="125000"/>
-              </a:lnSpc>
-              <a:buNone/>
-            </a:pPr>
-            <a:r>
-              <a:rPr lang="en-US" sz="1400" dirty="0">
-                <a:solidFill>
-                  <a:srgbClr val="C9D3F5"/>
-                </a:solidFill>
-                <a:latin typeface="Courier New" pitchFamily="34" charset="0"/>
-                <a:ea typeface="Courier New" pitchFamily="34" charset="-122"/>
-                <a:cs typeface="Courier New" pitchFamily="34" charset="-120"/>
-              </a:rPr>
-              <a:t>&lt;p id="lead" style="color: purple;"&gt;...&lt;/p&gt;</a:t>
-            </a:r>
-            <a:endParaRPr lang="en-US" sz="1400" dirty="0"/>
-          </a:p>
-          <a:p>
-            <a:pPr indent="0" marL="0">
-              <a:lnSpc>
-                <a:spcPct val="125000"/>
-              </a:lnSpc>
-              <a:buNone/>
-            </a:pPr>
-            <a:endParaRPr lang="en-US" sz="1400" dirty="0"/>
-          </a:p>
-          <a:p>
-            <a:pPr indent="0" marL="0">
-              <a:lnSpc>
-                <a:spcPct val="125000"/>
-              </a:lnSpc>
-              <a:buNone/>
-            </a:pPr>
-            <a:r>
-              <a:rPr lang="en-US" sz="1400" dirty="0">
-                <a:solidFill>
-                  <a:srgbClr val="C9D3F5"/>
-                </a:solidFill>
-                <a:latin typeface="Courier New" pitchFamily="34" charset="0"/>
-                <a:ea typeface="Courier New" pitchFamily="34" charset="-122"/>
-                <a:cs typeface="Courier New" pitchFamily="34" charset="-120"/>
-              </a:rPr>
-              <a:t>#lead { color: blue; }              /* loses to inline */</a:t>
-            </a:r>
-            <a:endParaRPr lang="en-US" sz="1400" dirty="0"/>
-          </a:p>
-          <a:p>
-            <a:pPr indent="0" marL="0">
-              <a:lnSpc>
-                <a:spcPct val="125000"/>
-              </a:lnSpc>
-              <a:buNone/>
-            </a:pPr>
-            <a:r>
-              <a:rPr lang="en-US" sz="1400" dirty="0">
-                <a:solidFill>
-                  <a:srgbClr val="C9D3F5"/>
-                </a:solidFill>
-                <a:latin typeface="Courier New" pitchFamily="34" charset="0"/>
-                <a:ea typeface="Courier New" pitchFamily="34" charset="-122"/>
-                <a:cs typeface="Courier New" pitchFamily="34" charset="-120"/>
-              </a:rPr>
-              <a:t>#lead { color: green !important; } /* beats inline   */</a:t>
-            </a:r>
-            <a:endParaRPr lang="en-US" sz="1400" dirty="0"/>
-          </a:p>
-        </p:txBody>
-      </p:sp>
-      <p:sp>
-        <p:nvSpPr>
-          <p:cNvPr id="6" name="Text 4"/>
-          <p:cNvSpPr txBox="1"/>
-          <p:nvPr/>
-        </p:nvSpPr>
-        <p:spPr>
-          <a:xfrm>
-            <a:off x="640080" y="4416552"/>
-            <a:ext cx="10911535" cy="1847088"/>
-          </a:xfrm>
-          <a:prstGeom prst="rect">
-            <a:avLst/>
-          </a:prstGeom>
-          <a:noFill/>
-          <a:ln/>
-        </p:spPr>
-        <p:txBody>
-          <a:bodyPr wrap="square" lIns="0" tIns="0" rIns="0" bIns="0" rtlCol="0" anchor="t"/>
-          <a:lstStyle/>
-          <a:p>
-            <a:pPr indent="0" marL="0">
-              <a:buNone/>
-            </a:pPr>
-            <a:r>
-              <a:rPr lang="en-US" sz="1300" dirty="0">
-                <a:solidFill>
-                  <a:srgbClr val="26262F"/>
-                </a:solidFill>
-                <a:latin typeface="Calibri" pitchFamily="34" charset="0"/>
-                <a:ea typeface="Calibri" pitchFamily="34" charset="-122"/>
-                <a:cs typeface="Calibri" pitchFamily="34" charset="-120"/>
-              </a:rPr>
-              <a:t>Without the !important line, the paragraph is purple. With it, green — one of the few times !important is the right tool.</a:t>
-            </a:r>
-            <a:endParaRPr lang="en-US" sz="1300" dirty="0"/>
-          </a:p>
-        </p:txBody>
-      </p:sp>
-      <p:sp>
-        <p:nvSpPr>
-          <p:cNvPr id="7" name="Text 5"/>
-          <p:cNvSpPr txBox="1"/>
-          <p:nvPr/>
-        </p:nvSpPr>
-        <p:spPr>
-          <a:xfrm>
-            <a:off x="640080" y="6446520"/>
-            <a:ext cx="8686800" cy="292608"/>
-          </a:xfrm>
-          <a:prstGeom prst="rect">
-            <a:avLst/>
-          </a:prstGeom>
-          <a:noFill/>
-          <a:ln/>
-        </p:spPr>
-        <p:txBody>
-          <a:bodyPr wrap="square" lIns="0" tIns="0" rIns="0" bIns="0" rtlCol="0" anchor="ctr"/>
-          <a:lstStyle/>
-          <a:p>
-            <a:pPr algn="l" indent="0" marL="0">
-              <a:buNone/>
-            </a:pPr>
-            <a:r>
-              <a:rPr lang="en-US" sz="900" dirty="0">
-                <a:solidFill>
-                  <a:srgbClr val="5D5D72"/>
-                </a:solidFill>
-                <a:latin typeface="Calibri" pitchFamily="34" charset="0"/>
-                <a:ea typeface="Calibri" pitchFamily="34" charset="-122"/>
-                <a:cs typeface="Calibri" pitchFamily="34" charset="-120"/>
-              </a:rPr>
-              <a:t>Usman Akram  •  COMSATS University Islamabad</a:t>
-            </a:r>
-            <a:endParaRPr lang="en-US" sz="900" dirty="0"/>
-          </a:p>
-        </p:txBody>
-      </p:sp>
-      <p:sp>
-        <p:nvSpPr>
-          <p:cNvPr id="8" name="Text 6"/>
-          <p:cNvSpPr txBox="1"/>
-          <p:nvPr/>
-        </p:nvSpPr>
-        <p:spPr>
-          <a:xfrm>
-            <a:off x="11155680" y="6446520"/>
-            <a:ext cx="457200" cy="292608"/>
-          </a:xfrm>
-          <a:prstGeom prst="rect">
-            <a:avLst/>
-          </a:prstGeom>
-          <a:noFill/>
-          <a:ln/>
-        </p:spPr>
-        <p:txBody>
-          <a:bodyPr wrap="square" lIns="0" tIns="0" rIns="0" bIns="0" rtlCol="0" anchor="ctr"/>
-          <a:lstStyle/>
-          <a:p>
-            <a:pPr algn="r" indent="0" marL="0">
-              <a:buNone/>
-            </a:pPr>
-            <a:r>
-              <a:rPr lang="en-US" sz="900" dirty="0">
-                <a:solidFill>
-                  <a:srgbClr val="5D5D72"/>
-                </a:solidFill>
-                <a:latin typeface="Calibri" pitchFamily="34" charset="0"/>
-                <a:ea typeface="Calibri" pitchFamily="34" charset="-122"/>
-                <a:cs typeface="Calibri" pitchFamily="34" charset="-120"/>
-              </a:rPr>
               <a:t>23</a:t>
             </a:r>
             <a:endParaRPr lang="en-US" sz="900" dirty="0"/>
@@ -11127,7 +11915,7 @@
                 <a:ea typeface="Calibri" pitchFamily="34" charset="-122"/>
                 <a:cs typeface="Calibri" pitchFamily="34" charset="-120"/>
               </a:rPr>
-              <a:t>THE REAL FORMULA</a:t>
+              <a:t>EVERY CONFLICT CASE</a:t>
             </a:r>
             <a:endParaRPr lang="en-US" sz="1300" dirty="0"/>
           </a:p>
@@ -11166,6 +11954,346 @@
                 <a:ea typeface="Cambria" pitchFamily="34" charset="-122"/>
                 <a:cs typeface="Cambria" pitchFamily="34" charset="-120"/>
               </a:rPr>
+              <a:t>Case 5 in Code</a:t>
+            </a:r>
+            <a:endParaRPr lang="en-US" sz="3400" dirty="0"/>
+          </a:p>
+        </p:txBody>
+      </p:sp>
+      <p:sp>
+        <p:nvSpPr>
+          <p:cNvPr id="4" name="Shape 2"/>
+          <p:cNvSpPr/>
+          <p:nvPr/>
+        </p:nvSpPr>
+        <p:spPr>
+          <a:xfrm>
+            <a:off x="640080" y="1965960"/>
+            <a:ext cx="10911535" cy="1615440"/>
+          </a:xfrm>
+          <a:prstGeom prst="roundRect">
+            <a:avLst>
+              <a:gd name="adj" fmla="val 4528"/>
+            </a:avLst>
+          </a:prstGeom>
+          <a:solidFill>
+            <a:srgbClr val="1E1E4C"/>
+          </a:solidFill>
+          <a:ln/>
+        </p:spPr>
+      </p:sp>
+      <p:sp>
+        <p:nvSpPr>
+          <p:cNvPr id="5" name="Text 3"/>
+          <p:cNvSpPr txBox="1"/>
+          <p:nvPr/>
+        </p:nvSpPr>
+        <p:spPr>
+          <a:xfrm>
+            <a:off x="960120" y="2194560"/>
+            <a:ext cx="10271455" cy="1158240"/>
+          </a:xfrm>
+          <a:prstGeom prst="rect">
+            <a:avLst/>
+          </a:prstGeom>
+          <a:noFill/>
+          <a:ln/>
+        </p:spPr>
+        <p:txBody>
+          <a:bodyPr wrap="square" lIns="0" tIns="0" rIns="0" bIns="0" rtlCol="0" anchor="t"/>
+          <a:lstStyle/>
+          <a:p>
+            <a:pPr indent="0" marL="0">
+              <a:lnSpc>
+                <a:spcPct val="125000"/>
+              </a:lnSpc>
+              <a:buNone/>
+            </a:pPr>
+            <a:r>
+              <a:rPr lang="en-US" sz="1400" dirty="0">
+                <a:solidFill>
+                  <a:srgbClr val="C9D3F5"/>
+                </a:solidFill>
+                <a:latin typeface="Courier New" pitchFamily="34" charset="0"/>
+                <a:ea typeface="Courier New" pitchFamily="34" charset="-122"/>
+                <a:cs typeface="Courier New" pitchFamily="34" charset="-120"/>
+              </a:rPr>
+              <a:t>&lt;p id="lead" style="color: purple;"&gt;...&lt;/p&gt;</a:t>
+            </a:r>
+            <a:endParaRPr lang="en-US" sz="1400" dirty="0"/>
+          </a:p>
+          <a:p>
+            <a:pPr indent="0" marL="0">
+              <a:lnSpc>
+                <a:spcPct val="125000"/>
+              </a:lnSpc>
+              <a:buNone/>
+            </a:pPr>
+            <a:endParaRPr lang="en-US" sz="1400" dirty="0"/>
+          </a:p>
+          <a:p>
+            <a:pPr indent="0" marL="0">
+              <a:lnSpc>
+                <a:spcPct val="125000"/>
+              </a:lnSpc>
+              <a:buNone/>
+            </a:pPr>
+            <a:r>
+              <a:rPr lang="en-US" sz="1400" dirty="0">
+                <a:solidFill>
+                  <a:srgbClr val="C9D3F5"/>
+                </a:solidFill>
+                <a:latin typeface="Courier New" pitchFamily="34" charset="0"/>
+                <a:ea typeface="Courier New" pitchFamily="34" charset="-122"/>
+                <a:cs typeface="Courier New" pitchFamily="34" charset="-120"/>
+              </a:rPr>
+              <a:t>#lead { color: blue; }              /* loses to inline */</a:t>
+            </a:r>
+            <a:endParaRPr lang="en-US" sz="1400" dirty="0"/>
+          </a:p>
+          <a:p>
+            <a:pPr indent="0" marL="0">
+              <a:lnSpc>
+                <a:spcPct val="125000"/>
+              </a:lnSpc>
+              <a:buNone/>
+            </a:pPr>
+            <a:r>
+              <a:rPr lang="en-US" sz="1400" dirty="0">
+                <a:solidFill>
+                  <a:srgbClr val="C9D3F5"/>
+                </a:solidFill>
+                <a:latin typeface="Courier New" pitchFamily="34" charset="0"/>
+                <a:ea typeface="Courier New" pitchFamily="34" charset="-122"/>
+                <a:cs typeface="Courier New" pitchFamily="34" charset="-120"/>
+              </a:rPr>
+              <a:t>#lead { color: green !important; } /* beats inline   */</a:t>
+            </a:r>
+            <a:endParaRPr lang="en-US" sz="1400" dirty="0"/>
+          </a:p>
+        </p:txBody>
+      </p:sp>
+      <p:sp>
+        <p:nvSpPr>
+          <p:cNvPr id="6" name="Text 4"/>
+          <p:cNvSpPr txBox="1"/>
+          <p:nvPr/>
+        </p:nvSpPr>
+        <p:spPr>
+          <a:xfrm>
+            <a:off x="640080" y="3810000"/>
+            <a:ext cx="10911535" cy="2453640"/>
+          </a:xfrm>
+          <a:prstGeom prst="rect">
+            <a:avLst/>
+          </a:prstGeom>
+          <a:noFill/>
+          <a:ln/>
+        </p:spPr>
+        <p:txBody>
+          <a:bodyPr wrap="square" lIns="0" tIns="0" rIns="0" bIns="0" rtlCol="0" anchor="t"/>
+          <a:lstStyle/>
+          <a:p>
+            <a:pPr indent="0" marL="0">
+              <a:buNone/>
+            </a:pPr>
+            <a:r>
+              <a:rPr lang="en-US" sz="1300" dirty="0">
+                <a:solidFill>
+                  <a:srgbClr val="26262F"/>
+                </a:solidFill>
+                <a:latin typeface="Calibri" pitchFamily="34" charset="0"/>
+                <a:ea typeface="Calibri" pitchFamily="34" charset="-122"/>
+                <a:cs typeface="Calibri" pitchFamily="34" charset="-120"/>
+              </a:rPr>
+              <a:t>Without the !important line, the paragraph is purple. With it, green — one of the few times !important is the right tool.</a:t>
+            </a:r>
+            <a:endParaRPr lang="en-US" sz="1300" dirty="0"/>
+          </a:p>
+        </p:txBody>
+      </p:sp>
+      <p:sp>
+        <p:nvSpPr>
+          <p:cNvPr id="7" name="Text 5"/>
+          <p:cNvSpPr txBox="1"/>
+          <p:nvPr/>
+        </p:nvSpPr>
+        <p:spPr>
+          <a:xfrm>
+            <a:off x="640080" y="6446520"/>
+            <a:ext cx="8686800" cy="292608"/>
+          </a:xfrm>
+          <a:prstGeom prst="rect">
+            <a:avLst/>
+          </a:prstGeom>
+          <a:noFill/>
+          <a:ln/>
+        </p:spPr>
+        <p:txBody>
+          <a:bodyPr wrap="square" lIns="0" tIns="0" rIns="0" bIns="0" rtlCol="0" anchor="ctr"/>
+          <a:lstStyle/>
+          <a:p>
+            <a:pPr algn="l" indent="0" marL="0">
+              <a:buNone/>
+            </a:pPr>
+            <a:r>
+              <a:rPr lang="en-US" sz="900" dirty="0">
+                <a:solidFill>
+                  <a:srgbClr val="5D5D72"/>
+                </a:solidFill>
+                <a:latin typeface="Calibri" pitchFamily="34" charset="0"/>
+                <a:ea typeface="Calibri" pitchFamily="34" charset="-122"/>
+                <a:cs typeface="Calibri" pitchFamily="34" charset="-120"/>
+              </a:rPr>
+              <a:t>Usman Akram  •  COMSATS University Islamabad</a:t>
+            </a:r>
+            <a:endParaRPr lang="en-US" sz="900" dirty="0"/>
+          </a:p>
+        </p:txBody>
+      </p:sp>
+      <p:sp>
+        <p:nvSpPr>
+          <p:cNvPr id="8" name="Text 6"/>
+          <p:cNvSpPr txBox="1"/>
+          <p:nvPr/>
+        </p:nvSpPr>
+        <p:spPr>
+          <a:xfrm>
+            <a:off x="11155680" y="6446520"/>
+            <a:ext cx="457200" cy="292608"/>
+          </a:xfrm>
+          <a:prstGeom prst="rect">
+            <a:avLst/>
+          </a:prstGeom>
+          <a:noFill/>
+          <a:ln/>
+        </p:spPr>
+        <p:txBody>
+          <a:bodyPr wrap="square" lIns="0" tIns="0" rIns="0" bIns="0" rtlCol="0" anchor="ctr"/>
+          <a:lstStyle/>
+          <a:p>
+            <a:pPr algn="r" indent="0" marL="0">
+              <a:buNone/>
+            </a:pPr>
+            <a:r>
+              <a:rPr lang="en-US" sz="900" dirty="0">
+                <a:solidFill>
+                  <a:srgbClr val="5D5D72"/>
+                </a:solidFill>
+                <a:latin typeface="Calibri" pitchFamily="34" charset="0"/>
+                <a:ea typeface="Calibri" pitchFamily="34" charset="-122"/>
+                <a:cs typeface="Calibri" pitchFamily="34" charset="-120"/>
+              </a:rPr>
+              <a:t>24</a:t>
+            </a:r>
+            <a:endParaRPr lang="en-US" sz="900" dirty="0"/>
+          </a:p>
+        </p:txBody>
+      </p:sp>
+    </p:spTree>
+  </p:cSld>
+  <p:clrMapOvr>
+    <a:masterClrMapping/>
+  </p:clrMapOvr>
+</p:sld>
+</file>
+
+<file path=ppt/slides/slide25.xml><?xml version="1.0" encoding="utf-8"?>
+<p:sld xmlns:a="http://schemas.openxmlformats.org/drawingml/2006/main" xmlns:r="http://schemas.openxmlformats.org/officeDocument/2006/relationships" xmlns:p="http://schemas.openxmlformats.org/presentationml/2006/main">
+  <p:cSld name="Slide 25">
+    <p:bg>
+      <p:bgPr>
+        <a:solidFill>
+          <a:srgbClr val="FFFFFF"/>
+        </a:solidFill>
+      </p:bgPr>
+    </p:bg>
+    <p:spTree>
+      <p:nvGrpSpPr>
+        <p:cNvPr id="1" name=""/>
+        <p:cNvGrpSpPr/>
+        <p:nvPr/>
+      </p:nvGrpSpPr>
+      <p:grpSpPr>
+        <a:xfrm>
+          <a:off x="0" y="0"/>
+          <a:ext cx="0" cy="0"/>
+          <a:chOff x="0" y="0"/>
+          <a:chExt cx="0" cy="0"/>
+        </a:xfrm>
+      </p:grpSpPr>
+      <p:sp>
+        <p:nvSpPr>
+          <p:cNvPr id="2" name="Text 0"/>
+          <p:cNvSpPr txBox="1"/>
+          <p:nvPr/>
+        </p:nvSpPr>
+        <p:spPr>
+          <a:xfrm>
+            <a:off x="640080" y="457200"/>
+            <a:ext cx="10058400" cy="365760"/>
+          </a:xfrm>
+          <a:prstGeom prst="rect">
+            <a:avLst/>
+          </a:prstGeom>
+          <a:noFill/>
+          <a:ln/>
+        </p:spPr>
+        <p:txBody>
+          <a:bodyPr wrap="square" lIns="0" tIns="0" rIns="0" bIns="0" rtlCol="0" anchor="ctr"/>
+          <a:lstStyle/>
+          <a:p>
+            <a:pPr algn="l" indent="0" marL="0">
+              <a:buNone/>
+            </a:pPr>
+            <a:r>
+              <a:rPr lang="en-US" sz="1300" b="1" spc="300" kern="0" dirty="0">
+                <a:solidFill>
+                  <a:srgbClr val="FF8A3D"/>
+                </a:solidFill>
+                <a:latin typeface="Calibri" pitchFamily="34" charset="0"/>
+                <a:ea typeface="Calibri" pitchFamily="34" charset="-122"/>
+                <a:cs typeface="Calibri" pitchFamily="34" charset="-120"/>
+              </a:rPr>
+              <a:t>THE REAL FORMULA</a:t>
+            </a:r>
+            <a:endParaRPr lang="en-US" sz="1300" dirty="0"/>
+          </a:p>
+        </p:txBody>
+      </p:sp>
+      <p:sp>
+        <p:nvSpPr>
+          <p:cNvPr id="3" name="Text 1"/>
+          <p:cNvSpPr txBox="1"/>
+          <p:nvPr/>
+        </p:nvSpPr>
+        <p:spPr>
+          <a:xfrm>
+            <a:off x="640080" y="841248"/>
+            <a:ext cx="10881360" cy="914400"/>
+          </a:xfrm>
+          <a:prstGeom prst="rect">
+            <a:avLst/>
+          </a:prstGeom>
+          <a:noFill/>
+          <a:ln/>
+        </p:spPr>
+        <p:txBody>
+          <a:bodyPr wrap="square" lIns="0" tIns="0" rIns="0" bIns="0" rtlCol="0" anchor="ctr"/>
+          <a:lstStyle/>
+          <a:p>
+            <a:pPr algn="l" indent="0" marL="0">
+              <a:buNone/>
+            </a:pPr>
+            <a:r>
+              <a:rPr lang="en-US" sz="3400" b="1" dirty="0">
+                <a:solidFill>
+                  <a:srgbClr val="2B2B7A"/>
+                </a:solidFill>
+                <a:latin typeface="Cambria" pitchFamily="34" charset="0"/>
+                <a:ea typeface="Cambria" pitchFamily="34" charset="-122"/>
+                <a:cs typeface="Cambria" pitchFamily="34" charset="-120"/>
+              </a:rPr>
               <a:t>The 4-Part Specificity Score</a:t>
             </a:r>
             <a:endParaRPr lang="en-US" sz="3400" dirty="0"/>
@@ -11174,7 +12302,7 @@
       </p:sp>
       <p:graphicFrame>
         <p:nvGraphicFramePr>
-          <p:cNvPr id="25" name="Table 0"/>
+          <p:cNvPr id="26" name="Table 0"/>
           <p:cNvGraphicFramePr>
             <a:graphicFrameLocks noGrp="1"/>
           </p:cNvGraphicFramePr>
@@ -12003,466 +13131,6 @@
                 <a:ea typeface="Calibri" pitchFamily="34" charset="-122"/>
                 <a:cs typeface="Calibri" pitchFamily="34" charset="-120"/>
               </a:rPr>
-              <a:t>24</a:t>
-            </a:r>
-            <a:endParaRPr lang="en-US" sz="900" dirty="0"/>
-          </a:p>
-        </p:txBody>
-      </p:sp>
-    </p:spTree>
-  </p:cSld>
-  <p:clrMapOvr>
-    <a:masterClrMapping/>
-  </p:clrMapOvr>
-</p:sld>
-</file>
-
-<file path=ppt/slides/slide25.xml><?xml version="1.0" encoding="utf-8"?>
-<p:sld xmlns:a="http://schemas.openxmlformats.org/drawingml/2006/main" xmlns:r="http://schemas.openxmlformats.org/officeDocument/2006/relationships" xmlns:p="http://schemas.openxmlformats.org/presentationml/2006/main">
-  <p:cSld name="Slide 25">
-    <p:bg>
-      <p:bgPr>
-        <a:solidFill>
-          <a:srgbClr val="FFFFFF"/>
-        </a:solidFill>
-      </p:bgPr>
-    </p:bg>
-    <p:spTree>
-      <p:nvGrpSpPr>
-        <p:cNvPr id="1" name=""/>
-        <p:cNvGrpSpPr/>
-        <p:nvPr/>
-      </p:nvGrpSpPr>
-      <p:grpSpPr>
-        <a:xfrm>
-          <a:off x="0" y="0"/>
-          <a:ext cx="0" cy="0"/>
-          <a:chOff x="0" y="0"/>
-          <a:chExt cx="0" cy="0"/>
-        </a:xfrm>
-      </p:grpSpPr>
-      <p:sp>
-        <p:nvSpPr>
-          <p:cNvPr id="2" name="Text 0"/>
-          <p:cNvSpPr txBox="1"/>
-          <p:nvPr/>
-        </p:nvSpPr>
-        <p:spPr>
-          <a:xfrm>
-            <a:off x="640080" y="457200"/>
-            <a:ext cx="10058400" cy="365760"/>
-          </a:xfrm>
-          <a:prstGeom prst="rect">
-            <a:avLst/>
-          </a:prstGeom>
-          <a:noFill/>
-          <a:ln/>
-        </p:spPr>
-        <p:txBody>
-          <a:bodyPr wrap="square" lIns="0" tIns="0" rIns="0" bIns="0" rtlCol="0" anchor="ctr"/>
-          <a:lstStyle/>
-          <a:p>
-            <a:pPr algn="l" indent="0" marL="0">
-              <a:buNone/>
-            </a:pPr>
-            <a:r>
-              <a:rPr lang="en-US" sz="1300" b="1" spc="300" kern="0" dirty="0">
-                <a:solidFill>
-                  <a:srgbClr val="FF8A3D"/>
-                </a:solidFill>
-                <a:latin typeface="Calibri" pitchFamily="34" charset="0"/>
-                <a:ea typeface="Calibri" pitchFamily="34" charset="-122"/>
-                <a:cs typeface="Calibri" pitchFamily="34" charset="-120"/>
-              </a:rPr>
-              <a:t>INHERITANCE</a:t>
-            </a:r>
-            <a:endParaRPr lang="en-US" sz="1300" dirty="0"/>
-          </a:p>
-        </p:txBody>
-      </p:sp>
-      <p:sp>
-        <p:nvSpPr>
-          <p:cNvPr id="3" name="Text 1"/>
-          <p:cNvSpPr txBox="1"/>
-          <p:nvPr/>
-        </p:nvSpPr>
-        <p:spPr>
-          <a:xfrm>
-            <a:off x="640080" y="841248"/>
-            <a:ext cx="10881360" cy="914400"/>
-          </a:xfrm>
-          <a:prstGeom prst="rect">
-            <a:avLst/>
-          </a:prstGeom>
-          <a:noFill/>
-          <a:ln/>
-        </p:spPr>
-        <p:txBody>
-          <a:bodyPr wrap="square" lIns="0" tIns="0" rIns="0" bIns="0" rtlCol="0" anchor="ctr"/>
-          <a:lstStyle/>
-          <a:p>
-            <a:pPr algn="l" indent="0" marL="0">
-              <a:buNone/>
-            </a:pPr>
-            <a:r>
-              <a:rPr lang="en-US" sz="3400" b="1" dirty="0">
-                <a:solidFill>
-                  <a:srgbClr val="2B2B7A"/>
-                </a:solidFill>
-                <a:latin typeface="Cambria" pitchFamily="34" charset="0"/>
-                <a:ea typeface="Cambria" pitchFamily="34" charset="-122"/>
-                <a:cs typeface="Cambria" pitchFamily="34" charset="-120"/>
-              </a:rPr>
-              <a:t>An Example Where Inheritance Does NOT Happen</a:t>
-            </a:r>
-            <a:endParaRPr lang="en-US" sz="3400" dirty="0"/>
-          </a:p>
-        </p:txBody>
-      </p:sp>
-      <p:sp>
-        <p:nvSpPr>
-          <p:cNvPr id="4" name="Shape 2"/>
-          <p:cNvSpPr/>
-          <p:nvPr/>
-        </p:nvSpPr>
-        <p:spPr>
-          <a:xfrm>
-            <a:off x="640080" y="1965960"/>
-            <a:ext cx="10911535" cy="3291840"/>
-          </a:xfrm>
-          <a:prstGeom prst="roundRect">
-            <a:avLst>
-              <a:gd name="adj" fmla="val 2222"/>
-            </a:avLst>
-          </a:prstGeom>
-          <a:solidFill>
-            <a:srgbClr val="1E1E4C"/>
-          </a:solidFill>
-          <a:ln/>
-        </p:spPr>
-      </p:sp>
-      <p:sp>
-        <p:nvSpPr>
-          <p:cNvPr id="5" name="Text 3"/>
-          <p:cNvSpPr txBox="1"/>
-          <p:nvPr/>
-        </p:nvSpPr>
-        <p:spPr>
-          <a:xfrm>
-            <a:off x="960120" y="2194560"/>
-            <a:ext cx="10271455" cy="2834640"/>
-          </a:xfrm>
-          <a:prstGeom prst="rect">
-            <a:avLst/>
-          </a:prstGeom>
-          <a:noFill/>
-          <a:ln/>
-        </p:spPr>
-        <p:txBody>
-          <a:bodyPr wrap="square" lIns="0" tIns="0" rIns="0" bIns="0" rtlCol="0" anchor="t"/>
-          <a:lstStyle/>
-          <a:p>
-            <a:pPr indent="0" marL="0">
-              <a:lnSpc>
-                <a:spcPct val="125000"/>
-              </a:lnSpc>
-              <a:buNone/>
-            </a:pPr>
-            <a:r>
-              <a:rPr lang="en-US" sz="1400" dirty="0">
-                <a:solidFill>
-                  <a:srgbClr val="C9D3F5"/>
-                </a:solidFill>
-                <a:latin typeface="Courier New" pitchFamily="34" charset="0"/>
-                <a:ea typeface="Courier New" pitchFamily="34" charset="-122"/>
-                <a:cs typeface="Courier New" pitchFamily="34" charset="-120"/>
-              </a:rPr>
-              <a:t>.parent {</a:t>
-            </a:r>
-            <a:endParaRPr lang="en-US" sz="1400" dirty="0"/>
-          </a:p>
-          <a:p>
-            <a:pPr indent="0" marL="0">
-              <a:lnSpc>
-                <a:spcPct val="125000"/>
-              </a:lnSpc>
-              <a:buNone/>
-            </a:pPr>
-            <a:r>
-              <a:rPr lang="en-US" sz="1400" dirty="0">
-                <a:solidFill>
-                  <a:srgbClr val="C9D3F5"/>
-                </a:solidFill>
-                <a:latin typeface="Courier New" pitchFamily="34" charset="0"/>
-                <a:ea typeface="Courier New" pitchFamily="34" charset="-122"/>
-                <a:cs typeface="Courier New" pitchFamily="34" charset="-120"/>
-              </a:rPr>
-              <a:t>  border: 4px solid crimson;</a:t>
-            </a:r>
-            <a:endParaRPr lang="en-US" sz="1400" dirty="0"/>
-          </a:p>
-          <a:p>
-            <a:pPr indent="0" marL="0">
-              <a:lnSpc>
-                <a:spcPct val="125000"/>
-              </a:lnSpc>
-              <a:buNone/>
-            </a:pPr>
-            <a:r>
-              <a:rPr lang="en-US" sz="1400" dirty="0">
-                <a:solidFill>
-                  <a:srgbClr val="C9D3F5"/>
-                </a:solidFill>
-                <a:latin typeface="Courier New" pitchFamily="34" charset="0"/>
-                <a:ea typeface="Courier New" pitchFamily="34" charset="-122"/>
-                <a:cs typeface="Courier New" pitchFamily="34" charset="-120"/>
-              </a:rPr>
-              <a:t>  padding: 20px;</a:t>
-            </a:r>
-            <a:endParaRPr lang="en-US" sz="1400" dirty="0"/>
-          </a:p>
-          <a:p>
-            <a:pPr indent="0" marL="0">
-              <a:lnSpc>
-                <a:spcPct val="125000"/>
-              </a:lnSpc>
-              <a:buNone/>
-            </a:pPr>
-            <a:r>
-              <a:rPr lang="en-US" sz="1400" dirty="0">
-                <a:solidFill>
-                  <a:srgbClr val="C9D3F5"/>
-                </a:solidFill>
-                <a:latin typeface="Courier New" pitchFamily="34" charset="0"/>
-                <a:ea typeface="Courier New" pitchFamily="34" charset="-122"/>
-                <a:cs typeface="Courier New" pitchFamily="34" charset="-120"/>
-              </a:rPr>
-              <a:t>  color: darkblue;</a:t>
-            </a:r>
-            <a:endParaRPr lang="en-US" sz="1400" dirty="0"/>
-          </a:p>
-          <a:p>
-            <a:pPr indent="0" marL="0">
-              <a:lnSpc>
-                <a:spcPct val="125000"/>
-              </a:lnSpc>
-              <a:buNone/>
-            </a:pPr>
-            <a:r>
-              <a:rPr lang="en-US" sz="1400" dirty="0">
-                <a:solidFill>
-                  <a:srgbClr val="C9D3F5"/>
-                </a:solidFill>
-                <a:latin typeface="Courier New" pitchFamily="34" charset="0"/>
-                <a:ea typeface="Courier New" pitchFamily="34" charset="-122"/>
-                <a:cs typeface="Courier New" pitchFamily="34" charset="-120"/>
-              </a:rPr>
-              <a:t>}</a:t>
-            </a:r>
-            <a:endParaRPr lang="en-US" sz="1400" dirty="0"/>
-          </a:p>
-          <a:p>
-            <a:pPr indent="0" marL="0">
-              <a:lnSpc>
-                <a:spcPct val="125000"/>
-              </a:lnSpc>
-              <a:buNone/>
-            </a:pPr>
-            <a:endParaRPr lang="en-US" sz="1400" dirty="0"/>
-          </a:p>
-          <a:p>
-            <a:pPr indent="0" marL="0">
-              <a:lnSpc>
-                <a:spcPct val="125000"/>
-              </a:lnSpc>
-              <a:buNone/>
-            </a:pPr>
-            <a:r>
-              <a:rPr lang="en-US" sz="1400" dirty="0">
-                <a:solidFill>
-                  <a:srgbClr val="C9D3F5"/>
-                </a:solidFill>
-                <a:latin typeface="Courier New" pitchFamily="34" charset="0"/>
-                <a:ea typeface="Courier New" pitchFamily="34" charset="-122"/>
-                <a:cs typeface="Courier New" pitchFamily="34" charset="-120"/>
-              </a:rPr>
-              <a:t>&lt;div class="parent"&gt;</a:t>
-            </a:r>
-            <a:endParaRPr lang="en-US" sz="1400" dirty="0"/>
-          </a:p>
-          <a:p>
-            <a:pPr indent="0" marL="0">
-              <a:lnSpc>
-                <a:spcPct val="125000"/>
-              </a:lnSpc>
-              <a:buNone/>
-            </a:pPr>
-            <a:r>
-              <a:rPr lang="en-US" sz="1400" dirty="0">
-                <a:solidFill>
-                  <a:srgbClr val="C9D3F5"/>
-                </a:solidFill>
-                <a:latin typeface="Courier New" pitchFamily="34" charset="0"/>
-                <a:ea typeface="Courier New" pitchFamily="34" charset="-122"/>
-                <a:cs typeface="Courier New" pitchFamily="34" charset="-120"/>
-              </a:rPr>
-              <a:t>  Parent text is dark blue.</a:t>
-            </a:r>
-            <a:endParaRPr lang="en-US" sz="1400" dirty="0"/>
-          </a:p>
-          <a:p>
-            <a:pPr indent="0" marL="0">
-              <a:lnSpc>
-                <a:spcPct val="125000"/>
-              </a:lnSpc>
-              <a:buNone/>
-            </a:pPr>
-            <a:r>
-              <a:rPr lang="en-US" sz="1400" dirty="0">
-                <a:solidFill>
-                  <a:srgbClr val="C9D3F5"/>
-                </a:solidFill>
-                <a:latin typeface="Courier New" pitchFamily="34" charset="0"/>
-                <a:ea typeface="Courier New" pitchFamily="34" charset="-122"/>
-                <a:cs typeface="Courier New" pitchFamily="34" charset="-120"/>
-              </a:rPr>
-              <a:t>  &lt;p&gt;Child paragraph is dark blue too.&lt;/p&gt;</a:t>
-            </a:r>
-            <a:endParaRPr lang="en-US" sz="1400" dirty="0"/>
-          </a:p>
-          <a:p>
-            <a:pPr indent="0" marL="0">
-              <a:lnSpc>
-                <a:spcPct val="125000"/>
-              </a:lnSpc>
-              <a:buNone/>
-            </a:pPr>
-            <a:r>
-              <a:rPr lang="en-US" sz="1400" dirty="0">
-                <a:solidFill>
-                  <a:srgbClr val="C9D3F5"/>
-                </a:solidFill>
-                <a:latin typeface="Courier New" pitchFamily="34" charset="0"/>
-                <a:ea typeface="Courier New" pitchFamily="34" charset="-122"/>
-                <a:cs typeface="Courier New" pitchFamily="34" charset="-120"/>
-              </a:rPr>
-              <a:t>&lt;/div&gt;</a:t>
-            </a:r>
-            <a:endParaRPr lang="en-US" sz="1400" dirty="0"/>
-          </a:p>
-        </p:txBody>
-      </p:sp>
-      <p:sp>
-        <p:nvSpPr>
-          <p:cNvPr id="6" name="Text 4"/>
-          <p:cNvSpPr txBox="1"/>
-          <p:nvPr/>
-        </p:nvSpPr>
-        <p:spPr>
-          <a:xfrm>
-            <a:off x="640080" y="5486400"/>
-            <a:ext cx="10911535" cy="777240"/>
-          </a:xfrm>
-          <a:prstGeom prst="rect">
-            <a:avLst/>
-          </a:prstGeom>
-          <a:noFill/>
-          <a:ln/>
-        </p:spPr>
-        <p:txBody>
-          <a:bodyPr wrap="square" lIns="0" tIns="0" rIns="0" bIns="0" rtlCol="0" anchor="t"/>
-          <a:lstStyle/>
-          <a:p>
-            <a:pPr indent="0" marL="0">
-              <a:buNone/>
-            </a:pPr>
-            <a:r>
-              <a:rPr lang="en-US" sz="1300" dirty="0">
-                <a:solidFill>
-                  <a:srgbClr val="26262F"/>
-                </a:solidFill>
-                <a:latin typeface="Calibri" pitchFamily="34" charset="0"/>
-                <a:ea typeface="Calibri" pitchFamily="34" charset="-122"/>
-                <a:cs typeface="Calibri" pitchFamily="34" charset="-120"/>
-              </a:rPr>
-              <a:t>color inherits, so the &lt;p&gt; is dark blue too. border and padding do NOT inherit — only .parent itself gets the crimson outline and padding.</a:t>
-            </a:r>
-            <a:endParaRPr lang="en-US" sz="1300" dirty="0"/>
-          </a:p>
-        </p:txBody>
-      </p:sp>
-      <p:sp>
-        <p:nvSpPr>
-          <p:cNvPr id="7" name="Text 5"/>
-          <p:cNvSpPr txBox="1"/>
-          <p:nvPr/>
-        </p:nvSpPr>
-        <p:spPr>
-          <a:xfrm>
-            <a:off x="640080" y="6446520"/>
-            <a:ext cx="8686800" cy="292608"/>
-          </a:xfrm>
-          <a:prstGeom prst="rect">
-            <a:avLst/>
-          </a:prstGeom>
-          <a:noFill/>
-          <a:ln/>
-        </p:spPr>
-        <p:txBody>
-          <a:bodyPr wrap="square" lIns="0" tIns="0" rIns="0" bIns="0" rtlCol="0" anchor="ctr"/>
-          <a:lstStyle/>
-          <a:p>
-            <a:pPr algn="l" indent="0" marL="0">
-              <a:buNone/>
-            </a:pPr>
-            <a:r>
-              <a:rPr lang="en-US" sz="900" dirty="0">
-                <a:solidFill>
-                  <a:srgbClr val="5D5D72"/>
-                </a:solidFill>
-                <a:latin typeface="Calibri" pitchFamily="34" charset="0"/>
-                <a:ea typeface="Calibri" pitchFamily="34" charset="-122"/>
-                <a:cs typeface="Calibri" pitchFamily="34" charset="-120"/>
-              </a:rPr>
-              <a:t>Usman Akram  •  COMSATS University Islamabad</a:t>
-            </a:r>
-            <a:endParaRPr lang="en-US" sz="900" dirty="0"/>
-          </a:p>
-        </p:txBody>
-      </p:sp>
-      <p:sp>
-        <p:nvSpPr>
-          <p:cNvPr id="8" name="Text 6"/>
-          <p:cNvSpPr txBox="1"/>
-          <p:nvPr/>
-        </p:nvSpPr>
-        <p:spPr>
-          <a:xfrm>
-            <a:off x="11155680" y="6446520"/>
-            <a:ext cx="457200" cy="292608"/>
-          </a:xfrm>
-          <a:prstGeom prst="rect">
-            <a:avLst/>
-          </a:prstGeom>
-          <a:noFill/>
-          <a:ln/>
-        </p:spPr>
-        <p:txBody>
-          <a:bodyPr wrap="square" lIns="0" tIns="0" rIns="0" bIns="0" rtlCol="0" anchor="ctr"/>
-          <a:lstStyle/>
-          <a:p>
-            <a:pPr algn="r" indent="0" marL="0">
-              <a:buNone/>
-            </a:pPr>
-            <a:r>
-              <a:rPr lang="en-US" sz="900" dirty="0">
-                <a:solidFill>
-                  <a:srgbClr val="5D5D72"/>
-                </a:solidFill>
-                <a:latin typeface="Calibri" pitchFamily="34" charset="0"/>
-                <a:ea typeface="Calibri" pitchFamily="34" charset="-122"/>
-                <a:cs typeface="Calibri" pitchFamily="34" charset="-120"/>
-              </a:rPr>
               <a:t>25</a:t>
             </a:r>
             <a:endParaRPr lang="en-US" sz="900" dirty="0"/>
@@ -12573,6 +13241,466 @@
                 <a:ea typeface="Cambria" pitchFamily="34" charset="-122"/>
                 <a:cs typeface="Cambria" pitchFamily="34" charset="-120"/>
               </a:rPr>
+              <a:t>An Example Where Inheritance Does NOT Happen</a:t>
+            </a:r>
+            <a:endParaRPr lang="en-US" sz="3400" dirty="0"/>
+          </a:p>
+        </p:txBody>
+      </p:sp>
+      <p:sp>
+        <p:nvSpPr>
+          <p:cNvPr id="4" name="Shape 2"/>
+          <p:cNvSpPr/>
+          <p:nvPr/>
+        </p:nvSpPr>
+        <p:spPr>
+          <a:xfrm>
+            <a:off x="640080" y="1965960"/>
+            <a:ext cx="10911535" cy="3215640"/>
+          </a:xfrm>
+          <a:prstGeom prst="roundRect">
+            <a:avLst>
+              <a:gd name="adj" fmla="val 2275"/>
+            </a:avLst>
+          </a:prstGeom>
+          <a:solidFill>
+            <a:srgbClr val="1E1E4C"/>
+          </a:solidFill>
+          <a:ln/>
+        </p:spPr>
+      </p:sp>
+      <p:sp>
+        <p:nvSpPr>
+          <p:cNvPr id="5" name="Text 3"/>
+          <p:cNvSpPr txBox="1"/>
+          <p:nvPr/>
+        </p:nvSpPr>
+        <p:spPr>
+          <a:xfrm>
+            <a:off x="960120" y="2194560"/>
+            <a:ext cx="10271455" cy="2758440"/>
+          </a:xfrm>
+          <a:prstGeom prst="rect">
+            <a:avLst/>
+          </a:prstGeom>
+          <a:noFill/>
+          <a:ln/>
+        </p:spPr>
+        <p:txBody>
+          <a:bodyPr wrap="square" lIns="0" tIns="0" rIns="0" bIns="0" rtlCol="0" anchor="t"/>
+          <a:lstStyle/>
+          <a:p>
+            <a:pPr indent="0" marL="0">
+              <a:lnSpc>
+                <a:spcPct val="125000"/>
+              </a:lnSpc>
+              <a:buNone/>
+            </a:pPr>
+            <a:r>
+              <a:rPr lang="en-US" sz="1400" dirty="0">
+                <a:solidFill>
+                  <a:srgbClr val="C9D3F5"/>
+                </a:solidFill>
+                <a:latin typeface="Courier New" pitchFamily="34" charset="0"/>
+                <a:ea typeface="Courier New" pitchFamily="34" charset="-122"/>
+                <a:cs typeface="Courier New" pitchFamily="34" charset="-120"/>
+              </a:rPr>
+              <a:t>.parent {</a:t>
+            </a:r>
+            <a:endParaRPr lang="en-US" sz="1400" dirty="0"/>
+          </a:p>
+          <a:p>
+            <a:pPr indent="0" marL="0">
+              <a:lnSpc>
+                <a:spcPct val="125000"/>
+              </a:lnSpc>
+              <a:buNone/>
+            </a:pPr>
+            <a:r>
+              <a:rPr lang="en-US" sz="1400" dirty="0">
+                <a:solidFill>
+                  <a:srgbClr val="C9D3F5"/>
+                </a:solidFill>
+                <a:latin typeface="Courier New" pitchFamily="34" charset="0"/>
+                <a:ea typeface="Courier New" pitchFamily="34" charset="-122"/>
+                <a:cs typeface="Courier New" pitchFamily="34" charset="-120"/>
+              </a:rPr>
+              <a:t>  border: 4px solid crimson;</a:t>
+            </a:r>
+            <a:endParaRPr lang="en-US" sz="1400" dirty="0"/>
+          </a:p>
+          <a:p>
+            <a:pPr indent="0" marL="0">
+              <a:lnSpc>
+                <a:spcPct val="125000"/>
+              </a:lnSpc>
+              <a:buNone/>
+            </a:pPr>
+            <a:r>
+              <a:rPr lang="en-US" sz="1400" dirty="0">
+                <a:solidFill>
+                  <a:srgbClr val="C9D3F5"/>
+                </a:solidFill>
+                <a:latin typeface="Courier New" pitchFamily="34" charset="0"/>
+                <a:ea typeface="Courier New" pitchFamily="34" charset="-122"/>
+                <a:cs typeface="Courier New" pitchFamily="34" charset="-120"/>
+              </a:rPr>
+              <a:t>  padding: 20px;</a:t>
+            </a:r>
+            <a:endParaRPr lang="en-US" sz="1400" dirty="0"/>
+          </a:p>
+          <a:p>
+            <a:pPr indent="0" marL="0">
+              <a:lnSpc>
+                <a:spcPct val="125000"/>
+              </a:lnSpc>
+              <a:buNone/>
+            </a:pPr>
+            <a:r>
+              <a:rPr lang="en-US" sz="1400" dirty="0">
+                <a:solidFill>
+                  <a:srgbClr val="C9D3F5"/>
+                </a:solidFill>
+                <a:latin typeface="Courier New" pitchFamily="34" charset="0"/>
+                <a:ea typeface="Courier New" pitchFamily="34" charset="-122"/>
+                <a:cs typeface="Courier New" pitchFamily="34" charset="-120"/>
+              </a:rPr>
+              <a:t>  color: darkblue;</a:t>
+            </a:r>
+            <a:endParaRPr lang="en-US" sz="1400" dirty="0"/>
+          </a:p>
+          <a:p>
+            <a:pPr indent="0" marL="0">
+              <a:lnSpc>
+                <a:spcPct val="125000"/>
+              </a:lnSpc>
+              <a:buNone/>
+            </a:pPr>
+            <a:r>
+              <a:rPr lang="en-US" sz="1400" dirty="0">
+                <a:solidFill>
+                  <a:srgbClr val="C9D3F5"/>
+                </a:solidFill>
+                <a:latin typeface="Courier New" pitchFamily="34" charset="0"/>
+                <a:ea typeface="Courier New" pitchFamily="34" charset="-122"/>
+                <a:cs typeface="Courier New" pitchFamily="34" charset="-120"/>
+              </a:rPr>
+              <a:t>}</a:t>
+            </a:r>
+            <a:endParaRPr lang="en-US" sz="1400" dirty="0"/>
+          </a:p>
+          <a:p>
+            <a:pPr indent="0" marL="0">
+              <a:lnSpc>
+                <a:spcPct val="125000"/>
+              </a:lnSpc>
+              <a:buNone/>
+            </a:pPr>
+            <a:endParaRPr lang="en-US" sz="1400" dirty="0"/>
+          </a:p>
+          <a:p>
+            <a:pPr indent="0" marL="0">
+              <a:lnSpc>
+                <a:spcPct val="125000"/>
+              </a:lnSpc>
+              <a:buNone/>
+            </a:pPr>
+            <a:r>
+              <a:rPr lang="en-US" sz="1400" dirty="0">
+                <a:solidFill>
+                  <a:srgbClr val="C9D3F5"/>
+                </a:solidFill>
+                <a:latin typeface="Courier New" pitchFamily="34" charset="0"/>
+                <a:ea typeface="Courier New" pitchFamily="34" charset="-122"/>
+                <a:cs typeface="Courier New" pitchFamily="34" charset="-120"/>
+              </a:rPr>
+              <a:t>&lt;div class="parent"&gt;</a:t>
+            </a:r>
+            <a:endParaRPr lang="en-US" sz="1400" dirty="0"/>
+          </a:p>
+          <a:p>
+            <a:pPr indent="0" marL="0">
+              <a:lnSpc>
+                <a:spcPct val="125000"/>
+              </a:lnSpc>
+              <a:buNone/>
+            </a:pPr>
+            <a:r>
+              <a:rPr lang="en-US" sz="1400" dirty="0">
+                <a:solidFill>
+                  <a:srgbClr val="C9D3F5"/>
+                </a:solidFill>
+                <a:latin typeface="Courier New" pitchFamily="34" charset="0"/>
+                <a:ea typeface="Courier New" pitchFamily="34" charset="-122"/>
+                <a:cs typeface="Courier New" pitchFamily="34" charset="-120"/>
+              </a:rPr>
+              <a:t>  Parent text is dark blue.</a:t>
+            </a:r>
+            <a:endParaRPr lang="en-US" sz="1400" dirty="0"/>
+          </a:p>
+          <a:p>
+            <a:pPr indent="0" marL="0">
+              <a:lnSpc>
+                <a:spcPct val="125000"/>
+              </a:lnSpc>
+              <a:buNone/>
+            </a:pPr>
+            <a:r>
+              <a:rPr lang="en-US" sz="1400" dirty="0">
+                <a:solidFill>
+                  <a:srgbClr val="C9D3F5"/>
+                </a:solidFill>
+                <a:latin typeface="Courier New" pitchFamily="34" charset="0"/>
+                <a:ea typeface="Courier New" pitchFamily="34" charset="-122"/>
+                <a:cs typeface="Courier New" pitchFamily="34" charset="-120"/>
+              </a:rPr>
+              <a:t>  &lt;p&gt;Child paragraph is dark blue too.&lt;/p&gt;</a:t>
+            </a:r>
+            <a:endParaRPr lang="en-US" sz="1400" dirty="0"/>
+          </a:p>
+          <a:p>
+            <a:pPr indent="0" marL="0">
+              <a:lnSpc>
+                <a:spcPct val="125000"/>
+              </a:lnSpc>
+              <a:buNone/>
+            </a:pPr>
+            <a:r>
+              <a:rPr lang="en-US" sz="1400" dirty="0">
+                <a:solidFill>
+                  <a:srgbClr val="C9D3F5"/>
+                </a:solidFill>
+                <a:latin typeface="Courier New" pitchFamily="34" charset="0"/>
+                <a:ea typeface="Courier New" pitchFamily="34" charset="-122"/>
+                <a:cs typeface="Courier New" pitchFamily="34" charset="-120"/>
+              </a:rPr>
+              <a:t>&lt;/div&gt;</a:t>
+            </a:r>
+            <a:endParaRPr lang="en-US" sz="1400" dirty="0"/>
+          </a:p>
+        </p:txBody>
+      </p:sp>
+      <p:sp>
+        <p:nvSpPr>
+          <p:cNvPr id="6" name="Text 4"/>
+          <p:cNvSpPr txBox="1"/>
+          <p:nvPr/>
+        </p:nvSpPr>
+        <p:spPr>
+          <a:xfrm>
+            <a:off x="640080" y="5410200"/>
+            <a:ext cx="10911535" cy="853440"/>
+          </a:xfrm>
+          <a:prstGeom prst="rect">
+            <a:avLst/>
+          </a:prstGeom>
+          <a:noFill/>
+          <a:ln/>
+        </p:spPr>
+        <p:txBody>
+          <a:bodyPr wrap="square" lIns="0" tIns="0" rIns="0" bIns="0" rtlCol="0" anchor="t"/>
+          <a:lstStyle/>
+          <a:p>
+            <a:pPr indent="0" marL="0">
+              <a:buNone/>
+            </a:pPr>
+            <a:r>
+              <a:rPr lang="en-US" sz="1300" dirty="0">
+                <a:solidFill>
+                  <a:srgbClr val="26262F"/>
+                </a:solidFill>
+                <a:latin typeface="Calibri" pitchFamily="34" charset="0"/>
+                <a:ea typeface="Calibri" pitchFamily="34" charset="-122"/>
+                <a:cs typeface="Calibri" pitchFamily="34" charset="-120"/>
+              </a:rPr>
+              <a:t>color inherits, so the &lt;p&gt; is dark blue too. border and padding do NOT inherit — only .parent itself gets the crimson outline and padding.</a:t>
+            </a:r>
+            <a:endParaRPr lang="en-US" sz="1300" dirty="0"/>
+          </a:p>
+        </p:txBody>
+      </p:sp>
+      <p:sp>
+        <p:nvSpPr>
+          <p:cNvPr id="7" name="Text 5"/>
+          <p:cNvSpPr txBox="1"/>
+          <p:nvPr/>
+        </p:nvSpPr>
+        <p:spPr>
+          <a:xfrm>
+            <a:off x="640080" y="6446520"/>
+            <a:ext cx="8686800" cy="292608"/>
+          </a:xfrm>
+          <a:prstGeom prst="rect">
+            <a:avLst/>
+          </a:prstGeom>
+          <a:noFill/>
+          <a:ln/>
+        </p:spPr>
+        <p:txBody>
+          <a:bodyPr wrap="square" lIns="0" tIns="0" rIns="0" bIns="0" rtlCol="0" anchor="ctr"/>
+          <a:lstStyle/>
+          <a:p>
+            <a:pPr algn="l" indent="0" marL="0">
+              <a:buNone/>
+            </a:pPr>
+            <a:r>
+              <a:rPr lang="en-US" sz="900" dirty="0">
+                <a:solidFill>
+                  <a:srgbClr val="5D5D72"/>
+                </a:solidFill>
+                <a:latin typeface="Calibri" pitchFamily="34" charset="0"/>
+                <a:ea typeface="Calibri" pitchFamily="34" charset="-122"/>
+                <a:cs typeface="Calibri" pitchFamily="34" charset="-120"/>
+              </a:rPr>
+              <a:t>Usman Akram  •  COMSATS University Islamabad</a:t>
+            </a:r>
+            <a:endParaRPr lang="en-US" sz="900" dirty="0"/>
+          </a:p>
+        </p:txBody>
+      </p:sp>
+      <p:sp>
+        <p:nvSpPr>
+          <p:cNvPr id="8" name="Text 6"/>
+          <p:cNvSpPr txBox="1"/>
+          <p:nvPr/>
+        </p:nvSpPr>
+        <p:spPr>
+          <a:xfrm>
+            <a:off x="11155680" y="6446520"/>
+            <a:ext cx="457200" cy="292608"/>
+          </a:xfrm>
+          <a:prstGeom prst="rect">
+            <a:avLst/>
+          </a:prstGeom>
+          <a:noFill/>
+          <a:ln/>
+        </p:spPr>
+        <p:txBody>
+          <a:bodyPr wrap="square" lIns="0" tIns="0" rIns="0" bIns="0" rtlCol="0" anchor="ctr"/>
+          <a:lstStyle/>
+          <a:p>
+            <a:pPr algn="r" indent="0" marL="0">
+              <a:buNone/>
+            </a:pPr>
+            <a:r>
+              <a:rPr lang="en-US" sz="900" dirty="0">
+                <a:solidFill>
+                  <a:srgbClr val="5D5D72"/>
+                </a:solidFill>
+                <a:latin typeface="Calibri" pitchFamily="34" charset="0"/>
+                <a:ea typeface="Calibri" pitchFamily="34" charset="-122"/>
+                <a:cs typeface="Calibri" pitchFamily="34" charset="-120"/>
+              </a:rPr>
+              <a:t>26</a:t>
+            </a:r>
+            <a:endParaRPr lang="en-US" sz="900" dirty="0"/>
+          </a:p>
+        </p:txBody>
+      </p:sp>
+    </p:spTree>
+  </p:cSld>
+  <p:clrMapOvr>
+    <a:masterClrMapping/>
+  </p:clrMapOvr>
+</p:sld>
+</file>
+
+<file path=ppt/slides/slide27.xml><?xml version="1.0" encoding="utf-8"?>
+<p:sld xmlns:a="http://schemas.openxmlformats.org/drawingml/2006/main" xmlns:r="http://schemas.openxmlformats.org/officeDocument/2006/relationships" xmlns:p="http://schemas.openxmlformats.org/presentationml/2006/main">
+  <p:cSld name="Slide 27">
+    <p:bg>
+      <p:bgPr>
+        <a:solidFill>
+          <a:srgbClr val="FFFFFF"/>
+        </a:solidFill>
+      </p:bgPr>
+    </p:bg>
+    <p:spTree>
+      <p:nvGrpSpPr>
+        <p:cNvPr id="1" name=""/>
+        <p:cNvGrpSpPr/>
+        <p:nvPr/>
+      </p:nvGrpSpPr>
+      <p:grpSpPr>
+        <a:xfrm>
+          <a:off x="0" y="0"/>
+          <a:ext cx="0" cy="0"/>
+          <a:chOff x="0" y="0"/>
+          <a:chExt cx="0" cy="0"/>
+        </a:xfrm>
+      </p:grpSpPr>
+      <p:sp>
+        <p:nvSpPr>
+          <p:cNvPr id="2" name="Text 0"/>
+          <p:cNvSpPr txBox="1"/>
+          <p:nvPr/>
+        </p:nvSpPr>
+        <p:spPr>
+          <a:xfrm>
+            <a:off x="640080" y="457200"/>
+            <a:ext cx="10058400" cy="365760"/>
+          </a:xfrm>
+          <a:prstGeom prst="rect">
+            <a:avLst/>
+          </a:prstGeom>
+          <a:noFill/>
+          <a:ln/>
+        </p:spPr>
+        <p:txBody>
+          <a:bodyPr wrap="square" lIns="0" tIns="0" rIns="0" bIns="0" rtlCol="0" anchor="ctr"/>
+          <a:lstStyle/>
+          <a:p>
+            <a:pPr algn="l" indent="0" marL="0">
+              <a:buNone/>
+            </a:pPr>
+            <a:r>
+              <a:rPr lang="en-US" sz="1300" b="1" spc="300" kern="0" dirty="0">
+                <a:solidFill>
+                  <a:srgbClr val="FF8A3D"/>
+                </a:solidFill>
+                <a:latin typeface="Calibri" pitchFamily="34" charset="0"/>
+                <a:ea typeface="Calibri" pitchFamily="34" charset="-122"/>
+                <a:cs typeface="Calibri" pitchFamily="34" charset="-120"/>
+              </a:rPr>
+              <a:t>INHERITANCE</a:t>
+            </a:r>
+            <a:endParaRPr lang="en-US" sz="1300" dirty="0"/>
+          </a:p>
+        </p:txBody>
+      </p:sp>
+      <p:sp>
+        <p:nvSpPr>
+          <p:cNvPr id="3" name="Text 1"/>
+          <p:cNvSpPr txBox="1"/>
+          <p:nvPr/>
+        </p:nvSpPr>
+        <p:spPr>
+          <a:xfrm>
+            <a:off x="640080" y="841248"/>
+            <a:ext cx="10881360" cy="914400"/>
+          </a:xfrm>
+          <a:prstGeom prst="rect">
+            <a:avLst/>
+          </a:prstGeom>
+          <a:noFill/>
+          <a:ln/>
+        </p:spPr>
+        <p:txBody>
+          <a:bodyPr wrap="square" lIns="0" tIns="0" rIns="0" bIns="0" rtlCol="0" anchor="ctr"/>
+          <a:lstStyle/>
+          <a:p>
+            <a:pPr algn="l" indent="0" marL="0">
+              <a:buNone/>
+            </a:pPr>
+            <a:r>
+              <a:rPr lang="en-US" sz="3400" b="1" dirty="0">
+                <a:solidFill>
+                  <a:srgbClr val="2B2B7A"/>
+                </a:solidFill>
+                <a:latin typeface="Cambria" pitchFamily="34" charset="0"/>
+                <a:ea typeface="Cambria" pitchFamily="34" charset="-122"/>
+                <a:cs typeface="Cambria" pitchFamily="34" charset="-120"/>
+              </a:rPr>
               <a:t>Inherited vs. Not Inherited</a:t>
             </a:r>
             <a:endParaRPr lang="en-US" sz="3400" dirty="0"/>
@@ -12581,7 +13709,7 @@
       </p:sp>
       <p:graphicFrame>
         <p:nvGraphicFramePr>
-          <p:cNvPr id="27" name="Table 0"/>
+          <p:cNvPr id="28" name="Table 0"/>
           <p:cNvGraphicFramePr>
             <a:graphicFrameLocks noGrp="1"/>
           </p:cNvGraphicFramePr>
@@ -13509,291 +14637,6 @@
                 <a:ea typeface="Calibri" pitchFamily="34" charset="-122"/>
                 <a:cs typeface="Calibri" pitchFamily="34" charset="-120"/>
               </a:rPr>
-              <a:t>26</a:t>
-            </a:r>
-            <a:endParaRPr lang="en-US" sz="900" dirty="0"/>
-          </a:p>
-        </p:txBody>
-      </p:sp>
-    </p:spTree>
-  </p:cSld>
-  <p:clrMapOvr>
-    <a:masterClrMapping/>
-  </p:clrMapOvr>
-</p:sld>
-</file>
-
-<file path=ppt/slides/slide27.xml><?xml version="1.0" encoding="utf-8"?>
-<p:sld xmlns:a="http://schemas.openxmlformats.org/drawingml/2006/main" xmlns:r="http://schemas.openxmlformats.org/officeDocument/2006/relationships" xmlns:p="http://schemas.openxmlformats.org/presentationml/2006/main">
-  <p:cSld name="Slide 27">
-    <p:bg>
-      <p:bgPr>
-        <a:solidFill>
-          <a:srgbClr val="FFFFFF"/>
-        </a:solidFill>
-      </p:bgPr>
-    </p:bg>
-    <p:spTree>
-      <p:nvGrpSpPr>
-        <p:cNvPr id="1" name=""/>
-        <p:cNvGrpSpPr/>
-        <p:nvPr/>
-      </p:nvGrpSpPr>
-      <p:grpSpPr>
-        <a:xfrm>
-          <a:off x="0" y="0"/>
-          <a:ext cx="0" cy="0"/>
-          <a:chOff x="0" y="0"/>
-          <a:chExt cx="0" cy="0"/>
-        </a:xfrm>
-      </p:grpSpPr>
-      <p:sp>
-        <p:nvSpPr>
-          <p:cNvPr id="2" name="Text 0"/>
-          <p:cNvSpPr txBox="1"/>
-          <p:nvPr/>
-        </p:nvSpPr>
-        <p:spPr>
-          <a:xfrm>
-            <a:off x="640080" y="457200"/>
-            <a:ext cx="10058400" cy="365760"/>
-          </a:xfrm>
-          <a:prstGeom prst="rect">
-            <a:avLst/>
-          </a:prstGeom>
-          <a:noFill/>
-          <a:ln/>
-        </p:spPr>
-        <p:txBody>
-          <a:bodyPr wrap="square" lIns="0" tIns="0" rIns="0" bIns="0" rtlCol="0" anchor="ctr"/>
-          <a:lstStyle/>
-          <a:p>
-            <a:pPr algn="l" indent="0" marL="0">
-              <a:buNone/>
-            </a:pPr>
-            <a:r>
-              <a:rPr lang="en-US" sz="1300" b="1" spc="300" kern="0" dirty="0">
-                <a:solidFill>
-                  <a:srgbClr val="FF8A3D"/>
-                </a:solidFill>
-                <a:latin typeface="Calibri" pitchFamily="34" charset="0"/>
-                <a:ea typeface="Calibri" pitchFamily="34" charset="-122"/>
-                <a:cs typeface="Calibri" pitchFamily="34" charset="-120"/>
-              </a:rPr>
-              <a:t>COLOUR</a:t>
-            </a:r>
-            <a:endParaRPr lang="en-US" sz="1300" dirty="0"/>
-          </a:p>
-        </p:txBody>
-      </p:sp>
-      <p:sp>
-        <p:nvSpPr>
-          <p:cNvPr id="3" name="Text 1"/>
-          <p:cNvSpPr txBox="1"/>
-          <p:nvPr/>
-        </p:nvSpPr>
-        <p:spPr>
-          <a:xfrm>
-            <a:off x="640080" y="841248"/>
-            <a:ext cx="10881360" cy="914400"/>
-          </a:xfrm>
-          <a:prstGeom prst="rect">
-            <a:avLst/>
-          </a:prstGeom>
-          <a:noFill/>
-          <a:ln/>
-        </p:spPr>
-        <p:txBody>
-          <a:bodyPr wrap="square" lIns="0" tIns="0" rIns="0" bIns="0" rtlCol="0" anchor="ctr"/>
-          <a:lstStyle/>
-          <a:p>
-            <a:pPr algn="l" indent="0" marL="0">
-              <a:buNone/>
-            </a:pPr>
-            <a:r>
-              <a:rPr lang="en-US" sz="3400" b="1" dirty="0">
-                <a:solidFill>
-                  <a:srgbClr val="2B2B7A"/>
-                </a:solidFill>
-                <a:latin typeface="Cambria" pitchFamily="34" charset="0"/>
-                <a:ea typeface="Cambria" pitchFamily="34" charset="-122"/>
-                <a:cs typeface="Cambria" pitchFamily="34" charset="-120"/>
-              </a:rPr>
-              <a:t>Five Ways to Write a Colour</a:t>
-            </a:r>
-            <a:endParaRPr lang="en-US" sz="3400" dirty="0"/>
-          </a:p>
-        </p:txBody>
-      </p:sp>
-      <p:sp>
-        <p:nvSpPr>
-          <p:cNvPr id="4" name="Text 2"/>
-          <p:cNvSpPr txBox="1"/>
-          <p:nvPr/>
-        </p:nvSpPr>
-        <p:spPr>
-          <a:xfrm>
-            <a:off x="640080" y="1691640"/>
-            <a:ext cx="10911535" cy="411480"/>
-          </a:xfrm>
-          <a:prstGeom prst="rect">
-            <a:avLst/>
-          </a:prstGeom>
-          <a:noFill/>
-          <a:ln/>
-        </p:spPr>
-        <p:txBody>
-          <a:bodyPr wrap="square" lIns="0" tIns="0" rIns="0" bIns="0" rtlCol="0" anchor="ctr"/>
-          <a:lstStyle/>
-          <a:p>
-            <a:pPr indent="0" marL="0">
-              <a:buNone/>
-            </a:pPr>
-            <a:r>
-              <a:rPr lang="en-US" sz="1350" i="1" dirty="0">
-                <a:solidFill>
-                  <a:srgbClr val="5D5D72"/>
-                </a:solidFill>
-                <a:latin typeface="Calibri" pitchFamily="34" charset="0"/>
-                <a:ea typeface="Calibri" pitchFamily="34" charset="-122"/>
-                <a:cs typeface="Calibri" pitchFamily="34" charset="-120"/>
-              </a:rPr>
-              <a:t>Named, hex, rgb() all give the same red; rgba() adds transparency; hsl() gives hue/saturation/lightness.</a:t>
-            </a:r>
-            <a:endParaRPr lang="en-US" sz="1350" dirty="0"/>
-          </a:p>
-        </p:txBody>
-      </p:sp>
-      <p:sp>
-        <p:nvSpPr>
-          <p:cNvPr id="5" name="Shape 3"/>
-          <p:cNvSpPr/>
-          <p:nvPr/>
-        </p:nvSpPr>
-        <p:spPr>
-          <a:xfrm>
-            <a:off x="530352" y="2221992"/>
-            <a:ext cx="11130991" cy="4059936"/>
-          </a:xfrm>
-          <a:prstGeom prst="roundRect">
-            <a:avLst>
-              <a:gd name="adj" fmla="val 1351"/>
-            </a:avLst>
-          </a:prstGeom>
-          <a:solidFill>
-            <a:srgbClr val="FFFFFF"/>
-          </a:solidFill>
-          <a:ln w="12700">
-            <a:solidFill>
-              <a:srgbClr val="E2E2EE"/>
-            </a:solidFill>
-            <a:prstDash val="solid"/>
-          </a:ln>
-          <a:effectLst>
-            <a:outerShdw sx="100000" sy="100000" kx="0" ky="0" algn="bl" rotWithShape="0" blurRad="101600" dist="38100" dir="5400000">
-              <a:srgbClr val="000000">
-                <a:alpha val="12000"/>
-              </a:srgbClr>
-            </a:outerShdw>
-          </a:effectLst>
-        </p:spPr>
-      </p:sp>
-      <p:pic>
-        <p:nvPicPr>
-          <p:cNvPr id="6" name="Image 0" descr="D:/GitHub/mern-web-book/docs/assets/img/lecture-05/color-values.png">    </p:cNvPr>
-          <p:cNvPicPr>
-            <a:picLocks noChangeAspect="1"/>
-          </p:cNvPicPr>
-          <p:nvPr/>
-        </p:nvPicPr>
-        <p:blipFill>
-          <a:blip r:embed="rId1"/>
-          <a:stretch>
-            <a:fillRect/>
-          </a:stretch>
-        </p:blipFill>
-        <p:spPr>
-          <a:xfrm>
-            <a:off x="2124813" y="2331720"/>
-            <a:ext cx="7942069" cy="3840480"/>
-          </a:xfrm>
-          <a:prstGeom prst="rect">
-            <a:avLst/>
-          </a:prstGeom>
-        </p:spPr>
-      </p:pic>
-      <p:sp>
-        <p:nvSpPr>
-          <p:cNvPr id="7" name="Text 4"/>
-          <p:cNvSpPr txBox="1"/>
-          <p:nvPr/>
-        </p:nvSpPr>
-        <p:spPr>
-          <a:xfrm>
-            <a:off x="640080" y="6446520"/>
-            <a:ext cx="8686800" cy="292608"/>
-          </a:xfrm>
-          <a:prstGeom prst="rect">
-            <a:avLst/>
-          </a:prstGeom>
-          <a:noFill/>
-          <a:ln/>
-        </p:spPr>
-        <p:txBody>
-          <a:bodyPr wrap="square" lIns="0" tIns="0" rIns="0" bIns="0" rtlCol="0" anchor="ctr"/>
-          <a:lstStyle/>
-          <a:p>
-            <a:pPr algn="l" indent="0" marL="0">
-              <a:buNone/>
-            </a:pPr>
-            <a:r>
-              <a:rPr lang="en-US" sz="900" dirty="0">
-                <a:solidFill>
-                  <a:srgbClr val="5D5D72"/>
-                </a:solidFill>
-                <a:latin typeface="Calibri" pitchFamily="34" charset="0"/>
-                <a:ea typeface="Calibri" pitchFamily="34" charset="-122"/>
-                <a:cs typeface="Calibri" pitchFamily="34" charset="-120"/>
-              </a:rPr>
-              <a:t>Usman Akram  •  COMSATS University Islamabad</a:t>
-            </a:r>
-            <a:endParaRPr lang="en-US" sz="900" dirty="0"/>
-          </a:p>
-        </p:txBody>
-      </p:sp>
-      <p:sp>
-        <p:nvSpPr>
-          <p:cNvPr id="8" name="Text 5"/>
-          <p:cNvSpPr txBox="1"/>
-          <p:nvPr/>
-        </p:nvSpPr>
-        <p:spPr>
-          <a:xfrm>
-            <a:off x="11155680" y="6446520"/>
-            <a:ext cx="457200" cy="292608"/>
-          </a:xfrm>
-          <a:prstGeom prst="rect">
-            <a:avLst/>
-          </a:prstGeom>
-          <a:noFill/>
-          <a:ln/>
-        </p:spPr>
-        <p:txBody>
-          <a:bodyPr wrap="square" lIns="0" tIns="0" rIns="0" bIns="0" rtlCol="0" anchor="ctr"/>
-          <a:lstStyle/>
-          <a:p>
-            <a:pPr algn="r" indent="0" marL="0">
-              <a:buNone/>
-            </a:pPr>
-            <a:r>
-              <a:rPr lang="en-US" sz="900" dirty="0">
-                <a:solidFill>
-                  <a:srgbClr val="5D5D72"/>
-                </a:solidFill>
-                <a:latin typeface="Calibri" pitchFamily="34" charset="0"/>
-                <a:ea typeface="Calibri" pitchFamily="34" charset="-122"/>
-                <a:cs typeface="Calibri" pitchFamily="34" charset="-120"/>
-              </a:rPr>
               <a:t>27</a:t>
             </a:r>
             <a:endParaRPr lang="en-US" sz="900" dirty="0"/>
@@ -13865,7 +14708,7 @@
                 <a:ea typeface="Calibri" pitchFamily="34" charset="-122"/>
                 <a:cs typeface="Calibri" pitchFamily="34" charset="-120"/>
               </a:rPr>
-              <a:t>FONTS</a:t>
+              <a:t>COLOUR</a:t>
             </a:r>
             <a:endParaRPr lang="en-US" sz="1300" dirty="0"/>
           </a:p>
@@ -13904,7 +14747,7 @@
                 <a:ea typeface="Cambria" pitchFamily="34" charset="-122"/>
                 <a:cs typeface="Cambria" pitchFamily="34" charset="-120"/>
               </a:rPr>
-              <a:t>Font Properties</a:t>
+              <a:t>Five Ways to Write a Colour</a:t>
             </a:r>
             <a:endParaRPr lang="en-US" sz="3400" dirty="0"/>
           </a:p>
@@ -13912,57 +14755,162 @@
       </p:sp>
       <p:sp>
         <p:nvSpPr>
-          <p:cNvPr id="4" name="Text 2"/>
-          <p:cNvSpPr txBox="1"/>
-          <p:nvPr/>
-        </p:nvSpPr>
-        <p:spPr>
-          <a:xfrm>
-            <a:off x="640080" y="1691640"/>
-            <a:ext cx="10911535" cy="411480"/>
-          </a:xfrm>
-          <a:prstGeom prst="rect">
-            <a:avLst/>
-          </a:prstGeom>
-          <a:noFill/>
-          <a:ln/>
-        </p:spPr>
-        <p:txBody>
-          <a:bodyPr wrap="square" lIns="0" tIns="0" rIns="0" bIns="0" rtlCol="0" anchor="ctr"/>
-          <a:lstStyle/>
-          <a:p>
-            <a:pPr indent="0" marL="0">
-              <a:buNone/>
-            </a:pPr>
-            <a:r>
-              <a:rPr lang="en-US" sz="1350" i="1" dirty="0">
-                <a:solidFill>
-                  <a:srgbClr val="5D5D72"/>
-                </a:solidFill>
-                <a:latin typeface="Calibri" pitchFamily="34" charset="0"/>
-                <a:ea typeface="Calibri" pitchFamily="34" charset="-122"/>
-                <a:cs typeface="Calibri" pitchFamily="34" charset="-120"/>
-              </a:rPr>
-              <a:t>font-family (a fallback list), font-size, font-weight, font-style — combined via the font shorthand too.</a:t>
-            </a:r>
-            <a:endParaRPr lang="en-US" sz="1350" dirty="0"/>
-          </a:p>
-        </p:txBody>
-      </p:sp>
-      <p:sp>
-        <p:nvSpPr>
-          <p:cNvPr id="5" name="Shape 3"/>
+          <p:cNvPr id="4" name="Shape 2"/>
           <p:cNvSpPr/>
           <p:nvPr/>
         </p:nvSpPr>
         <p:spPr>
           <a:xfrm>
-            <a:off x="530352" y="2221992"/>
-            <a:ext cx="11130991" cy="4059936"/>
+            <a:off x="640080" y="1965960"/>
+            <a:ext cx="10911535" cy="1739265"/>
           </a:xfrm>
           <a:prstGeom prst="roundRect">
             <a:avLst>
-              <a:gd name="adj" fmla="val 1351"/>
+              <a:gd name="adj" fmla="val 4206"/>
+            </a:avLst>
+          </a:prstGeom>
+          <a:solidFill>
+            <a:srgbClr val="1E1E4C"/>
+          </a:solidFill>
+          <a:ln/>
+        </p:spPr>
+      </p:sp>
+      <p:sp>
+        <p:nvSpPr>
+          <p:cNvPr id="5" name="Text 3"/>
+          <p:cNvSpPr txBox="1"/>
+          <p:nvPr/>
+        </p:nvSpPr>
+        <p:spPr>
+          <a:xfrm>
+            <a:off x="960120" y="2194560"/>
+            <a:ext cx="10271455" cy="1282065"/>
+          </a:xfrm>
+          <a:prstGeom prst="rect">
+            <a:avLst/>
+          </a:prstGeom>
+          <a:noFill/>
+          <a:ln/>
+        </p:spPr>
+        <p:txBody>
+          <a:bodyPr wrap="square" lIns="0" tIns="0" rIns="0" bIns="0" rtlCol="0" anchor="t"/>
+          <a:lstStyle/>
+          <a:p>
+            <a:pPr indent="0" marL="0">
+              <a:lnSpc>
+                <a:spcPct val="125000"/>
+              </a:lnSpc>
+              <a:buNone/>
+            </a:pPr>
+            <a:r>
+              <a:rPr lang="en-US" sz="1250" dirty="0">
+                <a:solidFill>
+                  <a:srgbClr val="C9D3F5"/>
+                </a:solidFill>
+                <a:latin typeface="Courier New" pitchFamily="34" charset="0"/>
+                <a:ea typeface="Courier New" pitchFamily="34" charset="-122"/>
+                <a:cs typeface="Courier New" pitchFamily="34" charset="-120"/>
+              </a:rPr>
+              <a:t>.a { color: red; }                  /* named colour */</a:t>
+            </a:r>
+            <a:endParaRPr lang="en-US" sz="1250" dirty="0"/>
+          </a:p>
+          <a:p>
+            <a:pPr indent="0" marL="0">
+              <a:lnSpc>
+                <a:spcPct val="125000"/>
+              </a:lnSpc>
+              <a:buNone/>
+            </a:pPr>
+            <a:r>
+              <a:rPr lang="en-US" sz="1250" dirty="0">
+                <a:solidFill>
+                  <a:srgbClr val="C9D3F5"/>
+                </a:solidFill>
+                <a:latin typeface="Courier New" pitchFamily="34" charset="0"/>
+                <a:ea typeface="Courier New" pitchFamily="34" charset="-122"/>
+                <a:cs typeface="Courier New" pitchFamily="34" charset="-120"/>
+              </a:rPr>
+              <a:t>.b { color: #ff0000; }              /* hex code */</a:t>
+            </a:r>
+            <a:endParaRPr lang="en-US" sz="1250" dirty="0"/>
+          </a:p>
+          <a:p>
+            <a:pPr indent="0" marL="0">
+              <a:lnSpc>
+                <a:spcPct val="125000"/>
+              </a:lnSpc>
+              <a:buNone/>
+            </a:pPr>
+            <a:r>
+              <a:rPr lang="en-US" sz="1250" dirty="0">
+                <a:solidFill>
+                  <a:srgbClr val="C9D3F5"/>
+                </a:solidFill>
+                <a:latin typeface="Courier New" pitchFamily="34" charset="0"/>
+                <a:ea typeface="Courier New" pitchFamily="34" charset="-122"/>
+                <a:cs typeface="Courier New" pitchFamily="34" charset="-120"/>
+              </a:rPr>
+              <a:t>.c { color: rgb(255, 0, 0); }       /* red, green, blue */</a:t>
+            </a:r>
+            <a:endParaRPr lang="en-US" sz="1250" dirty="0"/>
+          </a:p>
+          <a:p>
+            <a:pPr indent="0" marL="0">
+              <a:lnSpc>
+                <a:spcPct val="125000"/>
+              </a:lnSpc>
+              <a:buNone/>
+            </a:pPr>
+            <a:r>
+              <a:rPr lang="en-US" sz="1250" dirty="0">
+                <a:solidFill>
+                  <a:srgbClr val="C9D3F5"/>
+                </a:solidFill>
+                <a:latin typeface="Courier New" pitchFamily="34" charset="0"/>
+                <a:ea typeface="Courier New" pitchFamily="34" charset="-122"/>
+                <a:cs typeface="Courier New" pitchFamily="34" charset="-120"/>
+              </a:rPr>
+              <a:t>.d { color: rgba(255, 0, 0, 0.5); } /* rgb + alpha */</a:t>
+            </a:r>
+            <a:endParaRPr lang="en-US" sz="1250" dirty="0"/>
+          </a:p>
+          <a:p>
+            <a:pPr indent="0" marL="0">
+              <a:lnSpc>
+                <a:spcPct val="125000"/>
+              </a:lnSpc>
+              <a:buNone/>
+            </a:pPr>
+            <a:r>
+              <a:rPr lang="en-US" sz="1250" dirty="0">
+                <a:solidFill>
+                  <a:srgbClr val="C9D3F5"/>
+                </a:solidFill>
+                <a:latin typeface="Courier New" pitchFamily="34" charset="0"/>
+                <a:ea typeface="Courier New" pitchFamily="34" charset="-122"/>
+                <a:cs typeface="Courier New" pitchFamily="34" charset="-120"/>
+              </a:rPr>
+              <a:t>.e { color: hsl(0, 100%, 50%); }    /* hue, sat, lightness */</a:t>
+            </a:r>
+            <a:endParaRPr lang="en-US" sz="1250" dirty="0"/>
+          </a:p>
+        </p:txBody>
+      </p:sp>
+      <p:sp>
+        <p:nvSpPr>
+          <p:cNvPr id="6" name="Shape 4"/>
+          <p:cNvSpPr/>
+          <p:nvPr/>
+        </p:nvSpPr>
+        <p:spPr>
+          <a:xfrm>
+            <a:off x="530352" y="3869817"/>
+            <a:ext cx="11130991" cy="2457831"/>
+          </a:xfrm>
+          <a:prstGeom prst="roundRect">
+            <a:avLst>
+              <a:gd name="adj" fmla="val 2232"/>
             </a:avLst>
           </a:prstGeom>
           <a:solidFill>
@@ -13985,7 +14933,7 @@
       </p:sp>
       <p:pic>
         <p:nvPicPr>
-          <p:cNvPr id="6" name="Image 0" descr="D:/GitHub/mern-web-book/docs/assets/img/lecture-05/font-properties.png">    </p:cNvPr>
+          <p:cNvPr id="7" name="Image 0" descr="D:/GitHub/mern-web-book/docs/assets/img/lecture-05/color-values.png">    </p:cNvPr>
           <p:cNvPicPr>
             <a:picLocks noChangeAspect="1"/>
           </p:cNvPicPr>
@@ -13999,8 +14947,8 @@
         </p:blipFill>
         <p:spPr>
           <a:xfrm>
-            <a:off x="640080" y="3946659"/>
-            <a:ext cx="10911535" cy="610602"/>
+            <a:off x="3781381" y="3979545"/>
+            <a:ext cx="4628934" cy="2238375"/>
           </a:xfrm>
           <a:prstGeom prst="rect">
             <a:avLst/>
@@ -14009,7 +14957,7 @@
       </p:pic>
       <p:sp>
         <p:nvSpPr>
-          <p:cNvPr id="7" name="Text 4"/>
+          <p:cNvPr id="8" name="Text 5"/>
           <p:cNvSpPr txBox="1"/>
           <p:nvPr/>
         </p:nvSpPr>
@@ -14048,7 +14996,7 @@
       </p:sp>
       <p:sp>
         <p:nvSpPr>
-          <p:cNvPr id="8" name="Text 5"/>
+          <p:cNvPr id="9" name="Text 6"/>
           <p:cNvSpPr txBox="1"/>
           <p:nvPr/>
         </p:nvSpPr>
@@ -14150,7 +15098,7 @@
                 <a:ea typeface="Calibri" pitchFamily="34" charset="-122"/>
                 <a:cs typeface="Calibri" pitchFamily="34" charset="-120"/>
               </a:rPr>
-              <a:t>TEXT</a:t>
+              <a:t>FONTS</a:t>
             </a:r>
             <a:endParaRPr lang="en-US" sz="1300" dirty="0"/>
           </a:p>
@@ -14189,7 +15137,7 @@
                 <a:ea typeface="Cambria" pitchFamily="34" charset="-122"/>
                 <a:cs typeface="Cambria" pitchFamily="34" charset="-120"/>
               </a:rPr>
-              <a:t>Text Properties</a:t>
+              <a:t>Font Properties</a:t>
             </a:r>
             <a:endParaRPr lang="en-US" sz="3400" dirty="0"/>
           </a:p>
@@ -14228,7 +15176,7 @@
                 <a:ea typeface="Calibri" pitchFamily="34" charset="-122"/>
                 <a:cs typeface="Calibri" pitchFamily="34" charset="-120"/>
               </a:rPr>
-              <a:t>text-align, text-decoration, text-transform, line-height, letter-spacing.</a:t>
+              <a:t>font-family (a fallback list), font-size, font-weight, font-style — combined via the font shorthand too.</a:t>
             </a:r>
             <a:endParaRPr lang="en-US" sz="1350" dirty="0"/>
           </a:p>
@@ -14242,12 +15190,176 @@
         </p:nvSpPr>
         <p:spPr>
           <a:xfrm>
-            <a:off x="530352" y="2221992"/>
-            <a:ext cx="11130991" cy="4059936"/>
+            <a:off x="640080" y="2240280"/>
+            <a:ext cx="10911535" cy="1977390"/>
           </a:xfrm>
           <a:prstGeom prst="roundRect">
             <a:avLst>
-              <a:gd name="adj" fmla="val 1351"/>
+              <a:gd name="adj" fmla="val 3699"/>
+            </a:avLst>
+          </a:prstGeom>
+          <a:solidFill>
+            <a:srgbClr val="1E1E4C"/>
+          </a:solidFill>
+          <a:ln/>
+        </p:spPr>
+      </p:sp>
+      <p:sp>
+        <p:nvSpPr>
+          <p:cNvPr id="6" name="Text 4"/>
+          <p:cNvSpPr txBox="1"/>
+          <p:nvPr/>
+        </p:nvSpPr>
+        <p:spPr>
+          <a:xfrm>
+            <a:off x="960120" y="2468880"/>
+            <a:ext cx="10271455" cy="1520190"/>
+          </a:xfrm>
+          <a:prstGeom prst="rect">
+            <a:avLst/>
+          </a:prstGeom>
+          <a:noFill/>
+          <a:ln/>
+        </p:spPr>
+        <p:txBody>
+          <a:bodyPr wrap="square" lIns="0" tIns="0" rIns="0" bIns="0" rtlCol="0" anchor="t"/>
+          <a:lstStyle/>
+          <a:p>
+            <a:pPr indent="0" marL="0">
+              <a:lnSpc>
+                <a:spcPct val="125000"/>
+              </a:lnSpc>
+              <a:buNone/>
+            </a:pPr>
+            <a:r>
+              <a:rPr lang="en-US" sz="1250" dirty="0">
+                <a:solidFill>
+                  <a:srgbClr val="C9D3F5"/>
+                </a:solidFill>
+                <a:latin typeface="Courier New" pitchFamily="34" charset="0"/>
+                <a:ea typeface="Courier New" pitchFamily="34" charset="-122"/>
+                <a:cs typeface="Courier New" pitchFamily="34" charset="-120"/>
+              </a:rPr>
+              <a:t>p {</a:t>
+            </a:r>
+            <a:endParaRPr lang="en-US" sz="1250" dirty="0"/>
+          </a:p>
+          <a:p>
+            <a:pPr indent="0" marL="0">
+              <a:lnSpc>
+                <a:spcPct val="125000"/>
+              </a:lnSpc>
+              <a:buNone/>
+            </a:pPr>
+            <a:r>
+              <a:rPr lang="en-US" sz="1250" dirty="0">
+                <a:solidFill>
+                  <a:srgbClr val="C9D3F5"/>
+                </a:solidFill>
+                <a:latin typeface="Courier New" pitchFamily="34" charset="0"/>
+                <a:ea typeface="Courier New" pitchFamily="34" charset="-122"/>
+                <a:cs typeface="Courier New" pitchFamily="34" charset="-120"/>
+              </a:rPr>
+              <a:t>  font-family: "Helvetica Neue", Arial, sans-serif;</a:t>
+            </a:r>
+            <a:endParaRPr lang="en-US" sz="1250" dirty="0"/>
+          </a:p>
+          <a:p>
+            <a:pPr indent="0" marL="0">
+              <a:lnSpc>
+                <a:spcPct val="125000"/>
+              </a:lnSpc>
+              <a:buNone/>
+            </a:pPr>
+            <a:r>
+              <a:rPr lang="en-US" sz="1250" dirty="0">
+                <a:solidFill>
+                  <a:srgbClr val="C9D3F5"/>
+                </a:solidFill>
+                <a:latin typeface="Courier New" pitchFamily="34" charset="0"/>
+                <a:ea typeface="Courier New" pitchFamily="34" charset="-122"/>
+                <a:cs typeface="Courier New" pitchFamily="34" charset="-120"/>
+              </a:rPr>
+              <a:t>  font-size: 16px;</a:t>
+            </a:r>
+            <a:endParaRPr lang="en-US" sz="1250" dirty="0"/>
+          </a:p>
+          <a:p>
+            <a:pPr indent="0" marL="0">
+              <a:lnSpc>
+                <a:spcPct val="125000"/>
+              </a:lnSpc>
+              <a:buNone/>
+            </a:pPr>
+            <a:r>
+              <a:rPr lang="en-US" sz="1250" dirty="0">
+                <a:solidFill>
+                  <a:srgbClr val="C9D3F5"/>
+                </a:solidFill>
+                <a:latin typeface="Courier New" pitchFamily="34" charset="0"/>
+                <a:ea typeface="Courier New" pitchFamily="34" charset="-122"/>
+                <a:cs typeface="Courier New" pitchFamily="34" charset="-120"/>
+              </a:rPr>
+              <a:t>  font-weight: bold;</a:t>
+            </a:r>
+            <a:endParaRPr lang="en-US" sz="1250" dirty="0"/>
+          </a:p>
+          <a:p>
+            <a:pPr indent="0" marL="0">
+              <a:lnSpc>
+                <a:spcPct val="125000"/>
+              </a:lnSpc>
+              <a:buNone/>
+            </a:pPr>
+            <a:r>
+              <a:rPr lang="en-US" sz="1250" dirty="0">
+                <a:solidFill>
+                  <a:srgbClr val="C9D3F5"/>
+                </a:solidFill>
+                <a:latin typeface="Courier New" pitchFamily="34" charset="0"/>
+                <a:ea typeface="Courier New" pitchFamily="34" charset="-122"/>
+                <a:cs typeface="Courier New" pitchFamily="34" charset="-120"/>
+              </a:rPr>
+              <a:t>  font-style: italic;</a:t>
+            </a:r>
+            <a:endParaRPr lang="en-US" sz="1250" dirty="0"/>
+          </a:p>
+          <a:p>
+            <a:pPr indent="0" marL="0">
+              <a:lnSpc>
+                <a:spcPct val="125000"/>
+              </a:lnSpc>
+              <a:buNone/>
+            </a:pPr>
+            <a:r>
+              <a:rPr lang="en-US" sz="1250" dirty="0">
+                <a:solidFill>
+                  <a:srgbClr val="C9D3F5"/>
+                </a:solidFill>
+                <a:latin typeface="Courier New" pitchFamily="34" charset="0"/>
+                <a:ea typeface="Courier New" pitchFamily="34" charset="-122"/>
+                <a:cs typeface="Courier New" pitchFamily="34" charset="-120"/>
+              </a:rPr>
+              <a:t>}</a:t>
+            </a:r>
+            <a:endParaRPr lang="en-US" sz="1250" dirty="0"/>
+          </a:p>
+        </p:txBody>
+      </p:sp>
+      <p:sp>
+        <p:nvSpPr>
+          <p:cNvPr id="7" name="Shape 5"/>
+          <p:cNvSpPr/>
+          <p:nvPr/>
+        </p:nvSpPr>
+        <p:spPr>
+          <a:xfrm>
+            <a:off x="530352" y="4382262"/>
+            <a:ext cx="11130991" cy="1945386"/>
+          </a:xfrm>
+          <a:prstGeom prst="roundRect">
+            <a:avLst>
+              <a:gd name="adj" fmla="val 2820"/>
             </a:avLst>
           </a:prstGeom>
           <a:solidFill>
@@ -14270,7 +15382,7 @@
       </p:sp>
       <p:pic>
         <p:nvPicPr>
-          <p:cNvPr id="6" name="Image 0" descr="D:/GitHub/mern-web-book/docs/assets/img/lecture-05/text-properties.png">    </p:cNvPr>
+          <p:cNvPr id="8" name="Image 0" descr="D:/GitHub/mern-web-book/docs/assets/img/lecture-05/font-properties.png">    </p:cNvPr>
           <p:cNvPicPr>
             <a:picLocks noChangeAspect="1"/>
           </p:cNvPicPr>
@@ -14284,8 +15396,8 @@
         </p:blipFill>
         <p:spPr>
           <a:xfrm>
-            <a:off x="640080" y="3158349"/>
-            <a:ext cx="10911535" cy="2187222"/>
+            <a:off x="640080" y="5049654"/>
+            <a:ext cx="10911535" cy="610602"/>
           </a:xfrm>
           <a:prstGeom prst="rect">
             <a:avLst/>
@@ -14294,7 +15406,7 @@
       </p:pic>
       <p:sp>
         <p:nvSpPr>
-          <p:cNvPr id="7" name="Text 4"/>
+          <p:cNvPr id="9" name="Text 6"/>
           <p:cNvSpPr txBox="1"/>
           <p:nvPr/>
         </p:nvSpPr>
@@ -14333,7 +15445,7 @@
       </p:sp>
       <p:sp>
         <p:nvSpPr>
-          <p:cNvPr id="8" name="Text 5"/>
+          <p:cNvPr id="10" name="Text 7"/>
           <p:cNvSpPr txBox="1"/>
           <p:nvPr/>
         </p:nvSpPr>
@@ -15015,7 +16127,7 @@
                 <a:ea typeface="Calibri" pitchFamily="34" charset="-122"/>
                 <a:cs typeface="Calibri" pitchFamily="34" charset="-120"/>
               </a:rPr>
-              <a:t>BACKGROUNDS</a:t>
+              <a:t>TEXT</a:t>
             </a:r>
             <a:endParaRPr lang="en-US" sz="1300" dirty="0"/>
           </a:p>
@@ -15054,7 +16166,7 @@
                 <a:ea typeface="Cambria" pitchFamily="34" charset="-122"/>
                 <a:cs typeface="Cambria" pitchFamily="34" charset="-120"/>
               </a:rPr>
-              <a:t>Background Properties</a:t>
+              <a:t>Text Properties</a:t>
             </a:r>
             <a:endParaRPr lang="en-US" sz="3400" dirty="0"/>
           </a:p>
@@ -15069,11 +16181,11 @@
         <p:spPr>
           <a:xfrm>
             <a:off x="640080" y="1965960"/>
-            <a:ext cx="10911535" cy="3291840"/>
+            <a:ext cx="10911535" cy="2215515"/>
           </a:xfrm>
           <a:prstGeom prst="roundRect">
             <a:avLst>
-              <a:gd name="adj" fmla="val 2222"/>
+              <a:gd name="adj" fmla="val 3302"/>
             </a:avLst>
           </a:prstGeom>
           <a:solidFill>
@@ -15091,7 +16203,7 @@
         <p:spPr>
           <a:xfrm>
             <a:off x="960120" y="2194560"/>
-            <a:ext cx="10271455" cy="2834640"/>
+            <a:ext cx="10271455" cy="1758315"/>
           </a:xfrm>
           <a:prstGeom prst="rect">
             <a:avLst/>
@@ -15110,7 +16222,7 @@
               <a:buNone/>
             </a:pPr>
             <a:r>
-              <a:rPr lang="en-US" sz="1400" dirty="0">
+              <a:rPr lang="en-US" sz="1250" dirty="0">
                 <a:solidFill>
                   <a:srgbClr val="C9D3F5"/>
                 </a:solidFill>
@@ -15118,9 +16230,9 @@
                 <a:ea typeface="Courier New" pitchFamily="34" charset="-122"/>
                 <a:cs typeface="Courier New" pitchFamily="34" charset="-120"/>
               </a:rPr>
-              <a:t>.card {</a:t>
-            </a:r>
-            <a:endParaRPr lang="en-US" sz="1400" dirty="0"/>
+              <a:t>p {</a:t>
+            </a:r>
+            <a:endParaRPr lang="en-US" sz="1250" dirty="0"/>
           </a:p>
           <a:p>
             <a:pPr indent="0" marL="0">
@@ -15130,7 +16242,7 @@
               <a:buNone/>
             </a:pPr>
             <a:r>
-              <a:rPr lang="en-US" sz="1400" dirty="0">
+              <a:rPr lang="en-US" sz="1250" dirty="0">
                 <a:solidFill>
                   <a:srgbClr val="C9D3F5"/>
                 </a:solidFill>
@@ -15138,9 +16250,9 @@
                 <a:ea typeface="Courier New" pitchFamily="34" charset="-122"/>
                 <a:cs typeface="Courier New" pitchFamily="34" charset="-120"/>
               </a:rPr>
-              <a:t>  background-color: #f5f5f5;</a:t>
-            </a:r>
-            <a:endParaRPr lang="en-US" sz="1400" dirty="0"/>
+              <a:t>  text-align: center;</a:t>
+            </a:r>
+            <a:endParaRPr lang="en-US" sz="1250" dirty="0"/>
           </a:p>
           <a:p>
             <a:pPr indent="0" marL="0">
@@ -15150,7 +16262,7 @@
               <a:buNone/>
             </a:pPr>
             <a:r>
-              <a:rPr lang="en-US" sz="1400" dirty="0">
+              <a:rPr lang="en-US" sz="1250" dirty="0">
                 <a:solidFill>
                   <a:srgbClr val="C9D3F5"/>
                 </a:solidFill>
@@ -15158,9 +16270,9 @@
                 <a:ea typeface="Courier New" pitchFamily="34" charset="-122"/>
                 <a:cs typeface="Courier New" pitchFamily="34" charset="-120"/>
               </a:rPr>
-              <a:t>  background-image: url("pattern.png");</a:t>
-            </a:r>
-            <a:endParaRPr lang="en-US" sz="1400" dirty="0"/>
+              <a:t>  text-decoration: underline;</a:t>
+            </a:r>
+            <a:endParaRPr lang="en-US" sz="1250" dirty="0"/>
           </a:p>
           <a:p>
             <a:pPr indent="0" marL="0">
@@ -15170,7 +16282,7 @@
               <a:buNone/>
             </a:pPr>
             <a:r>
-              <a:rPr lang="en-US" sz="1400" dirty="0">
+              <a:rPr lang="en-US" sz="1250" dirty="0">
                 <a:solidFill>
                   <a:srgbClr val="C9D3F5"/>
                 </a:solidFill>
@@ -15178,9 +16290,9 @@
                 <a:ea typeface="Courier New" pitchFamily="34" charset="-122"/>
                 <a:cs typeface="Courier New" pitchFamily="34" charset="-120"/>
               </a:rPr>
-              <a:t>  background-repeat: no-repeat;</a:t>
-            </a:r>
-            <a:endParaRPr lang="en-US" sz="1400" dirty="0"/>
+              <a:t>  text-transform: uppercase;</a:t>
+            </a:r>
+            <a:endParaRPr lang="en-US" sz="1250" dirty="0"/>
           </a:p>
           <a:p>
             <a:pPr indent="0" marL="0">
@@ -15190,7 +16302,7 @@
               <a:buNone/>
             </a:pPr>
             <a:r>
-              <a:rPr lang="en-US" sz="1400" dirty="0">
+              <a:rPr lang="en-US" sz="1250" dirty="0">
                 <a:solidFill>
                   <a:srgbClr val="C9D3F5"/>
                 </a:solidFill>
@@ -15198,9 +16310,9 @@
                 <a:ea typeface="Courier New" pitchFamily="34" charset="-122"/>
                 <a:cs typeface="Courier New" pitchFamily="34" charset="-120"/>
               </a:rPr>
-              <a:t>  background-position: center;</a:t>
-            </a:r>
-            <a:endParaRPr lang="en-US" sz="1400" dirty="0"/>
+              <a:t>  line-height: 1.6;</a:t>
+            </a:r>
+            <a:endParaRPr lang="en-US" sz="1250" dirty="0"/>
           </a:p>
           <a:p>
             <a:pPr indent="0" marL="0">
@@ -15210,7 +16322,7 @@
               <a:buNone/>
             </a:pPr>
             <a:r>
-              <a:rPr lang="en-US" sz="1400" dirty="0">
+              <a:rPr lang="en-US" sz="1250" dirty="0">
                 <a:solidFill>
                   <a:srgbClr val="C9D3F5"/>
                 </a:solidFill>
@@ -15218,9 +16330,9 @@
                 <a:ea typeface="Courier New" pitchFamily="34" charset="-122"/>
                 <a:cs typeface="Courier New" pitchFamily="34" charset="-120"/>
               </a:rPr>
-              <a:t>  background-size: cover;</a:t>
-            </a:r>
-            <a:endParaRPr lang="en-US" sz="1400" dirty="0"/>
+              <a:t>  letter-spacing: 0.5px;</a:t>
+            </a:r>
+            <a:endParaRPr lang="en-US" sz="1250" dirty="0"/>
           </a:p>
           <a:p>
             <a:pPr indent="0" marL="0">
@@ -15230,7 +16342,7 @@
               <a:buNone/>
             </a:pPr>
             <a:r>
-              <a:rPr lang="en-US" sz="1400" dirty="0">
+              <a:rPr lang="en-US" sz="1250" dirty="0">
                 <a:solidFill>
                   <a:srgbClr val="C9D3F5"/>
                 </a:solidFill>
@@ -15240,20 +16352,78 @@
               </a:rPr>
               <a:t>}</a:t>
             </a:r>
-            <a:endParaRPr lang="en-US" sz="1400" dirty="0"/>
-          </a:p>
-        </p:txBody>
-      </p:sp>
-      <p:sp>
-        <p:nvSpPr>
-          <p:cNvPr id="6" name="Text 4"/>
+            <a:endParaRPr lang="en-US" sz="1250" dirty="0"/>
+          </a:p>
+        </p:txBody>
+      </p:sp>
+      <p:sp>
+        <p:nvSpPr>
+          <p:cNvPr id="6" name="Shape 4"/>
+          <p:cNvSpPr/>
+          <p:nvPr/>
+        </p:nvSpPr>
+        <p:spPr>
+          <a:xfrm>
+            <a:off x="530352" y="4346067"/>
+            <a:ext cx="11130991" cy="1981581"/>
+          </a:xfrm>
+          <a:prstGeom prst="roundRect">
+            <a:avLst>
+              <a:gd name="adj" fmla="val 2769"/>
+            </a:avLst>
+          </a:prstGeom>
+          <a:solidFill>
+            <a:srgbClr val="FFFFFF"/>
+          </a:solidFill>
+          <a:ln w="12700">
+            <a:solidFill>
+              <a:srgbClr val="E2E2EE"/>
+            </a:solidFill>
+            <a:prstDash val="solid"/>
+          </a:ln>
+          <a:effectLst>
+            <a:outerShdw sx="100000" sy="100000" kx="0" ky="0" algn="bl" rotWithShape="0" blurRad="101600" dist="38100" dir="5400000">
+              <a:srgbClr val="000000">
+                <a:alpha val="12000"/>
+              </a:srgbClr>
+            </a:outerShdw>
+          </a:effectLst>
+        </p:spPr>
+      </p:sp>
+      <p:pic>
+        <p:nvPicPr>
+          <p:cNvPr id="7" name="Image 0" descr="D:/GitHub/mern-web-book/docs/assets/img/lecture-05/text-properties.png">    </p:cNvPr>
+          <p:cNvPicPr>
+            <a:picLocks noChangeAspect="1"/>
+          </p:cNvPicPr>
+          <p:nvPr/>
+        </p:nvPicPr>
+        <p:blipFill>
+          <a:blip r:embed="rId1"/>
+          <a:stretch>
+            <a:fillRect/>
+          </a:stretch>
+        </p:blipFill>
+        <p:spPr>
+          <a:xfrm>
+            <a:off x="1700435" y="4455795"/>
+            <a:ext cx="8790826" cy="1762125"/>
+          </a:xfrm>
+          <a:prstGeom prst="rect">
+            <a:avLst/>
+          </a:prstGeom>
+        </p:spPr>
+      </p:pic>
+      <p:sp>
+        <p:nvSpPr>
+          <p:cNvPr id="8" name="Text 5"/>
           <p:cNvSpPr txBox="1"/>
           <p:nvPr/>
         </p:nvSpPr>
         <p:spPr>
           <a:xfrm>
-            <a:off x="640080" y="5486400"/>
-            <a:ext cx="10911535" cy="777240"/>
+            <a:off x="640080" y="6446520"/>
+            <a:ext cx="8686800" cy="292608"/>
           </a:xfrm>
           <a:prstGeom prst="rect">
             <a:avLst/>
@@ -15262,60 +16432,21 @@
           <a:ln/>
         </p:spPr>
         <p:txBody>
-          <a:bodyPr wrap="square" lIns="0" tIns="0" rIns="0" bIns="0" rtlCol="0" anchor="t"/>
-          <a:lstStyle/>
-          <a:p>
-            <a:pPr indent="0" marL="0">
-              <a:buNone/>
-            </a:pPr>
-            <a:r>
-              <a:rPr lang="en-US" sz="1300" dirty="0">
-                <a:solidFill>
-                  <a:srgbClr val="26262F"/>
+          <a:bodyPr wrap="square" lIns="0" tIns="0" rIns="0" bIns="0" rtlCol="0" anchor="ctr"/>
+          <a:lstStyle/>
+          <a:p>
+            <a:pPr algn="l" indent="0" marL="0">
+              <a:buNone/>
+            </a:pPr>
+            <a:r>
+              <a:rPr lang="en-US" sz="900" dirty="0">
+                <a:solidFill>
+                  <a:srgbClr val="5D5D72"/>
                 </a:solidFill>
                 <a:latin typeface="Calibri" pitchFamily="34" charset="0"/>
                 <a:ea typeface="Calibri" pitchFamily="34" charset="-122"/>
                 <a:cs typeface="Calibri" pitchFamily="34" charset="-120"/>
               </a:rPr>
-              <a:t>A background shorthand combines several of these into one declaration, just like font does.</a:t>
-            </a:r>
-            <a:endParaRPr lang="en-US" sz="1300" dirty="0"/>
-          </a:p>
-        </p:txBody>
-      </p:sp>
-      <p:sp>
-        <p:nvSpPr>
-          <p:cNvPr id="7" name="Text 5"/>
-          <p:cNvSpPr txBox="1"/>
-          <p:nvPr/>
-        </p:nvSpPr>
-        <p:spPr>
-          <a:xfrm>
-            <a:off x="640080" y="6446520"/>
-            <a:ext cx="8686800" cy="292608"/>
-          </a:xfrm>
-          <a:prstGeom prst="rect">
-            <a:avLst/>
-          </a:prstGeom>
-          <a:noFill/>
-          <a:ln/>
-        </p:spPr>
-        <p:txBody>
-          <a:bodyPr wrap="square" lIns="0" tIns="0" rIns="0" bIns="0" rtlCol="0" anchor="ctr"/>
-          <a:lstStyle/>
-          <a:p>
-            <a:pPr algn="l" indent="0" marL="0">
-              <a:buNone/>
-            </a:pPr>
-            <a:r>
-              <a:rPr lang="en-US" sz="900" dirty="0">
-                <a:solidFill>
-                  <a:srgbClr val="5D5D72"/>
-                </a:solidFill>
-                <a:latin typeface="Calibri" pitchFamily="34" charset="0"/>
-                <a:ea typeface="Calibri" pitchFamily="34" charset="-122"/>
-                <a:cs typeface="Calibri" pitchFamily="34" charset="-120"/>
-              </a:rPr>
               <a:t>Usman Akram  •  COMSATS University Islamabad</a:t>
             </a:r>
             <a:endParaRPr lang="en-US" sz="900" dirty="0"/>
@@ -15324,7 +16455,7 @@
       </p:sp>
       <p:sp>
         <p:nvSpPr>
-          <p:cNvPr id="8" name="Text 6"/>
+          <p:cNvPr id="9" name="Text 6"/>
           <p:cNvSpPr txBox="1"/>
           <p:nvPr/>
         </p:nvSpPr>
@@ -15372,6 +16503,417 @@
 <file path=ppt/slides/slide31.xml><?xml version="1.0" encoding="utf-8"?>
 <p:sld xmlns:a="http://schemas.openxmlformats.org/drawingml/2006/main" xmlns:r="http://schemas.openxmlformats.org/officeDocument/2006/relationships" xmlns:p="http://schemas.openxmlformats.org/presentationml/2006/main">
   <p:cSld name="Slide 31">
+    <p:bg>
+      <p:bgPr>
+        <a:solidFill>
+          <a:srgbClr val="FFFFFF"/>
+        </a:solidFill>
+      </p:bgPr>
+    </p:bg>
+    <p:spTree>
+      <p:nvGrpSpPr>
+        <p:cNvPr id="1" name=""/>
+        <p:cNvGrpSpPr/>
+        <p:nvPr/>
+      </p:nvGrpSpPr>
+      <p:grpSpPr>
+        <a:xfrm>
+          <a:off x="0" y="0"/>
+          <a:ext cx="0" cy="0"/>
+          <a:chOff x="0" y="0"/>
+          <a:chExt cx="0" cy="0"/>
+        </a:xfrm>
+      </p:grpSpPr>
+      <p:sp>
+        <p:nvSpPr>
+          <p:cNvPr id="2" name="Text 0"/>
+          <p:cNvSpPr txBox="1"/>
+          <p:nvPr/>
+        </p:nvSpPr>
+        <p:spPr>
+          <a:xfrm>
+            <a:off x="640080" y="457200"/>
+            <a:ext cx="10058400" cy="365760"/>
+          </a:xfrm>
+          <a:prstGeom prst="rect">
+            <a:avLst/>
+          </a:prstGeom>
+          <a:noFill/>
+          <a:ln/>
+        </p:spPr>
+        <p:txBody>
+          <a:bodyPr wrap="square" lIns="0" tIns="0" rIns="0" bIns="0" rtlCol="0" anchor="ctr"/>
+          <a:lstStyle/>
+          <a:p>
+            <a:pPr algn="l" indent="0" marL="0">
+              <a:buNone/>
+            </a:pPr>
+            <a:r>
+              <a:rPr lang="en-US" sz="1300" b="1" spc="300" kern="0" dirty="0">
+                <a:solidFill>
+                  <a:srgbClr val="FF8A3D"/>
+                </a:solidFill>
+                <a:latin typeface="Calibri" pitchFamily="34" charset="0"/>
+                <a:ea typeface="Calibri" pitchFamily="34" charset="-122"/>
+                <a:cs typeface="Calibri" pitchFamily="34" charset="-120"/>
+              </a:rPr>
+              <a:t>BACKGROUNDS</a:t>
+            </a:r>
+            <a:endParaRPr lang="en-US" sz="1300" dirty="0"/>
+          </a:p>
+        </p:txBody>
+      </p:sp>
+      <p:sp>
+        <p:nvSpPr>
+          <p:cNvPr id="3" name="Text 1"/>
+          <p:cNvSpPr txBox="1"/>
+          <p:nvPr/>
+        </p:nvSpPr>
+        <p:spPr>
+          <a:xfrm>
+            <a:off x="640080" y="841248"/>
+            <a:ext cx="10881360" cy="914400"/>
+          </a:xfrm>
+          <a:prstGeom prst="rect">
+            <a:avLst/>
+          </a:prstGeom>
+          <a:noFill/>
+          <a:ln/>
+        </p:spPr>
+        <p:txBody>
+          <a:bodyPr wrap="square" lIns="0" tIns="0" rIns="0" bIns="0" rtlCol="0" anchor="ctr"/>
+          <a:lstStyle/>
+          <a:p>
+            <a:pPr algn="l" indent="0" marL="0">
+              <a:buNone/>
+            </a:pPr>
+            <a:r>
+              <a:rPr lang="en-US" sz="3400" b="1" dirty="0">
+                <a:solidFill>
+                  <a:srgbClr val="2B2B7A"/>
+                </a:solidFill>
+                <a:latin typeface="Cambria" pitchFamily="34" charset="0"/>
+                <a:ea typeface="Cambria" pitchFamily="34" charset="-122"/>
+                <a:cs typeface="Cambria" pitchFamily="34" charset="-120"/>
+              </a:rPr>
+              <a:t>Background Properties</a:t>
+            </a:r>
+            <a:endParaRPr lang="en-US" sz="3400" dirty="0"/>
+          </a:p>
+        </p:txBody>
+      </p:sp>
+      <p:sp>
+        <p:nvSpPr>
+          <p:cNvPr id="4" name="Shape 2"/>
+          <p:cNvSpPr/>
+          <p:nvPr/>
+        </p:nvSpPr>
+        <p:spPr>
+          <a:xfrm>
+            <a:off x="640080" y="1965960"/>
+            <a:ext cx="10911535" cy="2415540"/>
+          </a:xfrm>
+          <a:prstGeom prst="roundRect">
+            <a:avLst>
+              <a:gd name="adj" fmla="val 3028"/>
+            </a:avLst>
+          </a:prstGeom>
+          <a:solidFill>
+            <a:srgbClr val="1E1E4C"/>
+          </a:solidFill>
+          <a:ln/>
+        </p:spPr>
+      </p:sp>
+      <p:sp>
+        <p:nvSpPr>
+          <p:cNvPr id="5" name="Text 3"/>
+          <p:cNvSpPr txBox="1"/>
+          <p:nvPr/>
+        </p:nvSpPr>
+        <p:spPr>
+          <a:xfrm>
+            <a:off x="960120" y="2194560"/>
+            <a:ext cx="10271455" cy="1958340"/>
+          </a:xfrm>
+          <a:prstGeom prst="rect">
+            <a:avLst/>
+          </a:prstGeom>
+          <a:noFill/>
+          <a:ln/>
+        </p:spPr>
+        <p:txBody>
+          <a:bodyPr wrap="square" lIns="0" tIns="0" rIns="0" bIns="0" rtlCol="0" anchor="t"/>
+          <a:lstStyle/>
+          <a:p>
+            <a:pPr indent="0" marL="0">
+              <a:lnSpc>
+                <a:spcPct val="125000"/>
+              </a:lnSpc>
+              <a:buNone/>
+            </a:pPr>
+            <a:r>
+              <a:rPr lang="en-US" sz="1400" dirty="0">
+                <a:solidFill>
+                  <a:srgbClr val="C9D3F5"/>
+                </a:solidFill>
+                <a:latin typeface="Courier New" pitchFamily="34" charset="0"/>
+                <a:ea typeface="Courier New" pitchFamily="34" charset="-122"/>
+                <a:cs typeface="Courier New" pitchFamily="34" charset="-120"/>
+              </a:rPr>
+              <a:t>.card {</a:t>
+            </a:r>
+            <a:endParaRPr lang="en-US" sz="1400" dirty="0"/>
+          </a:p>
+          <a:p>
+            <a:pPr indent="0" marL="0">
+              <a:lnSpc>
+                <a:spcPct val="125000"/>
+              </a:lnSpc>
+              <a:buNone/>
+            </a:pPr>
+            <a:r>
+              <a:rPr lang="en-US" sz="1400" dirty="0">
+                <a:solidFill>
+                  <a:srgbClr val="C9D3F5"/>
+                </a:solidFill>
+                <a:latin typeface="Courier New" pitchFamily="34" charset="0"/>
+                <a:ea typeface="Courier New" pitchFamily="34" charset="-122"/>
+                <a:cs typeface="Courier New" pitchFamily="34" charset="-120"/>
+              </a:rPr>
+              <a:t>  background-color: #f5f5f5;</a:t>
+            </a:r>
+            <a:endParaRPr lang="en-US" sz="1400" dirty="0"/>
+          </a:p>
+          <a:p>
+            <a:pPr indent="0" marL="0">
+              <a:lnSpc>
+                <a:spcPct val="125000"/>
+              </a:lnSpc>
+              <a:buNone/>
+            </a:pPr>
+            <a:r>
+              <a:rPr lang="en-US" sz="1400" dirty="0">
+                <a:solidFill>
+                  <a:srgbClr val="C9D3F5"/>
+                </a:solidFill>
+                <a:latin typeface="Courier New" pitchFamily="34" charset="0"/>
+                <a:ea typeface="Courier New" pitchFamily="34" charset="-122"/>
+                <a:cs typeface="Courier New" pitchFamily="34" charset="-120"/>
+              </a:rPr>
+              <a:t>  background-image: url("pattern.png");</a:t>
+            </a:r>
+            <a:endParaRPr lang="en-US" sz="1400" dirty="0"/>
+          </a:p>
+          <a:p>
+            <a:pPr indent="0" marL="0">
+              <a:lnSpc>
+                <a:spcPct val="125000"/>
+              </a:lnSpc>
+              <a:buNone/>
+            </a:pPr>
+            <a:r>
+              <a:rPr lang="en-US" sz="1400" dirty="0">
+                <a:solidFill>
+                  <a:srgbClr val="C9D3F5"/>
+                </a:solidFill>
+                <a:latin typeface="Courier New" pitchFamily="34" charset="0"/>
+                <a:ea typeface="Courier New" pitchFamily="34" charset="-122"/>
+                <a:cs typeface="Courier New" pitchFamily="34" charset="-120"/>
+              </a:rPr>
+              <a:t>  background-repeat: no-repeat;</a:t>
+            </a:r>
+            <a:endParaRPr lang="en-US" sz="1400" dirty="0"/>
+          </a:p>
+          <a:p>
+            <a:pPr indent="0" marL="0">
+              <a:lnSpc>
+                <a:spcPct val="125000"/>
+              </a:lnSpc>
+              <a:buNone/>
+            </a:pPr>
+            <a:r>
+              <a:rPr lang="en-US" sz="1400" dirty="0">
+                <a:solidFill>
+                  <a:srgbClr val="C9D3F5"/>
+                </a:solidFill>
+                <a:latin typeface="Courier New" pitchFamily="34" charset="0"/>
+                <a:ea typeface="Courier New" pitchFamily="34" charset="-122"/>
+                <a:cs typeface="Courier New" pitchFamily="34" charset="-120"/>
+              </a:rPr>
+              <a:t>  background-position: center;</a:t>
+            </a:r>
+            <a:endParaRPr lang="en-US" sz="1400" dirty="0"/>
+          </a:p>
+          <a:p>
+            <a:pPr indent="0" marL="0">
+              <a:lnSpc>
+                <a:spcPct val="125000"/>
+              </a:lnSpc>
+              <a:buNone/>
+            </a:pPr>
+            <a:r>
+              <a:rPr lang="en-US" sz="1400" dirty="0">
+                <a:solidFill>
+                  <a:srgbClr val="C9D3F5"/>
+                </a:solidFill>
+                <a:latin typeface="Courier New" pitchFamily="34" charset="0"/>
+                <a:ea typeface="Courier New" pitchFamily="34" charset="-122"/>
+                <a:cs typeface="Courier New" pitchFamily="34" charset="-120"/>
+              </a:rPr>
+              <a:t>  background-size: cover;</a:t>
+            </a:r>
+            <a:endParaRPr lang="en-US" sz="1400" dirty="0"/>
+          </a:p>
+          <a:p>
+            <a:pPr indent="0" marL="0">
+              <a:lnSpc>
+                <a:spcPct val="125000"/>
+              </a:lnSpc>
+              <a:buNone/>
+            </a:pPr>
+            <a:r>
+              <a:rPr lang="en-US" sz="1400" dirty="0">
+                <a:solidFill>
+                  <a:srgbClr val="C9D3F5"/>
+                </a:solidFill>
+                <a:latin typeface="Courier New" pitchFamily="34" charset="0"/>
+                <a:ea typeface="Courier New" pitchFamily="34" charset="-122"/>
+                <a:cs typeface="Courier New" pitchFamily="34" charset="-120"/>
+              </a:rPr>
+              <a:t>}</a:t>
+            </a:r>
+            <a:endParaRPr lang="en-US" sz="1400" dirty="0"/>
+          </a:p>
+        </p:txBody>
+      </p:sp>
+      <p:sp>
+        <p:nvSpPr>
+          <p:cNvPr id="6" name="Text 4"/>
+          <p:cNvSpPr txBox="1"/>
+          <p:nvPr/>
+        </p:nvSpPr>
+        <p:spPr>
+          <a:xfrm>
+            <a:off x="640080" y="4610100"/>
+            <a:ext cx="10911535" cy="1653540"/>
+          </a:xfrm>
+          <a:prstGeom prst="rect">
+            <a:avLst/>
+          </a:prstGeom>
+          <a:noFill/>
+          <a:ln/>
+        </p:spPr>
+        <p:txBody>
+          <a:bodyPr wrap="square" lIns="0" tIns="0" rIns="0" bIns="0" rtlCol="0" anchor="t"/>
+          <a:lstStyle/>
+          <a:p>
+            <a:pPr indent="0" marL="0">
+              <a:buNone/>
+            </a:pPr>
+            <a:r>
+              <a:rPr lang="en-US" sz="1300" dirty="0">
+                <a:solidFill>
+                  <a:srgbClr val="26262F"/>
+                </a:solidFill>
+                <a:latin typeface="Calibri" pitchFamily="34" charset="0"/>
+                <a:ea typeface="Calibri" pitchFamily="34" charset="-122"/>
+                <a:cs typeface="Calibri" pitchFamily="34" charset="-120"/>
+              </a:rPr>
+              <a:t>A background shorthand combines several of these into one declaration, just like font does.</a:t>
+            </a:r>
+            <a:endParaRPr lang="en-US" sz="1300" dirty="0"/>
+          </a:p>
+        </p:txBody>
+      </p:sp>
+      <p:sp>
+        <p:nvSpPr>
+          <p:cNvPr id="7" name="Text 5"/>
+          <p:cNvSpPr txBox="1"/>
+          <p:nvPr/>
+        </p:nvSpPr>
+        <p:spPr>
+          <a:xfrm>
+            <a:off x="640080" y="6446520"/>
+            <a:ext cx="8686800" cy="292608"/>
+          </a:xfrm>
+          <a:prstGeom prst="rect">
+            <a:avLst/>
+          </a:prstGeom>
+          <a:noFill/>
+          <a:ln/>
+        </p:spPr>
+        <p:txBody>
+          <a:bodyPr wrap="square" lIns="0" tIns="0" rIns="0" bIns="0" rtlCol="0" anchor="ctr"/>
+          <a:lstStyle/>
+          <a:p>
+            <a:pPr algn="l" indent="0" marL="0">
+              <a:buNone/>
+            </a:pPr>
+            <a:r>
+              <a:rPr lang="en-US" sz="900" dirty="0">
+                <a:solidFill>
+                  <a:srgbClr val="5D5D72"/>
+                </a:solidFill>
+                <a:latin typeface="Calibri" pitchFamily="34" charset="0"/>
+                <a:ea typeface="Calibri" pitchFamily="34" charset="-122"/>
+                <a:cs typeface="Calibri" pitchFamily="34" charset="-120"/>
+              </a:rPr>
+              <a:t>Usman Akram  •  COMSATS University Islamabad</a:t>
+            </a:r>
+            <a:endParaRPr lang="en-US" sz="900" dirty="0"/>
+          </a:p>
+        </p:txBody>
+      </p:sp>
+      <p:sp>
+        <p:nvSpPr>
+          <p:cNvPr id="8" name="Text 6"/>
+          <p:cNvSpPr txBox="1"/>
+          <p:nvPr/>
+        </p:nvSpPr>
+        <p:spPr>
+          <a:xfrm>
+            <a:off x="11155680" y="6446520"/>
+            <a:ext cx="457200" cy="292608"/>
+          </a:xfrm>
+          <a:prstGeom prst="rect">
+            <a:avLst/>
+          </a:prstGeom>
+          <a:noFill/>
+          <a:ln/>
+        </p:spPr>
+        <p:txBody>
+          <a:bodyPr wrap="square" lIns="0" tIns="0" rIns="0" bIns="0" rtlCol="0" anchor="ctr"/>
+          <a:lstStyle/>
+          <a:p>
+            <a:pPr algn="r" indent="0" marL="0">
+              <a:buNone/>
+            </a:pPr>
+            <a:r>
+              <a:rPr lang="en-US" sz="900" dirty="0">
+                <a:solidFill>
+                  <a:srgbClr val="5D5D72"/>
+                </a:solidFill>
+                <a:latin typeface="Calibri" pitchFamily="34" charset="0"/>
+                <a:ea typeface="Calibri" pitchFamily="34" charset="-122"/>
+                <a:cs typeface="Calibri" pitchFamily="34" charset="-120"/>
+              </a:rPr>
+              <a:t>31</a:t>
+            </a:r>
+            <a:endParaRPr lang="en-US" sz="900" dirty="0"/>
+          </a:p>
+        </p:txBody>
+      </p:sp>
+    </p:spTree>
+  </p:cSld>
+  <p:clrMapOvr>
+    <a:masterClrMapping/>
+  </p:clrMapOvr>
+</p:sld>
+</file>
+
+<file path=ppt/slides/slide32.xml><?xml version="1.0" encoding="utf-8"?>
+<p:sld xmlns:a="http://schemas.openxmlformats.org/drawingml/2006/main" xmlns:r="http://schemas.openxmlformats.org/officeDocument/2006/relationships" xmlns:p="http://schemas.openxmlformats.org/presentationml/2006/main">
+  <p:cSld name="Slide 32">
     <p:bg>
       <p:bgPr>
         <a:solidFill>
@@ -16131,7 +17673,7 @@
                 <a:ea typeface="Calibri" pitchFamily="34" charset="-122"/>
                 <a:cs typeface="Calibri" pitchFamily="34" charset="-120"/>
               </a:rPr>
-              <a:t>31</a:t>
+              <a:t>32</a:t>
             </a:r>
             <a:endParaRPr lang="en-US" sz="900" dirty="0"/>
           </a:p>
@@ -16256,11 +17798,11 @@
         <p:spPr>
           <a:xfrm>
             <a:off x="640080" y="1965960"/>
-            <a:ext cx="10911535" cy="2221992"/>
+            <a:ext cx="10911535" cy="1615440"/>
           </a:xfrm>
           <a:prstGeom prst="roundRect">
             <a:avLst>
-              <a:gd name="adj" fmla="val 3292"/>
+              <a:gd name="adj" fmla="val 4528"/>
             </a:avLst>
           </a:prstGeom>
           <a:solidFill>
@@ -16278,7 +17820,7 @@
         <p:spPr>
           <a:xfrm>
             <a:off x="960120" y="2194560"/>
-            <a:ext cx="10271455" cy="1764792"/>
+            <a:ext cx="10271455" cy="1158240"/>
           </a:xfrm>
           <a:prstGeom prst="rect">
             <a:avLst/>
@@ -16379,8 +17921,8 @@
         </p:nvSpPr>
         <p:spPr>
           <a:xfrm>
-            <a:off x="640080" y="4416552"/>
-            <a:ext cx="10911535" cy="1847088"/>
+            <a:off x="640080" y="3810000"/>
+            <a:ext cx="10911535" cy="2453640"/>
           </a:xfrm>
           <a:prstGeom prst="rect">
             <a:avLst/>
@@ -16600,57 +18142,82 @@
       </p:sp>
       <p:sp>
         <p:nvSpPr>
-          <p:cNvPr id="4" name="Text 2"/>
-          <p:cNvSpPr txBox="1"/>
-          <p:nvPr/>
-        </p:nvSpPr>
-        <p:spPr>
-          <a:xfrm>
-            <a:off x="640080" y="1691640"/>
-            <a:ext cx="10911535" cy="411480"/>
-          </a:xfrm>
-          <a:prstGeom prst="rect">
-            <a:avLst/>
-          </a:prstGeom>
-          <a:noFill/>
-          <a:ln/>
-        </p:spPr>
-        <p:txBody>
-          <a:bodyPr wrap="square" lIns="0" tIns="0" rIns="0" bIns="0" rtlCol="0" anchor="ctr"/>
-          <a:lstStyle/>
-          <a:p>
-            <a:pPr indent="0" marL="0">
-              <a:buNone/>
-            </a:pPr>
-            <a:r>
-              <a:rPr lang="en-US" sz="1350" i="1" dirty="0">
-                <a:solidFill>
-                  <a:srgbClr val="5D5D72"/>
-                </a:solidFill>
-                <a:latin typeface="Calibri" pitchFamily="34" charset="0"/>
-                <a:ea typeface="Calibri" pitchFamily="34" charset="-122"/>
-                <a:cs typeface="Calibri" pitchFamily="34" charset="-120"/>
-              </a:rPr>
-              <a:t>&lt;p style="color: red; font-weight: bold;"&gt; — applies only to that one element.</a:t>
-            </a:r>
-            <a:endParaRPr lang="en-US" sz="1350" dirty="0"/>
-          </a:p>
-        </p:txBody>
-      </p:sp>
-      <p:sp>
-        <p:nvSpPr>
-          <p:cNvPr id="5" name="Shape 3"/>
+          <p:cNvPr id="4" name="Shape 2"/>
           <p:cNvSpPr/>
           <p:nvPr/>
         </p:nvSpPr>
         <p:spPr>
           <a:xfrm>
-            <a:off x="530352" y="2221992"/>
-            <a:ext cx="11130991" cy="4059936"/>
+            <a:off x="640080" y="1965960"/>
+            <a:ext cx="10911535" cy="786765"/>
           </a:xfrm>
           <a:prstGeom prst="roundRect">
             <a:avLst>
-              <a:gd name="adj" fmla="val 1351"/>
+              <a:gd name="adj" fmla="val 9298"/>
+            </a:avLst>
+          </a:prstGeom>
+          <a:solidFill>
+            <a:srgbClr val="1E1E4C"/>
+          </a:solidFill>
+          <a:ln/>
+        </p:spPr>
+      </p:sp>
+      <p:sp>
+        <p:nvSpPr>
+          <p:cNvPr id="5" name="Text 3"/>
+          <p:cNvSpPr txBox="1"/>
+          <p:nvPr/>
+        </p:nvSpPr>
+        <p:spPr>
+          <a:xfrm>
+            <a:off x="960120" y="2194560"/>
+            <a:ext cx="10271455" cy="329565"/>
+          </a:xfrm>
+          <a:prstGeom prst="rect">
+            <a:avLst/>
+          </a:prstGeom>
+          <a:noFill/>
+          <a:ln/>
+        </p:spPr>
+        <p:txBody>
+          <a:bodyPr wrap="square" lIns="0" tIns="0" rIns="0" bIns="0" rtlCol="0" anchor="t"/>
+          <a:lstStyle/>
+          <a:p>
+            <a:pPr indent="0" marL="0">
+              <a:lnSpc>
+                <a:spcPct val="125000"/>
+              </a:lnSpc>
+              <a:buNone/>
+            </a:pPr>
+            <a:r>
+              <a:rPr lang="en-US" sz="1250" dirty="0">
+                <a:solidFill>
+                  <a:srgbClr val="C9D3F5"/>
+                </a:solidFill>
+                <a:latin typeface="Courier New" pitchFamily="34" charset="0"/>
+                <a:ea typeface="Courier New" pitchFamily="34" charset="-122"/>
+                <a:cs typeface="Courier New" pitchFamily="34" charset="-120"/>
+              </a:rPr>
+              <a:t>&lt;p style="color: red; font-weight: bold;"&gt;This paragraph is styled inline.&lt;/p&gt;</a:t>
+            </a:r>
+            <a:endParaRPr lang="en-US" sz="1250" dirty="0"/>
+          </a:p>
+        </p:txBody>
+      </p:sp>
+      <p:sp>
+        <p:nvSpPr>
+          <p:cNvPr id="6" name="Shape 4"/>
+          <p:cNvSpPr/>
+          <p:nvPr/>
+        </p:nvSpPr>
+        <p:spPr>
+          <a:xfrm>
+            <a:off x="530352" y="2917317"/>
+            <a:ext cx="11130991" cy="3410331"/>
+          </a:xfrm>
+          <a:prstGeom prst="roundRect">
+            <a:avLst>
+              <a:gd name="adj" fmla="val 1609"/>
             </a:avLst>
           </a:prstGeom>
           <a:solidFill>
@@ -16673,7 +18240,7 @@
       </p:sp>
       <p:pic>
         <p:nvPicPr>
-          <p:cNvPr id="6" name="Image 0" descr="D:/GitHub/mern-web-book/docs/assets/img/lecture-05/inline-style.png">    </p:cNvPr>
+          <p:cNvPr id="7" name="Image 0" descr="D:/GitHub/mern-web-book/docs/assets/img/lecture-05/inline-style.png">    </p:cNvPr>
           <p:cNvPicPr>
             <a:picLocks noChangeAspect="1"/>
           </p:cNvPicPr>
@@ -16687,7 +18254,7 @@
         </p:blipFill>
         <p:spPr>
           <a:xfrm>
-            <a:off x="2171548" y="3665220"/>
+            <a:off x="2171548" y="4035742"/>
             <a:ext cx="7848600" cy="1173480"/>
           </a:xfrm>
           <a:prstGeom prst="rect">
@@ -16697,7 +18264,7 @@
       </p:pic>
       <p:sp>
         <p:nvSpPr>
-          <p:cNvPr id="7" name="Text 4"/>
+          <p:cNvPr id="8" name="Text 5"/>
           <p:cNvSpPr txBox="1"/>
           <p:nvPr/>
         </p:nvSpPr>
@@ -16736,7 +18303,7 @@
       </p:sp>
       <p:sp>
         <p:nvSpPr>
-          <p:cNvPr id="8" name="Text 5"/>
+          <p:cNvPr id="9" name="Text 6"/>
           <p:cNvSpPr txBox="1"/>
           <p:nvPr/>
         </p:nvSpPr>
@@ -16885,14 +18452,36 @@
       </p:sp>
       <p:sp>
         <p:nvSpPr>
-          <p:cNvPr id="4" name="Text 2"/>
+          <p:cNvPr id="4" name="Shape 2"/>
+          <p:cNvSpPr/>
+          <p:nvPr/>
+        </p:nvSpPr>
+        <p:spPr>
+          <a:xfrm>
+            <a:off x="640080" y="1965960"/>
+            <a:ext cx="10911535" cy="2948940"/>
+          </a:xfrm>
+          <a:prstGeom prst="roundRect">
+            <a:avLst>
+              <a:gd name="adj" fmla="val 2481"/>
+            </a:avLst>
+          </a:prstGeom>
+          <a:solidFill>
+            <a:srgbClr val="1E1E4C"/>
+          </a:solidFill>
+          <a:ln/>
+        </p:spPr>
+      </p:sp>
+      <p:sp>
+        <p:nvSpPr>
+          <p:cNvPr id="5" name="Text 3"/>
           <p:cNvSpPr txBox="1"/>
           <p:nvPr/>
         </p:nvSpPr>
         <p:spPr>
           <a:xfrm>
-            <a:off x="640080" y="1691640"/>
-            <a:ext cx="10911535" cy="411480"/>
+            <a:off x="960120" y="2194560"/>
+            <a:ext cx="10271455" cy="2491740"/>
           </a:xfrm>
           <a:prstGeom prst="rect">
             <a:avLst/>
@@ -16901,14 +18490,216 @@
           <a:ln/>
         </p:spPr>
         <p:txBody>
+          <a:bodyPr wrap="square" lIns="0" tIns="0" rIns="0" bIns="0" rtlCol="0" anchor="t"/>
+          <a:lstStyle/>
+          <a:p>
+            <a:pPr indent="0" marL="0">
+              <a:lnSpc>
+                <a:spcPct val="125000"/>
+              </a:lnSpc>
+              <a:buNone/>
+            </a:pPr>
+            <a:r>
+              <a:rPr lang="en-US" sz="1400" dirty="0">
+                <a:solidFill>
+                  <a:srgbClr val="C9D3F5"/>
+                </a:solidFill>
+                <a:latin typeface="Courier New" pitchFamily="34" charset="0"/>
+                <a:ea typeface="Courier New" pitchFamily="34" charset="-122"/>
+                <a:cs typeface="Courier New" pitchFamily="34" charset="-120"/>
+              </a:rPr>
+              <a:t>&lt;head&gt;</a:t>
+            </a:r>
+            <a:endParaRPr lang="en-US" sz="1400" dirty="0"/>
+          </a:p>
+          <a:p>
+            <a:pPr indent="0" marL="0">
+              <a:lnSpc>
+                <a:spcPct val="125000"/>
+              </a:lnSpc>
+              <a:buNone/>
+            </a:pPr>
+            <a:r>
+              <a:rPr lang="en-US" sz="1400" dirty="0">
+                <a:solidFill>
+                  <a:srgbClr val="C9D3F5"/>
+                </a:solidFill>
+                <a:latin typeface="Courier New" pitchFamily="34" charset="0"/>
+                <a:ea typeface="Courier New" pitchFamily="34" charset="-122"/>
+                <a:cs typeface="Courier New" pitchFamily="34" charset="-120"/>
+              </a:rPr>
+              <a:t>  &lt;style&gt;</a:t>
+            </a:r>
+            <a:endParaRPr lang="en-US" sz="1400" dirty="0"/>
+          </a:p>
+          <a:p>
+            <a:pPr indent="0" marL="0">
+              <a:lnSpc>
+                <a:spcPct val="125000"/>
+              </a:lnSpc>
+              <a:buNone/>
+            </a:pPr>
+            <a:r>
+              <a:rPr lang="en-US" sz="1400" dirty="0">
+                <a:solidFill>
+                  <a:srgbClr val="C9D3F5"/>
+                </a:solidFill>
+                <a:latin typeface="Courier New" pitchFamily="34" charset="0"/>
+                <a:ea typeface="Courier New" pitchFamily="34" charset="-122"/>
+                <a:cs typeface="Courier New" pitchFamily="34" charset="-120"/>
+              </a:rPr>
+              <a:t>    body { font-family: Arial, sans-serif; }</a:t>
+            </a:r>
+            <a:endParaRPr lang="en-US" sz="1400" dirty="0"/>
+          </a:p>
+          <a:p>
+            <a:pPr indent="0" marL="0">
+              <a:lnSpc>
+                <a:spcPct val="125000"/>
+              </a:lnSpc>
+              <a:buNone/>
+            </a:pPr>
+            <a:r>
+              <a:rPr lang="en-US" sz="1400" dirty="0">
+                <a:solidFill>
+                  <a:srgbClr val="C9D3F5"/>
+                </a:solidFill>
+                <a:latin typeface="Courier New" pitchFamily="34" charset="0"/>
+                <a:ea typeface="Courier New" pitchFamily="34" charset="-122"/>
+                <a:cs typeface="Courier New" pitchFamily="34" charset="-120"/>
+              </a:rPr>
+              <a:t>    h1 { color: navy; }</a:t>
+            </a:r>
+            <a:endParaRPr lang="en-US" sz="1400" dirty="0"/>
+          </a:p>
+          <a:p>
+            <a:pPr indent="0" marL="0">
+              <a:lnSpc>
+                <a:spcPct val="125000"/>
+              </a:lnSpc>
+              <a:buNone/>
+            </a:pPr>
+            <a:r>
+              <a:rPr lang="en-US" sz="1400" dirty="0">
+                <a:solidFill>
+                  <a:srgbClr val="C9D3F5"/>
+                </a:solidFill>
+                <a:latin typeface="Courier New" pitchFamily="34" charset="0"/>
+                <a:ea typeface="Courier New" pitchFamily="34" charset="-122"/>
+                <a:cs typeface="Courier New" pitchFamily="34" charset="-120"/>
+              </a:rPr>
+              <a:t>  &lt;/style&gt;</a:t>
+            </a:r>
+            <a:endParaRPr lang="en-US" sz="1400" dirty="0"/>
+          </a:p>
+          <a:p>
+            <a:pPr indent="0" marL="0">
+              <a:lnSpc>
+                <a:spcPct val="125000"/>
+              </a:lnSpc>
+              <a:buNone/>
+            </a:pPr>
+            <a:r>
+              <a:rPr lang="en-US" sz="1400" dirty="0">
+                <a:solidFill>
+                  <a:srgbClr val="C9D3F5"/>
+                </a:solidFill>
+                <a:latin typeface="Courier New" pitchFamily="34" charset="0"/>
+                <a:ea typeface="Courier New" pitchFamily="34" charset="-122"/>
+                <a:cs typeface="Courier New" pitchFamily="34" charset="-120"/>
+              </a:rPr>
+              <a:t>&lt;/head&gt;</a:t>
+            </a:r>
+            <a:endParaRPr lang="en-US" sz="1400" dirty="0"/>
+          </a:p>
+          <a:p>
+            <a:pPr indent="0" marL="0">
+              <a:lnSpc>
+                <a:spcPct val="125000"/>
+              </a:lnSpc>
+              <a:buNone/>
+            </a:pPr>
+            <a:r>
+              <a:rPr lang="en-US" sz="1400" dirty="0">
+                <a:solidFill>
+                  <a:srgbClr val="C9D3F5"/>
+                </a:solidFill>
+                <a:latin typeface="Courier New" pitchFamily="34" charset="0"/>
+                <a:ea typeface="Courier New" pitchFamily="34" charset="-122"/>
+                <a:cs typeface="Courier New" pitchFamily="34" charset="-120"/>
+              </a:rPr>
+              <a:t>&lt;body&gt;</a:t>
+            </a:r>
+            <a:endParaRPr lang="en-US" sz="1400" dirty="0"/>
+          </a:p>
+          <a:p>
+            <a:pPr indent="0" marL="0">
+              <a:lnSpc>
+                <a:spcPct val="125000"/>
+              </a:lnSpc>
+              <a:buNone/>
+            </a:pPr>
+            <a:r>
+              <a:rPr lang="en-US" sz="1400" dirty="0">
+                <a:solidFill>
+                  <a:srgbClr val="C9D3F5"/>
+                </a:solidFill>
+                <a:latin typeface="Courier New" pitchFamily="34" charset="0"/>
+                <a:ea typeface="Courier New" pitchFamily="34" charset="-122"/>
+                <a:cs typeface="Courier New" pitchFamily="34" charset="-120"/>
+              </a:rPr>
+              <a:t>  &lt;h1&gt;Welcome&lt;/h1&gt;</a:t>
+            </a:r>
+            <a:endParaRPr lang="en-US" sz="1400" dirty="0"/>
+          </a:p>
+          <a:p>
+            <a:pPr indent="0" marL="0">
+              <a:lnSpc>
+                <a:spcPct val="125000"/>
+              </a:lnSpc>
+              <a:buNone/>
+            </a:pPr>
+            <a:r>
+              <a:rPr lang="en-US" sz="1400" dirty="0">
+                <a:solidFill>
+                  <a:srgbClr val="C9D3F5"/>
+                </a:solidFill>
+                <a:latin typeface="Courier New" pitchFamily="34" charset="0"/>
+                <a:ea typeface="Courier New" pitchFamily="34" charset="-122"/>
+                <a:cs typeface="Courier New" pitchFamily="34" charset="-120"/>
+              </a:rPr>
+              <a:t>&lt;/body&gt;</a:t>
+            </a:r>
+            <a:endParaRPr lang="en-US" sz="1400" dirty="0"/>
+          </a:p>
+        </p:txBody>
+      </p:sp>
+      <p:sp>
+        <p:nvSpPr>
+          <p:cNvPr id="6" name="Text 4"/>
+          <p:cNvSpPr txBox="1"/>
+          <p:nvPr/>
+        </p:nvSpPr>
+        <p:spPr>
+          <a:xfrm>
+            <a:off x="640080" y="6446520"/>
+            <a:ext cx="8686800" cy="292608"/>
+          </a:xfrm>
+          <a:prstGeom prst="rect">
+            <a:avLst/>
+          </a:prstGeom>
+          <a:noFill/>
+          <a:ln/>
+        </p:spPr>
+        <p:txBody>
           <a:bodyPr wrap="square" lIns="0" tIns="0" rIns="0" bIns="0" rtlCol="0" anchor="ctr"/>
           <a:lstStyle/>
           <a:p>
-            <a:pPr indent="0" marL="0">
-              <a:buNone/>
-            </a:pPr>
-            <a:r>
-              <a:rPr lang="en-US" sz="1350" i="1" dirty="0">
+            <a:pPr algn="l" indent="0" marL="0">
+              <a:buNone/>
+            </a:pPr>
+            <a:r>
+              <a:rPr lang="en-US" sz="900" dirty="0">
                 <a:solidFill>
                   <a:srgbClr val="5D5D72"/>
                 </a:solidFill>
@@ -16916,103 +18707,6 @@
                 <a:ea typeface="Calibri" pitchFamily="34" charset="-122"/>
                 <a:cs typeface="Calibri" pitchFamily="34" charset="-120"/>
               </a:rPr>
-              <a:t>A &lt;style&gt; block inside &lt;head&gt; — applies to the whole page, but stuck in that one HTML file.</a:t>
-            </a:r>
-            <a:endParaRPr lang="en-US" sz="1350" dirty="0"/>
-          </a:p>
-        </p:txBody>
-      </p:sp>
-      <p:sp>
-        <p:nvSpPr>
-          <p:cNvPr id="5" name="Shape 3"/>
-          <p:cNvSpPr/>
-          <p:nvPr/>
-        </p:nvSpPr>
-        <p:spPr>
-          <a:xfrm>
-            <a:off x="530352" y="2221992"/>
-            <a:ext cx="11130991" cy="4059936"/>
-          </a:xfrm>
-          <a:prstGeom prst="roundRect">
-            <a:avLst>
-              <a:gd name="adj" fmla="val 1351"/>
-            </a:avLst>
-          </a:prstGeom>
-          <a:solidFill>
-            <a:srgbClr val="FFFFFF"/>
-          </a:solidFill>
-          <a:ln w="12700">
-            <a:solidFill>
-              <a:srgbClr val="E2E2EE"/>
-            </a:solidFill>
-            <a:prstDash val="solid"/>
-          </a:ln>
-          <a:effectLst>
-            <a:outerShdw sx="100000" sy="100000" kx="0" ky="0" algn="bl" rotWithShape="0" blurRad="101600" dist="38100" dir="5400000">
-              <a:srgbClr val="000000">
-                <a:alpha val="12000"/>
-              </a:srgbClr>
-            </a:outerShdw>
-          </a:effectLst>
-        </p:spPr>
-      </p:sp>
-      <p:pic>
-        <p:nvPicPr>
-          <p:cNvPr id="6" name="Image 0" descr="D:/GitHub/mern-web-book/docs/assets/img/lecture-05/internal-stylesheet.png">    </p:cNvPr>
-          <p:cNvPicPr>
-            <a:picLocks noChangeAspect="1"/>
-          </p:cNvPicPr>
-          <p:nvPr/>
-        </p:nvPicPr>
-        <p:blipFill>
-          <a:blip r:embed="rId1"/>
-          <a:stretch>
-            <a:fillRect/>
-          </a:stretch>
-        </p:blipFill>
-        <p:spPr>
-          <a:xfrm>
-            <a:off x="3611728" y="3528060"/>
-            <a:ext cx="4968240" cy="1447800"/>
-          </a:xfrm>
-          <a:prstGeom prst="rect">
-            <a:avLst/>
-          </a:prstGeom>
-        </p:spPr>
-      </p:pic>
-      <p:sp>
-        <p:nvSpPr>
-          <p:cNvPr id="7" name="Text 4"/>
-          <p:cNvSpPr txBox="1"/>
-          <p:nvPr/>
-        </p:nvSpPr>
-        <p:spPr>
-          <a:xfrm>
-            <a:off x="640080" y="6446520"/>
-            <a:ext cx="8686800" cy="292608"/>
-          </a:xfrm>
-          <a:prstGeom prst="rect">
-            <a:avLst/>
-          </a:prstGeom>
-          <a:noFill/>
-          <a:ln/>
-        </p:spPr>
-        <p:txBody>
-          <a:bodyPr wrap="square" lIns="0" tIns="0" rIns="0" bIns="0" rtlCol="0" anchor="ctr"/>
-          <a:lstStyle/>
-          <a:p>
-            <a:pPr algn="l" indent="0" marL="0">
-              <a:buNone/>
-            </a:pPr>
-            <a:r>
-              <a:rPr lang="en-US" sz="900" dirty="0">
-                <a:solidFill>
-                  <a:srgbClr val="5D5D72"/>
-                </a:solidFill>
-                <a:latin typeface="Calibri" pitchFamily="34" charset="0"/>
-                <a:ea typeface="Calibri" pitchFamily="34" charset="-122"/>
-                <a:cs typeface="Calibri" pitchFamily="34" charset="-120"/>
-              </a:rPr>
               <a:t>Usman Akram  •  COMSATS University Islamabad</a:t>
             </a:r>
             <a:endParaRPr lang="en-US" sz="900" dirty="0"/>
@@ -17021,7 +18715,7 @@
       </p:sp>
       <p:sp>
         <p:nvSpPr>
-          <p:cNvPr id="8" name="Text 5"/>
+          <p:cNvPr id="7" name="Text 5"/>
           <p:cNvSpPr txBox="1"/>
           <p:nvPr/>
         </p:nvSpPr>
@@ -17162,7 +18856,7 @@
                 <a:ea typeface="Cambria" pitchFamily="34" charset="-122"/>
                 <a:cs typeface="Cambria" pitchFamily="34" charset="-120"/>
               </a:rPr>
-              <a:t>3. External Style Sheets — Preferred</a:t>
+              <a:t>2. Internal Style Sheets, Rendered</a:t>
             </a:r>
             <a:endParaRPr lang="en-US" sz="3400" dirty="0"/>
           </a:p>
@@ -17170,41 +18864,111 @@
       </p:sp>
       <p:sp>
         <p:nvSpPr>
-          <p:cNvPr id="4" name="Shape 2"/>
+          <p:cNvPr id="4" name="Text 2"/>
+          <p:cNvSpPr txBox="1"/>
+          <p:nvPr/>
+        </p:nvSpPr>
+        <p:spPr>
+          <a:xfrm>
+            <a:off x="640080" y="1691640"/>
+            <a:ext cx="10911535" cy="411480"/>
+          </a:xfrm>
+          <a:prstGeom prst="rect">
+            <a:avLst/>
+          </a:prstGeom>
+          <a:noFill/>
+          <a:ln/>
+        </p:spPr>
+        <p:txBody>
+          <a:bodyPr wrap="square" lIns="0" tIns="0" rIns="0" bIns="0" rtlCol="0" anchor="ctr"/>
+          <a:lstStyle/>
+          <a:p>
+            <a:pPr indent="0" marL="0">
+              <a:buNone/>
+            </a:pPr>
+            <a:r>
+              <a:rPr lang="en-US" sz="1350" i="1" dirty="0">
+                <a:solidFill>
+                  <a:srgbClr val="5D5D72"/>
+                </a:solidFill>
+                <a:latin typeface="Calibri" pitchFamily="34" charset="0"/>
+                <a:ea typeface="Calibri" pitchFamily="34" charset="-122"/>
+                <a:cs typeface="Calibri" pitchFamily="34" charset="-120"/>
+              </a:rPr>
+              <a:t>A &lt;style&gt; block inside &lt;head&gt; — applies to the whole page, but stuck in that one HTML file.</a:t>
+            </a:r>
+            <a:endParaRPr lang="en-US" sz="1350" dirty="0"/>
+          </a:p>
+        </p:txBody>
+      </p:sp>
+      <p:sp>
+        <p:nvSpPr>
+          <p:cNvPr id="5" name="Shape 3"/>
           <p:cNvSpPr/>
           <p:nvPr/>
         </p:nvSpPr>
         <p:spPr>
           <a:xfrm>
-            <a:off x="640080" y="1965960"/>
-            <a:ext cx="10911535" cy="2194560"/>
+            <a:off x="530352" y="2221992"/>
+            <a:ext cx="11130991" cy="4059936"/>
           </a:xfrm>
           <a:prstGeom prst="roundRect">
             <a:avLst>
-              <a:gd name="adj" fmla="val 2500"/>
+              <a:gd name="adj" fmla="val 1351"/>
             </a:avLst>
           </a:prstGeom>
           <a:solidFill>
-            <a:srgbClr val="E6F6EE"/>
+            <a:srgbClr val="FFFFFF"/>
           </a:solidFill>
           <a:ln w="12700">
             <a:solidFill>
-              <a:srgbClr val="3FA66B"/>
+              <a:srgbClr val="E2E2EE"/>
             </a:solidFill>
             <a:prstDash val="solid"/>
           </a:ln>
-        </p:spPr>
-      </p:sp>
-      <p:sp>
-        <p:nvSpPr>
-          <p:cNvPr id="5" name="Text 3"/>
+          <a:effectLst>
+            <a:outerShdw sx="100000" sy="100000" kx="0" ky="0" algn="bl" rotWithShape="0" blurRad="101600" dist="38100" dir="5400000">
+              <a:srgbClr val="000000">
+                <a:alpha val="12000"/>
+              </a:srgbClr>
+            </a:outerShdw>
+          </a:effectLst>
+        </p:spPr>
+      </p:sp>
+      <p:pic>
+        <p:nvPicPr>
+          <p:cNvPr id="6" name="Image 0" descr="D:/GitHub/mern-web-book/docs/assets/img/lecture-05/internal-stylesheet.png">    </p:cNvPr>
+          <p:cNvPicPr>
+            <a:picLocks noChangeAspect="1"/>
+          </p:cNvPicPr>
+          <p:nvPr/>
+        </p:nvPicPr>
+        <p:blipFill>
+          <a:blip r:embed="rId1"/>
+          <a:stretch>
+            <a:fillRect/>
+          </a:stretch>
+        </p:blipFill>
+        <p:spPr>
+          <a:xfrm>
+            <a:off x="3611728" y="3528060"/>
+            <a:ext cx="4968240" cy="1447800"/>
+          </a:xfrm>
+          <a:prstGeom prst="rect">
+            <a:avLst/>
+          </a:prstGeom>
+        </p:spPr>
+      </p:pic>
+      <p:sp>
+        <p:nvSpPr>
+          <p:cNvPr id="7" name="Text 4"/>
           <p:cNvSpPr txBox="1"/>
           <p:nvPr/>
         </p:nvSpPr>
         <p:spPr>
           <a:xfrm>
-            <a:off x="868680" y="2103120"/>
-            <a:ext cx="10454335" cy="274320"/>
+            <a:off x="640080" y="6446520"/>
+            <a:ext cx="8686800" cy="292608"/>
           </a:xfrm>
           <a:prstGeom prst="rect">
             <a:avLst/>
@@ -17216,96 +18980,18 @@
           <a:bodyPr wrap="square" lIns="0" tIns="0" rIns="0" bIns="0" rtlCol="0" anchor="ctr"/>
           <a:lstStyle/>
           <a:p>
-            <a:pPr indent="0" marL="0">
-              <a:buNone/>
-            </a:pPr>
-            <a:r>
-              <a:rPr lang="en-US" sz="1000" b="1" spc="200" kern="0" dirty="0">
-                <a:solidFill>
-                  <a:srgbClr val="1F7A46"/>
+            <a:pPr algn="l" indent="0" marL="0">
+              <a:buNone/>
+            </a:pPr>
+            <a:r>
+              <a:rPr lang="en-US" sz="900" dirty="0">
+                <a:solidFill>
+                  <a:srgbClr val="5D5D72"/>
                 </a:solidFill>
                 <a:latin typeface="Calibri" pitchFamily="34" charset="0"/>
                 <a:ea typeface="Calibri" pitchFamily="34" charset="-122"/>
                 <a:cs typeface="Calibri" pitchFamily="34" charset="-120"/>
               </a:rPr>
-              <a:t>TIP</a:t>
-            </a:r>
-            <a:endParaRPr lang="en-US" sz="1000" dirty="0"/>
-          </a:p>
-        </p:txBody>
-      </p:sp>
-      <p:sp>
-        <p:nvSpPr>
-          <p:cNvPr id="6" name="Text 4"/>
-          <p:cNvSpPr txBox="1"/>
-          <p:nvPr/>
-        </p:nvSpPr>
-        <p:spPr>
-          <a:xfrm>
-            <a:off x="868680" y="2404872"/>
-            <a:ext cx="10454335" cy="1600200"/>
-          </a:xfrm>
-          <a:prstGeom prst="rect">
-            <a:avLst/>
-          </a:prstGeom>
-          <a:noFill/>
-          <a:ln/>
-        </p:spPr>
-        <p:txBody>
-          <a:bodyPr wrap="square" lIns="0" tIns="0" rIns="0" bIns="0" rtlCol="0" anchor="t"/>
-          <a:lstStyle/>
-          <a:p>
-            <a:pPr indent="0" marL="0">
-              <a:buNone/>
-            </a:pPr>
-            <a:r>
-              <a:rPr lang="en-US" sz="1250" dirty="0">
-                <a:solidFill>
-                  <a:srgbClr val="26262F"/>
-                </a:solidFill>
-                <a:latin typeface="Calibri" pitchFamily="34" charset="0"/>
-                <a:ea typeface="Calibri" pitchFamily="34" charset="-122"/>
-                <a:cs typeface="Calibri" pitchFamily="34" charset="-120"/>
-              </a:rPr>
-              <a:t>One file, many pages: every page links the same styles.css, so the whole site looks consistent and you edit one file to restyle it. Separation of concerns keeps HTML focused on content. Browsers cache the file, so pages after the first load faster. Designers and developers can work on CSS and HTML independently.</a:t>
-            </a:r>
-            <a:endParaRPr lang="en-US" sz="1250" dirty="0"/>
-          </a:p>
-        </p:txBody>
-      </p:sp>
-      <p:sp>
-        <p:nvSpPr>
-          <p:cNvPr id="7" name="Text 5"/>
-          <p:cNvSpPr txBox="1"/>
-          <p:nvPr/>
-        </p:nvSpPr>
-        <p:spPr>
-          <a:xfrm>
-            <a:off x="640080" y="6446520"/>
-            <a:ext cx="8686800" cy="292608"/>
-          </a:xfrm>
-          <a:prstGeom prst="rect">
-            <a:avLst/>
-          </a:prstGeom>
-          <a:noFill/>
-          <a:ln/>
-        </p:spPr>
-        <p:txBody>
-          <a:bodyPr wrap="square" lIns="0" tIns="0" rIns="0" bIns="0" rtlCol="0" anchor="ctr"/>
-          <a:lstStyle/>
-          <a:p>
-            <a:pPr algn="l" indent="0" marL="0">
-              <a:buNone/>
-            </a:pPr>
-            <a:r>
-              <a:rPr lang="en-US" sz="900" dirty="0">
-                <a:solidFill>
-                  <a:srgbClr val="5D5D72"/>
-                </a:solidFill>
-                <a:latin typeface="Calibri" pitchFamily="34" charset="0"/>
-                <a:ea typeface="Calibri" pitchFamily="34" charset="-122"/>
-                <a:cs typeface="Calibri" pitchFamily="34" charset="-120"/>
-              </a:rPr>
               <a:t>Usman Akram  •  COMSATS University Islamabad</a:t>
             </a:r>
             <a:endParaRPr lang="en-US" sz="900" dirty="0"/>
@@ -17314,7 +19000,7 @@
       </p:sp>
       <p:sp>
         <p:nvSpPr>
-          <p:cNvPr id="8" name="Text 6"/>
+          <p:cNvPr id="8" name="Text 5"/>
           <p:cNvSpPr txBox="1"/>
           <p:nvPr/>
         </p:nvSpPr>
@@ -17416,7 +19102,7 @@
                 <a:ea typeface="Calibri" pitchFamily="34" charset="-122"/>
                 <a:cs typeface="Calibri" pitchFamily="34" charset="-120"/>
               </a:rPr>
-              <a:t>SELECTORS</a:t>
+              <a:t>ATTACHING CSS</a:t>
             </a:r>
             <a:endParaRPr lang="en-US" sz="1300" dirty="0"/>
           </a:p>
@@ -17455,7 +19141,7 @@
                 <a:ea typeface="Cambria" pitchFamily="34" charset="-122"/>
                 <a:cs typeface="Cambria" pitchFamily="34" charset="-120"/>
               </a:rPr>
-              <a:t>Class Selector: .highlight</a:t>
+              <a:t>3. External Style Sheets — Preferred</a:t>
             </a:r>
             <a:endParaRPr lang="en-US" sz="3400" dirty="0"/>
           </a:p>
@@ -17463,14 +19149,41 @@
       </p:sp>
       <p:sp>
         <p:nvSpPr>
-          <p:cNvPr id="4" name="Text 2"/>
+          <p:cNvPr id="4" name="Shape 2"/>
+          <p:cNvSpPr/>
+          <p:nvPr/>
+        </p:nvSpPr>
+        <p:spPr>
+          <a:xfrm>
+            <a:off x="640080" y="1965960"/>
+            <a:ext cx="10911535" cy="2194560"/>
+          </a:xfrm>
+          <a:prstGeom prst="roundRect">
+            <a:avLst>
+              <a:gd name="adj" fmla="val 2500"/>
+            </a:avLst>
+          </a:prstGeom>
+          <a:solidFill>
+            <a:srgbClr val="E6F6EE"/>
+          </a:solidFill>
+          <a:ln w="12700">
+            <a:solidFill>
+              <a:srgbClr val="3FA66B"/>
+            </a:solidFill>
+            <a:prstDash val="solid"/>
+          </a:ln>
+        </p:spPr>
+      </p:sp>
+      <p:sp>
+        <p:nvSpPr>
+          <p:cNvPr id="5" name="Text 3"/>
           <p:cNvSpPr txBox="1"/>
           <p:nvPr/>
         </p:nvSpPr>
         <p:spPr>
           <a:xfrm>
-            <a:off x="640080" y="1691640"/>
-            <a:ext cx="10911535" cy="411480"/>
+            <a:off x="868680" y="2103120"/>
+            <a:ext cx="10454335" cy="274320"/>
           </a:xfrm>
           <a:prstGeom prst="rect">
             <a:avLst/>
@@ -17486,88 +19199,30 @@
               <a:buNone/>
             </a:pPr>
             <a:r>
-              <a:rPr lang="en-US" sz="1350" i="1" dirty="0">
-                <a:solidFill>
-                  <a:srgbClr val="5D5D72"/>
+              <a:rPr lang="en-US" sz="1000" b="1" spc="200" kern="0" dirty="0">
+                <a:solidFill>
+                  <a:srgbClr val="1F7A46"/>
                 </a:solidFill>
                 <a:latin typeface="Calibri" pitchFamily="34" charset="0"/>
                 <a:ea typeface="Calibri" pitchFamily="34" charset="-122"/>
                 <a:cs typeface="Calibri" pitchFamily="34" charset="-120"/>
               </a:rPr>
-              <a:t>.highlight { background-color: yellow; } — reusable across as many elements as you like.</a:t>
-            </a:r>
-            <a:endParaRPr lang="en-US" sz="1350" dirty="0"/>
-          </a:p>
-        </p:txBody>
-      </p:sp>
-      <p:sp>
-        <p:nvSpPr>
-          <p:cNvPr id="5" name="Shape 3"/>
-          <p:cNvSpPr/>
-          <p:nvPr/>
-        </p:nvSpPr>
-        <p:spPr>
-          <a:xfrm>
-            <a:off x="530352" y="2221992"/>
-            <a:ext cx="11130991" cy="4059936"/>
-          </a:xfrm>
-          <a:prstGeom prst="roundRect">
-            <a:avLst>
-              <a:gd name="adj" fmla="val 1351"/>
-            </a:avLst>
-          </a:prstGeom>
-          <a:solidFill>
-            <a:srgbClr val="FFFFFF"/>
-          </a:solidFill>
-          <a:ln w="12700">
-            <a:solidFill>
-              <a:srgbClr val="E2E2EE"/>
-            </a:solidFill>
-            <a:prstDash val="solid"/>
-          </a:ln>
-          <a:effectLst>
-            <a:outerShdw sx="100000" sy="100000" kx="0" ky="0" algn="bl" rotWithShape="0" blurRad="101600" dist="38100" dir="5400000">
-              <a:srgbClr val="000000">
-                <a:alpha val="12000"/>
-              </a:srgbClr>
-            </a:outerShdw>
-          </a:effectLst>
-        </p:spPr>
-      </p:sp>
-      <p:pic>
-        <p:nvPicPr>
-          <p:cNvPr id="6" name="Image 0" descr="D:/GitHub/mern-web-book/docs/assets/img/lecture-05/class-selector.png">    </p:cNvPr>
-          <p:cNvPicPr>
-            <a:picLocks noChangeAspect="1"/>
-          </p:cNvPicPr>
-          <p:nvPr/>
-        </p:nvPicPr>
-        <p:blipFill>
-          <a:blip r:embed="rId1"/>
-          <a:stretch>
-            <a:fillRect/>
-          </a:stretch>
-        </p:blipFill>
-        <p:spPr>
-          <a:xfrm>
-            <a:off x="640080" y="3943622"/>
-            <a:ext cx="10911535" cy="616676"/>
-          </a:xfrm>
-          <a:prstGeom prst="rect">
-            <a:avLst/>
-          </a:prstGeom>
-        </p:spPr>
-      </p:pic>
-      <p:sp>
-        <p:nvSpPr>
-          <p:cNvPr id="7" name="Text 4"/>
+              <a:t>TIP</a:t>
+            </a:r>
+            <a:endParaRPr lang="en-US" sz="1000" dirty="0"/>
+          </a:p>
+        </p:txBody>
+      </p:sp>
+      <p:sp>
+        <p:nvSpPr>
+          <p:cNvPr id="6" name="Text 4"/>
           <p:cNvSpPr txBox="1"/>
           <p:nvPr/>
         </p:nvSpPr>
         <p:spPr>
           <a:xfrm>
-            <a:off x="640080" y="6446520"/>
-            <a:ext cx="8686800" cy="292608"/>
+            <a:off x="868680" y="2404872"/>
+            <a:ext cx="10454335" cy="1600200"/>
           </a:xfrm>
           <a:prstGeom prst="rect">
             <a:avLst/>
@@ -17576,21 +19231,60 @@
           <a:ln/>
         </p:spPr>
         <p:txBody>
-          <a:bodyPr wrap="square" lIns="0" tIns="0" rIns="0" bIns="0" rtlCol="0" anchor="ctr"/>
-          <a:lstStyle/>
-          <a:p>
-            <a:pPr algn="l" indent="0" marL="0">
-              <a:buNone/>
-            </a:pPr>
-            <a:r>
-              <a:rPr lang="en-US" sz="900" dirty="0">
-                <a:solidFill>
-                  <a:srgbClr val="5D5D72"/>
+          <a:bodyPr wrap="square" lIns="0" tIns="0" rIns="0" bIns="0" rtlCol="0" anchor="t"/>
+          <a:lstStyle/>
+          <a:p>
+            <a:pPr indent="0" marL="0">
+              <a:buNone/>
+            </a:pPr>
+            <a:r>
+              <a:rPr lang="en-US" sz="1250" dirty="0">
+                <a:solidFill>
+                  <a:srgbClr val="26262F"/>
                 </a:solidFill>
                 <a:latin typeface="Calibri" pitchFamily="34" charset="0"/>
                 <a:ea typeface="Calibri" pitchFamily="34" charset="-122"/>
                 <a:cs typeface="Calibri" pitchFamily="34" charset="-120"/>
               </a:rPr>
+              <a:t>One file, many pages: every page links the same styles.css, so the whole site looks consistent and you edit one file to restyle it. Separation of concerns keeps HTML focused on content. Browsers cache the file, so pages after the first load faster. Designers and developers can work on CSS and HTML independently.</a:t>
+            </a:r>
+            <a:endParaRPr lang="en-US" sz="1250" dirty="0"/>
+          </a:p>
+        </p:txBody>
+      </p:sp>
+      <p:sp>
+        <p:nvSpPr>
+          <p:cNvPr id="7" name="Text 5"/>
+          <p:cNvSpPr txBox="1"/>
+          <p:nvPr/>
+        </p:nvSpPr>
+        <p:spPr>
+          <a:xfrm>
+            <a:off x="640080" y="6446520"/>
+            <a:ext cx="8686800" cy="292608"/>
+          </a:xfrm>
+          <a:prstGeom prst="rect">
+            <a:avLst/>
+          </a:prstGeom>
+          <a:noFill/>
+          <a:ln/>
+        </p:spPr>
+        <p:txBody>
+          <a:bodyPr wrap="square" lIns="0" tIns="0" rIns="0" bIns="0" rtlCol="0" anchor="ctr"/>
+          <a:lstStyle/>
+          <a:p>
+            <a:pPr algn="l" indent="0" marL="0">
+              <a:buNone/>
+            </a:pPr>
+            <a:r>
+              <a:rPr lang="en-US" sz="900" dirty="0">
+                <a:solidFill>
+                  <a:srgbClr val="5D5D72"/>
+                </a:solidFill>
+                <a:latin typeface="Calibri" pitchFamily="34" charset="0"/>
+                <a:ea typeface="Calibri" pitchFamily="34" charset="-122"/>
+                <a:cs typeface="Calibri" pitchFamily="34" charset="-120"/>
+              </a:rPr>
               <a:t>Usman Akram  •  COMSATS University Islamabad</a:t>
             </a:r>
             <a:endParaRPr lang="en-US" sz="900" dirty="0"/>
@@ -17599,7 +19293,7 @@
       </p:sp>
       <p:sp>
         <p:nvSpPr>
-          <p:cNvPr id="8" name="Text 5"/>
+          <p:cNvPr id="8" name="Text 6"/>
           <p:cNvSpPr txBox="1"/>
           <p:nvPr/>
         </p:nvSpPr>
@@ -17740,7 +19434,7 @@
                 <a:ea typeface="Cambria" pitchFamily="34" charset="-122"/>
                 <a:cs typeface="Cambria" pitchFamily="34" charset="-120"/>
               </a:rPr>
-              <a:t>ID Selector: #main-header</a:t>
+              <a:t>Class Selector: .highlight</a:t>
             </a:r>
             <a:endParaRPr lang="en-US" sz="3400" dirty="0"/>
           </a:p>
@@ -17748,57 +19442,151 @@
       </p:sp>
       <p:sp>
         <p:nvSpPr>
-          <p:cNvPr id="4" name="Text 2"/>
-          <p:cNvSpPr txBox="1"/>
-          <p:nvPr/>
-        </p:nvSpPr>
-        <p:spPr>
-          <a:xfrm>
-            <a:off x="640080" y="1691640"/>
-            <a:ext cx="10911535" cy="411480"/>
-          </a:xfrm>
-          <a:prstGeom prst="rect">
-            <a:avLst/>
-          </a:prstGeom>
-          <a:noFill/>
-          <a:ln/>
-        </p:spPr>
-        <p:txBody>
-          <a:bodyPr wrap="square" lIns="0" tIns="0" rIns="0" bIns="0" rtlCol="0" anchor="ctr"/>
-          <a:lstStyle/>
-          <a:p>
-            <a:pPr indent="0" marL="0">
-              <a:buNone/>
-            </a:pPr>
-            <a:r>
-              <a:rPr lang="en-US" sz="1350" i="1" dirty="0">
-                <a:solidFill>
-                  <a:srgbClr val="5D5D72"/>
-                </a:solidFill>
-                <a:latin typeface="Calibri" pitchFamily="34" charset="0"/>
-                <a:ea typeface="Calibri" pitchFamily="34" charset="-122"/>
-                <a:cs typeface="Calibri" pitchFamily="34" charset="-120"/>
-              </a:rPr>
-              <a:t>#main-header { font-size: 2rem; text-align: center; } — an id must be unique on the page.</a:t>
-            </a:r>
-            <a:endParaRPr lang="en-US" sz="1350" dirty="0"/>
-          </a:p>
-        </p:txBody>
-      </p:sp>
-      <p:sp>
-        <p:nvSpPr>
-          <p:cNvPr id="5" name="Shape 3"/>
+          <p:cNvPr id="4" name="Shape 2"/>
           <p:cNvSpPr/>
           <p:nvPr/>
         </p:nvSpPr>
         <p:spPr>
           <a:xfrm>
-            <a:off x="530352" y="2221992"/>
-            <a:ext cx="11130991" cy="4059936"/>
+            <a:off x="640080" y="1965960"/>
+            <a:ext cx="10911535" cy="1739265"/>
           </a:xfrm>
           <a:prstGeom prst="roundRect">
             <a:avLst>
-              <a:gd name="adj" fmla="val 1351"/>
+              <a:gd name="adj" fmla="val 4206"/>
+            </a:avLst>
+          </a:prstGeom>
+          <a:solidFill>
+            <a:srgbClr val="1E1E4C"/>
+          </a:solidFill>
+          <a:ln/>
+        </p:spPr>
+      </p:sp>
+      <p:sp>
+        <p:nvSpPr>
+          <p:cNvPr id="5" name="Text 3"/>
+          <p:cNvSpPr txBox="1"/>
+          <p:nvPr/>
+        </p:nvSpPr>
+        <p:spPr>
+          <a:xfrm>
+            <a:off x="960120" y="2194560"/>
+            <a:ext cx="10271455" cy="1282065"/>
+          </a:xfrm>
+          <a:prstGeom prst="rect">
+            <a:avLst/>
+          </a:prstGeom>
+          <a:noFill/>
+          <a:ln/>
+        </p:spPr>
+        <p:txBody>
+          <a:bodyPr wrap="square" lIns="0" tIns="0" rIns="0" bIns="0" rtlCol="0" anchor="t"/>
+          <a:lstStyle/>
+          <a:p>
+            <a:pPr indent="0" marL="0">
+              <a:lnSpc>
+                <a:spcPct val="125000"/>
+              </a:lnSpc>
+              <a:buNone/>
+            </a:pPr>
+            <a:r>
+              <a:rPr lang="en-US" sz="1250" dirty="0">
+                <a:solidFill>
+                  <a:srgbClr val="C9D3F5"/>
+                </a:solidFill>
+                <a:latin typeface="Courier New" pitchFamily="34" charset="0"/>
+                <a:ea typeface="Courier New" pitchFamily="34" charset="-122"/>
+                <a:cs typeface="Courier New" pitchFamily="34" charset="-120"/>
+              </a:rPr>
+              <a:t>&lt;p class="highlight"&gt;This text is important.&lt;/p&gt;</a:t>
+            </a:r>
+            <a:endParaRPr lang="en-US" sz="1250" dirty="0"/>
+          </a:p>
+          <a:p>
+            <a:pPr indent="0" marL="0">
+              <a:lnSpc>
+                <a:spcPct val="125000"/>
+              </a:lnSpc>
+              <a:buNone/>
+            </a:pPr>
+            <a:endParaRPr lang="en-US" sz="1250" dirty="0"/>
+          </a:p>
+          <a:p>
+            <a:pPr indent="0" marL="0">
+              <a:lnSpc>
+                <a:spcPct val="125000"/>
+              </a:lnSpc>
+              <a:buNone/>
+            </a:pPr>
+            <a:r>
+              <a:rPr lang="en-US" sz="1250" dirty="0">
+                <a:solidFill>
+                  <a:srgbClr val="C9D3F5"/>
+                </a:solidFill>
+                <a:latin typeface="Courier New" pitchFamily="34" charset="0"/>
+                <a:ea typeface="Courier New" pitchFamily="34" charset="-122"/>
+                <a:cs typeface="Courier New" pitchFamily="34" charset="-120"/>
+              </a:rPr>
+              <a:t>.highlight {</a:t>
+            </a:r>
+            <a:endParaRPr lang="en-US" sz="1250" dirty="0"/>
+          </a:p>
+          <a:p>
+            <a:pPr indent="0" marL="0">
+              <a:lnSpc>
+                <a:spcPct val="125000"/>
+              </a:lnSpc>
+              <a:buNone/>
+            </a:pPr>
+            <a:r>
+              <a:rPr lang="en-US" sz="1250" dirty="0">
+                <a:solidFill>
+                  <a:srgbClr val="C9D3F5"/>
+                </a:solidFill>
+                <a:latin typeface="Courier New" pitchFamily="34" charset="0"/>
+                <a:ea typeface="Courier New" pitchFamily="34" charset="-122"/>
+                <a:cs typeface="Courier New" pitchFamily="34" charset="-120"/>
+              </a:rPr>
+              <a:t>  background-color: yellow;</a:t>
+            </a:r>
+            <a:endParaRPr lang="en-US" sz="1250" dirty="0"/>
+          </a:p>
+          <a:p>
+            <a:pPr indent="0" marL="0">
+              <a:lnSpc>
+                <a:spcPct val="125000"/>
+              </a:lnSpc>
+              <a:buNone/>
+            </a:pPr>
+            <a:r>
+              <a:rPr lang="en-US" sz="1250" dirty="0">
+                <a:solidFill>
+                  <a:srgbClr val="C9D3F5"/>
+                </a:solidFill>
+                <a:latin typeface="Courier New" pitchFamily="34" charset="0"/>
+                <a:ea typeface="Courier New" pitchFamily="34" charset="-122"/>
+                <a:cs typeface="Courier New" pitchFamily="34" charset="-120"/>
+              </a:rPr>
+              <a:t>}</a:t>
+            </a:r>
+            <a:endParaRPr lang="en-US" sz="1250" dirty="0"/>
+          </a:p>
+        </p:txBody>
+      </p:sp>
+      <p:sp>
+        <p:nvSpPr>
+          <p:cNvPr id="6" name="Shape 4"/>
+          <p:cNvSpPr/>
+          <p:nvPr/>
+        </p:nvSpPr>
+        <p:spPr>
+          <a:xfrm>
+            <a:off x="530352" y="3869817"/>
+            <a:ext cx="11130991" cy="2457831"/>
+          </a:xfrm>
+          <a:prstGeom prst="roundRect">
+            <a:avLst>
+              <a:gd name="adj" fmla="val 2232"/>
             </a:avLst>
           </a:prstGeom>
           <a:solidFill>
@@ -17821,7 +19609,7 @@
       </p:sp>
       <p:pic>
         <p:nvPicPr>
-          <p:cNvPr id="6" name="Image 0" descr="D:/GitHub/mern-web-book/docs/assets/img/lecture-05/id-selector.png">    </p:cNvPr>
+          <p:cNvPr id="7" name="Image 0" descr="D:/GitHub/mern-web-book/docs/assets/img/lecture-05/class-selector.png">    </p:cNvPr>
           <p:cNvPicPr>
             <a:picLocks noChangeAspect="1"/>
           </p:cNvPicPr>
@@ -17835,8 +19623,8 @@
         </p:blipFill>
         <p:spPr>
           <a:xfrm>
-            <a:off x="3886048" y="3528060"/>
-            <a:ext cx="4419600" cy="1447800"/>
+            <a:off x="640080" y="4790395"/>
+            <a:ext cx="10911535" cy="616676"/>
           </a:xfrm>
           <a:prstGeom prst="rect">
             <a:avLst/>
@@ -17845,7 +19633,7 @@
       </p:pic>
       <p:sp>
         <p:nvSpPr>
-          <p:cNvPr id="7" name="Text 4"/>
+          <p:cNvPr id="8" name="Text 5"/>
           <p:cNvSpPr txBox="1"/>
           <p:nvPr/>
         </p:nvSpPr>
@@ -17884,7 +19672,7 @@
       </p:sp>
       <p:sp>
         <p:nvSpPr>
-          <p:cNvPr id="8" name="Text 5"/>
+          <p:cNvPr id="9" name="Text 6"/>
           <p:cNvSpPr txBox="1"/>
           <p:nvPr/>
         </p:nvSpPr>

--- a/slides/CSC336-Lecture-05-CSS-Fundamentals.pptx
+++ b/slides/CSC336-Lecture-05-CSS-Fundamentals.pptx
@@ -37,9 +37,10 @@
     <p:sldId id="285" r:id="rId31"/>
     <p:sldId id="286" r:id="rId32"/>
     <p:sldId id="287" r:id="rId33"/>
+    <p:sldId id="288" r:id="rId34"/>
   </p:sldIdLst>
   <p:notesMasterIdLst>
-    <p:notesMasterId r:id="rId34"/>
+    <p:notesMasterId r:id="rId35"/>
   </p:notesMasterIdLst>
   <p:sldSz cx="12192000" cy="6858000"/>
   <p:notesSz cx="6858000" cy="12192000"/>
@@ -2757,6 +2758,94 @@
             <a:fld id="{F7021451-1387-4CA6-816F-3879F97B5CBC}" type="slidenum">
               <a:rPr lang="en-US"/>
               <a:t>32</a:t>
+            </a:fld>
+            <a:endParaRPr lang="en-US"/>
+          </a:p>
+        </p:txBody>
+      </p:sp>
+    </p:spTree>
+    <p:extLst>
+      <p:ext uri="{BB962C8B-B14F-4D97-AF65-F5344CB8AC3E}">
+        <p14:creationId xmlns:p14="http://schemas.microsoft.com/office/powerpoint/2010/main" val="1024086991"/>
+      </p:ext>
+    </p:extLst>
+  </p:cSld>
+  <p:clrMapOvr>
+    <a:masterClrMapping/>
+  </p:clrMapOvr>
+</p:notes>
+</file>
+
+<file path=ppt/notesSlides/notesSlide33.xml><?xml version="1.0" encoding="utf-8"?>
+<p:notes xmlns:a="http://schemas.openxmlformats.org/drawingml/2006/main" xmlns:r="http://schemas.openxmlformats.org/officeDocument/2006/relationships" xmlns:p="http://schemas.openxmlformats.org/presentationml/2006/main">
+  <p:cSld>
+    <p:spTree>
+      <p:nvGrpSpPr>
+        <p:cNvPr id="1" name=""/>
+        <p:cNvGrpSpPr/>
+        <p:nvPr/>
+      </p:nvGrpSpPr>
+      <p:grpSpPr>
+        <a:xfrm>
+          <a:off x="0" y="0"/>
+          <a:ext cx="0" cy="0"/>
+          <a:chOff x="0" y="0"/>
+          <a:chExt cx="0" cy="0"/>
+        </a:xfrm>
+      </p:grpSpPr>
+      <p:sp>
+        <p:nvSpPr>
+          <p:cNvPr id="2" name="Slide Image Placeholder 1"/>
+          <p:cNvSpPr>
+            <a:spLocks noGrp="1" noRot="1" noChangeAspect="1"/>
+          </p:cNvSpPr>
+          <p:nvPr>
+            <p:ph type="sldImg"/>
+          </p:nvPr>
+        </p:nvSpPr>
+        <p:spPr/>
+      </p:sp>
+      <p:sp>
+        <p:nvSpPr>
+          <p:cNvPr id="3" name="Notes Placeholder 2"/>
+          <p:cNvSpPr>
+            <a:spLocks noGrp="1"/>
+          </p:cNvSpPr>
+          <p:nvPr>
+            <p:ph type="body" idx="1"/>
+          </p:nvPr>
+        </p:nvSpPr>
+        <p:spPr/>
+        <p:txBody>
+          <a:bodyPr/>
+          <a:lstStyle/>
+          <a:p>
+            <a:r>
+              <a:rPr lang="en-US" dirty="0"/>
+              <a:t/>
+            </a:r>
+            <a:endParaRPr lang="en-US" dirty="0"/>
+          </a:p>
+        </p:txBody>
+      </p:sp>
+      <p:sp>
+        <p:nvSpPr>
+          <p:cNvPr id="4" name="Slide Number Placeholder 3"/>
+          <p:cNvSpPr>
+            <a:spLocks noGrp="1"/>
+          </p:cNvSpPr>
+          <p:nvPr>
+            <p:ph type="sldNum" sz="quarter" idx="10"/>
+          </p:nvPr>
+        </p:nvSpPr>
+        <p:spPr/>
+        <p:txBody>
+          <a:bodyPr/>
+          <a:lstStyle/>
+          <a:p>
+            <a:fld id="{F7021451-1387-4CA6-816F-3879F97B5CBC}" type="slidenum">
+              <a:rPr lang="en-US"/>
+              <a:t>33</a:t>
             </a:fld>
             <a:endParaRPr lang="en-US"/>
           </a:p>
@@ -6300,12 +6389,12 @@
         </p:nvSpPr>
         <p:spPr>
           <a:xfrm>
-            <a:off x="640080" y="1965960"/>
-            <a:ext cx="10911535" cy="1348740"/>
+            <a:off x="640080" y="2501265"/>
+            <a:ext cx="5272888" cy="3272790"/>
           </a:xfrm>
           <a:prstGeom prst="roundRect">
             <a:avLst>
-              <a:gd name="adj" fmla="val 5424"/>
+              <a:gd name="adj" fmla="val 2235"/>
             </a:avLst>
           </a:prstGeom>
           <a:solidFill>
@@ -6322,8 +6411,8 @@
         </p:nvSpPr>
         <p:spPr>
           <a:xfrm>
-            <a:off x="960120" y="2194560"/>
-            <a:ext cx="10271455" cy="891540"/>
+            <a:off x="960120" y="2729865"/>
+            <a:ext cx="4632808" cy="2815590"/>
           </a:xfrm>
           <a:prstGeom prst="rect">
             <a:avLst/>
@@ -6342,7 +6431,7 @@
               <a:buNone/>
             </a:pPr>
             <a:r>
-              <a:rPr lang="en-US" sz="1400" dirty="0">
+              <a:rPr lang="en-US" sz="1300" dirty="0">
                 <a:solidFill>
                   <a:srgbClr val="C9D3F5"/>
                 </a:solidFill>
@@ -6350,9 +6439,9 @@
                 <a:ea typeface="Courier New" pitchFamily="34" charset="-122"/>
                 <a:cs typeface="Courier New" pitchFamily="34" charset="-120"/>
               </a:rPr>
-              <a:t>nav &gt; a   { color: navy; }    /* only DIRECT children, not grandchildren   */</a:t>
-            </a:r>
-            <a:endParaRPr lang="en-US" sz="1400" dirty="0"/>
+              <a:t>nav &gt; a { color: navy; font-weight: bold; }</a:t>
+            </a:r>
+            <a:endParaRPr lang="en-US" sz="1300" dirty="0"/>
           </a:p>
           <a:p>
             <a:pPr indent="0" marL="0">
@@ -6362,7 +6451,7 @@
               <a:buNone/>
             </a:pPr>
             <a:r>
-              <a:rPr lang="en-US" sz="1400" dirty="0">
+              <a:rPr lang="en-US" sz="1300" dirty="0">
                 <a:solidFill>
                   <a:srgbClr val="C9D3F5"/>
                 </a:solidFill>
@@ -6370,9 +6459,9 @@
                 <a:ea typeface="Courier New" pitchFamily="34" charset="-122"/>
                 <a:cs typeface="Courier New" pitchFamily="34" charset="-120"/>
               </a:rPr>
-              <a:t>h2 + p    { font-weight: bold; } /* the paragraph immediately after an h2  */</a:t>
-            </a:r>
-            <a:endParaRPr lang="en-US" sz="1400" dirty="0"/>
+              <a:t>h2 + p  { font-weight: bold; }</a:t>
+            </a:r>
+            <a:endParaRPr lang="en-US" sz="1300" dirty="0"/>
           </a:p>
           <a:p>
             <a:pPr indent="0" marL="0">
@@ -6382,7 +6471,7 @@
               <a:buNone/>
             </a:pPr>
             <a:r>
-              <a:rPr lang="en-US" sz="1400" dirty="0">
+              <a:rPr lang="en-US" sz="1300" dirty="0">
                 <a:solidFill>
                   <a:srgbClr val="C9D3F5"/>
                 </a:solidFill>
@@ -6390,22 +6479,229 @@
                 <a:ea typeface="Courier New" pitchFamily="34" charset="-122"/>
                 <a:cs typeface="Courier New" pitchFamily="34" charset="-120"/>
               </a:rPr>
-              <a:t>h2 ~ p    { color: gray; }       /* every p that follows an h2, not just one */</a:t>
-            </a:r>
-            <a:endParaRPr lang="en-US" sz="1400" dirty="0"/>
-          </a:p>
-        </p:txBody>
-      </p:sp>
-      <p:sp>
-        <p:nvSpPr>
-          <p:cNvPr id="6" name="Text 4"/>
+              <a:t>h2 ~ p  { color: gray; }</a:t>
+            </a:r>
+            <a:endParaRPr lang="en-US" sz="1300" dirty="0"/>
+          </a:p>
+          <a:p>
+            <a:pPr indent="0" marL="0">
+              <a:lnSpc>
+                <a:spcPct val="125000"/>
+              </a:lnSpc>
+              <a:buNone/>
+            </a:pPr>
+            <a:endParaRPr lang="en-US" sz="1300" dirty="0"/>
+          </a:p>
+          <a:p>
+            <a:pPr indent="0" marL="0">
+              <a:lnSpc>
+                <a:spcPct val="125000"/>
+              </a:lnSpc>
+              <a:buNone/>
+            </a:pPr>
+            <a:r>
+              <a:rPr lang="en-US" sz="1300" dirty="0">
+                <a:solidFill>
+                  <a:srgbClr val="C9D3F5"/>
+                </a:solidFill>
+                <a:latin typeface="Courier New" pitchFamily="34" charset="0"/>
+                <a:ea typeface="Courier New" pitchFamily="34" charset="-122"/>
+                <a:cs typeface="Courier New" pitchFamily="34" charset="-120"/>
+              </a:rPr>
+              <a:t>&lt;nav&gt;</a:t>
+            </a:r>
+            <a:endParaRPr lang="en-US" sz="1300" dirty="0"/>
+          </a:p>
+          <a:p>
+            <a:pPr indent="0" marL="0">
+              <a:lnSpc>
+                <a:spcPct val="125000"/>
+              </a:lnSpc>
+              <a:buNone/>
+            </a:pPr>
+            <a:r>
+              <a:rPr lang="en-US" sz="1300" dirty="0">
+                <a:solidFill>
+                  <a:srgbClr val="C9D3F5"/>
+                </a:solidFill>
+                <a:latin typeface="Courier New" pitchFamily="34" charset="0"/>
+                <a:ea typeface="Courier New" pitchFamily="34" charset="-122"/>
+                <a:cs typeface="Courier New" pitchFamily="34" charset="-120"/>
+              </a:rPr>
+              <a:t>  &lt;a&gt;Direct link&lt;/a&gt;</a:t>
+            </a:r>
+            <a:endParaRPr lang="en-US" sz="1300" dirty="0"/>
+          </a:p>
+          <a:p>
+            <a:pPr indent="0" marL="0">
+              <a:lnSpc>
+                <a:spcPct val="125000"/>
+              </a:lnSpc>
+              <a:buNone/>
+            </a:pPr>
+            <a:r>
+              <a:rPr lang="en-US" sz="1300" dirty="0">
+                <a:solidFill>
+                  <a:srgbClr val="C9D3F5"/>
+                </a:solidFill>
+                <a:latin typeface="Courier New" pitchFamily="34" charset="0"/>
+                <a:ea typeface="Courier New" pitchFamily="34" charset="-122"/>
+                <a:cs typeface="Courier New" pitchFamily="34" charset="-120"/>
+              </a:rPr>
+              <a:t>  &lt;div&gt;&lt;a&gt;Grandchild link&lt;/a&gt;&lt;/div&gt;</a:t>
+            </a:r>
+            <a:endParaRPr lang="en-US" sz="1300" dirty="0"/>
+          </a:p>
+          <a:p>
+            <a:pPr indent="0" marL="0">
+              <a:lnSpc>
+                <a:spcPct val="125000"/>
+              </a:lnSpc>
+              <a:buNone/>
+            </a:pPr>
+            <a:r>
+              <a:rPr lang="en-US" sz="1300" dirty="0">
+                <a:solidFill>
+                  <a:srgbClr val="C9D3F5"/>
+                </a:solidFill>
+                <a:latin typeface="Courier New" pitchFamily="34" charset="0"/>
+                <a:ea typeface="Courier New" pitchFamily="34" charset="-122"/>
+                <a:cs typeface="Courier New" pitchFamily="34" charset="-120"/>
+              </a:rPr>
+              <a:t>&lt;/nav&gt;</a:t>
+            </a:r>
+            <a:endParaRPr lang="en-US" sz="1300" dirty="0"/>
+          </a:p>
+          <a:p>
+            <a:pPr indent="0" marL="0">
+              <a:lnSpc>
+                <a:spcPct val="125000"/>
+              </a:lnSpc>
+              <a:buNone/>
+            </a:pPr>
+            <a:r>
+              <a:rPr lang="en-US" sz="1300" dirty="0">
+                <a:solidFill>
+                  <a:srgbClr val="C9D3F5"/>
+                </a:solidFill>
+                <a:latin typeface="Courier New" pitchFamily="34" charset="0"/>
+                <a:ea typeface="Courier New" pitchFamily="34" charset="-122"/>
+                <a:cs typeface="Courier New" pitchFamily="34" charset="-120"/>
+              </a:rPr>
+              <a:t>&lt;h2&gt;A Heading&lt;/h2&gt;</a:t>
+            </a:r>
+            <a:endParaRPr lang="en-US" sz="1300" dirty="0"/>
+          </a:p>
+          <a:p>
+            <a:pPr indent="0" marL="0">
+              <a:lnSpc>
+                <a:spcPct val="125000"/>
+              </a:lnSpc>
+              <a:buNone/>
+            </a:pPr>
+            <a:r>
+              <a:rPr lang="en-US" sz="1300" dirty="0">
+                <a:solidFill>
+                  <a:srgbClr val="C9D3F5"/>
+                </a:solidFill>
+                <a:latin typeface="Courier New" pitchFamily="34" charset="0"/>
+                <a:ea typeface="Courier New" pitchFamily="34" charset="-122"/>
+                <a:cs typeface="Courier New" pitchFamily="34" charset="-120"/>
+              </a:rPr>
+              <a:t>&lt;p&gt;Immediately after&lt;/p&gt;</a:t>
+            </a:r>
+            <a:endParaRPr lang="en-US" sz="1300" dirty="0"/>
+          </a:p>
+          <a:p>
+            <a:pPr indent="0" marL="0">
+              <a:lnSpc>
+                <a:spcPct val="125000"/>
+              </a:lnSpc>
+              <a:buNone/>
+            </a:pPr>
+            <a:r>
+              <a:rPr lang="en-US" sz="1300" dirty="0">
+                <a:solidFill>
+                  <a:srgbClr val="C9D3F5"/>
+                </a:solidFill>
+                <a:latin typeface="Courier New" pitchFamily="34" charset="0"/>
+                <a:ea typeface="Courier New" pitchFamily="34" charset="-122"/>
+                <a:cs typeface="Courier New" pitchFamily="34" charset="-120"/>
+              </a:rPr>
+              <a:t>&lt;p&gt;Further down&lt;/p&gt;</a:t>
+            </a:r>
+            <a:endParaRPr lang="en-US" sz="1300" dirty="0"/>
+          </a:p>
+        </p:txBody>
+      </p:sp>
+      <p:sp>
+        <p:nvSpPr>
+          <p:cNvPr id="6" name="Shape 4"/>
+          <p:cNvSpPr/>
+          <p:nvPr/>
+        </p:nvSpPr>
+        <p:spPr>
+          <a:xfrm>
+            <a:off x="6169000" y="1947672"/>
+            <a:ext cx="5492344" cy="4379976"/>
+          </a:xfrm>
+          <a:prstGeom prst="roundRect">
+            <a:avLst>
+              <a:gd name="adj" fmla="val 1253"/>
+            </a:avLst>
+          </a:prstGeom>
+          <a:solidFill>
+            <a:srgbClr val="FFFFFF"/>
+          </a:solidFill>
+          <a:ln w="12700">
+            <a:solidFill>
+              <a:srgbClr val="E2E2EE"/>
+            </a:solidFill>
+            <a:prstDash val="solid"/>
+          </a:ln>
+          <a:effectLst>
+            <a:outerShdw sx="100000" sy="100000" kx="0" ky="0" algn="bl" rotWithShape="0" blurRad="101600" dist="38100" dir="5400000">
+              <a:srgbClr val="000000">
+                <a:alpha val="12000"/>
+              </a:srgbClr>
+            </a:outerShdw>
+          </a:effectLst>
+        </p:spPr>
+      </p:sp>
+      <p:pic>
+        <p:nvPicPr>
+          <p:cNvPr id="7" name="Image 0" descr="D:/GitHub/mern-web-book/docs/assets/img/lecture-05/combinators-demo.png">    </p:cNvPr>
+          <p:cNvPicPr>
+            <a:picLocks noChangeAspect="1"/>
+          </p:cNvPicPr>
+          <p:nvPr/>
+        </p:nvPicPr>
+        <p:blipFill>
+          <a:blip r:embed="rId1"/>
+          <a:stretch>
+            <a:fillRect/>
+          </a:stretch>
+        </p:blipFill>
+        <p:spPr>
+          <a:xfrm>
+            <a:off x="6278728" y="3194381"/>
+            <a:ext cx="5272888" cy="1886557"/>
+          </a:xfrm>
+          <a:prstGeom prst="rect">
+            <a:avLst/>
+          </a:prstGeom>
+        </p:spPr>
+      </p:pic>
+      <p:sp>
+        <p:nvSpPr>
+          <p:cNvPr id="8" name="Text 5"/>
           <p:cNvSpPr txBox="1"/>
           <p:nvPr/>
         </p:nvSpPr>
         <p:spPr>
           <a:xfrm>
-            <a:off x="640080" y="3543300"/>
-            <a:ext cx="10911535" cy="2720340"/>
+            <a:off x="640080" y="6446520"/>
+            <a:ext cx="8686800" cy="292608"/>
           </a:xfrm>
           <a:prstGeom prst="rect">
             <a:avLst/>
@@ -6414,60 +6710,21 @@
           <a:ln/>
         </p:spPr>
         <p:txBody>
-          <a:bodyPr wrap="square" lIns="0" tIns="0" rIns="0" bIns="0" rtlCol="0" anchor="t"/>
-          <a:lstStyle/>
-          <a:p>
-            <a:pPr indent="0" marL="0">
-              <a:buNone/>
-            </a:pPr>
-            <a:r>
-              <a:rPr lang="en-US" sz="1300" dirty="0">
-                <a:solidFill>
-                  <a:srgbClr val="26262F"/>
+          <a:bodyPr wrap="square" lIns="0" tIns="0" rIns="0" bIns="0" rtlCol="0" anchor="ctr"/>
+          <a:lstStyle/>
+          <a:p>
+            <a:pPr algn="l" indent="0" marL="0">
+              <a:buNone/>
+            </a:pPr>
+            <a:r>
+              <a:rPr lang="en-US" sz="900" dirty="0">
+                <a:solidFill>
+                  <a:srgbClr val="5D5D72"/>
                 </a:solidFill>
                 <a:latin typeface="Calibri" pitchFamily="34" charset="0"/>
                 <a:ea typeface="Calibri" pitchFamily="34" charset="-122"/>
                 <a:cs typeface="Calibri" pitchFamily="34" charset="-120"/>
               </a:rPr>
-              <a:t>&gt; is stricter than a plain descendant selector (space) — it skips anything nested more than one level deep.</a:t>
-            </a:r>
-            <a:endParaRPr lang="en-US" sz="1300" dirty="0"/>
-          </a:p>
-        </p:txBody>
-      </p:sp>
-      <p:sp>
-        <p:nvSpPr>
-          <p:cNvPr id="7" name="Text 5"/>
-          <p:cNvSpPr txBox="1"/>
-          <p:nvPr/>
-        </p:nvSpPr>
-        <p:spPr>
-          <a:xfrm>
-            <a:off x="640080" y="6446520"/>
-            <a:ext cx="8686800" cy="292608"/>
-          </a:xfrm>
-          <a:prstGeom prst="rect">
-            <a:avLst/>
-          </a:prstGeom>
-          <a:noFill/>
-          <a:ln/>
-        </p:spPr>
-        <p:txBody>
-          <a:bodyPr wrap="square" lIns="0" tIns="0" rIns="0" bIns="0" rtlCol="0" anchor="ctr"/>
-          <a:lstStyle/>
-          <a:p>
-            <a:pPr algn="l" indent="0" marL="0">
-              <a:buNone/>
-            </a:pPr>
-            <a:r>
-              <a:rPr lang="en-US" sz="900" dirty="0">
-                <a:solidFill>
-                  <a:srgbClr val="5D5D72"/>
-                </a:solidFill>
-                <a:latin typeface="Calibri" pitchFamily="34" charset="0"/>
-                <a:ea typeface="Calibri" pitchFamily="34" charset="-122"/>
-                <a:cs typeface="Calibri" pitchFamily="34" charset="-120"/>
-              </a:rPr>
               <a:t>Usman Akram  •  COMSATS University Islamabad</a:t>
             </a:r>
             <a:endParaRPr lang="en-US" sz="900" dirty="0"/>
@@ -6476,7 +6733,7 @@
       </p:sp>
       <p:sp>
         <p:nvSpPr>
-          <p:cNvPr id="8" name="Text 6"/>
+          <p:cNvPr id="9" name="Text 6"/>
           <p:cNvSpPr txBox="1"/>
           <p:nvPr/>
         </p:nvSpPr>
@@ -7716,12 +7973,12 @@
         </p:nvSpPr>
         <p:spPr>
           <a:xfrm>
-            <a:off x="640080" y="2240280"/>
-            <a:ext cx="10911535" cy="2215515"/>
+            <a:off x="640080" y="3133725"/>
+            <a:ext cx="5272888" cy="2282190"/>
           </a:xfrm>
           <a:prstGeom prst="roundRect">
             <a:avLst>
-              <a:gd name="adj" fmla="val 3302"/>
+              <a:gd name="adj" fmla="val 3205"/>
             </a:avLst>
           </a:prstGeom>
           <a:solidFill>
@@ -7738,8 +7995,8 @@
         </p:nvSpPr>
         <p:spPr>
           <a:xfrm>
-            <a:off x="960120" y="2468880"/>
-            <a:ext cx="10271455" cy="1758315"/>
+            <a:off x="960120" y="3362325"/>
+            <a:ext cx="4632808" cy="1824990"/>
           </a:xfrm>
           <a:prstGeom prst="rect">
             <a:avLst/>
@@ -7758,7 +8015,7 @@
               <a:buNone/>
             </a:pPr>
             <a:r>
-              <a:rPr lang="en-US" sz="1250" dirty="0">
+              <a:rPr lang="en-US" sz="1300" dirty="0">
                 <a:solidFill>
                   <a:srgbClr val="C9D3F5"/>
                 </a:solidFill>
@@ -7768,7 +8025,7 @@
               </a:rPr>
               <a:t>li:first-child {</a:t>
             </a:r>
-            <a:endParaRPr lang="en-US" sz="1250" dirty="0"/>
+            <a:endParaRPr lang="en-US" sz="1300" dirty="0"/>
           </a:p>
           <a:p>
             <a:pPr indent="0" marL="0">
@@ -7778,7 +8035,7 @@
               <a:buNone/>
             </a:pPr>
             <a:r>
-              <a:rPr lang="en-US" sz="1250" dirty="0">
+              <a:rPr lang="en-US" sz="1300" dirty="0">
                 <a:solidFill>
                   <a:srgbClr val="C9D3F5"/>
                 </a:solidFill>
@@ -7788,7 +8045,7 @@
               </a:rPr>
               <a:t>  font-weight: bold;</a:t>
             </a:r>
-            <a:endParaRPr lang="en-US" sz="1250" dirty="0"/>
+            <a:endParaRPr lang="en-US" sz="1300" dirty="0"/>
           </a:p>
           <a:p>
             <a:pPr indent="0" marL="0">
@@ -7798,7 +8055,7 @@
               <a:buNone/>
             </a:pPr>
             <a:r>
-              <a:rPr lang="en-US" sz="1250" dirty="0">
+              <a:rPr lang="en-US" sz="1300" dirty="0">
                 <a:solidFill>
                   <a:srgbClr val="C9D3F5"/>
                 </a:solidFill>
@@ -7808,7 +8065,7 @@
               </a:rPr>
               <a:t>}</a:t>
             </a:r>
-            <a:endParaRPr lang="en-US" sz="1250" dirty="0"/>
+            <a:endParaRPr lang="en-US" sz="1300" dirty="0"/>
           </a:p>
           <a:p>
             <a:pPr indent="0" marL="0">
@@ -7817,7 +8074,7 @@
               </a:lnSpc>
               <a:buNone/>
             </a:pPr>
-            <a:endParaRPr lang="en-US" sz="1250" dirty="0"/>
+            <a:endParaRPr lang="en-US" sz="1300" dirty="0"/>
           </a:p>
           <a:p>
             <a:pPr indent="0" marL="0">
@@ -7827,7 +8084,7 @@
               <a:buNone/>
             </a:pPr>
             <a:r>
-              <a:rPr lang="en-US" sz="1250" dirty="0">
+              <a:rPr lang="en-US" sz="1300" dirty="0">
                 <a:solidFill>
                   <a:srgbClr val="C9D3F5"/>
                 </a:solidFill>
@@ -7837,7 +8094,7 @@
               </a:rPr>
               <a:t>button:disabled {</a:t>
             </a:r>
-            <a:endParaRPr lang="en-US" sz="1250" dirty="0"/>
+            <a:endParaRPr lang="en-US" sz="1300" dirty="0"/>
           </a:p>
           <a:p>
             <a:pPr indent="0" marL="0">
@@ -7847,7 +8104,7 @@
               <a:buNone/>
             </a:pPr>
             <a:r>
-              <a:rPr lang="en-US" sz="1250" dirty="0">
+              <a:rPr lang="en-US" sz="1300" dirty="0">
                 <a:solidFill>
                   <a:srgbClr val="C9D3F5"/>
                 </a:solidFill>
@@ -7857,7 +8114,7 @@
               </a:rPr>
               <a:t>  opacity: 0.5;</a:t>
             </a:r>
-            <a:endParaRPr lang="en-US" sz="1250" dirty="0"/>
+            <a:endParaRPr lang="en-US" sz="1300" dirty="0"/>
           </a:p>
           <a:p>
             <a:pPr indent="0" marL="0">
@@ -7867,7 +8124,7 @@
               <a:buNone/>
             </a:pPr>
             <a:r>
-              <a:rPr lang="en-US" sz="1250" dirty="0">
+              <a:rPr lang="en-US" sz="1300" dirty="0">
                 <a:solidFill>
                   <a:srgbClr val="C9D3F5"/>
                 </a:solidFill>
@@ -7877,7 +8134,7 @@
               </a:rPr>
               <a:t>}</a:t>
             </a:r>
-            <a:endParaRPr lang="en-US" sz="1250" dirty="0"/>
+            <a:endParaRPr lang="en-US" sz="1300" dirty="0"/>
           </a:p>
         </p:txBody>
       </p:sp>
@@ -7889,12 +8146,12 @@
         </p:nvSpPr>
         <p:spPr>
           <a:xfrm>
-            <a:off x="530352" y="4620387"/>
-            <a:ext cx="11130991" cy="1707261"/>
+            <a:off x="6169000" y="2221992"/>
+            <a:ext cx="5492344" cy="4105656"/>
           </a:xfrm>
           <a:prstGeom prst="roundRect">
             <a:avLst>
-              <a:gd name="adj" fmla="val 3214"/>
+              <a:gd name="adj" fmla="val 1336"/>
             </a:avLst>
           </a:prstGeom>
           <a:solidFill>
@@ -7931,8 +8188,8 @@
         </p:blipFill>
         <p:spPr>
           <a:xfrm>
-            <a:off x="5100715" y="4730115"/>
-            <a:ext cx="1990265" cy="1487805"/>
+            <a:off x="6591071" y="2537460"/>
+            <a:ext cx="4648200" cy="3474720"/>
           </a:xfrm>
           <a:prstGeom prst="rect">
             <a:avLst/>
@@ -8573,7 +8830,7 @@
         </p:nvSpPr>
         <p:spPr>
           <a:xfrm>
-            <a:off x="685800" y="2679192"/>
+            <a:off x="685800" y="2689860"/>
             <a:ext cx="457200" cy="457200"/>
           </a:xfrm>
           <a:prstGeom prst="ellipse">
@@ -8593,7 +8850,7 @@
         </p:nvSpPr>
         <p:spPr>
           <a:xfrm>
-            <a:off x="685800" y="2679192"/>
+            <a:off x="685800" y="2689860"/>
             <a:ext cx="457200" cy="457200"/>
           </a:xfrm>
           <a:prstGeom prst="rect">
@@ -8632,7 +8889,7 @@
         </p:nvSpPr>
         <p:spPr>
           <a:xfrm>
-            <a:off x="1371600" y="2606040"/>
+            <a:off x="1371600" y="2616708"/>
             <a:ext cx="10180015" cy="640080"/>
           </a:xfrm>
           <a:prstGeom prst="rect">
@@ -8671,7 +8928,7 @@
         </p:nvSpPr>
         <p:spPr>
           <a:xfrm>
-            <a:off x="685800" y="3392424"/>
+            <a:off x="685800" y="3413760"/>
             <a:ext cx="457200" cy="457200"/>
           </a:xfrm>
           <a:prstGeom prst="ellipse">
@@ -8691,7 +8948,7 @@
         </p:nvSpPr>
         <p:spPr>
           <a:xfrm>
-            <a:off x="685800" y="3392424"/>
+            <a:off x="685800" y="3413760"/>
             <a:ext cx="457200" cy="457200"/>
           </a:xfrm>
           <a:prstGeom prst="rect">
@@ -8730,7 +8987,7 @@
         </p:nvSpPr>
         <p:spPr>
           <a:xfrm>
-            <a:off x="1371600" y="3319272"/>
+            <a:off x="1371600" y="3340608"/>
             <a:ext cx="10180015" cy="640080"/>
           </a:xfrm>
           <a:prstGeom prst="rect">
@@ -8769,7 +9026,7 @@
         </p:nvSpPr>
         <p:spPr>
           <a:xfrm>
-            <a:off x="685800" y="4105656"/>
+            <a:off x="685800" y="4137660"/>
             <a:ext cx="457200" cy="457200"/>
           </a:xfrm>
           <a:prstGeom prst="ellipse">
@@ -8789,7 +9046,7 @@
         </p:nvSpPr>
         <p:spPr>
           <a:xfrm>
-            <a:off x="685800" y="4105656"/>
+            <a:off x="685800" y="4137660"/>
             <a:ext cx="457200" cy="457200"/>
           </a:xfrm>
           <a:prstGeom prst="rect">
@@ -8828,7 +9085,7 @@
         </p:nvSpPr>
         <p:spPr>
           <a:xfrm>
-            <a:off x="1371600" y="4032504"/>
+            <a:off x="1371600" y="4064508"/>
             <a:ext cx="10180015" cy="640080"/>
           </a:xfrm>
           <a:prstGeom prst="rect">
@@ -8867,7 +9124,7 @@
         </p:nvSpPr>
         <p:spPr>
           <a:xfrm>
-            <a:off x="685800" y="4818888"/>
+            <a:off x="685800" y="4861560"/>
             <a:ext cx="457200" cy="457200"/>
           </a:xfrm>
           <a:prstGeom prst="ellipse">
@@ -8887,7 +9144,7 @@
         </p:nvSpPr>
         <p:spPr>
           <a:xfrm>
-            <a:off x="685800" y="4818888"/>
+            <a:off x="685800" y="4861560"/>
             <a:ext cx="457200" cy="457200"/>
           </a:xfrm>
           <a:prstGeom prst="rect">
@@ -8926,7 +9183,7 @@
         </p:nvSpPr>
         <p:spPr>
           <a:xfrm>
-            <a:off x="1371600" y="4745736"/>
+            <a:off x="1371600" y="4788408"/>
             <a:ext cx="10180015" cy="640080"/>
           </a:xfrm>
           <a:prstGeom prst="rect">
@@ -8965,7 +9222,7 @@
         </p:nvSpPr>
         <p:spPr>
           <a:xfrm>
-            <a:off x="685800" y="5532120"/>
+            <a:off x="685800" y="5585460"/>
             <a:ext cx="457200" cy="457200"/>
           </a:xfrm>
           <a:prstGeom prst="ellipse">
@@ -8985,7 +9242,7 @@
         </p:nvSpPr>
         <p:spPr>
           <a:xfrm>
-            <a:off x="685800" y="5532120"/>
+            <a:off x="685800" y="5585460"/>
             <a:ext cx="457200" cy="457200"/>
           </a:xfrm>
           <a:prstGeom prst="rect">
@@ -9024,7 +9281,7 @@
         </p:nvSpPr>
         <p:spPr>
           <a:xfrm>
-            <a:off x="1371600" y="5458968"/>
+            <a:off x="1371600" y="5512308"/>
             <a:ext cx="10180015" cy="640080"/>
           </a:xfrm>
           <a:prstGeom prst="rect">
@@ -13202,7 +13459,7 @@
                 <a:ea typeface="Calibri" pitchFamily="34" charset="-122"/>
                 <a:cs typeface="Calibri" pitchFamily="34" charset="-120"/>
               </a:rPr>
-              <a:t>INHERITANCE</a:t>
+              <a:t>THE REAL FORMULA</a:t>
             </a:r>
             <a:endParaRPr lang="en-US" sz="1300" dirty="0"/>
           </a:p>
@@ -13241,44 +13498,1083 @@
                 <a:ea typeface="Cambria" pitchFamily="34" charset="-122"/>
                 <a:cs typeface="Cambria" pitchFamily="34" charset="-120"/>
               </a:rPr>
-              <a:t>An Example Where Inheritance Does NOT Happen</a:t>
+              <a:t>How Specificity Is Calculated</a:t>
             </a:r>
             <a:endParaRPr lang="en-US" sz="3400" dirty="0"/>
           </a:p>
         </p:txBody>
       </p:sp>
-      <p:sp>
-        <p:nvSpPr>
-          <p:cNvPr id="4" name="Shape 2"/>
-          <p:cNvSpPr/>
-          <p:nvPr/>
-        </p:nvSpPr>
-        <p:spPr>
-          <a:xfrm>
-            <a:off x="640080" y="1965960"/>
-            <a:ext cx="10911535" cy="3215640"/>
-          </a:xfrm>
-          <a:prstGeom prst="roundRect">
-            <a:avLst>
-              <a:gd name="adj" fmla="val 2275"/>
-            </a:avLst>
-          </a:prstGeom>
-          <a:solidFill>
-            <a:srgbClr val="1E1E4C"/>
-          </a:solidFill>
-          <a:ln/>
-        </p:spPr>
-      </p:sp>
-      <p:sp>
-        <p:nvSpPr>
-          <p:cNvPr id="5" name="Text 3"/>
+      <p:graphicFrame>
+        <p:nvGraphicFramePr>
+          <p:cNvPr id="27" name="Table 0"/>
+          <p:cNvGraphicFramePr>
+            <a:graphicFrameLocks noGrp="1"/>
+          </p:cNvGraphicFramePr>
+          <p:nvPr>
+            <p:extLst>
+              <p:ext uri="{D42A27DB-BD31-4B8C-83A1-F6EECF244321}">
+                <p14:modId xmlns:p14="http://schemas.microsoft.com/office/powerpoint/2010/main" val="1579011935"/>
+              </p:ext>
+            </p:extLst>
+          </p:nvPr>
+        </p:nvGraphicFramePr>
+        <p:xfrm>
+          <a:off x="640080" y="1965960"/>
+          <a:ext cx="10911535" cy="914400"/>
+        </p:xfrm>
+        <a:graphic>
+          <a:graphicData uri="http://schemas.openxmlformats.org/drawingml/2006/table">
+            <a:tbl>
+              <a:tblPr/>
+              <a:tblGrid>
+                <a:gridCol w="3291840"/>
+                <a:gridCol w="3108960"/>
+                <a:gridCol w="4572000"/>
+              </a:tblGrid>
+              <a:tr h="566928">
+                <a:tc>
+                  <a:txBody>
+                    <a:bodyPr/>
+                    <a:lstStyle/>
+                    <a:p>
+                      <a:pPr algn="ctr" indent="0" marL="0">
+                        <a:buNone/>
+                      </a:pPr>
+                      <a:r>
+                        <a:rPr lang="en-US" sz="1200" b="1" dirty="0">
+                          <a:solidFill>
+                            <a:srgbClr val="FFFFFF"/>
+                          </a:solidFill>
+                          <a:latin typeface="Calibri" pitchFamily="34" charset="0"/>
+                          <a:ea typeface="Calibri" pitchFamily="34" charset="-122"/>
+                          <a:cs typeface="Calibri" pitchFamily="34" charset="-120"/>
+                        </a:rPr>
+                        <a:t>Part of the Selector</a:t>
+                      </a:r>
+                      <a:endParaRPr lang="en-US" sz="1200" dirty="0">
+                        <a:latin typeface="Calibri" charset="0"/>
+                        <a:ea typeface="Calibri" charset="0"/>
+                        <a:cs typeface="Calibri" charset="0"/>
+                      </a:endParaRPr>
+                    </a:p>
+                  </a:txBody>
+                  <a:tcPr marL="91440" marR="91440" marT="45720" marB="45720" anchor="ctr">
+                    <a:lnL w="12700" cap="flat" cmpd="sng" algn="ctr">
+                      <a:solidFill>
+                        <a:srgbClr val="D8D8E6"/>
+                      </a:solidFill>
+                      <a:prstDash val="solid"/>
+                      <a:round/>
+                      <a:headEnd type="none" w="med" len="med"/>
+                      <a:tailEnd type="none" w="med" len="med"/>
+                    </a:lnL>
+                    <a:lnR w="12700" cap="flat" cmpd="sng" algn="ctr">
+                      <a:solidFill>
+                        <a:srgbClr val="D8D8E6"/>
+                      </a:solidFill>
+                      <a:prstDash val="solid"/>
+                      <a:round/>
+                      <a:headEnd type="none" w="med" len="med"/>
+                      <a:tailEnd type="none" w="med" len="med"/>
+                    </a:lnR>
+                    <a:lnT w="12700" cap="flat" cmpd="sng" algn="ctr">
+                      <a:solidFill>
+                        <a:srgbClr val="D8D8E6"/>
+                      </a:solidFill>
+                      <a:prstDash val="solid"/>
+                      <a:round/>
+                      <a:headEnd type="none" w="med" len="med"/>
+                      <a:tailEnd type="none" w="med" len="med"/>
+                    </a:lnT>
+                    <a:lnB w="12700" cap="flat" cmpd="sng" algn="ctr">
+                      <a:solidFill>
+                        <a:srgbClr val="D8D8E6"/>
+                      </a:solidFill>
+                      <a:prstDash val="solid"/>
+                      <a:round/>
+                      <a:headEnd type="none" w="med" len="med"/>
+                      <a:tailEnd type="none" w="med" len="med"/>
+                    </a:lnB>
+                    <a:solidFill>
+                      <a:srgbClr val="2B2B7A"/>
+                    </a:solidFill>
+                  </a:tcPr>
+                </a:tc>
+                <a:tc>
+                  <a:txBody>
+                    <a:bodyPr/>
+                    <a:lstStyle/>
+                    <a:p>
+                      <a:pPr algn="ctr" indent="0" marL="0">
+                        <a:buNone/>
+                      </a:pPr>
+                      <a:r>
+                        <a:rPr lang="en-US" sz="1200" b="1" dirty="0">
+                          <a:solidFill>
+                            <a:srgbClr val="FFFFFF"/>
+                          </a:solidFill>
+                          <a:latin typeface="Calibri" pitchFamily="34" charset="0"/>
+                          <a:ea typeface="Calibri" pitchFamily="34" charset="-122"/>
+                          <a:cs typeface="Calibri" pitchFamily="34" charset="-120"/>
+                        </a:rPr>
+                        <a:t>Category</a:t>
+                      </a:r>
+                      <a:endParaRPr lang="en-US" sz="1200" dirty="0">
+                        <a:latin typeface="Calibri" charset="0"/>
+                        <a:ea typeface="Calibri" charset="0"/>
+                        <a:cs typeface="Calibri" charset="0"/>
+                      </a:endParaRPr>
+                    </a:p>
+                  </a:txBody>
+                  <a:tcPr marL="91440" marR="91440" marT="45720" marB="45720" anchor="ctr">
+                    <a:lnL w="12700" cap="flat" cmpd="sng" algn="ctr">
+                      <a:solidFill>
+                        <a:srgbClr val="D8D8E6"/>
+                      </a:solidFill>
+                      <a:prstDash val="solid"/>
+                      <a:round/>
+                      <a:headEnd type="none" w="med" len="med"/>
+                      <a:tailEnd type="none" w="med" len="med"/>
+                    </a:lnL>
+                    <a:lnR w="12700" cap="flat" cmpd="sng" algn="ctr">
+                      <a:solidFill>
+                        <a:srgbClr val="D8D8E6"/>
+                      </a:solidFill>
+                      <a:prstDash val="solid"/>
+                      <a:round/>
+                      <a:headEnd type="none" w="med" len="med"/>
+                      <a:tailEnd type="none" w="med" len="med"/>
+                    </a:lnR>
+                    <a:lnT w="12700" cap="flat" cmpd="sng" algn="ctr">
+                      <a:solidFill>
+                        <a:srgbClr val="D8D8E6"/>
+                      </a:solidFill>
+                      <a:prstDash val="solid"/>
+                      <a:round/>
+                      <a:headEnd type="none" w="med" len="med"/>
+                      <a:tailEnd type="none" w="med" len="med"/>
+                    </a:lnT>
+                    <a:lnB w="12700" cap="flat" cmpd="sng" algn="ctr">
+                      <a:solidFill>
+                        <a:srgbClr val="D8D8E6"/>
+                      </a:solidFill>
+                      <a:prstDash val="solid"/>
+                      <a:round/>
+                      <a:headEnd type="none" w="med" len="med"/>
+                      <a:tailEnd type="none" w="med" len="med"/>
+                    </a:lnB>
+                    <a:solidFill>
+                      <a:srgbClr val="2B2B7A"/>
+                    </a:solidFill>
+                  </a:tcPr>
+                </a:tc>
+                <a:tc>
+                  <a:txBody>
+                    <a:bodyPr/>
+                    <a:lstStyle/>
+                    <a:p>
+                      <a:pPr algn="ctr" indent="0" marL="0">
+                        <a:buNone/>
+                      </a:pPr>
+                      <a:r>
+                        <a:rPr lang="en-US" sz="1200" b="1" dirty="0">
+                          <a:solidFill>
+                            <a:srgbClr val="FFFFFF"/>
+                          </a:solidFill>
+                          <a:latin typeface="Calibri" pitchFamily="34" charset="0"/>
+                          <a:ea typeface="Calibri" pitchFamily="34" charset="-122"/>
+                          <a:cs typeface="Calibri" pitchFamily="34" charset="-120"/>
+                        </a:rPr>
+                        <a:t>Column It Counts Toward</a:t>
+                      </a:r>
+                      <a:endParaRPr lang="en-US" sz="1200" dirty="0">
+                        <a:latin typeface="Calibri" charset="0"/>
+                        <a:ea typeface="Calibri" charset="0"/>
+                        <a:cs typeface="Calibri" charset="0"/>
+                      </a:endParaRPr>
+                    </a:p>
+                  </a:txBody>
+                  <a:tcPr marL="91440" marR="91440" marT="45720" marB="45720" anchor="ctr">
+                    <a:lnL w="12700" cap="flat" cmpd="sng" algn="ctr">
+                      <a:solidFill>
+                        <a:srgbClr val="D8D8E6"/>
+                      </a:solidFill>
+                      <a:prstDash val="solid"/>
+                      <a:round/>
+                      <a:headEnd type="none" w="med" len="med"/>
+                      <a:tailEnd type="none" w="med" len="med"/>
+                    </a:lnL>
+                    <a:lnR w="12700" cap="flat" cmpd="sng" algn="ctr">
+                      <a:solidFill>
+                        <a:srgbClr val="D8D8E6"/>
+                      </a:solidFill>
+                      <a:prstDash val="solid"/>
+                      <a:round/>
+                      <a:headEnd type="none" w="med" len="med"/>
+                      <a:tailEnd type="none" w="med" len="med"/>
+                    </a:lnR>
+                    <a:lnT w="12700" cap="flat" cmpd="sng" algn="ctr">
+                      <a:solidFill>
+                        <a:srgbClr val="D8D8E6"/>
+                      </a:solidFill>
+                      <a:prstDash val="solid"/>
+                      <a:round/>
+                      <a:headEnd type="none" w="med" len="med"/>
+                      <a:tailEnd type="none" w="med" len="med"/>
+                    </a:lnT>
+                    <a:lnB w="12700" cap="flat" cmpd="sng" algn="ctr">
+                      <a:solidFill>
+                        <a:srgbClr val="D8D8E6"/>
+                      </a:solidFill>
+                      <a:prstDash val="solid"/>
+                      <a:round/>
+                      <a:headEnd type="none" w="med" len="med"/>
+                      <a:tailEnd type="none" w="med" len="med"/>
+                    </a:lnB>
+                    <a:solidFill>
+                      <a:srgbClr val="2B2B7A"/>
+                    </a:solidFill>
+                  </a:tcPr>
+                </a:tc>
+              </a:tr>
+              <a:tr h="566928">
+                <a:tc>
+                  <a:txBody>
+                    <a:bodyPr/>
+                    <a:lstStyle/>
+                    <a:p>
+                      <a:pPr algn="l" indent="0" marL="0">
+                        <a:buNone/>
+                      </a:pPr>
+                      <a:r>
+                        <a:rPr lang="en-US" sz="1200" b="1" dirty="0">
+                          <a:solidFill>
+                            <a:srgbClr val="26262F"/>
+                          </a:solidFill>
+                          <a:latin typeface="Calibri" pitchFamily="34" charset="0"/>
+                          <a:ea typeface="Calibri" pitchFamily="34" charset="-122"/>
+                          <a:cs typeface="Calibri" pitchFamily="34" charset="-120"/>
+                        </a:rPr>
+                        <a:t>#nav</a:t>
+                      </a:r>
+                      <a:endParaRPr lang="en-US" sz="1200" dirty="0">
+                        <a:latin typeface="Calibri" charset="0"/>
+                        <a:ea typeface="Calibri" charset="0"/>
+                        <a:cs typeface="Calibri" charset="0"/>
+                      </a:endParaRPr>
+                    </a:p>
+                  </a:txBody>
+                  <a:tcPr marL="91440" marR="91440" marT="45720" marB="45720" anchor="ctr">
+                    <a:lnL w="12700" cap="flat" cmpd="sng" algn="ctr">
+                      <a:solidFill>
+                        <a:srgbClr val="D8D8E6"/>
+                      </a:solidFill>
+                      <a:prstDash val="solid"/>
+                      <a:round/>
+                      <a:headEnd type="none" w="med" len="med"/>
+                      <a:tailEnd type="none" w="med" len="med"/>
+                    </a:lnL>
+                    <a:lnR w="12700" cap="flat" cmpd="sng" algn="ctr">
+                      <a:solidFill>
+                        <a:srgbClr val="D8D8E6"/>
+                      </a:solidFill>
+                      <a:prstDash val="solid"/>
+                      <a:round/>
+                      <a:headEnd type="none" w="med" len="med"/>
+                      <a:tailEnd type="none" w="med" len="med"/>
+                    </a:lnR>
+                    <a:lnT w="12700" cap="flat" cmpd="sng" algn="ctr">
+                      <a:solidFill>
+                        <a:srgbClr val="D8D8E6"/>
+                      </a:solidFill>
+                      <a:prstDash val="solid"/>
+                      <a:round/>
+                      <a:headEnd type="none" w="med" len="med"/>
+                      <a:tailEnd type="none" w="med" len="med"/>
+                    </a:lnT>
+                    <a:lnB w="12700" cap="flat" cmpd="sng" algn="ctr">
+                      <a:solidFill>
+                        <a:srgbClr val="D8D8E6"/>
+                      </a:solidFill>
+                      <a:prstDash val="solid"/>
+                      <a:round/>
+                      <a:headEnd type="none" w="med" len="med"/>
+                      <a:tailEnd type="none" w="med" len="med"/>
+                    </a:lnB>
+                    <a:solidFill>
+                      <a:srgbClr val="FFFFFF"/>
+                    </a:solidFill>
+                  </a:tcPr>
+                </a:tc>
+                <a:tc>
+                  <a:txBody>
+                    <a:bodyPr/>
+                    <a:lstStyle/>
+                    <a:p>
+                      <a:pPr algn="ctr" indent="0" marL="0">
+                        <a:buNone/>
+                      </a:pPr>
+                      <a:r>
+                        <a:rPr lang="en-US" sz="1200" dirty="0">
+                          <a:solidFill>
+                            <a:srgbClr val="26262F"/>
+                          </a:solidFill>
+                          <a:latin typeface="Calibri" pitchFamily="34" charset="0"/>
+                          <a:ea typeface="Calibri" pitchFamily="34" charset="-122"/>
+                          <a:cs typeface="Calibri" pitchFamily="34" charset="-120"/>
+                        </a:rPr>
+                        <a:t>ID selector</a:t>
+                      </a:r>
+                      <a:endParaRPr lang="en-US" sz="1200" dirty="0">
+                        <a:latin typeface="Calibri" charset="0"/>
+                        <a:ea typeface="Calibri" charset="0"/>
+                        <a:cs typeface="Calibri" charset="0"/>
+                      </a:endParaRPr>
+                    </a:p>
+                  </a:txBody>
+                  <a:tcPr marL="91440" marR="91440" marT="45720" marB="45720" anchor="ctr">
+                    <a:lnL w="12700" cap="flat" cmpd="sng" algn="ctr">
+                      <a:solidFill>
+                        <a:srgbClr val="D8D8E6"/>
+                      </a:solidFill>
+                      <a:prstDash val="solid"/>
+                      <a:round/>
+                      <a:headEnd type="none" w="med" len="med"/>
+                      <a:tailEnd type="none" w="med" len="med"/>
+                    </a:lnL>
+                    <a:lnR w="12700" cap="flat" cmpd="sng" algn="ctr">
+                      <a:solidFill>
+                        <a:srgbClr val="D8D8E6"/>
+                      </a:solidFill>
+                      <a:prstDash val="solid"/>
+                      <a:round/>
+                      <a:headEnd type="none" w="med" len="med"/>
+                      <a:tailEnd type="none" w="med" len="med"/>
+                    </a:lnR>
+                    <a:lnT w="12700" cap="flat" cmpd="sng" algn="ctr">
+                      <a:solidFill>
+                        <a:srgbClr val="D8D8E6"/>
+                      </a:solidFill>
+                      <a:prstDash val="solid"/>
+                      <a:round/>
+                      <a:headEnd type="none" w="med" len="med"/>
+                      <a:tailEnd type="none" w="med" len="med"/>
+                    </a:lnT>
+                    <a:lnB w="12700" cap="flat" cmpd="sng" algn="ctr">
+                      <a:solidFill>
+                        <a:srgbClr val="D8D8E6"/>
+                      </a:solidFill>
+                      <a:prstDash val="solid"/>
+                      <a:round/>
+                      <a:headEnd type="none" w="med" len="med"/>
+                      <a:tailEnd type="none" w="med" len="med"/>
+                    </a:lnB>
+                    <a:solidFill>
+                      <a:srgbClr val="FFFFFF"/>
+                    </a:solidFill>
+                  </a:tcPr>
+                </a:tc>
+                <a:tc>
+                  <a:txBody>
+                    <a:bodyPr/>
+                    <a:lstStyle/>
+                    <a:p>
+                      <a:pPr algn="ctr" indent="0" marL="0">
+                        <a:buNone/>
+                      </a:pPr>
+                      <a:r>
+                        <a:rPr lang="en-US" sz="1200" dirty="0">
+                          <a:solidFill>
+                            <a:srgbClr val="26262F"/>
+                          </a:solidFill>
+                          <a:latin typeface="Calibri" pitchFamily="34" charset="0"/>
+                          <a:ea typeface="Calibri" pitchFamily="34" charset="-122"/>
+                          <a:cs typeface="Calibri" pitchFamily="34" charset="-120"/>
+                        </a:rPr>
+                        <a:t>IDs: +1</a:t>
+                      </a:r>
+                      <a:endParaRPr lang="en-US" sz="1200" dirty="0">
+                        <a:latin typeface="Calibri" charset="0"/>
+                        <a:ea typeface="Calibri" charset="0"/>
+                        <a:cs typeface="Calibri" charset="0"/>
+                      </a:endParaRPr>
+                    </a:p>
+                  </a:txBody>
+                  <a:tcPr marL="91440" marR="91440" marT="45720" marB="45720" anchor="ctr">
+                    <a:lnL w="12700" cap="flat" cmpd="sng" algn="ctr">
+                      <a:solidFill>
+                        <a:srgbClr val="D8D8E6"/>
+                      </a:solidFill>
+                      <a:prstDash val="solid"/>
+                      <a:round/>
+                      <a:headEnd type="none" w="med" len="med"/>
+                      <a:tailEnd type="none" w="med" len="med"/>
+                    </a:lnL>
+                    <a:lnR w="12700" cap="flat" cmpd="sng" algn="ctr">
+                      <a:solidFill>
+                        <a:srgbClr val="D8D8E6"/>
+                      </a:solidFill>
+                      <a:prstDash val="solid"/>
+                      <a:round/>
+                      <a:headEnd type="none" w="med" len="med"/>
+                      <a:tailEnd type="none" w="med" len="med"/>
+                    </a:lnR>
+                    <a:lnT w="12700" cap="flat" cmpd="sng" algn="ctr">
+                      <a:solidFill>
+                        <a:srgbClr val="D8D8E6"/>
+                      </a:solidFill>
+                      <a:prstDash val="solid"/>
+                      <a:round/>
+                      <a:headEnd type="none" w="med" len="med"/>
+                      <a:tailEnd type="none" w="med" len="med"/>
+                    </a:lnT>
+                    <a:lnB w="12700" cap="flat" cmpd="sng" algn="ctr">
+                      <a:solidFill>
+                        <a:srgbClr val="D8D8E6"/>
+                      </a:solidFill>
+                      <a:prstDash val="solid"/>
+                      <a:round/>
+                      <a:headEnd type="none" w="med" len="med"/>
+                      <a:tailEnd type="none" w="med" len="med"/>
+                    </a:lnB>
+                    <a:solidFill>
+                      <a:srgbClr val="FFFFFF"/>
+                    </a:solidFill>
+                  </a:tcPr>
+                </a:tc>
+              </a:tr>
+              <a:tr h="566928">
+                <a:tc>
+                  <a:txBody>
+                    <a:bodyPr/>
+                    <a:lstStyle/>
+                    <a:p>
+                      <a:pPr algn="l" indent="0" marL="0">
+                        <a:buNone/>
+                      </a:pPr>
+                      <a:r>
+                        <a:rPr lang="en-US" sz="1200" b="1" dirty="0">
+                          <a:solidFill>
+                            <a:srgbClr val="26262F"/>
+                          </a:solidFill>
+                          <a:latin typeface="Calibri" pitchFamily="34" charset="0"/>
+                          <a:ea typeface="Calibri" pitchFamily="34" charset="-122"/>
+                          <a:cs typeface="Calibri" pitchFamily="34" charset="-120"/>
+                        </a:rPr>
+                        <a:t>.item</a:t>
+                      </a:r>
+                      <a:endParaRPr lang="en-US" sz="1200" dirty="0">
+                        <a:latin typeface="Calibri" charset="0"/>
+                        <a:ea typeface="Calibri" charset="0"/>
+                        <a:cs typeface="Calibri" charset="0"/>
+                      </a:endParaRPr>
+                    </a:p>
+                  </a:txBody>
+                  <a:tcPr marL="91440" marR="91440" marT="45720" marB="45720" anchor="ctr">
+                    <a:lnL w="12700" cap="flat" cmpd="sng" algn="ctr">
+                      <a:solidFill>
+                        <a:srgbClr val="D8D8E6"/>
+                      </a:solidFill>
+                      <a:prstDash val="solid"/>
+                      <a:round/>
+                      <a:headEnd type="none" w="med" len="med"/>
+                      <a:tailEnd type="none" w="med" len="med"/>
+                    </a:lnL>
+                    <a:lnR w="12700" cap="flat" cmpd="sng" algn="ctr">
+                      <a:solidFill>
+                        <a:srgbClr val="D8D8E6"/>
+                      </a:solidFill>
+                      <a:prstDash val="solid"/>
+                      <a:round/>
+                      <a:headEnd type="none" w="med" len="med"/>
+                      <a:tailEnd type="none" w="med" len="med"/>
+                    </a:lnR>
+                    <a:lnT w="12700" cap="flat" cmpd="sng" algn="ctr">
+                      <a:solidFill>
+                        <a:srgbClr val="D8D8E6"/>
+                      </a:solidFill>
+                      <a:prstDash val="solid"/>
+                      <a:round/>
+                      <a:headEnd type="none" w="med" len="med"/>
+                      <a:tailEnd type="none" w="med" len="med"/>
+                    </a:lnT>
+                    <a:lnB w="12700" cap="flat" cmpd="sng" algn="ctr">
+                      <a:solidFill>
+                        <a:srgbClr val="D8D8E6"/>
+                      </a:solidFill>
+                      <a:prstDash val="solid"/>
+                      <a:round/>
+                      <a:headEnd type="none" w="med" len="med"/>
+                      <a:tailEnd type="none" w="med" len="med"/>
+                    </a:lnB>
+                    <a:solidFill>
+                      <a:srgbClr val="FFFFFF"/>
+                    </a:solidFill>
+                  </a:tcPr>
+                </a:tc>
+                <a:tc>
+                  <a:txBody>
+                    <a:bodyPr/>
+                    <a:lstStyle/>
+                    <a:p>
+                      <a:pPr algn="ctr" indent="0" marL="0">
+                        <a:buNone/>
+                      </a:pPr>
+                      <a:r>
+                        <a:rPr lang="en-US" sz="1200" dirty="0">
+                          <a:solidFill>
+                            <a:srgbClr val="26262F"/>
+                          </a:solidFill>
+                          <a:latin typeface="Calibri" pitchFamily="34" charset="0"/>
+                          <a:ea typeface="Calibri" pitchFamily="34" charset="-122"/>
+                          <a:cs typeface="Calibri" pitchFamily="34" charset="-120"/>
+                        </a:rPr>
+                        <a:t>Class selector</a:t>
+                      </a:r>
+                      <a:endParaRPr lang="en-US" sz="1200" dirty="0">
+                        <a:latin typeface="Calibri" charset="0"/>
+                        <a:ea typeface="Calibri" charset="0"/>
+                        <a:cs typeface="Calibri" charset="0"/>
+                      </a:endParaRPr>
+                    </a:p>
+                  </a:txBody>
+                  <a:tcPr marL="91440" marR="91440" marT="45720" marB="45720" anchor="ctr">
+                    <a:lnL w="12700" cap="flat" cmpd="sng" algn="ctr">
+                      <a:solidFill>
+                        <a:srgbClr val="D8D8E6"/>
+                      </a:solidFill>
+                      <a:prstDash val="solid"/>
+                      <a:round/>
+                      <a:headEnd type="none" w="med" len="med"/>
+                      <a:tailEnd type="none" w="med" len="med"/>
+                    </a:lnL>
+                    <a:lnR w="12700" cap="flat" cmpd="sng" algn="ctr">
+                      <a:solidFill>
+                        <a:srgbClr val="D8D8E6"/>
+                      </a:solidFill>
+                      <a:prstDash val="solid"/>
+                      <a:round/>
+                      <a:headEnd type="none" w="med" len="med"/>
+                      <a:tailEnd type="none" w="med" len="med"/>
+                    </a:lnR>
+                    <a:lnT w="12700" cap="flat" cmpd="sng" algn="ctr">
+                      <a:solidFill>
+                        <a:srgbClr val="D8D8E6"/>
+                      </a:solidFill>
+                      <a:prstDash val="solid"/>
+                      <a:round/>
+                      <a:headEnd type="none" w="med" len="med"/>
+                      <a:tailEnd type="none" w="med" len="med"/>
+                    </a:lnT>
+                    <a:lnB w="12700" cap="flat" cmpd="sng" algn="ctr">
+                      <a:solidFill>
+                        <a:srgbClr val="D8D8E6"/>
+                      </a:solidFill>
+                      <a:prstDash val="solid"/>
+                      <a:round/>
+                      <a:headEnd type="none" w="med" len="med"/>
+                      <a:tailEnd type="none" w="med" len="med"/>
+                    </a:lnB>
+                    <a:solidFill>
+                      <a:srgbClr val="FFFFFF"/>
+                    </a:solidFill>
+                  </a:tcPr>
+                </a:tc>
+                <a:tc>
+                  <a:txBody>
+                    <a:bodyPr/>
+                    <a:lstStyle/>
+                    <a:p>
+                      <a:pPr algn="ctr" indent="0" marL="0">
+                        <a:buNone/>
+                      </a:pPr>
+                      <a:r>
+                        <a:rPr lang="en-US" sz="1200" dirty="0">
+                          <a:solidFill>
+                            <a:srgbClr val="26262F"/>
+                          </a:solidFill>
+                          <a:latin typeface="Calibri" pitchFamily="34" charset="0"/>
+                          <a:ea typeface="Calibri" pitchFamily="34" charset="-122"/>
+                          <a:cs typeface="Calibri" pitchFamily="34" charset="-120"/>
+                        </a:rPr>
+                        <a:t>Classes / attrs / pseudo-classes: +1</a:t>
+                      </a:r>
+                      <a:endParaRPr lang="en-US" sz="1200" dirty="0">
+                        <a:latin typeface="Calibri" charset="0"/>
+                        <a:ea typeface="Calibri" charset="0"/>
+                        <a:cs typeface="Calibri" charset="0"/>
+                      </a:endParaRPr>
+                    </a:p>
+                  </a:txBody>
+                  <a:tcPr marL="91440" marR="91440" marT="45720" marB="45720" anchor="ctr">
+                    <a:lnL w="12700" cap="flat" cmpd="sng" algn="ctr">
+                      <a:solidFill>
+                        <a:srgbClr val="D8D8E6"/>
+                      </a:solidFill>
+                      <a:prstDash val="solid"/>
+                      <a:round/>
+                      <a:headEnd type="none" w="med" len="med"/>
+                      <a:tailEnd type="none" w="med" len="med"/>
+                    </a:lnL>
+                    <a:lnR w="12700" cap="flat" cmpd="sng" algn="ctr">
+                      <a:solidFill>
+                        <a:srgbClr val="D8D8E6"/>
+                      </a:solidFill>
+                      <a:prstDash val="solid"/>
+                      <a:round/>
+                      <a:headEnd type="none" w="med" len="med"/>
+                      <a:tailEnd type="none" w="med" len="med"/>
+                    </a:lnR>
+                    <a:lnT w="12700" cap="flat" cmpd="sng" algn="ctr">
+                      <a:solidFill>
+                        <a:srgbClr val="D8D8E6"/>
+                      </a:solidFill>
+                      <a:prstDash val="solid"/>
+                      <a:round/>
+                      <a:headEnd type="none" w="med" len="med"/>
+                      <a:tailEnd type="none" w="med" len="med"/>
+                    </a:lnT>
+                    <a:lnB w="12700" cap="flat" cmpd="sng" algn="ctr">
+                      <a:solidFill>
+                        <a:srgbClr val="D8D8E6"/>
+                      </a:solidFill>
+                      <a:prstDash val="solid"/>
+                      <a:round/>
+                      <a:headEnd type="none" w="med" len="med"/>
+                      <a:tailEnd type="none" w="med" len="med"/>
+                    </a:lnB>
+                    <a:solidFill>
+                      <a:srgbClr val="FFFFFF"/>
+                    </a:solidFill>
+                  </a:tcPr>
+                </a:tc>
+              </a:tr>
+              <a:tr h="566928">
+                <a:tc>
+                  <a:txBody>
+                    <a:bodyPr/>
+                    <a:lstStyle/>
+                    <a:p>
+                      <a:pPr algn="l" indent="0" marL="0">
+                        <a:buNone/>
+                      </a:pPr>
+                      <a:r>
+                        <a:rPr lang="en-US" sz="1200" b="1" dirty="0">
+                          <a:solidFill>
+                            <a:srgbClr val="26262F"/>
+                          </a:solidFill>
+                          <a:latin typeface="Calibri" pitchFamily="34" charset="0"/>
+                          <a:ea typeface="Calibri" pitchFamily="34" charset="-122"/>
+                          <a:cs typeface="Calibri" pitchFamily="34" charset="-120"/>
+                        </a:rPr>
+                        <a:t>:hover</a:t>
+                      </a:r>
+                      <a:endParaRPr lang="en-US" sz="1200" dirty="0">
+                        <a:latin typeface="Calibri" charset="0"/>
+                        <a:ea typeface="Calibri" charset="0"/>
+                        <a:cs typeface="Calibri" charset="0"/>
+                      </a:endParaRPr>
+                    </a:p>
+                  </a:txBody>
+                  <a:tcPr marL="91440" marR="91440" marT="45720" marB="45720" anchor="ctr">
+                    <a:lnL w="12700" cap="flat" cmpd="sng" algn="ctr">
+                      <a:solidFill>
+                        <a:srgbClr val="D8D8E6"/>
+                      </a:solidFill>
+                      <a:prstDash val="solid"/>
+                      <a:round/>
+                      <a:headEnd type="none" w="med" len="med"/>
+                      <a:tailEnd type="none" w="med" len="med"/>
+                    </a:lnL>
+                    <a:lnR w="12700" cap="flat" cmpd="sng" algn="ctr">
+                      <a:solidFill>
+                        <a:srgbClr val="D8D8E6"/>
+                      </a:solidFill>
+                      <a:prstDash val="solid"/>
+                      <a:round/>
+                      <a:headEnd type="none" w="med" len="med"/>
+                      <a:tailEnd type="none" w="med" len="med"/>
+                    </a:lnR>
+                    <a:lnT w="12700" cap="flat" cmpd="sng" algn="ctr">
+                      <a:solidFill>
+                        <a:srgbClr val="D8D8E6"/>
+                      </a:solidFill>
+                      <a:prstDash val="solid"/>
+                      <a:round/>
+                      <a:headEnd type="none" w="med" len="med"/>
+                      <a:tailEnd type="none" w="med" len="med"/>
+                    </a:lnT>
+                    <a:lnB w="12700" cap="flat" cmpd="sng" algn="ctr">
+                      <a:solidFill>
+                        <a:srgbClr val="D8D8E6"/>
+                      </a:solidFill>
+                      <a:prstDash val="solid"/>
+                      <a:round/>
+                      <a:headEnd type="none" w="med" len="med"/>
+                      <a:tailEnd type="none" w="med" len="med"/>
+                    </a:lnB>
+                    <a:solidFill>
+                      <a:srgbClr val="FFFFFF"/>
+                    </a:solidFill>
+                  </a:tcPr>
+                </a:tc>
+                <a:tc>
+                  <a:txBody>
+                    <a:bodyPr/>
+                    <a:lstStyle/>
+                    <a:p>
+                      <a:pPr algn="ctr" indent="0" marL="0">
+                        <a:buNone/>
+                      </a:pPr>
+                      <a:r>
+                        <a:rPr lang="en-US" sz="1200" dirty="0">
+                          <a:solidFill>
+                            <a:srgbClr val="26262F"/>
+                          </a:solidFill>
+                          <a:latin typeface="Calibri" pitchFamily="34" charset="0"/>
+                          <a:ea typeface="Calibri" pitchFamily="34" charset="-122"/>
+                          <a:cs typeface="Calibri" pitchFamily="34" charset="-120"/>
+                        </a:rPr>
+                        <a:t>Pseudo-class</a:t>
+                      </a:r>
+                      <a:endParaRPr lang="en-US" sz="1200" dirty="0">
+                        <a:latin typeface="Calibri" charset="0"/>
+                        <a:ea typeface="Calibri" charset="0"/>
+                        <a:cs typeface="Calibri" charset="0"/>
+                      </a:endParaRPr>
+                    </a:p>
+                  </a:txBody>
+                  <a:tcPr marL="91440" marR="91440" marT="45720" marB="45720" anchor="ctr">
+                    <a:lnL w="12700" cap="flat" cmpd="sng" algn="ctr">
+                      <a:solidFill>
+                        <a:srgbClr val="D8D8E6"/>
+                      </a:solidFill>
+                      <a:prstDash val="solid"/>
+                      <a:round/>
+                      <a:headEnd type="none" w="med" len="med"/>
+                      <a:tailEnd type="none" w="med" len="med"/>
+                    </a:lnL>
+                    <a:lnR w="12700" cap="flat" cmpd="sng" algn="ctr">
+                      <a:solidFill>
+                        <a:srgbClr val="D8D8E6"/>
+                      </a:solidFill>
+                      <a:prstDash val="solid"/>
+                      <a:round/>
+                      <a:headEnd type="none" w="med" len="med"/>
+                      <a:tailEnd type="none" w="med" len="med"/>
+                    </a:lnR>
+                    <a:lnT w="12700" cap="flat" cmpd="sng" algn="ctr">
+                      <a:solidFill>
+                        <a:srgbClr val="D8D8E6"/>
+                      </a:solidFill>
+                      <a:prstDash val="solid"/>
+                      <a:round/>
+                      <a:headEnd type="none" w="med" len="med"/>
+                      <a:tailEnd type="none" w="med" len="med"/>
+                    </a:lnT>
+                    <a:lnB w="12700" cap="flat" cmpd="sng" algn="ctr">
+                      <a:solidFill>
+                        <a:srgbClr val="D8D8E6"/>
+                      </a:solidFill>
+                      <a:prstDash val="solid"/>
+                      <a:round/>
+                      <a:headEnd type="none" w="med" len="med"/>
+                      <a:tailEnd type="none" w="med" len="med"/>
+                    </a:lnB>
+                    <a:solidFill>
+                      <a:srgbClr val="FFFFFF"/>
+                    </a:solidFill>
+                  </a:tcPr>
+                </a:tc>
+                <a:tc>
+                  <a:txBody>
+                    <a:bodyPr/>
+                    <a:lstStyle/>
+                    <a:p>
+                      <a:pPr algn="ctr" indent="0" marL="0">
+                        <a:buNone/>
+                      </a:pPr>
+                      <a:r>
+                        <a:rPr lang="en-US" sz="1200" dirty="0">
+                          <a:solidFill>
+                            <a:srgbClr val="26262F"/>
+                          </a:solidFill>
+                          <a:latin typeface="Calibri" pitchFamily="34" charset="0"/>
+                          <a:ea typeface="Calibri" pitchFamily="34" charset="-122"/>
+                          <a:cs typeface="Calibri" pitchFamily="34" charset="-120"/>
+                        </a:rPr>
+                        <a:t>Classes / attrs / pseudo-classes: +1</a:t>
+                      </a:r>
+                      <a:endParaRPr lang="en-US" sz="1200" dirty="0">
+                        <a:latin typeface="Calibri" charset="0"/>
+                        <a:ea typeface="Calibri" charset="0"/>
+                        <a:cs typeface="Calibri" charset="0"/>
+                      </a:endParaRPr>
+                    </a:p>
+                  </a:txBody>
+                  <a:tcPr marL="91440" marR="91440" marT="45720" marB="45720" anchor="ctr">
+                    <a:lnL w="12700" cap="flat" cmpd="sng" algn="ctr">
+                      <a:solidFill>
+                        <a:srgbClr val="D8D8E6"/>
+                      </a:solidFill>
+                      <a:prstDash val="solid"/>
+                      <a:round/>
+                      <a:headEnd type="none" w="med" len="med"/>
+                      <a:tailEnd type="none" w="med" len="med"/>
+                    </a:lnL>
+                    <a:lnR w="12700" cap="flat" cmpd="sng" algn="ctr">
+                      <a:solidFill>
+                        <a:srgbClr val="D8D8E6"/>
+                      </a:solidFill>
+                      <a:prstDash val="solid"/>
+                      <a:round/>
+                      <a:headEnd type="none" w="med" len="med"/>
+                      <a:tailEnd type="none" w="med" len="med"/>
+                    </a:lnR>
+                    <a:lnT w="12700" cap="flat" cmpd="sng" algn="ctr">
+                      <a:solidFill>
+                        <a:srgbClr val="D8D8E6"/>
+                      </a:solidFill>
+                      <a:prstDash val="solid"/>
+                      <a:round/>
+                      <a:headEnd type="none" w="med" len="med"/>
+                      <a:tailEnd type="none" w="med" len="med"/>
+                    </a:lnT>
+                    <a:lnB w="12700" cap="flat" cmpd="sng" algn="ctr">
+                      <a:solidFill>
+                        <a:srgbClr val="D8D8E6"/>
+                      </a:solidFill>
+                      <a:prstDash val="solid"/>
+                      <a:round/>
+                      <a:headEnd type="none" w="med" len="med"/>
+                      <a:tailEnd type="none" w="med" len="med"/>
+                    </a:lnB>
+                    <a:solidFill>
+                      <a:srgbClr val="FFFFFF"/>
+                    </a:solidFill>
+                  </a:tcPr>
+                </a:tc>
+              </a:tr>
+              <a:tr h="566928">
+                <a:tc>
+                  <a:txBody>
+                    <a:bodyPr/>
+                    <a:lstStyle/>
+                    <a:p>
+                      <a:pPr algn="l" indent="0" marL="0">
+                        <a:buNone/>
+                      </a:pPr>
+                      <a:r>
+                        <a:rPr lang="en-US" sz="1200" b="1" dirty="0">
+                          <a:solidFill>
+                            <a:srgbClr val="26262F"/>
+                          </a:solidFill>
+                          <a:latin typeface="Calibri" pitchFamily="34" charset="0"/>
+                          <a:ea typeface="Calibri" pitchFamily="34" charset="-122"/>
+                          <a:cs typeface="Calibri" pitchFamily="34" charset="-120"/>
+                        </a:rPr>
+                        <a:t>a</a:t>
+                      </a:r>
+                      <a:endParaRPr lang="en-US" sz="1200" dirty="0">
+                        <a:latin typeface="Calibri" charset="0"/>
+                        <a:ea typeface="Calibri" charset="0"/>
+                        <a:cs typeface="Calibri" charset="0"/>
+                      </a:endParaRPr>
+                    </a:p>
+                  </a:txBody>
+                  <a:tcPr marL="91440" marR="91440" marT="45720" marB="45720" anchor="ctr">
+                    <a:lnL w="12700" cap="flat" cmpd="sng" algn="ctr">
+                      <a:solidFill>
+                        <a:srgbClr val="D8D8E6"/>
+                      </a:solidFill>
+                      <a:prstDash val="solid"/>
+                      <a:round/>
+                      <a:headEnd type="none" w="med" len="med"/>
+                      <a:tailEnd type="none" w="med" len="med"/>
+                    </a:lnL>
+                    <a:lnR w="12700" cap="flat" cmpd="sng" algn="ctr">
+                      <a:solidFill>
+                        <a:srgbClr val="D8D8E6"/>
+                      </a:solidFill>
+                      <a:prstDash val="solid"/>
+                      <a:round/>
+                      <a:headEnd type="none" w="med" len="med"/>
+                      <a:tailEnd type="none" w="med" len="med"/>
+                    </a:lnR>
+                    <a:lnT w="12700" cap="flat" cmpd="sng" algn="ctr">
+                      <a:solidFill>
+                        <a:srgbClr val="D8D8E6"/>
+                      </a:solidFill>
+                      <a:prstDash val="solid"/>
+                      <a:round/>
+                      <a:headEnd type="none" w="med" len="med"/>
+                      <a:tailEnd type="none" w="med" len="med"/>
+                    </a:lnT>
+                    <a:lnB w="12700" cap="flat" cmpd="sng" algn="ctr">
+                      <a:solidFill>
+                        <a:srgbClr val="D8D8E6"/>
+                      </a:solidFill>
+                      <a:prstDash val="solid"/>
+                      <a:round/>
+                      <a:headEnd type="none" w="med" len="med"/>
+                      <a:tailEnd type="none" w="med" len="med"/>
+                    </a:lnB>
+                    <a:solidFill>
+                      <a:srgbClr val="FFFFFF"/>
+                    </a:solidFill>
+                  </a:tcPr>
+                </a:tc>
+                <a:tc>
+                  <a:txBody>
+                    <a:bodyPr/>
+                    <a:lstStyle/>
+                    <a:p>
+                      <a:pPr algn="ctr" indent="0" marL="0">
+                        <a:buNone/>
+                      </a:pPr>
+                      <a:r>
+                        <a:rPr lang="en-US" sz="1200" dirty="0">
+                          <a:solidFill>
+                            <a:srgbClr val="26262F"/>
+                          </a:solidFill>
+                          <a:latin typeface="Calibri" pitchFamily="34" charset="0"/>
+                          <a:ea typeface="Calibri" pitchFamily="34" charset="-122"/>
+                          <a:cs typeface="Calibri" pitchFamily="34" charset="-120"/>
+                        </a:rPr>
+                        <a:t>Element selector</a:t>
+                      </a:r>
+                      <a:endParaRPr lang="en-US" sz="1200" dirty="0">
+                        <a:latin typeface="Calibri" charset="0"/>
+                        <a:ea typeface="Calibri" charset="0"/>
+                        <a:cs typeface="Calibri" charset="0"/>
+                      </a:endParaRPr>
+                    </a:p>
+                  </a:txBody>
+                  <a:tcPr marL="91440" marR="91440" marT="45720" marB="45720" anchor="ctr">
+                    <a:lnL w="12700" cap="flat" cmpd="sng" algn="ctr">
+                      <a:solidFill>
+                        <a:srgbClr val="D8D8E6"/>
+                      </a:solidFill>
+                      <a:prstDash val="solid"/>
+                      <a:round/>
+                      <a:headEnd type="none" w="med" len="med"/>
+                      <a:tailEnd type="none" w="med" len="med"/>
+                    </a:lnL>
+                    <a:lnR w="12700" cap="flat" cmpd="sng" algn="ctr">
+                      <a:solidFill>
+                        <a:srgbClr val="D8D8E6"/>
+                      </a:solidFill>
+                      <a:prstDash val="solid"/>
+                      <a:round/>
+                      <a:headEnd type="none" w="med" len="med"/>
+                      <a:tailEnd type="none" w="med" len="med"/>
+                    </a:lnR>
+                    <a:lnT w="12700" cap="flat" cmpd="sng" algn="ctr">
+                      <a:solidFill>
+                        <a:srgbClr val="D8D8E6"/>
+                      </a:solidFill>
+                      <a:prstDash val="solid"/>
+                      <a:round/>
+                      <a:headEnd type="none" w="med" len="med"/>
+                      <a:tailEnd type="none" w="med" len="med"/>
+                    </a:lnT>
+                    <a:lnB w="12700" cap="flat" cmpd="sng" algn="ctr">
+                      <a:solidFill>
+                        <a:srgbClr val="D8D8E6"/>
+                      </a:solidFill>
+                      <a:prstDash val="solid"/>
+                      <a:round/>
+                      <a:headEnd type="none" w="med" len="med"/>
+                      <a:tailEnd type="none" w="med" len="med"/>
+                    </a:lnB>
+                    <a:solidFill>
+                      <a:srgbClr val="FFFFFF"/>
+                    </a:solidFill>
+                  </a:tcPr>
+                </a:tc>
+                <a:tc>
+                  <a:txBody>
+                    <a:bodyPr/>
+                    <a:lstStyle/>
+                    <a:p>
+                      <a:pPr algn="ctr" indent="0" marL="0">
+                        <a:buNone/>
+                      </a:pPr>
+                      <a:r>
+                        <a:rPr lang="en-US" sz="1200" dirty="0">
+                          <a:solidFill>
+                            <a:srgbClr val="26262F"/>
+                          </a:solidFill>
+                          <a:latin typeface="Calibri" pitchFamily="34" charset="0"/>
+                          <a:ea typeface="Calibri" pitchFamily="34" charset="-122"/>
+                          <a:cs typeface="Calibri" pitchFamily="34" charset="-120"/>
+                        </a:rPr>
+                        <a:t>Elements / pseudo-elements: +1</a:t>
+                      </a:r>
+                      <a:endParaRPr lang="en-US" sz="1200" dirty="0">
+                        <a:latin typeface="Calibri" charset="0"/>
+                        <a:ea typeface="Calibri" charset="0"/>
+                        <a:cs typeface="Calibri" charset="0"/>
+                      </a:endParaRPr>
+                    </a:p>
+                  </a:txBody>
+                  <a:tcPr marL="91440" marR="91440" marT="45720" marB="45720" anchor="ctr">
+                    <a:lnL w="12700" cap="flat" cmpd="sng" algn="ctr">
+                      <a:solidFill>
+                        <a:srgbClr val="D8D8E6"/>
+                      </a:solidFill>
+                      <a:prstDash val="solid"/>
+                      <a:round/>
+                      <a:headEnd type="none" w="med" len="med"/>
+                      <a:tailEnd type="none" w="med" len="med"/>
+                    </a:lnL>
+                    <a:lnR w="12700" cap="flat" cmpd="sng" algn="ctr">
+                      <a:solidFill>
+                        <a:srgbClr val="D8D8E6"/>
+                      </a:solidFill>
+                      <a:prstDash val="solid"/>
+                      <a:round/>
+                      <a:headEnd type="none" w="med" len="med"/>
+                      <a:tailEnd type="none" w="med" len="med"/>
+                    </a:lnR>
+                    <a:lnT w="12700" cap="flat" cmpd="sng" algn="ctr">
+                      <a:solidFill>
+                        <a:srgbClr val="D8D8E6"/>
+                      </a:solidFill>
+                      <a:prstDash val="solid"/>
+                      <a:round/>
+                      <a:headEnd type="none" w="med" len="med"/>
+                      <a:tailEnd type="none" w="med" len="med"/>
+                    </a:lnT>
+                    <a:lnB w="12700" cap="flat" cmpd="sng" algn="ctr">
+                      <a:solidFill>
+                        <a:srgbClr val="D8D8E6"/>
+                      </a:solidFill>
+                      <a:prstDash val="solid"/>
+                      <a:round/>
+                      <a:headEnd type="none" w="med" len="med"/>
+                      <a:tailEnd type="none" w="med" len="med"/>
+                    </a:lnB>
+                    <a:solidFill>
+                      <a:srgbClr val="FFFFFF"/>
+                    </a:solidFill>
+                  </a:tcPr>
+                </a:tc>
+              </a:tr>
+            </a:tbl>
+          </a:graphicData>
+        </a:graphic>
+      </p:graphicFrame>
+      <p:sp>
+        <p:nvSpPr>
+          <p:cNvPr id="5" name="Text 2"/>
           <p:cNvSpPr txBox="1"/>
           <p:nvPr/>
         </p:nvSpPr>
         <p:spPr>
           <a:xfrm>
-            <a:off x="960120" y="2194560"/>
-            <a:ext cx="10271455" cy="2758440"/>
+            <a:off x="640080" y="6035040"/>
+            <a:ext cx="10911535" cy="365760"/>
           </a:xfrm>
           <a:prstGeom prst="rect">
             <a:avLst/>
@@ -13287,241 +14583,30 @@
           <a:ln/>
         </p:spPr>
         <p:txBody>
-          <a:bodyPr wrap="square" lIns="0" tIns="0" rIns="0" bIns="0" rtlCol="0" anchor="t"/>
+          <a:bodyPr wrap="square" lIns="0" tIns="0" rIns="0" bIns="0" rtlCol="0" anchor="ctr"/>
           <a:lstStyle/>
           <a:p>
             <a:pPr indent="0" marL="0">
-              <a:lnSpc>
-                <a:spcPct val="125000"/>
-              </a:lnSpc>
-              <a:buNone/>
-            </a:pPr>
-            <a:r>
-              <a:rPr lang="en-US" sz="1400" dirty="0">
-                <a:solidFill>
-                  <a:srgbClr val="C9D3F5"/>
-                </a:solidFill>
-                <a:latin typeface="Courier New" pitchFamily="34" charset="0"/>
-                <a:ea typeface="Courier New" pitchFamily="34" charset="-122"/>
-                <a:cs typeface="Courier New" pitchFamily="34" charset="-120"/>
-              </a:rPr>
-              <a:t>.parent {</a:t>
-            </a:r>
-            <a:endParaRPr lang="en-US" sz="1400" dirty="0"/>
-          </a:p>
-          <a:p>
-            <a:pPr indent="0" marL="0">
-              <a:lnSpc>
-                <a:spcPct val="125000"/>
-              </a:lnSpc>
-              <a:buNone/>
-            </a:pPr>
-            <a:r>
-              <a:rPr lang="en-US" sz="1400" dirty="0">
-                <a:solidFill>
-                  <a:srgbClr val="C9D3F5"/>
-                </a:solidFill>
-                <a:latin typeface="Courier New" pitchFamily="34" charset="0"/>
-                <a:ea typeface="Courier New" pitchFamily="34" charset="-122"/>
-                <a:cs typeface="Courier New" pitchFamily="34" charset="-120"/>
-              </a:rPr>
-              <a:t>  border: 4px solid crimson;</a:t>
-            </a:r>
-            <a:endParaRPr lang="en-US" sz="1400" dirty="0"/>
-          </a:p>
-          <a:p>
-            <a:pPr indent="0" marL="0">
-              <a:lnSpc>
-                <a:spcPct val="125000"/>
-              </a:lnSpc>
-              <a:buNone/>
-            </a:pPr>
-            <a:r>
-              <a:rPr lang="en-US" sz="1400" dirty="0">
-                <a:solidFill>
-                  <a:srgbClr val="C9D3F5"/>
-                </a:solidFill>
-                <a:latin typeface="Courier New" pitchFamily="34" charset="0"/>
-                <a:ea typeface="Courier New" pitchFamily="34" charset="-122"/>
-                <a:cs typeface="Courier New" pitchFamily="34" charset="-120"/>
-              </a:rPr>
-              <a:t>  padding: 20px;</a:t>
-            </a:r>
-            <a:endParaRPr lang="en-US" sz="1400" dirty="0"/>
-          </a:p>
-          <a:p>
-            <a:pPr indent="0" marL="0">
-              <a:lnSpc>
-                <a:spcPct val="125000"/>
-              </a:lnSpc>
-              <a:buNone/>
-            </a:pPr>
-            <a:r>
-              <a:rPr lang="en-US" sz="1400" dirty="0">
-                <a:solidFill>
-                  <a:srgbClr val="C9D3F5"/>
-                </a:solidFill>
-                <a:latin typeface="Courier New" pitchFamily="34" charset="0"/>
-                <a:ea typeface="Courier New" pitchFamily="34" charset="-122"/>
-                <a:cs typeface="Courier New" pitchFamily="34" charset="-120"/>
-              </a:rPr>
-              <a:t>  color: darkblue;</a:t>
-            </a:r>
-            <a:endParaRPr lang="en-US" sz="1400" dirty="0"/>
-          </a:p>
-          <a:p>
-            <a:pPr indent="0" marL="0">
-              <a:lnSpc>
-                <a:spcPct val="125000"/>
-              </a:lnSpc>
-              <a:buNone/>
-            </a:pPr>
-            <a:r>
-              <a:rPr lang="en-US" sz="1400" dirty="0">
-                <a:solidFill>
-                  <a:srgbClr val="C9D3F5"/>
-                </a:solidFill>
-                <a:latin typeface="Courier New" pitchFamily="34" charset="0"/>
-                <a:ea typeface="Courier New" pitchFamily="34" charset="-122"/>
-                <a:cs typeface="Courier New" pitchFamily="34" charset="-120"/>
-              </a:rPr>
-              <a:t>}</a:t>
-            </a:r>
-            <a:endParaRPr lang="en-US" sz="1400" dirty="0"/>
-          </a:p>
-          <a:p>
-            <a:pPr indent="0" marL="0">
-              <a:lnSpc>
-                <a:spcPct val="125000"/>
-              </a:lnSpc>
-              <a:buNone/>
-            </a:pPr>
-            <a:endParaRPr lang="en-US" sz="1400" dirty="0"/>
-          </a:p>
-          <a:p>
-            <a:pPr indent="0" marL="0">
-              <a:lnSpc>
-                <a:spcPct val="125000"/>
-              </a:lnSpc>
-              <a:buNone/>
-            </a:pPr>
-            <a:r>
-              <a:rPr lang="en-US" sz="1400" dirty="0">
-                <a:solidFill>
-                  <a:srgbClr val="C9D3F5"/>
-                </a:solidFill>
-                <a:latin typeface="Courier New" pitchFamily="34" charset="0"/>
-                <a:ea typeface="Courier New" pitchFamily="34" charset="-122"/>
-                <a:cs typeface="Courier New" pitchFamily="34" charset="-120"/>
-              </a:rPr>
-              <a:t>&lt;div class="parent"&gt;</a:t>
-            </a:r>
-            <a:endParaRPr lang="en-US" sz="1400" dirty="0"/>
-          </a:p>
-          <a:p>
-            <a:pPr indent="0" marL="0">
-              <a:lnSpc>
-                <a:spcPct val="125000"/>
-              </a:lnSpc>
-              <a:buNone/>
-            </a:pPr>
-            <a:r>
-              <a:rPr lang="en-US" sz="1400" dirty="0">
-                <a:solidFill>
-                  <a:srgbClr val="C9D3F5"/>
-                </a:solidFill>
-                <a:latin typeface="Courier New" pitchFamily="34" charset="0"/>
-                <a:ea typeface="Courier New" pitchFamily="34" charset="-122"/>
-                <a:cs typeface="Courier New" pitchFamily="34" charset="-120"/>
-              </a:rPr>
-              <a:t>  Parent text is dark blue.</a:t>
-            </a:r>
-            <a:endParaRPr lang="en-US" sz="1400" dirty="0"/>
-          </a:p>
-          <a:p>
-            <a:pPr indent="0" marL="0">
-              <a:lnSpc>
-                <a:spcPct val="125000"/>
-              </a:lnSpc>
-              <a:buNone/>
-            </a:pPr>
-            <a:r>
-              <a:rPr lang="en-US" sz="1400" dirty="0">
-                <a:solidFill>
-                  <a:srgbClr val="C9D3F5"/>
-                </a:solidFill>
-                <a:latin typeface="Courier New" pitchFamily="34" charset="0"/>
-                <a:ea typeface="Courier New" pitchFamily="34" charset="-122"/>
-                <a:cs typeface="Courier New" pitchFamily="34" charset="-120"/>
-              </a:rPr>
-              <a:t>  &lt;p&gt;Child paragraph is dark blue too.&lt;/p&gt;</a:t>
-            </a:r>
-            <a:endParaRPr lang="en-US" sz="1400" dirty="0"/>
-          </a:p>
-          <a:p>
-            <a:pPr indent="0" marL="0">
-              <a:lnSpc>
-                <a:spcPct val="125000"/>
-              </a:lnSpc>
-              <a:buNone/>
-            </a:pPr>
-            <a:r>
-              <a:rPr lang="en-US" sz="1400" dirty="0">
-                <a:solidFill>
-                  <a:srgbClr val="C9D3F5"/>
-                </a:solidFill>
-                <a:latin typeface="Courier New" pitchFamily="34" charset="0"/>
-                <a:ea typeface="Courier New" pitchFamily="34" charset="-122"/>
-                <a:cs typeface="Courier New" pitchFamily="34" charset="-120"/>
-              </a:rPr>
-              <a:t>&lt;/div&gt;</a:t>
-            </a:r>
-            <a:endParaRPr lang="en-US" sz="1400" dirty="0"/>
-          </a:p>
-        </p:txBody>
-      </p:sp>
-      <p:sp>
-        <p:nvSpPr>
-          <p:cNvPr id="6" name="Text 4"/>
-          <p:cNvSpPr txBox="1"/>
-          <p:nvPr/>
-        </p:nvSpPr>
-        <p:spPr>
-          <a:xfrm>
-            <a:off x="640080" y="5410200"/>
-            <a:ext cx="10911535" cy="853440"/>
-          </a:xfrm>
-          <a:prstGeom prst="rect">
-            <a:avLst/>
-          </a:prstGeom>
-          <a:noFill/>
-          <a:ln/>
-        </p:spPr>
-        <p:txBody>
-          <a:bodyPr wrap="square" lIns="0" tIns="0" rIns="0" bIns="0" rtlCol="0" anchor="t"/>
-          <a:lstStyle/>
-          <a:p>
-            <a:pPr indent="0" marL="0">
-              <a:buNone/>
-            </a:pPr>
-            <a:r>
-              <a:rPr lang="en-US" sz="1300" dirty="0">
-                <a:solidFill>
-                  <a:srgbClr val="26262F"/>
+              <a:buNone/>
+            </a:pPr>
+            <a:r>
+              <a:rPr lang="en-US" sz="1150" i="1" dirty="0">
+                <a:solidFill>
+                  <a:srgbClr val="5D5D72"/>
                 </a:solidFill>
                 <a:latin typeface="Calibri" pitchFamily="34" charset="0"/>
                 <a:ea typeface="Calibri" pitchFamily="34" charset="-122"/>
                 <a:cs typeface="Calibri" pitchFamily="34" charset="-120"/>
               </a:rPr>
-              <a:t>color inherits, so the &lt;p&gt; is dark blue too. border and padding do NOT inherit — only .parent itself gets the crimson outline and padding.</a:t>
-            </a:r>
-            <a:endParaRPr lang="en-US" sz="1300" dirty="0"/>
-          </a:p>
-        </p:txBody>
-      </p:sp>
-      <p:sp>
-        <p:nvSpPr>
-          <p:cNvPr id="7" name="Text 5"/>
+              <a:t>#nav .item a:hover totals to (0 inline, 1 ID, 2 classes/pseudo, 1 element) = (0,1,2,1). Every part of nav ul li a is a plain element, so it totals to (0,0,0,4). Compare column by column, left to right: the IDs column differs first (1 vs. 0), so #nav .item a:hover wins outright — the comparison never even reaches the Elements column.</a:t>
+            </a:r>
+            <a:endParaRPr lang="en-US" sz="1150" dirty="0"/>
+          </a:p>
+        </p:txBody>
+      </p:sp>
+      <p:sp>
+        <p:nvSpPr>
+          <p:cNvPr id="6" name="Text 3"/>
           <p:cNvSpPr txBox="1"/>
           <p:nvPr/>
         </p:nvSpPr>
@@ -13560,7 +14645,7 @@
       </p:sp>
       <p:sp>
         <p:nvSpPr>
-          <p:cNvPr id="8" name="Text 6"/>
+          <p:cNvPr id="7" name="Text 4"/>
           <p:cNvSpPr txBox="1"/>
           <p:nvPr/>
         </p:nvSpPr>
@@ -13701,6 +14786,466 @@
                 <a:ea typeface="Cambria" pitchFamily="34" charset="-122"/>
                 <a:cs typeface="Cambria" pitchFamily="34" charset="-120"/>
               </a:rPr>
+              <a:t>An Example Where Inheritance Does NOT Happen</a:t>
+            </a:r>
+            <a:endParaRPr lang="en-US" sz="3400" dirty="0"/>
+          </a:p>
+        </p:txBody>
+      </p:sp>
+      <p:sp>
+        <p:nvSpPr>
+          <p:cNvPr id="4" name="Shape 2"/>
+          <p:cNvSpPr/>
+          <p:nvPr/>
+        </p:nvSpPr>
+        <p:spPr>
+          <a:xfrm>
+            <a:off x="640080" y="1965960"/>
+            <a:ext cx="10911535" cy="3215640"/>
+          </a:xfrm>
+          <a:prstGeom prst="roundRect">
+            <a:avLst>
+              <a:gd name="adj" fmla="val 2275"/>
+            </a:avLst>
+          </a:prstGeom>
+          <a:solidFill>
+            <a:srgbClr val="1E1E4C"/>
+          </a:solidFill>
+          <a:ln/>
+        </p:spPr>
+      </p:sp>
+      <p:sp>
+        <p:nvSpPr>
+          <p:cNvPr id="5" name="Text 3"/>
+          <p:cNvSpPr txBox="1"/>
+          <p:nvPr/>
+        </p:nvSpPr>
+        <p:spPr>
+          <a:xfrm>
+            <a:off x="960120" y="2194560"/>
+            <a:ext cx="10271455" cy="2758440"/>
+          </a:xfrm>
+          <a:prstGeom prst="rect">
+            <a:avLst/>
+          </a:prstGeom>
+          <a:noFill/>
+          <a:ln/>
+        </p:spPr>
+        <p:txBody>
+          <a:bodyPr wrap="square" lIns="0" tIns="0" rIns="0" bIns="0" rtlCol="0" anchor="t"/>
+          <a:lstStyle/>
+          <a:p>
+            <a:pPr indent="0" marL="0">
+              <a:lnSpc>
+                <a:spcPct val="125000"/>
+              </a:lnSpc>
+              <a:buNone/>
+            </a:pPr>
+            <a:r>
+              <a:rPr lang="en-US" sz="1400" dirty="0">
+                <a:solidFill>
+                  <a:srgbClr val="C9D3F5"/>
+                </a:solidFill>
+                <a:latin typeface="Courier New" pitchFamily="34" charset="0"/>
+                <a:ea typeface="Courier New" pitchFamily="34" charset="-122"/>
+                <a:cs typeface="Courier New" pitchFamily="34" charset="-120"/>
+              </a:rPr>
+              <a:t>.parent {</a:t>
+            </a:r>
+            <a:endParaRPr lang="en-US" sz="1400" dirty="0"/>
+          </a:p>
+          <a:p>
+            <a:pPr indent="0" marL="0">
+              <a:lnSpc>
+                <a:spcPct val="125000"/>
+              </a:lnSpc>
+              <a:buNone/>
+            </a:pPr>
+            <a:r>
+              <a:rPr lang="en-US" sz="1400" dirty="0">
+                <a:solidFill>
+                  <a:srgbClr val="C9D3F5"/>
+                </a:solidFill>
+                <a:latin typeface="Courier New" pitchFamily="34" charset="0"/>
+                <a:ea typeface="Courier New" pitchFamily="34" charset="-122"/>
+                <a:cs typeface="Courier New" pitchFamily="34" charset="-120"/>
+              </a:rPr>
+              <a:t>  border: 4px solid crimson;</a:t>
+            </a:r>
+            <a:endParaRPr lang="en-US" sz="1400" dirty="0"/>
+          </a:p>
+          <a:p>
+            <a:pPr indent="0" marL="0">
+              <a:lnSpc>
+                <a:spcPct val="125000"/>
+              </a:lnSpc>
+              <a:buNone/>
+            </a:pPr>
+            <a:r>
+              <a:rPr lang="en-US" sz="1400" dirty="0">
+                <a:solidFill>
+                  <a:srgbClr val="C9D3F5"/>
+                </a:solidFill>
+                <a:latin typeface="Courier New" pitchFamily="34" charset="0"/>
+                <a:ea typeface="Courier New" pitchFamily="34" charset="-122"/>
+                <a:cs typeface="Courier New" pitchFamily="34" charset="-120"/>
+              </a:rPr>
+              <a:t>  padding: 20px;</a:t>
+            </a:r>
+            <a:endParaRPr lang="en-US" sz="1400" dirty="0"/>
+          </a:p>
+          <a:p>
+            <a:pPr indent="0" marL="0">
+              <a:lnSpc>
+                <a:spcPct val="125000"/>
+              </a:lnSpc>
+              <a:buNone/>
+            </a:pPr>
+            <a:r>
+              <a:rPr lang="en-US" sz="1400" dirty="0">
+                <a:solidFill>
+                  <a:srgbClr val="C9D3F5"/>
+                </a:solidFill>
+                <a:latin typeface="Courier New" pitchFamily="34" charset="0"/>
+                <a:ea typeface="Courier New" pitchFamily="34" charset="-122"/>
+                <a:cs typeface="Courier New" pitchFamily="34" charset="-120"/>
+              </a:rPr>
+              <a:t>  color: darkblue;</a:t>
+            </a:r>
+            <a:endParaRPr lang="en-US" sz="1400" dirty="0"/>
+          </a:p>
+          <a:p>
+            <a:pPr indent="0" marL="0">
+              <a:lnSpc>
+                <a:spcPct val="125000"/>
+              </a:lnSpc>
+              <a:buNone/>
+            </a:pPr>
+            <a:r>
+              <a:rPr lang="en-US" sz="1400" dirty="0">
+                <a:solidFill>
+                  <a:srgbClr val="C9D3F5"/>
+                </a:solidFill>
+                <a:latin typeface="Courier New" pitchFamily="34" charset="0"/>
+                <a:ea typeface="Courier New" pitchFamily="34" charset="-122"/>
+                <a:cs typeface="Courier New" pitchFamily="34" charset="-120"/>
+              </a:rPr>
+              <a:t>}</a:t>
+            </a:r>
+            <a:endParaRPr lang="en-US" sz="1400" dirty="0"/>
+          </a:p>
+          <a:p>
+            <a:pPr indent="0" marL="0">
+              <a:lnSpc>
+                <a:spcPct val="125000"/>
+              </a:lnSpc>
+              <a:buNone/>
+            </a:pPr>
+            <a:endParaRPr lang="en-US" sz="1400" dirty="0"/>
+          </a:p>
+          <a:p>
+            <a:pPr indent="0" marL="0">
+              <a:lnSpc>
+                <a:spcPct val="125000"/>
+              </a:lnSpc>
+              <a:buNone/>
+            </a:pPr>
+            <a:r>
+              <a:rPr lang="en-US" sz="1400" dirty="0">
+                <a:solidFill>
+                  <a:srgbClr val="C9D3F5"/>
+                </a:solidFill>
+                <a:latin typeface="Courier New" pitchFamily="34" charset="0"/>
+                <a:ea typeface="Courier New" pitchFamily="34" charset="-122"/>
+                <a:cs typeface="Courier New" pitchFamily="34" charset="-120"/>
+              </a:rPr>
+              <a:t>&lt;div class="parent"&gt;</a:t>
+            </a:r>
+            <a:endParaRPr lang="en-US" sz="1400" dirty="0"/>
+          </a:p>
+          <a:p>
+            <a:pPr indent="0" marL="0">
+              <a:lnSpc>
+                <a:spcPct val="125000"/>
+              </a:lnSpc>
+              <a:buNone/>
+            </a:pPr>
+            <a:r>
+              <a:rPr lang="en-US" sz="1400" dirty="0">
+                <a:solidFill>
+                  <a:srgbClr val="C9D3F5"/>
+                </a:solidFill>
+                <a:latin typeface="Courier New" pitchFamily="34" charset="0"/>
+                <a:ea typeface="Courier New" pitchFamily="34" charset="-122"/>
+                <a:cs typeface="Courier New" pitchFamily="34" charset="-120"/>
+              </a:rPr>
+              <a:t>  Parent text is dark blue.</a:t>
+            </a:r>
+            <a:endParaRPr lang="en-US" sz="1400" dirty="0"/>
+          </a:p>
+          <a:p>
+            <a:pPr indent="0" marL="0">
+              <a:lnSpc>
+                <a:spcPct val="125000"/>
+              </a:lnSpc>
+              <a:buNone/>
+            </a:pPr>
+            <a:r>
+              <a:rPr lang="en-US" sz="1400" dirty="0">
+                <a:solidFill>
+                  <a:srgbClr val="C9D3F5"/>
+                </a:solidFill>
+                <a:latin typeface="Courier New" pitchFamily="34" charset="0"/>
+                <a:ea typeface="Courier New" pitchFamily="34" charset="-122"/>
+                <a:cs typeface="Courier New" pitchFamily="34" charset="-120"/>
+              </a:rPr>
+              <a:t>  &lt;p&gt;Child paragraph is dark blue too.&lt;/p&gt;</a:t>
+            </a:r>
+            <a:endParaRPr lang="en-US" sz="1400" dirty="0"/>
+          </a:p>
+          <a:p>
+            <a:pPr indent="0" marL="0">
+              <a:lnSpc>
+                <a:spcPct val="125000"/>
+              </a:lnSpc>
+              <a:buNone/>
+            </a:pPr>
+            <a:r>
+              <a:rPr lang="en-US" sz="1400" dirty="0">
+                <a:solidFill>
+                  <a:srgbClr val="C9D3F5"/>
+                </a:solidFill>
+                <a:latin typeface="Courier New" pitchFamily="34" charset="0"/>
+                <a:ea typeface="Courier New" pitchFamily="34" charset="-122"/>
+                <a:cs typeface="Courier New" pitchFamily="34" charset="-120"/>
+              </a:rPr>
+              <a:t>&lt;/div&gt;</a:t>
+            </a:r>
+            <a:endParaRPr lang="en-US" sz="1400" dirty="0"/>
+          </a:p>
+        </p:txBody>
+      </p:sp>
+      <p:sp>
+        <p:nvSpPr>
+          <p:cNvPr id="6" name="Text 4"/>
+          <p:cNvSpPr txBox="1"/>
+          <p:nvPr/>
+        </p:nvSpPr>
+        <p:spPr>
+          <a:xfrm>
+            <a:off x="640080" y="5410200"/>
+            <a:ext cx="10911535" cy="853440"/>
+          </a:xfrm>
+          <a:prstGeom prst="rect">
+            <a:avLst/>
+          </a:prstGeom>
+          <a:noFill/>
+          <a:ln/>
+        </p:spPr>
+        <p:txBody>
+          <a:bodyPr wrap="square" lIns="0" tIns="0" rIns="0" bIns="0" rtlCol="0" anchor="t"/>
+          <a:lstStyle/>
+          <a:p>
+            <a:pPr indent="0" marL="0">
+              <a:buNone/>
+            </a:pPr>
+            <a:r>
+              <a:rPr lang="en-US" sz="1300" dirty="0">
+                <a:solidFill>
+                  <a:srgbClr val="26262F"/>
+                </a:solidFill>
+                <a:latin typeface="Calibri" pitchFamily="34" charset="0"/>
+                <a:ea typeface="Calibri" pitchFamily="34" charset="-122"/>
+                <a:cs typeface="Calibri" pitchFamily="34" charset="-120"/>
+              </a:rPr>
+              <a:t>color inherits, so the &lt;p&gt; is dark blue too. border and padding do NOT inherit — only .parent itself gets the crimson outline and padding.</a:t>
+            </a:r>
+            <a:endParaRPr lang="en-US" sz="1300" dirty="0"/>
+          </a:p>
+        </p:txBody>
+      </p:sp>
+      <p:sp>
+        <p:nvSpPr>
+          <p:cNvPr id="7" name="Text 5"/>
+          <p:cNvSpPr txBox="1"/>
+          <p:nvPr/>
+        </p:nvSpPr>
+        <p:spPr>
+          <a:xfrm>
+            <a:off x="640080" y="6446520"/>
+            <a:ext cx="8686800" cy="292608"/>
+          </a:xfrm>
+          <a:prstGeom prst="rect">
+            <a:avLst/>
+          </a:prstGeom>
+          <a:noFill/>
+          <a:ln/>
+        </p:spPr>
+        <p:txBody>
+          <a:bodyPr wrap="square" lIns="0" tIns="0" rIns="0" bIns="0" rtlCol="0" anchor="ctr"/>
+          <a:lstStyle/>
+          <a:p>
+            <a:pPr algn="l" indent="0" marL="0">
+              <a:buNone/>
+            </a:pPr>
+            <a:r>
+              <a:rPr lang="en-US" sz="900" dirty="0">
+                <a:solidFill>
+                  <a:srgbClr val="5D5D72"/>
+                </a:solidFill>
+                <a:latin typeface="Calibri" pitchFamily="34" charset="0"/>
+                <a:ea typeface="Calibri" pitchFamily="34" charset="-122"/>
+                <a:cs typeface="Calibri" pitchFamily="34" charset="-120"/>
+              </a:rPr>
+              <a:t>Usman Akram  •  COMSATS University Islamabad</a:t>
+            </a:r>
+            <a:endParaRPr lang="en-US" sz="900" dirty="0"/>
+          </a:p>
+        </p:txBody>
+      </p:sp>
+      <p:sp>
+        <p:nvSpPr>
+          <p:cNvPr id="8" name="Text 6"/>
+          <p:cNvSpPr txBox="1"/>
+          <p:nvPr/>
+        </p:nvSpPr>
+        <p:spPr>
+          <a:xfrm>
+            <a:off x="11155680" y="6446520"/>
+            <a:ext cx="457200" cy="292608"/>
+          </a:xfrm>
+          <a:prstGeom prst="rect">
+            <a:avLst/>
+          </a:prstGeom>
+          <a:noFill/>
+          <a:ln/>
+        </p:spPr>
+        <p:txBody>
+          <a:bodyPr wrap="square" lIns="0" tIns="0" rIns="0" bIns="0" rtlCol="0" anchor="ctr"/>
+          <a:lstStyle/>
+          <a:p>
+            <a:pPr algn="r" indent="0" marL="0">
+              <a:buNone/>
+            </a:pPr>
+            <a:r>
+              <a:rPr lang="en-US" sz="900" dirty="0">
+                <a:solidFill>
+                  <a:srgbClr val="5D5D72"/>
+                </a:solidFill>
+                <a:latin typeface="Calibri" pitchFamily="34" charset="0"/>
+                <a:ea typeface="Calibri" pitchFamily="34" charset="-122"/>
+                <a:cs typeface="Calibri" pitchFamily="34" charset="-120"/>
+              </a:rPr>
+              <a:t>27</a:t>
+            </a:r>
+            <a:endParaRPr lang="en-US" sz="900" dirty="0"/>
+          </a:p>
+        </p:txBody>
+      </p:sp>
+    </p:spTree>
+  </p:cSld>
+  <p:clrMapOvr>
+    <a:masterClrMapping/>
+  </p:clrMapOvr>
+</p:sld>
+</file>
+
+<file path=ppt/slides/slide28.xml><?xml version="1.0" encoding="utf-8"?>
+<p:sld xmlns:a="http://schemas.openxmlformats.org/drawingml/2006/main" xmlns:r="http://schemas.openxmlformats.org/officeDocument/2006/relationships" xmlns:p="http://schemas.openxmlformats.org/presentationml/2006/main">
+  <p:cSld name="Slide 28">
+    <p:bg>
+      <p:bgPr>
+        <a:solidFill>
+          <a:srgbClr val="FFFFFF"/>
+        </a:solidFill>
+      </p:bgPr>
+    </p:bg>
+    <p:spTree>
+      <p:nvGrpSpPr>
+        <p:cNvPr id="1" name=""/>
+        <p:cNvGrpSpPr/>
+        <p:nvPr/>
+      </p:nvGrpSpPr>
+      <p:grpSpPr>
+        <a:xfrm>
+          <a:off x="0" y="0"/>
+          <a:ext cx="0" cy="0"/>
+          <a:chOff x="0" y="0"/>
+          <a:chExt cx="0" cy="0"/>
+        </a:xfrm>
+      </p:grpSpPr>
+      <p:sp>
+        <p:nvSpPr>
+          <p:cNvPr id="2" name="Text 0"/>
+          <p:cNvSpPr txBox="1"/>
+          <p:nvPr/>
+        </p:nvSpPr>
+        <p:spPr>
+          <a:xfrm>
+            <a:off x="640080" y="457200"/>
+            <a:ext cx="10058400" cy="365760"/>
+          </a:xfrm>
+          <a:prstGeom prst="rect">
+            <a:avLst/>
+          </a:prstGeom>
+          <a:noFill/>
+          <a:ln/>
+        </p:spPr>
+        <p:txBody>
+          <a:bodyPr wrap="square" lIns="0" tIns="0" rIns="0" bIns="0" rtlCol="0" anchor="ctr"/>
+          <a:lstStyle/>
+          <a:p>
+            <a:pPr algn="l" indent="0" marL="0">
+              <a:buNone/>
+            </a:pPr>
+            <a:r>
+              <a:rPr lang="en-US" sz="1300" b="1" spc="300" kern="0" dirty="0">
+                <a:solidFill>
+                  <a:srgbClr val="FF8A3D"/>
+                </a:solidFill>
+                <a:latin typeface="Calibri" pitchFamily="34" charset="0"/>
+                <a:ea typeface="Calibri" pitchFamily="34" charset="-122"/>
+                <a:cs typeface="Calibri" pitchFamily="34" charset="-120"/>
+              </a:rPr>
+              <a:t>INHERITANCE</a:t>
+            </a:r>
+            <a:endParaRPr lang="en-US" sz="1300" dirty="0"/>
+          </a:p>
+        </p:txBody>
+      </p:sp>
+      <p:sp>
+        <p:nvSpPr>
+          <p:cNvPr id="3" name="Text 1"/>
+          <p:cNvSpPr txBox="1"/>
+          <p:nvPr/>
+        </p:nvSpPr>
+        <p:spPr>
+          <a:xfrm>
+            <a:off x="640080" y="841248"/>
+            <a:ext cx="10881360" cy="914400"/>
+          </a:xfrm>
+          <a:prstGeom prst="rect">
+            <a:avLst/>
+          </a:prstGeom>
+          <a:noFill/>
+          <a:ln/>
+        </p:spPr>
+        <p:txBody>
+          <a:bodyPr wrap="square" lIns="0" tIns="0" rIns="0" bIns="0" rtlCol="0" anchor="ctr"/>
+          <a:lstStyle/>
+          <a:p>
+            <a:pPr algn="l" indent="0" marL="0">
+              <a:buNone/>
+            </a:pPr>
+            <a:r>
+              <a:rPr lang="en-US" sz="3400" b="1" dirty="0">
+                <a:solidFill>
+                  <a:srgbClr val="2B2B7A"/>
+                </a:solidFill>
+                <a:latin typeface="Cambria" pitchFamily="34" charset="0"/>
+                <a:ea typeface="Cambria" pitchFamily="34" charset="-122"/>
+                <a:cs typeface="Cambria" pitchFamily="34" charset="-120"/>
+              </a:rPr>
               <a:t>Inherited vs. Not Inherited</a:t>
             </a:r>
             <a:endParaRPr lang="en-US" sz="3400" dirty="0"/>
@@ -13709,7 +15254,7 @@
       </p:sp>
       <p:graphicFrame>
         <p:nvGraphicFramePr>
-          <p:cNvPr id="28" name="Table 0"/>
+          <p:cNvPr id="29" name="Table 0"/>
           <p:cNvGraphicFramePr>
             <a:graphicFrameLocks noGrp="1"/>
           </p:cNvGraphicFramePr>
@@ -14637,396 +16182,6 @@
                 <a:ea typeface="Calibri" pitchFamily="34" charset="-122"/>
                 <a:cs typeface="Calibri" pitchFamily="34" charset="-120"/>
               </a:rPr>
-              <a:t>27</a:t>
-            </a:r>
-            <a:endParaRPr lang="en-US" sz="900" dirty="0"/>
-          </a:p>
-        </p:txBody>
-      </p:sp>
-    </p:spTree>
-  </p:cSld>
-  <p:clrMapOvr>
-    <a:masterClrMapping/>
-  </p:clrMapOvr>
-</p:sld>
-</file>
-
-<file path=ppt/slides/slide28.xml><?xml version="1.0" encoding="utf-8"?>
-<p:sld xmlns:a="http://schemas.openxmlformats.org/drawingml/2006/main" xmlns:r="http://schemas.openxmlformats.org/officeDocument/2006/relationships" xmlns:p="http://schemas.openxmlformats.org/presentationml/2006/main">
-  <p:cSld name="Slide 28">
-    <p:bg>
-      <p:bgPr>
-        <a:solidFill>
-          <a:srgbClr val="FFFFFF"/>
-        </a:solidFill>
-      </p:bgPr>
-    </p:bg>
-    <p:spTree>
-      <p:nvGrpSpPr>
-        <p:cNvPr id="1" name=""/>
-        <p:cNvGrpSpPr/>
-        <p:nvPr/>
-      </p:nvGrpSpPr>
-      <p:grpSpPr>
-        <a:xfrm>
-          <a:off x="0" y="0"/>
-          <a:ext cx="0" cy="0"/>
-          <a:chOff x="0" y="0"/>
-          <a:chExt cx="0" cy="0"/>
-        </a:xfrm>
-      </p:grpSpPr>
-      <p:sp>
-        <p:nvSpPr>
-          <p:cNvPr id="2" name="Text 0"/>
-          <p:cNvSpPr txBox="1"/>
-          <p:nvPr/>
-        </p:nvSpPr>
-        <p:spPr>
-          <a:xfrm>
-            <a:off x="640080" y="457200"/>
-            <a:ext cx="10058400" cy="365760"/>
-          </a:xfrm>
-          <a:prstGeom prst="rect">
-            <a:avLst/>
-          </a:prstGeom>
-          <a:noFill/>
-          <a:ln/>
-        </p:spPr>
-        <p:txBody>
-          <a:bodyPr wrap="square" lIns="0" tIns="0" rIns="0" bIns="0" rtlCol="0" anchor="ctr"/>
-          <a:lstStyle/>
-          <a:p>
-            <a:pPr algn="l" indent="0" marL="0">
-              <a:buNone/>
-            </a:pPr>
-            <a:r>
-              <a:rPr lang="en-US" sz="1300" b="1" spc="300" kern="0" dirty="0">
-                <a:solidFill>
-                  <a:srgbClr val="FF8A3D"/>
-                </a:solidFill>
-                <a:latin typeface="Calibri" pitchFamily="34" charset="0"/>
-                <a:ea typeface="Calibri" pitchFamily="34" charset="-122"/>
-                <a:cs typeface="Calibri" pitchFamily="34" charset="-120"/>
-              </a:rPr>
-              <a:t>COLOUR</a:t>
-            </a:r>
-            <a:endParaRPr lang="en-US" sz="1300" dirty="0"/>
-          </a:p>
-        </p:txBody>
-      </p:sp>
-      <p:sp>
-        <p:nvSpPr>
-          <p:cNvPr id="3" name="Text 1"/>
-          <p:cNvSpPr txBox="1"/>
-          <p:nvPr/>
-        </p:nvSpPr>
-        <p:spPr>
-          <a:xfrm>
-            <a:off x="640080" y="841248"/>
-            <a:ext cx="10881360" cy="914400"/>
-          </a:xfrm>
-          <a:prstGeom prst="rect">
-            <a:avLst/>
-          </a:prstGeom>
-          <a:noFill/>
-          <a:ln/>
-        </p:spPr>
-        <p:txBody>
-          <a:bodyPr wrap="square" lIns="0" tIns="0" rIns="0" bIns="0" rtlCol="0" anchor="ctr"/>
-          <a:lstStyle/>
-          <a:p>
-            <a:pPr algn="l" indent="0" marL="0">
-              <a:buNone/>
-            </a:pPr>
-            <a:r>
-              <a:rPr lang="en-US" sz="3400" b="1" dirty="0">
-                <a:solidFill>
-                  <a:srgbClr val="2B2B7A"/>
-                </a:solidFill>
-                <a:latin typeface="Cambria" pitchFamily="34" charset="0"/>
-                <a:ea typeface="Cambria" pitchFamily="34" charset="-122"/>
-                <a:cs typeface="Cambria" pitchFamily="34" charset="-120"/>
-              </a:rPr>
-              <a:t>Five Ways to Write a Colour</a:t>
-            </a:r>
-            <a:endParaRPr lang="en-US" sz="3400" dirty="0"/>
-          </a:p>
-        </p:txBody>
-      </p:sp>
-      <p:sp>
-        <p:nvSpPr>
-          <p:cNvPr id="4" name="Shape 2"/>
-          <p:cNvSpPr/>
-          <p:nvPr/>
-        </p:nvSpPr>
-        <p:spPr>
-          <a:xfrm>
-            <a:off x="640080" y="1965960"/>
-            <a:ext cx="10911535" cy="1739265"/>
-          </a:xfrm>
-          <a:prstGeom prst="roundRect">
-            <a:avLst>
-              <a:gd name="adj" fmla="val 4206"/>
-            </a:avLst>
-          </a:prstGeom>
-          <a:solidFill>
-            <a:srgbClr val="1E1E4C"/>
-          </a:solidFill>
-          <a:ln/>
-        </p:spPr>
-      </p:sp>
-      <p:sp>
-        <p:nvSpPr>
-          <p:cNvPr id="5" name="Text 3"/>
-          <p:cNvSpPr txBox="1"/>
-          <p:nvPr/>
-        </p:nvSpPr>
-        <p:spPr>
-          <a:xfrm>
-            <a:off x="960120" y="2194560"/>
-            <a:ext cx="10271455" cy="1282065"/>
-          </a:xfrm>
-          <a:prstGeom prst="rect">
-            <a:avLst/>
-          </a:prstGeom>
-          <a:noFill/>
-          <a:ln/>
-        </p:spPr>
-        <p:txBody>
-          <a:bodyPr wrap="square" lIns="0" tIns="0" rIns="0" bIns="0" rtlCol="0" anchor="t"/>
-          <a:lstStyle/>
-          <a:p>
-            <a:pPr indent="0" marL="0">
-              <a:lnSpc>
-                <a:spcPct val="125000"/>
-              </a:lnSpc>
-              <a:buNone/>
-            </a:pPr>
-            <a:r>
-              <a:rPr lang="en-US" sz="1250" dirty="0">
-                <a:solidFill>
-                  <a:srgbClr val="C9D3F5"/>
-                </a:solidFill>
-                <a:latin typeface="Courier New" pitchFamily="34" charset="0"/>
-                <a:ea typeface="Courier New" pitchFamily="34" charset="-122"/>
-                <a:cs typeface="Courier New" pitchFamily="34" charset="-120"/>
-              </a:rPr>
-              <a:t>.a { color: red; }                  /* named colour */</a:t>
-            </a:r>
-            <a:endParaRPr lang="en-US" sz="1250" dirty="0"/>
-          </a:p>
-          <a:p>
-            <a:pPr indent="0" marL="0">
-              <a:lnSpc>
-                <a:spcPct val="125000"/>
-              </a:lnSpc>
-              <a:buNone/>
-            </a:pPr>
-            <a:r>
-              <a:rPr lang="en-US" sz="1250" dirty="0">
-                <a:solidFill>
-                  <a:srgbClr val="C9D3F5"/>
-                </a:solidFill>
-                <a:latin typeface="Courier New" pitchFamily="34" charset="0"/>
-                <a:ea typeface="Courier New" pitchFamily="34" charset="-122"/>
-                <a:cs typeface="Courier New" pitchFamily="34" charset="-120"/>
-              </a:rPr>
-              <a:t>.b { color: #ff0000; }              /* hex code */</a:t>
-            </a:r>
-            <a:endParaRPr lang="en-US" sz="1250" dirty="0"/>
-          </a:p>
-          <a:p>
-            <a:pPr indent="0" marL="0">
-              <a:lnSpc>
-                <a:spcPct val="125000"/>
-              </a:lnSpc>
-              <a:buNone/>
-            </a:pPr>
-            <a:r>
-              <a:rPr lang="en-US" sz="1250" dirty="0">
-                <a:solidFill>
-                  <a:srgbClr val="C9D3F5"/>
-                </a:solidFill>
-                <a:latin typeface="Courier New" pitchFamily="34" charset="0"/>
-                <a:ea typeface="Courier New" pitchFamily="34" charset="-122"/>
-                <a:cs typeface="Courier New" pitchFamily="34" charset="-120"/>
-              </a:rPr>
-              <a:t>.c { color: rgb(255, 0, 0); }       /* red, green, blue */</a:t>
-            </a:r>
-            <a:endParaRPr lang="en-US" sz="1250" dirty="0"/>
-          </a:p>
-          <a:p>
-            <a:pPr indent="0" marL="0">
-              <a:lnSpc>
-                <a:spcPct val="125000"/>
-              </a:lnSpc>
-              <a:buNone/>
-            </a:pPr>
-            <a:r>
-              <a:rPr lang="en-US" sz="1250" dirty="0">
-                <a:solidFill>
-                  <a:srgbClr val="C9D3F5"/>
-                </a:solidFill>
-                <a:latin typeface="Courier New" pitchFamily="34" charset="0"/>
-                <a:ea typeface="Courier New" pitchFamily="34" charset="-122"/>
-                <a:cs typeface="Courier New" pitchFamily="34" charset="-120"/>
-              </a:rPr>
-              <a:t>.d { color: rgba(255, 0, 0, 0.5); } /* rgb + alpha */</a:t>
-            </a:r>
-            <a:endParaRPr lang="en-US" sz="1250" dirty="0"/>
-          </a:p>
-          <a:p>
-            <a:pPr indent="0" marL="0">
-              <a:lnSpc>
-                <a:spcPct val="125000"/>
-              </a:lnSpc>
-              <a:buNone/>
-            </a:pPr>
-            <a:r>
-              <a:rPr lang="en-US" sz="1250" dirty="0">
-                <a:solidFill>
-                  <a:srgbClr val="C9D3F5"/>
-                </a:solidFill>
-                <a:latin typeface="Courier New" pitchFamily="34" charset="0"/>
-                <a:ea typeface="Courier New" pitchFamily="34" charset="-122"/>
-                <a:cs typeface="Courier New" pitchFamily="34" charset="-120"/>
-              </a:rPr>
-              <a:t>.e { color: hsl(0, 100%, 50%); }    /* hue, sat, lightness */</a:t>
-            </a:r>
-            <a:endParaRPr lang="en-US" sz="1250" dirty="0"/>
-          </a:p>
-        </p:txBody>
-      </p:sp>
-      <p:sp>
-        <p:nvSpPr>
-          <p:cNvPr id="6" name="Shape 4"/>
-          <p:cNvSpPr/>
-          <p:nvPr/>
-        </p:nvSpPr>
-        <p:spPr>
-          <a:xfrm>
-            <a:off x="530352" y="3869817"/>
-            <a:ext cx="11130991" cy="2457831"/>
-          </a:xfrm>
-          <a:prstGeom prst="roundRect">
-            <a:avLst>
-              <a:gd name="adj" fmla="val 2232"/>
-            </a:avLst>
-          </a:prstGeom>
-          <a:solidFill>
-            <a:srgbClr val="FFFFFF"/>
-          </a:solidFill>
-          <a:ln w="12700">
-            <a:solidFill>
-              <a:srgbClr val="E2E2EE"/>
-            </a:solidFill>
-            <a:prstDash val="solid"/>
-          </a:ln>
-          <a:effectLst>
-            <a:outerShdw sx="100000" sy="100000" kx="0" ky="0" algn="bl" rotWithShape="0" blurRad="101600" dist="38100" dir="5400000">
-              <a:srgbClr val="000000">
-                <a:alpha val="12000"/>
-              </a:srgbClr>
-            </a:outerShdw>
-          </a:effectLst>
-        </p:spPr>
-      </p:sp>
-      <p:pic>
-        <p:nvPicPr>
-          <p:cNvPr id="7" name="Image 0" descr="D:/GitHub/mern-web-book/docs/assets/img/lecture-05/color-values.png">    </p:cNvPr>
-          <p:cNvPicPr>
-            <a:picLocks noChangeAspect="1"/>
-          </p:cNvPicPr>
-          <p:nvPr/>
-        </p:nvPicPr>
-        <p:blipFill>
-          <a:blip r:embed="rId1"/>
-          <a:stretch>
-            <a:fillRect/>
-          </a:stretch>
-        </p:blipFill>
-        <p:spPr>
-          <a:xfrm>
-            <a:off x="3781381" y="3979545"/>
-            <a:ext cx="4628934" cy="2238375"/>
-          </a:xfrm>
-          <a:prstGeom prst="rect">
-            <a:avLst/>
-          </a:prstGeom>
-        </p:spPr>
-      </p:pic>
-      <p:sp>
-        <p:nvSpPr>
-          <p:cNvPr id="8" name="Text 5"/>
-          <p:cNvSpPr txBox="1"/>
-          <p:nvPr/>
-        </p:nvSpPr>
-        <p:spPr>
-          <a:xfrm>
-            <a:off x="640080" y="6446520"/>
-            <a:ext cx="8686800" cy="292608"/>
-          </a:xfrm>
-          <a:prstGeom prst="rect">
-            <a:avLst/>
-          </a:prstGeom>
-          <a:noFill/>
-          <a:ln/>
-        </p:spPr>
-        <p:txBody>
-          <a:bodyPr wrap="square" lIns="0" tIns="0" rIns="0" bIns="0" rtlCol="0" anchor="ctr"/>
-          <a:lstStyle/>
-          <a:p>
-            <a:pPr algn="l" indent="0" marL="0">
-              <a:buNone/>
-            </a:pPr>
-            <a:r>
-              <a:rPr lang="en-US" sz="900" dirty="0">
-                <a:solidFill>
-                  <a:srgbClr val="5D5D72"/>
-                </a:solidFill>
-                <a:latin typeface="Calibri" pitchFamily="34" charset="0"/>
-                <a:ea typeface="Calibri" pitchFamily="34" charset="-122"/>
-                <a:cs typeface="Calibri" pitchFamily="34" charset="-120"/>
-              </a:rPr>
-              <a:t>Usman Akram  •  COMSATS University Islamabad</a:t>
-            </a:r>
-            <a:endParaRPr lang="en-US" sz="900" dirty="0"/>
-          </a:p>
-        </p:txBody>
-      </p:sp>
-      <p:sp>
-        <p:nvSpPr>
-          <p:cNvPr id="9" name="Text 6"/>
-          <p:cNvSpPr txBox="1"/>
-          <p:nvPr/>
-        </p:nvSpPr>
-        <p:spPr>
-          <a:xfrm>
-            <a:off x="11155680" y="6446520"/>
-            <a:ext cx="457200" cy="292608"/>
-          </a:xfrm>
-          <a:prstGeom prst="rect">
-            <a:avLst/>
-          </a:prstGeom>
-          <a:noFill/>
-          <a:ln/>
-        </p:spPr>
-        <p:txBody>
-          <a:bodyPr wrap="square" lIns="0" tIns="0" rIns="0" bIns="0" rtlCol="0" anchor="ctr"/>
-          <a:lstStyle/>
-          <a:p>
-            <a:pPr algn="r" indent="0" marL="0">
-              <a:buNone/>
-            </a:pPr>
-            <a:r>
-              <a:rPr lang="en-US" sz="900" dirty="0">
-                <a:solidFill>
-                  <a:srgbClr val="5D5D72"/>
-                </a:solidFill>
-                <a:latin typeface="Calibri" pitchFamily="34" charset="0"/>
-                <a:ea typeface="Calibri" pitchFamily="34" charset="-122"/>
-                <a:cs typeface="Calibri" pitchFamily="34" charset="-120"/>
-              </a:rPr>
               <a:t>28</a:t>
             </a:r>
             <a:endParaRPr lang="en-US" sz="900" dirty="0"/>
@@ -15098,7 +16253,7 @@
                 <a:ea typeface="Calibri" pitchFamily="34" charset="-122"/>
                 <a:cs typeface="Calibri" pitchFamily="34" charset="-120"/>
               </a:rPr>
-              <a:t>FONTS</a:t>
+              <a:t>COLOUR</a:t>
             </a:r>
             <a:endParaRPr lang="en-US" sz="1300" dirty="0"/>
           </a:p>
@@ -15137,7 +16292,7 @@
                 <a:ea typeface="Cambria" pitchFamily="34" charset="-122"/>
                 <a:cs typeface="Cambria" pitchFamily="34" charset="-120"/>
               </a:rPr>
-              <a:t>Font Properties</a:t>
+              <a:t>Five Ways to Write a Colour</a:t>
             </a:r>
             <a:endParaRPr lang="en-US" sz="3400" dirty="0"/>
           </a:p>
@@ -15145,57 +16300,18 @@
       </p:sp>
       <p:sp>
         <p:nvSpPr>
-          <p:cNvPr id="4" name="Text 2"/>
-          <p:cNvSpPr txBox="1"/>
-          <p:nvPr/>
-        </p:nvSpPr>
-        <p:spPr>
-          <a:xfrm>
-            <a:off x="640080" y="1691640"/>
-            <a:ext cx="10911535" cy="411480"/>
-          </a:xfrm>
-          <a:prstGeom prst="rect">
-            <a:avLst/>
-          </a:prstGeom>
-          <a:noFill/>
-          <a:ln/>
-        </p:spPr>
-        <p:txBody>
-          <a:bodyPr wrap="square" lIns="0" tIns="0" rIns="0" bIns="0" rtlCol="0" anchor="ctr"/>
-          <a:lstStyle/>
-          <a:p>
-            <a:pPr indent="0" marL="0">
-              <a:buNone/>
-            </a:pPr>
-            <a:r>
-              <a:rPr lang="en-US" sz="1350" i="1" dirty="0">
-                <a:solidFill>
-                  <a:srgbClr val="5D5D72"/>
-                </a:solidFill>
-                <a:latin typeface="Calibri" pitchFamily="34" charset="0"/>
-                <a:ea typeface="Calibri" pitchFamily="34" charset="-122"/>
-                <a:cs typeface="Calibri" pitchFamily="34" charset="-120"/>
-              </a:rPr>
-              <a:t>font-family (a fallback list), font-size, font-weight, font-style — combined via the font shorthand too.</a:t>
-            </a:r>
-            <a:endParaRPr lang="en-US" sz="1350" dirty="0"/>
-          </a:p>
-        </p:txBody>
-      </p:sp>
-      <p:sp>
-        <p:nvSpPr>
-          <p:cNvPr id="5" name="Shape 3"/>
+          <p:cNvPr id="4" name="Shape 2"/>
           <p:cNvSpPr/>
           <p:nvPr/>
         </p:nvSpPr>
         <p:spPr>
           <a:xfrm>
-            <a:off x="640080" y="2240280"/>
-            <a:ext cx="10911535" cy="1977390"/>
+            <a:off x="640080" y="1965960"/>
+            <a:ext cx="10911535" cy="1739265"/>
           </a:xfrm>
           <a:prstGeom prst="roundRect">
             <a:avLst>
-              <a:gd name="adj" fmla="val 3699"/>
+              <a:gd name="adj" fmla="val 4206"/>
             </a:avLst>
           </a:prstGeom>
           <a:solidFill>
@@ -15206,14 +16322,14 @@
       </p:sp>
       <p:sp>
         <p:nvSpPr>
-          <p:cNvPr id="6" name="Text 4"/>
+          <p:cNvPr id="5" name="Text 3"/>
           <p:cNvSpPr txBox="1"/>
           <p:nvPr/>
         </p:nvSpPr>
         <p:spPr>
           <a:xfrm>
-            <a:off x="960120" y="2468880"/>
-            <a:ext cx="10271455" cy="1520190"/>
+            <a:off x="960120" y="2194560"/>
+            <a:ext cx="10271455" cy="1282065"/>
           </a:xfrm>
           <a:prstGeom prst="rect">
             <a:avLst/>
@@ -15240,7 +16356,7 @@
                 <a:ea typeface="Courier New" pitchFamily="34" charset="-122"/>
                 <a:cs typeface="Courier New" pitchFamily="34" charset="-120"/>
               </a:rPr>
-              <a:t>p {</a:t>
+              <a:t>.a { color: red; }                  /* named colour */</a:t>
             </a:r>
             <a:endParaRPr lang="en-US" sz="1250" dirty="0"/>
           </a:p>
@@ -15260,7 +16376,7 @@
                 <a:ea typeface="Courier New" pitchFamily="34" charset="-122"/>
                 <a:cs typeface="Courier New" pitchFamily="34" charset="-120"/>
               </a:rPr>
-              <a:t>  font-family: "Helvetica Neue", Arial, sans-serif;</a:t>
+              <a:t>.b { color: #ff0000; }              /* hex code */</a:t>
             </a:r>
             <a:endParaRPr lang="en-US" sz="1250" dirty="0"/>
           </a:p>
@@ -15280,7 +16396,7 @@
                 <a:ea typeface="Courier New" pitchFamily="34" charset="-122"/>
                 <a:cs typeface="Courier New" pitchFamily="34" charset="-120"/>
               </a:rPr>
-              <a:t>  font-size: 16px;</a:t>
+              <a:t>.c { color: rgb(255, 0, 0); }       /* red, green, blue */</a:t>
             </a:r>
             <a:endParaRPr lang="en-US" sz="1250" dirty="0"/>
           </a:p>
@@ -15300,7 +16416,7 @@
                 <a:ea typeface="Courier New" pitchFamily="34" charset="-122"/>
                 <a:cs typeface="Courier New" pitchFamily="34" charset="-120"/>
               </a:rPr>
-              <a:t>  font-weight: bold;</a:t>
+              <a:t>.d { color: rgba(255, 0, 0, 0.5); } /* rgb + alpha */</a:t>
             </a:r>
             <a:endParaRPr lang="en-US" sz="1250" dirty="0"/>
           </a:p>
@@ -15320,46 +16436,26 @@
                 <a:ea typeface="Courier New" pitchFamily="34" charset="-122"/>
                 <a:cs typeface="Courier New" pitchFamily="34" charset="-120"/>
               </a:rPr>
-              <a:t>  font-style: italic;</a:t>
+              <a:t>.e { color: hsl(0, 100%, 50%); }    /* hue, sat, lightness */</a:t>
             </a:r>
             <a:endParaRPr lang="en-US" sz="1250" dirty="0"/>
           </a:p>
-          <a:p>
-            <a:pPr indent="0" marL="0">
-              <a:lnSpc>
-                <a:spcPct val="125000"/>
-              </a:lnSpc>
-              <a:buNone/>
-            </a:pPr>
-            <a:r>
-              <a:rPr lang="en-US" sz="1250" dirty="0">
-                <a:solidFill>
-                  <a:srgbClr val="C9D3F5"/>
-                </a:solidFill>
-                <a:latin typeface="Courier New" pitchFamily="34" charset="0"/>
-                <a:ea typeface="Courier New" pitchFamily="34" charset="-122"/>
-                <a:cs typeface="Courier New" pitchFamily="34" charset="-120"/>
-              </a:rPr>
-              <a:t>}</a:t>
-            </a:r>
-            <a:endParaRPr lang="en-US" sz="1250" dirty="0"/>
-          </a:p>
-        </p:txBody>
-      </p:sp>
-      <p:sp>
-        <p:nvSpPr>
-          <p:cNvPr id="7" name="Shape 5"/>
+        </p:txBody>
+      </p:sp>
+      <p:sp>
+        <p:nvSpPr>
+          <p:cNvPr id="6" name="Shape 4"/>
           <p:cNvSpPr/>
           <p:nvPr/>
         </p:nvSpPr>
         <p:spPr>
           <a:xfrm>
-            <a:off x="530352" y="4382262"/>
-            <a:ext cx="11130991" cy="1945386"/>
+            <a:off x="530352" y="3869817"/>
+            <a:ext cx="11130991" cy="2457831"/>
           </a:xfrm>
           <a:prstGeom prst="roundRect">
             <a:avLst>
-              <a:gd name="adj" fmla="val 2820"/>
+              <a:gd name="adj" fmla="val 2232"/>
             </a:avLst>
           </a:prstGeom>
           <a:solidFill>
@@ -15382,7 +16478,7 @@
       </p:sp>
       <p:pic>
         <p:nvPicPr>
-          <p:cNvPr id="8" name="Image 0" descr="D:/GitHub/mern-web-book/docs/assets/img/lecture-05/font-properties.png">    </p:cNvPr>
+          <p:cNvPr id="7" name="Image 0" descr="D:/GitHub/mern-web-book/docs/assets/img/lecture-05/color-values.png">    </p:cNvPr>
           <p:cNvPicPr>
             <a:picLocks noChangeAspect="1"/>
           </p:cNvPicPr>
@@ -15396,8 +16492,8 @@
         </p:blipFill>
         <p:spPr>
           <a:xfrm>
-            <a:off x="640080" y="5049654"/>
-            <a:ext cx="10911535" cy="610602"/>
+            <a:off x="3781381" y="3979545"/>
+            <a:ext cx="4628934" cy="2238375"/>
           </a:xfrm>
           <a:prstGeom prst="rect">
             <a:avLst/>
@@ -15406,7 +16502,7 @@
       </p:pic>
       <p:sp>
         <p:nvSpPr>
-          <p:cNvPr id="9" name="Text 6"/>
+          <p:cNvPr id="8" name="Text 5"/>
           <p:cNvSpPr txBox="1"/>
           <p:nvPr/>
         </p:nvSpPr>
@@ -15445,7 +16541,7 @@
       </p:sp>
       <p:sp>
         <p:nvSpPr>
-          <p:cNvPr id="10" name="Text 7"/>
+          <p:cNvPr id="9" name="Text 6"/>
           <p:cNvSpPr txBox="1"/>
           <p:nvPr/>
         </p:nvSpPr>
@@ -16127,7 +17223,7 @@
                 <a:ea typeface="Calibri" pitchFamily="34" charset="-122"/>
                 <a:cs typeface="Calibri" pitchFamily="34" charset="-120"/>
               </a:rPr>
-              <a:t>TEXT</a:t>
+              <a:t>FONTS</a:t>
             </a:r>
             <a:endParaRPr lang="en-US" sz="1300" dirty="0"/>
           </a:p>
@@ -16166,7 +17262,7 @@
                 <a:ea typeface="Cambria" pitchFamily="34" charset="-122"/>
                 <a:cs typeface="Cambria" pitchFamily="34" charset="-120"/>
               </a:rPr>
-              <a:t>Text Properties</a:t>
+              <a:t>Font Properties</a:t>
             </a:r>
             <a:endParaRPr lang="en-US" sz="3400" dirty="0"/>
           </a:p>
@@ -16174,18 +17270,57 @@
       </p:sp>
       <p:sp>
         <p:nvSpPr>
-          <p:cNvPr id="4" name="Shape 2"/>
+          <p:cNvPr id="4" name="Text 2"/>
+          <p:cNvSpPr txBox="1"/>
+          <p:nvPr/>
+        </p:nvSpPr>
+        <p:spPr>
+          <a:xfrm>
+            <a:off x="640080" y="1691640"/>
+            <a:ext cx="10911535" cy="411480"/>
+          </a:xfrm>
+          <a:prstGeom prst="rect">
+            <a:avLst/>
+          </a:prstGeom>
+          <a:noFill/>
+          <a:ln/>
+        </p:spPr>
+        <p:txBody>
+          <a:bodyPr wrap="square" lIns="0" tIns="0" rIns="0" bIns="0" rtlCol="0" anchor="ctr"/>
+          <a:lstStyle/>
+          <a:p>
+            <a:pPr indent="0" marL="0">
+              <a:buNone/>
+            </a:pPr>
+            <a:r>
+              <a:rPr lang="en-US" sz="1350" i="1" dirty="0">
+                <a:solidFill>
+                  <a:srgbClr val="5D5D72"/>
+                </a:solidFill>
+                <a:latin typeface="Calibri" pitchFamily="34" charset="0"/>
+                <a:ea typeface="Calibri" pitchFamily="34" charset="-122"/>
+                <a:cs typeface="Calibri" pitchFamily="34" charset="-120"/>
+              </a:rPr>
+              <a:t>font-family (a fallback list), font-size, font-weight, font-style — combined via the font shorthand too.</a:t>
+            </a:r>
+            <a:endParaRPr lang="en-US" sz="1350" dirty="0"/>
+          </a:p>
+        </p:txBody>
+      </p:sp>
+      <p:sp>
+        <p:nvSpPr>
+          <p:cNvPr id="5" name="Shape 3"/>
           <p:cNvSpPr/>
           <p:nvPr/>
         </p:nvSpPr>
         <p:spPr>
           <a:xfrm>
-            <a:off x="640080" y="1965960"/>
-            <a:ext cx="10911535" cy="2215515"/>
+            <a:off x="640080" y="2240280"/>
+            <a:ext cx="10911535" cy="1977390"/>
           </a:xfrm>
           <a:prstGeom prst="roundRect">
             <a:avLst>
-              <a:gd name="adj" fmla="val 3302"/>
+              <a:gd name="adj" fmla="val 3699"/>
             </a:avLst>
           </a:prstGeom>
           <a:solidFill>
@@ -16196,14 +17331,14 @@
       </p:sp>
       <p:sp>
         <p:nvSpPr>
-          <p:cNvPr id="5" name="Text 3"/>
+          <p:cNvPr id="6" name="Text 4"/>
           <p:cNvSpPr txBox="1"/>
           <p:nvPr/>
         </p:nvSpPr>
         <p:spPr>
           <a:xfrm>
-            <a:off x="960120" y="2194560"/>
-            <a:ext cx="10271455" cy="1758315"/>
+            <a:off x="960120" y="2468880"/>
+            <a:ext cx="10271455" cy="1520190"/>
           </a:xfrm>
           <a:prstGeom prst="rect">
             <a:avLst/>
@@ -16250,7 +17385,7 @@
                 <a:ea typeface="Courier New" pitchFamily="34" charset="-122"/>
                 <a:cs typeface="Courier New" pitchFamily="34" charset="-120"/>
               </a:rPr>
-              <a:t>  text-align: center;</a:t>
+              <a:t>  font-family: "Helvetica Neue", Arial, sans-serif;</a:t>
             </a:r>
             <a:endParaRPr lang="en-US" sz="1250" dirty="0"/>
           </a:p>
@@ -16270,7 +17405,7 @@
                 <a:ea typeface="Courier New" pitchFamily="34" charset="-122"/>
                 <a:cs typeface="Courier New" pitchFamily="34" charset="-120"/>
               </a:rPr>
-              <a:t>  text-decoration: underline;</a:t>
+              <a:t>  font-size: 16px;</a:t>
             </a:r>
             <a:endParaRPr lang="en-US" sz="1250" dirty="0"/>
           </a:p>
@@ -16290,7 +17425,7 @@
                 <a:ea typeface="Courier New" pitchFamily="34" charset="-122"/>
                 <a:cs typeface="Courier New" pitchFamily="34" charset="-120"/>
               </a:rPr>
-              <a:t>  text-transform: uppercase;</a:t>
+              <a:t>  font-weight: bold;</a:t>
             </a:r>
             <a:endParaRPr lang="en-US" sz="1250" dirty="0"/>
           </a:p>
@@ -16310,7 +17445,7 @@
                 <a:ea typeface="Courier New" pitchFamily="34" charset="-122"/>
                 <a:cs typeface="Courier New" pitchFamily="34" charset="-120"/>
               </a:rPr>
-              <a:t>  line-height: 1.6;</a:t>
+              <a:t>  font-style: italic;</a:t>
             </a:r>
             <a:endParaRPr lang="en-US" sz="1250" dirty="0"/>
           </a:p>
@@ -16330,46 +17465,26 @@
                 <a:ea typeface="Courier New" pitchFamily="34" charset="-122"/>
                 <a:cs typeface="Courier New" pitchFamily="34" charset="-120"/>
               </a:rPr>
-              <a:t>  letter-spacing: 0.5px;</a:t>
+              <a:t>}</a:t>
             </a:r>
             <a:endParaRPr lang="en-US" sz="1250" dirty="0"/>
           </a:p>
-          <a:p>
-            <a:pPr indent="0" marL="0">
-              <a:lnSpc>
-                <a:spcPct val="125000"/>
-              </a:lnSpc>
-              <a:buNone/>
-            </a:pPr>
-            <a:r>
-              <a:rPr lang="en-US" sz="1250" dirty="0">
-                <a:solidFill>
-                  <a:srgbClr val="C9D3F5"/>
-                </a:solidFill>
-                <a:latin typeface="Courier New" pitchFamily="34" charset="0"/>
-                <a:ea typeface="Courier New" pitchFamily="34" charset="-122"/>
-                <a:cs typeface="Courier New" pitchFamily="34" charset="-120"/>
-              </a:rPr>
-              <a:t>}</a:t>
-            </a:r>
-            <a:endParaRPr lang="en-US" sz="1250" dirty="0"/>
-          </a:p>
-        </p:txBody>
-      </p:sp>
-      <p:sp>
-        <p:nvSpPr>
-          <p:cNvPr id="6" name="Shape 4"/>
+        </p:txBody>
+      </p:sp>
+      <p:sp>
+        <p:nvSpPr>
+          <p:cNvPr id="7" name="Shape 5"/>
           <p:cNvSpPr/>
           <p:nvPr/>
         </p:nvSpPr>
         <p:spPr>
           <a:xfrm>
-            <a:off x="530352" y="4346067"/>
-            <a:ext cx="11130991" cy="1981581"/>
+            <a:off x="530352" y="4382262"/>
+            <a:ext cx="11130991" cy="1945386"/>
           </a:xfrm>
           <a:prstGeom prst="roundRect">
             <a:avLst>
-              <a:gd name="adj" fmla="val 2769"/>
+              <a:gd name="adj" fmla="val 2820"/>
             </a:avLst>
           </a:prstGeom>
           <a:solidFill>
@@ -16392,7 +17507,7 @@
       </p:sp>
       <p:pic>
         <p:nvPicPr>
-          <p:cNvPr id="7" name="Image 0" descr="D:/GitHub/mern-web-book/docs/assets/img/lecture-05/text-properties.png">    </p:cNvPr>
+          <p:cNvPr id="8" name="Image 0" descr="D:/GitHub/mern-web-book/docs/assets/img/lecture-05/font-properties.png">    </p:cNvPr>
           <p:cNvPicPr>
             <a:picLocks noChangeAspect="1"/>
           </p:cNvPicPr>
@@ -16406,8 +17521,8 @@
         </p:blipFill>
         <p:spPr>
           <a:xfrm>
-            <a:off x="1700435" y="4455795"/>
-            <a:ext cx="8790826" cy="1762125"/>
+            <a:off x="640080" y="5049654"/>
+            <a:ext cx="10911535" cy="610602"/>
           </a:xfrm>
           <a:prstGeom prst="rect">
             <a:avLst/>
@@ -16416,7 +17531,7 @@
       </p:pic>
       <p:sp>
         <p:nvSpPr>
-          <p:cNvPr id="8" name="Text 5"/>
+          <p:cNvPr id="9" name="Text 6"/>
           <p:cNvSpPr txBox="1"/>
           <p:nvPr/>
         </p:nvSpPr>
@@ -16455,7 +17570,7 @@
       </p:sp>
       <p:sp>
         <p:nvSpPr>
-          <p:cNvPr id="9" name="Text 6"/>
+          <p:cNvPr id="10" name="Text 7"/>
           <p:cNvSpPr txBox="1"/>
           <p:nvPr/>
         </p:nvSpPr>
@@ -16557,7 +17672,7 @@
                 <a:ea typeface="Calibri" pitchFamily="34" charset="-122"/>
                 <a:cs typeface="Calibri" pitchFamily="34" charset="-120"/>
               </a:rPr>
-              <a:t>BACKGROUNDS</a:t>
+              <a:t>TEXT</a:t>
             </a:r>
             <a:endParaRPr lang="en-US" sz="1300" dirty="0"/>
           </a:p>
@@ -16596,7 +17711,7 @@
                 <a:ea typeface="Cambria" pitchFamily="34" charset="-122"/>
                 <a:cs typeface="Cambria" pitchFamily="34" charset="-120"/>
               </a:rPr>
-              <a:t>Background Properties</a:t>
+              <a:t>Text Properties</a:t>
             </a:r>
             <a:endParaRPr lang="en-US" sz="3400" dirty="0"/>
           </a:p>
@@ -16611,11 +17726,11 @@
         <p:spPr>
           <a:xfrm>
             <a:off x="640080" y="1965960"/>
-            <a:ext cx="10911535" cy="2415540"/>
+            <a:ext cx="10911535" cy="2215515"/>
           </a:xfrm>
           <a:prstGeom prst="roundRect">
             <a:avLst>
-              <a:gd name="adj" fmla="val 3028"/>
+              <a:gd name="adj" fmla="val 3302"/>
             </a:avLst>
           </a:prstGeom>
           <a:solidFill>
@@ -16633,7 +17748,7 @@
         <p:spPr>
           <a:xfrm>
             <a:off x="960120" y="2194560"/>
-            <a:ext cx="10271455" cy="1958340"/>
+            <a:ext cx="10271455" cy="1758315"/>
           </a:xfrm>
           <a:prstGeom prst="rect">
             <a:avLst/>
@@ -16652,7 +17767,7 @@
               <a:buNone/>
             </a:pPr>
             <a:r>
-              <a:rPr lang="en-US" sz="1400" dirty="0">
+              <a:rPr lang="en-US" sz="1250" dirty="0">
                 <a:solidFill>
                   <a:srgbClr val="C9D3F5"/>
                 </a:solidFill>
@@ -16660,9 +17775,9 @@
                 <a:ea typeface="Courier New" pitchFamily="34" charset="-122"/>
                 <a:cs typeface="Courier New" pitchFamily="34" charset="-120"/>
               </a:rPr>
-              <a:t>.card {</a:t>
-            </a:r>
-            <a:endParaRPr lang="en-US" sz="1400" dirty="0"/>
+              <a:t>p {</a:t>
+            </a:r>
+            <a:endParaRPr lang="en-US" sz="1250" dirty="0"/>
           </a:p>
           <a:p>
             <a:pPr indent="0" marL="0">
@@ -16672,7 +17787,7 @@
               <a:buNone/>
             </a:pPr>
             <a:r>
-              <a:rPr lang="en-US" sz="1400" dirty="0">
+              <a:rPr lang="en-US" sz="1250" dirty="0">
                 <a:solidFill>
                   <a:srgbClr val="C9D3F5"/>
                 </a:solidFill>
@@ -16680,9 +17795,9 @@
                 <a:ea typeface="Courier New" pitchFamily="34" charset="-122"/>
                 <a:cs typeface="Courier New" pitchFamily="34" charset="-120"/>
               </a:rPr>
-              <a:t>  background-color: #f5f5f5;</a:t>
-            </a:r>
-            <a:endParaRPr lang="en-US" sz="1400" dirty="0"/>
+              <a:t>  text-align: center;</a:t>
+            </a:r>
+            <a:endParaRPr lang="en-US" sz="1250" dirty="0"/>
           </a:p>
           <a:p>
             <a:pPr indent="0" marL="0">
@@ -16692,7 +17807,7 @@
               <a:buNone/>
             </a:pPr>
             <a:r>
-              <a:rPr lang="en-US" sz="1400" dirty="0">
+              <a:rPr lang="en-US" sz="1250" dirty="0">
                 <a:solidFill>
                   <a:srgbClr val="C9D3F5"/>
                 </a:solidFill>
@@ -16700,9 +17815,9 @@
                 <a:ea typeface="Courier New" pitchFamily="34" charset="-122"/>
                 <a:cs typeface="Courier New" pitchFamily="34" charset="-120"/>
               </a:rPr>
-              <a:t>  background-image: url("pattern.png");</a:t>
-            </a:r>
-            <a:endParaRPr lang="en-US" sz="1400" dirty="0"/>
+              <a:t>  text-decoration: underline;</a:t>
+            </a:r>
+            <a:endParaRPr lang="en-US" sz="1250" dirty="0"/>
           </a:p>
           <a:p>
             <a:pPr indent="0" marL="0">
@@ -16712,7 +17827,7 @@
               <a:buNone/>
             </a:pPr>
             <a:r>
-              <a:rPr lang="en-US" sz="1400" dirty="0">
+              <a:rPr lang="en-US" sz="1250" dirty="0">
                 <a:solidFill>
                   <a:srgbClr val="C9D3F5"/>
                 </a:solidFill>
@@ -16720,9 +17835,9 @@
                 <a:ea typeface="Courier New" pitchFamily="34" charset="-122"/>
                 <a:cs typeface="Courier New" pitchFamily="34" charset="-120"/>
               </a:rPr>
-              <a:t>  background-repeat: no-repeat;</a:t>
-            </a:r>
-            <a:endParaRPr lang="en-US" sz="1400" dirty="0"/>
+              <a:t>  text-transform: uppercase;</a:t>
+            </a:r>
+            <a:endParaRPr lang="en-US" sz="1250" dirty="0"/>
           </a:p>
           <a:p>
             <a:pPr indent="0" marL="0">
@@ -16732,7 +17847,7 @@
               <a:buNone/>
             </a:pPr>
             <a:r>
-              <a:rPr lang="en-US" sz="1400" dirty="0">
+              <a:rPr lang="en-US" sz="1250" dirty="0">
                 <a:solidFill>
                   <a:srgbClr val="C9D3F5"/>
                 </a:solidFill>
@@ -16740,9 +17855,9 @@
                 <a:ea typeface="Courier New" pitchFamily="34" charset="-122"/>
                 <a:cs typeface="Courier New" pitchFamily="34" charset="-120"/>
               </a:rPr>
-              <a:t>  background-position: center;</a:t>
-            </a:r>
-            <a:endParaRPr lang="en-US" sz="1400" dirty="0"/>
+              <a:t>  line-height: 1.6;</a:t>
+            </a:r>
+            <a:endParaRPr lang="en-US" sz="1250" dirty="0"/>
           </a:p>
           <a:p>
             <a:pPr indent="0" marL="0">
@@ -16752,7 +17867,7 @@
               <a:buNone/>
             </a:pPr>
             <a:r>
-              <a:rPr lang="en-US" sz="1400" dirty="0">
+              <a:rPr lang="en-US" sz="1250" dirty="0">
                 <a:solidFill>
                   <a:srgbClr val="C9D3F5"/>
                 </a:solidFill>
@@ -16760,9 +17875,9 @@
                 <a:ea typeface="Courier New" pitchFamily="34" charset="-122"/>
                 <a:cs typeface="Courier New" pitchFamily="34" charset="-120"/>
               </a:rPr>
-              <a:t>  background-size: cover;</a:t>
-            </a:r>
-            <a:endParaRPr lang="en-US" sz="1400" dirty="0"/>
+              <a:t>  letter-spacing: 0.5px;</a:t>
+            </a:r>
+            <a:endParaRPr lang="en-US" sz="1250" dirty="0"/>
           </a:p>
           <a:p>
             <a:pPr indent="0" marL="0">
@@ -16772,7 +17887,7 @@
               <a:buNone/>
             </a:pPr>
             <a:r>
-              <a:rPr lang="en-US" sz="1400" dirty="0">
+              <a:rPr lang="en-US" sz="1250" dirty="0">
                 <a:solidFill>
                   <a:srgbClr val="C9D3F5"/>
                 </a:solidFill>
@@ -16782,20 +17897,78 @@
               </a:rPr>
               <a:t>}</a:t>
             </a:r>
-            <a:endParaRPr lang="en-US" sz="1400" dirty="0"/>
-          </a:p>
-        </p:txBody>
-      </p:sp>
-      <p:sp>
-        <p:nvSpPr>
-          <p:cNvPr id="6" name="Text 4"/>
+            <a:endParaRPr lang="en-US" sz="1250" dirty="0"/>
+          </a:p>
+        </p:txBody>
+      </p:sp>
+      <p:sp>
+        <p:nvSpPr>
+          <p:cNvPr id="6" name="Shape 4"/>
+          <p:cNvSpPr/>
+          <p:nvPr/>
+        </p:nvSpPr>
+        <p:spPr>
+          <a:xfrm>
+            <a:off x="530352" y="4346067"/>
+            <a:ext cx="11130991" cy="1981581"/>
+          </a:xfrm>
+          <a:prstGeom prst="roundRect">
+            <a:avLst>
+              <a:gd name="adj" fmla="val 2769"/>
+            </a:avLst>
+          </a:prstGeom>
+          <a:solidFill>
+            <a:srgbClr val="FFFFFF"/>
+          </a:solidFill>
+          <a:ln w="12700">
+            <a:solidFill>
+              <a:srgbClr val="E2E2EE"/>
+            </a:solidFill>
+            <a:prstDash val="solid"/>
+          </a:ln>
+          <a:effectLst>
+            <a:outerShdw sx="100000" sy="100000" kx="0" ky="0" algn="bl" rotWithShape="0" blurRad="101600" dist="38100" dir="5400000">
+              <a:srgbClr val="000000">
+                <a:alpha val="12000"/>
+              </a:srgbClr>
+            </a:outerShdw>
+          </a:effectLst>
+        </p:spPr>
+      </p:sp>
+      <p:pic>
+        <p:nvPicPr>
+          <p:cNvPr id="7" name="Image 0" descr="D:/GitHub/mern-web-book/docs/assets/img/lecture-05/text-properties.png">    </p:cNvPr>
+          <p:cNvPicPr>
+            <a:picLocks noChangeAspect="1"/>
+          </p:cNvPicPr>
+          <p:nvPr/>
+        </p:nvPicPr>
+        <p:blipFill>
+          <a:blip r:embed="rId1"/>
+          <a:stretch>
+            <a:fillRect/>
+          </a:stretch>
+        </p:blipFill>
+        <p:spPr>
+          <a:xfrm>
+            <a:off x="1700435" y="4455795"/>
+            <a:ext cx="8790826" cy="1762125"/>
+          </a:xfrm>
+          <a:prstGeom prst="rect">
+            <a:avLst/>
+          </a:prstGeom>
+        </p:spPr>
+      </p:pic>
+      <p:sp>
+        <p:nvSpPr>
+          <p:cNvPr id="8" name="Text 5"/>
           <p:cNvSpPr txBox="1"/>
           <p:nvPr/>
         </p:nvSpPr>
         <p:spPr>
           <a:xfrm>
-            <a:off x="640080" y="4610100"/>
-            <a:ext cx="10911535" cy="1653540"/>
+            <a:off x="640080" y="6446520"/>
+            <a:ext cx="8686800" cy="292608"/>
           </a:xfrm>
           <a:prstGeom prst="rect">
             <a:avLst/>
@@ -16804,60 +17977,21 @@
           <a:ln/>
         </p:spPr>
         <p:txBody>
-          <a:bodyPr wrap="square" lIns="0" tIns="0" rIns="0" bIns="0" rtlCol="0" anchor="t"/>
-          <a:lstStyle/>
-          <a:p>
-            <a:pPr indent="0" marL="0">
-              <a:buNone/>
-            </a:pPr>
-            <a:r>
-              <a:rPr lang="en-US" sz="1300" dirty="0">
-                <a:solidFill>
-                  <a:srgbClr val="26262F"/>
+          <a:bodyPr wrap="square" lIns="0" tIns="0" rIns="0" bIns="0" rtlCol="0" anchor="ctr"/>
+          <a:lstStyle/>
+          <a:p>
+            <a:pPr algn="l" indent="0" marL="0">
+              <a:buNone/>
+            </a:pPr>
+            <a:r>
+              <a:rPr lang="en-US" sz="900" dirty="0">
+                <a:solidFill>
+                  <a:srgbClr val="5D5D72"/>
                 </a:solidFill>
                 <a:latin typeface="Calibri" pitchFamily="34" charset="0"/>
                 <a:ea typeface="Calibri" pitchFamily="34" charset="-122"/>
                 <a:cs typeface="Calibri" pitchFamily="34" charset="-120"/>
               </a:rPr>
-              <a:t>A background shorthand combines several of these into one declaration, just like font does.</a:t>
-            </a:r>
-            <a:endParaRPr lang="en-US" sz="1300" dirty="0"/>
-          </a:p>
-        </p:txBody>
-      </p:sp>
-      <p:sp>
-        <p:nvSpPr>
-          <p:cNvPr id="7" name="Text 5"/>
-          <p:cNvSpPr txBox="1"/>
-          <p:nvPr/>
-        </p:nvSpPr>
-        <p:spPr>
-          <a:xfrm>
-            <a:off x="640080" y="6446520"/>
-            <a:ext cx="8686800" cy="292608"/>
-          </a:xfrm>
-          <a:prstGeom prst="rect">
-            <a:avLst/>
-          </a:prstGeom>
-          <a:noFill/>
-          <a:ln/>
-        </p:spPr>
-        <p:txBody>
-          <a:bodyPr wrap="square" lIns="0" tIns="0" rIns="0" bIns="0" rtlCol="0" anchor="ctr"/>
-          <a:lstStyle/>
-          <a:p>
-            <a:pPr algn="l" indent="0" marL="0">
-              <a:buNone/>
-            </a:pPr>
-            <a:r>
-              <a:rPr lang="en-US" sz="900" dirty="0">
-                <a:solidFill>
-                  <a:srgbClr val="5D5D72"/>
-                </a:solidFill>
-                <a:latin typeface="Calibri" pitchFamily="34" charset="0"/>
-                <a:ea typeface="Calibri" pitchFamily="34" charset="-122"/>
-                <a:cs typeface="Calibri" pitchFamily="34" charset="-120"/>
-              </a:rPr>
               <a:t>Usman Akram  •  COMSATS University Islamabad</a:t>
             </a:r>
             <a:endParaRPr lang="en-US" sz="900" dirty="0"/>
@@ -16866,7 +18000,7 @@
       </p:sp>
       <p:sp>
         <p:nvSpPr>
-          <p:cNvPr id="8" name="Text 6"/>
+          <p:cNvPr id="9" name="Text 6"/>
           <p:cNvSpPr txBox="1"/>
           <p:nvPr/>
         </p:nvSpPr>
@@ -16914,6 +18048,417 @@
 <file path=ppt/slides/slide32.xml><?xml version="1.0" encoding="utf-8"?>
 <p:sld xmlns:a="http://schemas.openxmlformats.org/drawingml/2006/main" xmlns:r="http://schemas.openxmlformats.org/officeDocument/2006/relationships" xmlns:p="http://schemas.openxmlformats.org/presentationml/2006/main">
   <p:cSld name="Slide 32">
+    <p:bg>
+      <p:bgPr>
+        <a:solidFill>
+          <a:srgbClr val="FFFFFF"/>
+        </a:solidFill>
+      </p:bgPr>
+    </p:bg>
+    <p:spTree>
+      <p:nvGrpSpPr>
+        <p:cNvPr id="1" name=""/>
+        <p:cNvGrpSpPr/>
+        <p:nvPr/>
+      </p:nvGrpSpPr>
+      <p:grpSpPr>
+        <a:xfrm>
+          <a:off x="0" y="0"/>
+          <a:ext cx="0" cy="0"/>
+          <a:chOff x="0" y="0"/>
+          <a:chExt cx="0" cy="0"/>
+        </a:xfrm>
+      </p:grpSpPr>
+      <p:sp>
+        <p:nvSpPr>
+          <p:cNvPr id="2" name="Text 0"/>
+          <p:cNvSpPr txBox="1"/>
+          <p:nvPr/>
+        </p:nvSpPr>
+        <p:spPr>
+          <a:xfrm>
+            <a:off x="640080" y="457200"/>
+            <a:ext cx="10058400" cy="365760"/>
+          </a:xfrm>
+          <a:prstGeom prst="rect">
+            <a:avLst/>
+          </a:prstGeom>
+          <a:noFill/>
+          <a:ln/>
+        </p:spPr>
+        <p:txBody>
+          <a:bodyPr wrap="square" lIns="0" tIns="0" rIns="0" bIns="0" rtlCol="0" anchor="ctr"/>
+          <a:lstStyle/>
+          <a:p>
+            <a:pPr algn="l" indent="0" marL="0">
+              <a:buNone/>
+            </a:pPr>
+            <a:r>
+              <a:rPr lang="en-US" sz="1300" b="1" spc="300" kern="0" dirty="0">
+                <a:solidFill>
+                  <a:srgbClr val="FF8A3D"/>
+                </a:solidFill>
+                <a:latin typeface="Calibri" pitchFamily="34" charset="0"/>
+                <a:ea typeface="Calibri" pitchFamily="34" charset="-122"/>
+                <a:cs typeface="Calibri" pitchFamily="34" charset="-120"/>
+              </a:rPr>
+              <a:t>BACKGROUNDS</a:t>
+            </a:r>
+            <a:endParaRPr lang="en-US" sz="1300" dirty="0"/>
+          </a:p>
+        </p:txBody>
+      </p:sp>
+      <p:sp>
+        <p:nvSpPr>
+          <p:cNvPr id="3" name="Text 1"/>
+          <p:cNvSpPr txBox="1"/>
+          <p:nvPr/>
+        </p:nvSpPr>
+        <p:spPr>
+          <a:xfrm>
+            <a:off x="640080" y="841248"/>
+            <a:ext cx="10881360" cy="914400"/>
+          </a:xfrm>
+          <a:prstGeom prst="rect">
+            <a:avLst/>
+          </a:prstGeom>
+          <a:noFill/>
+          <a:ln/>
+        </p:spPr>
+        <p:txBody>
+          <a:bodyPr wrap="square" lIns="0" tIns="0" rIns="0" bIns="0" rtlCol="0" anchor="ctr"/>
+          <a:lstStyle/>
+          <a:p>
+            <a:pPr algn="l" indent="0" marL="0">
+              <a:buNone/>
+            </a:pPr>
+            <a:r>
+              <a:rPr lang="en-US" sz="3400" b="1" dirty="0">
+                <a:solidFill>
+                  <a:srgbClr val="2B2B7A"/>
+                </a:solidFill>
+                <a:latin typeface="Cambria" pitchFamily="34" charset="0"/>
+                <a:ea typeface="Cambria" pitchFamily="34" charset="-122"/>
+                <a:cs typeface="Cambria" pitchFamily="34" charset="-120"/>
+              </a:rPr>
+              <a:t>Background Properties</a:t>
+            </a:r>
+            <a:endParaRPr lang="en-US" sz="3400" dirty="0"/>
+          </a:p>
+        </p:txBody>
+      </p:sp>
+      <p:sp>
+        <p:nvSpPr>
+          <p:cNvPr id="4" name="Shape 2"/>
+          <p:cNvSpPr/>
+          <p:nvPr/>
+        </p:nvSpPr>
+        <p:spPr>
+          <a:xfrm>
+            <a:off x="640080" y="1965960"/>
+            <a:ext cx="10911535" cy="2415540"/>
+          </a:xfrm>
+          <a:prstGeom prst="roundRect">
+            <a:avLst>
+              <a:gd name="adj" fmla="val 3028"/>
+            </a:avLst>
+          </a:prstGeom>
+          <a:solidFill>
+            <a:srgbClr val="1E1E4C"/>
+          </a:solidFill>
+          <a:ln/>
+        </p:spPr>
+      </p:sp>
+      <p:sp>
+        <p:nvSpPr>
+          <p:cNvPr id="5" name="Text 3"/>
+          <p:cNvSpPr txBox="1"/>
+          <p:nvPr/>
+        </p:nvSpPr>
+        <p:spPr>
+          <a:xfrm>
+            <a:off x="960120" y="2194560"/>
+            <a:ext cx="10271455" cy="1958340"/>
+          </a:xfrm>
+          <a:prstGeom prst="rect">
+            <a:avLst/>
+          </a:prstGeom>
+          <a:noFill/>
+          <a:ln/>
+        </p:spPr>
+        <p:txBody>
+          <a:bodyPr wrap="square" lIns="0" tIns="0" rIns="0" bIns="0" rtlCol="0" anchor="t"/>
+          <a:lstStyle/>
+          <a:p>
+            <a:pPr indent="0" marL="0">
+              <a:lnSpc>
+                <a:spcPct val="125000"/>
+              </a:lnSpc>
+              <a:buNone/>
+            </a:pPr>
+            <a:r>
+              <a:rPr lang="en-US" sz="1400" dirty="0">
+                <a:solidFill>
+                  <a:srgbClr val="C9D3F5"/>
+                </a:solidFill>
+                <a:latin typeface="Courier New" pitchFamily="34" charset="0"/>
+                <a:ea typeface="Courier New" pitchFamily="34" charset="-122"/>
+                <a:cs typeface="Courier New" pitchFamily="34" charset="-120"/>
+              </a:rPr>
+              <a:t>.card {</a:t>
+            </a:r>
+            <a:endParaRPr lang="en-US" sz="1400" dirty="0"/>
+          </a:p>
+          <a:p>
+            <a:pPr indent="0" marL="0">
+              <a:lnSpc>
+                <a:spcPct val="125000"/>
+              </a:lnSpc>
+              <a:buNone/>
+            </a:pPr>
+            <a:r>
+              <a:rPr lang="en-US" sz="1400" dirty="0">
+                <a:solidFill>
+                  <a:srgbClr val="C9D3F5"/>
+                </a:solidFill>
+                <a:latin typeface="Courier New" pitchFamily="34" charset="0"/>
+                <a:ea typeface="Courier New" pitchFamily="34" charset="-122"/>
+                <a:cs typeface="Courier New" pitchFamily="34" charset="-120"/>
+              </a:rPr>
+              <a:t>  background-color: #f5f5f5;</a:t>
+            </a:r>
+            <a:endParaRPr lang="en-US" sz="1400" dirty="0"/>
+          </a:p>
+          <a:p>
+            <a:pPr indent="0" marL="0">
+              <a:lnSpc>
+                <a:spcPct val="125000"/>
+              </a:lnSpc>
+              <a:buNone/>
+            </a:pPr>
+            <a:r>
+              <a:rPr lang="en-US" sz="1400" dirty="0">
+                <a:solidFill>
+                  <a:srgbClr val="C9D3F5"/>
+                </a:solidFill>
+                <a:latin typeface="Courier New" pitchFamily="34" charset="0"/>
+                <a:ea typeface="Courier New" pitchFamily="34" charset="-122"/>
+                <a:cs typeface="Courier New" pitchFamily="34" charset="-120"/>
+              </a:rPr>
+              <a:t>  background-image: url("pattern.png");</a:t>
+            </a:r>
+            <a:endParaRPr lang="en-US" sz="1400" dirty="0"/>
+          </a:p>
+          <a:p>
+            <a:pPr indent="0" marL="0">
+              <a:lnSpc>
+                <a:spcPct val="125000"/>
+              </a:lnSpc>
+              <a:buNone/>
+            </a:pPr>
+            <a:r>
+              <a:rPr lang="en-US" sz="1400" dirty="0">
+                <a:solidFill>
+                  <a:srgbClr val="C9D3F5"/>
+                </a:solidFill>
+                <a:latin typeface="Courier New" pitchFamily="34" charset="0"/>
+                <a:ea typeface="Courier New" pitchFamily="34" charset="-122"/>
+                <a:cs typeface="Courier New" pitchFamily="34" charset="-120"/>
+              </a:rPr>
+              <a:t>  background-repeat: no-repeat;</a:t>
+            </a:r>
+            <a:endParaRPr lang="en-US" sz="1400" dirty="0"/>
+          </a:p>
+          <a:p>
+            <a:pPr indent="0" marL="0">
+              <a:lnSpc>
+                <a:spcPct val="125000"/>
+              </a:lnSpc>
+              <a:buNone/>
+            </a:pPr>
+            <a:r>
+              <a:rPr lang="en-US" sz="1400" dirty="0">
+                <a:solidFill>
+                  <a:srgbClr val="C9D3F5"/>
+                </a:solidFill>
+                <a:latin typeface="Courier New" pitchFamily="34" charset="0"/>
+                <a:ea typeface="Courier New" pitchFamily="34" charset="-122"/>
+                <a:cs typeface="Courier New" pitchFamily="34" charset="-120"/>
+              </a:rPr>
+              <a:t>  background-position: center;</a:t>
+            </a:r>
+            <a:endParaRPr lang="en-US" sz="1400" dirty="0"/>
+          </a:p>
+          <a:p>
+            <a:pPr indent="0" marL="0">
+              <a:lnSpc>
+                <a:spcPct val="125000"/>
+              </a:lnSpc>
+              <a:buNone/>
+            </a:pPr>
+            <a:r>
+              <a:rPr lang="en-US" sz="1400" dirty="0">
+                <a:solidFill>
+                  <a:srgbClr val="C9D3F5"/>
+                </a:solidFill>
+                <a:latin typeface="Courier New" pitchFamily="34" charset="0"/>
+                <a:ea typeface="Courier New" pitchFamily="34" charset="-122"/>
+                <a:cs typeface="Courier New" pitchFamily="34" charset="-120"/>
+              </a:rPr>
+              <a:t>  background-size: cover;</a:t>
+            </a:r>
+            <a:endParaRPr lang="en-US" sz="1400" dirty="0"/>
+          </a:p>
+          <a:p>
+            <a:pPr indent="0" marL="0">
+              <a:lnSpc>
+                <a:spcPct val="125000"/>
+              </a:lnSpc>
+              <a:buNone/>
+            </a:pPr>
+            <a:r>
+              <a:rPr lang="en-US" sz="1400" dirty="0">
+                <a:solidFill>
+                  <a:srgbClr val="C9D3F5"/>
+                </a:solidFill>
+                <a:latin typeface="Courier New" pitchFamily="34" charset="0"/>
+                <a:ea typeface="Courier New" pitchFamily="34" charset="-122"/>
+                <a:cs typeface="Courier New" pitchFamily="34" charset="-120"/>
+              </a:rPr>
+              <a:t>}</a:t>
+            </a:r>
+            <a:endParaRPr lang="en-US" sz="1400" dirty="0"/>
+          </a:p>
+        </p:txBody>
+      </p:sp>
+      <p:sp>
+        <p:nvSpPr>
+          <p:cNvPr id="6" name="Text 4"/>
+          <p:cNvSpPr txBox="1"/>
+          <p:nvPr/>
+        </p:nvSpPr>
+        <p:spPr>
+          <a:xfrm>
+            <a:off x="640080" y="4610100"/>
+            <a:ext cx="10911535" cy="1653540"/>
+          </a:xfrm>
+          <a:prstGeom prst="rect">
+            <a:avLst/>
+          </a:prstGeom>
+          <a:noFill/>
+          <a:ln/>
+        </p:spPr>
+        <p:txBody>
+          <a:bodyPr wrap="square" lIns="0" tIns="0" rIns="0" bIns="0" rtlCol="0" anchor="t"/>
+          <a:lstStyle/>
+          <a:p>
+            <a:pPr indent="0" marL="0">
+              <a:buNone/>
+            </a:pPr>
+            <a:r>
+              <a:rPr lang="en-US" sz="1300" dirty="0">
+                <a:solidFill>
+                  <a:srgbClr val="26262F"/>
+                </a:solidFill>
+                <a:latin typeface="Calibri" pitchFamily="34" charset="0"/>
+                <a:ea typeface="Calibri" pitchFamily="34" charset="-122"/>
+                <a:cs typeface="Calibri" pitchFamily="34" charset="-120"/>
+              </a:rPr>
+              <a:t>A background shorthand combines several of these into one declaration, just like font does.</a:t>
+            </a:r>
+            <a:endParaRPr lang="en-US" sz="1300" dirty="0"/>
+          </a:p>
+        </p:txBody>
+      </p:sp>
+      <p:sp>
+        <p:nvSpPr>
+          <p:cNvPr id="7" name="Text 5"/>
+          <p:cNvSpPr txBox="1"/>
+          <p:nvPr/>
+        </p:nvSpPr>
+        <p:spPr>
+          <a:xfrm>
+            <a:off x="640080" y="6446520"/>
+            <a:ext cx="8686800" cy="292608"/>
+          </a:xfrm>
+          <a:prstGeom prst="rect">
+            <a:avLst/>
+          </a:prstGeom>
+          <a:noFill/>
+          <a:ln/>
+        </p:spPr>
+        <p:txBody>
+          <a:bodyPr wrap="square" lIns="0" tIns="0" rIns="0" bIns="0" rtlCol="0" anchor="ctr"/>
+          <a:lstStyle/>
+          <a:p>
+            <a:pPr algn="l" indent="0" marL="0">
+              <a:buNone/>
+            </a:pPr>
+            <a:r>
+              <a:rPr lang="en-US" sz="900" dirty="0">
+                <a:solidFill>
+                  <a:srgbClr val="5D5D72"/>
+                </a:solidFill>
+                <a:latin typeface="Calibri" pitchFamily="34" charset="0"/>
+                <a:ea typeface="Calibri" pitchFamily="34" charset="-122"/>
+                <a:cs typeface="Calibri" pitchFamily="34" charset="-120"/>
+              </a:rPr>
+              <a:t>Usman Akram  •  COMSATS University Islamabad</a:t>
+            </a:r>
+            <a:endParaRPr lang="en-US" sz="900" dirty="0"/>
+          </a:p>
+        </p:txBody>
+      </p:sp>
+      <p:sp>
+        <p:nvSpPr>
+          <p:cNvPr id="8" name="Text 6"/>
+          <p:cNvSpPr txBox="1"/>
+          <p:nvPr/>
+        </p:nvSpPr>
+        <p:spPr>
+          <a:xfrm>
+            <a:off x="11155680" y="6446520"/>
+            <a:ext cx="457200" cy="292608"/>
+          </a:xfrm>
+          <a:prstGeom prst="rect">
+            <a:avLst/>
+          </a:prstGeom>
+          <a:noFill/>
+          <a:ln/>
+        </p:spPr>
+        <p:txBody>
+          <a:bodyPr wrap="square" lIns="0" tIns="0" rIns="0" bIns="0" rtlCol="0" anchor="ctr"/>
+          <a:lstStyle/>
+          <a:p>
+            <a:pPr algn="r" indent="0" marL="0">
+              <a:buNone/>
+            </a:pPr>
+            <a:r>
+              <a:rPr lang="en-US" sz="900" dirty="0">
+                <a:solidFill>
+                  <a:srgbClr val="5D5D72"/>
+                </a:solidFill>
+                <a:latin typeface="Calibri" pitchFamily="34" charset="0"/>
+                <a:ea typeface="Calibri" pitchFamily="34" charset="-122"/>
+                <a:cs typeface="Calibri" pitchFamily="34" charset="-120"/>
+              </a:rPr>
+              <a:t>32</a:t>
+            </a:r>
+            <a:endParaRPr lang="en-US" sz="900" dirty="0"/>
+          </a:p>
+        </p:txBody>
+      </p:sp>
+    </p:spTree>
+  </p:cSld>
+  <p:clrMapOvr>
+    <a:masterClrMapping/>
+  </p:clrMapOvr>
+</p:sld>
+</file>
+
+<file path=ppt/slides/slide33.xml><?xml version="1.0" encoding="utf-8"?>
+<p:sld xmlns:a="http://schemas.openxmlformats.org/drawingml/2006/main" xmlns:r="http://schemas.openxmlformats.org/officeDocument/2006/relationships" xmlns:p="http://schemas.openxmlformats.org/presentationml/2006/main">
+  <p:cSld name="Slide 33">
     <p:bg>
       <p:bgPr>
         <a:solidFill>
@@ -17081,7 +18626,7 @@
         <p:spPr>
           <a:xfrm>
             <a:off x="1463040" y="2194560"/>
-            <a:ext cx="10058400" cy="640080"/>
+            <a:ext cx="10058400" cy="624840"/>
           </a:xfrm>
           <a:prstGeom prst="rect">
             <a:avLst/>
@@ -17119,7 +18664,7 @@
         </p:nvSpPr>
         <p:spPr>
           <a:xfrm>
-            <a:off x="822960" y="2971800"/>
+            <a:off x="822960" y="2956560"/>
             <a:ext cx="438912" cy="438912"/>
           </a:xfrm>
           <a:prstGeom prst="ellipse">
@@ -17139,7 +18684,7 @@
         </p:nvSpPr>
         <p:spPr>
           <a:xfrm>
-            <a:off x="822960" y="2971800"/>
+            <a:off x="822960" y="2956560"/>
             <a:ext cx="438912" cy="438912"/>
           </a:xfrm>
           <a:prstGeom prst="rect">
@@ -17178,8 +18723,8 @@
         </p:nvSpPr>
         <p:spPr>
           <a:xfrm>
-            <a:off x="1463040" y="2880360"/>
-            <a:ext cx="10058400" cy="640080"/>
+            <a:off x="1463040" y="2865120"/>
+            <a:ext cx="10058400" cy="624840"/>
           </a:xfrm>
           <a:prstGeom prst="rect">
             <a:avLst/>
@@ -17217,7 +18762,7 @@
         </p:nvSpPr>
         <p:spPr>
           <a:xfrm>
-            <a:off x="822960" y="3657600"/>
+            <a:off x="822960" y="3627120"/>
             <a:ext cx="438912" cy="438912"/>
           </a:xfrm>
           <a:prstGeom prst="ellipse">
@@ -17237,7 +18782,7 @@
         </p:nvSpPr>
         <p:spPr>
           <a:xfrm>
-            <a:off x="822960" y="3657600"/>
+            <a:off x="822960" y="3627120"/>
             <a:ext cx="438912" cy="438912"/>
           </a:xfrm>
           <a:prstGeom prst="rect">
@@ -17276,8 +18821,8 @@
         </p:nvSpPr>
         <p:spPr>
           <a:xfrm>
-            <a:off x="1463040" y="3566160"/>
-            <a:ext cx="10058400" cy="640080"/>
+            <a:off x="1463040" y="3535680"/>
+            <a:ext cx="10058400" cy="624840"/>
           </a:xfrm>
           <a:prstGeom prst="rect">
             <a:avLst/>
@@ -17315,7 +18860,7 @@
         </p:nvSpPr>
         <p:spPr>
           <a:xfrm>
-            <a:off x="822960" y="4343400"/>
+            <a:off x="822960" y="4297680"/>
             <a:ext cx="438912" cy="438912"/>
           </a:xfrm>
           <a:prstGeom prst="ellipse">
@@ -17335,7 +18880,7 @@
         </p:nvSpPr>
         <p:spPr>
           <a:xfrm>
-            <a:off x="822960" y="4343400"/>
+            <a:off x="822960" y="4297680"/>
             <a:ext cx="438912" cy="438912"/>
           </a:xfrm>
           <a:prstGeom prst="rect">
@@ -17374,8 +18919,8 @@
         </p:nvSpPr>
         <p:spPr>
           <a:xfrm>
-            <a:off x="1463040" y="4251960"/>
-            <a:ext cx="10058400" cy="640080"/>
+            <a:off x="1463040" y="4206240"/>
+            <a:ext cx="10058400" cy="624840"/>
           </a:xfrm>
           <a:prstGeom prst="rect">
             <a:avLst/>
@@ -17413,7 +18958,7 @@
         </p:nvSpPr>
         <p:spPr>
           <a:xfrm>
-            <a:off x="822960" y="5029200"/>
+            <a:off x="822960" y="4968240"/>
             <a:ext cx="438912" cy="438912"/>
           </a:xfrm>
           <a:prstGeom prst="ellipse">
@@ -17433,7 +18978,7 @@
         </p:nvSpPr>
         <p:spPr>
           <a:xfrm>
-            <a:off x="822960" y="5029200"/>
+            <a:off x="822960" y="4968240"/>
             <a:ext cx="438912" cy="438912"/>
           </a:xfrm>
           <a:prstGeom prst="rect">
@@ -17472,8 +19017,8 @@
         </p:nvSpPr>
         <p:spPr>
           <a:xfrm>
-            <a:off x="1463040" y="4937760"/>
-            <a:ext cx="10058400" cy="640080"/>
+            <a:off x="1463040" y="4876800"/>
+            <a:ext cx="10058400" cy="624840"/>
           </a:xfrm>
           <a:prstGeom prst="rect">
             <a:avLst/>
@@ -17511,7 +19056,7 @@
         </p:nvSpPr>
         <p:spPr>
           <a:xfrm>
-            <a:off x="822960" y="5715000"/>
+            <a:off x="822960" y="5638800"/>
             <a:ext cx="438912" cy="438912"/>
           </a:xfrm>
           <a:prstGeom prst="ellipse">
@@ -17531,7 +19076,7 @@
         </p:nvSpPr>
         <p:spPr>
           <a:xfrm>
-            <a:off x="822960" y="5715000"/>
+            <a:off x="822960" y="5638800"/>
             <a:ext cx="438912" cy="438912"/>
           </a:xfrm>
           <a:prstGeom prst="rect">
@@ -17570,8 +19115,8 @@
         </p:nvSpPr>
         <p:spPr>
           <a:xfrm>
-            <a:off x="1463040" y="5623560"/>
-            <a:ext cx="10058400" cy="640080"/>
+            <a:off x="1463040" y="5547360"/>
+            <a:ext cx="10058400" cy="624840"/>
           </a:xfrm>
           <a:prstGeom prst="rect">
             <a:avLst/>
@@ -17673,7 +19218,7 @@
                 <a:ea typeface="Calibri" pitchFamily="34" charset="-122"/>
                 <a:cs typeface="Calibri" pitchFamily="34" charset="-120"/>
               </a:rPr>
-              <a:t>32</a:t>
+              <a:t>33</a:t>
             </a:r>
             <a:endParaRPr lang="en-US" sz="900" dirty="0"/>
           </a:p>

--- a/slides/CSC336-Lecture-05-CSS-Fundamentals.pptx
+++ b/slides/CSC336-Lecture-05-CSS-Fundamentals.pptx
@@ -38,9 +38,10 @@
     <p:sldId id="286" r:id="rId32"/>
     <p:sldId id="287" r:id="rId33"/>
     <p:sldId id="288" r:id="rId34"/>
+    <p:sldId id="289" r:id="rId35"/>
   </p:sldIdLst>
   <p:notesMasterIdLst>
-    <p:notesMasterId r:id="rId35"/>
+    <p:notesMasterId r:id="rId36"/>
   </p:notesMasterIdLst>
   <p:sldSz cx="12192000" cy="6858000"/>
   <p:notesSz cx="6858000" cy="12192000"/>
@@ -2846,6 +2847,94 @@
             <a:fld id="{F7021451-1387-4CA6-816F-3879F97B5CBC}" type="slidenum">
               <a:rPr lang="en-US"/>
               <a:t>33</a:t>
+            </a:fld>
+            <a:endParaRPr lang="en-US"/>
+          </a:p>
+        </p:txBody>
+      </p:sp>
+    </p:spTree>
+    <p:extLst>
+      <p:ext uri="{BB962C8B-B14F-4D97-AF65-F5344CB8AC3E}">
+        <p14:creationId xmlns:p14="http://schemas.microsoft.com/office/powerpoint/2010/main" val="1024086991"/>
+      </p:ext>
+    </p:extLst>
+  </p:cSld>
+  <p:clrMapOvr>
+    <a:masterClrMapping/>
+  </p:clrMapOvr>
+</p:notes>
+</file>
+
+<file path=ppt/notesSlides/notesSlide34.xml><?xml version="1.0" encoding="utf-8"?>
+<p:notes xmlns:a="http://schemas.openxmlformats.org/drawingml/2006/main" xmlns:r="http://schemas.openxmlformats.org/officeDocument/2006/relationships" xmlns:p="http://schemas.openxmlformats.org/presentationml/2006/main">
+  <p:cSld>
+    <p:spTree>
+      <p:nvGrpSpPr>
+        <p:cNvPr id="1" name=""/>
+        <p:cNvGrpSpPr/>
+        <p:nvPr/>
+      </p:nvGrpSpPr>
+      <p:grpSpPr>
+        <a:xfrm>
+          <a:off x="0" y="0"/>
+          <a:ext cx="0" cy="0"/>
+          <a:chOff x="0" y="0"/>
+          <a:chExt cx="0" cy="0"/>
+        </a:xfrm>
+      </p:grpSpPr>
+      <p:sp>
+        <p:nvSpPr>
+          <p:cNvPr id="2" name="Slide Image Placeholder 1"/>
+          <p:cNvSpPr>
+            <a:spLocks noGrp="1" noRot="1" noChangeAspect="1"/>
+          </p:cNvSpPr>
+          <p:nvPr>
+            <p:ph type="sldImg"/>
+          </p:nvPr>
+        </p:nvSpPr>
+        <p:spPr/>
+      </p:sp>
+      <p:sp>
+        <p:nvSpPr>
+          <p:cNvPr id="3" name="Notes Placeholder 2"/>
+          <p:cNvSpPr>
+            <a:spLocks noGrp="1"/>
+          </p:cNvSpPr>
+          <p:nvPr>
+            <p:ph type="body" idx="1"/>
+          </p:nvPr>
+        </p:nvSpPr>
+        <p:spPr/>
+        <p:txBody>
+          <a:bodyPr/>
+          <a:lstStyle/>
+          <a:p>
+            <a:r>
+              <a:rPr lang="en-US" dirty="0"/>
+              <a:t/>
+            </a:r>
+            <a:endParaRPr lang="en-US" dirty="0"/>
+          </a:p>
+        </p:txBody>
+      </p:sp>
+      <p:sp>
+        <p:nvSpPr>
+          <p:cNvPr id="4" name="Slide Number Placeholder 3"/>
+          <p:cNvSpPr>
+            <a:spLocks noGrp="1"/>
+          </p:cNvSpPr>
+          <p:nvPr>
+            <p:ph type="sldNum" sz="quarter" idx="10"/>
+          </p:nvPr>
+        </p:nvSpPr>
+        <p:spPr/>
+        <p:txBody>
+          <a:bodyPr/>
+          <a:lstStyle/>
+          <a:p>
+            <a:fld id="{F7021451-1387-4CA6-816F-3879F97B5CBC}" type="slidenum">
+              <a:rPr lang="en-US"/>
+              <a:t>34</a:t>
             </a:fld>
             <a:endParaRPr lang="en-US"/>
           </a:p>
@@ -12211,7 +12300,7 @@
                 <a:ea typeface="Cambria" pitchFamily="34" charset="-122"/>
                 <a:cs typeface="Cambria" pitchFamily="34" charset="-120"/>
               </a:rPr>
-              <a:t>Case 5 in Code</a:t>
+              <a:t>The Resolution Flowchart</a:t>
             </a:r>
             <a:endParaRPr lang="en-US" sz="3400" dirty="0"/>
           </a:p>
@@ -12225,13 +12314,295 @@
         </p:nvSpPr>
         <p:spPr>
           <a:xfrm>
-            <a:off x="640080" y="1965960"/>
-            <a:ext cx="10911535" cy="1615440"/>
-          </a:xfrm>
-          <a:prstGeom prst="roundRect">
-            <a:avLst>
-              <a:gd name="adj" fmla="val 4528"/>
-            </a:avLst>
+            <a:off x="6080760" y="2651760"/>
+            <a:ext cx="9144" cy="228600"/>
+          </a:xfrm>
+          <a:prstGeom prst="line">
+            <a:avLst/>
+          </a:prstGeom>
+          <a:noFill/>
+          <a:ln w="25400">
+            <a:solidFill>
+              <a:srgbClr val="5D5D72"/>
+            </a:solidFill>
+            <a:prstDash val="solid"/>
+            <a:tailEnd type="triangle"/>
+          </a:ln>
+        </p:spPr>
+      </p:sp>
+      <p:sp>
+        <p:nvSpPr>
+          <p:cNvPr id="5" name="Shape 3"/>
+          <p:cNvSpPr/>
+          <p:nvPr/>
+        </p:nvSpPr>
+        <p:spPr>
+          <a:xfrm flipH="1">
+            <a:off x="2286000" y="3429000"/>
+            <a:ext cx="2468880" cy="731520"/>
+          </a:xfrm>
+          <a:prstGeom prst="line">
+            <a:avLst/>
+          </a:prstGeom>
+          <a:noFill/>
+          <a:ln w="25400">
+            <a:solidFill>
+              <a:srgbClr val="5D5D72"/>
+            </a:solidFill>
+            <a:prstDash val="solid"/>
+            <a:tailEnd type="triangle"/>
+          </a:ln>
+        </p:spPr>
+      </p:sp>
+      <p:sp>
+        <p:nvSpPr>
+          <p:cNvPr id="6" name="Text 4"/>
+          <p:cNvSpPr txBox="1"/>
+          <p:nvPr/>
+        </p:nvSpPr>
+        <p:spPr>
+          <a:xfrm>
+            <a:off x="2606040" y="3648456"/>
+            <a:ext cx="1828800" cy="292608"/>
+          </a:xfrm>
+          <a:prstGeom prst="rect">
+            <a:avLst/>
+          </a:prstGeom>
+          <a:solidFill>
+            <a:srgbClr val="FFFFFF"/>
+          </a:solidFill>
+          <a:ln/>
+        </p:spPr>
+        <p:txBody>
+          <a:bodyPr wrap="square" lIns="0" tIns="0" rIns="0" bIns="0" rtlCol="0" anchor="ctr"/>
+          <a:lstStyle/>
+          <a:p>
+            <a:pPr algn="ctr" indent="0" marL="0">
+              <a:buNone/>
+            </a:pPr>
+            <a:r>
+              <a:rPr lang="en-US" sz="1050" i="1" dirty="0">
+                <a:solidFill>
+                  <a:srgbClr val="5D5D72"/>
+                </a:solidFill>
+                <a:latin typeface="Calibri" pitchFamily="34" charset="0"/>
+                <a:ea typeface="Calibri" pitchFamily="34" charset="-122"/>
+                <a:cs typeface="Calibri" pitchFamily="34" charset="-120"/>
+              </a:rPr>
+              <a:t>One is !important</a:t>
+            </a:r>
+            <a:endParaRPr lang="en-US" sz="1050" dirty="0"/>
+          </a:p>
+        </p:txBody>
+      </p:sp>
+      <p:sp>
+        <p:nvSpPr>
+          <p:cNvPr id="7" name="Shape 5"/>
+          <p:cNvSpPr/>
+          <p:nvPr/>
+        </p:nvSpPr>
+        <p:spPr>
+          <a:xfrm>
+            <a:off x="5852160" y="3657600"/>
+            <a:ext cx="365760" cy="502920"/>
+          </a:xfrm>
+          <a:prstGeom prst="line">
+            <a:avLst/>
+          </a:prstGeom>
+          <a:noFill/>
+          <a:ln w="25400">
+            <a:solidFill>
+              <a:srgbClr val="5D5D72"/>
+            </a:solidFill>
+            <a:prstDash val="solid"/>
+            <a:tailEnd type="triangle"/>
+          </a:ln>
+        </p:spPr>
+      </p:sp>
+      <p:sp>
+        <p:nvSpPr>
+          <p:cNvPr id="8" name="Text 6"/>
+          <p:cNvSpPr txBox="1"/>
+          <p:nvPr/>
+        </p:nvSpPr>
+        <p:spPr>
+          <a:xfrm>
+            <a:off x="5120640" y="3762756"/>
+            <a:ext cx="1828800" cy="292608"/>
+          </a:xfrm>
+          <a:prstGeom prst="rect">
+            <a:avLst/>
+          </a:prstGeom>
+          <a:solidFill>
+            <a:srgbClr val="FFFFFF"/>
+          </a:solidFill>
+          <a:ln/>
+        </p:spPr>
+        <p:txBody>
+          <a:bodyPr wrap="square" lIns="0" tIns="0" rIns="0" bIns="0" rtlCol="0" anchor="ctr"/>
+          <a:lstStyle/>
+          <a:p>
+            <a:pPr algn="ctr" indent="0" marL="0">
+              <a:buNone/>
+            </a:pPr>
+            <a:r>
+              <a:rPr lang="en-US" sz="1050" i="1" dirty="0">
+                <a:solidFill>
+                  <a:srgbClr val="5D5D72"/>
+                </a:solidFill>
+                <a:latin typeface="Calibri" pitchFamily="34" charset="0"/>
+                <a:ea typeface="Calibri" pitchFamily="34" charset="-122"/>
+                <a:cs typeface="Calibri" pitchFamily="34" charset="-120"/>
+              </a:rPr>
+              <a:t>Both / neither</a:t>
+            </a:r>
+            <a:endParaRPr lang="en-US" sz="1050" dirty="0"/>
+          </a:p>
+        </p:txBody>
+      </p:sp>
+      <p:sp>
+        <p:nvSpPr>
+          <p:cNvPr id="9" name="Shape 7"/>
+          <p:cNvSpPr/>
+          <p:nvPr/>
+        </p:nvSpPr>
+        <p:spPr>
+          <a:xfrm flipH="1">
+            <a:off x="4434840" y="4846320"/>
+            <a:ext cx="1051560" cy="411480"/>
+          </a:xfrm>
+          <a:prstGeom prst="line">
+            <a:avLst/>
+          </a:prstGeom>
+          <a:noFill/>
+          <a:ln w="25400">
+            <a:solidFill>
+              <a:srgbClr val="5D5D72"/>
+            </a:solidFill>
+            <a:prstDash val="solid"/>
+            <a:tailEnd type="triangle"/>
+          </a:ln>
+        </p:spPr>
+      </p:sp>
+      <p:sp>
+        <p:nvSpPr>
+          <p:cNvPr id="10" name="Text 8"/>
+          <p:cNvSpPr txBox="1"/>
+          <p:nvPr/>
+        </p:nvSpPr>
+        <p:spPr>
+          <a:xfrm>
+            <a:off x="4046220" y="4905756"/>
+            <a:ext cx="1828800" cy="292608"/>
+          </a:xfrm>
+          <a:prstGeom prst="rect">
+            <a:avLst/>
+          </a:prstGeom>
+          <a:solidFill>
+            <a:srgbClr val="FFFFFF"/>
+          </a:solidFill>
+          <a:ln/>
+        </p:spPr>
+        <p:txBody>
+          <a:bodyPr wrap="square" lIns="0" tIns="0" rIns="0" bIns="0" rtlCol="0" anchor="ctr"/>
+          <a:lstStyle/>
+          <a:p>
+            <a:pPr algn="ctr" indent="0" marL="0">
+              <a:buNone/>
+            </a:pPr>
+            <a:r>
+              <a:rPr lang="en-US" sz="1050" i="1" dirty="0">
+                <a:solidFill>
+                  <a:srgbClr val="5D5D72"/>
+                </a:solidFill>
+                <a:latin typeface="Calibri" pitchFamily="34" charset="0"/>
+                <a:ea typeface="Calibri" pitchFamily="34" charset="-122"/>
+                <a:cs typeface="Calibri" pitchFamily="34" charset="-120"/>
+              </a:rPr>
+              <a:t>One higher</a:t>
+            </a:r>
+            <a:endParaRPr lang="en-US" sz="1050" dirty="0"/>
+          </a:p>
+        </p:txBody>
+      </p:sp>
+      <p:sp>
+        <p:nvSpPr>
+          <p:cNvPr id="11" name="Shape 9"/>
+          <p:cNvSpPr/>
+          <p:nvPr/>
+        </p:nvSpPr>
+        <p:spPr>
+          <a:xfrm>
+            <a:off x="6766560" y="4846320"/>
+            <a:ext cx="1463040" cy="411480"/>
+          </a:xfrm>
+          <a:prstGeom prst="line">
+            <a:avLst/>
+          </a:prstGeom>
+          <a:noFill/>
+          <a:ln w="25400">
+            <a:solidFill>
+              <a:srgbClr val="5D5D72"/>
+            </a:solidFill>
+            <a:prstDash val="solid"/>
+            <a:tailEnd type="triangle"/>
+          </a:ln>
+        </p:spPr>
+      </p:sp>
+      <p:sp>
+        <p:nvSpPr>
+          <p:cNvPr id="12" name="Text 10"/>
+          <p:cNvSpPr txBox="1"/>
+          <p:nvPr/>
+        </p:nvSpPr>
+        <p:spPr>
+          <a:xfrm>
+            <a:off x="6583680" y="4905756"/>
+            <a:ext cx="1828800" cy="292608"/>
+          </a:xfrm>
+          <a:prstGeom prst="rect">
+            <a:avLst/>
+          </a:prstGeom>
+          <a:solidFill>
+            <a:srgbClr val="FFFFFF"/>
+          </a:solidFill>
+          <a:ln/>
+        </p:spPr>
+        <p:txBody>
+          <a:bodyPr wrap="square" lIns="0" tIns="0" rIns="0" bIns="0" rtlCol="0" anchor="ctr"/>
+          <a:lstStyle/>
+          <a:p>
+            <a:pPr algn="ctr" indent="0" marL="0">
+              <a:buNone/>
+            </a:pPr>
+            <a:r>
+              <a:rPr lang="en-US" sz="1050" i="1" dirty="0">
+                <a:solidFill>
+                  <a:srgbClr val="5D5D72"/>
+                </a:solidFill>
+                <a:latin typeface="Calibri" pitchFamily="34" charset="0"/>
+                <a:ea typeface="Calibri" pitchFamily="34" charset="-122"/>
+                <a:cs typeface="Calibri" pitchFamily="34" charset="-120"/>
+              </a:rPr>
+              <a:t>Equal specificity</a:t>
+            </a:r>
+            <a:endParaRPr lang="en-US" sz="1050" dirty="0"/>
+          </a:p>
+        </p:txBody>
+      </p:sp>
+      <p:sp>
+        <p:nvSpPr>
+          <p:cNvPr id="13" name="Shape 11"/>
+          <p:cNvSpPr/>
+          <p:nvPr/>
+        </p:nvSpPr>
+        <p:spPr>
+          <a:xfrm>
+            <a:off x="4114800" y="2103120"/>
+            <a:ext cx="3931920" cy="548640"/>
+          </a:xfrm>
+          <a:prstGeom prst="rect">
+            <a:avLst/>
           </a:prstGeom>
           <a:solidFill>
             <a:srgbClr val="1E1E4C"/>
@@ -12241,14 +12612,14 @@
       </p:sp>
       <p:sp>
         <p:nvSpPr>
-          <p:cNvPr id="5" name="Text 3"/>
+          <p:cNvPr id="14" name="Text 12"/>
           <p:cNvSpPr txBox="1"/>
           <p:nvPr/>
         </p:nvSpPr>
         <p:spPr>
           <a:xfrm>
-            <a:off x="960120" y="2194560"/>
-            <a:ext cx="10271455" cy="1158240"/>
+            <a:off x="4169664" y="2103120"/>
+            <a:ext cx="3822192" cy="548640"/>
           </a:xfrm>
           <a:prstGeom prst="rect">
             <a:avLst/>
@@ -12257,151 +12628,512 @@
           <a:ln/>
         </p:spPr>
         <p:txBody>
-          <a:bodyPr wrap="square" lIns="0" tIns="0" rIns="0" bIns="0" rtlCol="0" anchor="t"/>
-          <a:lstStyle/>
-          <a:p>
-            <a:pPr indent="0" marL="0">
+          <a:bodyPr wrap="square" lIns="0" tIns="0" rIns="0" bIns="0" rtlCol="0" anchor="ctr"/>
+          <a:lstStyle/>
+          <a:p>
+            <a:pPr algn="ctr" indent="0" marL="0">
               <a:lnSpc>
-                <a:spcPct val="125000"/>
+                <a:spcPct val="105000"/>
               </a:lnSpc>
               <a:buNone/>
             </a:pPr>
             <a:r>
-              <a:rPr lang="en-US" sz="1400" dirty="0">
-                <a:solidFill>
-                  <a:srgbClr val="C9D3F5"/>
-                </a:solidFill>
-                <a:latin typeface="Courier New" pitchFamily="34" charset="0"/>
-                <a:ea typeface="Courier New" pitchFamily="34" charset="-122"/>
-                <a:cs typeface="Courier New" pitchFamily="34" charset="-120"/>
-              </a:rPr>
-              <a:t>&lt;p id="lead" style="color: purple;"&gt;...&lt;/p&gt;</a:t>
-            </a:r>
-            <a:endParaRPr lang="en-US" sz="1400" dirty="0"/>
-          </a:p>
-          <a:p>
-            <a:pPr indent="0" marL="0">
-              <a:lnSpc>
-                <a:spcPct val="125000"/>
-              </a:lnSpc>
-              <a:buNone/>
-            </a:pPr>
-            <a:endParaRPr lang="en-US" sz="1400" dirty="0"/>
-          </a:p>
-          <a:p>
-            <a:pPr indent="0" marL="0">
-              <a:lnSpc>
-                <a:spcPct val="125000"/>
-              </a:lnSpc>
-              <a:buNone/>
-            </a:pPr>
-            <a:r>
-              <a:rPr lang="en-US" sz="1400" dirty="0">
-                <a:solidFill>
-                  <a:srgbClr val="C9D3F5"/>
-                </a:solidFill>
-                <a:latin typeface="Courier New" pitchFamily="34" charset="0"/>
-                <a:ea typeface="Courier New" pitchFamily="34" charset="-122"/>
-                <a:cs typeface="Courier New" pitchFamily="34" charset="-120"/>
-              </a:rPr>
-              <a:t>#lead { color: blue; }              /* loses to inline */</a:t>
-            </a:r>
-            <a:endParaRPr lang="en-US" sz="1400" dirty="0"/>
-          </a:p>
-          <a:p>
-            <a:pPr indent="0" marL="0">
-              <a:lnSpc>
-                <a:spcPct val="125000"/>
-              </a:lnSpc>
-              <a:buNone/>
-            </a:pPr>
-            <a:r>
-              <a:rPr lang="en-US" sz="1400" dirty="0">
-                <a:solidFill>
-                  <a:srgbClr val="C9D3F5"/>
-                </a:solidFill>
-                <a:latin typeface="Courier New" pitchFamily="34" charset="0"/>
-                <a:ea typeface="Courier New" pitchFamily="34" charset="-122"/>
-                <a:cs typeface="Courier New" pitchFamily="34" charset="-120"/>
-              </a:rPr>
-              <a:t>#lead { color: green !important; } /* beats inline   */</a:t>
-            </a:r>
-            <a:endParaRPr lang="en-US" sz="1400" dirty="0"/>
-          </a:p>
-        </p:txBody>
-      </p:sp>
-      <p:sp>
-        <p:nvSpPr>
-          <p:cNvPr id="6" name="Text 4"/>
-          <p:cNvSpPr txBox="1"/>
-          <p:nvPr/>
-        </p:nvSpPr>
-        <p:spPr>
-          <a:xfrm>
-            <a:off x="640080" y="3810000"/>
-            <a:ext cx="10911535" cy="2453640"/>
-          </a:xfrm>
-          <a:prstGeom prst="rect">
-            <a:avLst/>
-          </a:prstGeom>
-          <a:noFill/>
-          <a:ln/>
-        </p:spPr>
-        <p:txBody>
-          <a:bodyPr wrap="square" lIns="0" tIns="0" rIns="0" bIns="0" rtlCol="0" anchor="t"/>
-          <a:lstStyle/>
-          <a:p>
-            <a:pPr indent="0" marL="0">
-              <a:buNone/>
-            </a:pPr>
-            <a:r>
-              <a:rPr lang="en-US" sz="1300" dirty="0">
-                <a:solidFill>
-                  <a:srgbClr val="26262F"/>
+              <a:rPr lang="en-US" sz="1250" b="1" dirty="0">
+                <a:solidFill>
+                  <a:srgbClr val="FFFFFF"/>
                 </a:solidFill>
                 <a:latin typeface="Calibri" pitchFamily="34" charset="0"/>
                 <a:ea typeface="Calibri" pitchFamily="34" charset="-122"/>
                 <a:cs typeface="Calibri" pitchFamily="34" charset="-120"/>
               </a:rPr>
-              <a:t>Without the !important line, the paragraph is purple. With it, green — one of the few times !important is the right tool.</a:t>
-            </a:r>
-            <a:endParaRPr lang="en-US" sz="1300" dirty="0"/>
-          </a:p>
-        </p:txBody>
-      </p:sp>
-      <p:sp>
-        <p:nvSpPr>
-          <p:cNvPr id="7" name="Text 5"/>
-          <p:cNvSpPr txBox="1"/>
-          <p:nvPr/>
-        </p:nvSpPr>
-        <p:spPr>
-          <a:xfrm>
-            <a:off x="640080" y="6446520"/>
-            <a:ext cx="8686800" cy="292608"/>
-          </a:xfrm>
-          <a:prstGeom prst="rect">
-            <a:avLst/>
-          </a:prstGeom>
-          <a:noFill/>
-          <a:ln/>
-        </p:spPr>
-        <p:txBody>
-          <a:bodyPr wrap="square" lIns="0" tIns="0" rIns="0" bIns="0" rtlCol="0" anchor="ctr"/>
-          <a:lstStyle/>
-          <a:p>
-            <a:pPr algn="l" indent="0" marL="0">
-              <a:buNone/>
-            </a:pPr>
-            <a:r>
-              <a:rPr lang="en-US" sz="900" dirty="0">
-                <a:solidFill>
-                  <a:srgbClr val="5D5D72"/>
+              <a:t>Conflicting declarations</a:t>
+            </a:r>
+            <a:endParaRPr lang="en-US" sz="1250" dirty="0"/>
+          </a:p>
+          <a:p>
+            <a:pPr algn="ctr" indent="0" marL="0">
+              <a:lnSpc>
+                <a:spcPct val="105000"/>
+              </a:lnSpc>
+              <a:buNone/>
+            </a:pPr>
+            <a:r>
+              <a:rPr lang="en-US" sz="1250" b="1" dirty="0">
+                <a:solidFill>
+                  <a:srgbClr val="FFFFFF"/>
                 </a:solidFill>
                 <a:latin typeface="Calibri" pitchFamily="34" charset="0"/>
                 <a:ea typeface="Calibri" pitchFamily="34" charset="-122"/>
                 <a:cs typeface="Calibri" pitchFamily="34" charset="-120"/>
               </a:rPr>
+              <a:t>on the same property</a:t>
+            </a:r>
+            <a:endParaRPr lang="en-US" sz="1250" dirty="0"/>
+          </a:p>
+        </p:txBody>
+      </p:sp>
+      <p:sp>
+        <p:nvSpPr>
+          <p:cNvPr id="15" name="Shape 13"/>
+          <p:cNvSpPr/>
+          <p:nvPr/>
+        </p:nvSpPr>
+        <p:spPr>
+          <a:xfrm>
+            <a:off x="4206240" y="2880360"/>
+            <a:ext cx="3749040" cy="777240"/>
+          </a:xfrm>
+          <a:prstGeom prst="diamond">
+            <a:avLst/>
+          </a:prstGeom>
+          <a:solidFill>
+            <a:srgbClr val="FF8A3D"/>
+          </a:solidFill>
+          <a:ln/>
+        </p:spPr>
+      </p:sp>
+      <p:sp>
+        <p:nvSpPr>
+          <p:cNvPr id="16" name="Text 14"/>
+          <p:cNvSpPr txBox="1"/>
+          <p:nvPr/>
+        </p:nvSpPr>
+        <p:spPr>
+          <a:xfrm>
+            <a:off x="4261104" y="2880360"/>
+            <a:ext cx="3639312" cy="777240"/>
+          </a:xfrm>
+          <a:prstGeom prst="rect">
+            <a:avLst/>
+          </a:prstGeom>
+          <a:noFill/>
+          <a:ln/>
+        </p:spPr>
+        <p:txBody>
+          <a:bodyPr wrap="square" lIns="0" tIns="0" rIns="0" bIns="0" rtlCol="0" anchor="ctr"/>
+          <a:lstStyle/>
+          <a:p>
+            <a:pPr algn="ctr" indent="0" marL="0">
+              <a:lnSpc>
+                <a:spcPct val="105000"/>
+              </a:lnSpc>
+              <a:buNone/>
+            </a:pPr>
+            <a:r>
+              <a:rPr lang="en-US" sz="1150" b="1" dirty="0">
+                <a:solidFill>
+                  <a:srgbClr val="FFFFFF"/>
+                </a:solidFill>
+                <a:latin typeface="Calibri" pitchFamily="34" charset="0"/>
+                <a:ea typeface="Calibri" pitchFamily="34" charset="-122"/>
+                <a:cs typeface="Calibri" pitchFamily="34" charset="-120"/>
+              </a:rPr>
+              <a:t>Differ in</a:t>
+            </a:r>
+            <a:endParaRPr lang="en-US" sz="1150" dirty="0"/>
+          </a:p>
+          <a:p>
+            <a:pPr algn="ctr" indent="0" marL="0">
+              <a:lnSpc>
+                <a:spcPct val="105000"/>
+              </a:lnSpc>
+              <a:buNone/>
+            </a:pPr>
+            <a:r>
+              <a:rPr lang="en-US" sz="1150" b="1" dirty="0">
+                <a:solidFill>
+                  <a:srgbClr val="FFFFFF"/>
+                </a:solidFill>
+                <a:latin typeface="Calibri" pitchFamily="34" charset="0"/>
+                <a:ea typeface="Calibri" pitchFamily="34" charset="-122"/>
+                <a:cs typeface="Calibri" pitchFamily="34" charset="-120"/>
+              </a:rPr>
+              <a:t>!important status?</a:t>
+            </a:r>
+            <a:endParaRPr lang="en-US" sz="1150" dirty="0"/>
+          </a:p>
+        </p:txBody>
+      </p:sp>
+      <p:sp>
+        <p:nvSpPr>
+          <p:cNvPr id="17" name="Shape 15"/>
+          <p:cNvSpPr/>
+          <p:nvPr/>
+        </p:nvSpPr>
+        <p:spPr>
+          <a:xfrm>
+            <a:off x="822960" y="4160520"/>
+            <a:ext cx="2926080" cy="548640"/>
+          </a:xfrm>
+          <a:prstGeom prst="rect">
+            <a:avLst/>
+          </a:prstGeom>
+          <a:solidFill>
+            <a:srgbClr val="3FA66B"/>
+          </a:solidFill>
+          <a:ln/>
+        </p:spPr>
+      </p:sp>
+      <p:sp>
+        <p:nvSpPr>
+          <p:cNvPr id="18" name="Text 16"/>
+          <p:cNvSpPr txBox="1"/>
+          <p:nvPr/>
+        </p:nvSpPr>
+        <p:spPr>
+          <a:xfrm>
+            <a:off x="877824" y="4160520"/>
+            <a:ext cx="2816352" cy="548640"/>
+          </a:xfrm>
+          <a:prstGeom prst="rect">
+            <a:avLst/>
+          </a:prstGeom>
+          <a:noFill/>
+          <a:ln/>
+        </p:spPr>
+        <p:txBody>
+          <a:bodyPr wrap="square" lIns="0" tIns="0" rIns="0" bIns="0" rtlCol="0" anchor="ctr"/>
+          <a:lstStyle/>
+          <a:p>
+            <a:pPr algn="ctr" indent="0" marL="0">
+              <a:lnSpc>
+                <a:spcPct val="105000"/>
+              </a:lnSpc>
+              <a:buNone/>
+            </a:pPr>
+            <a:r>
+              <a:rPr lang="en-US" sz="1200" b="1" dirty="0">
+                <a:solidFill>
+                  <a:srgbClr val="FFFFFF"/>
+                </a:solidFill>
+                <a:latin typeface="Calibri" pitchFamily="34" charset="0"/>
+                <a:ea typeface="Calibri" pitchFamily="34" charset="-122"/>
+                <a:cs typeface="Calibri" pitchFamily="34" charset="-120"/>
+              </a:rPr>
+              <a:t>The !important</a:t>
+            </a:r>
+            <a:endParaRPr lang="en-US" sz="1200" dirty="0"/>
+          </a:p>
+          <a:p>
+            <a:pPr algn="ctr" indent="0" marL="0">
+              <a:lnSpc>
+                <a:spcPct val="105000"/>
+              </a:lnSpc>
+              <a:buNone/>
+            </a:pPr>
+            <a:r>
+              <a:rPr lang="en-US" sz="1200" b="1" dirty="0">
+                <a:solidFill>
+                  <a:srgbClr val="FFFFFF"/>
+                </a:solidFill>
+                <a:latin typeface="Calibri" pitchFamily="34" charset="0"/>
+                <a:ea typeface="Calibri" pitchFamily="34" charset="-122"/>
+                <a:cs typeface="Calibri" pitchFamily="34" charset="-120"/>
+              </a:rPr>
+              <a:t>declaration wins</a:t>
+            </a:r>
+            <a:endParaRPr lang="en-US" sz="1200" dirty="0"/>
+          </a:p>
+        </p:txBody>
+      </p:sp>
+      <p:sp>
+        <p:nvSpPr>
+          <p:cNvPr id="19" name="Shape 17"/>
+          <p:cNvSpPr/>
+          <p:nvPr/>
+        </p:nvSpPr>
+        <p:spPr>
+          <a:xfrm>
+            <a:off x="4572000" y="4160520"/>
+            <a:ext cx="3291840" cy="685800"/>
+          </a:xfrm>
+          <a:prstGeom prst="diamond">
+            <a:avLst/>
+          </a:prstGeom>
+          <a:solidFill>
+            <a:srgbClr val="FF8A3D"/>
+          </a:solidFill>
+          <a:ln/>
+        </p:spPr>
+      </p:sp>
+      <p:sp>
+        <p:nvSpPr>
+          <p:cNvPr id="20" name="Text 18"/>
+          <p:cNvSpPr txBox="1"/>
+          <p:nvPr/>
+        </p:nvSpPr>
+        <p:spPr>
+          <a:xfrm>
+            <a:off x="4626864" y="4160520"/>
+            <a:ext cx="3182112" cy="685800"/>
+          </a:xfrm>
+          <a:prstGeom prst="rect">
+            <a:avLst/>
+          </a:prstGeom>
+          <a:noFill/>
+          <a:ln/>
+        </p:spPr>
+        <p:txBody>
+          <a:bodyPr wrap="square" lIns="0" tIns="0" rIns="0" bIns="0" rtlCol="0" anchor="ctr"/>
+          <a:lstStyle/>
+          <a:p>
+            <a:pPr algn="ctr" indent="0" marL="0">
+              <a:lnSpc>
+                <a:spcPct val="105000"/>
+              </a:lnSpc>
+              <a:buNone/>
+            </a:pPr>
+            <a:r>
+              <a:rPr lang="en-US" sz="1150" b="1" dirty="0">
+                <a:solidFill>
+                  <a:srgbClr val="FFFFFF"/>
+                </a:solidFill>
+                <a:latin typeface="Calibri" pitchFamily="34" charset="0"/>
+                <a:ea typeface="Calibri" pitchFamily="34" charset="-122"/>
+                <a:cs typeface="Calibri" pitchFamily="34" charset="-120"/>
+              </a:rPr>
+              <a:t>Compare specificity</a:t>
+            </a:r>
+            <a:endParaRPr lang="en-US" sz="1150" dirty="0"/>
+          </a:p>
+        </p:txBody>
+      </p:sp>
+      <p:sp>
+        <p:nvSpPr>
+          <p:cNvPr id="21" name="Shape 19"/>
+          <p:cNvSpPr/>
+          <p:nvPr/>
+        </p:nvSpPr>
+        <p:spPr>
+          <a:xfrm>
+            <a:off x="3017520" y="5257800"/>
+            <a:ext cx="2834640" cy="548640"/>
+          </a:xfrm>
+          <a:prstGeom prst="rect">
+            <a:avLst/>
+          </a:prstGeom>
+          <a:solidFill>
+            <a:srgbClr val="3FA66B"/>
+          </a:solidFill>
+          <a:ln/>
+        </p:spPr>
+      </p:sp>
+      <p:sp>
+        <p:nvSpPr>
+          <p:cNvPr id="22" name="Text 20"/>
+          <p:cNvSpPr txBox="1"/>
+          <p:nvPr/>
+        </p:nvSpPr>
+        <p:spPr>
+          <a:xfrm>
+            <a:off x="3072384" y="5257800"/>
+            <a:ext cx="2724912" cy="548640"/>
+          </a:xfrm>
+          <a:prstGeom prst="rect">
+            <a:avLst/>
+          </a:prstGeom>
+          <a:noFill/>
+          <a:ln/>
+        </p:spPr>
+        <p:txBody>
+          <a:bodyPr wrap="square" lIns="0" tIns="0" rIns="0" bIns="0" rtlCol="0" anchor="ctr"/>
+          <a:lstStyle/>
+          <a:p>
+            <a:pPr algn="ctr" indent="0" marL="0">
+              <a:lnSpc>
+                <a:spcPct val="105000"/>
+              </a:lnSpc>
+              <a:buNone/>
+            </a:pPr>
+            <a:r>
+              <a:rPr lang="en-US" sz="1200" b="1" dirty="0">
+                <a:solidFill>
+                  <a:srgbClr val="FFFFFF"/>
+                </a:solidFill>
+                <a:latin typeface="Calibri" pitchFamily="34" charset="0"/>
+                <a:ea typeface="Calibri" pitchFamily="34" charset="-122"/>
+                <a:cs typeface="Calibri" pitchFamily="34" charset="-120"/>
+              </a:rPr>
+              <a:t>More specific</a:t>
+            </a:r>
+            <a:endParaRPr lang="en-US" sz="1200" dirty="0"/>
+          </a:p>
+          <a:p>
+            <a:pPr algn="ctr" indent="0" marL="0">
+              <a:lnSpc>
+                <a:spcPct val="105000"/>
+              </a:lnSpc>
+              <a:buNone/>
+            </a:pPr>
+            <a:r>
+              <a:rPr lang="en-US" sz="1200" b="1" dirty="0">
+                <a:solidFill>
+                  <a:srgbClr val="FFFFFF"/>
+                </a:solidFill>
+                <a:latin typeface="Calibri" pitchFamily="34" charset="0"/>
+                <a:ea typeface="Calibri" pitchFamily="34" charset="-122"/>
+                <a:cs typeface="Calibri" pitchFamily="34" charset="-120"/>
+              </a:rPr>
+              <a:t>rule wins</a:t>
+            </a:r>
+            <a:endParaRPr lang="en-US" sz="1200" dirty="0"/>
+          </a:p>
+        </p:txBody>
+      </p:sp>
+      <p:sp>
+        <p:nvSpPr>
+          <p:cNvPr id="23" name="Shape 21"/>
+          <p:cNvSpPr/>
+          <p:nvPr/>
+        </p:nvSpPr>
+        <p:spPr>
+          <a:xfrm>
+            <a:off x="6583680" y="5257800"/>
+            <a:ext cx="3291840" cy="548640"/>
+          </a:xfrm>
+          <a:prstGeom prst="rect">
+            <a:avLst/>
+          </a:prstGeom>
+          <a:solidFill>
+            <a:srgbClr val="3FA66B"/>
+          </a:solidFill>
+          <a:ln/>
+        </p:spPr>
+      </p:sp>
+      <p:sp>
+        <p:nvSpPr>
+          <p:cNvPr id="24" name="Text 22"/>
+          <p:cNvSpPr txBox="1"/>
+          <p:nvPr/>
+        </p:nvSpPr>
+        <p:spPr>
+          <a:xfrm>
+            <a:off x="6638544" y="5257800"/>
+            <a:ext cx="3182112" cy="548640"/>
+          </a:xfrm>
+          <a:prstGeom prst="rect">
+            <a:avLst/>
+          </a:prstGeom>
+          <a:noFill/>
+          <a:ln/>
+        </p:spPr>
+        <p:txBody>
+          <a:bodyPr wrap="square" lIns="0" tIns="0" rIns="0" bIns="0" rtlCol="0" anchor="ctr"/>
+          <a:lstStyle/>
+          <a:p>
+            <a:pPr algn="ctr" indent="0" marL="0">
+              <a:lnSpc>
+                <a:spcPct val="105000"/>
+              </a:lnSpc>
+              <a:buNone/>
+            </a:pPr>
+            <a:r>
+              <a:rPr lang="en-US" sz="1150" b="1" dirty="0">
+                <a:solidFill>
+                  <a:srgbClr val="FFFFFF"/>
+                </a:solidFill>
+                <a:latin typeface="Calibri" pitchFamily="34" charset="0"/>
+                <a:ea typeface="Calibri" pitchFamily="34" charset="-122"/>
+                <a:cs typeface="Calibri" pitchFamily="34" charset="-120"/>
+              </a:rPr>
+              <a:t>Rule written LATER wins</a:t>
+            </a:r>
+            <a:endParaRPr lang="en-US" sz="1150" dirty="0"/>
+          </a:p>
+          <a:p>
+            <a:pPr algn="ctr" indent="0" marL="0">
+              <a:lnSpc>
+                <a:spcPct val="105000"/>
+              </a:lnSpc>
+              <a:buNone/>
+            </a:pPr>
+            <a:r>
+              <a:rPr lang="en-US" sz="1150" b="1" dirty="0">
+                <a:solidFill>
+                  <a:srgbClr val="FFFFFF"/>
+                </a:solidFill>
+                <a:latin typeface="Calibri" pitchFamily="34" charset="0"/>
+                <a:ea typeface="Calibri" pitchFamily="34" charset="-122"/>
+                <a:cs typeface="Calibri" pitchFamily="34" charset="-120"/>
+              </a:rPr>
+              <a:t>(equal specificity)</a:t>
+            </a:r>
+            <a:endParaRPr lang="en-US" sz="1150" dirty="0"/>
+          </a:p>
+        </p:txBody>
+      </p:sp>
+      <p:sp>
+        <p:nvSpPr>
+          <p:cNvPr id="25" name="Text 23"/>
+          <p:cNvSpPr txBox="1"/>
+          <p:nvPr/>
+        </p:nvSpPr>
+        <p:spPr>
+          <a:xfrm>
+            <a:off x="640080" y="5989320"/>
+            <a:ext cx="10911535" cy="411480"/>
+          </a:xfrm>
+          <a:prstGeom prst="rect">
+            <a:avLst/>
+          </a:prstGeom>
+          <a:noFill/>
+          <a:ln/>
+        </p:spPr>
+        <p:txBody>
+          <a:bodyPr wrap="square" lIns="0" tIns="0" rIns="0" bIns="0" rtlCol="0" anchor="t"/>
+          <a:lstStyle/>
+          <a:p>
+            <a:pPr indent="0" marL="0">
+              <a:buNone/>
+            </a:pPr>
+            <a:r>
+              <a:rPr lang="en-US" sz="1250" i="1" dirty="0">
+                <a:solidFill>
+                  <a:srgbClr val="5D5D72"/>
+                </a:solidFill>
+                <a:latin typeface="Calibri" pitchFamily="34" charset="0"/>
+                <a:ea typeface="Calibri" pitchFamily="34" charset="-122"/>
+                <a:cs typeface="Calibri" pitchFamily="34" charset="-120"/>
+              </a:rPr>
+              <a:t>Every cascade conflict resolves through exactly these branches, in this order — importance first, then specificity, then source order.</a:t>
+            </a:r>
+            <a:endParaRPr lang="en-US" sz="1250" dirty="0"/>
+          </a:p>
+        </p:txBody>
+      </p:sp>
+      <p:sp>
+        <p:nvSpPr>
+          <p:cNvPr id="26" name="Text 24"/>
+          <p:cNvSpPr txBox="1"/>
+          <p:nvPr/>
+        </p:nvSpPr>
+        <p:spPr>
+          <a:xfrm>
+            <a:off x="640080" y="6446520"/>
+            <a:ext cx="8686800" cy="292608"/>
+          </a:xfrm>
+          <a:prstGeom prst="rect">
+            <a:avLst/>
+          </a:prstGeom>
+          <a:noFill/>
+          <a:ln/>
+        </p:spPr>
+        <p:txBody>
+          <a:bodyPr wrap="square" lIns="0" tIns="0" rIns="0" bIns="0" rtlCol="0" anchor="ctr"/>
+          <a:lstStyle/>
+          <a:p>
+            <a:pPr algn="l" indent="0" marL="0">
+              <a:buNone/>
+            </a:pPr>
+            <a:r>
+              <a:rPr lang="en-US" sz="900" dirty="0">
+                <a:solidFill>
+                  <a:srgbClr val="5D5D72"/>
+                </a:solidFill>
+                <a:latin typeface="Calibri" pitchFamily="34" charset="0"/>
+                <a:ea typeface="Calibri" pitchFamily="34" charset="-122"/>
+                <a:cs typeface="Calibri" pitchFamily="34" charset="-120"/>
+              </a:rPr>
               <a:t>Usman Akram  •  COMSATS University Islamabad</a:t>
             </a:r>
             <a:endParaRPr lang="en-US" sz="900" dirty="0"/>
@@ -12410,7 +13142,7 @@
       </p:sp>
       <p:sp>
         <p:nvSpPr>
-          <p:cNvPr id="8" name="Text 6"/>
+          <p:cNvPr id="27" name="Text 25"/>
           <p:cNvSpPr txBox="1"/>
           <p:nvPr/>
         </p:nvSpPr>
@@ -12512,7 +13244,7 @@
                 <a:ea typeface="Calibri" pitchFamily="34" charset="-122"/>
                 <a:cs typeface="Calibri" pitchFamily="34" charset="-120"/>
               </a:rPr>
-              <a:t>THE REAL FORMULA</a:t>
+              <a:t>EVERY CONFLICT CASE</a:t>
             </a:r>
             <a:endParaRPr lang="en-US" sz="1300" dirty="0"/>
           </a:p>
@@ -12551,6 +13283,346 @@
                 <a:ea typeface="Cambria" pitchFamily="34" charset="-122"/>
                 <a:cs typeface="Cambria" pitchFamily="34" charset="-120"/>
               </a:rPr>
+              <a:t>Case 5 in Code</a:t>
+            </a:r>
+            <a:endParaRPr lang="en-US" sz="3400" dirty="0"/>
+          </a:p>
+        </p:txBody>
+      </p:sp>
+      <p:sp>
+        <p:nvSpPr>
+          <p:cNvPr id="4" name="Shape 2"/>
+          <p:cNvSpPr/>
+          <p:nvPr/>
+        </p:nvSpPr>
+        <p:spPr>
+          <a:xfrm>
+            <a:off x="640080" y="1965960"/>
+            <a:ext cx="10911535" cy="1615440"/>
+          </a:xfrm>
+          <a:prstGeom prst="roundRect">
+            <a:avLst>
+              <a:gd name="adj" fmla="val 4528"/>
+            </a:avLst>
+          </a:prstGeom>
+          <a:solidFill>
+            <a:srgbClr val="1E1E4C"/>
+          </a:solidFill>
+          <a:ln/>
+        </p:spPr>
+      </p:sp>
+      <p:sp>
+        <p:nvSpPr>
+          <p:cNvPr id="5" name="Text 3"/>
+          <p:cNvSpPr txBox="1"/>
+          <p:nvPr/>
+        </p:nvSpPr>
+        <p:spPr>
+          <a:xfrm>
+            <a:off x="960120" y="2194560"/>
+            <a:ext cx="10271455" cy="1158240"/>
+          </a:xfrm>
+          <a:prstGeom prst="rect">
+            <a:avLst/>
+          </a:prstGeom>
+          <a:noFill/>
+          <a:ln/>
+        </p:spPr>
+        <p:txBody>
+          <a:bodyPr wrap="square" lIns="0" tIns="0" rIns="0" bIns="0" rtlCol="0" anchor="t"/>
+          <a:lstStyle/>
+          <a:p>
+            <a:pPr indent="0" marL="0">
+              <a:lnSpc>
+                <a:spcPct val="125000"/>
+              </a:lnSpc>
+              <a:buNone/>
+            </a:pPr>
+            <a:r>
+              <a:rPr lang="en-US" sz="1400" dirty="0">
+                <a:solidFill>
+                  <a:srgbClr val="C9D3F5"/>
+                </a:solidFill>
+                <a:latin typeface="Courier New" pitchFamily="34" charset="0"/>
+                <a:ea typeface="Courier New" pitchFamily="34" charset="-122"/>
+                <a:cs typeface="Courier New" pitchFamily="34" charset="-120"/>
+              </a:rPr>
+              <a:t>&lt;p id="lead" style="color: purple;"&gt;...&lt;/p&gt;</a:t>
+            </a:r>
+            <a:endParaRPr lang="en-US" sz="1400" dirty="0"/>
+          </a:p>
+          <a:p>
+            <a:pPr indent="0" marL="0">
+              <a:lnSpc>
+                <a:spcPct val="125000"/>
+              </a:lnSpc>
+              <a:buNone/>
+            </a:pPr>
+            <a:endParaRPr lang="en-US" sz="1400" dirty="0"/>
+          </a:p>
+          <a:p>
+            <a:pPr indent="0" marL="0">
+              <a:lnSpc>
+                <a:spcPct val="125000"/>
+              </a:lnSpc>
+              <a:buNone/>
+            </a:pPr>
+            <a:r>
+              <a:rPr lang="en-US" sz="1400" dirty="0">
+                <a:solidFill>
+                  <a:srgbClr val="C9D3F5"/>
+                </a:solidFill>
+                <a:latin typeface="Courier New" pitchFamily="34" charset="0"/>
+                <a:ea typeface="Courier New" pitchFamily="34" charset="-122"/>
+                <a:cs typeface="Courier New" pitchFamily="34" charset="-120"/>
+              </a:rPr>
+              <a:t>#lead { color: blue; }              /* loses to inline */</a:t>
+            </a:r>
+            <a:endParaRPr lang="en-US" sz="1400" dirty="0"/>
+          </a:p>
+          <a:p>
+            <a:pPr indent="0" marL="0">
+              <a:lnSpc>
+                <a:spcPct val="125000"/>
+              </a:lnSpc>
+              <a:buNone/>
+            </a:pPr>
+            <a:r>
+              <a:rPr lang="en-US" sz="1400" dirty="0">
+                <a:solidFill>
+                  <a:srgbClr val="C9D3F5"/>
+                </a:solidFill>
+                <a:latin typeface="Courier New" pitchFamily="34" charset="0"/>
+                <a:ea typeface="Courier New" pitchFamily="34" charset="-122"/>
+                <a:cs typeface="Courier New" pitchFamily="34" charset="-120"/>
+              </a:rPr>
+              <a:t>#lead { color: green !important; } /* beats inline   */</a:t>
+            </a:r>
+            <a:endParaRPr lang="en-US" sz="1400" dirty="0"/>
+          </a:p>
+        </p:txBody>
+      </p:sp>
+      <p:sp>
+        <p:nvSpPr>
+          <p:cNvPr id="6" name="Text 4"/>
+          <p:cNvSpPr txBox="1"/>
+          <p:nvPr/>
+        </p:nvSpPr>
+        <p:spPr>
+          <a:xfrm>
+            <a:off x="640080" y="3810000"/>
+            <a:ext cx="10911535" cy="2453640"/>
+          </a:xfrm>
+          <a:prstGeom prst="rect">
+            <a:avLst/>
+          </a:prstGeom>
+          <a:noFill/>
+          <a:ln/>
+        </p:spPr>
+        <p:txBody>
+          <a:bodyPr wrap="square" lIns="0" tIns="0" rIns="0" bIns="0" rtlCol="0" anchor="t"/>
+          <a:lstStyle/>
+          <a:p>
+            <a:pPr indent="0" marL="0">
+              <a:buNone/>
+            </a:pPr>
+            <a:r>
+              <a:rPr lang="en-US" sz="1300" dirty="0">
+                <a:solidFill>
+                  <a:srgbClr val="26262F"/>
+                </a:solidFill>
+                <a:latin typeface="Calibri" pitchFamily="34" charset="0"/>
+                <a:ea typeface="Calibri" pitchFamily="34" charset="-122"/>
+                <a:cs typeface="Calibri" pitchFamily="34" charset="-120"/>
+              </a:rPr>
+              <a:t>Without the !important line, the paragraph is purple. With it, green — one of the few times !important is the right tool.</a:t>
+            </a:r>
+            <a:endParaRPr lang="en-US" sz="1300" dirty="0"/>
+          </a:p>
+        </p:txBody>
+      </p:sp>
+      <p:sp>
+        <p:nvSpPr>
+          <p:cNvPr id="7" name="Text 5"/>
+          <p:cNvSpPr txBox="1"/>
+          <p:nvPr/>
+        </p:nvSpPr>
+        <p:spPr>
+          <a:xfrm>
+            <a:off x="640080" y="6446520"/>
+            <a:ext cx="8686800" cy="292608"/>
+          </a:xfrm>
+          <a:prstGeom prst="rect">
+            <a:avLst/>
+          </a:prstGeom>
+          <a:noFill/>
+          <a:ln/>
+        </p:spPr>
+        <p:txBody>
+          <a:bodyPr wrap="square" lIns="0" tIns="0" rIns="0" bIns="0" rtlCol="0" anchor="ctr"/>
+          <a:lstStyle/>
+          <a:p>
+            <a:pPr algn="l" indent="0" marL="0">
+              <a:buNone/>
+            </a:pPr>
+            <a:r>
+              <a:rPr lang="en-US" sz="900" dirty="0">
+                <a:solidFill>
+                  <a:srgbClr val="5D5D72"/>
+                </a:solidFill>
+                <a:latin typeface="Calibri" pitchFamily="34" charset="0"/>
+                <a:ea typeface="Calibri" pitchFamily="34" charset="-122"/>
+                <a:cs typeface="Calibri" pitchFamily="34" charset="-120"/>
+              </a:rPr>
+              <a:t>Usman Akram  •  COMSATS University Islamabad</a:t>
+            </a:r>
+            <a:endParaRPr lang="en-US" sz="900" dirty="0"/>
+          </a:p>
+        </p:txBody>
+      </p:sp>
+      <p:sp>
+        <p:nvSpPr>
+          <p:cNvPr id="8" name="Text 6"/>
+          <p:cNvSpPr txBox="1"/>
+          <p:nvPr/>
+        </p:nvSpPr>
+        <p:spPr>
+          <a:xfrm>
+            <a:off x="11155680" y="6446520"/>
+            <a:ext cx="457200" cy="292608"/>
+          </a:xfrm>
+          <a:prstGeom prst="rect">
+            <a:avLst/>
+          </a:prstGeom>
+          <a:noFill/>
+          <a:ln/>
+        </p:spPr>
+        <p:txBody>
+          <a:bodyPr wrap="square" lIns="0" tIns="0" rIns="0" bIns="0" rtlCol="0" anchor="ctr"/>
+          <a:lstStyle/>
+          <a:p>
+            <a:pPr algn="r" indent="0" marL="0">
+              <a:buNone/>
+            </a:pPr>
+            <a:r>
+              <a:rPr lang="en-US" sz="900" dirty="0">
+                <a:solidFill>
+                  <a:srgbClr val="5D5D72"/>
+                </a:solidFill>
+                <a:latin typeface="Calibri" pitchFamily="34" charset="0"/>
+                <a:ea typeface="Calibri" pitchFamily="34" charset="-122"/>
+                <a:cs typeface="Calibri" pitchFamily="34" charset="-120"/>
+              </a:rPr>
+              <a:t>25</a:t>
+            </a:r>
+            <a:endParaRPr lang="en-US" sz="900" dirty="0"/>
+          </a:p>
+        </p:txBody>
+      </p:sp>
+    </p:spTree>
+  </p:cSld>
+  <p:clrMapOvr>
+    <a:masterClrMapping/>
+  </p:clrMapOvr>
+</p:sld>
+</file>
+
+<file path=ppt/slides/slide26.xml><?xml version="1.0" encoding="utf-8"?>
+<p:sld xmlns:a="http://schemas.openxmlformats.org/drawingml/2006/main" xmlns:r="http://schemas.openxmlformats.org/officeDocument/2006/relationships" xmlns:p="http://schemas.openxmlformats.org/presentationml/2006/main">
+  <p:cSld name="Slide 26">
+    <p:bg>
+      <p:bgPr>
+        <a:solidFill>
+          <a:srgbClr val="FFFFFF"/>
+        </a:solidFill>
+      </p:bgPr>
+    </p:bg>
+    <p:spTree>
+      <p:nvGrpSpPr>
+        <p:cNvPr id="1" name=""/>
+        <p:cNvGrpSpPr/>
+        <p:nvPr/>
+      </p:nvGrpSpPr>
+      <p:grpSpPr>
+        <a:xfrm>
+          <a:off x="0" y="0"/>
+          <a:ext cx="0" cy="0"/>
+          <a:chOff x="0" y="0"/>
+          <a:chExt cx="0" cy="0"/>
+        </a:xfrm>
+      </p:grpSpPr>
+      <p:sp>
+        <p:nvSpPr>
+          <p:cNvPr id="2" name="Text 0"/>
+          <p:cNvSpPr txBox="1"/>
+          <p:nvPr/>
+        </p:nvSpPr>
+        <p:spPr>
+          <a:xfrm>
+            <a:off x="640080" y="457200"/>
+            <a:ext cx="10058400" cy="365760"/>
+          </a:xfrm>
+          <a:prstGeom prst="rect">
+            <a:avLst/>
+          </a:prstGeom>
+          <a:noFill/>
+          <a:ln/>
+        </p:spPr>
+        <p:txBody>
+          <a:bodyPr wrap="square" lIns="0" tIns="0" rIns="0" bIns="0" rtlCol="0" anchor="ctr"/>
+          <a:lstStyle/>
+          <a:p>
+            <a:pPr algn="l" indent="0" marL="0">
+              <a:buNone/>
+            </a:pPr>
+            <a:r>
+              <a:rPr lang="en-US" sz="1300" b="1" spc="300" kern="0" dirty="0">
+                <a:solidFill>
+                  <a:srgbClr val="FF8A3D"/>
+                </a:solidFill>
+                <a:latin typeface="Calibri" pitchFamily="34" charset="0"/>
+                <a:ea typeface="Calibri" pitchFamily="34" charset="-122"/>
+                <a:cs typeface="Calibri" pitchFamily="34" charset="-120"/>
+              </a:rPr>
+              <a:t>THE REAL FORMULA</a:t>
+            </a:r>
+            <a:endParaRPr lang="en-US" sz="1300" dirty="0"/>
+          </a:p>
+        </p:txBody>
+      </p:sp>
+      <p:sp>
+        <p:nvSpPr>
+          <p:cNvPr id="3" name="Text 1"/>
+          <p:cNvSpPr txBox="1"/>
+          <p:nvPr/>
+        </p:nvSpPr>
+        <p:spPr>
+          <a:xfrm>
+            <a:off x="640080" y="841248"/>
+            <a:ext cx="10881360" cy="914400"/>
+          </a:xfrm>
+          <a:prstGeom prst="rect">
+            <a:avLst/>
+          </a:prstGeom>
+          <a:noFill/>
+          <a:ln/>
+        </p:spPr>
+        <p:txBody>
+          <a:bodyPr wrap="square" lIns="0" tIns="0" rIns="0" bIns="0" rtlCol="0" anchor="ctr"/>
+          <a:lstStyle/>
+          <a:p>
+            <a:pPr algn="l" indent="0" marL="0">
+              <a:buNone/>
+            </a:pPr>
+            <a:r>
+              <a:rPr lang="en-US" sz="3400" b="1" dirty="0">
+                <a:solidFill>
+                  <a:srgbClr val="2B2B7A"/>
+                </a:solidFill>
+                <a:latin typeface="Cambria" pitchFamily="34" charset="0"/>
+                <a:ea typeface="Cambria" pitchFamily="34" charset="-122"/>
+                <a:cs typeface="Cambria" pitchFamily="34" charset="-120"/>
+              </a:rPr>
               <a:t>The 4-Part Specificity Score</a:t>
             </a:r>
             <a:endParaRPr lang="en-US" sz="3400" dirty="0"/>
@@ -12559,7 +13631,7 @@
       </p:sp>
       <p:graphicFrame>
         <p:nvGraphicFramePr>
-          <p:cNvPr id="26" name="Table 0"/>
+          <p:cNvPr id="27" name="Table 0"/>
           <p:cNvGraphicFramePr>
             <a:graphicFrameLocks noGrp="1"/>
           </p:cNvGraphicFramePr>
@@ -13388,7 +14460,7 @@
                 <a:ea typeface="Calibri" pitchFamily="34" charset="-122"/>
                 <a:cs typeface="Calibri" pitchFamily="34" charset="-120"/>
               </a:rPr>
-              <a:t>25</a:t>
+              <a:t>26</a:t>
             </a:r>
             <a:endParaRPr lang="en-US" sz="900" dirty="0"/>
           </a:p>
@@ -13402,9 +14474,9 @@
 </p:sld>
 </file>
 
-<file path=ppt/slides/slide26.xml><?xml version="1.0" encoding="utf-8"?>
+<file path=ppt/slides/slide27.xml><?xml version="1.0" encoding="utf-8"?>
 <p:sld xmlns:a="http://schemas.openxmlformats.org/drawingml/2006/main" xmlns:r="http://schemas.openxmlformats.org/officeDocument/2006/relationships" xmlns:p="http://schemas.openxmlformats.org/presentationml/2006/main">
-  <p:cSld name="Slide 26">
+  <p:cSld name="Slide 27">
     <p:bg>
       <p:bgPr>
         <a:solidFill>
@@ -13506,7 +14578,7 @@
       </p:sp>
       <p:graphicFrame>
         <p:nvGraphicFramePr>
-          <p:cNvPr id="27" name="Table 0"/>
+          <p:cNvPr id="28" name="Table 0"/>
           <p:cNvGraphicFramePr>
             <a:graphicFrameLocks noGrp="1"/>
           </p:cNvGraphicFramePr>
@@ -14676,466 +15748,6 @@
                 <a:ea typeface="Calibri" pitchFamily="34" charset="-122"/>
                 <a:cs typeface="Calibri" pitchFamily="34" charset="-120"/>
               </a:rPr>
-              <a:t>26</a:t>
-            </a:r>
-            <a:endParaRPr lang="en-US" sz="900" dirty="0"/>
-          </a:p>
-        </p:txBody>
-      </p:sp>
-    </p:spTree>
-  </p:cSld>
-  <p:clrMapOvr>
-    <a:masterClrMapping/>
-  </p:clrMapOvr>
-</p:sld>
-</file>
-
-<file path=ppt/slides/slide27.xml><?xml version="1.0" encoding="utf-8"?>
-<p:sld xmlns:a="http://schemas.openxmlformats.org/drawingml/2006/main" xmlns:r="http://schemas.openxmlformats.org/officeDocument/2006/relationships" xmlns:p="http://schemas.openxmlformats.org/presentationml/2006/main">
-  <p:cSld name="Slide 27">
-    <p:bg>
-      <p:bgPr>
-        <a:solidFill>
-          <a:srgbClr val="FFFFFF"/>
-        </a:solidFill>
-      </p:bgPr>
-    </p:bg>
-    <p:spTree>
-      <p:nvGrpSpPr>
-        <p:cNvPr id="1" name=""/>
-        <p:cNvGrpSpPr/>
-        <p:nvPr/>
-      </p:nvGrpSpPr>
-      <p:grpSpPr>
-        <a:xfrm>
-          <a:off x="0" y="0"/>
-          <a:ext cx="0" cy="0"/>
-          <a:chOff x="0" y="0"/>
-          <a:chExt cx="0" cy="0"/>
-        </a:xfrm>
-      </p:grpSpPr>
-      <p:sp>
-        <p:nvSpPr>
-          <p:cNvPr id="2" name="Text 0"/>
-          <p:cNvSpPr txBox="1"/>
-          <p:nvPr/>
-        </p:nvSpPr>
-        <p:spPr>
-          <a:xfrm>
-            <a:off x="640080" y="457200"/>
-            <a:ext cx="10058400" cy="365760"/>
-          </a:xfrm>
-          <a:prstGeom prst="rect">
-            <a:avLst/>
-          </a:prstGeom>
-          <a:noFill/>
-          <a:ln/>
-        </p:spPr>
-        <p:txBody>
-          <a:bodyPr wrap="square" lIns="0" tIns="0" rIns="0" bIns="0" rtlCol="0" anchor="ctr"/>
-          <a:lstStyle/>
-          <a:p>
-            <a:pPr algn="l" indent="0" marL="0">
-              <a:buNone/>
-            </a:pPr>
-            <a:r>
-              <a:rPr lang="en-US" sz="1300" b="1" spc="300" kern="0" dirty="0">
-                <a:solidFill>
-                  <a:srgbClr val="FF8A3D"/>
-                </a:solidFill>
-                <a:latin typeface="Calibri" pitchFamily="34" charset="0"/>
-                <a:ea typeface="Calibri" pitchFamily="34" charset="-122"/>
-                <a:cs typeface="Calibri" pitchFamily="34" charset="-120"/>
-              </a:rPr>
-              <a:t>INHERITANCE</a:t>
-            </a:r>
-            <a:endParaRPr lang="en-US" sz="1300" dirty="0"/>
-          </a:p>
-        </p:txBody>
-      </p:sp>
-      <p:sp>
-        <p:nvSpPr>
-          <p:cNvPr id="3" name="Text 1"/>
-          <p:cNvSpPr txBox="1"/>
-          <p:nvPr/>
-        </p:nvSpPr>
-        <p:spPr>
-          <a:xfrm>
-            <a:off x="640080" y="841248"/>
-            <a:ext cx="10881360" cy="914400"/>
-          </a:xfrm>
-          <a:prstGeom prst="rect">
-            <a:avLst/>
-          </a:prstGeom>
-          <a:noFill/>
-          <a:ln/>
-        </p:spPr>
-        <p:txBody>
-          <a:bodyPr wrap="square" lIns="0" tIns="0" rIns="0" bIns="0" rtlCol="0" anchor="ctr"/>
-          <a:lstStyle/>
-          <a:p>
-            <a:pPr algn="l" indent="0" marL="0">
-              <a:buNone/>
-            </a:pPr>
-            <a:r>
-              <a:rPr lang="en-US" sz="3400" b="1" dirty="0">
-                <a:solidFill>
-                  <a:srgbClr val="2B2B7A"/>
-                </a:solidFill>
-                <a:latin typeface="Cambria" pitchFamily="34" charset="0"/>
-                <a:ea typeface="Cambria" pitchFamily="34" charset="-122"/>
-                <a:cs typeface="Cambria" pitchFamily="34" charset="-120"/>
-              </a:rPr>
-              <a:t>An Example Where Inheritance Does NOT Happen</a:t>
-            </a:r>
-            <a:endParaRPr lang="en-US" sz="3400" dirty="0"/>
-          </a:p>
-        </p:txBody>
-      </p:sp>
-      <p:sp>
-        <p:nvSpPr>
-          <p:cNvPr id="4" name="Shape 2"/>
-          <p:cNvSpPr/>
-          <p:nvPr/>
-        </p:nvSpPr>
-        <p:spPr>
-          <a:xfrm>
-            <a:off x="640080" y="1965960"/>
-            <a:ext cx="10911535" cy="3215640"/>
-          </a:xfrm>
-          <a:prstGeom prst="roundRect">
-            <a:avLst>
-              <a:gd name="adj" fmla="val 2275"/>
-            </a:avLst>
-          </a:prstGeom>
-          <a:solidFill>
-            <a:srgbClr val="1E1E4C"/>
-          </a:solidFill>
-          <a:ln/>
-        </p:spPr>
-      </p:sp>
-      <p:sp>
-        <p:nvSpPr>
-          <p:cNvPr id="5" name="Text 3"/>
-          <p:cNvSpPr txBox="1"/>
-          <p:nvPr/>
-        </p:nvSpPr>
-        <p:spPr>
-          <a:xfrm>
-            <a:off x="960120" y="2194560"/>
-            <a:ext cx="10271455" cy="2758440"/>
-          </a:xfrm>
-          <a:prstGeom prst="rect">
-            <a:avLst/>
-          </a:prstGeom>
-          <a:noFill/>
-          <a:ln/>
-        </p:spPr>
-        <p:txBody>
-          <a:bodyPr wrap="square" lIns="0" tIns="0" rIns="0" bIns="0" rtlCol="0" anchor="t"/>
-          <a:lstStyle/>
-          <a:p>
-            <a:pPr indent="0" marL="0">
-              <a:lnSpc>
-                <a:spcPct val="125000"/>
-              </a:lnSpc>
-              <a:buNone/>
-            </a:pPr>
-            <a:r>
-              <a:rPr lang="en-US" sz="1400" dirty="0">
-                <a:solidFill>
-                  <a:srgbClr val="C9D3F5"/>
-                </a:solidFill>
-                <a:latin typeface="Courier New" pitchFamily="34" charset="0"/>
-                <a:ea typeface="Courier New" pitchFamily="34" charset="-122"/>
-                <a:cs typeface="Courier New" pitchFamily="34" charset="-120"/>
-              </a:rPr>
-              <a:t>.parent {</a:t>
-            </a:r>
-            <a:endParaRPr lang="en-US" sz="1400" dirty="0"/>
-          </a:p>
-          <a:p>
-            <a:pPr indent="0" marL="0">
-              <a:lnSpc>
-                <a:spcPct val="125000"/>
-              </a:lnSpc>
-              <a:buNone/>
-            </a:pPr>
-            <a:r>
-              <a:rPr lang="en-US" sz="1400" dirty="0">
-                <a:solidFill>
-                  <a:srgbClr val="C9D3F5"/>
-                </a:solidFill>
-                <a:latin typeface="Courier New" pitchFamily="34" charset="0"/>
-                <a:ea typeface="Courier New" pitchFamily="34" charset="-122"/>
-                <a:cs typeface="Courier New" pitchFamily="34" charset="-120"/>
-              </a:rPr>
-              <a:t>  border: 4px solid crimson;</a:t>
-            </a:r>
-            <a:endParaRPr lang="en-US" sz="1400" dirty="0"/>
-          </a:p>
-          <a:p>
-            <a:pPr indent="0" marL="0">
-              <a:lnSpc>
-                <a:spcPct val="125000"/>
-              </a:lnSpc>
-              <a:buNone/>
-            </a:pPr>
-            <a:r>
-              <a:rPr lang="en-US" sz="1400" dirty="0">
-                <a:solidFill>
-                  <a:srgbClr val="C9D3F5"/>
-                </a:solidFill>
-                <a:latin typeface="Courier New" pitchFamily="34" charset="0"/>
-                <a:ea typeface="Courier New" pitchFamily="34" charset="-122"/>
-                <a:cs typeface="Courier New" pitchFamily="34" charset="-120"/>
-              </a:rPr>
-              <a:t>  padding: 20px;</a:t>
-            </a:r>
-            <a:endParaRPr lang="en-US" sz="1400" dirty="0"/>
-          </a:p>
-          <a:p>
-            <a:pPr indent="0" marL="0">
-              <a:lnSpc>
-                <a:spcPct val="125000"/>
-              </a:lnSpc>
-              <a:buNone/>
-            </a:pPr>
-            <a:r>
-              <a:rPr lang="en-US" sz="1400" dirty="0">
-                <a:solidFill>
-                  <a:srgbClr val="C9D3F5"/>
-                </a:solidFill>
-                <a:latin typeface="Courier New" pitchFamily="34" charset="0"/>
-                <a:ea typeface="Courier New" pitchFamily="34" charset="-122"/>
-                <a:cs typeface="Courier New" pitchFamily="34" charset="-120"/>
-              </a:rPr>
-              <a:t>  color: darkblue;</a:t>
-            </a:r>
-            <a:endParaRPr lang="en-US" sz="1400" dirty="0"/>
-          </a:p>
-          <a:p>
-            <a:pPr indent="0" marL="0">
-              <a:lnSpc>
-                <a:spcPct val="125000"/>
-              </a:lnSpc>
-              <a:buNone/>
-            </a:pPr>
-            <a:r>
-              <a:rPr lang="en-US" sz="1400" dirty="0">
-                <a:solidFill>
-                  <a:srgbClr val="C9D3F5"/>
-                </a:solidFill>
-                <a:latin typeface="Courier New" pitchFamily="34" charset="0"/>
-                <a:ea typeface="Courier New" pitchFamily="34" charset="-122"/>
-                <a:cs typeface="Courier New" pitchFamily="34" charset="-120"/>
-              </a:rPr>
-              <a:t>}</a:t>
-            </a:r>
-            <a:endParaRPr lang="en-US" sz="1400" dirty="0"/>
-          </a:p>
-          <a:p>
-            <a:pPr indent="0" marL="0">
-              <a:lnSpc>
-                <a:spcPct val="125000"/>
-              </a:lnSpc>
-              <a:buNone/>
-            </a:pPr>
-            <a:endParaRPr lang="en-US" sz="1400" dirty="0"/>
-          </a:p>
-          <a:p>
-            <a:pPr indent="0" marL="0">
-              <a:lnSpc>
-                <a:spcPct val="125000"/>
-              </a:lnSpc>
-              <a:buNone/>
-            </a:pPr>
-            <a:r>
-              <a:rPr lang="en-US" sz="1400" dirty="0">
-                <a:solidFill>
-                  <a:srgbClr val="C9D3F5"/>
-                </a:solidFill>
-                <a:latin typeface="Courier New" pitchFamily="34" charset="0"/>
-                <a:ea typeface="Courier New" pitchFamily="34" charset="-122"/>
-                <a:cs typeface="Courier New" pitchFamily="34" charset="-120"/>
-              </a:rPr>
-              <a:t>&lt;div class="parent"&gt;</a:t>
-            </a:r>
-            <a:endParaRPr lang="en-US" sz="1400" dirty="0"/>
-          </a:p>
-          <a:p>
-            <a:pPr indent="0" marL="0">
-              <a:lnSpc>
-                <a:spcPct val="125000"/>
-              </a:lnSpc>
-              <a:buNone/>
-            </a:pPr>
-            <a:r>
-              <a:rPr lang="en-US" sz="1400" dirty="0">
-                <a:solidFill>
-                  <a:srgbClr val="C9D3F5"/>
-                </a:solidFill>
-                <a:latin typeface="Courier New" pitchFamily="34" charset="0"/>
-                <a:ea typeface="Courier New" pitchFamily="34" charset="-122"/>
-                <a:cs typeface="Courier New" pitchFamily="34" charset="-120"/>
-              </a:rPr>
-              <a:t>  Parent text is dark blue.</a:t>
-            </a:r>
-            <a:endParaRPr lang="en-US" sz="1400" dirty="0"/>
-          </a:p>
-          <a:p>
-            <a:pPr indent="0" marL="0">
-              <a:lnSpc>
-                <a:spcPct val="125000"/>
-              </a:lnSpc>
-              <a:buNone/>
-            </a:pPr>
-            <a:r>
-              <a:rPr lang="en-US" sz="1400" dirty="0">
-                <a:solidFill>
-                  <a:srgbClr val="C9D3F5"/>
-                </a:solidFill>
-                <a:latin typeface="Courier New" pitchFamily="34" charset="0"/>
-                <a:ea typeface="Courier New" pitchFamily="34" charset="-122"/>
-                <a:cs typeface="Courier New" pitchFamily="34" charset="-120"/>
-              </a:rPr>
-              <a:t>  &lt;p&gt;Child paragraph is dark blue too.&lt;/p&gt;</a:t>
-            </a:r>
-            <a:endParaRPr lang="en-US" sz="1400" dirty="0"/>
-          </a:p>
-          <a:p>
-            <a:pPr indent="0" marL="0">
-              <a:lnSpc>
-                <a:spcPct val="125000"/>
-              </a:lnSpc>
-              <a:buNone/>
-            </a:pPr>
-            <a:r>
-              <a:rPr lang="en-US" sz="1400" dirty="0">
-                <a:solidFill>
-                  <a:srgbClr val="C9D3F5"/>
-                </a:solidFill>
-                <a:latin typeface="Courier New" pitchFamily="34" charset="0"/>
-                <a:ea typeface="Courier New" pitchFamily="34" charset="-122"/>
-                <a:cs typeface="Courier New" pitchFamily="34" charset="-120"/>
-              </a:rPr>
-              <a:t>&lt;/div&gt;</a:t>
-            </a:r>
-            <a:endParaRPr lang="en-US" sz="1400" dirty="0"/>
-          </a:p>
-        </p:txBody>
-      </p:sp>
-      <p:sp>
-        <p:nvSpPr>
-          <p:cNvPr id="6" name="Text 4"/>
-          <p:cNvSpPr txBox="1"/>
-          <p:nvPr/>
-        </p:nvSpPr>
-        <p:spPr>
-          <a:xfrm>
-            <a:off x="640080" y="5410200"/>
-            <a:ext cx="10911535" cy="853440"/>
-          </a:xfrm>
-          <a:prstGeom prst="rect">
-            <a:avLst/>
-          </a:prstGeom>
-          <a:noFill/>
-          <a:ln/>
-        </p:spPr>
-        <p:txBody>
-          <a:bodyPr wrap="square" lIns="0" tIns="0" rIns="0" bIns="0" rtlCol="0" anchor="t"/>
-          <a:lstStyle/>
-          <a:p>
-            <a:pPr indent="0" marL="0">
-              <a:buNone/>
-            </a:pPr>
-            <a:r>
-              <a:rPr lang="en-US" sz="1300" dirty="0">
-                <a:solidFill>
-                  <a:srgbClr val="26262F"/>
-                </a:solidFill>
-                <a:latin typeface="Calibri" pitchFamily="34" charset="0"/>
-                <a:ea typeface="Calibri" pitchFamily="34" charset="-122"/>
-                <a:cs typeface="Calibri" pitchFamily="34" charset="-120"/>
-              </a:rPr>
-              <a:t>color inherits, so the &lt;p&gt; is dark blue too. border and padding do NOT inherit — only .parent itself gets the crimson outline and padding.</a:t>
-            </a:r>
-            <a:endParaRPr lang="en-US" sz="1300" dirty="0"/>
-          </a:p>
-        </p:txBody>
-      </p:sp>
-      <p:sp>
-        <p:nvSpPr>
-          <p:cNvPr id="7" name="Text 5"/>
-          <p:cNvSpPr txBox="1"/>
-          <p:nvPr/>
-        </p:nvSpPr>
-        <p:spPr>
-          <a:xfrm>
-            <a:off x="640080" y="6446520"/>
-            <a:ext cx="8686800" cy="292608"/>
-          </a:xfrm>
-          <a:prstGeom prst="rect">
-            <a:avLst/>
-          </a:prstGeom>
-          <a:noFill/>
-          <a:ln/>
-        </p:spPr>
-        <p:txBody>
-          <a:bodyPr wrap="square" lIns="0" tIns="0" rIns="0" bIns="0" rtlCol="0" anchor="ctr"/>
-          <a:lstStyle/>
-          <a:p>
-            <a:pPr algn="l" indent="0" marL="0">
-              <a:buNone/>
-            </a:pPr>
-            <a:r>
-              <a:rPr lang="en-US" sz="900" dirty="0">
-                <a:solidFill>
-                  <a:srgbClr val="5D5D72"/>
-                </a:solidFill>
-                <a:latin typeface="Calibri" pitchFamily="34" charset="0"/>
-                <a:ea typeface="Calibri" pitchFamily="34" charset="-122"/>
-                <a:cs typeface="Calibri" pitchFamily="34" charset="-120"/>
-              </a:rPr>
-              <a:t>Usman Akram  •  COMSATS University Islamabad</a:t>
-            </a:r>
-            <a:endParaRPr lang="en-US" sz="900" dirty="0"/>
-          </a:p>
-        </p:txBody>
-      </p:sp>
-      <p:sp>
-        <p:nvSpPr>
-          <p:cNvPr id="8" name="Text 6"/>
-          <p:cNvSpPr txBox="1"/>
-          <p:nvPr/>
-        </p:nvSpPr>
-        <p:spPr>
-          <a:xfrm>
-            <a:off x="11155680" y="6446520"/>
-            <a:ext cx="457200" cy="292608"/>
-          </a:xfrm>
-          <a:prstGeom prst="rect">
-            <a:avLst/>
-          </a:prstGeom>
-          <a:noFill/>
-          <a:ln/>
-        </p:spPr>
-        <p:txBody>
-          <a:bodyPr wrap="square" lIns="0" tIns="0" rIns="0" bIns="0" rtlCol="0" anchor="ctr"/>
-          <a:lstStyle/>
-          <a:p>
-            <a:pPr algn="r" indent="0" marL="0">
-              <a:buNone/>
-            </a:pPr>
-            <a:r>
-              <a:rPr lang="en-US" sz="900" dirty="0">
-                <a:solidFill>
-                  <a:srgbClr val="5D5D72"/>
-                </a:solidFill>
-                <a:latin typeface="Calibri" pitchFamily="34" charset="0"/>
-                <a:ea typeface="Calibri" pitchFamily="34" charset="-122"/>
-                <a:cs typeface="Calibri" pitchFamily="34" charset="-120"/>
-              </a:rPr>
               <a:t>27</a:t>
             </a:r>
             <a:endParaRPr lang="en-US" sz="900" dirty="0"/>
@@ -15246,6 +15858,466 @@
                 <a:ea typeface="Cambria" pitchFamily="34" charset="-122"/>
                 <a:cs typeface="Cambria" pitchFamily="34" charset="-120"/>
               </a:rPr>
+              <a:t>An Example Where Inheritance Does NOT Happen</a:t>
+            </a:r>
+            <a:endParaRPr lang="en-US" sz="3400" dirty="0"/>
+          </a:p>
+        </p:txBody>
+      </p:sp>
+      <p:sp>
+        <p:nvSpPr>
+          <p:cNvPr id="4" name="Shape 2"/>
+          <p:cNvSpPr/>
+          <p:nvPr/>
+        </p:nvSpPr>
+        <p:spPr>
+          <a:xfrm>
+            <a:off x="640080" y="1965960"/>
+            <a:ext cx="10911535" cy="3215640"/>
+          </a:xfrm>
+          <a:prstGeom prst="roundRect">
+            <a:avLst>
+              <a:gd name="adj" fmla="val 2275"/>
+            </a:avLst>
+          </a:prstGeom>
+          <a:solidFill>
+            <a:srgbClr val="1E1E4C"/>
+          </a:solidFill>
+          <a:ln/>
+        </p:spPr>
+      </p:sp>
+      <p:sp>
+        <p:nvSpPr>
+          <p:cNvPr id="5" name="Text 3"/>
+          <p:cNvSpPr txBox="1"/>
+          <p:nvPr/>
+        </p:nvSpPr>
+        <p:spPr>
+          <a:xfrm>
+            <a:off x="960120" y="2194560"/>
+            <a:ext cx="10271455" cy="2758440"/>
+          </a:xfrm>
+          <a:prstGeom prst="rect">
+            <a:avLst/>
+          </a:prstGeom>
+          <a:noFill/>
+          <a:ln/>
+        </p:spPr>
+        <p:txBody>
+          <a:bodyPr wrap="square" lIns="0" tIns="0" rIns="0" bIns="0" rtlCol="0" anchor="t"/>
+          <a:lstStyle/>
+          <a:p>
+            <a:pPr indent="0" marL="0">
+              <a:lnSpc>
+                <a:spcPct val="125000"/>
+              </a:lnSpc>
+              <a:buNone/>
+            </a:pPr>
+            <a:r>
+              <a:rPr lang="en-US" sz="1400" dirty="0">
+                <a:solidFill>
+                  <a:srgbClr val="C9D3F5"/>
+                </a:solidFill>
+                <a:latin typeface="Courier New" pitchFamily="34" charset="0"/>
+                <a:ea typeface="Courier New" pitchFamily="34" charset="-122"/>
+                <a:cs typeface="Courier New" pitchFamily="34" charset="-120"/>
+              </a:rPr>
+              <a:t>.parent {</a:t>
+            </a:r>
+            <a:endParaRPr lang="en-US" sz="1400" dirty="0"/>
+          </a:p>
+          <a:p>
+            <a:pPr indent="0" marL="0">
+              <a:lnSpc>
+                <a:spcPct val="125000"/>
+              </a:lnSpc>
+              <a:buNone/>
+            </a:pPr>
+            <a:r>
+              <a:rPr lang="en-US" sz="1400" dirty="0">
+                <a:solidFill>
+                  <a:srgbClr val="C9D3F5"/>
+                </a:solidFill>
+                <a:latin typeface="Courier New" pitchFamily="34" charset="0"/>
+                <a:ea typeface="Courier New" pitchFamily="34" charset="-122"/>
+                <a:cs typeface="Courier New" pitchFamily="34" charset="-120"/>
+              </a:rPr>
+              <a:t>  border: 4px solid crimson;</a:t>
+            </a:r>
+            <a:endParaRPr lang="en-US" sz="1400" dirty="0"/>
+          </a:p>
+          <a:p>
+            <a:pPr indent="0" marL="0">
+              <a:lnSpc>
+                <a:spcPct val="125000"/>
+              </a:lnSpc>
+              <a:buNone/>
+            </a:pPr>
+            <a:r>
+              <a:rPr lang="en-US" sz="1400" dirty="0">
+                <a:solidFill>
+                  <a:srgbClr val="C9D3F5"/>
+                </a:solidFill>
+                <a:latin typeface="Courier New" pitchFamily="34" charset="0"/>
+                <a:ea typeface="Courier New" pitchFamily="34" charset="-122"/>
+                <a:cs typeface="Courier New" pitchFamily="34" charset="-120"/>
+              </a:rPr>
+              <a:t>  padding: 20px;</a:t>
+            </a:r>
+            <a:endParaRPr lang="en-US" sz="1400" dirty="0"/>
+          </a:p>
+          <a:p>
+            <a:pPr indent="0" marL="0">
+              <a:lnSpc>
+                <a:spcPct val="125000"/>
+              </a:lnSpc>
+              <a:buNone/>
+            </a:pPr>
+            <a:r>
+              <a:rPr lang="en-US" sz="1400" dirty="0">
+                <a:solidFill>
+                  <a:srgbClr val="C9D3F5"/>
+                </a:solidFill>
+                <a:latin typeface="Courier New" pitchFamily="34" charset="0"/>
+                <a:ea typeface="Courier New" pitchFamily="34" charset="-122"/>
+                <a:cs typeface="Courier New" pitchFamily="34" charset="-120"/>
+              </a:rPr>
+              <a:t>  color: darkblue;</a:t>
+            </a:r>
+            <a:endParaRPr lang="en-US" sz="1400" dirty="0"/>
+          </a:p>
+          <a:p>
+            <a:pPr indent="0" marL="0">
+              <a:lnSpc>
+                <a:spcPct val="125000"/>
+              </a:lnSpc>
+              <a:buNone/>
+            </a:pPr>
+            <a:r>
+              <a:rPr lang="en-US" sz="1400" dirty="0">
+                <a:solidFill>
+                  <a:srgbClr val="C9D3F5"/>
+                </a:solidFill>
+                <a:latin typeface="Courier New" pitchFamily="34" charset="0"/>
+                <a:ea typeface="Courier New" pitchFamily="34" charset="-122"/>
+                <a:cs typeface="Courier New" pitchFamily="34" charset="-120"/>
+              </a:rPr>
+              <a:t>}</a:t>
+            </a:r>
+            <a:endParaRPr lang="en-US" sz="1400" dirty="0"/>
+          </a:p>
+          <a:p>
+            <a:pPr indent="0" marL="0">
+              <a:lnSpc>
+                <a:spcPct val="125000"/>
+              </a:lnSpc>
+              <a:buNone/>
+            </a:pPr>
+            <a:endParaRPr lang="en-US" sz="1400" dirty="0"/>
+          </a:p>
+          <a:p>
+            <a:pPr indent="0" marL="0">
+              <a:lnSpc>
+                <a:spcPct val="125000"/>
+              </a:lnSpc>
+              <a:buNone/>
+            </a:pPr>
+            <a:r>
+              <a:rPr lang="en-US" sz="1400" dirty="0">
+                <a:solidFill>
+                  <a:srgbClr val="C9D3F5"/>
+                </a:solidFill>
+                <a:latin typeface="Courier New" pitchFamily="34" charset="0"/>
+                <a:ea typeface="Courier New" pitchFamily="34" charset="-122"/>
+                <a:cs typeface="Courier New" pitchFamily="34" charset="-120"/>
+              </a:rPr>
+              <a:t>&lt;div class="parent"&gt;</a:t>
+            </a:r>
+            <a:endParaRPr lang="en-US" sz="1400" dirty="0"/>
+          </a:p>
+          <a:p>
+            <a:pPr indent="0" marL="0">
+              <a:lnSpc>
+                <a:spcPct val="125000"/>
+              </a:lnSpc>
+              <a:buNone/>
+            </a:pPr>
+            <a:r>
+              <a:rPr lang="en-US" sz="1400" dirty="0">
+                <a:solidFill>
+                  <a:srgbClr val="C9D3F5"/>
+                </a:solidFill>
+                <a:latin typeface="Courier New" pitchFamily="34" charset="0"/>
+                <a:ea typeface="Courier New" pitchFamily="34" charset="-122"/>
+                <a:cs typeface="Courier New" pitchFamily="34" charset="-120"/>
+              </a:rPr>
+              <a:t>  Parent text is dark blue.</a:t>
+            </a:r>
+            <a:endParaRPr lang="en-US" sz="1400" dirty="0"/>
+          </a:p>
+          <a:p>
+            <a:pPr indent="0" marL="0">
+              <a:lnSpc>
+                <a:spcPct val="125000"/>
+              </a:lnSpc>
+              <a:buNone/>
+            </a:pPr>
+            <a:r>
+              <a:rPr lang="en-US" sz="1400" dirty="0">
+                <a:solidFill>
+                  <a:srgbClr val="C9D3F5"/>
+                </a:solidFill>
+                <a:latin typeface="Courier New" pitchFamily="34" charset="0"/>
+                <a:ea typeface="Courier New" pitchFamily="34" charset="-122"/>
+                <a:cs typeface="Courier New" pitchFamily="34" charset="-120"/>
+              </a:rPr>
+              <a:t>  &lt;p&gt;Child paragraph is dark blue too.&lt;/p&gt;</a:t>
+            </a:r>
+            <a:endParaRPr lang="en-US" sz="1400" dirty="0"/>
+          </a:p>
+          <a:p>
+            <a:pPr indent="0" marL="0">
+              <a:lnSpc>
+                <a:spcPct val="125000"/>
+              </a:lnSpc>
+              <a:buNone/>
+            </a:pPr>
+            <a:r>
+              <a:rPr lang="en-US" sz="1400" dirty="0">
+                <a:solidFill>
+                  <a:srgbClr val="C9D3F5"/>
+                </a:solidFill>
+                <a:latin typeface="Courier New" pitchFamily="34" charset="0"/>
+                <a:ea typeface="Courier New" pitchFamily="34" charset="-122"/>
+                <a:cs typeface="Courier New" pitchFamily="34" charset="-120"/>
+              </a:rPr>
+              <a:t>&lt;/div&gt;</a:t>
+            </a:r>
+            <a:endParaRPr lang="en-US" sz="1400" dirty="0"/>
+          </a:p>
+        </p:txBody>
+      </p:sp>
+      <p:sp>
+        <p:nvSpPr>
+          <p:cNvPr id="6" name="Text 4"/>
+          <p:cNvSpPr txBox="1"/>
+          <p:nvPr/>
+        </p:nvSpPr>
+        <p:spPr>
+          <a:xfrm>
+            <a:off x="640080" y="5410200"/>
+            <a:ext cx="10911535" cy="853440"/>
+          </a:xfrm>
+          <a:prstGeom prst="rect">
+            <a:avLst/>
+          </a:prstGeom>
+          <a:noFill/>
+          <a:ln/>
+        </p:spPr>
+        <p:txBody>
+          <a:bodyPr wrap="square" lIns="0" tIns="0" rIns="0" bIns="0" rtlCol="0" anchor="t"/>
+          <a:lstStyle/>
+          <a:p>
+            <a:pPr indent="0" marL="0">
+              <a:buNone/>
+            </a:pPr>
+            <a:r>
+              <a:rPr lang="en-US" sz="1300" dirty="0">
+                <a:solidFill>
+                  <a:srgbClr val="26262F"/>
+                </a:solidFill>
+                <a:latin typeface="Calibri" pitchFamily="34" charset="0"/>
+                <a:ea typeface="Calibri" pitchFamily="34" charset="-122"/>
+                <a:cs typeface="Calibri" pitchFamily="34" charset="-120"/>
+              </a:rPr>
+              <a:t>color inherits, so the &lt;p&gt; is dark blue too. border and padding do NOT inherit — only .parent itself gets the crimson outline and padding.</a:t>
+            </a:r>
+            <a:endParaRPr lang="en-US" sz="1300" dirty="0"/>
+          </a:p>
+        </p:txBody>
+      </p:sp>
+      <p:sp>
+        <p:nvSpPr>
+          <p:cNvPr id="7" name="Text 5"/>
+          <p:cNvSpPr txBox="1"/>
+          <p:nvPr/>
+        </p:nvSpPr>
+        <p:spPr>
+          <a:xfrm>
+            <a:off x="640080" y="6446520"/>
+            <a:ext cx="8686800" cy="292608"/>
+          </a:xfrm>
+          <a:prstGeom prst="rect">
+            <a:avLst/>
+          </a:prstGeom>
+          <a:noFill/>
+          <a:ln/>
+        </p:spPr>
+        <p:txBody>
+          <a:bodyPr wrap="square" lIns="0" tIns="0" rIns="0" bIns="0" rtlCol="0" anchor="ctr"/>
+          <a:lstStyle/>
+          <a:p>
+            <a:pPr algn="l" indent="0" marL="0">
+              <a:buNone/>
+            </a:pPr>
+            <a:r>
+              <a:rPr lang="en-US" sz="900" dirty="0">
+                <a:solidFill>
+                  <a:srgbClr val="5D5D72"/>
+                </a:solidFill>
+                <a:latin typeface="Calibri" pitchFamily="34" charset="0"/>
+                <a:ea typeface="Calibri" pitchFamily="34" charset="-122"/>
+                <a:cs typeface="Calibri" pitchFamily="34" charset="-120"/>
+              </a:rPr>
+              <a:t>Usman Akram  •  COMSATS University Islamabad</a:t>
+            </a:r>
+            <a:endParaRPr lang="en-US" sz="900" dirty="0"/>
+          </a:p>
+        </p:txBody>
+      </p:sp>
+      <p:sp>
+        <p:nvSpPr>
+          <p:cNvPr id="8" name="Text 6"/>
+          <p:cNvSpPr txBox="1"/>
+          <p:nvPr/>
+        </p:nvSpPr>
+        <p:spPr>
+          <a:xfrm>
+            <a:off x="11155680" y="6446520"/>
+            <a:ext cx="457200" cy="292608"/>
+          </a:xfrm>
+          <a:prstGeom prst="rect">
+            <a:avLst/>
+          </a:prstGeom>
+          <a:noFill/>
+          <a:ln/>
+        </p:spPr>
+        <p:txBody>
+          <a:bodyPr wrap="square" lIns="0" tIns="0" rIns="0" bIns="0" rtlCol="0" anchor="ctr"/>
+          <a:lstStyle/>
+          <a:p>
+            <a:pPr algn="r" indent="0" marL="0">
+              <a:buNone/>
+            </a:pPr>
+            <a:r>
+              <a:rPr lang="en-US" sz="900" dirty="0">
+                <a:solidFill>
+                  <a:srgbClr val="5D5D72"/>
+                </a:solidFill>
+                <a:latin typeface="Calibri" pitchFamily="34" charset="0"/>
+                <a:ea typeface="Calibri" pitchFamily="34" charset="-122"/>
+                <a:cs typeface="Calibri" pitchFamily="34" charset="-120"/>
+              </a:rPr>
+              <a:t>28</a:t>
+            </a:r>
+            <a:endParaRPr lang="en-US" sz="900" dirty="0"/>
+          </a:p>
+        </p:txBody>
+      </p:sp>
+    </p:spTree>
+  </p:cSld>
+  <p:clrMapOvr>
+    <a:masterClrMapping/>
+  </p:clrMapOvr>
+</p:sld>
+</file>
+
+<file path=ppt/slides/slide29.xml><?xml version="1.0" encoding="utf-8"?>
+<p:sld xmlns:a="http://schemas.openxmlformats.org/drawingml/2006/main" xmlns:r="http://schemas.openxmlformats.org/officeDocument/2006/relationships" xmlns:p="http://schemas.openxmlformats.org/presentationml/2006/main">
+  <p:cSld name="Slide 29">
+    <p:bg>
+      <p:bgPr>
+        <a:solidFill>
+          <a:srgbClr val="FFFFFF"/>
+        </a:solidFill>
+      </p:bgPr>
+    </p:bg>
+    <p:spTree>
+      <p:nvGrpSpPr>
+        <p:cNvPr id="1" name=""/>
+        <p:cNvGrpSpPr/>
+        <p:nvPr/>
+      </p:nvGrpSpPr>
+      <p:grpSpPr>
+        <a:xfrm>
+          <a:off x="0" y="0"/>
+          <a:ext cx="0" cy="0"/>
+          <a:chOff x="0" y="0"/>
+          <a:chExt cx="0" cy="0"/>
+        </a:xfrm>
+      </p:grpSpPr>
+      <p:sp>
+        <p:nvSpPr>
+          <p:cNvPr id="2" name="Text 0"/>
+          <p:cNvSpPr txBox="1"/>
+          <p:nvPr/>
+        </p:nvSpPr>
+        <p:spPr>
+          <a:xfrm>
+            <a:off x="640080" y="457200"/>
+            <a:ext cx="10058400" cy="365760"/>
+          </a:xfrm>
+          <a:prstGeom prst="rect">
+            <a:avLst/>
+          </a:prstGeom>
+          <a:noFill/>
+          <a:ln/>
+        </p:spPr>
+        <p:txBody>
+          <a:bodyPr wrap="square" lIns="0" tIns="0" rIns="0" bIns="0" rtlCol="0" anchor="ctr"/>
+          <a:lstStyle/>
+          <a:p>
+            <a:pPr algn="l" indent="0" marL="0">
+              <a:buNone/>
+            </a:pPr>
+            <a:r>
+              <a:rPr lang="en-US" sz="1300" b="1" spc="300" kern="0" dirty="0">
+                <a:solidFill>
+                  <a:srgbClr val="FF8A3D"/>
+                </a:solidFill>
+                <a:latin typeface="Calibri" pitchFamily="34" charset="0"/>
+                <a:ea typeface="Calibri" pitchFamily="34" charset="-122"/>
+                <a:cs typeface="Calibri" pitchFamily="34" charset="-120"/>
+              </a:rPr>
+              <a:t>INHERITANCE</a:t>
+            </a:r>
+            <a:endParaRPr lang="en-US" sz="1300" dirty="0"/>
+          </a:p>
+        </p:txBody>
+      </p:sp>
+      <p:sp>
+        <p:nvSpPr>
+          <p:cNvPr id="3" name="Text 1"/>
+          <p:cNvSpPr txBox="1"/>
+          <p:nvPr/>
+        </p:nvSpPr>
+        <p:spPr>
+          <a:xfrm>
+            <a:off x="640080" y="841248"/>
+            <a:ext cx="10881360" cy="914400"/>
+          </a:xfrm>
+          <a:prstGeom prst="rect">
+            <a:avLst/>
+          </a:prstGeom>
+          <a:noFill/>
+          <a:ln/>
+        </p:spPr>
+        <p:txBody>
+          <a:bodyPr wrap="square" lIns="0" tIns="0" rIns="0" bIns="0" rtlCol="0" anchor="ctr"/>
+          <a:lstStyle/>
+          <a:p>
+            <a:pPr algn="l" indent="0" marL="0">
+              <a:buNone/>
+            </a:pPr>
+            <a:r>
+              <a:rPr lang="en-US" sz="3400" b="1" dirty="0">
+                <a:solidFill>
+                  <a:srgbClr val="2B2B7A"/>
+                </a:solidFill>
+                <a:latin typeface="Cambria" pitchFamily="34" charset="0"/>
+                <a:ea typeface="Cambria" pitchFamily="34" charset="-122"/>
+                <a:cs typeface="Cambria" pitchFamily="34" charset="-120"/>
+              </a:rPr>
               <a:t>Inherited vs. Not Inherited</a:t>
             </a:r>
             <a:endParaRPr lang="en-US" sz="3400" dirty="0"/>
@@ -15254,7 +16326,7 @@
       </p:sp>
       <p:graphicFrame>
         <p:nvGraphicFramePr>
-          <p:cNvPr id="29" name="Table 0"/>
+          <p:cNvPr id="30" name="Table 0"/>
           <p:cNvGraphicFramePr>
             <a:graphicFrameLocks noGrp="1"/>
           </p:cNvGraphicFramePr>
@@ -16182,396 +17254,6 @@
                 <a:ea typeface="Calibri" pitchFamily="34" charset="-122"/>
                 <a:cs typeface="Calibri" pitchFamily="34" charset="-120"/>
               </a:rPr>
-              <a:t>28</a:t>
-            </a:r>
-            <a:endParaRPr lang="en-US" sz="900" dirty="0"/>
-          </a:p>
-        </p:txBody>
-      </p:sp>
-    </p:spTree>
-  </p:cSld>
-  <p:clrMapOvr>
-    <a:masterClrMapping/>
-  </p:clrMapOvr>
-</p:sld>
-</file>
-
-<file path=ppt/slides/slide29.xml><?xml version="1.0" encoding="utf-8"?>
-<p:sld xmlns:a="http://schemas.openxmlformats.org/drawingml/2006/main" xmlns:r="http://schemas.openxmlformats.org/officeDocument/2006/relationships" xmlns:p="http://schemas.openxmlformats.org/presentationml/2006/main">
-  <p:cSld name="Slide 29">
-    <p:bg>
-      <p:bgPr>
-        <a:solidFill>
-          <a:srgbClr val="FFFFFF"/>
-        </a:solidFill>
-      </p:bgPr>
-    </p:bg>
-    <p:spTree>
-      <p:nvGrpSpPr>
-        <p:cNvPr id="1" name=""/>
-        <p:cNvGrpSpPr/>
-        <p:nvPr/>
-      </p:nvGrpSpPr>
-      <p:grpSpPr>
-        <a:xfrm>
-          <a:off x="0" y="0"/>
-          <a:ext cx="0" cy="0"/>
-          <a:chOff x="0" y="0"/>
-          <a:chExt cx="0" cy="0"/>
-        </a:xfrm>
-      </p:grpSpPr>
-      <p:sp>
-        <p:nvSpPr>
-          <p:cNvPr id="2" name="Text 0"/>
-          <p:cNvSpPr txBox="1"/>
-          <p:nvPr/>
-        </p:nvSpPr>
-        <p:spPr>
-          <a:xfrm>
-            <a:off x="640080" y="457200"/>
-            <a:ext cx="10058400" cy="365760"/>
-          </a:xfrm>
-          <a:prstGeom prst="rect">
-            <a:avLst/>
-          </a:prstGeom>
-          <a:noFill/>
-          <a:ln/>
-        </p:spPr>
-        <p:txBody>
-          <a:bodyPr wrap="square" lIns="0" tIns="0" rIns="0" bIns="0" rtlCol="0" anchor="ctr"/>
-          <a:lstStyle/>
-          <a:p>
-            <a:pPr algn="l" indent="0" marL="0">
-              <a:buNone/>
-            </a:pPr>
-            <a:r>
-              <a:rPr lang="en-US" sz="1300" b="1" spc="300" kern="0" dirty="0">
-                <a:solidFill>
-                  <a:srgbClr val="FF8A3D"/>
-                </a:solidFill>
-                <a:latin typeface="Calibri" pitchFamily="34" charset="0"/>
-                <a:ea typeface="Calibri" pitchFamily="34" charset="-122"/>
-                <a:cs typeface="Calibri" pitchFamily="34" charset="-120"/>
-              </a:rPr>
-              <a:t>COLOUR</a:t>
-            </a:r>
-            <a:endParaRPr lang="en-US" sz="1300" dirty="0"/>
-          </a:p>
-        </p:txBody>
-      </p:sp>
-      <p:sp>
-        <p:nvSpPr>
-          <p:cNvPr id="3" name="Text 1"/>
-          <p:cNvSpPr txBox="1"/>
-          <p:nvPr/>
-        </p:nvSpPr>
-        <p:spPr>
-          <a:xfrm>
-            <a:off x="640080" y="841248"/>
-            <a:ext cx="10881360" cy="914400"/>
-          </a:xfrm>
-          <a:prstGeom prst="rect">
-            <a:avLst/>
-          </a:prstGeom>
-          <a:noFill/>
-          <a:ln/>
-        </p:spPr>
-        <p:txBody>
-          <a:bodyPr wrap="square" lIns="0" tIns="0" rIns="0" bIns="0" rtlCol="0" anchor="ctr"/>
-          <a:lstStyle/>
-          <a:p>
-            <a:pPr algn="l" indent="0" marL="0">
-              <a:buNone/>
-            </a:pPr>
-            <a:r>
-              <a:rPr lang="en-US" sz="3400" b="1" dirty="0">
-                <a:solidFill>
-                  <a:srgbClr val="2B2B7A"/>
-                </a:solidFill>
-                <a:latin typeface="Cambria" pitchFamily="34" charset="0"/>
-                <a:ea typeface="Cambria" pitchFamily="34" charset="-122"/>
-                <a:cs typeface="Cambria" pitchFamily="34" charset="-120"/>
-              </a:rPr>
-              <a:t>Five Ways to Write a Colour</a:t>
-            </a:r>
-            <a:endParaRPr lang="en-US" sz="3400" dirty="0"/>
-          </a:p>
-        </p:txBody>
-      </p:sp>
-      <p:sp>
-        <p:nvSpPr>
-          <p:cNvPr id="4" name="Shape 2"/>
-          <p:cNvSpPr/>
-          <p:nvPr/>
-        </p:nvSpPr>
-        <p:spPr>
-          <a:xfrm>
-            <a:off x="640080" y="1965960"/>
-            <a:ext cx="10911535" cy="1739265"/>
-          </a:xfrm>
-          <a:prstGeom prst="roundRect">
-            <a:avLst>
-              <a:gd name="adj" fmla="val 4206"/>
-            </a:avLst>
-          </a:prstGeom>
-          <a:solidFill>
-            <a:srgbClr val="1E1E4C"/>
-          </a:solidFill>
-          <a:ln/>
-        </p:spPr>
-      </p:sp>
-      <p:sp>
-        <p:nvSpPr>
-          <p:cNvPr id="5" name="Text 3"/>
-          <p:cNvSpPr txBox="1"/>
-          <p:nvPr/>
-        </p:nvSpPr>
-        <p:spPr>
-          <a:xfrm>
-            <a:off x="960120" y="2194560"/>
-            <a:ext cx="10271455" cy="1282065"/>
-          </a:xfrm>
-          <a:prstGeom prst="rect">
-            <a:avLst/>
-          </a:prstGeom>
-          <a:noFill/>
-          <a:ln/>
-        </p:spPr>
-        <p:txBody>
-          <a:bodyPr wrap="square" lIns="0" tIns="0" rIns="0" bIns="0" rtlCol="0" anchor="t"/>
-          <a:lstStyle/>
-          <a:p>
-            <a:pPr indent="0" marL="0">
-              <a:lnSpc>
-                <a:spcPct val="125000"/>
-              </a:lnSpc>
-              <a:buNone/>
-            </a:pPr>
-            <a:r>
-              <a:rPr lang="en-US" sz="1250" dirty="0">
-                <a:solidFill>
-                  <a:srgbClr val="C9D3F5"/>
-                </a:solidFill>
-                <a:latin typeface="Courier New" pitchFamily="34" charset="0"/>
-                <a:ea typeface="Courier New" pitchFamily="34" charset="-122"/>
-                <a:cs typeface="Courier New" pitchFamily="34" charset="-120"/>
-              </a:rPr>
-              <a:t>.a { color: red; }                  /* named colour */</a:t>
-            </a:r>
-            <a:endParaRPr lang="en-US" sz="1250" dirty="0"/>
-          </a:p>
-          <a:p>
-            <a:pPr indent="0" marL="0">
-              <a:lnSpc>
-                <a:spcPct val="125000"/>
-              </a:lnSpc>
-              <a:buNone/>
-            </a:pPr>
-            <a:r>
-              <a:rPr lang="en-US" sz="1250" dirty="0">
-                <a:solidFill>
-                  <a:srgbClr val="C9D3F5"/>
-                </a:solidFill>
-                <a:latin typeface="Courier New" pitchFamily="34" charset="0"/>
-                <a:ea typeface="Courier New" pitchFamily="34" charset="-122"/>
-                <a:cs typeface="Courier New" pitchFamily="34" charset="-120"/>
-              </a:rPr>
-              <a:t>.b { color: #ff0000; }              /* hex code */</a:t>
-            </a:r>
-            <a:endParaRPr lang="en-US" sz="1250" dirty="0"/>
-          </a:p>
-          <a:p>
-            <a:pPr indent="0" marL="0">
-              <a:lnSpc>
-                <a:spcPct val="125000"/>
-              </a:lnSpc>
-              <a:buNone/>
-            </a:pPr>
-            <a:r>
-              <a:rPr lang="en-US" sz="1250" dirty="0">
-                <a:solidFill>
-                  <a:srgbClr val="C9D3F5"/>
-                </a:solidFill>
-                <a:latin typeface="Courier New" pitchFamily="34" charset="0"/>
-                <a:ea typeface="Courier New" pitchFamily="34" charset="-122"/>
-                <a:cs typeface="Courier New" pitchFamily="34" charset="-120"/>
-              </a:rPr>
-              <a:t>.c { color: rgb(255, 0, 0); }       /* red, green, blue */</a:t>
-            </a:r>
-            <a:endParaRPr lang="en-US" sz="1250" dirty="0"/>
-          </a:p>
-          <a:p>
-            <a:pPr indent="0" marL="0">
-              <a:lnSpc>
-                <a:spcPct val="125000"/>
-              </a:lnSpc>
-              <a:buNone/>
-            </a:pPr>
-            <a:r>
-              <a:rPr lang="en-US" sz="1250" dirty="0">
-                <a:solidFill>
-                  <a:srgbClr val="C9D3F5"/>
-                </a:solidFill>
-                <a:latin typeface="Courier New" pitchFamily="34" charset="0"/>
-                <a:ea typeface="Courier New" pitchFamily="34" charset="-122"/>
-                <a:cs typeface="Courier New" pitchFamily="34" charset="-120"/>
-              </a:rPr>
-              <a:t>.d { color: rgba(255, 0, 0, 0.5); } /* rgb + alpha */</a:t>
-            </a:r>
-            <a:endParaRPr lang="en-US" sz="1250" dirty="0"/>
-          </a:p>
-          <a:p>
-            <a:pPr indent="0" marL="0">
-              <a:lnSpc>
-                <a:spcPct val="125000"/>
-              </a:lnSpc>
-              <a:buNone/>
-            </a:pPr>
-            <a:r>
-              <a:rPr lang="en-US" sz="1250" dirty="0">
-                <a:solidFill>
-                  <a:srgbClr val="C9D3F5"/>
-                </a:solidFill>
-                <a:latin typeface="Courier New" pitchFamily="34" charset="0"/>
-                <a:ea typeface="Courier New" pitchFamily="34" charset="-122"/>
-                <a:cs typeface="Courier New" pitchFamily="34" charset="-120"/>
-              </a:rPr>
-              <a:t>.e { color: hsl(0, 100%, 50%); }    /* hue, sat, lightness */</a:t>
-            </a:r>
-            <a:endParaRPr lang="en-US" sz="1250" dirty="0"/>
-          </a:p>
-        </p:txBody>
-      </p:sp>
-      <p:sp>
-        <p:nvSpPr>
-          <p:cNvPr id="6" name="Shape 4"/>
-          <p:cNvSpPr/>
-          <p:nvPr/>
-        </p:nvSpPr>
-        <p:spPr>
-          <a:xfrm>
-            <a:off x="530352" y="3869817"/>
-            <a:ext cx="11130991" cy="2457831"/>
-          </a:xfrm>
-          <a:prstGeom prst="roundRect">
-            <a:avLst>
-              <a:gd name="adj" fmla="val 2232"/>
-            </a:avLst>
-          </a:prstGeom>
-          <a:solidFill>
-            <a:srgbClr val="FFFFFF"/>
-          </a:solidFill>
-          <a:ln w="12700">
-            <a:solidFill>
-              <a:srgbClr val="E2E2EE"/>
-            </a:solidFill>
-            <a:prstDash val="solid"/>
-          </a:ln>
-          <a:effectLst>
-            <a:outerShdw sx="100000" sy="100000" kx="0" ky="0" algn="bl" rotWithShape="0" blurRad="101600" dist="38100" dir="5400000">
-              <a:srgbClr val="000000">
-                <a:alpha val="12000"/>
-              </a:srgbClr>
-            </a:outerShdw>
-          </a:effectLst>
-        </p:spPr>
-      </p:sp>
-      <p:pic>
-        <p:nvPicPr>
-          <p:cNvPr id="7" name="Image 0" descr="D:/GitHub/mern-web-book/docs/assets/img/lecture-05/color-values.png">    </p:cNvPr>
-          <p:cNvPicPr>
-            <a:picLocks noChangeAspect="1"/>
-          </p:cNvPicPr>
-          <p:nvPr/>
-        </p:nvPicPr>
-        <p:blipFill>
-          <a:blip r:embed="rId1"/>
-          <a:stretch>
-            <a:fillRect/>
-          </a:stretch>
-        </p:blipFill>
-        <p:spPr>
-          <a:xfrm>
-            <a:off x="3781381" y="3979545"/>
-            <a:ext cx="4628934" cy="2238375"/>
-          </a:xfrm>
-          <a:prstGeom prst="rect">
-            <a:avLst/>
-          </a:prstGeom>
-        </p:spPr>
-      </p:pic>
-      <p:sp>
-        <p:nvSpPr>
-          <p:cNvPr id="8" name="Text 5"/>
-          <p:cNvSpPr txBox="1"/>
-          <p:nvPr/>
-        </p:nvSpPr>
-        <p:spPr>
-          <a:xfrm>
-            <a:off x="640080" y="6446520"/>
-            <a:ext cx="8686800" cy="292608"/>
-          </a:xfrm>
-          <a:prstGeom prst="rect">
-            <a:avLst/>
-          </a:prstGeom>
-          <a:noFill/>
-          <a:ln/>
-        </p:spPr>
-        <p:txBody>
-          <a:bodyPr wrap="square" lIns="0" tIns="0" rIns="0" bIns="0" rtlCol="0" anchor="ctr"/>
-          <a:lstStyle/>
-          <a:p>
-            <a:pPr algn="l" indent="0" marL="0">
-              <a:buNone/>
-            </a:pPr>
-            <a:r>
-              <a:rPr lang="en-US" sz="900" dirty="0">
-                <a:solidFill>
-                  <a:srgbClr val="5D5D72"/>
-                </a:solidFill>
-                <a:latin typeface="Calibri" pitchFamily="34" charset="0"/>
-                <a:ea typeface="Calibri" pitchFamily="34" charset="-122"/>
-                <a:cs typeface="Calibri" pitchFamily="34" charset="-120"/>
-              </a:rPr>
-              <a:t>Usman Akram  •  COMSATS University Islamabad</a:t>
-            </a:r>
-            <a:endParaRPr lang="en-US" sz="900" dirty="0"/>
-          </a:p>
-        </p:txBody>
-      </p:sp>
-      <p:sp>
-        <p:nvSpPr>
-          <p:cNvPr id="9" name="Text 6"/>
-          <p:cNvSpPr txBox="1"/>
-          <p:nvPr/>
-        </p:nvSpPr>
-        <p:spPr>
-          <a:xfrm>
-            <a:off x="11155680" y="6446520"/>
-            <a:ext cx="457200" cy="292608"/>
-          </a:xfrm>
-          <a:prstGeom prst="rect">
-            <a:avLst/>
-          </a:prstGeom>
-          <a:noFill/>
-          <a:ln/>
-        </p:spPr>
-        <p:txBody>
-          <a:bodyPr wrap="square" lIns="0" tIns="0" rIns="0" bIns="0" rtlCol="0" anchor="ctr"/>
-          <a:lstStyle/>
-          <a:p>
-            <a:pPr algn="r" indent="0" marL="0">
-              <a:buNone/>
-            </a:pPr>
-            <a:r>
-              <a:rPr lang="en-US" sz="900" dirty="0">
-                <a:solidFill>
-                  <a:srgbClr val="5D5D72"/>
-                </a:solidFill>
-                <a:latin typeface="Calibri" pitchFamily="34" charset="0"/>
-                <a:ea typeface="Calibri" pitchFamily="34" charset="-122"/>
-                <a:cs typeface="Calibri" pitchFamily="34" charset="-120"/>
-              </a:rPr>
               <a:t>29</a:t>
             </a:r>
             <a:endParaRPr lang="en-US" sz="900" dirty="0"/>
@@ -17223,7 +17905,7 @@
                 <a:ea typeface="Calibri" pitchFamily="34" charset="-122"/>
                 <a:cs typeface="Calibri" pitchFamily="34" charset="-120"/>
               </a:rPr>
-              <a:t>FONTS</a:t>
+              <a:t>COLOUR</a:t>
             </a:r>
             <a:endParaRPr lang="en-US" sz="1300" dirty="0"/>
           </a:p>
@@ -17262,7 +17944,7 @@
                 <a:ea typeface="Cambria" pitchFamily="34" charset="-122"/>
                 <a:cs typeface="Cambria" pitchFamily="34" charset="-120"/>
               </a:rPr>
-              <a:t>Font Properties</a:t>
+              <a:t>Five Ways to Write a Colour</a:t>
             </a:r>
             <a:endParaRPr lang="en-US" sz="3400" dirty="0"/>
           </a:p>
@@ -17270,57 +17952,18 @@
       </p:sp>
       <p:sp>
         <p:nvSpPr>
-          <p:cNvPr id="4" name="Text 2"/>
-          <p:cNvSpPr txBox="1"/>
-          <p:nvPr/>
-        </p:nvSpPr>
-        <p:spPr>
-          <a:xfrm>
-            <a:off x="640080" y="1691640"/>
-            <a:ext cx="10911535" cy="411480"/>
-          </a:xfrm>
-          <a:prstGeom prst="rect">
-            <a:avLst/>
-          </a:prstGeom>
-          <a:noFill/>
-          <a:ln/>
-        </p:spPr>
-        <p:txBody>
-          <a:bodyPr wrap="square" lIns="0" tIns="0" rIns="0" bIns="0" rtlCol="0" anchor="ctr"/>
-          <a:lstStyle/>
-          <a:p>
-            <a:pPr indent="0" marL="0">
-              <a:buNone/>
-            </a:pPr>
-            <a:r>
-              <a:rPr lang="en-US" sz="1350" i="1" dirty="0">
-                <a:solidFill>
-                  <a:srgbClr val="5D5D72"/>
-                </a:solidFill>
-                <a:latin typeface="Calibri" pitchFamily="34" charset="0"/>
-                <a:ea typeface="Calibri" pitchFamily="34" charset="-122"/>
-                <a:cs typeface="Calibri" pitchFamily="34" charset="-120"/>
-              </a:rPr>
-              <a:t>font-family (a fallback list), font-size, font-weight, font-style — combined via the font shorthand too.</a:t>
-            </a:r>
-            <a:endParaRPr lang="en-US" sz="1350" dirty="0"/>
-          </a:p>
-        </p:txBody>
-      </p:sp>
-      <p:sp>
-        <p:nvSpPr>
-          <p:cNvPr id="5" name="Shape 3"/>
+          <p:cNvPr id="4" name="Shape 2"/>
           <p:cNvSpPr/>
           <p:nvPr/>
         </p:nvSpPr>
         <p:spPr>
           <a:xfrm>
-            <a:off x="640080" y="2240280"/>
-            <a:ext cx="10911535" cy="1977390"/>
+            <a:off x="640080" y="1965960"/>
+            <a:ext cx="10911535" cy="1739265"/>
           </a:xfrm>
           <a:prstGeom prst="roundRect">
             <a:avLst>
-              <a:gd name="adj" fmla="val 3699"/>
+              <a:gd name="adj" fmla="val 4206"/>
             </a:avLst>
           </a:prstGeom>
           <a:solidFill>
@@ -17331,14 +17974,14 @@
       </p:sp>
       <p:sp>
         <p:nvSpPr>
-          <p:cNvPr id="6" name="Text 4"/>
+          <p:cNvPr id="5" name="Text 3"/>
           <p:cNvSpPr txBox="1"/>
           <p:nvPr/>
         </p:nvSpPr>
         <p:spPr>
           <a:xfrm>
-            <a:off x="960120" y="2468880"/>
-            <a:ext cx="10271455" cy="1520190"/>
+            <a:off x="960120" y="2194560"/>
+            <a:ext cx="10271455" cy="1282065"/>
           </a:xfrm>
           <a:prstGeom prst="rect">
             <a:avLst/>
@@ -17365,7 +18008,7 @@
                 <a:ea typeface="Courier New" pitchFamily="34" charset="-122"/>
                 <a:cs typeface="Courier New" pitchFamily="34" charset="-120"/>
               </a:rPr>
-              <a:t>p {</a:t>
+              <a:t>.a { color: red; }                  /* named colour */</a:t>
             </a:r>
             <a:endParaRPr lang="en-US" sz="1250" dirty="0"/>
           </a:p>
@@ -17385,7 +18028,7 @@
                 <a:ea typeface="Courier New" pitchFamily="34" charset="-122"/>
                 <a:cs typeface="Courier New" pitchFamily="34" charset="-120"/>
               </a:rPr>
-              <a:t>  font-family: "Helvetica Neue", Arial, sans-serif;</a:t>
+              <a:t>.b { color: #ff0000; }              /* hex code */</a:t>
             </a:r>
             <a:endParaRPr lang="en-US" sz="1250" dirty="0"/>
           </a:p>
@@ -17405,7 +18048,7 @@
                 <a:ea typeface="Courier New" pitchFamily="34" charset="-122"/>
                 <a:cs typeface="Courier New" pitchFamily="34" charset="-120"/>
               </a:rPr>
-              <a:t>  font-size: 16px;</a:t>
+              <a:t>.c { color: rgb(255, 0, 0); }       /* red, green, blue */</a:t>
             </a:r>
             <a:endParaRPr lang="en-US" sz="1250" dirty="0"/>
           </a:p>
@@ -17425,7 +18068,7 @@
                 <a:ea typeface="Courier New" pitchFamily="34" charset="-122"/>
                 <a:cs typeface="Courier New" pitchFamily="34" charset="-120"/>
               </a:rPr>
-              <a:t>  font-weight: bold;</a:t>
+              <a:t>.d { color: rgba(255, 0, 0, 0.5); } /* rgb + alpha */</a:t>
             </a:r>
             <a:endParaRPr lang="en-US" sz="1250" dirty="0"/>
           </a:p>
@@ -17445,46 +18088,26 @@
                 <a:ea typeface="Courier New" pitchFamily="34" charset="-122"/>
                 <a:cs typeface="Courier New" pitchFamily="34" charset="-120"/>
               </a:rPr>
-              <a:t>  font-style: italic;</a:t>
+              <a:t>.e { color: hsl(0, 100%, 50%); }    /* hue, sat, lightness */</a:t>
             </a:r>
             <a:endParaRPr lang="en-US" sz="1250" dirty="0"/>
           </a:p>
-          <a:p>
-            <a:pPr indent="0" marL="0">
-              <a:lnSpc>
-                <a:spcPct val="125000"/>
-              </a:lnSpc>
-              <a:buNone/>
-            </a:pPr>
-            <a:r>
-              <a:rPr lang="en-US" sz="1250" dirty="0">
-                <a:solidFill>
-                  <a:srgbClr val="C9D3F5"/>
-                </a:solidFill>
-                <a:latin typeface="Courier New" pitchFamily="34" charset="0"/>
-                <a:ea typeface="Courier New" pitchFamily="34" charset="-122"/>
-                <a:cs typeface="Courier New" pitchFamily="34" charset="-120"/>
-              </a:rPr>
-              <a:t>}</a:t>
-            </a:r>
-            <a:endParaRPr lang="en-US" sz="1250" dirty="0"/>
-          </a:p>
-        </p:txBody>
-      </p:sp>
-      <p:sp>
-        <p:nvSpPr>
-          <p:cNvPr id="7" name="Shape 5"/>
+        </p:txBody>
+      </p:sp>
+      <p:sp>
+        <p:nvSpPr>
+          <p:cNvPr id="6" name="Shape 4"/>
           <p:cNvSpPr/>
           <p:nvPr/>
         </p:nvSpPr>
         <p:spPr>
           <a:xfrm>
-            <a:off x="530352" y="4382262"/>
-            <a:ext cx="11130991" cy="1945386"/>
+            <a:off x="530352" y="3869817"/>
+            <a:ext cx="11130991" cy="2457831"/>
           </a:xfrm>
           <a:prstGeom prst="roundRect">
             <a:avLst>
-              <a:gd name="adj" fmla="val 2820"/>
+              <a:gd name="adj" fmla="val 2232"/>
             </a:avLst>
           </a:prstGeom>
           <a:solidFill>
@@ -17507,7 +18130,7 @@
       </p:sp>
       <p:pic>
         <p:nvPicPr>
-          <p:cNvPr id="8" name="Image 0" descr="D:/GitHub/mern-web-book/docs/assets/img/lecture-05/font-properties.png">    </p:cNvPr>
+          <p:cNvPr id="7" name="Image 0" descr="D:/GitHub/mern-web-book/docs/assets/img/lecture-05/color-values.png">    </p:cNvPr>
           <p:cNvPicPr>
             <a:picLocks noChangeAspect="1"/>
           </p:cNvPicPr>
@@ -17521,8 +18144,8 @@
         </p:blipFill>
         <p:spPr>
           <a:xfrm>
-            <a:off x="640080" y="5049654"/>
-            <a:ext cx="10911535" cy="610602"/>
+            <a:off x="3781381" y="3979545"/>
+            <a:ext cx="4628934" cy="2238375"/>
           </a:xfrm>
           <a:prstGeom prst="rect">
             <a:avLst/>
@@ -17531,7 +18154,7 @@
       </p:pic>
       <p:sp>
         <p:nvSpPr>
-          <p:cNvPr id="9" name="Text 6"/>
+          <p:cNvPr id="8" name="Text 5"/>
           <p:cNvSpPr txBox="1"/>
           <p:nvPr/>
         </p:nvSpPr>
@@ -17570,7 +18193,7 @@
       </p:sp>
       <p:sp>
         <p:nvSpPr>
-          <p:cNvPr id="10" name="Text 7"/>
+          <p:cNvPr id="9" name="Text 6"/>
           <p:cNvSpPr txBox="1"/>
           <p:nvPr/>
         </p:nvSpPr>
@@ -17672,7 +18295,7 @@
                 <a:ea typeface="Calibri" pitchFamily="34" charset="-122"/>
                 <a:cs typeface="Calibri" pitchFamily="34" charset="-120"/>
               </a:rPr>
-              <a:t>TEXT</a:t>
+              <a:t>FONTS</a:t>
             </a:r>
             <a:endParaRPr lang="en-US" sz="1300" dirty="0"/>
           </a:p>
@@ -17711,7 +18334,7 @@
                 <a:ea typeface="Cambria" pitchFamily="34" charset="-122"/>
                 <a:cs typeface="Cambria" pitchFamily="34" charset="-120"/>
               </a:rPr>
-              <a:t>Text Properties</a:t>
+              <a:t>Font Properties</a:t>
             </a:r>
             <a:endParaRPr lang="en-US" sz="3400" dirty="0"/>
           </a:p>
@@ -17719,18 +18342,57 @@
       </p:sp>
       <p:sp>
         <p:nvSpPr>
-          <p:cNvPr id="4" name="Shape 2"/>
+          <p:cNvPr id="4" name="Text 2"/>
+          <p:cNvSpPr txBox="1"/>
+          <p:nvPr/>
+        </p:nvSpPr>
+        <p:spPr>
+          <a:xfrm>
+            <a:off x="640080" y="1691640"/>
+            <a:ext cx="10911535" cy="411480"/>
+          </a:xfrm>
+          <a:prstGeom prst="rect">
+            <a:avLst/>
+          </a:prstGeom>
+          <a:noFill/>
+          <a:ln/>
+        </p:spPr>
+        <p:txBody>
+          <a:bodyPr wrap="square" lIns="0" tIns="0" rIns="0" bIns="0" rtlCol="0" anchor="ctr"/>
+          <a:lstStyle/>
+          <a:p>
+            <a:pPr indent="0" marL="0">
+              <a:buNone/>
+            </a:pPr>
+            <a:r>
+              <a:rPr lang="en-US" sz="1350" i="1" dirty="0">
+                <a:solidFill>
+                  <a:srgbClr val="5D5D72"/>
+                </a:solidFill>
+                <a:latin typeface="Calibri" pitchFamily="34" charset="0"/>
+                <a:ea typeface="Calibri" pitchFamily="34" charset="-122"/>
+                <a:cs typeface="Calibri" pitchFamily="34" charset="-120"/>
+              </a:rPr>
+              <a:t>font-family (a fallback list), font-size, font-weight, font-style — combined via the font shorthand too.</a:t>
+            </a:r>
+            <a:endParaRPr lang="en-US" sz="1350" dirty="0"/>
+          </a:p>
+        </p:txBody>
+      </p:sp>
+      <p:sp>
+        <p:nvSpPr>
+          <p:cNvPr id="5" name="Shape 3"/>
           <p:cNvSpPr/>
           <p:nvPr/>
         </p:nvSpPr>
         <p:spPr>
           <a:xfrm>
-            <a:off x="640080" y="1965960"/>
-            <a:ext cx="10911535" cy="2215515"/>
+            <a:off x="640080" y="2240280"/>
+            <a:ext cx="10911535" cy="1977390"/>
           </a:xfrm>
           <a:prstGeom prst="roundRect">
             <a:avLst>
-              <a:gd name="adj" fmla="val 3302"/>
+              <a:gd name="adj" fmla="val 3699"/>
             </a:avLst>
           </a:prstGeom>
           <a:solidFill>
@@ -17741,14 +18403,14 @@
       </p:sp>
       <p:sp>
         <p:nvSpPr>
-          <p:cNvPr id="5" name="Text 3"/>
+          <p:cNvPr id="6" name="Text 4"/>
           <p:cNvSpPr txBox="1"/>
           <p:nvPr/>
         </p:nvSpPr>
         <p:spPr>
           <a:xfrm>
-            <a:off x="960120" y="2194560"/>
-            <a:ext cx="10271455" cy="1758315"/>
+            <a:off x="960120" y="2468880"/>
+            <a:ext cx="10271455" cy="1520190"/>
           </a:xfrm>
           <a:prstGeom prst="rect">
             <a:avLst/>
@@ -17795,7 +18457,7 @@
                 <a:ea typeface="Courier New" pitchFamily="34" charset="-122"/>
                 <a:cs typeface="Courier New" pitchFamily="34" charset="-120"/>
               </a:rPr>
-              <a:t>  text-align: center;</a:t>
+              <a:t>  font-family: "Helvetica Neue", Arial, sans-serif;</a:t>
             </a:r>
             <a:endParaRPr lang="en-US" sz="1250" dirty="0"/>
           </a:p>
@@ -17815,7 +18477,7 @@
                 <a:ea typeface="Courier New" pitchFamily="34" charset="-122"/>
                 <a:cs typeface="Courier New" pitchFamily="34" charset="-120"/>
               </a:rPr>
-              <a:t>  text-decoration: underline;</a:t>
+              <a:t>  font-size: 16px;</a:t>
             </a:r>
             <a:endParaRPr lang="en-US" sz="1250" dirty="0"/>
           </a:p>
@@ -17835,7 +18497,7 @@
                 <a:ea typeface="Courier New" pitchFamily="34" charset="-122"/>
                 <a:cs typeface="Courier New" pitchFamily="34" charset="-120"/>
               </a:rPr>
-              <a:t>  text-transform: uppercase;</a:t>
+              <a:t>  font-weight: bold;</a:t>
             </a:r>
             <a:endParaRPr lang="en-US" sz="1250" dirty="0"/>
           </a:p>
@@ -17855,7 +18517,7 @@
                 <a:ea typeface="Courier New" pitchFamily="34" charset="-122"/>
                 <a:cs typeface="Courier New" pitchFamily="34" charset="-120"/>
               </a:rPr>
-              <a:t>  line-height: 1.6;</a:t>
+              <a:t>  font-style: italic;</a:t>
             </a:r>
             <a:endParaRPr lang="en-US" sz="1250" dirty="0"/>
           </a:p>
@@ -17875,46 +18537,26 @@
                 <a:ea typeface="Courier New" pitchFamily="34" charset="-122"/>
                 <a:cs typeface="Courier New" pitchFamily="34" charset="-120"/>
               </a:rPr>
-              <a:t>  letter-spacing: 0.5px;</a:t>
+              <a:t>}</a:t>
             </a:r>
             <a:endParaRPr lang="en-US" sz="1250" dirty="0"/>
           </a:p>
-          <a:p>
-            <a:pPr indent="0" marL="0">
-              <a:lnSpc>
-                <a:spcPct val="125000"/>
-              </a:lnSpc>
-              <a:buNone/>
-            </a:pPr>
-            <a:r>
-              <a:rPr lang="en-US" sz="1250" dirty="0">
-                <a:solidFill>
-                  <a:srgbClr val="C9D3F5"/>
-                </a:solidFill>
-                <a:latin typeface="Courier New" pitchFamily="34" charset="0"/>
-                <a:ea typeface="Courier New" pitchFamily="34" charset="-122"/>
-                <a:cs typeface="Courier New" pitchFamily="34" charset="-120"/>
-              </a:rPr>
-              <a:t>}</a:t>
-            </a:r>
-            <a:endParaRPr lang="en-US" sz="1250" dirty="0"/>
-          </a:p>
-        </p:txBody>
-      </p:sp>
-      <p:sp>
-        <p:nvSpPr>
-          <p:cNvPr id="6" name="Shape 4"/>
+        </p:txBody>
+      </p:sp>
+      <p:sp>
+        <p:nvSpPr>
+          <p:cNvPr id="7" name="Shape 5"/>
           <p:cNvSpPr/>
           <p:nvPr/>
         </p:nvSpPr>
         <p:spPr>
           <a:xfrm>
-            <a:off x="530352" y="4346067"/>
-            <a:ext cx="11130991" cy="1981581"/>
+            <a:off x="530352" y="4382262"/>
+            <a:ext cx="11130991" cy="1945386"/>
           </a:xfrm>
           <a:prstGeom prst="roundRect">
             <a:avLst>
-              <a:gd name="adj" fmla="val 2769"/>
+              <a:gd name="adj" fmla="val 2820"/>
             </a:avLst>
           </a:prstGeom>
           <a:solidFill>
@@ -17937,7 +18579,7 @@
       </p:sp>
       <p:pic>
         <p:nvPicPr>
-          <p:cNvPr id="7" name="Image 0" descr="D:/GitHub/mern-web-book/docs/assets/img/lecture-05/text-properties.png">    </p:cNvPr>
+          <p:cNvPr id="8" name="Image 0" descr="D:/GitHub/mern-web-book/docs/assets/img/lecture-05/font-properties.png">    </p:cNvPr>
           <p:cNvPicPr>
             <a:picLocks noChangeAspect="1"/>
           </p:cNvPicPr>
@@ -17951,8 +18593,8 @@
         </p:blipFill>
         <p:spPr>
           <a:xfrm>
-            <a:off x="1700435" y="4455795"/>
-            <a:ext cx="8790826" cy="1762125"/>
+            <a:off x="640080" y="5049654"/>
+            <a:ext cx="10911535" cy="610602"/>
           </a:xfrm>
           <a:prstGeom prst="rect">
             <a:avLst/>
@@ -17961,7 +18603,7 @@
       </p:pic>
       <p:sp>
         <p:nvSpPr>
-          <p:cNvPr id="8" name="Text 5"/>
+          <p:cNvPr id="9" name="Text 6"/>
           <p:cNvSpPr txBox="1"/>
           <p:nvPr/>
         </p:nvSpPr>
@@ -18000,7 +18642,7 @@
       </p:sp>
       <p:sp>
         <p:nvSpPr>
-          <p:cNvPr id="9" name="Text 6"/>
+          <p:cNvPr id="10" name="Text 7"/>
           <p:cNvSpPr txBox="1"/>
           <p:nvPr/>
         </p:nvSpPr>
@@ -18102,7 +18744,7 @@
                 <a:ea typeface="Calibri" pitchFamily="34" charset="-122"/>
                 <a:cs typeface="Calibri" pitchFamily="34" charset="-120"/>
               </a:rPr>
-              <a:t>BACKGROUNDS</a:t>
+              <a:t>TEXT</a:t>
             </a:r>
             <a:endParaRPr lang="en-US" sz="1300" dirty="0"/>
           </a:p>
@@ -18141,7 +18783,7 @@
                 <a:ea typeface="Cambria" pitchFamily="34" charset="-122"/>
                 <a:cs typeface="Cambria" pitchFamily="34" charset="-120"/>
               </a:rPr>
-              <a:t>Background Properties</a:t>
+              <a:t>Text Properties</a:t>
             </a:r>
             <a:endParaRPr lang="en-US" sz="3400" dirty="0"/>
           </a:p>
@@ -18156,11 +18798,11 @@
         <p:spPr>
           <a:xfrm>
             <a:off x="640080" y="1965960"/>
-            <a:ext cx="10911535" cy="2415540"/>
+            <a:ext cx="10911535" cy="2215515"/>
           </a:xfrm>
           <a:prstGeom prst="roundRect">
             <a:avLst>
-              <a:gd name="adj" fmla="val 3028"/>
+              <a:gd name="adj" fmla="val 3302"/>
             </a:avLst>
           </a:prstGeom>
           <a:solidFill>
@@ -18178,7 +18820,7 @@
         <p:spPr>
           <a:xfrm>
             <a:off x="960120" y="2194560"/>
-            <a:ext cx="10271455" cy="1958340"/>
+            <a:ext cx="10271455" cy="1758315"/>
           </a:xfrm>
           <a:prstGeom prst="rect">
             <a:avLst/>
@@ -18197,7 +18839,7 @@
               <a:buNone/>
             </a:pPr>
             <a:r>
-              <a:rPr lang="en-US" sz="1400" dirty="0">
+              <a:rPr lang="en-US" sz="1250" dirty="0">
                 <a:solidFill>
                   <a:srgbClr val="C9D3F5"/>
                 </a:solidFill>
@@ -18205,9 +18847,9 @@
                 <a:ea typeface="Courier New" pitchFamily="34" charset="-122"/>
                 <a:cs typeface="Courier New" pitchFamily="34" charset="-120"/>
               </a:rPr>
-              <a:t>.card {</a:t>
-            </a:r>
-            <a:endParaRPr lang="en-US" sz="1400" dirty="0"/>
+              <a:t>p {</a:t>
+            </a:r>
+            <a:endParaRPr lang="en-US" sz="1250" dirty="0"/>
           </a:p>
           <a:p>
             <a:pPr indent="0" marL="0">
@@ -18217,7 +18859,7 @@
               <a:buNone/>
             </a:pPr>
             <a:r>
-              <a:rPr lang="en-US" sz="1400" dirty="0">
+              <a:rPr lang="en-US" sz="1250" dirty="0">
                 <a:solidFill>
                   <a:srgbClr val="C9D3F5"/>
                 </a:solidFill>
@@ -18225,9 +18867,9 @@
                 <a:ea typeface="Courier New" pitchFamily="34" charset="-122"/>
                 <a:cs typeface="Courier New" pitchFamily="34" charset="-120"/>
               </a:rPr>
-              <a:t>  background-color: #f5f5f5;</a:t>
-            </a:r>
-            <a:endParaRPr lang="en-US" sz="1400" dirty="0"/>
+              <a:t>  text-align: center;</a:t>
+            </a:r>
+            <a:endParaRPr lang="en-US" sz="1250" dirty="0"/>
           </a:p>
           <a:p>
             <a:pPr indent="0" marL="0">
@@ -18237,7 +18879,7 @@
               <a:buNone/>
             </a:pPr>
             <a:r>
-              <a:rPr lang="en-US" sz="1400" dirty="0">
+              <a:rPr lang="en-US" sz="1250" dirty="0">
                 <a:solidFill>
                   <a:srgbClr val="C9D3F5"/>
                 </a:solidFill>
@@ -18245,9 +18887,9 @@
                 <a:ea typeface="Courier New" pitchFamily="34" charset="-122"/>
                 <a:cs typeface="Courier New" pitchFamily="34" charset="-120"/>
               </a:rPr>
-              <a:t>  background-image: url("pattern.png");</a:t>
-            </a:r>
-            <a:endParaRPr lang="en-US" sz="1400" dirty="0"/>
+              <a:t>  text-decoration: underline;</a:t>
+            </a:r>
+            <a:endParaRPr lang="en-US" sz="1250" dirty="0"/>
           </a:p>
           <a:p>
             <a:pPr indent="0" marL="0">
@@ -18257,7 +18899,7 @@
               <a:buNone/>
             </a:pPr>
             <a:r>
-              <a:rPr lang="en-US" sz="1400" dirty="0">
+              <a:rPr lang="en-US" sz="1250" dirty="0">
                 <a:solidFill>
                   <a:srgbClr val="C9D3F5"/>
                 </a:solidFill>
@@ -18265,9 +18907,9 @@
                 <a:ea typeface="Courier New" pitchFamily="34" charset="-122"/>
                 <a:cs typeface="Courier New" pitchFamily="34" charset="-120"/>
               </a:rPr>
-              <a:t>  background-repeat: no-repeat;</a:t>
-            </a:r>
-            <a:endParaRPr lang="en-US" sz="1400" dirty="0"/>
+              <a:t>  text-transform: uppercase;</a:t>
+            </a:r>
+            <a:endParaRPr lang="en-US" sz="1250" dirty="0"/>
           </a:p>
           <a:p>
             <a:pPr indent="0" marL="0">
@@ -18277,7 +18919,7 @@
               <a:buNone/>
             </a:pPr>
             <a:r>
-              <a:rPr lang="en-US" sz="1400" dirty="0">
+              <a:rPr lang="en-US" sz="1250" dirty="0">
                 <a:solidFill>
                   <a:srgbClr val="C9D3F5"/>
                 </a:solidFill>
@@ -18285,9 +18927,9 @@
                 <a:ea typeface="Courier New" pitchFamily="34" charset="-122"/>
                 <a:cs typeface="Courier New" pitchFamily="34" charset="-120"/>
               </a:rPr>
-              <a:t>  background-position: center;</a:t>
-            </a:r>
-            <a:endParaRPr lang="en-US" sz="1400" dirty="0"/>
+              <a:t>  line-height: 1.6;</a:t>
+            </a:r>
+            <a:endParaRPr lang="en-US" sz="1250" dirty="0"/>
           </a:p>
           <a:p>
             <a:pPr indent="0" marL="0">
@@ -18297,7 +18939,7 @@
               <a:buNone/>
             </a:pPr>
             <a:r>
-              <a:rPr lang="en-US" sz="1400" dirty="0">
+              <a:rPr lang="en-US" sz="1250" dirty="0">
                 <a:solidFill>
                   <a:srgbClr val="C9D3F5"/>
                 </a:solidFill>
@@ -18305,9 +18947,9 @@
                 <a:ea typeface="Courier New" pitchFamily="34" charset="-122"/>
                 <a:cs typeface="Courier New" pitchFamily="34" charset="-120"/>
               </a:rPr>
-              <a:t>  background-size: cover;</a:t>
-            </a:r>
-            <a:endParaRPr lang="en-US" sz="1400" dirty="0"/>
+              <a:t>  letter-spacing: 0.5px;</a:t>
+            </a:r>
+            <a:endParaRPr lang="en-US" sz="1250" dirty="0"/>
           </a:p>
           <a:p>
             <a:pPr indent="0" marL="0">
@@ -18317,7 +18959,7 @@
               <a:buNone/>
             </a:pPr>
             <a:r>
-              <a:rPr lang="en-US" sz="1400" dirty="0">
+              <a:rPr lang="en-US" sz="1250" dirty="0">
                 <a:solidFill>
                   <a:srgbClr val="C9D3F5"/>
                 </a:solidFill>
@@ -18327,20 +18969,78 @@
               </a:rPr>
               <a:t>}</a:t>
             </a:r>
-            <a:endParaRPr lang="en-US" sz="1400" dirty="0"/>
-          </a:p>
-        </p:txBody>
-      </p:sp>
-      <p:sp>
-        <p:nvSpPr>
-          <p:cNvPr id="6" name="Text 4"/>
+            <a:endParaRPr lang="en-US" sz="1250" dirty="0"/>
+          </a:p>
+        </p:txBody>
+      </p:sp>
+      <p:sp>
+        <p:nvSpPr>
+          <p:cNvPr id="6" name="Shape 4"/>
+          <p:cNvSpPr/>
+          <p:nvPr/>
+        </p:nvSpPr>
+        <p:spPr>
+          <a:xfrm>
+            <a:off x="530352" y="4346067"/>
+            <a:ext cx="11130991" cy="1981581"/>
+          </a:xfrm>
+          <a:prstGeom prst="roundRect">
+            <a:avLst>
+              <a:gd name="adj" fmla="val 2769"/>
+            </a:avLst>
+          </a:prstGeom>
+          <a:solidFill>
+            <a:srgbClr val="FFFFFF"/>
+          </a:solidFill>
+          <a:ln w="12700">
+            <a:solidFill>
+              <a:srgbClr val="E2E2EE"/>
+            </a:solidFill>
+            <a:prstDash val="solid"/>
+          </a:ln>
+          <a:effectLst>
+            <a:outerShdw sx="100000" sy="100000" kx="0" ky="0" algn="bl" rotWithShape="0" blurRad="101600" dist="38100" dir="5400000">
+              <a:srgbClr val="000000">
+                <a:alpha val="12000"/>
+              </a:srgbClr>
+            </a:outerShdw>
+          </a:effectLst>
+        </p:spPr>
+      </p:sp>
+      <p:pic>
+        <p:nvPicPr>
+          <p:cNvPr id="7" name="Image 0" descr="D:/GitHub/mern-web-book/docs/assets/img/lecture-05/text-properties.png">    </p:cNvPr>
+          <p:cNvPicPr>
+            <a:picLocks noChangeAspect="1"/>
+          </p:cNvPicPr>
+          <p:nvPr/>
+        </p:nvPicPr>
+        <p:blipFill>
+          <a:blip r:embed="rId1"/>
+          <a:stretch>
+            <a:fillRect/>
+          </a:stretch>
+        </p:blipFill>
+        <p:spPr>
+          <a:xfrm>
+            <a:off x="1700435" y="4455795"/>
+            <a:ext cx="8790826" cy="1762125"/>
+          </a:xfrm>
+          <a:prstGeom prst="rect">
+            <a:avLst/>
+          </a:prstGeom>
+        </p:spPr>
+      </p:pic>
+      <p:sp>
+        <p:nvSpPr>
+          <p:cNvPr id="8" name="Text 5"/>
           <p:cNvSpPr txBox="1"/>
           <p:nvPr/>
         </p:nvSpPr>
         <p:spPr>
           <a:xfrm>
-            <a:off x="640080" y="4610100"/>
-            <a:ext cx="10911535" cy="1653540"/>
+            <a:off x="640080" y="6446520"/>
+            <a:ext cx="8686800" cy="292608"/>
           </a:xfrm>
           <a:prstGeom prst="rect">
             <a:avLst/>
@@ -18349,60 +19049,21 @@
           <a:ln/>
         </p:spPr>
         <p:txBody>
-          <a:bodyPr wrap="square" lIns="0" tIns="0" rIns="0" bIns="0" rtlCol="0" anchor="t"/>
-          <a:lstStyle/>
-          <a:p>
-            <a:pPr indent="0" marL="0">
-              <a:buNone/>
-            </a:pPr>
-            <a:r>
-              <a:rPr lang="en-US" sz="1300" dirty="0">
-                <a:solidFill>
-                  <a:srgbClr val="26262F"/>
+          <a:bodyPr wrap="square" lIns="0" tIns="0" rIns="0" bIns="0" rtlCol="0" anchor="ctr"/>
+          <a:lstStyle/>
+          <a:p>
+            <a:pPr algn="l" indent="0" marL="0">
+              <a:buNone/>
+            </a:pPr>
+            <a:r>
+              <a:rPr lang="en-US" sz="900" dirty="0">
+                <a:solidFill>
+                  <a:srgbClr val="5D5D72"/>
                 </a:solidFill>
                 <a:latin typeface="Calibri" pitchFamily="34" charset="0"/>
                 <a:ea typeface="Calibri" pitchFamily="34" charset="-122"/>
                 <a:cs typeface="Calibri" pitchFamily="34" charset="-120"/>
               </a:rPr>
-              <a:t>A background shorthand combines several of these into one declaration, just like font does.</a:t>
-            </a:r>
-            <a:endParaRPr lang="en-US" sz="1300" dirty="0"/>
-          </a:p>
-        </p:txBody>
-      </p:sp>
-      <p:sp>
-        <p:nvSpPr>
-          <p:cNvPr id="7" name="Text 5"/>
-          <p:cNvSpPr txBox="1"/>
-          <p:nvPr/>
-        </p:nvSpPr>
-        <p:spPr>
-          <a:xfrm>
-            <a:off x="640080" y="6446520"/>
-            <a:ext cx="8686800" cy="292608"/>
-          </a:xfrm>
-          <a:prstGeom prst="rect">
-            <a:avLst/>
-          </a:prstGeom>
-          <a:noFill/>
-          <a:ln/>
-        </p:spPr>
-        <p:txBody>
-          <a:bodyPr wrap="square" lIns="0" tIns="0" rIns="0" bIns="0" rtlCol="0" anchor="ctr"/>
-          <a:lstStyle/>
-          <a:p>
-            <a:pPr algn="l" indent="0" marL="0">
-              <a:buNone/>
-            </a:pPr>
-            <a:r>
-              <a:rPr lang="en-US" sz="900" dirty="0">
-                <a:solidFill>
-                  <a:srgbClr val="5D5D72"/>
-                </a:solidFill>
-                <a:latin typeface="Calibri" pitchFamily="34" charset="0"/>
-                <a:ea typeface="Calibri" pitchFamily="34" charset="-122"/>
-                <a:cs typeface="Calibri" pitchFamily="34" charset="-120"/>
-              </a:rPr>
               <a:t>Usman Akram  •  COMSATS University Islamabad</a:t>
             </a:r>
             <a:endParaRPr lang="en-US" sz="900" dirty="0"/>
@@ -18411,7 +19072,7 @@
       </p:sp>
       <p:sp>
         <p:nvSpPr>
-          <p:cNvPr id="8" name="Text 6"/>
+          <p:cNvPr id="9" name="Text 6"/>
           <p:cNvSpPr txBox="1"/>
           <p:nvPr/>
         </p:nvSpPr>
@@ -18459,6 +19120,417 @@
 <file path=ppt/slides/slide33.xml><?xml version="1.0" encoding="utf-8"?>
 <p:sld xmlns:a="http://schemas.openxmlformats.org/drawingml/2006/main" xmlns:r="http://schemas.openxmlformats.org/officeDocument/2006/relationships" xmlns:p="http://schemas.openxmlformats.org/presentationml/2006/main">
   <p:cSld name="Slide 33">
+    <p:bg>
+      <p:bgPr>
+        <a:solidFill>
+          <a:srgbClr val="FFFFFF"/>
+        </a:solidFill>
+      </p:bgPr>
+    </p:bg>
+    <p:spTree>
+      <p:nvGrpSpPr>
+        <p:cNvPr id="1" name=""/>
+        <p:cNvGrpSpPr/>
+        <p:nvPr/>
+      </p:nvGrpSpPr>
+      <p:grpSpPr>
+        <a:xfrm>
+          <a:off x="0" y="0"/>
+          <a:ext cx="0" cy="0"/>
+          <a:chOff x="0" y="0"/>
+          <a:chExt cx="0" cy="0"/>
+        </a:xfrm>
+      </p:grpSpPr>
+      <p:sp>
+        <p:nvSpPr>
+          <p:cNvPr id="2" name="Text 0"/>
+          <p:cNvSpPr txBox="1"/>
+          <p:nvPr/>
+        </p:nvSpPr>
+        <p:spPr>
+          <a:xfrm>
+            <a:off x="640080" y="457200"/>
+            <a:ext cx="10058400" cy="365760"/>
+          </a:xfrm>
+          <a:prstGeom prst="rect">
+            <a:avLst/>
+          </a:prstGeom>
+          <a:noFill/>
+          <a:ln/>
+        </p:spPr>
+        <p:txBody>
+          <a:bodyPr wrap="square" lIns="0" tIns="0" rIns="0" bIns="0" rtlCol="0" anchor="ctr"/>
+          <a:lstStyle/>
+          <a:p>
+            <a:pPr algn="l" indent="0" marL="0">
+              <a:buNone/>
+            </a:pPr>
+            <a:r>
+              <a:rPr lang="en-US" sz="1300" b="1" spc="300" kern="0" dirty="0">
+                <a:solidFill>
+                  <a:srgbClr val="FF8A3D"/>
+                </a:solidFill>
+                <a:latin typeface="Calibri" pitchFamily="34" charset="0"/>
+                <a:ea typeface="Calibri" pitchFamily="34" charset="-122"/>
+                <a:cs typeface="Calibri" pitchFamily="34" charset="-120"/>
+              </a:rPr>
+              <a:t>BACKGROUNDS</a:t>
+            </a:r>
+            <a:endParaRPr lang="en-US" sz="1300" dirty="0"/>
+          </a:p>
+        </p:txBody>
+      </p:sp>
+      <p:sp>
+        <p:nvSpPr>
+          <p:cNvPr id="3" name="Text 1"/>
+          <p:cNvSpPr txBox="1"/>
+          <p:nvPr/>
+        </p:nvSpPr>
+        <p:spPr>
+          <a:xfrm>
+            <a:off x="640080" y="841248"/>
+            <a:ext cx="10881360" cy="914400"/>
+          </a:xfrm>
+          <a:prstGeom prst="rect">
+            <a:avLst/>
+          </a:prstGeom>
+          <a:noFill/>
+          <a:ln/>
+        </p:spPr>
+        <p:txBody>
+          <a:bodyPr wrap="square" lIns="0" tIns="0" rIns="0" bIns="0" rtlCol="0" anchor="ctr"/>
+          <a:lstStyle/>
+          <a:p>
+            <a:pPr algn="l" indent="0" marL="0">
+              <a:buNone/>
+            </a:pPr>
+            <a:r>
+              <a:rPr lang="en-US" sz="3400" b="1" dirty="0">
+                <a:solidFill>
+                  <a:srgbClr val="2B2B7A"/>
+                </a:solidFill>
+                <a:latin typeface="Cambria" pitchFamily="34" charset="0"/>
+                <a:ea typeface="Cambria" pitchFamily="34" charset="-122"/>
+                <a:cs typeface="Cambria" pitchFamily="34" charset="-120"/>
+              </a:rPr>
+              <a:t>Background Properties</a:t>
+            </a:r>
+            <a:endParaRPr lang="en-US" sz="3400" dirty="0"/>
+          </a:p>
+        </p:txBody>
+      </p:sp>
+      <p:sp>
+        <p:nvSpPr>
+          <p:cNvPr id="4" name="Shape 2"/>
+          <p:cNvSpPr/>
+          <p:nvPr/>
+        </p:nvSpPr>
+        <p:spPr>
+          <a:xfrm>
+            <a:off x="640080" y="1965960"/>
+            <a:ext cx="10911535" cy="2415540"/>
+          </a:xfrm>
+          <a:prstGeom prst="roundRect">
+            <a:avLst>
+              <a:gd name="adj" fmla="val 3028"/>
+            </a:avLst>
+          </a:prstGeom>
+          <a:solidFill>
+            <a:srgbClr val="1E1E4C"/>
+          </a:solidFill>
+          <a:ln/>
+        </p:spPr>
+      </p:sp>
+      <p:sp>
+        <p:nvSpPr>
+          <p:cNvPr id="5" name="Text 3"/>
+          <p:cNvSpPr txBox="1"/>
+          <p:nvPr/>
+        </p:nvSpPr>
+        <p:spPr>
+          <a:xfrm>
+            <a:off x="960120" y="2194560"/>
+            <a:ext cx="10271455" cy="1958340"/>
+          </a:xfrm>
+          <a:prstGeom prst="rect">
+            <a:avLst/>
+          </a:prstGeom>
+          <a:noFill/>
+          <a:ln/>
+        </p:spPr>
+        <p:txBody>
+          <a:bodyPr wrap="square" lIns="0" tIns="0" rIns="0" bIns="0" rtlCol="0" anchor="t"/>
+          <a:lstStyle/>
+          <a:p>
+            <a:pPr indent="0" marL="0">
+              <a:lnSpc>
+                <a:spcPct val="125000"/>
+              </a:lnSpc>
+              <a:buNone/>
+            </a:pPr>
+            <a:r>
+              <a:rPr lang="en-US" sz="1400" dirty="0">
+                <a:solidFill>
+                  <a:srgbClr val="C9D3F5"/>
+                </a:solidFill>
+                <a:latin typeface="Courier New" pitchFamily="34" charset="0"/>
+                <a:ea typeface="Courier New" pitchFamily="34" charset="-122"/>
+                <a:cs typeface="Courier New" pitchFamily="34" charset="-120"/>
+              </a:rPr>
+              <a:t>.card {</a:t>
+            </a:r>
+            <a:endParaRPr lang="en-US" sz="1400" dirty="0"/>
+          </a:p>
+          <a:p>
+            <a:pPr indent="0" marL="0">
+              <a:lnSpc>
+                <a:spcPct val="125000"/>
+              </a:lnSpc>
+              <a:buNone/>
+            </a:pPr>
+            <a:r>
+              <a:rPr lang="en-US" sz="1400" dirty="0">
+                <a:solidFill>
+                  <a:srgbClr val="C9D3F5"/>
+                </a:solidFill>
+                <a:latin typeface="Courier New" pitchFamily="34" charset="0"/>
+                <a:ea typeface="Courier New" pitchFamily="34" charset="-122"/>
+                <a:cs typeface="Courier New" pitchFamily="34" charset="-120"/>
+              </a:rPr>
+              <a:t>  background-color: #f5f5f5;</a:t>
+            </a:r>
+            <a:endParaRPr lang="en-US" sz="1400" dirty="0"/>
+          </a:p>
+          <a:p>
+            <a:pPr indent="0" marL="0">
+              <a:lnSpc>
+                <a:spcPct val="125000"/>
+              </a:lnSpc>
+              <a:buNone/>
+            </a:pPr>
+            <a:r>
+              <a:rPr lang="en-US" sz="1400" dirty="0">
+                <a:solidFill>
+                  <a:srgbClr val="C9D3F5"/>
+                </a:solidFill>
+                <a:latin typeface="Courier New" pitchFamily="34" charset="0"/>
+                <a:ea typeface="Courier New" pitchFamily="34" charset="-122"/>
+                <a:cs typeface="Courier New" pitchFamily="34" charset="-120"/>
+              </a:rPr>
+              <a:t>  background-image: url("pattern.png");</a:t>
+            </a:r>
+            <a:endParaRPr lang="en-US" sz="1400" dirty="0"/>
+          </a:p>
+          <a:p>
+            <a:pPr indent="0" marL="0">
+              <a:lnSpc>
+                <a:spcPct val="125000"/>
+              </a:lnSpc>
+              <a:buNone/>
+            </a:pPr>
+            <a:r>
+              <a:rPr lang="en-US" sz="1400" dirty="0">
+                <a:solidFill>
+                  <a:srgbClr val="C9D3F5"/>
+                </a:solidFill>
+                <a:latin typeface="Courier New" pitchFamily="34" charset="0"/>
+                <a:ea typeface="Courier New" pitchFamily="34" charset="-122"/>
+                <a:cs typeface="Courier New" pitchFamily="34" charset="-120"/>
+              </a:rPr>
+              <a:t>  background-repeat: no-repeat;</a:t>
+            </a:r>
+            <a:endParaRPr lang="en-US" sz="1400" dirty="0"/>
+          </a:p>
+          <a:p>
+            <a:pPr indent="0" marL="0">
+              <a:lnSpc>
+                <a:spcPct val="125000"/>
+              </a:lnSpc>
+              <a:buNone/>
+            </a:pPr>
+            <a:r>
+              <a:rPr lang="en-US" sz="1400" dirty="0">
+                <a:solidFill>
+                  <a:srgbClr val="C9D3F5"/>
+                </a:solidFill>
+                <a:latin typeface="Courier New" pitchFamily="34" charset="0"/>
+                <a:ea typeface="Courier New" pitchFamily="34" charset="-122"/>
+                <a:cs typeface="Courier New" pitchFamily="34" charset="-120"/>
+              </a:rPr>
+              <a:t>  background-position: center;</a:t>
+            </a:r>
+            <a:endParaRPr lang="en-US" sz="1400" dirty="0"/>
+          </a:p>
+          <a:p>
+            <a:pPr indent="0" marL="0">
+              <a:lnSpc>
+                <a:spcPct val="125000"/>
+              </a:lnSpc>
+              <a:buNone/>
+            </a:pPr>
+            <a:r>
+              <a:rPr lang="en-US" sz="1400" dirty="0">
+                <a:solidFill>
+                  <a:srgbClr val="C9D3F5"/>
+                </a:solidFill>
+                <a:latin typeface="Courier New" pitchFamily="34" charset="0"/>
+                <a:ea typeface="Courier New" pitchFamily="34" charset="-122"/>
+                <a:cs typeface="Courier New" pitchFamily="34" charset="-120"/>
+              </a:rPr>
+              <a:t>  background-size: cover;</a:t>
+            </a:r>
+            <a:endParaRPr lang="en-US" sz="1400" dirty="0"/>
+          </a:p>
+          <a:p>
+            <a:pPr indent="0" marL="0">
+              <a:lnSpc>
+                <a:spcPct val="125000"/>
+              </a:lnSpc>
+              <a:buNone/>
+            </a:pPr>
+            <a:r>
+              <a:rPr lang="en-US" sz="1400" dirty="0">
+                <a:solidFill>
+                  <a:srgbClr val="C9D3F5"/>
+                </a:solidFill>
+                <a:latin typeface="Courier New" pitchFamily="34" charset="0"/>
+                <a:ea typeface="Courier New" pitchFamily="34" charset="-122"/>
+                <a:cs typeface="Courier New" pitchFamily="34" charset="-120"/>
+              </a:rPr>
+              <a:t>}</a:t>
+            </a:r>
+            <a:endParaRPr lang="en-US" sz="1400" dirty="0"/>
+          </a:p>
+        </p:txBody>
+      </p:sp>
+      <p:sp>
+        <p:nvSpPr>
+          <p:cNvPr id="6" name="Text 4"/>
+          <p:cNvSpPr txBox="1"/>
+          <p:nvPr/>
+        </p:nvSpPr>
+        <p:spPr>
+          <a:xfrm>
+            <a:off x="640080" y="4610100"/>
+            <a:ext cx="10911535" cy="1653540"/>
+          </a:xfrm>
+          <a:prstGeom prst="rect">
+            <a:avLst/>
+          </a:prstGeom>
+          <a:noFill/>
+          <a:ln/>
+        </p:spPr>
+        <p:txBody>
+          <a:bodyPr wrap="square" lIns="0" tIns="0" rIns="0" bIns="0" rtlCol="0" anchor="t"/>
+          <a:lstStyle/>
+          <a:p>
+            <a:pPr indent="0" marL="0">
+              <a:buNone/>
+            </a:pPr>
+            <a:r>
+              <a:rPr lang="en-US" sz="1300" dirty="0">
+                <a:solidFill>
+                  <a:srgbClr val="26262F"/>
+                </a:solidFill>
+                <a:latin typeface="Calibri" pitchFamily="34" charset="0"/>
+                <a:ea typeface="Calibri" pitchFamily="34" charset="-122"/>
+                <a:cs typeface="Calibri" pitchFamily="34" charset="-120"/>
+              </a:rPr>
+              <a:t>A background shorthand combines several of these into one declaration, just like font does.</a:t>
+            </a:r>
+            <a:endParaRPr lang="en-US" sz="1300" dirty="0"/>
+          </a:p>
+        </p:txBody>
+      </p:sp>
+      <p:sp>
+        <p:nvSpPr>
+          <p:cNvPr id="7" name="Text 5"/>
+          <p:cNvSpPr txBox="1"/>
+          <p:nvPr/>
+        </p:nvSpPr>
+        <p:spPr>
+          <a:xfrm>
+            <a:off x="640080" y="6446520"/>
+            <a:ext cx="8686800" cy="292608"/>
+          </a:xfrm>
+          <a:prstGeom prst="rect">
+            <a:avLst/>
+          </a:prstGeom>
+          <a:noFill/>
+          <a:ln/>
+        </p:spPr>
+        <p:txBody>
+          <a:bodyPr wrap="square" lIns="0" tIns="0" rIns="0" bIns="0" rtlCol="0" anchor="ctr"/>
+          <a:lstStyle/>
+          <a:p>
+            <a:pPr algn="l" indent="0" marL="0">
+              <a:buNone/>
+            </a:pPr>
+            <a:r>
+              <a:rPr lang="en-US" sz="900" dirty="0">
+                <a:solidFill>
+                  <a:srgbClr val="5D5D72"/>
+                </a:solidFill>
+                <a:latin typeface="Calibri" pitchFamily="34" charset="0"/>
+                <a:ea typeface="Calibri" pitchFamily="34" charset="-122"/>
+                <a:cs typeface="Calibri" pitchFamily="34" charset="-120"/>
+              </a:rPr>
+              <a:t>Usman Akram  •  COMSATS University Islamabad</a:t>
+            </a:r>
+            <a:endParaRPr lang="en-US" sz="900" dirty="0"/>
+          </a:p>
+        </p:txBody>
+      </p:sp>
+      <p:sp>
+        <p:nvSpPr>
+          <p:cNvPr id="8" name="Text 6"/>
+          <p:cNvSpPr txBox="1"/>
+          <p:nvPr/>
+        </p:nvSpPr>
+        <p:spPr>
+          <a:xfrm>
+            <a:off x="11155680" y="6446520"/>
+            <a:ext cx="457200" cy="292608"/>
+          </a:xfrm>
+          <a:prstGeom prst="rect">
+            <a:avLst/>
+          </a:prstGeom>
+          <a:noFill/>
+          <a:ln/>
+        </p:spPr>
+        <p:txBody>
+          <a:bodyPr wrap="square" lIns="0" tIns="0" rIns="0" bIns="0" rtlCol="0" anchor="ctr"/>
+          <a:lstStyle/>
+          <a:p>
+            <a:pPr algn="r" indent="0" marL="0">
+              <a:buNone/>
+            </a:pPr>
+            <a:r>
+              <a:rPr lang="en-US" sz="900" dirty="0">
+                <a:solidFill>
+                  <a:srgbClr val="5D5D72"/>
+                </a:solidFill>
+                <a:latin typeface="Calibri" pitchFamily="34" charset="0"/>
+                <a:ea typeface="Calibri" pitchFamily="34" charset="-122"/>
+                <a:cs typeface="Calibri" pitchFamily="34" charset="-120"/>
+              </a:rPr>
+              <a:t>33</a:t>
+            </a:r>
+            <a:endParaRPr lang="en-US" sz="900" dirty="0"/>
+          </a:p>
+        </p:txBody>
+      </p:sp>
+    </p:spTree>
+  </p:cSld>
+  <p:clrMapOvr>
+    <a:masterClrMapping/>
+  </p:clrMapOvr>
+</p:sld>
+</file>
+
+<file path=ppt/slides/slide34.xml><?xml version="1.0" encoding="utf-8"?>
+<p:sld xmlns:a="http://schemas.openxmlformats.org/drawingml/2006/main" xmlns:r="http://schemas.openxmlformats.org/officeDocument/2006/relationships" xmlns:p="http://schemas.openxmlformats.org/presentationml/2006/main">
+  <p:cSld name="Slide 34">
     <p:bg>
       <p:bgPr>
         <a:solidFill>
@@ -19218,7 +20290,7 @@
                 <a:ea typeface="Calibri" pitchFamily="34" charset="-122"/>
                 <a:cs typeface="Calibri" pitchFamily="34" charset="-120"/>
               </a:rPr>
-              <a:t>33</a:t>
+              <a:t>34</a:t>
             </a:r>
             <a:endParaRPr lang="en-US" sz="900" dirty="0"/>
           </a:p>

--- a/slides/CSC336-Lecture-05-CSS-Fundamentals.pptx
+++ b/slides/CSC336-Lecture-05-CSS-Fundamentals.pptx
@@ -3993,79 +3993,44 @@
       </p:sp>
       <p:sp>
         <p:nvSpPr>
-          <p:cNvPr id="6" name="Text 4"/>
+          <p:cNvPr id="8" name="cuinotes-footer-mark"/>
           <p:cNvSpPr txBox="1"/>
           <p:nvPr/>
         </p:nvSpPr>
         <p:spPr>
           <a:xfrm>
-            <a:off x="640080" y="6446520"/>
-            <a:ext cx="8686800" cy="292608"/>
+            <a:off x="9951720" y="6455664"/>
+            <a:ext cx="2011680" cy="292608"/>
           </a:xfrm>
           <a:prstGeom prst="rect">
             <a:avLst/>
           </a:prstGeom>
           <a:noFill/>
-          <a:ln/>
-        </p:spPr>
-        <p:txBody>
-          <a:bodyPr wrap="square" lIns="0" tIns="0" rIns="0" bIns="0" rtlCol="0" anchor="ctr"/>
-          <a:lstStyle/>
-          <a:p>
-            <a:pPr algn="l" indent="0" marL="0">
-              <a:buNone/>
-            </a:pPr>
-            <a:r>
-              <a:rPr lang="en-US" sz="900" dirty="0">
-                <a:solidFill>
-                  <a:srgbClr val="9AA3D8"/>
-                </a:solidFill>
-                <a:latin typeface="Calibri" pitchFamily="34" charset="0"/>
-                <a:ea typeface="Calibri" pitchFamily="34" charset="-122"/>
-                <a:cs typeface="Calibri" pitchFamily="34" charset="-120"/>
-              </a:rPr>
-              <a:t>Usman Akram  •  COMSATS University Islamabad</a:t>
-            </a:r>
-            <a:endParaRPr lang="en-US" sz="900" dirty="0"/>
-          </a:p>
-        </p:txBody>
-      </p:sp>
-      <p:sp>
-        <p:nvSpPr>
-          <p:cNvPr id="7" name="Text 5"/>
-          <p:cNvSpPr txBox="1"/>
-          <p:nvPr/>
-        </p:nvSpPr>
-        <p:spPr>
-          <a:xfrm>
-            <a:off x="11155680" y="6446520"/>
-            <a:ext cx="457200" cy="292608"/>
-          </a:xfrm>
-          <a:prstGeom prst="rect">
-            <a:avLst/>
-          </a:prstGeom>
-          <a:noFill/>
-          <a:ln/>
-        </p:spPr>
-        <p:txBody>
-          <a:bodyPr wrap="square" lIns="0" tIns="0" rIns="0" bIns="0" rtlCol="0" anchor="ctr"/>
-          <a:lstStyle/>
-          <a:p>
-            <a:pPr algn="r" indent="0" marL="0">
-              <a:buNone/>
-            </a:pPr>
-            <a:r>
-              <a:rPr lang="en-US" sz="900" dirty="0">
-                <a:solidFill>
-                  <a:srgbClr val="9AA3D8"/>
-                </a:solidFill>
-                <a:latin typeface="Calibri" pitchFamily="34" charset="0"/>
-                <a:ea typeface="Calibri" pitchFamily="34" charset="-122"/>
-                <a:cs typeface="Calibri" pitchFamily="34" charset="-120"/>
-              </a:rPr>
-              <a:t>1</a:t>
-            </a:r>
-            <a:endParaRPr lang="en-US" sz="900" dirty="0"/>
+        </p:spPr>
+        <p:txBody>
+          <a:bodyPr wrap="none" lIns="0" rIns="0" tIns="0" bIns="0">
+            <a:spAutoFit/>
+          </a:bodyPr>
+          <a:lstStyle/>
+          <a:p>
+            <a:pPr algn="r"/>
+            <a:r>
+              <a:rPr sz="1000">
+                <a:solidFill>
+                  <a:srgbClr val="8A939B"/>
+                </a:solidFill>
+                <a:hlinkClick r:id="rId3"/>
+              </a:rPr>
+              <a:t>cuinotes.com</a:t>
+            </a:r>
+            <a:r>
+              <a:rPr sz="1000">
+                <a:solidFill>
+                  <a:srgbClr val="8A939B"/>
+                </a:solidFill>
+              </a:rPr>
+              <a:t>  ·  1</a:t>
+            </a:r>
           </a:p>
         </p:txBody>
       </p:sp>
@@ -4200,6 +4165,10 @@
           </a:solidFill>
           <a:ln/>
         </p:spPr>
+        <p:txBody>
+          <a:bodyPr/>
+          <a:p/>
+        </p:txBody>
       </p:sp>
       <p:sp>
         <p:nvSpPr>
@@ -4365,6 +4334,10 @@
             </a:outerShdw>
           </a:effectLst>
         </p:spPr>
+        <p:txBody>
+          <a:bodyPr/>
+          <a:p/>
+        </p:txBody>
       </p:sp>
       <p:pic>
         <p:nvPicPr>
@@ -4392,79 +4365,44 @@
       </p:pic>
       <p:sp>
         <p:nvSpPr>
-          <p:cNvPr id="8" name="Text 5"/>
+          <p:cNvPr id="10" name="cuinotes-footer-mark"/>
           <p:cNvSpPr txBox="1"/>
           <p:nvPr/>
         </p:nvSpPr>
         <p:spPr>
           <a:xfrm>
-            <a:off x="640080" y="6446520"/>
-            <a:ext cx="8686800" cy="292608"/>
+            <a:off x="9951720" y="6455664"/>
+            <a:ext cx="2011680" cy="292608"/>
           </a:xfrm>
           <a:prstGeom prst="rect">
             <a:avLst/>
           </a:prstGeom>
           <a:noFill/>
-          <a:ln/>
-        </p:spPr>
-        <p:txBody>
-          <a:bodyPr wrap="square" lIns="0" tIns="0" rIns="0" bIns="0" rtlCol="0" anchor="ctr"/>
-          <a:lstStyle/>
-          <a:p>
-            <a:pPr algn="l" indent="0" marL="0">
-              <a:buNone/>
-            </a:pPr>
-            <a:r>
-              <a:rPr lang="en-US" sz="900" dirty="0">
-                <a:solidFill>
-                  <a:srgbClr val="5D5D72"/>
-                </a:solidFill>
-                <a:latin typeface="Calibri" pitchFamily="34" charset="0"/>
-                <a:ea typeface="Calibri" pitchFamily="34" charset="-122"/>
-                <a:cs typeface="Calibri" pitchFamily="34" charset="-120"/>
-              </a:rPr>
-              <a:t>Usman Akram  •  COMSATS University Islamabad</a:t>
-            </a:r>
-            <a:endParaRPr lang="en-US" sz="900" dirty="0"/>
-          </a:p>
-        </p:txBody>
-      </p:sp>
-      <p:sp>
-        <p:nvSpPr>
-          <p:cNvPr id="9" name="Text 6"/>
-          <p:cNvSpPr txBox="1"/>
-          <p:nvPr/>
-        </p:nvSpPr>
-        <p:spPr>
-          <a:xfrm>
-            <a:off x="11155680" y="6446520"/>
-            <a:ext cx="457200" cy="292608"/>
-          </a:xfrm>
-          <a:prstGeom prst="rect">
-            <a:avLst/>
-          </a:prstGeom>
-          <a:noFill/>
-          <a:ln/>
-        </p:spPr>
-        <p:txBody>
-          <a:bodyPr wrap="square" lIns="0" tIns="0" rIns="0" bIns="0" rtlCol="0" anchor="ctr"/>
-          <a:lstStyle/>
-          <a:p>
-            <a:pPr algn="r" indent="0" marL="0">
-              <a:buNone/>
-            </a:pPr>
-            <a:r>
-              <a:rPr lang="en-US" sz="900" dirty="0">
-                <a:solidFill>
-                  <a:srgbClr val="5D5D72"/>
-                </a:solidFill>
-                <a:latin typeface="Calibri" pitchFamily="34" charset="0"/>
-                <a:ea typeface="Calibri" pitchFamily="34" charset="-122"/>
-                <a:cs typeface="Calibri" pitchFamily="34" charset="-120"/>
-              </a:rPr>
-              <a:t>10</a:t>
-            </a:r>
-            <a:endParaRPr lang="en-US" sz="900" dirty="0"/>
+        </p:spPr>
+        <p:txBody>
+          <a:bodyPr wrap="none" lIns="0" rIns="0" tIns="0" bIns="0">
+            <a:spAutoFit/>
+          </a:bodyPr>
+          <a:lstStyle/>
+          <a:p>
+            <a:pPr algn="r"/>
+            <a:r>
+              <a:rPr sz="1000">
+                <a:solidFill>
+                  <a:srgbClr val="8A939B"/>
+                </a:solidFill>
+                <a:hlinkClick r:id="rId4"/>
+              </a:rPr>
+              <a:t>cuinotes.com</a:t>
+            </a:r>
+            <a:r>
+              <a:rPr sz="1000">
+                <a:solidFill>
+                  <a:srgbClr val="8A939B"/>
+                </a:solidFill>
+              </a:rPr>
+              <a:t>  ·  10</a:t>
+            </a:r>
           </a:p>
         </p:txBody>
       </p:sp>
@@ -4604,6 +4542,10 @@
             <a:prstDash val="solid"/>
           </a:ln>
         </p:spPr>
+        <p:txBody>
+          <a:bodyPr/>
+          <a:p/>
+        </p:txBody>
       </p:sp>
       <p:sp>
         <p:nvSpPr>
@@ -4685,79 +4627,44 @@
       </p:sp>
       <p:sp>
         <p:nvSpPr>
-          <p:cNvPr id="7" name="Text 5"/>
+          <p:cNvPr id="9" name="cuinotes-footer-mark"/>
           <p:cNvSpPr txBox="1"/>
           <p:nvPr/>
         </p:nvSpPr>
         <p:spPr>
           <a:xfrm>
-            <a:off x="640080" y="6446520"/>
-            <a:ext cx="8686800" cy="292608"/>
+            <a:off x="9951720" y="6455664"/>
+            <a:ext cx="2011680" cy="292608"/>
           </a:xfrm>
           <a:prstGeom prst="rect">
             <a:avLst/>
           </a:prstGeom>
           <a:noFill/>
-          <a:ln/>
-        </p:spPr>
-        <p:txBody>
-          <a:bodyPr wrap="square" lIns="0" tIns="0" rIns="0" bIns="0" rtlCol="0" anchor="ctr"/>
-          <a:lstStyle/>
-          <a:p>
-            <a:pPr algn="l" indent="0" marL="0">
-              <a:buNone/>
-            </a:pPr>
-            <a:r>
-              <a:rPr lang="en-US" sz="900" dirty="0">
-                <a:solidFill>
-                  <a:srgbClr val="5D5D72"/>
-                </a:solidFill>
-                <a:latin typeface="Calibri" pitchFamily="34" charset="0"/>
-                <a:ea typeface="Calibri" pitchFamily="34" charset="-122"/>
-                <a:cs typeface="Calibri" pitchFamily="34" charset="-120"/>
-              </a:rPr>
-              <a:t>Usman Akram  •  COMSATS University Islamabad</a:t>
-            </a:r>
-            <a:endParaRPr lang="en-US" sz="900" dirty="0"/>
-          </a:p>
-        </p:txBody>
-      </p:sp>
-      <p:sp>
-        <p:nvSpPr>
-          <p:cNvPr id="8" name="Text 6"/>
-          <p:cNvSpPr txBox="1"/>
-          <p:nvPr/>
-        </p:nvSpPr>
-        <p:spPr>
-          <a:xfrm>
-            <a:off x="11155680" y="6446520"/>
-            <a:ext cx="457200" cy="292608"/>
-          </a:xfrm>
-          <a:prstGeom prst="rect">
-            <a:avLst/>
-          </a:prstGeom>
-          <a:noFill/>
-          <a:ln/>
-        </p:spPr>
-        <p:txBody>
-          <a:bodyPr wrap="square" lIns="0" tIns="0" rIns="0" bIns="0" rtlCol="0" anchor="ctr"/>
-          <a:lstStyle/>
-          <a:p>
-            <a:pPr algn="r" indent="0" marL="0">
-              <a:buNone/>
-            </a:pPr>
-            <a:r>
-              <a:rPr lang="en-US" sz="900" dirty="0">
-                <a:solidFill>
-                  <a:srgbClr val="5D5D72"/>
-                </a:solidFill>
-                <a:latin typeface="Calibri" pitchFamily="34" charset="0"/>
-                <a:ea typeface="Calibri" pitchFamily="34" charset="-122"/>
-                <a:cs typeface="Calibri" pitchFamily="34" charset="-120"/>
-              </a:rPr>
-              <a:t>11</a:t>
-            </a:r>
-            <a:endParaRPr lang="en-US" sz="900" dirty="0"/>
+        </p:spPr>
+        <p:txBody>
+          <a:bodyPr wrap="none" lIns="0" rIns="0" tIns="0" bIns="0">
+            <a:spAutoFit/>
+          </a:bodyPr>
+          <a:lstStyle/>
+          <a:p>
+            <a:pPr algn="r"/>
+            <a:r>
+              <a:rPr sz="1000">
+                <a:solidFill>
+                  <a:srgbClr val="8A939B"/>
+                </a:solidFill>
+                <a:hlinkClick r:id="rId3"/>
+              </a:rPr>
+              <a:t>cuinotes.com</a:t>
+            </a:r>
+            <a:r>
+              <a:rPr sz="1000">
+                <a:solidFill>
+                  <a:srgbClr val="8A939B"/>
+                </a:solidFill>
+              </a:rPr>
+              <a:t>  ·  11</a:t>
+            </a:r>
           </a:p>
         </p:txBody>
       </p:sp>
@@ -4892,6 +4799,10 @@
           </a:solidFill>
           <a:ln/>
         </p:spPr>
+        <p:txBody>
+          <a:bodyPr/>
+          <a:p/>
+        </p:txBody>
       </p:sp>
       <p:sp>
         <p:nvSpPr>
@@ -5077,6 +4988,10 @@
             </a:outerShdw>
           </a:effectLst>
         </p:spPr>
+        <p:txBody>
+          <a:bodyPr/>
+          <a:p/>
+        </p:txBody>
       </p:sp>
       <p:pic>
         <p:nvPicPr>
@@ -5104,79 +5019,44 @@
       </p:pic>
       <p:sp>
         <p:nvSpPr>
-          <p:cNvPr id="8" name="Text 5"/>
+          <p:cNvPr id="10" name="cuinotes-footer-mark"/>
           <p:cNvSpPr txBox="1"/>
           <p:nvPr/>
         </p:nvSpPr>
         <p:spPr>
           <a:xfrm>
-            <a:off x="640080" y="6446520"/>
-            <a:ext cx="8686800" cy="292608"/>
+            <a:off x="9951720" y="6455664"/>
+            <a:ext cx="2011680" cy="292608"/>
           </a:xfrm>
           <a:prstGeom prst="rect">
             <a:avLst/>
           </a:prstGeom>
           <a:noFill/>
-          <a:ln/>
-        </p:spPr>
-        <p:txBody>
-          <a:bodyPr wrap="square" lIns="0" tIns="0" rIns="0" bIns="0" rtlCol="0" anchor="ctr"/>
-          <a:lstStyle/>
-          <a:p>
-            <a:pPr algn="l" indent="0" marL="0">
-              <a:buNone/>
-            </a:pPr>
-            <a:r>
-              <a:rPr lang="en-US" sz="900" dirty="0">
-                <a:solidFill>
-                  <a:srgbClr val="5D5D72"/>
-                </a:solidFill>
-                <a:latin typeface="Calibri" pitchFamily="34" charset="0"/>
-                <a:ea typeface="Calibri" pitchFamily="34" charset="-122"/>
-                <a:cs typeface="Calibri" pitchFamily="34" charset="-120"/>
-              </a:rPr>
-              <a:t>Usman Akram  •  COMSATS University Islamabad</a:t>
-            </a:r>
-            <a:endParaRPr lang="en-US" sz="900" dirty="0"/>
-          </a:p>
-        </p:txBody>
-      </p:sp>
-      <p:sp>
-        <p:nvSpPr>
-          <p:cNvPr id="9" name="Text 6"/>
-          <p:cNvSpPr txBox="1"/>
-          <p:nvPr/>
-        </p:nvSpPr>
-        <p:spPr>
-          <a:xfrm>
-            <a:off x="11155680" y="6446520"/>
-            <a:ext cx="457200" cy="292608"/>
-          </a:xfrm>
-          <a:prstGeom prst="rect">
-            <a:avLst/>
-          </a:prstGeom>
-          <a:noFill/>
-          <a:ln/>
-        </p:spPr>
-        <p:txBody>
-          <a:bodyPr wrap="square" lIns="0" tIns="0" rIns="0" bIns="0" rtlCol="0" anchor="ctr"/>
-          <a:lstStyle/>
-          <a:p>
-            <a:pPr algn="r" indent="0" marL="0">
-              <a:buNone/>
-            </a:pPr>
-            <a:r>
-              <a:rPr lang="en-US" sz="900" dirty="0">
-                <a:solidFill>
-                  <a:srgbClr val="5D5D72"/>
-                </a:solidFill>
-                <a:latin typeface="Calibri" pitchFamily="34" charset="0"/>
-                <a:ea typeface="Calibri" pitchFamily="34" charset="-122"/>
-                <a:cs typeface="Calibri" pitchFamily="34" charset="-120"/>
-              </a:rPr>
-              <a:t>12</a:t>
-            </a:r>
-            <a:endParaRPr lang="en-US" sz="900" dirty="0"/>
+        </p:spPr>
+        <p:txBody>
+          <a:bodyPr wrap="none" lIns="0" rIns="0" tIns="0" bIns="0">
+            <a:spAutoFit/>
+          </a:bodyPr>
+          <a:lstStyle/>
+          <a:p>
+            <a:pPr algn="r"/>
+            <a:r>
+              <a:rPr sz="1000">
+                <a:solidFill>
+                  <a:srgbClr val="8A939B"/>
+                </a:solidFill>
+                <a:hlinkClick r:id="rId4"/>
+              </a:rPr>
+              <a:t>cuinotes.com</a:t>
+            </a:r>
+            <a:r>
+              <a:rPr sz="1000">
+                <a:solidFill>
+                  <a:srgbClr val="8A939B"/>
+                </a:solidFill>
+              </a:rPr>
+              <a:t>  ·  12</a:t>
+            </a:r>
           </a:p>
         </p:txBody>
       </p:sp>
@@ -5311,6 +5191,10 @@
           </a:solidFill>
           <a:ln/>
         </p:spPr>
+        <p:txBody>
+          <a:bodyPr/>
+          <a:p/>
+        </p:txBody>
       </p:sp>
       <p:sp>
         <p:nvSpPr>
@@ -5447,6 +5331,10 @@
             </a:outerShdw>
           </a:effectLst>
         </p:spPr>
+        <p:txBody>
+          <a:bodyPr/>
+          <a:p/>
+        </p:txBody>
       </p:sp>
       <p:pic>
         <p:nvPicPr>
@@ -5474,79 +5362,44 @@
       </p:pic>
       <p:sp>
         <p:nvSpPr>
-          <p:cNvPr id="8" name="Text 5"/>
+          <p:cNvPr id="10" name="cuinotes-footer-mark"/>
           <p:cNvSpPr txBox="1"/>
           <p:nvPr/>
         </p:nvSpPr>
         <p:spPr>
           <a:xfrm>
-            <a:off x="640080" y="6446520"/>
-            <a:ext cx="8686800" cy="292608"/>
+            <a:off x="9951720" y="6455664"/>
+            <a:ext cx="2011680" cy="292608"/>
           </a:xfrm>
           <a:prstGeom prst="rect">
             <a:avLst/>
           </a:prstGeom>
           <a:noFill/>
-          <a:ln/>
-        </p:spPr>
-        <p:txBody>
-          <a:bodyPr wrap="square" lIns="0" tIns="0" rIns="0" bIns="0" rtlCol="0" anchor="ctr"/>
-          <a:lstStyle/>
-          <a:p>
-            <a:pPr algn="l" indent="0" marL="0">
-              <a:buNone/>
-            </a:pPr>
-            <a:r>
-              <a:rPr lang="en-US" sz="900" dirty="0">
-                <a:solidFill>
-                  <a:srgbClr val="5D5D72"/>
-                </a:solidFill>
-                <a:latin typeface="Calibri" pitchFamily="34" charset="0"/>
-                <a:ea typeface="Calibri" pitchFamily="34" charset="-122"/>
-                <a:cs typeface="Calibri" pitchFamily="34" charset="-120"/>
-              </a:rPr>
-              <a:t>Usman Akram  •  COMSATS University Islamabad</a:t>
-            </a:r>
-            <a:endParaRPr lang="en-US" sz="900" dirty="0"/>
-          </a:p>
-        </p:txBody>
-      </p:sp>
-      <p:sp>
-        <p:nvSpPr>
-          <p:cNvPr id="9" name="Text 6"/>
-          <p:cNvSpPr txBox="1"/>
-          <p:nvPr/>
-        </p:nvSpPr>
-        <p:spPr>
-          <a:xfrm>
-            <a:off x="11155680" y="6446520"/>
-            <a:ext cx="457200" cy="292608"/>
-          </a:xfrm>
-          <a:prstGeom prst="rect">
-            <a:avLst/>
-          </a:prstGeom>
-          <a:noFill/>
-          <a:ln/>
-        </p:spPr>
-        <p:txBody>
-          <a:bodyPr wrap="square" lIns="0" tIns="0" rIns="0" bIns="0" rtlCol="0" anchor="ctr"/>
-          <a:lstStyle/>
-          <a:p>
-            <a:pPr algn="r" indent="0" marL="0">
-              <a:buNone/>
-            </a:pPr>
-            <a:r>
-              <a:rPr lang="en-US" sz="900" dirty="0">
-                <a:solidFill>
-                  <a:srgbClr val="5D5D72"/>
-                </a:solidFill>
-                <a:latin typeface="Calibri" pitchFamily="34" charset="0"/>
-                <a:ea typeface="Calibri" pitchFamily="34" charset="-122"/>
-                <a:cs typeface="Calibri" pitchFamily="34" charset="-120"/>
-              </a:rPr>
-              <a:t>13</a:t>
-            </a:r>
-            <a:endParaRPr lang="en-US" sz="900" dirty="0"/>
+        </p:spPr>
+        <p:txBody>
+          <a:bodyPr wrap="none" lIns="0" rIns="0" tIns="0" bIns="0">
+            <a:spAutoFit/>
+          </a:bodyPr>
+          <a:lstStyle/>
+          <a:p>
+            <a:pPr algn="r"/>
+            <a:r>
+              <a:rPr sz="1000">
+                <a:solidFill>
+                  <a:srgbClr val="8A939B"/>
+                </a:solidFill>
+                <a:hlinkClick r:id="rId4"/>
+              </a:rPr>
+              <a:t>cuinotes.com</a:t>
+            </a:r>
+            <a:r>
+              <a:rPr sz="1000">
+                <a:solidFill>
+                  <a:srgbClr val="8A939B"/>
+                </a:solidFill>
+              </a:rPr>
+              <a:t>  ·  13</a:t>
+            </a:r>
           </a:p>
         </p:txBody>
       </p:sp>
@@ -5681,6 +5534,10 @@
           </a:solidFill>
           <a:ln/>
         </p:spPr>
+        <p:txBody>
+          <a:bodyPr/>
+          <a:p/>
+        </p:txBody>
       </p:sp>
       <p:sp>
         <p:nvSpPr>
@@ -5886,6 +5743,10 @@
             </a:outerShdw>
           </a:effectLst>
         </p:spPr>
+        <p:txBody>
+          <a:bodyPr/>
+          <a:p/>
+        </p:txBody>
       </p:sp>
       <p:pic>
         <p:nvPicPr>
@@ -5913,79 +5774,44 @@
       </p:pic>
       <p:sp>
         <p:nvSpPr>
-          <p:cNvPr id="8" name="Text 5"/>
+          <p:cNvPr id="10" name="cuinotes-footer-mark"/>
           <p:cNvSpPr txBox="1"/>
           <p:nvPr/>
         </p:nvSpPr>
         <p:spPr>
           <a:xfrm>
-            <a:off x="640080" y="6446520"/>
-            <a:ext cx="8686800" cy="292608"/>
+            <a:off x="9951720" y="6455664"/>
+            <a:ext cx="2011680" cy="292608"/>
           </a:xfrm>
           <a:prstGeom prst="rect">
             <a:avLst/>
           </a:prstGeom>
           <a:noFill/>
-          <a:ln/>
-        </p:spPr>
-        <p:txBody>
-          <a:bodyPr wrap="square" lIns="0" tIns="0" rIns="0" bIns="0" rtlCol="0" anchor="ctr"/>
-          <a:lstStyle/>
-          <a:p>
-            <a:pPr algn="l" indent="0" marL="0">
-              <a:buNone/>
-            </a:pPr>
-            <a:r>
-              <a:rPr lang="en-US" sz="900" dirty="0">
-                <a:solidFill>
-                  <a:srgbClr val="5D5D72"/>
-                </a:solidFill>
-                <a:latin typeface="Calibri" pitchFamily="34" charset="0"/>
-                <a:ea typeface="Calibri" pitchFamily="34" charset="-122"/>
-                <a:cs typeface="Calibri" pitchFamily="34" charset="-120"/>
-              </a:rPr>
-              <a:t>Usman Akram  •  COMSATS University Islamabad</a:t>
-            </a:r>
-            <a:endParaRPr lang="en-US" sz="900" dirty="0"/>
-          </a:p>
-        </p:txBody>
-      </p:sp>
-      <p:sp>
-        <p:nvSpPr>
-          <p:cNvPr id="9" name="Text 6"/>
-          <p:cNvSpPr txBox="1"/>
-          <p:nvPr/>
-        </p:nvSpPr>
-        <p:spPr>
-          <a:xfrm>
-            <a:off x="11155680" y="6446520"/>
-            <a:ext cx="457200" cy="292608"/>
-          </a:xfrm>
-          <a:prstGeom prst="rect">
-            <a:avLst/>
-          </a:prstGeom>
-          <a:noFill/>
-          <a:ln/>
-        </p:spPr>
-        <p:txBody>
-          <a:bodyPr wrap="square" lIns="0" tIns="0" rIns="0" bIns="0" rtlCol="0" anchor="ctr"/>
-          <a:lstStyle/>
-          <a:p>
-            <a:pPr algn="r" indent="0" marL="0">
-              <a:buNone/>
-            </a:pPr>
-            <a:r>
-              <a:rPr lang="en-US" sz="900" dirty="0">
-                <a:solidFill>
-                  <a:srgbClr val="5D5D72"/>
-                </a:solidFill>
-                <a:latin typeface="Calibri" pitchFamily="34" charset="0"/>
-                <a:ea typeface="Calibri" pitchFamily="34" charset="-122"/>
-                <a:cs typeface="Calibri" pitchFamily="34" charset="-120"/>
-              </a:rPr>
-              <a:t>14</a:t>
-            </a:r>
-            <a:endParaRPr lang="en-US" sz="900" dirty="0"/>
+        </p:spPr>
+        <p:txBody>
+          <a:bodyPr wrap="none" lIns="0" rIns="0" tIns="0" bIns="0">
+            <a:spAutoFit/>
+          </a:bodyPr>
+          <a:lstStyle/>
+          <a:p>
+            <a:pPr algn="r"/>
+            <a:r>
+              <a:rPr sz="1000">
+                <a:solidFill>
+                  <a:srgbClr val="8A939B"/>
+                </a:solidFill>
+                <a:hlinkClick r:id="rId4"/>
+              </a:rPr>
+              <a:t>cuinotes.com</a:t>
+            </a:r>
+            <a:r>
+              <a:rPr sz="1000">
+                <a:solidFill>
+                  <a:srgbClr val="8A939B"/>
+                </a:solidFill>
+              </a:rPr>
+              <a:t>  ·  14</a:t>
+            </a:r>
           </a:p>
         </p:txBody>
       </p:sp>
@@ -6120,6 +5946,10 @@
           </a:solidFill>
           <a:ln/>
         </p:spPr>
+        <p:txBody>
+          <a:bodyPr/>
+          <a:p/>
+        </p:txBody>
       </p:sp>
       <p:sp>
         <p:nvSpPr>
@@ -6284,79 +6114,44 @@
       </p:sp>
       <p:sp>
         <p:nvSpPr>
-          <p:cNvPr id="7" name="Text 5"/>
+          <p:cNvPr id="9" name="cuinotes-footer-mark"/>
           <p:cNvSpPr txBox="1"/>
           <p:nvPr/>
         </p:nvSpPr>
         <p:spPr>
           <a:xfrm>
-            <a:off x="640080" y="6446520"/>
-            <a:ext cx="8686800" cy="292608"/>
+            <a:off x="9951720" y="6455664"/>
+            <a:ext cx="2011680" cy="292608"/>
           </a:xfrm>
           <a:prstGeom prst="rect">
             <a:avLst/>
           </a:prstGeom>
           <a:noFill/>
-          <a:ln/>
-        </p:spPr>
-        <p:txBody>
-          <a:bodyPr wrap="square" lIns="0" tIns="0" rIns="0" bIns="0" rtlCol="0" anchor="ctr"/>
-          <a:lstStyle/>
-          <a:p>
-            <a:pPr algn="l" indent="0" marL="0">
-              <a:buNone/>
-            </a:pPr>
-            <a:r>
-              <a:rPr lang="en-US" sz="900" dirty="0">
-                <a:solidFill>
-                  <a:srgbClr val="5D5D72"/>
-                </a:solidFill>
-                <a:latin typeface="Calibri" pitchFamily="34" charset="0"/>
-                <a:ea typeface="Calibri" pitchFamily="34" charset="-122"/>
-                <a:cs typeface="Calibri" pitchFamily="34" charset="-120"/>
-              </a:rPr>
-              <a:t>Usman Akram  •  COMSATS University Islamabad</a:t>
-            </a:r>
-            <a:endParaRPr lang="en-US" sz="900" dirty="0"/>
-          </a:p>
-        </p:txBody>
-      </p:sp>
-      <p:sp>
-        <p:nvSpPr>
-          <p:cNvPr id="8" name="Text 6"/>
-          <p:cNvSpPr txBox="1"/>
-          <p:nvPr/>
-        </p:nvSpPr>
-        <p:spPr>
-          <a:xfrm>
-            <a:off x="11155680" y="6446520"/>
-            <a:ext cx="457200" cy="292608"/>
-          </a:xfrm>
-          <a:prstGeom prst="rect">
-            <a:avLst/>
-          </a:prstGeom>
-          <a:noFill/>
-          <a:ln/>
-        </p:spPr>
-        <p:txBody>
-          <a:bodyPr wrap="square" lIns="0" tIns="0" rIns="0" bIns="0" rtlCol="0" anchor="ctr"/>
-          <a:lstStyle/>
-          <a:p>
-            <a:pPr algn="r" indent="0" marL="0">
-              <a:buNone/>
-            </a:pPr>
-            <a:r>
-              <a:rPr lang="en-US" sz="900" dirty="0">
-                <a:solidFill>
-                  <a:srgbClr val="5D5D72"/>
-                </a:solidFill>
-                <a:latin typeface="Calibri" pitchFamily="34" charset="0"/>
-                <a:ea typeface="Calibri" pitchFamily="34" charset="-122"/>
-                <a:cs typeface="Calibri" pitchFamily="34" charset="-120"/>
-              </a:rPr>
-              <a:t>15</a:t>
-            </a:r>
-            <a:endParaRPr lang="en-US" sz="900" dirty="0"/>
+        </p:spPr>
+        <p:txBody>
+          <a:bodyPr wrap="none" lIns="0" rIns="0" tIns="0" bIns="0">
+            <a:spAutoFit/>
+          </a:bodyPr>
+          <a:lstStyle/>
+          <a:p>
+            <a:pPr algn="r"/>
+            <a:r>
+              <a:rPr sz="1000">
+                <a:solidFill>
+                  <a:srgbClr val="8A939B"/>
+                </a:solidFill>
+                <a:hlinkClick r:id="rId3"/>
+              </a:rPr>
+              <a:t>cuinotes.com</a:t>
+            </a:r>
+            <a:r>
+              <a:rPr sz="1000">
+                <a:solidFill>
+                  <a:srgbClr val="8A939B"/>
+                </a:solidFill>
+              </a:rPr>
+              <a:t>  ·  15</a:t>
+            </a:r>
           </a:p>
         </p:txBody>
       </p:sp>
@@ -6491,6 +6286,10 @@
           </a:solidFill>
           <a:ln/>
         </p:spPr>
+        <p:txBody>
+          <a:bodyPr/>
+          <a:p/>
+        </p:txBody>
       </p:sp>
       <p:sp>
         <p:nvSpPr>
@@ -6756,6 +6555,10 @@
             </a:outerShdw>
           </a:effectLst>
         </p:spPr>
+        <p:txBody>
+          <a:bodyPr/>
+          <a:p/>
+        </p:txBody>
       </p:sp>
       <p:pic>
         <p:nvPicPr>
@@ -6783,79 +6586,44 @@
       </p:pic>
       <p:sp>
         <p:nvSpPr>
-          <p:cNvPr id="8" name="Text 5"/>
+          <p:cNvPr id="10" name="cuinotes-footer-mark"/>
           <p:cNvSpPr txBox="1"/>
           <p:nvPr/>
         </p:nvSpPr>
         <p:spPr>
           <a:xfrm>
-            <a:off x="640080" y="6446520"/>
-            <a:ext cx="8686800" cy="292608"/>
+            <a:off x="9951720" y="6455664"/>
+            <a:ext cx="2011680" cy="292608"/>
           </a:xfrm>
           <a:prstGeom prst="rect">
             <a:avLst/>
           </a:prstGeom>
           <a:noFill/>
-          <a:ln/>
-        </p:spPr>
-        <p:txBody>
-          <a:bodyPr wrap="square" lIns="0" tIns="0" rIns="0" bIns="0" rtlCol="0" anchor="ctr"/>
-          <a:lstStyle/>
-          <a:p>
-            <a:pPr algn="l" indent="0" marL="0">
-              <a:buNone/>
-            </a:pPr>
-            <a:r>
-              <a:rPr lang="en-US" sz="900" dirty="0">
-                <a:solidFill>
-                  <a:srgbClr val="5D5D72"/>
-                </a:solidFill>
-                <a:latin typeface="Calibri" pitchFamily="34" charset="0"/>
-                <a:ea typeface="Calibri" pitchFamily="34" charset="-122"/>
-                <a:cs typeface="Calibri" pitchFamily="34" charset="-120"/>
-              </a:rPr>
-              <a:t>Usman Akram  •  COMSATS University Islamabad</a:t>
-            </a:r>
-            <a:endParaRPr lang="en-US" sz="900" dirty="0"/>
-          </a:p>
-        </p:txBody>
-      </p:sp>
-      <p:sp>
-        <p:nvSpPr>
-          <p:cNvPr id="9" name="Text 6"/>
-          <p:cNvSpPr txBox="1"/>
-          <p:nvPr/>
-        </p:nvSpPr>
-        <p:spPr>
-          <a:xfrm>
-            <a:off x="11155680" y="6446520"/>
-            <a:ext cx="457200" cy="292608"/>
-          </a:xfrm>
-          <a:prstGeom prst="rect">
-            <a:avLst/>
-          </a:prstGeom>
-          <a:noFill/>
-          <a:ln/>
-        </p:spPr>
-        <p:txBody>
-          <a:bodyPr wrap="square" lIns="0" tIns="0" rIns="0" bIns="0" rtlCol="0" anchor="ctr"/>
-          <a:lstStyle/>
-          <a:p>
-            <a:pPr algn="r" indent="0" marL="0">
-              <a:buNone/>
-            </a:pPr>
-            <a:r>
-              <a:rPr lang="en-US" sz="900" dirty="0">
-                <a:solidFill>
-                  <a:srgbClr val="5D5D72"/>
-                </a:solidFill>
-                <a:latin typeface="Calibri" pitchFamily="34" charset="0"/>
-                <a:ea typeface="Calibri" pitchFamily="34" charset="-122"/>
-                <a:cs typeface="Calibri" pitchFamily="34" charset="-120"/>
-              </a:rPr>
-              <a:t>16</a:t>
-            </a:r>
-            <a:endParaRPr lang="en-US" sz="900" dirty="0"/>
+        </p:spPr>
+        <p:txBody>
+          <a:bodyPr wrap="none" lIns="0" rIns="0" tIns="0" bIns="0">
+            <a:spAutoFit/>
+          </a:bodyPr>
+          <a:lstStyle/>
+          <a:p>
+            <a:pPr algn="r"/>
+            <a:r>
+              <a:rPr sz="1000">
+                <a:solidFill>
+                  <a:srgbClr val="8A939B"/>
+                </a:solidFill>
+                <a:hlinkClick r:id="rId4"/>
+              </a:rPr>
+              <a:t>cuinotes.com</a:t>
+            </a:r>
+            <a:r>
+              <a:rPr sz="1000">
+                <a:solidFill>
+                  <a:srgbClr val="8A939B"/>
+                </a:solidFill>
+              </a:rPr>
+              <a:t>  ·  16</a:t>
+            </a:r>
           </a:p>
         </p:txBody>
       </p:sp>
@@ -7829,79 +7597,44 @@
       </p:graphicFrame>
       <p:sp>
         <p:nvSpPr>
-          <p:cNvPr id="5" name="Text 2"/>
+          <p:cNvPr id="19" name="cuinotes-footer-mark"/>
           <p:cNvSpPr txBox="1"/>
           <p:nvPr/>
         </p:nvSpPr>
         <p:spPr>
           <a:xfrm>
-            <a:off x="640080" y="6446520"/>
-            <a:ext cx="8686800" cy="292608"/>
+            <a:off x="9951720" y="6455664"/>
+            <a:ext cx="2011680" cy="292608"/>
           </a:xfrm>
           <a:prstGeom prst="rect">
             <a:avLst/>
           </a:prstGeom>
           <a:noFill/>
-          <a:ln/>
-        </p:spPr>
-        <p:txBody>
-          <a:bodyPr wrap="square" lIns="0" tIns="0" rIns="0" bIns="0" rtlCol="0" anchor="ctr"/>
-          <a:lstStyle/>
-          <a:p>
-            <a:pPr algn="l" indent="0" marL="0">
-              <a:buNone/>
-            </a:pPr>
-            <a:r>
-              <a:rPr lang="en-US" sz="900" dirty="0">
-                <a:solidFill>
-                  <a:srgbClr val="5D5D72"/>
-                </a:solidFill>
-                <a:latin typeface="Calibri" pitchFamily="34" charset="0"/>
-                <a:ea typeface="Calibri" pitchFamily="34" charset="-122"/>
-                <a:cs typeface="Calibri" pitchFamily="34" charset="-120"/>
-              </a:rPr>
-              <a:t>Usman Akram  •  COMSATS University Islamabad</a:t>
-            </a:r>
-            <a:endParaRPr lang="en-US" sz="900" dirty="0"/>
-          </a:p>
-        </p:txBody>
-      </p:sp>
-      <p:sp>
-        <p:nvSpPr>
-          <p:cNvPr id="6" name="Text 3"/>
-          <p:cNvSpPr txBox="1"/>
-          <p:nvPr/>
-        </p:nvSpPr>
-        <p:spPr>
-          <a:xfrm>
-            <a:off x="11155680" y="6446520"/>
-            <a:ext cx="457200" cy="292608"/>
-          </a:xfrm>
-          <a:prstGeom prst="rect">
-            <a:avLst/>
-          </a:prstGeom>
-          <a:noFill/>
-          <a:ln/>
-        </p:spPr>
-        <p:txBody>
-          <a:bodyPr wrap="square" lIns="0" tIns="0" rIns="0" bIns="0" rtlCol="0" anchor="ctr"/>
-          <a:lstStyle/>
-          <a:p>
-            <a:pPr algn="r" indent="0" marL="0">
-              <a:buNone/>
-            </a:pPr>
-            <a:r>
-              <a:rPr lang="en-US" sz="900" dirty="0">
-                <a:solidFill>
-                  <a:srgbClr val="5D5D72"/>
-                </a:solidFill>
-                <a:latin typeface="Calibri" pitchFamily="34" charset="0"/>
-                <a:ea typeface="Calibri" pitchFamily="34" charset="-122"/>
-                <a:cs typeface="Calibri" pitchFamily="34" charset="-120"/>
-              </a:rPr>
-              <a:t>17</a:t>
-            </a:r>
-            <a:endParaRPr lang="en-US" sz="900" dirty="0"/>
+        </p:spPr>
+        <p:txBody>
+          <a:bodyPr wrap="none" lIns="0" rIns="0" tIns="0" bIns="0">
+            <a:spAutoFit/>
+          </a:bodyPr>
+          <a:lstStyle/>
+          <a:p>
+            <a:pPr algn="r"/>
+            <a:r>
+              <a:rPr sz="1000">
+                <a:solidFill>
+                  <a:srgbClr val="8A939B"/>
+                </a:solidFill>
+                <a:hlinkClick r:id="rId3"/>
+              </a:rPr>
+              <a:t>cuinotes.com</a:t>
+            </a:r>
+            <a:r>
+              <a:rPr sz="1000">
+                <a:solidFill>
+                  <a:srgbClr val="8A939B"/>
+                </a:solidFill>
+              </a:rPr>
+              <a:t>  ·  17</a:t>
+            </a:r>
           </a:p>
         </p:txBody>
       </p:sp>
@@ -8075,6 +7808,10 @@
           </a:solidFill>
           <a:ln/>
         </p:spPr>
+        <p:txBody>
+          <a:bodyPr/>
+          <a:p/>
+        </p:txBody>
       </p:sp>
       <p:sp>
         <p:nvSpPr>
@@ -8260,6 +7997,10 @@
             </a:outerShdw>
           </a:effectLst>
         </p:spPr>
+        <p:txBody>
+          <a:bodyPr/>
+          <a:p/>
+        </p:txBody>
       </p:sp>
       <p:pic>
         <p:nvPicPr>
@@ -8287,79 +8028,44 @@
       </p:pic>
       <p:sp>
         <p:nvSpPr>
-          <p:cNvPr id="9" name="Text 6"/>
+          <p:cNvPr id="11" name="cuinotes-footer-mark"/>
           <p:cNvSpPr txBox="1"/>
           <p:nvPr/>
         </p:nvSpPr>
         <p:spPr>
           <a:xfrm>
-            <a:off x="640080" y="6446520"/>
-            <a:ext cx="8686800" cy="292608"/>
+            <a:off x="9951720" y="6455664"/>
+            <a:ext cx="2011680" cy="292608"/>
           </a:xfrm>
           <a:prstGeom prst="rect">
             <a:avLst/>
           </a:prstGeom>
           <a:noFill/>
-          <a:ln/>
-        </p:spPr>
-        <p:txBody>
-          <a:bodyPr wrap="square" lIns="0" tIns="0" rIns="0" bIns="0" rtlCol="0" anchor="ctr"/>
-          <a:lstStyle/>
-          <a:p>
-            <a:pPr algn="l" indent="0" marL="0">
-              <a:buNone/>
-            </a:pPr>
-            <a:r>
-              <a:rPr lang="en-US" sz="900" dirty="0">
-                <a:solidFill>
-                  <a:srgbClr val="5D5D72"/>
-                </a:solidFill>
-                <a:latin typeface="Calibri" pitchFamily="34" charset="0"/>
-                <a:ea typeface="Calibri" pitchFamily="34" charset="-122"/>
-                <a:cs typeface="Calibri" pitchFamily="34" charset="-120"/>
-              </a:rPr>
-              <a:t>Usman Akram  •  COMSATS University Islamabad</a:t>
-            </a:r>
-            <a:endParaRPr lang="en-US" sz="900" dirty="0"/>
-          </a:p>
-        </p:txBody>
-      </p:sp>
-      <p:sp>
-        <p:nvSpPr>
-          <p:cNvPr id="10" name="Text 7"/>
-          <p:cNvSpPr txBox="1"/>
-          <p:nvPr/>
-        </p:nvSpPr>
-        <p:spPr>
-          <a:xfrm>
-            <a:off x="11155680" y="6446520"/>
-            <a:ext cx="457200" cy="292608"/>
-          </a:xfrm>
-          <a:prstGeom prst="rect">
-            <a:avLst/>
-          </a:prstGeom>
-          <a:noFill/>
-          <a:ln/>
-        </p:spPr>
-        <p:txBody>
-          <a:bodyPr wrap="square" lIns="0" tIns="0" rIns="0" bIns="0" rtlCol="0" anchor="ctr"/>
-          <a:lstStyle/>
-          <a:p>
-            <a:pPr algn="r" indent="0" marL="0">
-              <a:buNone/>
-            </a:pPr>
-            <a:r>
-              <a:rPr lang="en-US" sz="900" dirty="0">
-                <a:solidFill>
-                  <a:srgbClr val="5D5D72"/>
-                </a:solidFill>
-                <a:latin typeface="Calibri" pitchFamily="34" charset="0"/>
-                <a:ea typeface="Calibri" pitchFamily="34" charset="-122"/>
-                <a:cs typeface="Calibri" pitchFamily="34" charset="-120"/>
-              </a:rPr>
-              <a:t>18</a:t>
-            </a:r>
-            <a:endParaRPr lang="en-US" sz="900" dirty="0"/>
+        </p:spPr>
+        <p:txBody>
+          <a:bodyPr wrap="none" lIns="0" rIns="0" tIns="0" bIns="0">
+            <a:spAutoFit/>
+          </a:bodyPr>
+          <a:lstStyle/>
+          <a:p>
+            <a:pPr algn="r"/>
+            <a:r>
+              <a:rPr sz="1000">
+                <a:solidFill>
+                  <a:srgbClr val="8A939B"/>
+                </a:solidFill>
+                <a:hlinkClick r:id="rId4"/>
+              </a:rPr>
+              <a:t>cuinotes.com</a:t>
+            </a:r>
+            <a:r>
+              <a:rPr sz="1000">
+                <a:solidFill>
+                  <a:srgbClr val="8A939B"/>
+                </a:solidFill>
+              </a:rPr>
+              <a:t>  ·  18</a:t>
+            </a:r>
           </a:p>
         </p:txBody>
       </p:sp>
@@ -8494,6 +8200,10 @@
           </a:solidFill>
           <a:ln/>
         </p:spPr>
+        <p:txBody>
+          <a:bodyPr/>
+          <a:p/>
+        </p:txBody>
       </p:sp>
       <p:sp>
         <p:nvSpPr>
@@ -8627,79 +8337,44 @@
       </p:sp>
       <p:sp>
         <p:nvSpPr>
-          <p:cNvPr id="7" name="Text 5"/>
+          <p:cNvPr id="9" name="cuinotes-footer-mark"/>
           <p:cNvSpPr txBox="1"/>
           <p:nvPr/>
         </p:nvSpPr>
         <p:spPr>
           <a:xfrm>
-            <a:off x="640080" y="6446520"/>
-            <a:ext cx="8686800" cy="292608"/>
+            <a:off x="9951720" y="6455664"/>
+            <a:ext cx="2011680" cy="292608"/>
           </a:xfrm>
           <a:prstGeom prst="rect">
             <a:avLst/>
           </a:prstGeom>
           <a:noFill/>
-          <a:ln/>
-        </p:spPr>
-        <p:txBody>
-          <a:bodyPr wrap="square" lIns="0" tIns="0" rIns="0" bIns="0" rtlCol="0" anchor="ctr"/>
-          <a:lstStyle/>
-          <a:p>
-            <a:pPr algn="l" indent="0" marL="0">
-              <a:buNone/>
-            </a:pPr>
-            <a:r>
-              <a:rPr lang="en-US" sz="900" dirty="0">
-                <a:solidFill>
-                  <a:srgbClr val="5D5D72"/>
-                </a:solidFill>
-                <a:latin typeface="Calibri" pitchFamily="34" charset="0"/>
-                <a:ea typeface="Calibri" pitchFamily="34" charset="-122"/>
-                <a:cs typeface="Calibri" pitchFamily="34" charset="-120"/>
-              </a:rPr>
-              <a:t>Usman Akram  •  COMSATS University Islamabad</a:t>
-            </a:r>
-            <a:endParaRPr lang="en-US" sz="900" dirty="0"/>
-          </a:p>
-        </p:txBody>
-      </p:sp>
-      <p:sp>
-        <p:nvSpPr>
-          <p:cNvPr id="8" name="Text 6"/>
-          <p:cNvSpPr txBox="1"/>
-          <p:nvPr/>
-        </p:nvSpPr>
-        <p:spPr>
-          <a:xfrm>
-            <a:off x="11155680" y="6446520"/>
-            <a:ext cx="457200" cy="292608"/>
-          </a:xfrm>
-          <a:prstGeom prst="rect">
-            <a:avLst/>
-          </a:prstGeom>
-          <a:noFill/>
-          <a:ln/>
-        </p:spPr>
-        <p:txBody>
-          <a:bodyPr wrap="square" lIns="0" tIns="0" rIns="0" bIns="0" rtlCol="0" anchor="ctr"/>
-          <a:lstStyle/>
-          <a:p>
-            <a:pPr algn="r" indent="0" marL="0">
-              <a:buNone/>
-            </a:pPr>
-            <a:r>
-              <a:rPr lang="en-US" sz="900" dirty="0">
-                <a:solidFill>
-                  <a:srgbClr val="5D5D72"/>
-                </a:solidFill>
-                <a:latin typeface="Calibri" pitchFamily="34" charset="0"/>
-                <a:ea typeface="Calibri" pitchFamily="34" charset="-122"/>
-                <a:cs typeface="Calibri" pitchFamily="34" charset="-120"/>
-              </a:rPr>
-              <a:t>19</a:t>
-            </a:r>
-            <a:endParaRPr lang="en-US" sz="900" dirty="0"/>
+        </p:spPr>
+        <p:txBody>
+          <a:bodyPr wrap="none" lIns="0" rIns="0" tIns="0" bIns="0">
+            <a:spAutoFit/>
+          </a:bodyPr>
+          <a:lstStyle/>
+          <a:p>
+            <a:pPr algn="r"/>
+            <a:r>
+              <a:rPr sz="1000">
+                <a:solidFill>
+                  <a:srgbClr val="8A939B"/>
+                </a:solidFill>
+                <a:hlinkClick r:id="rId3"/>
+              </a:rPr>
+              <a:t>cuinotes.com</a:t>
+            </a:r>
+            <a:r>
+              <a:rPr sz="1000">
+                <a:solidFill>
+                  <a:srgbClr val="8A939B"/>
+                </a:solidFill>
+              </a:rPr>
+              <a:t>  ·  19</a:t>
+            </a:r>
           </a:p>
         </p:txBody>
       </p:sp>
@@ -8832,6 +8507,10 @@
           </a:solidFill>
           <a:ln/>
         </p:spPr>
+        <p:txBody>
+          <a:bodyPr/>
+          <a:p/>
+        </p:txBody>
       </p:sp>
       <p:sp>
         <p:nvSpPr>
@@ -8930,6 +8609,10 @@
           </a:solidFill>
           <a:ln/>
         </p:spPr>
+        <p:txBody>
+          <a:bodyPr/>
+          <a:p/>
+        </p:txBody>
       </p:sp>
       <p:sp>
         <p:nvSpPr>
@@ -9028,6 +8711,10 @@
           </a:solidFill>
           <a:ln/>
         </p:spPr>
+        <p:txBody>
+          <a:bodyPr/>
+          <a:p/>
+        </p:txBody>
       </p:sp>
       <p:sp>
         <p:nvSpPr>
@@ -9126,6 +8813,10 @@
           </a:solidFill>
           <a:ln/>
         </p:spPr>
+        <p:txBody>
+          <a:bodyPr/>
+          <a:p/>
+        </p:txBody>
       </p:sp>
       <p:sp>
         <p:nvSpPr>
@@ -9224,6 +8915,10 @@
           </a:solidFill>
           <a:ln/>
         </p:spPr>
+        <p:txBody>
+          <a:bodyPr/>
+          <a:p/>
+        </p:txBody>
       </p:sp>
       <p:sp>
         <p:nvSpPr>
@@ -9322,6 +9017,10 @@
           </a:solidFill>
           <a:ln/>
         </p:spPr>
+        <p:txBody>
+          <a:bodyPr/>
+          <a:p/>
+        </p:txBody>
       </p:sp>
       <p:sp>
         <p:nvSpPr>
@@ -9403,79 +9102,44 @@
       </p:sp>
       <p:sp>
         <p:nvSpPr>
-          <p:cNvPr id="22" name="Text 20"/>
+          <p:cNvPr id="24" name="cuinotes-footer-mark"/>
           <p:cNvSpPr txBox="1"/>
           <p:nvPr/>
         </p:nvSpPr>
         <p:spPr>
           <a:xfrm>
-            <a:off x="640080" y="6446520"/>
-            <a:ext cx="8686800" cy="292608"/>
+            <a:off x="9951720" y="6455664"/>
+            <a:ext cx="2011680" cy="292608"/>
           </a:xfrm>
           <a:prstGeom prst="rect">
             <a:avLst/>
           </a:prstGeom>
           <a:noFill/>
-          <a:ln/>
-        </p:spPr>
-        <p:txBody>
-          <a:bodyPr wrap="square" lIns="0" tIns="0" rIns="0" bIns="0" rtlCol="0" anchor="ctr"/>
-          <a:lstStyle/>
-          <a:p>
-            <a:pPr algn="l" indent="0" marL="0">
-              <a:buNone/>
-            </a:pPr>
-            <a:r>
-              <a:rPr lang="en-US" sz="900" dirty="0">
-                <a:solidFill>
-                  <a:srgbClr val="5D5D72"/>
-                </a:solidFill>
-                <a:latin typeface="Calibri" pitchFamily="34" charset="0"/>
-                <a:ea typeface="Calibri" pitchFamily="34" charset="-122"/>
-                <a:cs typeface="Calibri" pitchFamily="34" charset="-120"/>
-              </a:rPr>
-              <a:t>Usman Akram  •  COMSATS University Islamabad</a:t>
-            </a:r>
-            <a:endParaRPr lang="en-US" sz="900" dirty="0"/>
-          </a:p>
-        </p:txBody>
-      </p:sp>
-      <p:sp>
-        <p:nvSpPr>
-          <p:cNvPr id="23" name="Text 21"/>
-          <p:cNvSpPr txBox="1"/>
-          <p:nvPr/>
-        </p:nvSpPr>
-        <p:spPr>
-          <a:xfrm>
-            <a:off x="11155680" y="6446520"/>
-            <a:ext cx="457200" cy="292608"/>
-          </a:xfrm>
-          <a:prstGeom prst="rect">
-            <a:avLst/>
-          </a:prstGeom>
-          <a:noFill/>
-          <a:ln/>
-        </p:spPr>
-        <p:txBody>
-          <a:bodyPr wrap="square" lIns="0" tIns="0" rIns="0" bIns="0" rtlCol="0" anchor="ctr"/>
-          <a:lstStyle/>
-          <a:p>
-            <a:pPr algn="r" indent="0" marL="0">
-              <a:buNone/>
-            </a:pPr>
-            <a:r>
-              <a:rPr lang="en-US" sz="900" dirty="0">
-                <a:solidFill>
-                  <a:srgbClr val="5D5D72"/>
-                </a:solidFill>
-                <a:latin typeface="Calibri" pitchFamily="34" charset="0"/>
-                <a:ea typeface="Calibri" pitchFamily="34" charset="-122"/>
-                <a:cs typeface="Calibri" pitchFamily="34" charset="-120"/>
-              </a:rPr>
-              <a:t>2</a:t>
-            </a:r>
-            <a:endParaRPr lang="en-US" sz="900" dirty="0"/>
+        </p:spPr>
+        <p:txBody>
+          <a:bodyPr wrap="none" lIns="0" rIns="0" tIns="0" bIns="0">
+            <a:spAutoFit/>
+          </a:bodyPr>
+          <a:lstStyle/>
+          <a:p>
+            <a:pPr algn="r"/>
+            <a:r>
+              <a:rPr sz="1000">
+                <a:solidFill>
+                  <a:srgbClr val="8A939B"/>
+                </a:solidFill>
+                <a:hlinkClick r:id="rId3"/>
+              </a:rPr>
+              <a:t>cuinotes.com</a:t>
+            </a:r>
+            <a:r>
+              <a:rPr sz="1000">
+                <a:solidFill>
+                  <a:srgbClr val="8A939B"/>
+                </a:solidFill>
+              </a:rPr>
+              <a:t>  ·  2</a:t>
+            </a:r>
           </a:p>
         </p:txBody>
       </p:sp>
@@ -9622,6 +9286,10 @@
             </a:outerShdw>
           </a:effectLst>
         </p:spPr>
+        <p:txBody>
+          <a:bodyPr/>
+          <a:p/>
+        </p:txBody>
       </p:sp>
       <p:pic>
         <p:nvPicPr>
@@ -9649,79 +9317,44 @@
       </p:pic>
       <p:sp>
         <p:nvSpPr>
-          <p:cNvPr id="6" name="Text 3"/>
+          <p:cNvPr id="8" name="cuinotes-footer-mark"/>
           <p:cNvSpPr txBox="1"/>
           <p:nvPr/>
         </p:nvSpPr>
         <p:spPr>
           <a:xfrm>
-            <a:off x="640080" y="6446520"/>
-            <a:ext cx="8686800" cy="292608"/>
+            <a:off x="9951720" y="6455664"/>
+            <a:ext cx="2011680" cy="292608"/>
           </a:xfrm>
           <a:prstGeom prst="rect">
             <a:avLst/>
           </a:prstGeom>
           <a:noFill/>
-          <a:ln/>
-        </p:spPr>
-        <p:txBody>
-          <a:bodyPr wrap="square" lIns="0" tIns="0" rIns="0" bIns="0" rtlCol="0" anchor="ctr"/>
-          <a:lstStyle/>
-          <a:p>
-            <a:pPr algn="l" indent="0" marL="0">
-              <a:buNone/>
-            </a:pPr>
-            <a:r>
-              <a:rPr lang="en-US" sz="900" dirty="0">
-                <a:solidFill>
-                  <a:srgbClr val="5D5D72"/>
-                </a:solidFill>
-                <a:latin typeface="Calibri" pitchFamily="34" charset="0"/>
-                <a:ea typeface="Calibri" pitchFamily="34" charset="-122"/>
-                <a:cs typeface="Calibri" pitchFamily="34" charset="-120"/>
-              </a:rPr>
-              <a:t>Usman Akram  •  COMSATS University Islamabad</a:t>
-            </a:r>
-            <a:endParaRPr lang="en-US" sz="900" dirty="0"/>
-          </a:p>
-        </p:txBody>
-      </p:sp>
-      <p:sp>
-        <p:nvSpPr>
-          <p:cNvPr id="7" name="Text 4"/>
-          <p:cNvSpPr txBox="1"/>
-          <p:nvPr/>
-        </p:nvSpPr>
-        <p:spPr>
-          <a:xfrm>
-            <a:off x="11155680" y="6446520"/>
-            <a:ext cx="457200" cy="292608"/>
-          </a:xfrm>
-          <a:prstGeom prst="rect">
-            <a:avLst/>
-          </a:prstGeom>
-          <a:noFill/>
-          <a:ln/>
-        </p:spPr>
-        <p:txBody>
-          <a:bodyPr wrap="square" lIns="0" tIns="0" rIns="0" bIns="0" rtlCol="0" anchor="ctr"/>
-          <a:lstStyle/>
-          <a:p>
-            <a:pPr algn="r" indent="0" marL="0">
-              <a:buNone/>
-            </a:pPr>
-            <a:r>
-              <a:rPr lang="en-US" sz="900" dirty="0">
-                <a:solidFill>
-                  <a:srgbClr val="5D5D72"/>
-                </a:solidFill>
-                <a:latin typeface="Calibri" pitchFamily="34" charset="0"/>
-                <a:ea typeface="Calibri" pitchFamily="34" charset="-122"/>
-                <a:cs typeface="Calibri" pitchFamily="34" charset="-120"/>
-              </a:rPr>
-              <a:t>20</a:t>
-            </a:r>
-            <a:endParaRPr lang="en-US" sz="900" dirty="0"/>
+        </p:spPr>
+        <p:txBody>
+          <a:bodyPr wrap="none" lIns="0" rIns="0" tIns="0" bIns="0">
+            <a:spAutoFit/>
+          </a:bodyPr>
+          <a:lstStyle/>
+          <a:p>
+            <a:pPr algn="r"/>
+            <a:r>
+              <a:rPr sz="1000">
+                <a:solidFill>
+                  <a:srgbClr val="8A939B"/>
+                </a:solidFill>
+                <a:hlinkClick r:id="rId4"/>
+              </a:rPr>
+              <a:t>cuinotes.com</a:t>
+            </a:r>
+            <a:r>
+              <a:rPr sz="1000">
+                <a:solidFill>
+                  <a:srgbClr val="8A939B"/>
+                </a:solidFill>
+              </a:rPr>
+              <a:t>  ·  20</a:t>
+            </a:r>
           </a:p>
         </p:txBody>
       </p:sp>
@@ -10695,79 +10328,44 @@
       </p:graphicFrame>
       <p:sp>
         <p:nvSpPr>
-          <p:cNvPr id="5" name="Text 2"/>
+          <p:cNvPr id="23" name="cuinotes-footer-mark"/>
           <p:cNvSpPr txBox="1"/>
           <p:nvPr/>
         </p:nvSpPr>
         <p:spPr>
           <a:xfrm>
-            <a:off x="640080" y="6446520"/>
-            <a:ext cx="8686800" cy="292608"/>
+            <a:off x="9951720" y="6455664"/>
+            <a:ext cx="2011680" cy="292608"/>
           </a:xfrm>
           <a:prstGeom prst="rect">
             <a:avLst/>
           </a:prstGeom>
           <a:noFill/>
-          <a:ln/>
-        </p:spPr>
-        <p:txBody>
-          <a:bodyPr wrap="square" lIns="0" tIns="0" rIns="0" bIns="0" rtlCol="0" anchor="ctr"/>
-          <a:lstStyle/>
-          <a:p>
-            <a:pPr algn="l" indent="0" marL="0">
-              <a:buNone/>
-            </a:pPr>
-            <a:r>
-              <a:rPr lang="en-US" sz="900" dirty="0">
-                <a:solidFill>
-                  <a:srgbClr val="5D5D72"/>
-                </a:solidFill>
-                <a:latin typeface="Calibri" pitchFamily="34" charset="0"/>
-                <a:ea typeface="Calibri" pitchFamily="34" charset="-122"/>
-                <a:cs typeface="Calibri" pitchFamily="34" charset="-120"/>
-              </a:rPr>
-              <a:t>Usman Akram  •  COMSATS University Islamabad</a:t>
-            </a:r>
-            <a:endParaRPr lang="en-US" sz="900" dirty="0"/>
-          </a:p>
-        </p:txBody>
-      </p:sp>
-      <p:sp>
-        <p:nvSpPr>
-          <p:cNvPr id="6" name="Text 3"/>
-          <p:cNvSpPr txBox="1"/>
-          <p:nvPr/>
-        </p:nvSpPr>
-        <p:spPr>
-          <a:xfrm>
-            <a:off x="11155680" y="6446520"/>
-            <a:ext cx="457200" cy="292608"/>
-          </a:xfrm>
-          <a:prstGeom prst="rect">
-            <a:avLst/>
-          </a:prstGeom>
-          <a:noFill/>
-          <a:ln/>
-        </p:spPr>
-        <p:txBody>
-          <a:bodyPr wrap="square" lIns="0" tIns="0" rIns="0" bIns="0" rtlCol="0" anchor="ctr"/>
-          <a:lstStyle/>
-          <a:p>
-            <a:pPr algn="r" indent="0" marL="0">
-              <a:buNone/>
-            </a:pPr>
-            <a:r>
-              <a:rPr lang="en-US" sz="900" dirty="0">
-                <a:solidFill>
-                  <a:srgbClr val="5D5D72"/>
-                </a:solidFill>
-                <a:latin typeface="Calibri" pitchFamily="34" charset="0"/>
-                <a:ea typeface="Calibri" pitchFamily="34" charset="-122"/>
-                <a:cs typeface="Calibri" pitchFamily="34" charset="-120"/>
-              </a:rPr>
-              <a:t>21</a:t>
-            </a:r>
-            <a:endParaRPr lang="en-US" sz="900" dirty="0"/>
+        </p:spPr>
+        <p:txBody>
+          <a:bodyPr wrap="none" lIns="0" rIns="0" tIns="0" bIns="0">
+            <a:spAutoFit/>
+          </a:bodyPr>
+          <a:lstStyle/>
+          <a:p>
+            <a:pPr algn="r"/>
+            <a:r>
+              <a:rPr sz="1000">
+                <a:solidFill>
+                  <a:srgbClr val="8A939B"/>
+                </a:solidFill>
+                <a:hlinkClick r:id="rId3"/>
+              </a:rPr>
+              <a:t>cuinotes.com</a:t>
+            </a:r>
+            <a:r>
+              <a:rPr sz="1000">
+                <a:solidFill>
+                  <a:srgbClr val="8A939B"/>
+                </a:solidFill>
+              </a:rPr>
+              <a:t>  ·  21</a:t>
+            </a:r>
           </a:p>
         </p:txBody>
       </p:sp>
@@ -10902,6 +10500,10 @@
           </a:solidFill>
           <a:ln/>
         </p:spPr>
+        <p:txBody>
+          <a:bodyPr/>
+          <a:p/>
+        </p:txBody>
       </p:sp>
       <p:sp>
         <p:nvSpPr>
@@ -11047,6 +10649,10 @@
             </a:outerShdw>
           </a:effectLst>
         </p:spPr>
+        <p:txBody>
+          <a:bodyPr/>
+          <a:p/>
+        </p:txBody>
       </p:sp>
       <p:pic>
         <p:nvPicPr>
@@ -11074,79 +10680,44 @@
       </p:pic>
       <p:sp>
         <p:nvSpPr>
-          <p:cNvPr id="8" name="Text 5"/>
+          <p:cNvPr id="10" name="cuinotes-footer-mark"/>
           <p:cNvSpPr txBox="1"/>
           <p:nvPr/>
         </p:nvSpPr>
         <p:spPr>
           <a:xfrm>
-            <a:off x="640080" y="6446520"/>
-            <a:ext cx="8686800" cy="292608"/>
+            <a:off x="9951720" y="6455664"/>
+            <a:ext cx="2011680" cy="292608"/>
           </a:xfrm>
           <a:prstGeom prst="rect">
             <a:avLst/>
           </a:prstGeom>
           <a:noFill/>
-          <a:ln/>
-        </p:spPr>
-        <p:txBody>
-          <a:bodyPr wrap="square" lIns="0" tIns="0" rIns="0" bIns="0" rtlCol="0" anchor="ctr"/>
-          <a:lstStyle/>
-          <a:p>
-            <a:pPr algn="l" indent="0" marL="0">
-              <a:buNone/>
-            </a:pPr>
-            <a:r>
-              <a:rPr lang="en-US" sz="900" dirty="0">
-                <a:solidFill>
-                  <a:srgbClr val="5D5D72"/>
-                </a:solidFill>
-                <a:latin typeface="Calibri" pitchFamily="34" charset="0"/>
-                <a:ea typeface="Calibri" pitchFamily="34" charset="-122"/>
-                <a:cs typeface="Calibri" pitchFamily="34" charset="-120"/>
-              </a:rPr>
-              <a:t>Usman Akram  •  COMSATS University Islamabad</a:t>
-            </a:r>
-            <a:endParaRPr lang="en-US" sz="900" dirty="0"/>
-          </a:p>
-        </p:txBody>
-      </p:sp>
-      <p:sp>
-        <p:nvSpPr>
-          <p:cNvPr id="9" name="Text 6"/>
-          <p:cNvSpPr txBox="1"/>
-          <p:nvPr/>
-        </p:nvSpPr>
-        <p:spPr>
-          <a:xfrm>
-            <a:off x="11155680" y="6446520"/>
-            <a:ext cx="457200" cy="292608"/>
-          </a:xfrm>
-          <a:prstGeom prst="rect">
-            <a:avLst/>
-          </a:prstGeom>
-          <a:noFill/>
-          <a:ln/>
-        </p:spPr>
-        <p:txBody>
-          <a:bodyPr wrap="square" lIns="0" tIns="0" rIns="0" bIns="0" rtlCol="0" anchor="ctr"/>
-          <a:lstStyle/>
-          <a:p>
-            <a:pPr algn="r" indent="0" marL="0">
-              <a:buNone/>
-            </a:pPr>
-            <a:r>
-              <a:rPr lang="en-US" sz="900" dirty="0">
-                <a:solidFill>
-                  <a:srgbClr val="5D5D72"/>
-                </a:solidFill>
-                <a:latin typeface="Calibri" pitchFamily="34" charset="0"/>
-                <a:ea typeface="Calibri" pitchFamily="34" charset="-122"/>
-                <a:cs typeface="Calibri" pitchFamily="34" charset="-120"/>
-              </a:rPr>
-              <a:t>22</a:t>
-            </a:r>
-            <a:endParaRPr lang="en-US" sz="900" dirty="0"/>
+        </p:spPr>
+        <p:txBody>
+          <a:bodyPr wrap="none" lIns="0" rIns="0" tIns="0" bIns="0">
+            <a:spAutoFit/>
+          </a:bodyPr>
+          <a:lstStyle/>
+          <a:p>
+            <a:pPr algn="r"/>
+            <a:r>
+              <a:rPr sz="1000">
+                <a:solidFill>
+                  <a:srgbClr val="8A939B"/>
+                </a:solidFill>
+                <a:hlinkClick r:id="rId4"/>
+              </a:rPr>
+              <a:t>cuinotes.com</a:t>
+            </a:r>
+            <a:r>
+              <a:rPr sz="1000">
+                <a:solidFill>
+                  <a:srgbClr val="8A939B"/>
+                </a:solidFill>
+              </a:rPr>
+              <a:t>  ·  22</a:t>
+            </a:r>
           </a:p>
         </p:txBody>
       </p:sp>
@@ -12120,79 +11691,44 @@
       </p:graphicFrame>
       <p:sp>
         <p:nvSpPr>
-          <p:cNvPr id="5" name="Text 2"/>
+          <p:cNvPr id="25" name="cuinotes-footer-mark"/>
           <p:cNvSpPr txBox="1"/>
           <p:nvPr/>
         </p:nvSpPr>
         <p:spPr>
           <a:xfrm>
-            <a:off x="640080" y="6446520"/>
-            <a:ext cx="8686800" cy="292608"/>
+            <a:off x="9951720" y="6455664"/>
+            <a:ext cx="2011680" cy="292608"/>
           </a:xfrm>
           <a:prstGeom prst="rect">
             <a:avLst/>
           </a:prstGeom>
           <a:noFill/>
-          <a:ln/>
-        </p:spPr>
-        <p:txBody>
-          <a:bodyPr wrap="square" lIns="0" tIns="0" rIns="0" bIns="0" rtlCol="0" anchor="ctr"/>
-          <a:lstStyle/>
-          <a:p>
-            <a:pPr algn="l" indent="0" marL="0">
-              <a:buNone/>
-            </a:pPr>
-            <a:r>
-              <a:rPr lang="en-US" sz="900" dirty="0">
-                <a:solidFill>
-                  <a:srgbClr val="5D5D72"/>
-                </a:solidFill>
-                <a:latin typeface="Calibri" pitchFamily="34" charset="0"/>
-                <a:ea typeface="Calibri" pitchFamily="34" charset="-122"/>
-                <a:cs typeface="Calibri" pitchFamily="34" charset="-120"/>
-              </a:rPr>
-              <a:t>Usman Akram  •  COMSATS University Islamabad</a:t>
-            </a:r>
-            <a:endParaRPr lang="en-US" sz="900" dirty="0"/>
-          </a:p>
-        </p:txBody>
-      </p:sp>
-      <p:sp>
-        <p:nvSpPr>
-          <p:cNvPr id="6" name="Text 3"/>
-          <p:cNvSpPr txBox="1"/>
-          <p:nvPr/>
-        </p:nvSpPr>
-        <p:spPr>
-          <a:xfrm>
-            <a:off x="11155680" y="6446520"/>
-            <a:ext cx="457200" cy="292608"/>
-          </a:xfrm>
-          <a:prstGeom prst="rect">
-            <a:avLst/>
-          </a:prstGeom>
-          <a:noFill/>
-          <a:ln/>
-        </p:spPr>
-        <p:txBody>
-          <a:bodyPr wrap="square" lIns="0" tIns="0" rIns="0" bIns="0" rtlCol="0" anchor="ctr"/>
-          <a:lstStyle/>
-          <a:p>
-            <a:pPr algn="r" indent="0" marL="0">
-              <a:buNone/>
-            </a:pPr>
-            <a:r>
-              <a:rPr lang="en-US" sz="900" dirty="0">
-                <a:solidFill>
-                  <a:srgbClr val="5D5D72"/>
-                </a:solidFill>
-                <a:latin typeface="Calibri" pitchFamily="34" charset="0"/>
-                <a:ea typeface="Calibri" pitchFamily="34" charset="-122"/>
-                <a:cs typeface="Calibri" pitchFamily="34" charset="-120"/>
-              </a:rPr>
-              <a:t>23</a:t>
-            </a:r>
-            <a:endParaRPr lang="en-US" sz="900" dirty="0"/>
+        </p:spPr>
+        <p:txBody>
+          <a:bodyPr wrap="none" lIns="0" rIns="0" tIns="0" bIns="0">
+            <a:spAutoFit/>
+          </a:bodyPr>
+          <a:lstStyle/>
+          <a:p>
+            <a:pPr algn="r"/>
+            <a:r>
+              <a:rPr sz="1000">
+                <a:solidFill>
+                  <a:srgbClr val="8A939B"/>
+                </a:solidFill>
+                <a:hlinkClick r:id="rId3"/>
+              </a:rPr>
+              <a:t>cuinotes.com</a:t>
+            </a:r>
+            <a:r>
+              <a:rPr sz="1000">
+                <a:solidFill>
+                  <a:srgbClr val="8A939B"/>
+                </a:solidFill>
+              </a:rPr>
+              <a:t>  ·  23</a:t>
+            </a:r>
           </a:p>
         </p:txBody>
       </p:sp>
@@ -12329,6 +11865,10 @@
             <a:tailEnd type="triangle"/>
           </a:ln>
         </p:spPr>
+        <p:txBody>
+          <a:bodyPr/>
+          <a:p/>
+        </p:txBody>
       </p:sp>
       <p:sp>
         <p:nvSpPr>
@@ -12353,6 +11893,10 @@
             <a:tailEnd type="triangle"/>
           </a:ln>
         </p:spPr>
+        <p:txBody>
+          <a:bodyPr/>
+          <a:p/>
+        </p:txBody>
       </p:sp>
       <p:sp>
         <p:nvSpPr>
@@ -12418,6 +11962,10 @@
             <a:tailEnd type="triangle"/>
           </a:ln>
         </p:spPr>
+        <p:txBody>
+          <a:bodyPr/>
+          <a:p/>
+        </p:txBody>
       </p:sp>
       <p:sp>
         <p:nvSpPr>
@@ -12483,6 +12031,10 @@
             <a:tailEnd type="triangle"/>
           </a:ln>
         </p:spPr>
+        <p:txBody>
+          <a:bodyPr/>
+          <a:p/>
+        </p:txBody>
       </p:sp>
       <p:sp>
         <p:nvSpPr>
@@ -12548,6 +12100,10 @@
             <a:tailEnd type="triangle"/>
           </a:ln>
         </p:spPr>
+        <p:txBody>
+          <a:bodyPr/>
+          <a:p/>
+        </p:txBody>
       </p:sp>
       <p:sp>
         <p:nvSpPr>
@@ -12609,6 +12165,10 @@
           </a:solidFill>
           <a:ln/>
         </p:spPr>
+        <p:txBody>
+          <a:bodyPr/>
+          <a:p/>
+        </p:txBody>
       </p:sp>
       <p:sp>
         <p:nvSpPr>
@@ -12691,6 +12251,10 @@
           </a:solidFill>
           <a:ln/>
         </p:spPr>
+        <p:txBody>
+          <a:bodyPr/>
+          <a:p/>
+        </p:txBody>
       </p:sp>
       <p:sp>
         <p:nvSpPr>
@@ -12773,6 +12337,10 @@
           </a:solidFill>
           <a:ln/>
         </p:spPr>
+        <p:txBody>
+          <a:bodyPr/>
+          <a:p/>
+        </p:txBody>
       </p:sp>
       <p:sp>
         <p:nvSpPr>
@@ -12855,6 +12423,10 @@
           </a:solidFill>
           <a:ln/>
         </p:spPr>
+        <p:txBody>
+          <a:bodyPr/>
+          <a:p/>
+        </p:txBody>
       </p:sp>
       <p:sp>
         <p:nvSpPr>
@@ -12917,6 +12489,10 @@
           </a:solidFill>
           <a:ln/>
         </p:spPr>
+        <p:txBody>
+          <a:bodyPr/>
+          <a:p/>
+        </p:txBody>
       </p:sp>
       <p:sp>
         <p:nvSpPr>
@@ -12999,6 +12575,10 @@
           </a:solidFill>
           <a:ln/>
         </p:spPr>
+        <p:txBody>
+          <a:bodyPr/>
+          <a:p/>
+        </p:txBody>
       </p:sp>
       <p:sp>
         <p:nvSpPr>
@@ -13103,79 +12683,44 @@
       </p:sp>
       <p:sp>
         <p:nvSpPr>
-          <p:cNvPr id="26" name="Text 24"/>
+          <p:cNvPr id="28" name="cuinotes-footer-mark"/>
           <p:cNvSpPr txBox="1"/>
           <p:nvPr/>
         </p:nvSpPr>
         <p:spPr>
           <a:xfrm>
-            <a:off x="640080" y="6446520"/>
-            <a:ext cx="8686800" cy="292608"/>
+            <a:off x="9951720" y="6455664"/>
+            <a:ext cx="2011680" cy="292608"/>
           </a:xfrm>
           <a:prstGeom prst="rect">
             <a:avLst/>
           </a:prstGeom>
           <a:noFill/>
-          <a:ln/>
-        </p:spPr>
-        <p:txBody>
-          <a:bodyPr wrap="square" lIns="0" tIns="0" rIns="0" bIns="0" rtlCol="0" anchor="ctr"/>
-          <a:lstStyle/>
-          <a:p>
-            <a:pPr algn="l" indent="0" marL="0">
-              <a:buNone/>
-            </a:pPr>
-            <a:r>
-              <a:rPr lang="en-US" sz="900" dirty="0">
-                <a:solidFill>
-                  <a:srgbClr val="5D5D72"/>
-                </a:solidFill>
-                <a:latin typeface="Calibri" pitchFamily="34" charset="0"/>
-                <a:ea typeface="Calibri" pitchFamily="34" charset="-122"/>
-                <a:cs typeface="Calibri" pitchFamily="34" charset="-120"/>
-              </a:rPr>
-              <a:t>Usman Akram  •  COMSATS University Islamabad</a:t>
-            </a:r>
-            <a:endParaRPr lang="en-US" sz="900" dirty="0"/>
-          </a:p>
-        </p:txBody>
-      </p:sp>
-      <p:sp>
-        <p:nvSpPr>
-          <p:cNvPr id="27" name="Text 25"/>
-          <p:cNvSpPr txBox="1"/>
-          <p:nvPr/>
-        </p:nvSpPr>
-        <p:spPr>
-          <a:xfrm>
-            <a:off x="11155680" y="6446520"/>
-            <a:ext cx="457200" cy="292608"/>
-          </a:xfrm>
-          <a:prstGeom prst="rect">
-            <a:avLst/>
-          </a:prstGeom>
-          <a:noFill/>
-          <a:ln/>
-        </p:spPr>
-        <p:txBody>
-          <a:bodyPr wrap="square" lIns="0" tIns="0" rIns="0" bIns="0" rtlCol="0" anchor="ctr"/>
-          <a:lstStyle/>
-          <a:p>
-            <a:pPr algn="r" indent="0" marL="0">
-              <a:buNone/>
-            </a:pPr>
-            <a:r>
-              <a:rPr lang="en-US" sz="900" dirty="0">
-                <a:solidFill>
-                  <a:srgbClr val="5D5D72"/>
-                </a:solidFill>
-                <a:latin typeface="Calibri" pitchFamily="34" charset="0"/>
-                <a:ea typeface="Calibri" pitchFamily="34" charset="-122"/>
-                <a:cs typeface="Calibri" pitchFamily="34" charset="-120"/>
-              </a:rPr>
-              <a:t>24</a:t>
-            </a:r>
-            <a:endParaRPr lang="en-US" sz="900" dirty="0"/>
+        </p:spPr>
+        <p:txBody>
+          <a:bodyPr wrap="none" lIns="0" rIns="0" tIns="0" bIns="0">
+            <a:spAutoFit/>
+          </a:bodyPr>
+          <a:lstStyle/>
+          <a:p>
+            <a:pPr algn="r"/>
+            <a:r>
+              <a:rPr sz="1000">
+                <a:solidFill>
+                  <a:srgbClr val="8A939B"/>
+                </a:solidFill>
+                <a:hlinkClick r:id="rId3"/>
+              </a:rPr>
+              <a:t>cuinotes.com</a:t>
+            </a:r>
+            <a:r>
+              <a:rPr sz="1000">
+                <a:solidFill>
+                  <a:srgbClr val="8A939B"/>
+                </a:solidFill>
+              </a:rPr>
+              <a:t>  ·  24</a:t>
+            </a:r>
           </a:p>
         </p:txBody>
       </p:sp>
@@ -13310,6 +12855,10 @@
           </a:solidFill>
           <a:ln/>
         </p:spPr>
+        <p:txBody>
+          <a:bodyPr/>
+          <a:p/>
+        </p:txBody>
       </p:sp>
       <p:sp>
         <p:nvSpPr>
@@ -13443,79 +12992,44 @@
       </p:sp>
       <p:sp>
         <p:nvSpPr>
-          <p:cNvPr id="7" name="Text 5"/>
+          <p:cNvPr id="9" name="cuinotes-footer-mark"/>
           <p:cNvSpPr txBox="1"/>
           <p:nvPr/>
         </p:nvSpPr>
         <p:spPr>
           <a:xfrm>
-            <a:off x="640080" y="6446520"/>
-            <a:ext cx="8686800" cy="292608"/>
+            <a:off x="9951720" y="6455664"/>
+            <a:ext cx="2011680" cy="292608"/>
           </a:xfrm>
           <a:prstGeom prst="rect">
             <a:avLst/>
           </a:prstGeom>
           <a:noFill/>
-          <a:ln/>
-        </p:spPr>
-        <p:txBody>
-          <a:bodyPr wrap="square" lIns="0" tIns="0" rIns="0" bIns="0" rtlCol="0" anchor="ctr"/>
-          <a:lstStyle/>
-          <a:p>
-            <a:pPr algn="l" indent="0" marL="0">
-              <a:buNone/>
-            </a:pPr>
-            <a:r>
-              <a:rPr lang="en-US" sz="900" dirty="0">
-                <a:solidFill>
-                  <a:srgbClr val="5D5D72"/>
-                </a:solidFill>
-                <a:latin typeface="Calibri" pitchFamily="34" charset="0"/>
-                <a:ea typeface="Calibri" pitchFamily="34" charset="-122"/>
-                <a:cs typeface="Calibri" pitchFamily="34" charset="-120"/>
-              </a:rPr>
-              <a:t>Usman Akram  •  COMSATS University Islamabad</a:t>
-            </a:r>
-            <a:endParaRPr lang="en-US" sz="900" dirty="0"/>
-          </a:p>
-        </p:txBody>
-      </p:sp>
-      <p:sp>
-        <p:nvSpPr>
-          <p:cNvPr id="8" name="Text 6"/>
-          <p:cNvSpPr txBox="1"/>
-          <p:nvPr/>
-        </p:nvSpPr>
-        <p:spPr>
-          <a:xfrm>
-            <a:off x="11155680" y="6446520"/>
-            <a:ext cx="457200" cy="292608"/>
-          </a:xfrm>
-          <a:prstGeom prst="rect">
-            <a:avLst/>
-          </a:prstGeom>
-          <a:noFill/>
-          <a:ln/>
-        </p:spPr>
-        <p:txBody>
-          <a:bodyPr wrap="square" lIns="0" tIns="0" rIns="0" bIns="0" rtlCol="0" anchor="ctr"/>
-          <a:lstStyle/>
-          <a:p>
-            <a:pPr algn="r" indent="0" marL="0">
-              <a:buNone/>
-            </a:pPr>
-            <a:r>
-              <a:rPr lang="en-US" sz="900" dirty="0">
-                <a:solidFill>
-                  <a:srgbClr val="5D5D72"/>
-                </a:solidFill>
-                <a:latin typeface="Calibri" pitchFamily="34" charset="0"/>
-                <a:ea typeface="Calibri" pitchFamily="34" charset="-122"/>
-                <a:cs typeface="Calibri" pitchFamily="34" charset="-120"/>
-              </a:rPr>
-              <a:t>25</a:t>
-            </a:r>
-            <a:endParaRPr lang="en-US" sz="900" dirty="0"/>
+        </p:spPr>
+        <p:txBody>
+          <a:bodyPr wrap="none" lIns="0" rIns="0" tIns="0" bIns="0">
+            <a:spAutoFit/>
+          </a:bodyPr>
+          <a:lstStyle/>
+          <a:p>
+            <a:pPr algn="r"/>
+            <a:r>
+              <a:rPr sz="1000">
+                <a:solidFill>
+                  <a:srgbClr val="8A939B"/>
+                </a:solidFill>
+                <a:hlinkClick r:id="rId3"/>
+              </a:rPr>
+              <a:t>cuinotes.com</a:t>
+            </a:r>
+            <a:r>
+              <a:rPr sz="1000">
+                <a:solidFill>
+                  <a:srgbClr val="8A939B"/>
+                </a:solidFill>
+              </a:rPr>
+              <a:t>  ·  25</a:t>
+            </a:r>
           </a:p>
         </p:txBody>
       </p:sp>
@@ -14390,79 +13904,44 @@
       </p:sp>
       <p:sp>
         <p:nvSpPr>
-          <p:cNvPr id="6" name="Text 3"/>
+          <p:cNvPr id="28" name="cuinotes-footer-mark"/>
           <p:cNvSpPr txBox="1"/>
           <p:nvPr/>
         </p:nvSpPr>
         <p:spPr>
           <a:xfrm>
-            <a:off x="640080" y="6446520"/>
-            <a:ext cx="8686800" cy="292608"/>
+            <a:off x="9951720" y="6455664"/>
+            <a:ext cx="2011680" cy="292608"/>
           </a:xfrm>
           <a:prstGeom prst="rect">
             <a:avLst/>
           </a:prstGeom>
           <a:noFill/>
-          <a:ln/>
-        </p:spPr>
-        <p:txBody>
-          <a:bodyPr wrap="square" lIns="0" tIns="0" rIns="0" bIns="0" rtlCol="0" anchor="ctr"/>
-          <a:lstStyle/>
-          <a:p>
-            <a:pPr algn="l" indent="0" marL="0">
-              <a:buNone/>
-            </a:pPr>
-            <a:r>
-              <a:rPr lang="en-US" sz="900" dirty="0">
-                <a:solidFill>
-                  <a:srgbClr val="5D5D72"/>
-                </a:solidFill>
-                <a:latin typeface="Calibri" pitchFamily="34" charset="0"/>
-                <a:ea typeface="Calibri" pitchFamily="34" charset="-122"/>
-                <a:cs typeface="Calibri" pitchFamily="34" charset="-120"/>
-              </a:rPr>
-              <a:t>Usman Akram  •  COMSATS University Islamabad</a:t>
-            </a:r>
-            <a:endParaRPr lang="en-US" sz="900" dirty="0"/>
-          </a:p>
-        </p:txBody>
-      </p:sp>
-      <p:sp>
-        <p:nvSpPr>
-          <p:cNvPr id="7" name="Text 4"/>
-          <p:cNvSpPr txBox="1"/>
-          <p:nvPr/>
-        </p:nvSpPr>
-        <p:spPr>
-          <a:xfrm>
-            <a:off x="11155680" y="6446520"/>
-            <a:ext cx="457200" cy="292608"/>
-          </a:xfrm>
-          <a:prstGeom prst="rect">
-            <a:avLst/>
-          </a:prstGeom>
-          <a:noFill/>
-          <a:ln/>
-        </p:spPr>
-        <p:txBody>
-          <a:bodyPr wrap="square" lIns="0" tIns="0" rIns="0" bIns="0" rtlCol="0" anchor="ctr"/>
-          <a:lstStyle/>
-          <a:p>
-            <a:pPr algn="r" indent="0" marL="0">
-              <a:buNone/>
-            </a:pPr>
-            <a:r>
-              <a:rPr lang="en-US" sz="900" dirty="0">
-                <a:solidFill>
-                  <a:srgbClr val="5D5D72"/>
-                </a:solidFill>
-                <a:latin typeface="Calibri" pitchFamily="34" charset="0"/>
-                <a:ea typeface="Calibri" pitchFamily="34" charset="-122"/>
-                <a:cs typeface="Calibri" pitchFamily="34" charset="-120"/>
-              </a:rPr>
-              <a:t>26</a:t>
-            </a:r>
-            <a:endParaRPr lang="en-US" sz="900" dirty="0"/>
+        </p:spPr>
+        <p:txBody>
+          <a:bodyPr wrap="none" lIns="0" rIns="0" tIns="0" bIns="0">
+            <a:spAutoFit/>
+          </a:bodyPr>
+          <a:lstStyle/>
+          <a:p>
+            <a:pPr algn="r"/>
+            <a:r>
+              <a:rPr sz="1000">
+                <a:solidFill>
+                  <a:srgbClr val="8A939B"/>
+                </a:solidFill>
+                <a:hlinkClick r:id="rId3"/>
+              </a:rPr>
+              <a:t>cuinotes.com</a:t>
+            </a:r>
+            <a:r>
+              <a:rPr sz="1000">
+                <a:solidFill>
+                  <a:srgbClr val="8A939B"/>
+                </a:solidFill>
+              </a:rPr>
+              <a:t>  ·  26</a:t>
+            </a:r>
           </a:p>
         </p:txBody>
       </p:sp>
@@ -15678,79 +15157,44 @@
       </p:sp>
       <p:sp>
         <p:nvSpPr>
-          <p:cNvPr id="6" name="Text 3"/>
+          <p:cNvPr id="29" name="cuinotes-footer-mark"/>
           <p:cNvSpPr txBox="1"/>
           <p:nvPr/>
         </p:nvSpPr>
         <p:spPr>
           <a:xfrm>
-            <a:off x="640080" y="6446520"/>
-            <a:ext cx="8686800" cy="292608"/>
+            <a:off x="9951720" y="6455664"/>
+            <a:ext cx="2011680" cy="292608"/>
           </a:xfrm>
           <a:prstGeom prst="rect">
             <a:avLst/>
           </a:prstGeom>
           <a:noFill/>
-          <a:ln/>
-        </p:spPr>
-        <p:txBody>
-          <a:bodyPr wrap="square" lIns="0" tIns="0" rIns="0" bIns="0" rtlCol="0" anchor="ctr"/>
-          <a:lstStyle/>
-          <a:p>
-            <a:pPr algn="l" indent="0" marL="0">
-              <a:buNone/>
-            </a:pPr>
-            <a:r>
-              <a:rPr lang="en-US" sz="900" dirty="0">
-                <a:solidFill>
-                  <a:srgbClr val="5D5D72"/>
-                </a:solidFill>
-                <a:latin typeface="Calibri" pitchFamily="34" charset="0"/>
-                <a:ea typeface="Calibri" pitchFamily="34" charset="-122"/>
-                <a:cs typeface="Calibri" pitchFamily="34" charset="-120"/>
-              </a:rPr>
-              <a:t>Usman Akram  •  COMSATS University Islamabad</a:t>
-            </a:r>
-            <a:endParaRPr lang="en-US" sz="900" dirty="0"/>
-          </a:p>
-        </p:txBody>
-      </p:sp>
-      <p:sp>
-        <p:nvSpPr>
-          <p:cNvPr id="7" name="Text 4"/>
-          <p:cNvSpPr txBox="1"/>
-          <p:nvPr/>
-        </p:nvSpPr>
-        <p:spPr>
-          <a:xfrm>
-            <a:off x="11155680" y="6446520"/>
-            <a:ext cx="457200" cy="292608"/>
-          </a:xfrm>
-          <a:prstGeom prst="rect">
-            <a:avLst/>
-          </a:prstGeom>
-          <a:noFill/>
-          <a:ln/>
-        </p:spPr>
-        <p:txBody>
-          <a:bodyPr wrap="square" lIns="0" tIns="0" rIns="0" bIns="0" rtlCol="0" anchor="ctr"/>
-          <a:lstStyle/>
-          <a:p>
-            <a:pPr algn="r" indent="0" marL="0">
-              <a:buNone/>
-            </a:pPr>
-            <a:r>
-              <a:rPr lang="en-US" sz="900" dirty="0">
-                <a:solidFill>
-                  <a:srgbClr val="5D5D72"/>
-                </a:solidFill>
-                <a:latin typeface="Calibri" pitchFamily="34" charset="0"/>
-                <a:ea typeface="Calibri" pitchFamily="34" charset="-122"/>
-                <a:cs typeface="Calibri" pitchFamily="34" charset="-120"/>
-              </a:rPr>
-              <a:t>27</a:t>
-            </a:r>
-            <a:endParaRPr lang="en-US" sz="900" dirty="0"/>
+        </p:spPr>
+        <p:txBody>
+          <a:bodyPr wrap="none" lIns="0" rIns="0" tIns="0" bIns="0">
+            <a:spAutoFit/>
+          </a:bodyPr>
+          <a:lstStyle/>
+          <a:p>
+            <a:pPr algn="r"/>
+            <a:r>
+              <a:rPr sz="1000">
+                <a:solidFill>
+                  <a:srgbClr val="8A939B"/>
+                </a:solidFill>
+                <a:hlinkClick r:id="rId3"/>
+              </a:rPr>
+              <a:t>cuinotes.com</a:t>
+            </a:r>
+            <a:r>
+              <a:rPr sz="1000">
+                <a:solidFill>
+                  <a:srgbClr val="8A939B"/>
+                </a:solidFill>
+              </a:rPr>
+              <a:t>  ·  27</a:t>
+            </a:r>
           </a:p>
         </p:txBody>
       </p:sp>
@@ -15885,6 +15329,10 @@
           </a:solidFill>
           <a:ln/>
         </p:spPr>
+        <p:txBody>
+          <a:bodyPr/>
+          <a:p/>
+        </p:txBody>
       </p:sp>
       <p:sp>
         <p:nvSpPr>
@@ -16138,79 +15586,44 @@
       </p:sp>
       <p:sp>
         <p:nvSpPr>
-          <p:cNvPr id="7" name="Text 5"/>
+          <p:cNvPr id="9" name="cuinotes-footer-mark"/>
           <p:cNvSpPr txBox="1"/>
           <p:nvPr/>
         </p:nvSpPr>
         <p:spPr>
           <a:xfrm>
-            <a:off x="640080" y="6446520"/>
-            <a:ext cx="8686800" cy="292608"/>
+            <a:off x="9951720" y="6455664"/>
+            <a:ext cx="2011680" cy="292608"/>
           </a:xfrm>
           <a:prstGeom prst="rect">
             <a:avLst/>
           </a:prstGeom>
           <a:noFill/>
-          <a:ln/>
-        </p:spPr>
-        <p:txBody>
-          <a:bodyPr wrap="square" lIns="0" tIns="0" rIns="0" bIns="0" rtlCol="0" anchor="ctr"/>
-          <a:lstStyle/>
-          <a:p>
-            <a:pPr algn="l" indent="0" marL="0">
-              <a:buNone/>
-            </a:pPr>
-            <a:r>
-              <a:rPr lang="en-US" sz="900" dirty="0">
-                <a:solidFill>
-                  <a:srgbClr val="5D5D72"/>
-                </a:solidFill>
-                <a:latin typeface="Calibri" pitchFamily="34" charset="0"/>
-                <a:ea typeface="Calibri" pitchFamily="34" charset="-122"/>
-                <a:cs typeface="Calibri" pitchFamily="34" charset="-120"/>
-              </a:rPr>
-              <a:t>Usman Akram  •  COMSATS University Islamabad</a:t>
-            </a:r>
-            <a:endParaRPr lang="en-US" sz="900" dirty="0"/>
-          </a:p>
-        </p:txBody>
-      </p:sp>
-      <p:sp>
-        <p:nvSpPr>
-          <p:cNvPr id="8" name="Text 6"/>
-          <p:cNvSpPr txBox="1"/>
-          <p:nvPr/>
-        </p:nvSpPr>
-        <p:spPr>
-          <a:xfrm>
-            <a:off x="11155680" y="6446520"/>
-            <a:ext cx="457200" cy="292608"/>
-          </a:xfrm>
-          <a:prstGeom prst="rect">
-            <a:avLst/>
-          </a:prstGeom>
-          <a:noFill/>
-          <a:ln/>
-        </p:spPr>
-        <p:txBody>
-          <a:bodyPr wrap="square" lIns="0" tIns="0" rIns="0" bIns="0" rtlCol="0" anchor="ctr"/>
-          <a:lstStyle/>
-          <a:p>
-            <a:pPr algn="r" indent="0" marL="0">
-              <a:buNone/>
-            </a:pPr>
-            <a:r>
-              <a:rPr lang="en-US" sz="900" dirty="0">
-                <a:solidFill>
-                  <a:srgbClr val="5D5D72"/>
-                </a:solidFill>
-                <a:latin typeface="Calibri" pitchFamily="34" charset="0"/>
-                <a:ea typeface="Calibri" pitchFamily="34" charset="-122"/>
-                <a:cs typeface="Calibri" pitchFamily="34" charset="-120"/>
-              </a:rPr>
-              <a:t>28</a:t>
-            </a:r>
-            <a:endParaRPr lang="en-US" sz="900" dirty="0"/>
+        </p:spPr>
+        <p:txBody>
+          <a:bodyPr wrap="none" lIns="0" rIns="0" tIns="0" bIns="0">
+            <a:spAutoFit/>
+          </a:bodyPr>
+          <a:lstStyle/>
+          <a:p>
+            <a:pPr algn="r"/>
+            <a:r>
+              <a:rPr sz="1000">
+                <a:solidFill>
+                  <a:srgbClr val="8A939B"/>
+                </a:solidFill>
+                <a:hlinkClick r:id="rId3"/>
+              </a:rPr>
+              <a:t>cuinotes.com</a:t>
+            </a:r>
+            <a:r>
+              <a:rPr sz="1000">
+                <a:solidFill>
+                  <a:srgbClr val="8A939B"/>
+                </a:solidFill>
+              </a:rPr>
+              <a:t>  ·  28</a:t>
+            </a:r>
           </a:p>
         </p:txBody>
       </p:sp>
@@ -17184,79 +16597,44 @@
       </p:graphicFrame>
       <p:sp>
         <p:nvSpPr>
-          <p:cNvPr id="5" name="Text 2"/>
+          <p:cNvPr id="31" name="cuinotes-footer-mark"/>
           <p:cNvSpPr txBox="1"/>
           <p:nvPr/>
         </p:nvSpPr>
         <p:spPr>
           <a:xfrm>
-            <a:off x="640080" y="6446520"/>
-            <a:ext cx="8686800" cy="292608"/>
+            <a:off x="9951720" y="6455664"/>
+            <a:ext cx="2011680" cy="292608"/>
           </a:xfrm>
           <a:prstGeom prst="rect">
             <a:avLst/>
           </a:prstGeom>
           <a:noFill/>
-          <a:ln/>
-        </p:spPr>
-        <p:txBody>
-          <a:bodyPr wrap="square" lIns="0" tIns="0" rIns="0" bIns="0" rtlCol="0" anchor="ctr"/>
-          <a:lstStyle/>
-          <a:p>
-            <a:pPr algn="l" indent="0" marL="0">
-              <a:buNone/>
-            </a:pPr>
-            <a:r>
-              <a:rPr lang="en-US" sz="900" dirty="0">
-                <a:solidFill>
-                  <a:srgbClr val="5D5D72"/>
-                </a:solidFill>
-                <a:latin typeface="Calibri" pitchFamily="34" charset="0"/>
-                <a:ea typeface="Calibri" pitchFamily="34" charset="-122"/>
-                <a:cs typeface="Calibri" pitchFamily="34" charset="-120"/>
-              </a:rPr>
-              <a:t>Usman Akram  •  COMSATS University Islamabad</a:t>
-            </a:r>
-            <a:endParaRPr lang="en-US" sz="900" dirty="0"/>
-          </a:p>
-        </p:txBody>
-      </p:sp>
-      <p:sp>
-        <p:nvSpPr>
-          <p:cNvPr id="6" name="Text 3"/>
-          <p:cNvSpPr txBox="1"/>
-          <p:nvPr/>
-        </p:nvSpPr>
-        <p:spPr>
-          <a:xfrm>
-            <a:off x="11155680" y="6446520"/>
-            <a:ext cx="457200" cy="292608"/>
-          </a:xfrm>
-          <a:prstGeom prst="rect">
-            <a:avLst/>
-          </a:prstGeom>
-          <a:noFill/>
-          <a:ln/>
-        </p:spPr>
-        <p:txBody>
-          <a:bodyPr wrap="square" lIns="0" tIns="0" rIns="0" bIns="0" rtlCol="0" anchor="ctr"/>
-          <a:lstStyle/>
-          <a:p>
-            <a:pPr algn="r" indent="0" marL="0">
-              <a:buNone/>
-            </a:pPr>
-            <a:r>
-              <a:rPr lang="en-US" sz="900" dirty="0">
-                <a:solidFill>
-                  <a:srgbClr val="5D5D72"/>
-                </a:solidFill>
-                <a:latin typeface="Calibri" pitchFamily="34" charset="0"/>
-                <a:ea typeface="Calibri" pitchFamily="34" charset="-122"/>
-                <a:cs typeface="Calibri" pitchFamily="34" charset="-120"/>
-              </a:rPr>
-              <a:t>29</a:t>
-            </a:r>
-            <a:endParaRPr lang="en-US" sz="900" dirty="0"/>
+        </p:spPr>
+        <p:txBody>
+          <a:bodyPr wrap="none" lIns="0" rIns="0" tIns="0" bIns="0">
+            <a:spAutoFit/>
+          </a:bodyPr>
+          <a:lstStyle/>
+          <a:p>
+            <a:pPr algn="r"/>
+            <a:r>
+              <a:rPr sz="1000">
+                <a:solidFill>
+                  <a:srgbClr val="8A939B"/>
+                </a:solidFill>
+                <a:hlinkClick r:id="rId3"/>
+              </a:rPr>
+              <a:t>cuinotes.com</a:t>
+            </a:r>
+            <a:r>
+              <a:rPr sz="1000">
+                <a:solidFill>
+                  <a:srgbClr val="8A939B"/>
+                </a:solidFill>
+              </a:rPr>
+              <a:t>  ·  29</a:t>
+            </a:r>
           </a:p>
         </p:txBody>
       </p:sp>
@@ -17389,6 +16767,10 @@
           </a:solidFill>
           <a:ln/>
         </p:spPr>
+        <p:txBody>
+          <a:bodyPr/>
+          <a:p/>
+        </p:txBody>
       </p:sp>
       <p:sp>
         <p:nvSpPr>
@@ -17487,6 +16869,10 @@
           </a:solidFill>
           <a:ln/>
         </p:spPr>
+        <p:txBody>
+          <a:bodyPr/>
+          <a:p/>
+        </p:txBody>
       </p:sp>
       <p:sp>
         <p:nvSpPr>
@@ -17585,6 +16971,10 @@
           </a:solidFill>
           <a:ln/>
         </p:spPr>
+        <p:txBody>
+          <a:bodyPr/>
+          <a:p/>
+        </p:txBody>
       </p:sp>
       <p:sp>
         <p:nvSpPr>
@@ -17683,6 +17073,10 @@
           </a:solidFill>
           <a:ln/>
         </p:spPr>
+        <p:txBody>
+          <a:bodyPr/>
+          <a:p/>
+        </p:txBody>
       </p:sp>
       <p:sp>
         <p:nvSpPr>
@@ -17764,79 +17158,44 @@
       </p:sp>
       <p:sp>
         <p:nvSpPr>
-          <p:cNvPr id="16" name="Text 14"/>
+          <p:cNvPr id="18" name="cuinotes-footer-mark"/>
           <p:cNvSpPr txBox="1"/>
           <p:nvPr/>
         </p:nvSpPr>
         <p:spPr>
           <a:xfrm>
-            <a:off x="640080" y="6446520"/>
-            <a:ext cx="8686800" cy="292608"/>
+            <a:off x="9951720" y="6455664"/>
+            <a:ext cx="2011680" cy="292608"/>
           </a:xfrm>
           <a:prstGeom prst="rect">
             <a:avLst/>
           </a:prstGeom>
           <a:noFill/>
-          <a:ln/>
-        </p:spPr>
-        <p:txBody>
-          <a:bodyPr wrap="square" lIns="0" tIns="0" rIns="0" bIns="0" rtlCol="0" anchor="ctr"/>
-          <a:lstStyle/>
-          <a:p>
-            <a:pPr algn="l" indent="0" marL="0">
-              <a:buNone/>
-            </a:pPr>
-            <a:r>
-              <a:rPr lang="en-US" sz="900" dirty="0">
-                <a:solidFill>
-                  <a:srgbClr val="5D5D72"/>
-                </a:solidFill>
-                <a:latin typeface="Calibri" pitchFamily="34" charset="0"/>
-                <a:ea typeface="Calibri" pitchFamily="34" charset="-122"/>
-                <a:cs typeface="Calibri" pitchFamily="34" charset="-120"/>
-              </a:rPr>
-              <a:t>Usman Akram  •  COMSATS University Islamabad</a:t>
-            </a:r>
-            <a:endParaRPr lang="en-US" sz="900" dirty="0"/>
-          </a:p>
-        </p:txBody>
-      </p:sp>
-      <p:sp>
-        <p:nvSpPr>
-          <p:cNvPr id="17" name="Text 15"/>
-          <p:cNvSpPr txBox="1"/>
-          <p:nvPr/>
-        </p:nvSpPr>
-        <p:spPr>
-          <a:xfrm>
-            <a:off x="11155680" y="6446520"/>
-            <a:ext cx="457200" cy="292608"/>
-          </a:xfrm>
-          <a:prstGeom prst="rect">
-            <a:avLst/>
-          </a:prstGeom>
-          <a:noFill/>
-          <a:ln/>
-        </p:spPr>
-        <p:txBody>
-          <a:bodyPr wrap="square" lIns="0" tIns="0" rIns="0" bIns="0" rtlCol="0" anchor="ctr"/>
-          <a:lstStyle/>
-          <a:p>
-            <a:pPr algn="r" indent="0" marL="0">
-              <a:buNone/>
-            </a:pPr>
-            <a:r>
-              <a:rPr lang="en-US" sz="900" dirty="0">
-                <a:solidFill>
-                  <a:srgbClr val="5D5D72"/>
-                </a:solidFill>
-                <a:latin typeface="Calibri" pitchFamily="34" charset="0"/>
-                <a:ea typeface="Calibri" pitchFamily="34" charset="-122"/>
-                <a:cs typeface="Calibri" pitchFamily="34" charset="-120"/>
-              </a:rPr>
-              <a:t>3</a:t>
-            </a:r>
-            <a:endParaRPr lang="en-US" sz="900" dirty="0"/>
+        </p:spPr>
+        <p:txBody>
+          <a:bodyPr wrap="none" lIns="0" rIns="0" tIns="0" bIns="0">
+            <a:spAutoFit/>
+          </a:bodyPr>
+          <a:lstStyle/>
+          <a:p>
+            <a:pPr algn="r"/>
+            <a:r>
+              <a:rPr sz="1000">
+                <a:solidFill>
+                  <a:srgbClr val="8A939B"/>
+                </a:solidFill>
+                <a:hlinkClick r:id="rId3"/>
+              </a:rPr>
+              <a:t>cuinotes.com</a:t>
+            </a:r>
+            <a:r>
+              <a:rPr sz="1000">
+                <a:solidFill>
+                  <a:srgbClr val="8A939B"/>
+                </a:solidFill>
+              </a:rPr>
+              <a:t>  ·  3</a:t>
+            </a:r>
           </a:p>
         </p:txBody>
       </p:sp>
@@ -17971,6 +17330,10 @@
           </a:solidFill>
           <a:ln/>
         </p:spPr>
+        <p:txBody>
+          <a:bodyPr/>
+          <a:p/>
+        </p:txBody>
       </p:sp>
       <p:sp>
         <p:nvSpPr>
@@ -18127,6 +17490,10 @@
             </a:outerShdw>
           </a:effectLst>
         </p:spPr>
+        <p:txBody>
+          <a:bodyPr/>
+          <a:p/>
+        </p:txBody>
       </p:sp>
       <p:pic>
         <p:nvPicPr>
@@ -18154,79 +17521,44 @@
       </p:pic>
       <p:sp>
         <p:nvSpPr>
-          <p:cNvPr id="8" name="Text 5"/>
+          <p:cNvPr id="10" name="cuinotes-footer-mark"/>
           <p:cNvSpPr txBox="1"/>
           <p:nvPr/>
         </p:nvSpPr>
         <p:spPr>
           <a:xfrm>
-            <a:off x="640080" y="6446520"/>
-            <a:ext cx="8686800" cy="292608"/>
+            <a:off x="9951720" y="6455664"/>
+            <a:ext cx="2011680" cy="292608"/>
           </a:xfrm>
           <a:prstGeom prst="rect">
             <a:avLst/>
           </a:prstGeom>
           <a:noFill/>
-          <a:ln/>
-        </p:spPr>
-        <p:txBody>
-          <a:bodyPr wrap="square" lIns="0" tIns="0" rIns="0" bIns="0" rtlCol="0" anchor="ctr"/>
-          <a:lstStyle/>
-          <a:p>
-            <a:pPr algn="l" indent="0" marL="0">
-              <a:buNone/>
-            </a:pPr>
-            <a:r>
-              <a:rPr lang="en-US" sz="900" dirty="0">
-                <a:solidFill>
-                  <a:srgbClr val="5D5D72"/>
-                </a:solidFill>
-                <a:latin typeface="Calibri" pitchFamily="34" charset="0"/>
-                <a:ea typeface="Calibri" pitchFamily="34" charset="-122"/>
-                <a:cs typeface="Calibri" pitchFamily="34" charset="-120"/>
-              </a:rPr>
-              <a:t>Usman Akram  •  COMSATS University Islamabad</a:t>
-            </a:r>
-            <a:endParaRPr lang="en-US" sz="900" dirty="0"/>
-          </a:p>
-        </p:txBody>
-      </p:sp>
-      <p:sp>
-        <p:nvSpPr>
-          <p:cNvPr id="9" name="Text 6"/>
-          <p:cNvSpPr txBox="1"/>
-          <p:nvPr/>
-        </p:nvSpPr>
-        <p:spPr>
-          <a:xfrm>
-            <a:off x="11155680" y="6446520"/>
-            <a:ext cx="457200" cy="292608"/>
-          </a:xfrm>
-          <a:prstGeom prst="rect">
-            <a:avLst/>
-          </a:prstGeom>
-          <a:noFill/>
-          <a:ln/>
-        </p:spPr>
-        <p:txBody>
-          <a:bodyPr wrap="square" lIns="0" tIns="0" rIns="0" bIns="0" rtlCol="0" anchor="ctr"/>
-          <a:lstStyle/>
-          <a:p>
-            <a:pPr algn="r" indent="0" marL="0">
-              <a:buNone/>
-            </a:pPr>
-            <a:r>
-              <a:rPr lang="en-US" sz="900" dirty="0">
-                <a:solidFill>
-                  <a:srgbClr val="5D5D72"/>
-                </a:solidFill>
-                <a:latin typeface="Calibri" pitchFamily="34" charset="0"/>
-                <a:ea typeface="Calibri" pitchFamily="34" charset="-122"/>
-                <a:cs typeface="Calibri" pitchFamily="34" charset="-120"/>
-              </a:rPr>
-              <a:t>30</a:t>
-            </a:r>
-            <a:endParaRPr lang="en-US" sz="900" dirty="0"/>
+        </p:spPr>
+        <p:txBody>
+          <a:bodyPr wrap="none" lIns="0" rIns="0" tIns="0" bIns="0">
+            <a:spAutoFit/>
+          </a:bodyPr>
+          <a:lstStyle/>
+          <a:p>
+            <a:pPr algn="r"/>
+            <a:r>
+              <a:rPr sz="1000">
+                <a:solidFill>
+                  <a:srgbClr val="8A939B"/>
+                </a:solidFill>
+                <a:hlinkClick r:id="rId4"/>
+              </a:rPr>
+              <a:t>cuinotes.com</a:t>
+            </a:r>
+            <a:r>
+              <a:rPr sz="1000">
+                <a:solidFill>
+                  <a:srgbClr val="8A939B"/>
+                </a:solidFill>
+              </a:rPr>
+              <a:t>  ·  30</a:t>
+            </a:r>
           </a:p>
         </p:txBody>
       </p:sp>
@@ -18400,6 +17732,10 @@
           </a:solidFill>
           <a:ln/>
         </p:spPr>
+        <p:txBody>
+          <a:bodyPr/>
+          <a:p/>
+        </p:txBody>
       </p:sp>
       <p:sp>
         <p:nvSpPr>
@@ -18576,6 +17912,10 @@
             </a:outerShdw>
           </a:effectLst>
         </p:spPr>
+        <p:txBody>
+          <a:bodyPr/>
+          <a:p/>
+        </p:txBody>
       </p:sp>
       <p:pic>
         <p:nvPicPr>
@@ -18603,79 +17943,44 @@
       </p:pic>
       <p:sp>
         <p:nvSpPr>
-          <p:cNvPr id="9" name="Text 6"/>
+          <p:cNvPr id="11" name="cuinotes-footer-mark"/>
           <p:cNvSpPr txBox="1"/>
           <p:nvPr/>
         </p:nvSpPr>
         <p:spPr>
           <a:xfrm>
-            <a:off x="640080" y="6446520"/>
-            <a:ext cx="8686800" cy="292608"/>
+            <a:off x="9951720" y="6455664"/>
+            <a:ext cx="2011680" cy="292608"/>
           </a:xfrm>
           <a:prstGeom prst="rect">
             <a:avLst/>
           </a:prstGeom>
           <a:noFill/>
-          <a:ln/>
-        </p:spPr>
-        <p:txBody>
-          <a:bodyPr wrap="square" lIns="0" tIns="0" rIns="0" bIns="0" rtlCol="0" anchor="ctr"/>
-          <a:lstStyle/>
-          <a:p>
-            <a:pPr algn="l" indent="0" marL="0">
-              <a:buNone/>
-            </a:pPr>
-            <a:r>
-              <a:rPr lang="en-US" sz="900" dirty="0">
-                <a:solidFill>
-                  <a:srgbClr val="5D5D72"/>
-                </a:solidFill>
-                <a:latin typeface="Calibri" pitchFamily="34" charset="0"/>
-                <a:ea typeface="Calibri" pitchFamily="34" charset="-122"/>
-                <a:cs typeface="Calibri" pitchFamily="34" charset="-120"/>
-              </a:rPr>
-              <a:t>Usman Akram  •  COMSATS University Islamabad</a:t>
-            </a:r>
-            <a:endParaRPr lang="en-US" sz="900" dirty="0"/>
-          </a:p>
-        </p:txBody>
-      </p:sp>
-      <p:sp>
-        <p:nvSpPr>
-          <p:cNvPr id="10" name="Text 7"/>
-          <p:cNvSpPr txBox="1"/>
-          <p:nvPr/>
-        </p:nvSpPr>
-        <p:spPr>
-          <a:xfrm>
-            <a:off x="11155680" y="6446520"/>
-            <a:ext cx="457200" cy="292608"/>
-          </a:xfrm>
-          <a:prstGeom prst="rect">
-            <a:avLst/>
-          </a:prstGeom>
-          <a:noFill/>
-          <a:ln/>
-        </p:spPr>
-        <p:txBody>
-          <a:bodyPr wrap="square" lIns="0" tIns="0" rIns="0" bIns="0" rtlCol="0" anchor="ctr"/>
-          <a:lstStyle/>
-          <a:p>
-            <a:pPr algn="r" indent="0" marL="0">
-              <a:buNone/>
-            </a:pPr>
-            <a:r>
-              <a:rPr lang="en-US" sz="900" dirty="0">
-                <a:solidFill>
-                  <a:srgbClr val="5D5D72"/>
-                </a:solidFill>
-                <a:latin typeface="Calibri" pitchFamily="34" charset="0"/>
-                <a:ea typeface="Calibri" pitchFamily="34" charset="-122"/>
-                <a:cs typeface="Calibri" pitchFamily="34" charset="-120"/>
-              </a:rPr>
-              <a:t>31</a:t>
-            </a:r>
-            <a:endParaRPr lang="en-US" sz="900" dirty="0"/>
+        </p:spPr>
+        <p:txBody>
+          <a:bodyPr wrap="none" lIns="0" rIns="0" tIns="0" bIns="0">
+            <a:spAutoFit/>
+          </a:bodyPr>
+          <a:lstStyle/>
+          <a:p>
+            <a:pPr algn="r"/>
+            <a:r>
+              <a:rPr sz="1000">
+                <a:solidFill>
+                  <a:srgbClr val="8A939B"/>
+                </a:solidFill>
+                <a:hlinkClick r:id="rId4"/>
+              </a:rPr>
+              <a:t>cuinotes.com</a:t>
+            </a:r>
+            <a:r>
+              <a:rPr sz="1000">
+                <a:solidFill>
+                  <a:srgbClr val="8A939B"/>
+                </a:solidFill>
+              </a:rPr>
+              <a:t>  ·  31</a:t>
+            </a:r>
           </a:p>
         </p:txBody>
       </p:sp>
@@ -18810,6 +18115,10 @@
           </a:solidFill>
           <a:ln/>
         </p:spPr>
+        <p:txBody>
+          <a:bodyPr/>
+          <a:p/>
+        </p:txBody>
       </p:sp>
       <p:sp>
         <p:nvSpPr>
@@ -19006,6 +18315,10 @@
             </a:outerShdw>
           </a:effectLst>
         </p:spPr>
+        <p:txBody>
+          <a:bodyPr/>
+          <a:p/>
+        </p:txBody>
       </p:sp>
       <p:pic>
         <p:nvPicPr>
@@ -19033,79 +18346,44 @@
       </p:pic>
       <p:sp>
         <p:nvSpPr>
-          <p:cNvPr id="8" name="Text 5"/>
+          <p:cNvPr id="10" name="cuinotes-footer-mark"/>
           <p:cNvSpPr txBox="1"/>
           <p:nvPr/>
         </p:nvSpPr>
         <p:spPr>
           <a:xfrm>
-            <a:off x="640080" y="6446520"/>
-            <a:ext cx="8686800" cy="292608"/>
+            <a:off x="9951720" y="6455664"/>
+            <a:ext cx="2011680" cy="292608"/>
           </a:xfrm>
           <a:prstGeom prst="rect">
             <a:avLst/>
           </a:prstGeom>
           <a:noFill/>
-          <a:ln/>
-        </p:spPr>
-        <p:txBody>
-          <a:bodyPr wrap="square" lIns="0" tIns="0" rIns="0" bIns="0" rtlCol="0" anchor="ctr"/>
-          <a:lstStyle/>
-          <a:p>
-            <a:pPr algn="l" indent="0" marL="0">
-              <a:buNone/>
-            </a:pPr>
-            <a:r>
-              <a:rPr lang="en-US" sz="900" dirty="0">
-                <a:solidFill>
-                  <a:srgbClr val="5D5D72"/>
-                </a:solidFill>
-                <a:latin typeface="Calibri" pitchFamily="34" charset="0"/>
-                <a:ea typeface="Calibri" pitchFamily="34" charset="-122"/>
-                <a:cs typeface="Calibri" pitchFamily="34" charset="-120"/>
-              </a:rPr>
-              <a:t>Usman Akram  •  COMSATS University Islamabad</a:t>
-            </a:r>
-            <a:endParaRPr lang="en-US" sz="900" dirty="0"/>
-          </a:p>
-        </p:txBody>
-      </p:sp>
-      <p:sp>
-        <p:nvSpPr>
-          <p:cNvPr id="9" name="Text 6"/>
-          <p:cNvSpPr txBox="1"/>
-          <p:nvPr/>
-        </p:nvSpPr>
-        <p:spPr>
-          <a:xfrm>
-            <a:off x="11155680" y="6446520"/>
-            <a:ext cx="457200" cy="292608"/>
-          </a:xfrm>
-          <a:prstGeom prst="rect">
-            <a:avLst/>
-          </a:prstGeom>
-          <a:noFill/>
-          <a:ln/>
-        </p:spPr>
-        <p:txBody>
-          <a:bodyPr wrap="square" lIns="0" tIns="0" rIns="0" bIns="0" rtlCol="0" anchor="ctr"/>
-          <a:lstStyle/>
-          <a:p>
-            <a:pPr algn="r" indent="0" marL="0">
-              <a:buNone/>
-            </a:pPr>
-            <a:r>
-              <a:rPr lang="en-US" sz="900" dirty="0">
-                <a:solidFill>
-                  <a:srgbClr val="5D5D72"/>
-                </a:solidFill>
-                <a:latin typeface="Calibri" pitchFamily="34" charset="0"/>
-                <a:ea typeface="Calibri" pitchFamily="34" charset="-122"/>
-                <a:cs typeface="Calibri" pitchFamily="34" charset="-120"/>
-              </a:rPr>
-              <a:t>32</a:t>
-            </a:r>
-            <a:endParaRPr lang="en-US" sz="900" dirty="0"/>
+        </p:spPr>
+        <p:txBody>
+          <a:bodyPr wrap="none" lIns="0" rIns="0" tIns="0" bIns="0">
+            <a:spAutoFit/>
+          </a:bodyPr>
+          <a:lstStyle/>
+          <a:p>
+            <a:pPr algn="r"/>
+            <a:r>
+              <a:rPr sz="1000">
+                <a:solidFill>
+                  <a:srgbClr val="8A939B"/>
+                </a:solidFill>
+                <a:hlinkClick r:id="rId4"/>
+              </a:rPr>
+              <a:t>cuinotes.com</a:t>
+            </a:r>
+            <a:r>
+              <a:rPr sz="1000">
+                <a:solidFill>
+                  <a:srgbClr val="8A939B"/>
+                </a:solidFill>
+              </a:rPr>
+              <a:t>  ·  32</a:t>
+            </a:r>
           </a:p>
         </p:txBody>
       </p:sp>
@@ -19240,6 +18518,10 @@
           </a:solidFill>
           <a:ln/>
         </p:spPr>
+        <p:txBody>
+          <a:bodyPr/>
+          <a:p/>
+        </p:txBody>
       </p:sp>
       <p:sp>
         <p:nvSpPr>
@@ -19444,79 +18726,44 @@
       </p:sp>
       <p:sp>
         <p:nvSpPr>
-          <p:cNvPr id="7" name="Text 5"/>
+          <p:cNvPr id="9" name="cuinotes-footer-mark"/>
           <p:cNvSpPr txBox="1"/>
           <p:nvPr/>
         </p:nvSpPr>
         <p:spPr>
           <a:xfrm>
-            <a:off x="640080" y="6446520"/>
-            <a:ext cx="8686800" cy="292608"/>
+            <a:off x="9951720" y="6455664"/>
+            <a:ext cx="2011680" cy="292608"/>
           </a:xfrm>
           <a:prstGeom prst="rect">
             <a:avLst/>
           </a:prstGeom>
           <a:noFill/>
-          <a:ln/>
-        </p:spPr>
-        <p:txBody>
-          <a:bodyPr wrap="square" lIns="0" tIns="0" rIns="0" bIns="0" rtlCol="0" anchor="ctr"/>
-          <a:lstStyle/>
-          <a:p>
-            <a:pPr algn="l" indent="0" marL="0">
-              <a:buNone/>
-            </a:pPr>
-            <a:r>
-              <a:rPr lang="en-US" sz="900" dirty="0">
-                <a:solidFill>
-                  <a:srgbClr val="5D5D72"/>
-                </a:solidFill>
-                <a:latin typeface="Calibri" pitchFamily="34" charset="0"/>
-                <a:ea typeface="Calibri" pitchFamily="34" charset="-122"/>
-                <a:cs typeface="Calibri" pitchFamily="34" charset="-120"/>
-              </a:rPr>
-              <a:t>Usman Akram  •  COMSATS University Islamabad</a:t>
-            </a:r>
-            <a:endParaRPr lang="en-US" sz="900" dirty="0"/>
-          </a:p>
-        </p:txBody>
-      </p:sp>
-      <p:sp>
-        <p:nvSpPr>
-          <p:cNvPr id="8" name="Text 6"/>
-          <p:cNvSpPr txBox="1"/>
-          <p:nvPr/>
-        </p:nvSpPr>
-        <p:spPr>
-          <a:xfrm>
-            <a:off x="11155680" y="6446520"/>
-            <a:ext cx="457200" cy="292608"/>
-          </a:xfrm>
-          <a:prstGeom prst="rect">
-            <a:avLst/>
-          </a:prstGeom>
-          <a:noFill/>
-          <a:ln/>
-        </p:spPr>
-        <p:txBody>
-          <a:bodyPr wrap="square" lIns="0" tIns="0" rIns="0" bIns="0" rtlCol="0" anchor="ctr"/>
-          <a:lstStyle/>
-          <a:p>
-            <a:pPr algn="r" indent="0" marL="0">
-              <a:buNone/>
-            </a:pPr>
-            <a:r>
-              <a:rPr lang="en-US" sz="900" dirty="0">
-                <a:solidFill>
-                  <a:srgbClr val="5D5D72"/>
-                </a:solidFill>
-                <a:latin typeface="Calibri" pitchFamily="34" charset="0"/>
-                <a:ea typeface="Calibri" pitchFamily="34" charset="-122"/>
-                <a:cs typeface="Calibri" pitchFamily="34" charset="-120"/>
-              </a:rPr>
-              <a:t>33</a:t>
-            </a:r>
-            <a:endParaRPr lang="en-US" sz="900" dirty="0"/>
+        </p:spPr>
+        <p:txBody>
+          <a:bodyPr wrap="none" lIns="0" rIns="0" tIns="0" bIns="0">
+            <a:spAutoFit/>
+          </a:bodyPr>
+          <a:lstStyle/>
+          <a:p>
+            <a:pPr algn="r"/>
+            <a:r>
+              <a:rPr sz="1000">
+                <a:solidFill>
+                  <a:srgbClr val="8A939B"/>
+                </a:solidFill>
+                <a:hlinkClick r:id="rId3"/>
+              </a:rPr>
+              <a:t>cuinotes.com</a:t>
+            </a:r>
+            <a:r>
+              <a:rPr sz="1000">
+                <a:solidFill>
+                  <a:srgbClr val="8A939B"/>
+                </a:solidFill>
+              </a:rPr>
+              <a:t>  ·  33</a:t>
+            </a:r>
           </a:p>
         </p:txBody>
       </p:sp>
@@ -19649,6 +18896,10 @@
           </a:solidFill>
           <a:ln/>
         </p:spPr>
+        <p:txBody>
+          <a:bodyPr/>
+          <a:p/>
+        </p:txBody>
       </p:sp>
       <p:sp>
         <p:nvSpPr>
@@ -19747,6 +18998,10 @@
           </a:solidFill>
           <a:ln/>
         </p:spPr>
+        <p:txBody>
+          <a:bodyPr/>
+          <a:p/>
+        </p:txBody>
       </p:sp>
       <p:sp>
         <p:nvSpPr>
@@ -19845,6 +19100,10 @@
           </a:solidFill>
           <a:ln/>
         </p:spPr>
+        <p:txBody>
+          <a:bodyPr/>
+          <a:p/>
+        </p:txBody>
       </p:sp>
       <p:sp>
         <p:nvSpPr>
@@ -19943,6 +19202,10 @@
           </a:solidFill>
           <a:ln/>
         </p:spPr>
+        <p:txBody>
+          <a:bodyPr/>
+          <a:p/>
+        </p:txBody>
       </p:sp>
       <p:sp>
         <p:nvSpPr>
@@ -20041,6 +19304,10 @@
           </a:solidFill>
           <a:ln/>
         </p:spPr>
+        <p:txBody>
+          <a:bodyPr/>
+          <a:p/>
+        </p:txBody>
       </p:sp>
       <p:sp>
         <p:nvSpPr>
@@ -20139,6 +19406,10 @@
           </a:solidFill>
           <a:ln/>
         </p:spPr>
+        <p:txBody>
+          <a:bodyPr/>
+          <a:p/>
+        </p:txBody>
       </p:sp>
       <p:sp>
         <p:nvSpPr>
@@ -20220,79 +19491,44 @@
       </p:sp>
       <p:sp>
         <p:nvSpPr>
-          <p:cNvPr id="22" name="Text 20"/>
+          <p:cNvPr id="24" name="cuinotes-footer-mark"/>
           <p:cNvSpPr txBox="1"/>
           <p:nvPr/>
         </p:nvSpPr>
         <p:spPr>
           <a:xfrm>
-            <a:off x="640080" y="6446520"/>
-            <a:ext cx="8686800" cy="292608"/>
+            <a:off x="9951720" y="6455664"/>
+            <a:ext cx="2011680" cy="292608"/>
           </a:xfrm>
           <a:prstGeom prst="rect">
             <a:avLst/>
           </a:prstGeom>
           <a:noFill/>
-          <a:ln/>
-        </p:spPr>
-        <p:txBody>
-          <a:bodyPr wrap="square" lIns="0" tIns="0" rIns="0" bIns="0" rtlCol="0" anchor="ctr"/>
-          <a:lstStyle/>
-          <a:p>
-            <a:pPr algn="l" indent="0" marL="0">
-              <a:buNone/>
-            </a:pPr>
-            <a:r>
-              <a:rPr lang="en-US" sz="900" dirty="0">
-                <a:solidFill>
-                  <a:srgbClr val="9AA3D8"/>
-                </a:solidFill>
-                <a:latin typeface="Calibri" pitchFamily="34" charset="0"/>
-                <a:ea typeface="Calibri" pitchFamily="34" charset="-122"/>
-                <a:cs typeface="Calibri" pitchFamily="34" charset="-120"/>
-              </a:rPr>
-              <a:t>Usman Akram  •  COMSATS University Islamabad</a:t>
-            </a:r>
-            <a:endParaRPr lang="en-US" sz="900" dirty="0"/>
-          </a:p>
-        </p:txBody>
-      </p:sp>
-      <p:sp>
-        <p:nvSpPr>
-          <p:cNvPr id="23" name="Text 21"/>
-          <p:cNvSpPr txBox="1"/>
-          <p:nvPr/>
-        </p:nvSpPr>
-        <p:spPr>
-          <a:xfrm>
-            <a:off x="11155680" y="6446520"/>
-            <a:ext cx="457200" cy="292608"/>
-          </a:xfrm>
-          <a:prstGeom prst="rect">
-            <a:avLst/>
-          </a:prstGeom>
-          <a:noFill/>
-          <a:ln/>
-        </p:spPr>
-        <p:txBody>
-          <a:bodyPr wrap="square" lIns="0" tIns="0" rIns="0" bIns="0" rtlCol="0" anchor="ctr"/>
-          <a:lstStyle/>
-          <a:p>
-            <a:pPr algn="r" indent="0" marL="0">
-              <a:buNone/>
-            </a:pPr>
-            <a:r>
-              <a:rPr lang="en-US" sz="900" dirty="0">
-                <a:solidFill>
-                  <a:srgbClr val="9AA3D8"/>
-                </a:solidFill>
-                <a:latin typeface="Calibri" pitchFamily="34" charset="0"/>
-                <a:ea typeface="Calibri" pitchFamily="34" charset="-122"/>
-                <a:cs typeface="Calibri" pitchFamily="34" charset="-120"/>
-              </a:rPr>
-              <a:t>34</a:t>
-            </a:r>
-            <a:endParaRPr lang="en-US" sz="900" dirty="0"/>
+        </p:spPr>
+        <p:txBody>
+          <a:bodyPr wrap="none" lIns="0" rIns="0" tIns="0" bIns="0">
+            <a:spAutoFit/>
+          </a:bodyPr>
+          <a:lstStyle/>
+          <a:p>
+            <a:pPr algn="r"/>
+            <a:r>
+              <a:rPr sz="1000">
+                <a:solidFill>
+                  <a:srgbClr val="8A939B"/>
+                </a:solidFill>
+                <a:hlinkClick r:id="rId3"/>
+              </a:rPr>
+              <a:t>cuinotes.com</a:t>
+            </a:r>
+            <a:r>
+              <a:rPr sz="1000">
+                <a:solidFill>
+                  <a:srgbClr val="8A939B"/>
+                </a:solidFill>
+              </a:rPr>
+              <a:t>  ·  34</a:t>
+            </a:r>
           </a:p>
         </p:txBody>
       </p:sp>
@@ -20427,6 +19663,10 @@
           </a:solidFill>
           <a:ln/>
         </p:spPr>
+        <p:txBody>
+          <a:bodyPr/>
+          <a:p/>
+        </p:txBody>
       </p:sp>
       <p:sp>
         <p:nvSpPr>
@@ -20571,79 +19811,44 @@
       </p:sp>
       <p:sp>
         <p:nvSpPr>
-          <p:cNvPr id="7" name="Text 5"/>
+          <p:cNvPr id="9" name="cuinotes-footer-mark"/>
           <p:cNvSpPr txBox="1"/>
           <p:nvPr/>
         </p:nvSpPr>
         <p:spPr>
           <a:xfrm>
-            <a:off x="640080" y="6446520"/>
-            <a:ext cx="8686800" cy="292608"/>
+            <a:off x="9951720" y="6455664"/>
+            <a:ext cx="2011680" cy="292608"/>
           </a:xfrm>
           <a:prstGeom prst="rect">
             <a:avLst/>
           </a:prstGeom>
           <a:noFill/>
-          <a:ln/>
-        </p:spPr>
-        <p:txBody>
-          <a:bodyPr wrap="square" lIns="0" tIns="0" rIns="0" bIns="0" rtlCol="0" anchor="ctr"/>
-          <a:lstStyle/>
-          <a:p>
-            <a:pPr algn="l" indent="0" marL="0">
-              <a:buNone/>
-            </a:pPr>
-            <a:r>
-              <a:rPr lang="en-US" sz="900" dirty="0">
-                <a:solidFill>
-                  <a:srgbClr val="5D5D72"/>
-                </a:solidFill>
-                <a:latin typeface="Calibri" pitchFamily="34" charset="0"/>
-                <a:ea typeface="Calibri" pitchFamily="34" charset="-122"/>
-                <a:cs typeface="Calibri" pitchFamily="34" charset="-120"/>
-              </a:rPr>
-              <a:t>Usman Akram  •  COMSATS University Islamabad</a:t>
-            </a:r>
-            <a:endParaRPr lang="en-US" sz="900" dirty="0"/>
-          </a:p>
-        </p:txBody>
-      </p:sp>
-      <p:sp>
-        <p:nvSpPr>
-          <p:cNvPr id="8" name="Text 6"/>
-          <p:cNvSpPr txBox="1"/>
-          <p:nvPr/>
-        </p:nvSpPr>
-        <p:spPr>
-          <a:xfrm>
-            <a:off x="11155680" y="6446520"/>
-            <a:ext cx="457200" cy="292608"/>
-          </a:xfrm>
-          <a:prstGeom prst="rect">
-            <a:avLst/>
-          </a:prstGeom>
-          <a:noFill/>
-          <a:ln/>
-        </p:spPr>
-        <p:txBody>
-          <a:bodyPr wrap="square" lIns="0" tIns="0" rIns="0" bIns="0" rtlCol="0" anchor="ctr"/>
-          <a:lstStyle/>
-          <a:p>
-            <a:pPr algn="r" indent="0" marL="0">
-              <a:buNone/>
-            </a:pPr>
-            <a:r>
-              <a:rPr lang="en-US" sz="900" dirty="0">
-                <a:solidFill>
-                  <a:srgbClr val="5D5D72"/>
-                </a:solidFill>
-                <a:latin typeface="Calibri" pitchFamily="34" charset="0"/>
-                <a:ea typeface="Calibri" pitchFamily="34" charset="-122"/>
-                <a:cs typeface="Calibri" pitchFamily="34" charset="-120"/>
-              </a:rPr>
-              <a:t>4</a:t>
-            </a:r>
-            <a:endParaRPr lang="en-US" sz="900" dirty="0"/>
+        </p:spPr>
+        <p:txBody>
+          <a:bodyPr wrap="none" lIns="0" rIns="0" tIns="0" bIns="0">
+            <a:spAutoFit/>
+          </a:bodyPr>
+          <a:lstStyle/>
+          <a:p>
+            <a:pPr algn="r"/>
+            <a:r>
+              <a:rPr sz="1000">
+                <a:solidFill>
+                  <a:srgbClr val="8A939B"/>
+                </a:solidFill>
+                <a:hlinkClick r:id="rId3"/>
+              </a:rPr>
+              <a:t>cuinotes.com</a:t>
+            </a:r>
+            <a:r>
+              <a:rPr sz="1000">
+                <a:solidFill>
+                  <a:srgbClr val="8A939B"/>
+                </a:solidFill>
+              </a:rPr>
+              <a:t>  ·  4</a:t>
+            </a:r>
           </a:p>
         </p:txBody>
       </p:sp>
@@ -20778,6 +19983,10 @@
           </a:solidFill>
           <a:ln/>
         </p:spPr>
+        <p:txBody>
+          <a:bodyPr/>
+          <a:p/>
+        </p:txBody>
       </p:sp>
       <p:sp>
         <p:nvSpPr>
@@ -20854,6 +20063,10 @@
             </a:outerShdw>
           </a:effectLst>
         </p:spPr>
+        <p:txBody>
+          <a:bodyPr/>
+          <a:p/>
+        </p:txBody>
       </p:sp>
       <p:pic>
         <p:nvPicPr>
@@ -20881,79 +20094,44 @@
       </p:pic>
       <p:sp>
         <p:nvSpPr>
-          <p:cNvPr id="8" name="Text 5"/>
+          <p:cNvPr id="10" name="cuinotes-footer-mark"/>
           <p:cNvSpPr txBox="1"/>
           <p:nvPr/>
         </p:nvSpPr>
         <p:spPr>
           <a:xfrm>
-            <a:off x="640080" y="6446520"/>
-            <a:ext cx="8686800" cy="292608"/>
+            <a:off x="9951720" y="6455664"/>
+            <a:ext cx="2011680" cy="292608"/>
           </a:xfrm>
           <a:prstGeom prst="rect">
             <a:avLst/>
           </a:prstGeom>
           <a:noFill/>
-          <a:ln/>
-        </p:spPr>
-        <p:txBody>
-          <a:bodyPr wrap="square" lIns="0" tIns="0" rIns="0" bIns="0" rtlCol="0" anchor="ctr"/>
-          <a:lstStyle/>
-          <a:p>
-            <a:pPr algn="l" indent="0" marL="0">
-              <a:buNone/>
-            </a:pPr>
-            <a:r>
-              <a:rPr lang="en-US" sz="900" dirty="0">
-                <a:solidFill>
-                  <a:srgbClr val="5D5D72"/>
-                </a:solidFill>
-                <a:latin typeface="Calibri" pitchFamily="34" charset="0"/>
-                <a:ea typeface="Calibri" pitchFamily="34" charset="-122"/>
-                <a:cs typeface="Calibri" pitchFamily="34" charset="-120"/>
-              </a:rPr>
-              <a:t>Usman Akram  •  COMSATS University Islamabad</a:t>
-            </a:r>
-            <a:endParaRPr lang="en-US" sz="900" dirty="0"/>
-          </a:p>
-        </p:txBody>
-      </p:sp>
-      <p:sp>
-        <p:nvSpPr>
-          <p:cNvPr id="9" name="Text 6"/>
-          <p:cNvSpPr txBox="1"/>
-          <p:nvPr/>
-        </p:nvSpPr>
-        <p:spPr>
-          <a:xfrm>
-            <a:off x="11155680" y="6446520"/>
-            <a:ext cx="457200" cy="292608"/>
-          </a:xfrm>
-          <a:prstGeom prst="rect">
-            <a:avLst/>
-          </a:prstGeom>
-          <a:noFill/>
-          <a:ln/>
-        </p:spPr>
-        <p:txBody>
-          <a:bodyPr wrap="square" lIns="0" tIns="0" rIns="0" bIns="0" rtlCol="0" anchor="ctr"/>
-          <a:lstStyle/>
-          <a:p>
-            <a:pPr algn="r" indent="0" marL="0">
-              <a:buNone/>
-            </a:pPr>
-            <a:r>
-              <a:rPr lang="en-US" sz="900" dirty="0">
-                <a:solidFill>
-                  <a:srgbClr val="5D5D72"/>
-                </a:solidFill>
-                <a:latin typeface="Calibri" pitchFamily="34" charset="0"/>
-                <a:ea typeface="Calibri" pitchFamily="34" charset="-122"/>
-                <a:cs typeface="Calibri" pitchFamily="34" charset="-120"/>
-              </a:rPr>
-              <a:t>5</a:t>
-            </a:r>
-            <a:endParaRPr lang="en-US" sz="900" dirty="0"/>
+        </p:spPr>
+        <p:txBody>
+          <a:bodyPr wrap="none" lIns="0" rIns="0" tIns="0" bIns="0">
+            <a:spAutoFit/>
+          </a:bodyPr>
+          <a:lstStyle/>
+          <a:p>
+            <a:pPr algn="r"/>
+            <a:r>
+              <a:rPr sz="1000">
+                <a:solidFill>
+                  <a:srgbClr val="8A939B"/>
+                </a:solidFill>
+                <a:hlinkClick r:id="rId4"/>
+              </a:rPr>
+              <a:t>cuinotes.com</a:t>
+            </a:r>
+            <a:r>
+              <a:rPr sz="1000">
+                <a:solidFill>
+                  <a:srgbClr val="8A939B"/>
+                </a:solidFill>
+              </a:rPr>
+              <a:t>  ·  5</a:t>
+            </a:r>
           </a:p>
         </p:txBody>
       </p:sp>
@@ -21088,6 +20266,10 @@
           </a:solidFill>
           <a:ln/>
         </p:spPr>
+        <p:txBody>
+          <a:bodyPr/>
+          <a:p/>
+        </p:txBody>
       </p:sp>
       <p:sp>
         <p:nvSpPr>
@@ -21293,79 +20475,44 @@
       </p:sp>
       <p:sp>
         <p:nvSpPr>
-          <p:cNvPr id="6" name="Text 4"/>
+          <p:cNvPr id="8" name="cuinotes-footer-mark"/>
           <p:cNvSpPr txBox="1"/>
           <p:nvPr/>
         </p:nvSpPr>
         <p:spPr>
           <a:xfrm>
-            <a:off x="640080" y="6446520"/>
-            <a:ext cx="8686800" cy="292608"/>
+            <a:off x="9951720" y="6455664"/>
+            <a:ext cx="2011680" cy="292608"/>
           </a:xfrm>
           <a:prstGeom prst="rect">
             <a:avLst/>
           </a:prstGeom>
           <a:noFill/>
-          <a:ln/>
-        </p:spPr>
-        <p:txBody>
-          <a:bodyPr wrap="square" lIns="0" tIns="0" rIns="0" bIns="0" rtlCol="0" anchor="ctr"/>
-          <a:lstStyle/>
-          <a:p>
-            <a:pPr algn="l" indent="0" marL="0">
-              <a:buNone/>
-            </a:pPr>
-            <a:r>
-              <a:rPr lang="en-US" sz="900" dirty="0">
-                <a:solidFill>
-                  <a:srgbClr val="5D5D72"/>
-                </a:solidFill>
-                <a:latin typeface="Calibri" pitchFamily="34" charset="0"/>
-                <a:ea typeface="Calibri" pitchFamily="34" charset="-122"/>
-                <a:cs typeface="Calibri" pitchFamily="34" charset="-120"/>
-              </a:rPr>
-              <a:t>Usman Akram  •  COMSATS University Islamabad</a:t>
-            </a:r>
-            <a:endParaRPr lang="en-US" sz="900" dirty="0"/>
-          </a:p>
-        </p:txBody>
-      </p:sp>
-      <p:sp>
-        <p:nvSpPr>
-          <p:cNvPr id="7" name="Text 5"/>
-          <p:cNvSpPr txBox="1"/>
-          <p:nvPr/>
-        </p:nvSpPr>
-        <p:spPr>
-          <a:xfrm>
-            <a:off x="11155680" y="6446520"/>
-            <a:ext cx="457200" cy="292608"/>
-          </a:xfrm>
-          <a:prstGeom prst="rect">
-            <a:avLst/>
-          </a:prstGeom>
-          <a:noFill/>
-          <a:ln/>
-        </p:spPr>
-        <p:txBody>
-          <a:bodyPr wrap="square" lIns="0" tIns="0" rIns="0" bIns="0" rtlCol="0" anchor="ctr"/>
-          <a:lstStyle/>
-          <a:p>
-            <a:pPr algn="r" indent="0" marL="0">
-              <a:buNone/>
-            </a:pPr>
-            <a:r>
-              <a:rPr lang="en-US" sz="900" dirty="0">
-                <a:solidFill>
-                  <a:srgbClr val="5D5D72"/>
-                </a:solidFill>
-                <a:latin typeface="Calibri" pitchFamily="34" charset="0"/>
-                <a:ea typeface="Calibri" pitchFamily="34" charset="-122"/>
-                <a:cs typeface="Calibri" pitchFamily="34" charset="-120"/>
-              </a:rPr>
-              <a:t>6</a:t>
-            </a:r>
-            <a:endParaRPr lang="en-US" sz="900" dirty="0"/>
+        </p:spPr>
+        <p:txBody>
+          <a:bodyPr wrap="none" lIns="0" rIns="0" tIns="0" bIns="0">
+            <a:spAutoFit/>
+          </a:bodyPr>
+          <a:lstStyle/>
+          <a:p>
+            <a:pPr algn="r"/>
+            <a:r>
+              <a:rPr sz="1000">
+                <a:solidFill>
+                  <a:srgbClr val="8A939B"/>
+                </a:solidFill>
+                <a:hlinkClick r:id="rId3"/>
+              </a:rPr>
+              <a:t>cuinotes.com</a:t>
+            </a:r>
+            <a:r>
+              <a:rPr sz="1000">
+                <a:solidFill>
+                  <a:srgbClr val="8A939B"/>
+                </a:solidFill>
+              </a:rPr>
+              <a:t>  ·  6</a:t>
+            </a:r>
           </a:p>
         </p:txBody>
       </p:sp>
@@ -21551,6 +20698,10 @@
             </a:outerShdw>
           </a:effectLst>
         </p:spPr>
+        <p:txBody>
+          <a:bodyPr/>
+          <a:p/>
+        </p:txBody>
       </p:sp>
       <p:pic>
         <p:nvPicPr>
@@ -21578,79 +20729,44 @@
       </p:pic>
       <p:sp>
         <p:nvSpPr>
-          <p:cNvPr id="7" name="Text 4"/>
+          <p:cNvPr id="9" name="cuinotes-footer-mark"/>
           <p:cNvSpPr txBox="1"/>
           <p:nvPr/>
         </p:nvSpPr>
         <p:spPr>
           <a:xfrm>
-            <a:off x="640080" y="6446520"/>
-            <a:ext cx="8686800" cy="292608"/>
+            <a:off x="9951720" y="6455664"/>
+            <a:ext cx="2011680" cy="292608"/>
           </a:xfrm>
           <a:prstGeom prst="rect">
             <a:avLst/>
           </a:prstGeom>
           <a:noFill/>
-          <a:ln/>
-        </p:spPr>
-        <p:txBody>
-          <a:bodyPr wrap="square" lIns="0" tIns="0" rIns="0" bIns="0" rtlCol="0" anchor="ctr"/>
-          <a:lstStyle/>
-          <a:p>
-            <a:pPr algn="l" indent="0" marL="0">
-              <a:buNone/>
-            </a:pPr>
-            <a:r>
-              <a:rPr lang="en-US" sz="900" dirty="0">
-                <a:solidFill>
-                  <a:srgbClr val="5D5D72"/>
-                </a:solidFill>
-                <a:latin typeface="Calibri" pitchFamily="34" charset="0"/>
-                <a:ea typeface="Calibri" pitchFamily="34" charset="-122"/>
-                <a:cs typeface="Calibri" pitchFamily="34" charset="-120"/>
-              </a:rPr>
-              <a:t>Usman Akram  •  COMSATS University Islamabad</a:t>
-            </a:r>
-            <a:endParaRPr lang="en-US" sz="900" dirty="0"/>
-          </a:p>
-        </p:txBody>
-      </p:sp>
-      <p:sp>
-        <p:nvSpPr>
-          <p:cNvPr id="8" name="Text 5"/>
-          <p:cNvSpPr txBox="1"/>
-          <p:nvPr/>
-        </p:nvSpPr>
-        <p:spPr>
-          <a:xfrm>
-            <a:off x="11155680" y="6446520"/>
-            <a:ext cx="457200" cy="292608"/>
-          </a:xfrm>
-          <a:prstGeom prst="rect">
-            <a:avLst/>
-          </a:prstGeom>
-          <a:noFill/>
-          <a:ln/>
-        </p:spPr>
-        <p:txBody>
-          <a:bodyPr wrap="square" lIns="0" tIns="0" rIns="0" bIns="0" rtlCol="0" anchor="ctr"/>
-          <a:lstStyle/>
-          <a:p>
-            <a:pPr algn="r" indent="0" marL="0">
-              <a:buNone/>
-            </a:pPr>
-            <a:r>
-              <a:rPr lang="en-US" sz="900" dirty="0">
-                <a:solidFill>
-                  <a:srgbClr val="5D5D72"/>
-                </a:solidFill>
-                <a:latin typeface="Calibri" pitchFamily="34" charset="0"/>
-                <a:ea typeface="Calibri" pitchFamily="34" charset="-122"/>
-                <a:cs typeface="Calibri" pitchFamily="34" charset="-120"/>
-              </a:rPr>
-              <a:t>7</a:t>
-            </a:r>
-            <a:endParaRPr lang="en-US" sz="900" dirty="0"/>
+        </p:spPr>
+        <p:txBody>
+          <a:bodyPr wrap="none" lIns="0" rIns="0" tIns="0" bIns="0">
+            <a:spAutoFit/>
+          </a:bodyPr>
+          <a:lstStyle/>
+          <a:p>
+            <a:pPr algn="r"/>
+            <a:r>
+              <a:rPr sz="1000">
+                <a:solidFill>
+                  <a:srgbClr val="8A939B"/>
+                </a:solidFill>
+                <a:hlinkClick r:id="rId4"/>
+              </a:rPr>
+              <a:t>cuinotes.com</a:t>
+            </a:r>
+            <a:r>
+              <a:rPr sz="1000">
+                <a:solidFill>
+                  <a:srgbClr val="8A939B"/>
+                </a:solidFill>
+              </a:rPr>
+              <a:t>  ·  7</a:t>
+            </a:r>
           </a:p>
         </p:txBody>
       </p:sp>
@@ -21790,6 +20906,10 @@
             <a:prstDash val="solid"/>
           </a:ln>
         </p:spPr>
+        <p:txBody>
+          <a:bodyPr/>
+          <a:p/>
+        </p:txBody>
       </p:sp>
       <p:sp>
         <p:nvSpPr>
@@ -21871,79 +20991,44 @@
       </p:sp>
       <p:sp>
         <p:nvSpPr>
-          <p:cNvPr id="7" name="Text 5"/>
+          <p:cNvPr id="9" name="cuinotes-footer-mark"/>
           <p:cNvSpPr txBox="1"/>
           <p:nvPr/>
         </p:nvSpPr>
         <p:spPr>
           <a:xfrm>
-            <a:off x="640080" y="6446520"/>
-            <a:ext cx="8686800" cy="292608"/>
+            <a:off x="9951720" y="6455664"/>
+            <a:ext cx="2011680" cy="292608"/>
           </a:xfrm>
           <a:prstGeom prst="rect">
             <a:avLst/>
           </a:prstGeom>
           <a:noFill/>
-          <a:ln/>
-        </p:spPr>
-        <p:txBody>
-          <a:bodyPr wrap="square" lIns="0" tIns="0" rIns="0" bIns="0" rtlCol="0" anchor="ctr"/>
-          <a:lstStyle/>
-          <a:p>
-            <a:pPr algn="l" indent="0" marL="0">
-              <a:buNone/>
-            </a:pPr>
-            <a:r>
-              <a:rPr lang="en-US" sz="900" dirty="0">
-                <a:solidFill>
-                  <a:srgbClr val="5D5D72"/>
-                </a:solidFill>
-                <a:latin typeface="Calibri" pitchFamily="34" charset="0"/>
-                <a:ea typeface="Calibri" pitchFamily="34" charset="-122"/>
-                <a:cs typeface="Calibri" pitchFamily="34" charset="-120"/>
-              </a:rPr>
-              <a:t>Usman Akram  •  COMSATS University Islamabad</a:t>
-            </a:r>
-            <a:endParaRPr lang="en-US" sz="900" dirty="0"/>
-          </a:p>
-        </p:txBody>
-      </p:sp>
-      <p:sp>
-        <p:nvSpPr>
-          <p:cNvPr id="8" name="Text 6"/>
-          <p:cNvSpPr txBox="1"/>
-          <p:nvPr/>
-        </p:nvSpPr>
-        <p:spPr>
-          <a:xfrm>
-            <a:off x="11155680" y="6446520"/>
-            <a:ext cx="457200" cy="292608"/>
-          </a:xfrm>
-          <a:prstGeom prst="rect">
-            <a:avLst/>
-          </a:prstGeom>
-          <a:noFill/>
-          <a:ln/>
-        </p:spPr>
-        <p:txBody>
-          <a:bodyPr wrap="square" lIns="0" tIns="0" rIns="0" bIns="0" rtlCol="0" anchor="ctr"/>
-          <a:lstStyle/>
-          <a:p>
-            <a:pPr algn="r" indent="0" marL="0">
-              <a:buNone/>
-            </a:pPr>
-            <a:r>
-              <a:rPr lang="en-US" sz="900" dirty="0">
-                <a:solidFill>
-                  <a:srgbClr val="5D5D72"/>
-                </a:solidFill>
-                <a:latin typeface="Calibri" pitchFamily="34" charset="0"/>
-                <a:ea typeface="Calibri" pitchFamily="34" charset="-122"/>
-                <a:cs typeface="Calibri" pitchFamily="34" charset="-120"/>
-              </a:rPr>
-              <a:t>8</a:t>
-            </a:r>
-            <a:endParaRPr lang="en-US" sz="900" dirty="0"/>
+        </p:spPr>
+        <p:txBody>
+          <a:bodyPr wrap="none" lIns="0" rIns="0" tIns="0" bIns="0">
+            <a:spAutoFit/>
+          </a:bodyPr>
+          <a:lstStyle/>
+          <a:p>
+            <a:pPr algn="r"/>
+            <a:r>
+              <a:rPr sz="1000">
+                <a:solidFill>
+                  <a:srgbClr val="8A939B"/>
+                </a:solidFill>
+                <a:hlinkClick r:id="rId3"/>
+              </a:rPr>
+              <a:t>cuinotes.com</a:t>
+            </a:r>
+            <a:r>
+              <a:rPr sz="1000">
+                <a:solidFill>
+                  <a:srgbClr val="8A939B"/>
+                </a:solidFill>
+              </a:rPr>
+              <a:t>  ·  8</a:t>
+            </a:r>
           </a:p>
         </p:txBody>
       </p:sp>
@@ -22078,6 +21163,10 @@
           </a:solidFill>
           <a:ln/>
         </p:spPr>
+        <p:txBody>
+          <a:bodyPr/>
+          <a:p/>
+        </p:txBody>
       </p:sp>
       <p:sp>
         <p:nvSpPr>
@@ -22223,6 +21312,10 @@
             </a:outerShdw>
           </a:effectLst>
         </p:spPr>
+        <p:txBody>
+          <a:bodyPr/>
+          <a:p/>
+        </p:txBody>
       </p:sp>
       <p:pic>
         <p:nvPicPr>
@@ -22250,79 +21343,44 @@
       </p:pic>
       <p:sp>
         <p:nvSpPr>
-          <p:cNvPr id="8" name="Text 5"/>
+          <p:cNvPr id="10" name="cuinotes-footer-mark"/>
           <p:cNvSpPr txBox="1"/>
           <p:nvPr/>
         </p:nvSpPr>
         <p:spPr>
           <a:xfrm>
-            <a:off x="640080" y="6446520"/>
-            <a:ext cx="8686800" cy="292608"/>
+            <a:off x="9951720" y="6455664"/>
+            <a:ext cx="2011680" cy="292608"/>
           </a:xfrm>
           <a:prstGeom prst="rect">
             <a:avLst/>
           </a:prstGeom>
           <a:noFill/>
-          <a:ln/>
-        </p:spPr>
-        <p:txBody>
-          <a:bodyPr wrap="square" lIns="0" tIns="0" rIns="0" bIns="0" rtlCol="0" anchor="ctr"/>
-          <a:lstStyle/>
-          <a:p>
-            <a:pPr algn="l" indent="0" marL="0">
-              <a:buNone/>
-            </a:pPr>
-            <a:r>
-              <a:rPr lang="en-US" sz="900" dirty="0">
-                <a:solidFill>
-                  <a:srgbClr val="5D5D72"/>
-                </a:solidFill>
-                <a:latin typeface="Calibri" pitchFamily="34" charset="0"/>
-                <a:ea typeface="Calibri" pitchFamily="34" charset="-122"/>
-                <a:cs typeface="Calibri" pitchFamily="34" charset="-120"/>
-              </a:rPr>
-              <a:t>Usman Akram  •  COMSATS University Islamabad</a:t>
-            </a:r>
-            <a:endParaRPr lang="en-US" sz="900" dirty="0"/>
-          </a:p>
-        </p:txBody>
-      </p:sp>
-      <p:sp>
-        <p:nvSpPr>
-          <p:cNvPr id="9" name="Text 6"/>
-          <p:cNvSpPr txBox="1"/>
-          <p:nvPr/>
-        </p:nvSpPr>
-        <p:spPr>
-          <a:xfrm>
-            <a:off x="11155680" y="6446520"/>
-            <a:ext cx="457200" cy="292608"/>
-          </a:xfrm>
-          <a:prstGeom prst="rect">
-            <a:avLst/>
-          </a:prstGeom>
-          <a:noFill/>
-          <a:ln/>
-        </p:spPr>
-        <p:txBody>
-          <a:bodyPr wrap="square" lIns="0" tIns="0" rIns="0" bIns="0" rtlCol="0" anchor="ctr"/>
-          <a:lstStyle/>
-          <a:p>
-            <a:pPr algn="r" indent="0" marL="0">
-              <a:buNone/>
-            </a:pPr>
-            <a:r>
-              <a:rPr lang="en-US" sz="900" dirty="0">
-                <a:solidFill>
-                  <a:srgbClr val="5D5D72"/>
-                </a:solidFill>
-                <a:latin typeface="Calibri" pitchFamily="34" charset="0"/>
-                <a:ea typeface="Calibri" pitchFamily="34" charset="-122"/>
-                <a:cs typeface="Calibri" pitchFamily="34" charset="-120"/>
-              </a:rPr>
-              <a:t>9</a:t>
-            </a:r>
-            <a:endParaRPr lang="en-US" sz="900" dirty="0"/>
+        </p:spPr>
+        <p:txBody>
+          <a:bodyPr wrap="none" lIns="0" rIns="0" tIns="0" bIns="0">
+            <a:spAutoFit/>
+          </a:bodyPr>
+          <a:lstStyle/>
+          <a:p>
+            <a:pPr algn="r"/>
+            <a:r>
+              <a:rPr sz="1000">
+                <a:solidFill>
+                  <a:srgbClr val="8A939B"/>
+                </a:solidFill>
+                <a:hlinkClick r:id="rId4"/>
+              </a:rPr>
+              <a:t>cuinotes.com</a:t>
+            </a:r>
+            <a:r>
+              <a:rPr sz="1000">
+                <a:solidFill>
+                  <a:srgbClr val="8A939B"/>
+                </a:solidFill>
+              </a:rPr>
+              <a:t>  ·  9</a:t>
+            </a:r>
           </a:p>
         </p:txBody>
       </p:sp>

--- a/slides/CSC336-Lecture-05-CSS-Fundamentals.pptx
+++ b/slides/CSC336-Lecture-05-CSS-Fundamentals.pptx
@@ -4161,9 +4161,13 @@
             </a:avLst>
           </a:prstGeom>
           <a:solidFill>
-            <a:srgbClr val="1E1E4C"/>
+            <a:srgbClr val="F7F8F9"/>
           </a:solidFill>
-          <a:ln/>
+          <a:ln w="9525">
+            <a:solidFill>
+              <a:srgbClr val="D0D5DD"/>
+            </a:solidFill>
+          </a:ln>
         </p:spPr>
         <p:txBody>
           <a:bodyPr/>
@@ -4200,7 +4204,7 @@
             <a:r>
               <a:rPr lang="en-US" sz="1250" dirty="0">
                 <a:solidFill>
-                  <a:srgbClr val="C9D3F5"/>
+                  <a:srgbClr val="1F2429"/>
                 </a:solidFill>
                 <a:latin typeface="Courier New" pitchFamily="34" charset="0"/>
                 <a:ea typeface="Courier New" pitchFamily="34" charset="-122"/>
@@ -4229,7 +4233,7 @@
             <a:r>
               <a:rPr lang="en-US" sz="1250" dirty="0">
                 <a:solidFill>
-                  <a:srgbClr val="C9D3F5"/>
+                  <a:srgbClr val="1F2429"/>
                 </a:solidFill>
                 <a:latin typeface="Courier New" pitchFamily="34" charset="0"/>
                 <a:ea typeface="Courier New" pitchFamily="34" charset="-122"/>
@@ -4249,7 +4253,7 @@
             <a:r>
               <a:rPr lang="en-US" sz="1250" dirty="0">
                 <a:solidFill>
-                  <a:srgbClr val="C9D3F5"/>
+                  <a:srgbClr val="1F2429"/>
                 </a:solidFill>
                 <a:latin typeface="Courier New" pitchFamily="34" charset="0"/>
                 <a:ea typeface="Courier New" pitchFamily="34" charset="-122"/>
@@ -4269,7 +4273,7 @@
             <a:r>
               <a:rPr lang="en-US" sz="1250" dirty="0">
                 <a:solidFill>
-                  <a:srgbClr val="C9D3F5"/>
+                  <a:srgbClr val="1F2429"/>
                 </a:solidFill>
                 <a:latin typeface="Courier New" pitchFamily="34" charset="0"/>
                 <a:ea typeface="Courier New" pitchFamily="34" charset="-122"/>
@@ -4289,7 +4293,7 @@
             <a:r>
               <a:rPr lang="en-US" sz="1250" dirty="0">
                 <a:solidFill>
-                  <a:srgbClr val="C9D3F5"/>
+                  <a:srgbClr val="1F2429"/>
                 </a:solidFill>
                 <a:latin typeface="Courier New" pitchFamily="34" charset="0"/>
                 <a:ea typeface="Courier New" pitchFamily="34" charset="-122"/>
@@ -4525,7 +4529,7 @@
         <p:spPr>
           <a:xfrm>
             <a:off x="640080" y="1965960"/>
-            <a:ext cx="10911535" cy="1554480"/>
+            <a:ext cx="10911535" cy="3657600"/>
           </a:xfrm>
           <a:prstGeom prst="roundRect">
             <a:avLst>
@@ -4556,7 +4560,7 @@
         <p:spPr>
           <a:xfrm>
             <a:off x="868680" y="2103120"/>
-            <a:ext cx="10454335" cy="274320"/>
+            <a:ext cx="10454335" cy="400000"/>
           </a:xfrm>
           <a:prstGeom prst="rect">
             <a:avLst/>
@@ -4572,7 +4576,7 @@
               <a:buNone/>
             </a:pPr>
             <a:r>
-              <a:rPr lang="en-US" sz="1000" b="1" spc="200" kern="0" dirty="0">
+              <a:rPr lang="en-US" sz="1800" b="1" spc="200" kern="0" dirty="0">
                 <a:solidFill>
                   <a:srgbClr val="8A3A12"/>
                 </a:solidFill>
@@ -4582,7 +4586,7 @@
               </a:rPr>
               <a:t>WARNING</a:t>
             </a:r>
-            <a:endParaRPr lang="en-US" sz="1000" dirty="0"/>
+            <a:endParaRPr lang="en-US" sz="1800" dirty="0"/>
           </a:p>
         </p:txBody>
       </p:sp>
@@ -4594,8 +4598,8 @@
         </p:nvSpPr>
         <p:spPr>
           <a:xfrm>
-            <a:off x="868680" y="2404872"/>
-            <a:ext cx="10454335" cy="960120"/>
+            <a:off x="868680" y="2795960"/>
+            <a:ext cx="10454335" cy="2500000"/>
           </a:xfrm>
           <a:prstGeom prst="rect">
             <a:avLst/>
@@ -4604,14 +4608,14 @@
           <a:ln/>
         </p:spPr>
         <p:txBody>
-          <a:bodyPr wrap="square" lIns="0" tIns="0" rIns="0" bIns="0" rtlCol="0" anchor="t"/>
+          <a:bodyPr wrap="square" lIns="0" tIns="0" rIns="0" bIns="0" rtlCol="0" anchor="ctr"/>
           <a:lstStyle/>
           <a:p>
             <a:pPr indent="0" marL="0">
               <a:buNone/>
             </a:pPr>
             <a:r>
-              <a:rPr lang="en-US" sz="1250" dirty="0">
+              <a:rPr lang="en-US" sz="2800" dirty="0">
                 <a:solidFill>
                   <a:srgbClr val="26262F"/>
                 </a:solidFill>
@@ -4621,7 +4625,7 @@
               </a:rPr>
               <a:t>Use a class when a style might apply to more than one element (most of the time). Use an id only for something that truly appears once on the page. Overusing ids makes CSS harder to reuse.</a:t>
             </a:r>
-            <a:endParaRPr lang="en-US" sz="1250" dirty="0"/>
+            <a:endParaRPr lang="en-US" sz="2800" dirty="0"/>
           </a:p>
         </p:txBody>
       </p:sp>
@@ -4795,9 +4799,13 @@
             </a:avLst>
           </a:prstGeom>
           <a:solidFill>
-            <a:srgbClr val="1E1E4C"/>
+            <a:srgbClr val="F7F8F9"/>
           </a:solidFill>
-          <a:ln/>
+          <a:ln w="9525">
+            <a:solidFill>
+              <a:srgbClr val="D0D5DD"/>
+            </a:solidFill>
+          </a:ln>
         </p:spPr>
         <p:txBody>
           <a:bodyPr/>
@@ -4834,7 +4842,7 @@
             <a:r>
               <a:rPr lang="en-US" sz="1250" dirty="0">
                 <a:solidFill>
-                  <a:srgbClr val="C9D3F5"/>
+                  <a:srgbClr val="1F2429"/>
                 </a:solidFill>
                 <a:latin typeface="Courier New" pitchFamily="34" charset="0"/>
                 <a:ea typeface="Courier New" pitchFamily="34" charset="-122"/>
@@ -4854,7 +4862,7 @@
             <a:r>
               <a:rPr lang="en-US" sz="1250" dirty="0">
                 <a:solidFill>
-                  <a:srgbClr val="C9D3F5"/>
+                  <a:srgbClr val="1F2429"/>
                 </a:solidFill>
                 <a:latin typeface="Courier New" pitchFamily="34" charset="0"/>
                 <a:ea typeface="Courier New" pitchFamily="34" charset="-122"/>
@@ -4874,7 +4882,7 @@
             <a:r>
               <a:rPr lang="en-US" sz="1250" dirty="0">
                 <a:solidFill>
-                  <a:srgbClr val="C9D3F5"/>
+                  <a:srgbClr val="1F2429"/>
                 </a:solidFill>
                 <a:latin typeface="Courier New" pitchFamily="34" charset="0"/>
                 <a:ea typeface="Courier New" pitchFamily="34" charset="-122"/>
@@ -4903,7 +4911,7 @@
             <a:r>
               <a:rPr lang="en-US" sz="1250" dirty="0">
                 <a:solidFill>
-                  <a:srgbClr val="C9D3F5"/>
+                  <a:srgbClr val="1F2429"/>
                 </a:solidFill>
                 <a:latin typeface="Courier New" pitchFamily="34" charset="0"/>
                 <a:ea typeface="Courier New" pitchFamily="34" charset="-122"/>
@@ -4923,7 +4931,7 @@
             <a:r>
               <a:rPr lang="en-US" sz="1250" dirty="0">
                 <a:solidFill>
-                  <a:srgbClr val="C9D3F5"/>
+                  <a:srgbClr val="1F2429"/>
                 </a:solidFill>
                 <a:latin typeface="Courier New" pitchFamily="34" charset="0"/>
                 <a:ea typeface="Courier New" pitchFamily="34" charset="-122"/>
@@ -4943,7 +4951,7 @@
             <a:r>
               <a:rPr lang="en-US" sz="1250" dirty="0">
                 <a:solidFill>
-                  <a:srgbClr val="C9D3F5"/>
+                  <a:srgbClr val="1F2429"/>
                 </a:solidFill>
                 <a:latin typeface="Courier New" pitchFamily="34" charset="0"/>
                 <a:ea typeface="Courier New" pitchFamily="34" charset="-122"/>
@@ -5187,9 +5195,13 @@
             </a:avLst>
           </a:prstGeom>
           <a:solidFill>
-            <a:srgbClr val="1E1E4C"/>
+            <a:srgbClr val="F7F8F9"/>
           </a:solidFill>
-          <a:ln/>
+          <a:ln w="9525">
+            <a:solidFill>
+              <a:srgbClr val="D0D5DD"/>
+            </a:solidFill>
+          </a:ln>
         </p:spPr>
         <p:txBody>
           <a:bodyPr/>
@@ -5226,7 +5238,7 @@
             <a:r>
               <a:rPr lang="en-US" sz="1250" dirty="0">
                 <a:solidFill>
-                  <a:srgbClr val="C9D3F5"/>
+                  <a:srgbClr val="1F2429"/>
                 </a:solidFill>
                 <a:latin typeface="Courier New" pitchFamily="34" charset="0"/>
                 <a:ea typeface="Courier New" pitchFamily="34" charset="-122"/>
@@ -5246,7 +5258,7 @@
             <a:r>
               <a:rPr lang="en-US" sz="1250" dirty="0">
                 <a:solidFill>
-                  <a:srgbClr val="C9D3F5"/>
+                  <a:srgbClr val="1F2429"/>
                 </a:solidFill>
                 <a:latin typeface="Courier New" pitchFamily="34" charset="0"/>
                 <a:ea typeface="Courier New" pitchFamily="34" charset="-122"/>
@@ -5266,7 +5278,7 @@
             <a:r>
               <a:rPr lang="en-US" sz="1250" dirty="0">
                 <a:solidFill>
-                  <a:srgbClr val="C9D3F5"/>
+                  <a:srgbClr val="1F2429"/>
                 </a:solidFill>
                 <a:latin typeface="Courier New" pitchFamily="34" charset="0"/>
                 <a:ea typeface="Courier New" pitchFamily="34" charset="-122"/>
@@ -5286,7 +5298,7 @@
             <a:r>
               <a:rPr lang="en-US" sz="1250" dirty="0">
                 <a:solidFill>
-                  <a:srgbClr val="C9D3F5"/>
+                  <a:srgbClr val="1F2429"/>
                 </a:solidFill>
                 <a:latin typeface="Courier New" pitchFamily="34" charset="0"/>
                 <a:ea typeface="Courier New" pitchFamily="34" charset="-122"/>
@@ -5530,9 +5542,13 @@
             </a:avLst>
           </a:prstGeom>
           <a:solidFill>
-            <a:srgbClr val="1E1E4C"/>
+            <a:srgbClr val="F7F8F9"/>
           </a:solidFill>
-          <a:ln/>
+          <a:ln w="9525">
+            <a:solidFill>
+              <a:srgbClr val="D0D5DD"/>
+            </a:solidFill>
+          </a:ln>
         </p:spPr>
         <p:txBody>
           <a:bodyPr/>
@@ -5569,7 +5585,7 @@
             <a:r>
               <a:rPr lang="en-US" sz="1250" dirty="0">
                 <a:solidFill>
-                  <a:srgbClr val="C9D3F5"/>
+                  <a:srgbClr val="1F2429"/>
                 </a:solidFill>
                 <a:latin typeface="Courier New" pitchFamily="34" charset="0"/>
                 <a:ea typeface="Courier New" pitchFamily="34" charset="-122"/>
@@ -5589,7 +5605,7 @@
             <a:r>
               <a:rPr lang="en-US" sz="1250" dirty="0">
                 <a:solidFill>
-                  <a:srgbClr val="C9D3F5"/>
+                  <a:srgbClr val="1F2429"/>
                 </a:solidFill>
                 <a:latin typeface="Courier New" pitchFamily="34" charset="0"/>
                 <a:ea typeface="Courier New" pitchFamily="34" charset="-122"/>
@@ -5609,7 +5625,7 @@
             <a:r>
               <a:rPr lang="en-US" sz="1250" dirty="0">
                 <a:solidFill>
-                  <a:srgbClr val="C9D3F5"/>
+                  <a:srgbClr val="1F2429"/>
                 </a:solidFill>
                 <a:latin typeface="Courier New" pitchFamily="34" charset="0"/>
                 <a:ea typeface="Courier New" pitchFamily="34" charset="-122"/>
@@ -5638,7 +5654,7 @@
             <a:r>
               <a:rPr lang="en-US" sz="1250" dirty="0">
                 <a:solidFill>
-                  <a:srgbClr val="C9D3F5"/>
+                  <a:srgbClr val="1F2429"/>
                 </a:solidFill>
                 <a:latin typeface="Courier New" pitchFamily="34" charset="0"/>
                 <a:ea typeface="Courier New" pitchFamily="34" charset="-122"/>
@@ -5658,7 +5674,7 @@
             <a:r>
               <a:rPr lang="en-US" sz="1250" dirty="0">
                 <a:solidFill>
-                  <a:srgbClr val="C9D3F5"/>
+                  <a:srgbClr val="1F2429"/>
                 </a:solidFill>
                 <a:latin typeface="Courier New" pitchFamily="34" charset="0"/>
                 <a:ea typeface="Courier New" pitchFamily="34" charset="-122"/>
@@ -5678,7 +5694,7 @@
             <a:r>
               <a:rPr lang="en-US" sz="1250" dirty="0">
                 <a:solidFill>
-                  <a:srgbClr val="C9D3F5"/>
+                  <a:srgbClr val="1F2429"/>
                 </a:solidFill>
                 <a:latin typeface="Courier New" pitchFamily="34" charset="0"/>
                 <a:ea typeface="Courier New" pitchFamily="34" charset="-122"/>
@@ -5698,7 +5714,7 @@
             <a:r>
               <a:rPr lang="en-US" sz="1250" dirty="0">
                 <a:solidFill>
-                  <a:srgbClr val="C9D3F5"/>
+                  <a:srgbClr val="1F2429"/>
                 </a:solidFill>
                 <a:latin typeface="Courier New" pitchFamily="34" charset="0"/>
                 <a:ea typeface="Courier New" pitchFamily="34" charset="-122"/>
@@ -5942,9 +5958,13 @@
             </a:avLst>
           </a:prstGeom>
           <a:solidFill>
-            <a:srgbClr val="1E1E4C"/>
+            <a:srgbClr val="F7F8F9"/>
           </a:solidFill>
-          <a:ln/>
+          <a:ln w="9525">
+            <a:solidFill>
+              <a:srgbClr val="D0D5DD"/>
+            </a:solidFill>
+          </a:ln>
         </p:spPr>
         <p:txBody>
           <a:bodyPr/>
@@ -5981,7 +6001,7 @@
             <a:r>
               <a:rPr lang="en-US" sz="1400" dirty="0">
                 <a:solidFill>
-                  <a:srgbClr val="C9D3F5"/>
+                  <a:srgbClr val="1F2429"/>
                 </a:solidFill>
                 <a:latin typeface="Courier New" pitchFamily="34" charset="0"/>
                 <a:ea typeface="Courier New" pitchFamily="34" charset="-122"/>
@@ -6001,7 +6021,7 @@
             <a:r>
               <a:rPr lang="en-US" sz="1400" dirty="0">
                 <a:solidFill>
-                  <a:srgbClr val="C9D3F5"/>
+                  <a:srgbClr val="1F2429"/>
                 </a:solidFill>
                 <a:latin typeface="Courier New" pitchFamily="34" charset="0"/>
                 <a:ea typeface="Courier New" pitchFamily="34" charset="-122"/>
@@ -6021,7 +6041,7 @@
             <a:r>
               <a:rPr lang="en-US" sz="1400" dirty="0">
                 <a:solidFill>
-                  <a:srgbClr val="C9D3F5"/>
+                  <a:srgbClr val="1F2429"/>
                 </a:solidFill>
                 <a:latin typeface="Courier New" pitchFamily="34" charset="0"/>
                 <a:ea typeface="Courier New" pitchFamily="34" charset="-122"/>
@@ -6041,7 +6061,7 @@
             <a:r>
               <a:rPr lang="en-US" sz="1400" dirty="0">
                 <a:solidFill>
-                  <a:srgbClr val="C9D3F5"/>
+                  <a:srgbClr val="1F2429"/>
                 </a:solidFill>
                 <a:latin typeface="Courier New" pitchFamily="34" charset="0"/>
                 <a:ea typeface="Courier New" pitchFamily="34" charset="-122"/>
@@ -6061,7 +6081,7 @@
             <a:r>
               <a:rPr lang="en-US" sz="1400" dirty="0">
                 <a:solidFill>
-                  <a:srgbClr val="C9D3F5"/>
+                  <a:srgbClr val="1F2429"/>
                 </a:solidFill>
                 <a:latin typeface="Courier New" pitchFamily="34" charset="0"/>
                 <a:ea typeface="Courier New" pitchFamily="34" charset="-122"/>
@@ -6282,9 +6302,13 @@
             </a:avLst>
           </a:prstGeom>
           <a:solidFill>
-            <a:srgbClr val="1E1E4C"/>
+            <a:srgbClr val="F7F8F9"/>
           </a:solidFill>
-          <a:ln/>
+          <a:ln w="9525">
+            <a:solidFill>
+              <a:srgbClr val="D0D5DD"/>
+            </a:solidFill>
+          </a:ln>
         </p:spPr>
         <p:txBody>
           <a:bodyPr/>
@@ -6321,7 +6345,7 @@
             <a:r>
               <a:rPr lang="en-US" sz="1300" dirty="0">
                 <a:solidFill>
-                  <a:srgbClr val="C9D3F5"/>
+                  <a:srgbClr val="1F2429"/>
                 </a:solidFill>
                 <a:latin typeface="Courier New" pitchFamily="34" charset="0"/>
                 <a:ea typeface="Courier New" pitchFamily="34" charset="-122"/>
@@ -6341,7 +6365,7 @@
             <a:r>
               <a:rPr lang="en-US" sz="1300" dirty="0">
                 <a:solidFill>
-                  <a:srgbClr val="C9D3F5"/>
+                  <a:srgbClr val="1F2429"/>
                 </a:solidFill>
                 <a:latin typeface="Courier New" pitchFamily="34" charset="0"/>
                 <a:ea typeface="Courier New" pitchFamily="34" charset="-122"/>
@@ -6361,7 +6385,7 @@
             <a:r>
               <a:rPr lang="en-US" sz="1300" dirty="0">
                 <a:solidFill>
-                  <a:srgbClr val="C9D3F5"/>
+                  <a:srgbClr val="1F2429"/>
                 </a:solidFill>
                 <a:latin typeface="Courier New" pitchFamily="34" charset="0"/>
                 <a:ea typeface="Courier New" pitchFamily="34" charset="-122"/>
@@ -6390,7 +6414,7 @@
             <a:r>
               <a:rPr lang="en-US" sz="1300" dirty="0">
                 <a:solidFill>
-                  <a:srgbClr val="C9D3F5"/>
+                  <a:srgbClr val="1F2429"/>
                 </a:solidFill>
                 <a:latin typeface="Courier New" pitchFamily="34" charset="0"/>
                 <a:ea typeface="Courier New" pitchFamily="34" charset="-122"/>
@@ -6410,7 +6434,7 @@
             <a:r>
               <a:rPr lang="en-US" sz="1300" dirty="0">
                 <a:solidFill>
-                  <a:srgbClr val="C9D3F5"/>
+                  <a:srgbClr val="1F2429"/>
                 </a:solidFill>
                 <a:latin typeface="Courier New" pitchFamily="34" charset="0"/>
                 <a:ea typeface="Courier New" pitchFamily="34" charset="-122"/>
@@ -6430,7 +6454,7 @@
             <a:r>
               <a:rPr lang="en-US" sz="1300" dirty="0">
                 <a:solidFill>
-                  <a:srgbClr val="C9D3F5"/>
+                  <a:srgbClr val="1F2429"/>
                 </a:solidFill>
                 <a:latin typeface="Courier New" pitchFamily="34" charset="0"/>
                 <a:ea typeface="Courier New" pitchFamily="34" charset="-122"/>
@@ -6450,7 +6474,7 @@
             <a:r>
               <a:rPr lang="en-US" sz="1300" dirty="0">
                 <a:solidFill>
-                  <a:srgbClr val="C9D3F5"/>
+                  <a:srgbClr val="1F2429"/>
                 </a:solidFill>
                 <a:latin typeface="Courier New" pitchFamily="34" charset="0"/>
                 <a:ea typeface="Courier New" pitchFamily="34" charset="-122"/>
@@ -6470,7 +6494,7 @@
             <a:r>
               <a:rPr lang="en-US" sz="1300" dirty="0">
                 <a:solidFill>
-                  <a:srgbClr val="C9D3F5"/>
+                  <a:srgbClr val="1F2429"/>
                 </a:solidFill>
                 <a:latin typeface="Courier New" pitchFamily="34" charset="0"/>
                 <a:ea typeface="Courier New" pitchFamily="34" charset="-122"/>
@@ -6490,7 +6514,7 @@
             <a:r>
               <a:rPr lang="en-US" sz="1300" dirty="0">
                 <a:solidFill>
-                  <a:srgbClr val="C9D3F5"/>
+                  <a:srgbClr val="1F2429"/>
                 </a:solidFill>
                 <a:latin typeface="Courier New" pitchFamily="34" charset="0"/>
                 <a:ea typeface="Courier New" pitchFamily="34" charset="-122"/>
@@ -6510,7 +6534,7 @@
             <a:r>
               <a:rPr lang="en-US" sz="1300" dirty="0">
                 <a:solidFill>
-                  <a:srgbClr val="C9D3F5"/>
+                  <a:srgbClr val="1F2429"/>
                 </a:solidFill>
                 <a:latin typeface="Courier New" pitchFamily="34" charset="0"/>
                 <a:ea typeface="Courier New" pitchFamily="34" charset="-122"/>
@@ -7804,9 +7828,13 @@
             </a:avLst>
           </a:prstGeom>
           <a:solidFill>
-            <a:srgbClr val="1E1E4C"/>
+            <a:srgbClr val="F7F8F9"/>
           </a:solidFill>
-          <a:ln/>
+          <a:ln w="9525">
+            <a:solidFill>
+              <a:srgbClr val="D0D5DD"/>
+            </a:solidFill>
+          </a:ln>
         </p:spPr>
         <p:txBody>
           <a:bodyPr/>
@@ -7843,7 +7871,7 @@
             <a:r>
               <a:rPr lang="en-US" sz="1300" dirty="0">
                 <a:solidFill>
-                  <a:srgbClr val="C9D3F5"/>
+                  <a:srgbClr val="1F2429"/>
                 </a:solidFill>
                 <a:latin typeface="Courier New" pitchFamily="34" charset="0"/>
                 <a:ea typeface="Courier New" pitchFamily="34" charset="-122"/>
@@ -7863,7 +7891,7 @@
             <a:r>
               <a:rPr lang="en-US" sz="1300" dirty="0">
                 <a:solidFill>
-                  <a:srgbClr val="C9D3F5"/>
+                  <a:srgbClr val="1F2429"/>
                 </a:solidFill>
                 <a:latin typeface="Courier New" pitchFamily="34" charset="0"/>
                 <a:ea typeface="Courier New" pitchFamily="34" charset="-122"/>
@@ -7883,7 +7911,7 @@
             <a:r>
               <a:rPr lang="en-US" sz="1300" dirty="0">
                 <a:solidFill>
-                  <a:srgbClr val="C9D3F5"/>
+                  <a:srgbClr val="1F2429"/>
                 </a:solidFill>
                 <a:latin typeface="Courier New" pitchFamily="34" charset="0"/>
                 <a:ea typeface="Courier New" pitchFamily="34" charset="-122"/>
@@ -7912,7 +7940,7 @@
             <a:r>
               <a:rPr lang="en-US" sz="1300" dirty="0">
                 <a:solidFill>
-                  <a:srgbClr val="C9D3F5"/>
+                  <a:srgbClr val="1F2429"/>
                 </a:solidFill>
                 <a:latin typeface="Courier New" pitchFamily="34" charset="0"/>
                 <a:ea typeface="Courier New" pitchFamily="34" charset="-122"/>
@@ -7932,7 +7960,7 @@
             <a:r>
               <a:rPr lang="en-US" sz="1300" dirty="0">
                 <a:solidFill>
-                  <a:srgbClr val="C9D3F5"/>
+                  <a:srgbClr val="1F2429"/>
                 </a:solidFill>
                 <a:latin typeface="Courier New" pitchFamily="34" charset="0"/>
                 <a:ea typeface="Courier New" pitchFamily="34" charset="-122"/>
@@ -7952,7 +7980,7 @@
             <a:r>
               <a:rPr lang="en-US" sz="1300" dirty="0">
                 <a:solidFill>
-                  <a:srgbClr val="C9D3F5"/>
+                  <a:srgbClr val="1F2429"/>
                 </a:solidFill>
                 <a:latin typeface="Courier New" pitchFamily="34" charset="0"/>
                 <a:ea typeface="Courier New" pitchFamily="34" charset="-122"/>
@@ -8196,9 +8224,13 @@
             </a:avLst>
           </a:prstGeom>
           <a:solidFill>
-            <a:srgbClr val="1E1E4C"/>
+            <a:srgbClr val="F7F8F9"/>
           </a:solidFill>
-          <a:ln/>
+          <a:ln w="9525">
+            <a:solidFill>
+              <a:srgbClr val="D0D5DD"/>
+            </a:solidFill>
+          </a:ln>
         </p:spPr>
         <p:txBody>
           <a:bodyPr/>
@@ -8235,7 +8267,7 @@
             <a:r>
               <a:rPr lang="en-US" sz="1400" dirty="0">
                 <a:solidFill>
-                  <a:srgbClr val="C9D3F5"/>
+                  <a:srgbClr val="1F2429"/>
                 </a:solidFill>
                 <a:latin typeface="Courier New" pitchFamily="34" charset="0"/>
                 <a:ea typeface="Courier New" pitchFamily="34" charset="-122"/>
@@ -8264,7 +8296,7 @@
             <a:r>
               <a:rPr lang="en-US" sz="1400" dirty="0">
                 <a:solidFill>
-                  <a:srgbClr val="C9D3F5"/>
+                  <a:srgbClr val="1F2429"/>
                 </a:solidFill>
                 <a:latin typeface="Courier New" pitchFamily="34" charset="0"/>
                 <a:ea typeface="Courier New" pitchFamily="34" charset="-122"/>
@@ -8284,7 +8316,7 @@
             <a:r>
               <a:rPr lang="en-US" sz="1400" dirty="0">
                 <a:solidFill>
-                  <a:srgbClr val="C9D3F5"/>
+                  <a:srgbClr val="1F2429"/>
                 </a:solidFill>
                 <a:latin typeface="Courier New" pitchFamily="34" charset="0"/>
                 <a:ea typeface="Courier New" pitchFamily="34" charset="-122"/>
@@ -10496,9 +10528,13 @@
             </a:avLst>
           </a:prstGeom>
           <a:solidFill>
-            <a:srgbClr val="1E1E4C"/>
+            <a:srgbClr val="F7F8F9"/>
           </a:solidFill>
-          <a:ln/>
+          <a:ln w="9525">
+            <a:solidFill>
+              <a:srgbClr val="D0D5DD"/>
+            </a:solidFill>
+          </a:ln>
         </p:spPr>
         <p:txBody>
           <a:bodyPr/>
@@ -10535,7 +10571,7 @@
             <a:r>
               <a:rPr lang="en-US" sz="1250" dirty="0">
                 <a:solidFill>
-                  <a:srgbClr val="C9D3F5"/>
+                  <a:srgbClr val="1F2429"/>
                 </a:solidFill>
                 <a:latin typeface="Courier New" pitchFamily="34" charset="0"/>
                 <a:ea typeface="Courier New" pitchFamily="34" charset="-122"/>
@@ -10555,7 +10591,7 @@
             <a:r>
               <a:rPr lang="en-US" sz="1250" dirty="0">
                 <a:solidFill>
-                  <a:srgbClr val="C9D3F5"/>
+                  <a:srgbClr val="1F2429"/>
                 </a:solidFill>
                 <a:latin typeface="Courier New" pitchFamily="34" charset="0"/>
                 <a:ea typeface="Courier New" pitchFamily="34" charset="-122"/>
@@ -10575,7 +10611,7 @@
             <a:r>
               <a:rPr lang="en-US" sz="1250" dirty="0">
                 <a:solidFill>
-                  <a:srgbClr val="C9D3F5"/>
+                  <a:srgbClr val="1F2429"/>
                 </a:solidFill>
                 <a:latin typeface="Courier New" pitchFamily="34" charset="0"/>
                 <a:ea typeface="Courier New" pitchFamily="34" charset="-122"/>
@@ -10604,7 +10640,7 @@
             <a:r>
               <a:rPr lang="en-US" sz="1250" dirty="0">
                 <a:solidFill>
-                  <a:srgbClr val="C9D3F5"/>
+                  <a:srgbClr val="1F2429"/>
                 </a:solidFill>
                 <a:latin typeface="Courier New" pitchFamily="34" charset="0"/>
                 <a:ea typeface="Courier New" pitchFamily="34" charset="-122"/>
@@ -12851,9 +12887,13 @@
             </a:avLst>
           </a:prstGeom>
           <a:solidFill>
-            <a:srgbClr val="1E1E4C"/>
+            <a:srgbClr val="F7F8F9"/>
           </a:solidFill>
-          <a:ln/>
+          <a:ln w="9525">
+            <a:solidFill>
+              <a:srgbClr val="D0D5DD"/>
+            </a:solidFill>
+          </a:ln>
         </p:spPr>
         <p:txBody>
           <a:bodyPr/>
@@ -12890,7 +12930,7 @@
             <a:r>
               <a:rPr lang="en-US" sz="1400" dirty="0">
                 <a:solidFill>
-                  <a:srgbClr val="C9D3F5"/>
+                  <a:srgbClr val="1F2429"/>
                 </a:solidFill>
                 <a:latin typeface="Courier New" pitchFamily="34" charset="0"/>
                 <a:ea typeface="Courier New" pitchFamily="34" charset="-122"/>
@@ -12919,7 +12959,7 @@
             <a:r>
               <a:rPr lang="en-US" sz="1400" dirty="0">
                 <a:solidFill>
-                  <a:srgbClr val="C9D3F5"/>
+                  <a:srgbClr val="1F2429"/>
                 </a:solidFill>
                 <a:latin typeface="Courier New" pitchFamily="34" charset="0"/>
                 <a:ea typeface="Courier New" pitchFamily="34" charset="-122"/>
@@ -12939,7 +12979,7 @@
             <a:r>
               <a:rPr lang="en-US" sz="1400" dirty="0">
                 <a:solidFill>
-                  <a:srgbClr val="C9D3F5"/>
+                  <a:srgbClr val="1F2429"/>
                 </a:solidFill>
                 <a:latin typeface="Courier New" pitchFamily="34" charset="0"/>
                 <a:ea typeface="Courier New" pitchFamily="34" charset="-122"/>
@@ -15325,9 +15365,13 @@
             </a:avLst>
           </a:prstGeom>
           <a:solidFill>
-            <a:srgbClr val="1E1E4C"/>
+            <a:srgbClr val="F7F8F9"/>
           </a:solidFill>
-          <a:ln/>
+          <a:ln w="9525">
+            <a:solidFill>
+              <a:srgbClr val="D0D5DD"/>
+            </a:solidFill>
+          </a:ln>
         </p:spPr>
         <p:txBody>
           <a:bodyPr/>
@@ -15364,7 +15408,7 @@
             <a:r>
               <a:rPr lang="en-US" sz="1400" dirty="0">
                 <a:solidFill>
-                  <a:srgbClr val="C9D3F5"/>
+                  <a:srgbClr val="1F2429"/>
                 </a:solidFill>
                 <a:latin typeface="Courier New" pitchFamily="34" charset="0"/>
                 <a:ea typeface="Courier New" pitchFamily="34" charset="-122"/>
@@ -15384,7 +15428,7 @@
             <a:r>
               <a:rPr lang="en-US" sz="1400" dirty="0">
                 <a:solidFill>
-                  <a:srgbClr val="C9D3F5"/>
+                  <a:srgbClr val="1F2429"/>
                 </a:solidFill>
                 <a:latin typeface="Courier New" pitchFamily="34" charset="0"/>
                 <a:ea typeface="Courier New" pitchFamily="34" charset="-122"/>
@@ -15404,7 +15448,7 @@
             <a:r>
               <a:rPr lang="en-US" sz="1400" dirty="0">
                 <a:solidFill>
-                  <a:srgbClr val="C9D3F5"/>
+                  <a:srgbClr val="1F2429"/>
                 </a:solidFill>
                 <a:latin typeface="Courier New" pitchFamily="34" charset="0"/>
                 <a:ea typeface="Courier New" pitchFamily="34" charset="-122"/>
@@ -15424,7 +15468,7 @@
             <a:r>
               <a:rPr lang="en-US" sz="1400" dirty="0">
                 <a:solidFill>
-                  <a:srgbClr val="C9D3F5"/>
+                  <a:srgbClr val="1F2429"/>
                 </a:solidFill>
                 <a:latin typeface="Courier New" pitchFamily="34" charset="0"/>
                 <a:ea typeface="Courier New" pitchFamily="34" charset="-122"/>
@@ -15444,7 +15488,7 @@
             <a:r>
               <a:rPr lang="en-US" sz="1400" dirty="0">
                 <a:solidFill>
-                  <a:srgbClr val="C9D3F5"/>
+                  <a:srgbClr val="1F2429"/>
                 </a:solidFill>
                 <a:latin typeface="Courier New" pitchFamily="34" charset="0"/>
                 <a:ea typeface="Courier New" pitchFamily="34" charset="-122"/>
@@ -15473,7 +15517,7 @@
             <a:r>
               <a:rPr lang="en-US" sz="1400" dirty="0">
                 <a:solidFill>
-                  <a:srgbClr val="C9D3F5"/>
+                  <a:srgbClr val="1F2429"/>
                 </a:solidFill>
                 <a:latin typeface="Courier New" pitchFamily="34" charset="0"/>
                 <a:ea typeface="Courier New" pitchFamily="34" charset="-122"/>
@@ -15493,7 +15537,7 @@
             <a:r>
               <a:rPr lang="en-US" sz="1400" dirty="0">
                 <a:solidFill>
-                  <a:srgbClr val="C9D3F5"/>
+                  <a:srgbClr val="1F2429"/>
                 </a:solidFill>
                 <a:latin typeface="Courier New" pitchFamily="34" charset="0"/>
                 <a:ea typeface="Courier New" pitchFamily="34" charset="-122"/>
@@ -15513,7 +15557,7 @@
             <a:r>
               <a:rPr lang="en-US" sz="1400" dirty="0">
                 <a:solidFill>
-                  <a:srgbClr val="C9D3F5"/>
+                  <a:srgbClr val="1F2429"/>
                 </a:solidFill>
                 <a:latin typeface="Courier New" pitchFamily="34" charset="0"/>
                 <a:ea typeface="Courier New" pitchFamily="34" charset="-122"/>
@@ -15533,7 +15577,7 @@
             <a:r>
               <a:rPr lang="en-US" sz="1400" dirty="0">
                 <a:solidFill>
-                  <a:srgbClr val="C9D3F5"/>
+                  <a:srgbClr val="1F2429"/>
                 </a:solidFill>
                 <a:latin typeface="Courier New" pitchFamily="34" charset="0"/>
                 <a:ea typeface="Courier New" pitchFamily="34" charset="-122"/>
@@ -17326,9 +17370,13 @@
             </a:avLst>
           </a:prstGeom>
           <a:solidFill>
-            <a:srgbClr val="1E1E4C"/>
+            <a:srgbClr val="F7F8F9"/>
           </a:solidFill>
-          <a:ln/>
+          <a:ln w="9525">
+            <a:solidFill>
+              <a:srgbClr val="D0D5DD"/>
+            </a:solidFill>
+          </a:ln>
         </p:spPr>
         <p:txBody>
           <a:bodyPr/>
@@ -17365,7 +17413,7 @@
             <a:r>
               <a:rPr lang="en-US" sz="1250" dirty="0">
                 <a:solidFill>
-                  <a:srgbClr val="C9D3F5"/>
+                  <a:srgbClr val="1F2429"/>
                 </a:solidFill>
                 <a:latin typeface="Courier New" pitchFamily="34" charset="0"/>
                 <a:ea typeface="Courier New" pitchFamily="34" charset="-122"/>
@@ -17385,7 +17433,7 @@
             <a:r>
               <a:rPr lang="en-US" sz="1250" dirty="0">
                 <a:solidFill>
-                  <a:srgbClr val="C9D3F5"/>
+                  <a:srgbClr val="1F2429"/>
                 </a:solidFill>
                 <a:latin typeface="Courier New" pitchFamily="34" charset="0"/>
                 <a:ea typeface="Courier New" pitchFamily="34" charset="-122"/>
@@ -17405,7 +17453,7 @@
             <a:r>
               <a:rPr lang="en-US" sz="1250" dirty="0">
                 <a:solidFill>
-                  <a:srgbClr val="C9D3F5"/>
+                  <a:srgbClr val="1F2429"/>
                 </a:solidFill>
                 <a:latin typeface="Courier New" pitchFamily="34" charset="0"/>
                 <a:ea typeface="Courier New" pitchFamily="34" charset="-122"/>
@@ -17425,7 +17473,7 @@
             <a:r>
               <a:rPr lang="en-US" sz="1250" dirty="0">
                 <a:solidFill>
-                  <a:srgbClr val="C9D3F5"/>
+                  <a:srgbClr val="1F2429"/>
                 </a:solidFill>
                 <a:latin typeface="Courier New" pitchFamily="34" charset="0"/>
                 <a:ea typeface="Courier New" pitchFamily="34" charset="-122"/>
@@ -17445,7 +17493,7 @@
             <a:r>
               <a:rPr lang="en-US" sz="1250" dirty="0">
                 <a:solidFill>
-                  <a:srgbClr val="C9D3F5"/>
+                  <a:srgbClr val="1F2429"/>
                 </a:solidFill>
                 <a:latin typeface="Courier New" pitchFamily="34" charset="0"/>
                 <a:ea typeface="Courier New" pitchFamily="34" charset="-122"/>
@@ -17728,9 +17776,13 @@
             </a:avLst>
           </a:prstGeom>
           <a:solidFill>
-            <a:srgbClr val="1E1E4C"/>
+            <a:srgbClr val="F7F8F9"/>
           </a:solidFill>
-          <a:ln/>
+          <a:ln w="9525">
+            <a:solidFill>
+              <a:srgbClr val="D0D5DD"/>
+            </a:solidFill>
+          </a:ln>
         </p:spPr>
         <p:txBody>
           <a:bodyPr/>
@@ -17767,7 +17819,7 @@
             <a:r>
               <a:rPr lang="en-US" sz="1250" dirty="0">
                 <a:solidFill>
-                  <a:srgbClr val="C9D3F5"/>
+                  <a:srgbClr val="1F2429"/>
                 </a:solidFill>
                 <a:latin typeface="Courier New" pitchFamily="34" charset="0"/>
                 <a:ea typeface="Courier New" pitchFamily="34" charset="-122"/>
@@ -17787,7 +17839,7 @@
             <a:r>
               <a:rPr lang="en-US" sz="1250" dirty="0">
                 <a:solidFill>
-                  <a:srgbClr val="C9D3F5"/>
+                  <a:srgbClr val="1F2429"/>
                 </a:solidFill>
                 <a:latin typeface="Courier New" pitchFamily="34" charset="0"/>
                 <a:ea typeface="Courier New" pitchFamily="34" charset="-122"/>
@@ -17807,7 +17859,7 @@
             <a:r>
               <a:rPr lang="en-US" sz="1250" dirty="0">
                 <a:solidFill>
-                  <a:srgbClr val="C9D3F5"/>
+                  <a:srgbClr val="1F2429"/>
                 </a:solidFill>
                 <a:latin typeface="Courier New" pitchFamily="34" charset="0"/>
                 <a:ea typeface="Courier New" pitchFamily="34" charset="-122"/>
@@ -17827,7 +17879,7 @@
             <a:r>
               <a:rPr lang="en-US" sz="1250" dirty="0">
                 <a:solidFill>
-                  <a:srgbClr val="C9D3F5"/>
+                  <a:srgbClr val="1F2429"/>
                 </a:solidFill>
                 <a:latin typeface="Courier New" pitchFamily="34" charset="0"/>
                 <a:ea typeface="Courier New" pitchFamily="34" charset="-122"/>
@@ -17847,7 +17899,7 @@
             <a:r>
               <a:rPr lang="en-US" sz="1250" dirty="0">
                 <a:solidFill>
-                  <a:srgbClr val="C9D3F5"/>
+                  <a:srgbClr val="1F2429"/>
                 </a:solidFill>
                 <a:latin typeface="Courier New" pitchFamily="34" charset="0"/>
                 <a:ea typeface="Courier New" pitchFamily="34" charset="-122"/>
@@ -17867,7 +17919,7 @@
             <a:r>
               <a:rPr lang="en-US" sz="1250" dirty="0">
                 <a:solidFill>
-                  <a:srgbClr val="C9D3F5"/>
+                  <a:srgbClr val="1F2429"/>
                 </a:solidFill>
                 <a:latin typeface="Courier New" pitchFamily="34" charset="0"/>
                 <a:ea typeface="Courier New" pitchFamily="34" charset="-122"/>
@@ -18111,9 +18163,13 @@
             </a:avLst>
           </a:prstGeom>
           <a:solidFill>
-            <a:srgbClr val="1E1E4C"/>
+            <a:srgbClr val="F7F8F9"/>
           </a:solidFill>
-          <a:ln/>
+          <a:ln w="9525">
+            <a:solidFill>
+              <a:srgbClr val="D0D5DD"/>
+            </a:solidFill>
+          </a:ln>
         </p:spPr>
         <p:txBody>
           <a:bodyPr/>
@@ -18150,7 +18206,7 @@
             <a:r>
               <a:rPr lang="en-US" sz="1250" dirty="0">
                 <a:solidFill>
-                  <a:srgbClr val="C9D3F5"/>
+                  <a:srgbClr val="1F2429"/>
                 </a:solidFill>
                 <a:latin typeface="Courier New" pitchFamily="34" charset="0"/>
                 <a:ea typeface="Courier New" pitchFamily="34" charset="-122"/>
@@ -18170,7 +18226,7 @@
             <a:r>
               <a:rPr lang="en-US" sz="1250" dirty="0">
                 <a:solidFill>
-                  <a:srgbClr val="C9D3F5"/>
+                  <a:srgbClr val="1F2429"/>
                 </a:solidFill>
                 <a:latin typeface="Courier New" pitchFamily="34" charset="0"/>
                 <a:ea typeface="Courier New" pitchFamily="34" charset="-122"/>
@@ -18190,7 +18246,7 @@
             <a:r>
               <a:rPr lang="en-US" sz="1250" dirty="0">
                 <a:solidFill>
-                  <a:srgbClr val="C9D3F5"/>
+                  <a:srgbClr val="1F2429"/>
                 </a:solidFill>
                 <a:latin typeface="Courier New" pitchFamily="34" charset="0"/>
                 <a:ea typeface="Courier New" pitchFamily="34" charset="-122"/>
@@ -18210,7 +18266,7 @@
             <a:r>
               <a:rPr lang="en-US" sz="1250" dirty="0">
                 <a:solidFill>
-                  <a:srgbClr val="C9D3F5"/>
+                  <a:srgbClr val="1F2429"/>
                 </a:solidFill>
                 <a:latin typeface="Courier New" pitchFamily="34" charset="0"/>
                 <a:ea typeface="Courier New" pitchFamily="34" charset="-122"/>
@@ -18230,7 +18286,7 @@
             <a:r>
               <a:rPr lang="en-US" sz="1250" dirty="0">
                 <a:solidFill>
-                  <a:srgbClr val="C9D3F5"/>
+                  <a:srgbClr val="1F2429"/>
                 </a:solidFill>
                 <a:latin typeface="Courier New" pitchFamily="34" charset="0"/>
                 <a:ea typeface="Courier New" pitchFamily="34" charset="-122"/>
@@ -18250,7 +18306,7 @@
             <a:r>
               <a:rPr lang="en-US" sz="1250" dirty="0">
                 <a:solidFill>
-                  <a:srgbClr val="C9D3F5"/>
+                  <a:srgbClr val="1F2429"/>
                 </a:solidFill>
                 <a:latin typeface="Courier New" pitchFamily="34" charset="0"/>
                 <a:ea typeface="Courier New" pitchFamily="34" charset="-122"/>
@@ -18270,7 +18326,7 @@
             <a:r>
               <a:rPr lang="en-US" sz="1250" dirty="0">
                 <a:solidFill>
-                  <a:srgbClr val="C9D3F5"/>
+                  <a:srgbClr val="1F2429"/>
                 </a:solidFill>
                 <a:latin typeface="Courier New" pitchFamily="34" charset="0"/>
                 <a:ea typeface="Courier New" pitchFamily="34" charset="-122"/>
@@ -18514,9 +18570,13 @@
             </a:avLst>
           </a:prstGeom>
           <a:solidFill>
-            <a:srgbClr val="1E1E4C"/>
+            <a:srgbClr val="F7F8F9"/>
           </a:solidFill>
-          <a:ln/>
+          <a:ln w="9525">
+            <a:solidFill>
+              <a:srgbClr val="D0D5DD"/>
+            </a:solidFill>
+          </a:ln>
         </p:spPr>
         <p:txBody>
           <a:bodyPr/>
@@ -18553,7 +18613,7 @@
             <a:r>
               <a:rPr lang="en-US" sz="1400" dirty="0">
                 <a:solidFill>
-                  <a:srgbClr val="C9D3F5"/>
+                  <a:srgbClr val="1F2429"/>
                 </a:solidFill>
                 <a:latin typeface="Courier New" pitchFamily="34" charset="0"/>
                 <a:ea typeface="Courier New" pitchFamily="34" charset="-122"/>
@@ -18573,7 +18633,7 @@
             <a:r>
               <a:rPr lang="en-US" sz="1400" dirty="0">
                 <a:solidFill>
-                  <a:srgbClr val="C9D3F5"/>
+                  <a:srgbClr val="1F2429"/>
                 </a:solidFill>
                 <a:latin typeface="Courier New" pitchFamily="34" charset="0"/>
                 <a:ea typeface="Courier New" pitchFamily="34" charset="-122"/>
@@ -18593,7 +18653,7 @@
             <a:r>
               <a:rPr lang="en-US" sz="1400" dirty="0">
                 <a:solidFill>
-                  <a:srgbClr val="C9D3F5"/>
+                  <a:srgbClr val="1F2429"/>
                 </a:solidFill>
                 <a:latin typeface="Courier New" pitchFamily="34" charset="0"/>
                 <a:ea typeface="Courier New" pitchFamily="34" charset="-122"/>
@@ -18613,7 +18673,7 @@
             <a:r>
               <a:rPr lang="en-US" sz="1400" dirty="0">
                 <a:solidFill>
-                  <a:srgbClr val="C9D3F5"/>
+                  <a:srgbClr val="1F2429"/>
                 </a:solidFill>
                 <a:latin typeface="Courier New" pitchFamily="34" charset="0"/>
                 <a:ea typeface="Courier New" pitchFamily="34" charset="-122"/>
@@ -18633,7 +18693,7 @@
             <a:r>
               <a:rPr lang="en-US" sz="1400" dirty="0">
                 <a:solidFill>
-                  <a:srgbClr val="C9D3F5"/>
+                  <a:srgbClr val="1F2429"/>
                 </a:solidFill>
                 <a:latin typeface="Courier New" pitchFamily="34" charset="0"/>
                 <a:ea typeface="Courier New" pitchFamily="34" charset="-122"/>
@@ -18653,7 +18713,7 @@
             <a:r>
               <a:rPr lang="en-US" sz="1400" dirty="0">
                 <a:solidFill>
-                  <a:srgbClr val="C9D3F5"/>
+                  <a:srgbClr val="1F2429"/>
                 </a:solidFill>
                 <a:latin typeface="Courier New" pitchFamily="34" charset="0"/>
                 <a:ea typeface="Courier New" pitchFamily="34" charset="-122"/>
@@ -18673,7 +18733,7 @@
             <a:r>
               <a:rPr lang="en-US" sz="1400" dirty="0">
                 <a:solidFill>
-                  <a:srgbClr val="C9D3F5"/>
+                  <a:srgbClr val="1F2429"/>
                 </a:solidFill>
                 <a:latin typeface="Courier New" pitchFamily="34" charset="0"/>
                 <a:ea typeface="Courier New" pitchFamily="34" charset="-122"/>
@@ -19659,9 +19719,13 @@
             </a:avLst>
           </a:prstGeom>
           <a:solidFill>
-            <a:srgbClr val="1E1E4C"/>
+            <a:srgbClr val="F7F8F9"/>
           </a:solidFill>
-          <a:ln/>
+          <a:ln w="9525">
+            <a:solidFill>
+              <a:srgbClr val="D0D5DD"/>
+            </a:solidFill>
+          </a:ln>
         </p:spPr>
         <p:txBody>
           <a:bodyPr/>
@@ -19698,7 +19762,7 @@
             <a:r>
               <a:rPr lang="en-US" sz="1400" dirty="0">
                 <a:solidFill>
-                  <a:srgbClr val="C9D3F5"/>
+                  <a:srgbClr val="1F2429"/>
                 </a:solidFill>
                 <a:latin typeface="Courier New" pitchFamily="34" charset="0"/>
                 <a:ea typeface="Courier New" pitchFamily="34" charset="-122"/>
@@ -19718,7 +19782,7 @@
             <a:r>
               <a:rPr lang="en-US" sz="1400" dirty="0">
                 <a:solidFill>
-                  <a:srgbClr val="C9D3F5"/>
+                  <a:srgbClr val="1F2429"/>
                 </a:solidFill>
                 <a:latin typeface="Courier New" pitchFamily="34" charset="0"/>
                 <a:ea typeface="Courier New" pitchFamily="34" charset="-122"/>
@@ -19738,7 +19802,7 @@
             <a:r>
               <a:rPr lang="en-US" sz="1400" dirty="0">
                 <a:solidFill>
-                  <a:srgbClr val="C9D3F5"/>
+                  <a:srgbClr val="1F2429"/>
                 </a:solidFill>
                 <a:latin typeface="Courier New" pitchFamily="34" charset="0"/>
                 <a:ea typeface="Courier New" pitchFamily="34" charset="-122"/>
@@ -19758,7 +19822,7 @@
             <a:r>
               <a:rPr lang="en-US" sz="1400" dirty="0">
                 <a:solidFill>
-                  <a:srgbClr val="C9D3F5"/>
+                  <a:srgbClr val="1F2429"/>
                 </a:solidFill>
                 <a:latin typeface="Courier New" pitchFamily="34" charset="0"/>
                 <a:ea typeface="Courier New" pitchFamily="34" charset="-122"/>
@@ -19979,9 +20043,13 @@
             </a:avLst>
           </a:prstGeom>
           <a:solidFill>
-            <a:srgbClr val="1E1E4C"/>
+            <a:srgbClr val="F7F8F9"/>
           </a:solidFill>
-          <a:ln/>
+          <a:ln w="9525">
+            <a:solidFill>
+              <a:srgbClr val="D0D5DD"/>
+            </a:solidFill>
+          </a:ln>
         </p:spPr>
         <p:txBody>
           <a:bodyPr/>
@@ -20018,7 +20086,7 @@
             <a:r>
               <a:rPr lang="en-US" sz="1250" dirty="0">
                 <a:solidFill>
-                  <a:srgbClr val="C9D3F5"/>
+                  <a:srgbClr val="1F2429"/>
                 </a:solidFill>
                 <a:latin typeface="Courier New" pitchFamily="34" charset="0"/>
                 <a:ea typeface="Courier New" pitchFamily="34" charset="-122"/>
@@ -20262,9 +20330,13 @@
             </a:avLst>
           </a:prstGeom>
           <a:solidFill>
-            <a:srgbClr val="1E1E4C"/>
+            <a:srgbClr val="F7F8F9"/>
           </a:solidFill>
-          <a:ln/>
+          <a:ln w="9525">
+            <a:solidFill>
+              <a:srgbClr val="D0D5DD"/>
+            </a:solidFill>
+          </a:ln>
         </p:spPr>
         <p:txBody>
           <a:bodyPr/>
@@ -20301,7 +20373,7 @@
             <a:r>
               <a:rPr lang="en-US" sz="1400" dirty="0">
                 <a:solidFill>
-                  <a:srgbClr val="C9D3F5"/>
+                  <a:srgbClr val="1F2429"/>
                 </a:solidFill>
                 <a:latin typeface="Courier New" pitchFamily="34" charset="0"/>
                 <a:ea typeface="Courier New" pitchFamily="34" charset="-122"/>
@@ -20321,7 +20393,7 @@
             <a:r>
               <a:rPr lang="en-US" sz="1400" dirty="0">
                 <a:solidFill>
-                  <a:srgbClr val="C9D3F5"/>
+                  <a:srgbClr val="1F2429"/>
                 </a:solidFill>
                 <a:latin typeface="Courier New" pitchFamily="34" charset="0"/>
                 <a:ea typeface="Courier New" pitchFamily="34" charset="-122"/>
@@ -20341,7 +20413,7 @@
             <a:r>
               <a:rPr lang="en-US" sz="1400" dirty="0">
                 <a:solidFill>
-                  <a:srgbClr val="C9D3F5"/>
+                  <a:srgbClr val="1F2429"/>
                 </a:solidFill>
                 <a:latin typeface="Courier New" pitchFamily="34" charset="0"/>
                 <a:ea typeface="Courier New" pitchFamily="34" charset="-122"/>
@@ -20361,7 +20433,7 @@
             <a:r>
               <a:rPr lang="en-US" sz="1400" dirty="0">
                 <a:solidFill>
-                  <a:srgbClr val="C9D3F5"/>
+                  <a:srgbClr val="1F2429"/>
                 </a:solidFill>
                 <a:latin typeface="Courier New" pitchFamily="34" charset="0"/>
                 <a:ea typeface="Courier New" pitchFamily="34" charset="-122"/>
@@ -20381,7 +20453,7 @@
             <a:r>
               <a:rPr lang="en-US" sz="1400" dirty="0">
                 <a:solidFill>
-                  <a:srgbClr val="C9D3F5"/>
+                  <a:srgbClr val="1F2429"/>
                 </a:solidFill>
                 <a:latin typeface="Courier New" pitchFamily="34" charset="0"/>
                 <a:ea typeface="Courier New" pitchFamily="34" charset="-122"/>
@@ -20401,7 +20473,7 @@
             <a:r>
               <a:rPr lang="en-US" sz="1400" dirty="0">
                 <a:solidFill>
-                  <a:srgbClr val="C9D3F5"/>
+                  <a:srgbClr val="1F2429"/>
                 </a:solidFill>
                 <a:latin typeface="Courier New" pitchFamily="34" charset="0"/>
                 <a:ea typeface="Courier New" pitchFamily="34" charset="-122"/>
@@ -20421,7 +20493,7 @@
             <a:r>
               <a:rPr lang="en-US" sz="1400" dirty="0">
                 <a:solidFill>
-                  <a:srgbClr val="C9D3F5"/>
+                  <a:srgbClr val="1F2429"/>
                 </a:solidFill>
                 <a:latin typeface="Courier New" pitchFamily="34" charset="0"/>
                 <a:ea typeface="Courier New" pitchFamily="34" charset="-122"/>
@@ -20441,7 +20513,7 @@
             <a:r>
               <a:rPr lang="en-US" sz="1400" dirty="0">
                 <a:solidFill>
-                  <a:srgbClr val="C9D3F5"/>
+                  <a:srgbClr val="1F2429"/>
                 </a:solidFill>
                 <a:latin typeface="Courier New" pitchFamily="34" charset="0"/>
                 <a:ea typeface="Courier New" pitchFamily="34" charset="-122"/>
@@ -20461,7 +20533,7 @@
             <a:r>
               <a:rPr lang="en-US" sz="1400" dirty="0">
                 <a:solidFill>
-                  <a:srgbClr val="C9D3F5"/>
+                  <a:srgbClr val="1F2429"/>
                 </a:solidFill>
                 <a:latin typeface="Courier New" pitchFamily="34" charset="0"/>
                 <a:ea typeface="Courier New" pitchFamily="34" charset="-122"/>
@@ -20889,7 +20961,7 @@
         <p:spPr>
           <a:xfrm>
             <a:off x="640080" y="1965960"/>
-            <a:ext cx="10911535" cy="2194560"/>
+            <a:ext cx="10911535" cy="3657600"/>
           </a:xfrm>
           <a:prstGeom prst="roundRect">
             <a:avLst>
@@ -20920,7 +20992,7 @@
         <p:spPr>
           <a:xfrm>
             <a:off x="868680" y="2103120"/>
-            <a:ext cx="10454335" cy="274320"/>
+            <a:ext cx="10454335" cy="400000"/>
           </a:xfrm>
           <a:prstGeom prst="rect">
             <a:avLst/>
@@ -20936,7 +21008,7 @@
               <a:buNone/>
             </a:pPr>
             <a:r>
-              <a:rPr lang="en-US" sz="1000" b="1" spc="200" kern="0" dirty="0">
+              <a:rPr lang="en-US" sz="1800" b="1" spc="200" kern="0" dirty="0">
                 <a:solidFill>
                   <a:srgbClr val="1F7A46"/>
                 </a:solidFill>
@@ -20946,7 +21018,7 @@
               </a:rPr>
               <a:t>TIP</a:t>
             </a:r>
-            <a:endParaRPr lang="en-US" sz="1000" dirty="0"/>
+            <a:endParaRPr lang="en-US" sz="1800" dirty="0"/>
           </a:p>
         </p:txBody>
       </p:sp>
@@ -20958,8 +21030,8 @@
         </p:nvSpPr>
         <p:spPr>
           <a:xfrm>
-            <a:off x="868680" y="2404872"/>
-            <a:ext cx="10454335" cy="1600200"/>
+            <a:off x="868680" y="2795960"/>
+            <a:ext cx="10454335" cy="2500000"/>
           </a:xfrm>
           <a:prstGeom prst="rect">
             <a:avLst/>
@@ -20968,14 +21040,14 @@
           <a:ln/>
         </p:spPr>
         <p:txBody>
-          <a:bodyPr wrap="square" lIns="0" tIns="0" rIns="0" bIns="0" rtlCol="0" anchor="t"/>
+          <a:bodyPr wrap="square" lIns="0" tIns="0" rIns="0" bIns="0" rtlCol="0" anchor="ctr"/>
           <a:lstStyle/>
           <a:p>
             <a:pPr indent="0" marL="0">
               <a:buNone/>
             </a:pPr>
             <a:r>
-              <a:rPr lang="en-US" sz="1250" dirty="0">
+              <a:rPr lang="en-US" sz="2800" dirty="0">
                 <a:solidFill>
                   <a:srgbClr val="26262F"/>
                 </a:solidFill>
@@ -20985,7 +21057,7 @@
               </a:rPr>
               <a:t>One file, many pages: every page links the same styles.css, so the whole site looks consistent and you edit one file to restyle it. Separation of concerns keeps HTML focused on content. Browsers cache the file, so pages after the first load faster. Designers and developers can work on CSS and HTML independently.</a:t>
             </a:r>
-            <a:endParaRPr lang="en-US" sz="1250" dirty="0"/>
+            <a:endParaRPr lang="en-US" sz="2800" dirty="0"/>
           </a:p>
         </p:txBody>
       </p:sp>
@@ -21159,9 +21231,13 @@
             </a:avLst>
           </a:prstGeom>
           <a:solidFill>
-            <a:srgbClr val="1E1E4C"/>
+            <a:srgbClr val="F7F8F9"/>
           </a:solidFill>
-          <a:ln/>
+          <a:ln w="9525">
+            <a:solidFill>
+              <a:srgbClr val="D0D5DD"/>
+            </a:solidFill>
+          </a:ln>
         </p:spPr>
         <p:txBody>
           <a:bodyPr/>
@@ -21198,7 +21274,7 @@
             <a:r>
               <a:rPr lang="en-US" sz="1250" dirty="0">
                 <a:solidFill>
-                  <a:srgbClr val="C9D3F5"/>
+                  <a:srgbClr val="1F2429"/>
                 </a:solidFill>
                 <a:latin typeface="Courier New" pitchFamily="34" charset="0"/>
                 <a:ea typeface="Courier New" pitchFamily="34" charset="-122"/>
@@ -21227,7 +21303,7 @@
             <a:r>
               <a:rPr lang="en-US" sz="1250" dirty="0">
                 <a:solidFill>
-                  <a:srgbClr val="C9D3F5"/>
+                  <a:srgbClr val="1F2429"/>
                 </a:solidFill>
                 <a:latin typeface="Courier New" pitchFamily="34" charset="0"/>
                 <a:ea typeface="Courier New" pitchFamily="34" charset="-122"/>
@@ -21247,7 +21323,7 @@
             <a:r>
               <a:rPr lang="en-US" sz="1250" dirty="0">
                 <a:solidFill>
-                  <a:srgbClr val="C9D3F5"/>
+                  <a:srgbClr val="1F2429"/>
                 </a:solidFill>
                 <a:latin typeface="Courier New" pitchFamily="34" charset="0"/>
                 <a:ea typeface="Courier New" pitchFamily="34" charset="-122"/>
@@ -21267,7 +21343,7 @@
             <a:r>
               <a:rPr lang="en-US" sz="1250" dirty="0">
                 <a:solidFill>
-                  <a:srgbClr val="C9D3F5"/>
+                  <a:srgbClr val="1F2429"/>
                 </a:solidFill>
                 <a:latin typeface="Courier New" pitchFamily="34" charset="0"/>
                 <a:ea typeface="Courier New" pitchFamily="34" charset="-122"/>
